--- a/docs/presentation/KSTAR_CES_졸논정리_논문흐름.pptx
+++ b/docs/presentation/KSTAR_CES_졸논정리_논문흐름.pptx
@@ -58,6 +58,15 @@
     <p:sldId id="303" r:id="rId54"/>
     <p:sldId id="304" r:id="rId55"/>
     <p:sldId id="305" r:id="rId56"/>
+    <p:sldId id="306" r:id="rId57"/>
+    <p:sldId id="307" r:id="rId58"/>
+    <p:sldId id="308" r:id="rId59"/>
+    <p:sldId id="309" r:id="rId60"/>
+    <p:sldId id="310" r:id="rId61"/>
+    <p:sldId id="311" r:id="rId62"/>
+    <p:sldId id="312" r:id="rId63"/>
+    <p:sldId id="313" r:id="rId64"/>
+    <p:sldId id="314" r:id="rId65"/>
   </p:sldIdLst>
   <p:sldSz cx="12192000" cy="6858000"/>
   <p:notesSz cx="6858000" cy="9144000"/>
@@ -3853,6 +3862,1266 @@
                 <a:cs typeface="맑은 고딕"/>
               </a:rPr>
               <a:t>sec:intro '기여' 열거. 논문은 아홉 항목이며 여기서는 다섯으로 묶었다.</a:t>
+            </a:r>
+          </a:p>
+        </p:txBody>
+      </p:sp>
+      <p:sp>
+        <p:nvSpPr>
+          <p:cNvPr id="4" name="Slide Number Placeholder 3"/>
+          <p:cNvSpPr>
+            <a:spLocks noGrp="1"/>
+          </p:cNvSpPr>
+          <p:nvPr>
+            <p:ph type="sldNum" idx="5" sz="quarter"/>
+          </p:nvPr>
+        </p:nvSpPr>
+        <p:spPr/>
+      </p:sp>
+    </p:spTree>
+  </p:cSld>
+  <p:clrMapOvr>
+    <a:masterClrMapping/>
+  </p:clrMapOvr>
+</p:notes>
+</file>
+
+<file path=ppt/notesSlides/notesSlide50.xml><?xml version="1.0" encoding="utf-8"?>
+<p:notes xmlns:a="http://schemas.openxmlformats.org/drawingml/2006/main" xmlns:p="http://schemas.openxmlformats.org/presentationml/2006/main" xmlns:r="http://schemas.openxmlformats.org/officeDocument/2006/relationships">
+  <p:cSld>
+    <p:spTree>
+      <p:nvGrpSpPr>
+        <p:cNvPr id="1" name=""/>
+        <p:cNvGrpSpPr/>
+        <p:nvPr/>
+      </p:nvGrpSpPr>
+      <p:grpSpPr>
+        <a:xfrm>
+          <a:off x="0" y="0"/>
+          <a:ext cx="0" cy="0"/>
+          <a:chOff x="0" y="0"/>
+          <a:chExt cx="0" cy="0"/>
+        </a:xfrm>
+      </p:grpSpPr>
+      <p:sp>
+        <p:nvSpPr>
+          <p:cNvPr id="2" name="Slide Image Placeholder 1"/>
+          <p:cNvSpPr>
+            <a:spLocks noGrp="1"/>
+          </p:cNvSpPr>
+          <p:nvPr>
+            <p:ph type="sldImg" idx="2"/>
+          </p:nvPr>
+        </p:nvSpPr>
+        <p:spPr/>
+      </p:sp>
+      <p:sp>
+        <p:nvSpPr>
+          <p:cNvPr id="3" name="Notes Placeholder 2"/>
+          <p:cNvSpPr>
+            <a:spLocks noGrp="1"/>
+          </p:cNvSpPr>
+          <p:nvPr>
+            <p:ph type="body" idx="3" sz="quarter"/>
+          </p:nvPr>
+        </p:nvSpPr>
+        <p:spPr/>
+        <p:txBody>
+          <a:bodyPr/>
+          <a:lstStyle/>
+          <a:p>
+            <a:r>
+              <a:rPr>
+                <a:ea typeface="맑은 고딕"/>
+                <a:cs typeface="맑은 고딕"/>
+              </a:rPr>
+              <a:t>부록 A. 시도한 모델의 계보와 닫은 이유, 그리고 2026-09-05 문헌 조사.</a:t>
+            </a:r>
+          </a:p>
+        </p:txBody>
+      </p:sp>
+      <p:sp>
+        <p:nvSpPr>
+          <p:cNvPr id="4" name="Slide Number Placeholder 3"/>
+          <p:cNvSpPr>
+            <a:spLocks noGrp="1"/>
+          </p:cNvSpPr>
+          <p:nvPr>
+            <p:ph type="sldNum" idx="5" sz="quarter"/>
+          </p:nvPr>
+        </p:nvSpPr>
+        <p:spPr/>
+      </p:sp>
+    </p:spTree>
+  </p:cSld>
+  <p:clrMapOvr>
+    <a:masterClrMapping/>
+  </p:clrMapOvr>
+</p:notes>
+</file>
+
+<file path=ppt/notesSlides/notesSlide51.xml><?xml version="1.0" encoding="utf-8"?>
+<p:notes xmlns:a="http://schemas.openxmlformats.org/drawingml/2006/main" xmlns:p="http://schemas.openxmlformats.org/presentationml/2006/main" xmlns:r="http://schemas.openxmlformats.org/officeDocument/2006/relationships">
+  <p:cSld>
+    <p:spTree>
+      <p:nvGrpSpPr>
+        <p:cNvPr id="1" name=""/>
+        <p:cNvGrpSpPr/>
+        <p:nvPr/>
+      </p:nvGrpSpPr>
+      <p:grpSpPr>
+        <a:xfrm>
+          <a:off x="0" y="0"/>
+          <a:ext cx="0" cy="0"/>
+          <a:chOff x="0" y="0"/>
+          <a:chExt cx="0" cy="0"/>
+        </a:xfrm>
+      </p:grpSpPr>
+      <p:sp>
+        <p:nvSpPr>
+          <p:cNvPr id="2" name="Slide Image Placeholder 1"/>
+          <p:cNvSpPr>
+            <a:spLocks noGrp="1"/>
+          </p:cNvSpPr>
+          <p:nvPr>
+            <p:ph type="sldImg" idx="2"/>
+          </p:nvPr>
+        </p:nvSpPr>
+        <p:spPr/>
+      </p:sp>
+      <p:sp>
+        <p:nvSpPr>
+          <p:cNvPr id="3" name="Notes Placeholder 2"/>
+          <p:cNvSpPr>
+            <a:spLocks noGrp="1"/>
+          </p:cNvSpPr>
+          <p:nvPr>
+            <p:ph type="body" idx="3" sz="quarter"/>
+          </p:nvPr>
+        </p:nvSpPr>
+        <p:spPr/>
+        <p:txBody>
+          <a:bodyPr/>
+          <a:lstStyle/>
+          <a:p>
+            <a:r>
+              <a:rPr>
+                <a:ea typeface="맑은 고딕"/>
+                <a:cs typeface="맑은 고딕"/>
+              </a:rPr>
+              <a:t>THESIS_RESULTS.md 8e / 8b.2 / 8f / 8k / 8u / 8x / 8ad.</a:t>
+            </a:r>
+          </a:p>
+        </p:txBody>
+      </p:sp>
+      <p:sp>
+        <p:nvSpPr>
+          <p:cNvPr id="4" name="Slide Number Placeholder 3"/>
+          <p:cNvSpPr>
+            <a:spLocks noGrp="1"/>
+          </p:cNvSpPr>
+          <p:nvPr>
+            <p:ph type="sldNum" idx="5" sz="quarter"/>
+          </p:nvPr>
+        </p:nvSpPr>
+        <p:spPr/>
+      </p:sp>
+    </p:spTree>
+  </p:cSld>
+  <p:clrMapOvr>
+    <a:masterClrMapping/>
+  </p:clrMapOvr>
+</p:notes>
+</file>
+
+<file path=ppt/notesSlides/notesSlide52.xml><?xml version="1.0" encoding="utf-8"?>
+<p:notes xmlns:a="http://schemas.openxmlformats.org/drawingml/2006/main" xmlns:p="http://schemas.openxmlformats.org/presentationml/2006/main" xmlns:r="http://schemas.openxmlformats.org/officeDocument/2006/relationships">
+  <p:cSld>
+    <p:spTree>
+      <p:nvGrpSpPr>
+        <p:cNvPr id="1" name=""/>
+        <p:cNvGrpSpPr/>
+        <p:nvPr/>
+      </p:nvGrpSpPr>
+      <p:grpSpPr>
+        <a:xfrm>
+          <a:off x="0" y="0"/>
+          <a:ext cx="0" cy="0"/>
+          <a:chOff x="0" y="0"/>
+          <a:chExt cx="0" cy="0"/>
+        </a:xfrm>
+      </p:grpSpPr>
+      <p:sp>
+        <p:nvSpPr>
+          <p:cNvPr id="2" name="Slide Image Placeholder 1"/>
+          <p:cNvSpPr>
+            <a:spLocks noGrp="1"/>
+          </p:cNvSpPr>
+          <p:nvPr>
+            <p:ph type="sldImg" idx="2"/>
+          </p:nvPr>
+        </p:nvSpPr>
+        <p:spPr/>
+      </p:sp>
+      <p:sp>
+        <p:nvSpPr>
+          <p:cNvPr id="3" name="Notes Placeholder 2"/>
+          <p:cNvSpPr>
+            <a:spLocks noGrp="1"/>
+          </p:cNvSpPr>
+          <p:nvPr>
+            <p:ph type="body" idx="3" sz="quarter"/>
+          </p:nvPr>
+        </p:nvSpPr>
+        <p:spPr/>
+        <p:txBody>
+          <a:bodyPr/>
+          <a:lstStyle/>
+          <a:p>
+            <a:r>
+              <a:rPr>
+                <a:ea typeface="맑은 고딕"/>
+                <a:cs typeface="맑은 고딕"/>
+              </a:rPr>
+              <a:t>8d / 8t / 8x / 8y / 8z / 8aa / 8ab / 8ai.</a:t>
+            </a:r>
+          </a:p>
+        </p:txBody>
+      </p:sp>
+      <p:sp>
+        <p:nvSpPr>
+          <p:cNvPr id="4" name="Slide Number Placeholder 3"/>
+          <p:cNvSpPr>
+            <a:spLocks noGrp="1"/>
+          </p:cNvSpPr>
+          <p:nvPr>
+            <p:ph type="sldNum" idx="5" sz="quarter"/>
+          </p:nvPr>
+        </p:nvSpPr>
+        <p:spPr/>
+      </p:sp>
+    </p:spTree>
+  </p:cSld>
+  <p:clrMapOvr>
+    <a:masterClrMapping/>
+  </p:clrMapOvr>
+</p:notes>
+</file>
+
+<file path=ppt/notesSlides/notesSlide53.xml><?xml version="1.0" encoding="utf-8"?>
+<p:notes xmlns:a="http://schemas.openxmlformats.org/drawingml/2006/main" xmlns:p="http://schemas.openxmlformats.org/presentationml/2006/main" xmlns:r="http://schemas.openxmlformats.org/officeDocument/2006/relationships">
+  <p:cSld>
+    <p:spTree>
+      <p:nvGrpSpPr>
+        <p:cNvPr id="1" name=""/>
+        <p:cNvGrpSpPr/>
+        <p:nvPr/>
+      </p:nvGrpSpPr>
+      <p:grpSpPr>
+        <a:xfrm>
+          <a:off x="0" y="0"/>
+          <a:ext cx="0" cy="0"/>
+          <a:chOff x="0" y="0"/>
+          <a:chExt cx="0" cy="0"/>
+        </a:xfrm>
+      </p:grpSpPr>
+      <p:sp>
+        <p:nvSpPr>
+          <p:cNvPr id="2" name="Slide Image Placeholder 1"/>
+          <p:cNvSpPr>
+            <a:spLocks noGrp="1"/>
+          </p:cNvSpPr>
+          <p:nvPr>
+            <p:ph type="sldImg" idx="2"/>
+          </p:nvPr>
+        </p:nvSpPr>
+        <p:spPr/>
+      </p:sp>
+      <p:sp>
+        <p:nvSpPr>
+          <p:cNvPr id="3" name="Notes Placeholder 2"/>
+          <p:cNvSpPr>
+            <a:spLocks noGrp="1"/>
+          </p:cNvSpPr>
+          <p:nvPr>
+            <p:ph type="body" idx="3" sz="quarter"/>
+          </p:nvPr>
+        </p:nvSpPr>
+        <p:spPr/>
+        <p:txBody>
+          <a:bodyPr/>
+          <a:lstStyle/>
+          <a:p>
+            <a:r>
+              <a:rPr>
+                <a:ea typeface="맑은 고딕"/>
+                <a:cs typeface="맑은 고딕"/>
+              </a:rPr>
+              <a:t>8ag / 8ai / 8ak / 8af / 8al / 8am 부록 / 8p / 8m / 8ap, 그리고 진행 중인 B.11.</a:t>
+            </a:r>
+          </a:p>
+        </p:txBody>
+      </p:sp>
+      <p:sp>
+        <p:nvSpPr>
+          <p:cNvPr id="4" name="Slide Number Placeholder 3"/>
+          <p:cNvSpPr>
+            <a:spLocks noGrp="1"/>
+          </p:cNvSpPr>
+          <p:nvPr>
+            <p:ph type="sldNum" idx="5" sz="quarter"/>
+          </p:nvPr>
+        </p:nvSpPr>
+        <p:spPr/>
+      </p:sp>
+    </p:spTree>
+  </p:cSld>
+  <p:clrMapOvr>
+    <a:masterClrMapping/>
+  </p:clrMapOvr>
+</p:notes>
+</file>
+
+<file path=ppt/notesSlides/notesSlide54.xml><?xml version="1.0" encoding="utf-8"?>
+<p:notes xmlns:a="http://schemas.openxmlformats.org/drawingml/2006/main" xmlns:p="http://schemas.openxmlformats.org/presentationml/2006/main" xmlns:r="http://schemas.openxmlformats.org/officeDocument/2006/relationships">
+  <p:cSld>
+    <p:spTree>
+      <p:nvGrpSpPr>
+        <p:cNvPr id="1" name=""/>
+        <p:cNvGrpSpPr/>
+        <p:nvPr/>
+      </p:nvGrpSpPr>
+      <p:grpSpPr>
+        <a:xfrm>
+          <a:off x="0" y="0"/>
+          <a:ext cx="0" cy="0"/>
+          <a:chOff x="0" y="0"/>
+          <a:chExt cx="0" cy="0"/>
+        </a:xfrm>
+      </p:grpSpPr>
+      <p:sp>
+        <p:nvSpPr>
+          <p:cNvPr id="2" name="Slide Image Placeholder 1"/>
+          <p:cNvSpPr>
+            <a:spLocks noGrp="1"/>
+          </p:cNvSpPr>
+          <p:nvPr>
+            <p:ph type="sldImg" idx="2"/>
+          </p:nvPr>
+        </p:nvSpPr>
+        <p:spPr/>
+      </p:sp>
+      <p:sp>
+        <p:nvSpPr>
+          <p:cNvPr id="3" name="Notes Placeholder 2"/>
+          <p:cNvSpPr>
+            <a:spLocks noGrp="1"/>
+          </p:cNvSpPr>
+          <p:nvPr>
+            <p:ph type="body" idx="3" sz="quarter"/>
+          </p:nvPr>
+        </p:nvSpPr>
+        <p:spPr/>
+        <p:txBody>
+          <a:bodyPr/>
+          <a:lstStyle/>
+          <a:p>
+            <a:r>
+              <a:rPr>
+                <a:ea typeface="맑은 고딕"/>
+                <a:cs typeface="맑은 고딕"/>
+              </a:rPr>
+              <a:t>2026-09-05 조사한 핵융합 12편의 요약이다.</a:t>
+            </a:r>
+          </a:p>
+          <a:p>
+            <a:r>
+              <a:rPr>
+                <a:ea typeface="맑은 고딕"/>
+                <a:cs typeface="맑은 고딕"/>
+              </a:rPr>
+              <a:t>조사일 2026-09-05. 출처:</a:t>
+            </a:r>
+          </a:p>
+          <a:p>
+            <a:r>
+              <a:rPr>
+                <a:ea typeface="맑은 고딕"/>
+                <a:cs typeface="맑은 고딕"/>
+              </a:rPr>
+              <a:t>- Diag2Diag: https://arxiv.org/html/2405.05908v4</a:t>
+            </a:r>
+          </a:p>
+          <a:p>
+            <a:r>
+              <a:rPr>
+                <a:ea typeface="맑은 고딕"/>
+                <a:cs typeface="맑은 고딕"/>
+              </a:rPr>
+              <a:t>- Diag2Diag Nat. Comm.: https://www.nature.com/articles/s41467-025-63492-1</a:t>
+            </a:r>
+          </a:p>
+          <a:p>
+            <a:r>
+              <a:rPr>
+                <a:ea typeface="맑은 고딕"/>
+                <a:cs typeface="맑은 고딕"/>
+              </a:rPr>
+              <a:t>- COMPASS 시간 초해상: https://iopscience.iop.org/article/10.1088/1361-6587/ae72c6</a:t>
+            </a:r>
+          </a:p>
+          <a:p>
+            <a:r>
+              <a:rPr>
+                <a:ea typeface="맑은 고딕"/>
+                <a:cs typeface="맑은 고딕"/>
+              </a:rPr>
+              <a:t>- FusionMAE: https://arxiv.org/abs/2509.12945</a:t>
+            </a:r>
+          </a:p>
+          <a:p>
+            <a:r>
+              <a:rPr>
+                <a:ea typeface="맑은 고딕"/>
+                <a:cs typeface="맑은 고딕"/>
+              </a:rPr>
+              <a:t>- TokaMind: https://arxiv.org/html/2602.15084v2</a:t>
+            </a:r>
+          </a:p>
+          <a:p>
+            <a:r>
+              <a:rPr>
+                <a:ea typeface="맑은 고딕"/>
+                <a:cs typeface="맑은 고딕"/>
+              </a:rPr>
+              <a:t>- TokaMark: https://arxiv.org/html/2602.10132v2</a:t>
+            </a:r>
+          </a:p>
+          <a:p>
+            <a:r>
+              <a:rPr>
+                <a:ea typeface="맑은 고딕"/>
+                <a:cs typeface="맑은 고딕"/>
+              </a:rPr>
+              <a:t>- PanoMHD: https://arxiv.org/html/2603.02672</a:t>
+            </a:r>
+          </a:p>
+          <a:p>
+            <a:r>
+              <a:rPr>
+                <a:ea typeface="맑은 고딕"/>
+                <a:cs typeface="맑은 고딕"/>
+              </a:rPr>
+              <a:t>- TCV 멀티모달 VAE: https://arxiv.org/abs/2504.17710</a:t>
+            </a:r>
+          </a:p>
+          <a:p>
+            <a:r>
+              <a:rPr>
+                <a:ea typeface="맑은 고딕"/>
+                <a:cs typeface="맑은 고딕"/>
+              </a:rPr>
+              <a:t>- EAST 지식증류: https://arxiv.org/html/2607.04241</a:t>
+            </a:r>
+          </a:p>
+          <a:p>
+            <a:r>
+              <a:rPr>
+                <a:ea typeface="맑은 고딕"/>
+                <a:cs typeface="맑은 고딕"/>
+              </a:rPr>
+              <a:t>- WEST: https://arxiv.org/html/2602.19110</a:t>
+            </a:r>
+          </a:p>
+          <a:p>
+            <a:r>
+              <a:rPr>
+                <a:ea typeface="맑은 고딕"/>
+                <a:cs typeface="맑은 고딕"/>
+              </a:rPr>
+              <a:t>- EAST XCS ANN: https://iopscience.iop.org/article/10.1088/1741-4326/ad73e8</a:t>
+            </a:r>
+          </a:p>
+          <a:p>
+            <a:r>
+              <a:rPr>
+                <a:ea typeface="맑은 고딕"/>
+                <a:cs typeface="맑은 고딕"/>
+              </a:rPr>
+              <a:t>- Abbate 2025: https://iopscience.iop.org/article/10.1088/1741-4326/adc283</a:t>
+            </a:r>
+          </a:p>
+          <a:p>
+            <a:r>
+              <a:rPr>
+                <a:ea typeface="맑은 고딕"/>
+                <a:cs typeface="맑은 고딕"/>
+              </a:rPr>
+              <a:t>- 합성 진단 증강: https://arxiv.org/abs/2606.08462</a:t>
+            </a:r>
+          </a:p>
+          <a:p>
+            <a:r>
+              <a:rPr>
+                <a:ea typeface="맑은 고딕"/>
+                <a:cs typeface="맑은 고딕"/>
+              </a:rPr>
+              <a:t>- TSI-Bench: https://arxiv.org/abs/2406.12747</a:t>
+            </a:r>
+          </a:p>
+          <a:p>
+            <a:r>
+              <a:rPr>
+                <a:ea typeface="맑은 고딕"/>
+                <a:cs typeface="맑은 고딕"/>
+              </a:rPr>
+              <a:t>- STDiff: https://arxiv.org/html/2508.19011v1</a:t>
+            </a:r>
+          </a:p>
+          <a:p>
+            <a:r>
+              <a:rPr>
+                <a:ea typeface="맑은 고딕"/>
+                <a:cs typeface="맑은 고딕"/>
+              </a:rPr>
+              <a:t>- iTimER: https://arxiv.org/html/2511.06854</a:t>
+            </a:r>
+          </a:p>
+          <a:p>
+            <a:r>
+              <a:rPr>
+                <a:ea typeface="맑은 고딕"/>
+                <a:cs typeface="맑은 고딕"/>
+              </a:rPr>
+              <a:t>- TimeXer: https://github.com/thuml/TimeXer</a:t>
+            </a:r>
+          </a:p>
+          <a:p>
+            <a:r>
+              <a:rPr>
+                <a:ea typeface="맑은 고딕"/>
+                <a:cs typeface="맑은 고딕"/>
+              </a:rPr>
+              <a:t>- TiRex-2: https://arxiv.org/html/2607.01204v1</a:t>
+            </a:r>
+          </a:p>
+          <a:p>
+            <a:r>
+              <a:rPr>
+                <a:ea typeface="맑은 고딕"/>
+                <a:cs typeface="맑은 고딕"/>
+              </a:rPr>
+              <a:t>- TabPFN-TS: https://arxiv.org/abs/2501.02945</a:t>
+            </a:r>
+          </a:p>
+          <a:p>
+            <a:r>
+              <a:rPr>
+                <a:ea typeface="맑은 고딕"/>
+                <a:cs typeface="맑은 고딕"/>
+              </a:rPr>
+              <a:t>- TSFM 벤치마크 경고: https://arxiv.org/html/2510.13654v1</a:t>
+            </a:r>
+          </a:p>
+          <a:p>
+            <a:r>
+              <a:rPr>
+                <a:ea typeface="맑은 고딕"/>
+                <a:cs typeface="맑은 고딕"/>
+              </a:rPr>
+              <a:t>- TimeMAE: https://arxiv.org/html/2303.00320v4</a:t>
+            </a:r>
+          </a:p>
+          <a:p>
+            <a:r>
+              <a:rPr>
+                <a:ea typeface="맑은 고딕"/>
+                <a:cs typeface="맑은 고딕"/>
+              </a:rPr>
+              <a:t>- TokEye: https://arxiv.org/pdf/2602.20317</a:t>
+            </a:r>
+          </a:p>
+          <a:p>
+            <a:r>
+              <a:rPr>
+                <a:ea typeface="맑은 고딕"/>
+                <a:cs typeface="맑은 고딕"/>
+              </a:rPr>
+              <a:t>- RG-ResMoE: https://arxiv.org/html/2608.12251v1</a:t>
+            </a:r>
+          </a:p>
+          <a:p>
+            <a:r>
+              <a:rPr>
+                <a:ea typeface="맑은 고딕"/>
+                <a:cs typeface="맑은 고딕"/>
+              </a:rPr>
+              <a:t>- KalmanNet: https://dl.acm.org/doi/abs/10.1109/tsp.2022.3158588</a:t>
+            </a:r>
+          </a:p>
+          <a:p>
+            <a:r>
+              <a:rPr>
+                <a:ea typeface="맑은 고딕"/>
+                <a:cs typeface="맑은 고딕"/>
+              </a:rPr>
+              <a:t>- DLFM: https://link.springer.com/article/10.1007/s10994-025-06824-y</a:t>
+            </a:r>
+          </a:p>
+          <a:p>
+            <a:r>
+              <a:rPr>
+                <a:ea typeface="맑은 고딕"/>
+                <a:cs typeface="맑은 고딕"/>
+              </a:rPr>
+              <a:t>- 이분산 회귀 병리: https://arxiv.org/pdf/2306.16717</a:t>
+            </a:r>
+          </a:p>
+          <a:p>
+            <a:r>
+              <a:rPr>
+                <a:ea typeface="맑은 고딕"/>
+                <a:cs typeface="맑은 고딕"/>
+              </a:rPr>
+              <a:t>- 반지도 VAE 회귀: https://arxiv.org/pdf/2211.05979</a:t>
+            </a:r>
+          </a:p>
+          <a:p>
+            <a:r>
+              <a:rPr>
+                <a:ea typeface="맑은 고딕"/>
+                <a:cs typeface="맑은 고딕"/>
+              </a:rPr>
+              <a:t>- GP-MIDAS: https://arxiv.org/html/2402.10574v2</a:t>
+            </a:r>
+          </a:p>
+          <a:p>
+            <a:r>
+              <a:rPr>
+                <a:ea typeface="맑은 고딕"/>
+                <a:cs typeface="맑은 고딕"/>
+              </a:rPr>
+              <a:t>- 저가 센서 보정: https://arxiv.org/html/2604.21527v1</a:t>
+            </a:r>
+          </a:p>
+          <a:p>
+            <a:r>
+              <a:rPr>
+                <a:ea typeface="맑은 고딕"/>
+                <a:cs typeface="맑은 고딕"/>
+              </a:rPr>
+              <a:t>- 커프리스 혈압 벤치마크: https://arxiv.org/html/2602.04725v1</a:t>
+            </a:r>
+          </a:p>
+          <a:p>
+            <a:r>
+              <a:rPr>
+                <a:ea typeface="맑은 고딕"/>
+                <a:cs typeface="맑은 고딕"/>
+              </a:rPr>
+              <a:t>- PiGGO: https://arxiv.org/pdf/2604.26593</a:t>
+            </a:r>
+          </a:p>
+          <a:p>
+            <a:r>
+              <a:rPr>
+                <a:ea typeface="맑은 고딕"/>
+                <a:cs typeface="맑은 고딕"/>
+              </a:rPr>
+              <a:t>- 멀티태스크 가상센서: https://arxiv.org/abs/2601.20634</a:t>
+            </a:r>
+          </a:p>
+        </p:txBody>
+      </p:sp>
+      <p:sp>
+        <p:nvSpPr>
+          <p:cNvPr id="4" name="Slide Number Placeholder 3"/>
+          <p:cNvSpPr>
+            <a:spLocks noGrp="1"/>
+          </p:cNvSpPr>
+          <p:nvPr>
+            <p:ph type="sldNum" idx="5" sz="quarter"/>
+          </p:nvPr>
+        </p:nvSpPr>
+        <p:spPr/>
+      </p:sp>
+    </p:spTree>
+  </p:cSld>
+  <p:clrMapOvr>
+    <a:masterClrMapping/>
+  </p:clrMapOvr>
+</p:notes>
+</file>
+
+<file path=ppt/notesSlides/notesSlide55.xml><?xml version="1.0" encoding="utf-8"?>
+<p:notes xmlns:a="http://schemas.openxmlformats.org/drawingml/2006/main" xmlns:p="http://schemas.openxmlformats.org/presentationml/2006/main" xmlns:r="http://schemas.openxmlformats.org/officeDocument/2006/relationships">
+  <p:cSld>
+    <p:spTree>
+      <p:nvGrpSpPr>
+        <p:cNvPr id="1" name=""/>
+        <p:cNvGrpSpPr/>
+        <p:nvPr/>
+      </p:nvGrpSpPr>
+      <p:grpSpPr>
+        <a:xfrm>
+          <a:off x="0" y="0"/>
+          <a:ext cx="0" cy="0"/>
+          <a:chOff x="0" y="0"/>
+          <a:chExt cx="0" cy="0"/>
+        </a:xfrm>
+      </p:grpSpPr>
+      <p:sp>
+        <p:nvSpPr>
+          <p:cNvPr id="2" name="Slide Image Placeholder 1"/>
+          <p:cNvSpPr>
+            <a:spLocks noGrp="1"/>
+          </p:cNvSpPr>
+          <p:nvPr>
+            <p:ph type="sldImg" idx="2"/>
+          </p:nvPr>
+        </p:nvSpPr>
+        <p:spPr/>
+      </p:sp>
+      <p:sp>
+        <p:nvSpPr>
+          <p:cNvPr id="3" name="Notes Placeholder 2"/>
+          <p:cNvSpPr>
+            <a:spLocks noGrp="1"/>
+          </p:cNvSpPr>
+          <p:nvPr>
+            <p:ph type="body" idx="3" sz="quarter"/>
+          </p:nvPr>
+        </p:nvSpPr>
+        <p:spPr/>
+        <p:txBody>
+          <a:bodyPr/>
+          <a:lstStyle/>
+          <a:p>
+            <a:r>
+              <a:rPr>
+                <a:ea typeface="맑은 고딕"/>
+                <a:cs typeface="맑은 고딕"/>
+              </a:rPr>
+              <a:t>마지막 열은 본 저장소의 통제 실험 판정이며, 새 계열을 도입하기 전에 이 열을 먼저 읽는다.</a:t>
+            </a:r>
+          </a:p>
+        </p:txBody>
+      </p:sp>
+      <p:sp>
+        <p:nvSpPr>
+          <p:cNvPr id="4" name="Slide Number Placeholder 3"/>
+          <p:cNvSpPr>
+            <a:spLocks noGrp="1"/>
+          </p:cNvSpPr>
+          <p:nvPr>
+            <p:ph type="sldNum" idx="5" sz="quarter"/>
+          </p:nvPr>
+        </p:nvSpPr>
+        <p:spPr/>
+      </p:sp>
+    </p:spTree>
+  </p:cSld>
+  <p:clrMapOvr>
+    <a:masterClrMapping/>
+  </p:clrMapOvr>
+</p:notes>
+</file>
+
+<file path=ppt/notesSlides/notesSlide56.xml><?xml version="1.0" encoding="utf-8"?>
+<p:notes xmlns:a="http://schemas.openxmlformats.org/drawingml/2006/main" xmlns:p="http://schemas.openxmlformats.org/presentationml/2006/main" xmlns:r="http://schemas.openxmlformats.org/officeDocument/2006/relationships">
+  <p:cSld>
+    <p:spTree>
+      <p:nvGrpSpPr>
+        <p:cNvPr id="1" name=""/>
+        <p:cNvGrpSpPr/>
+        <p:nvPr/>
+      </p:nvGrpSpPr>
+      <p:grpSpPr>
+        <a:xfrm>
+          <a:off x="0" y="0"/>
+          <a:ext cx="0" cy="0"/>
+          <a:chOff x="0" y="0"/>
+          <a:chExt cx="0" cy="0"/>
+        </a:xfrm>
+      </p:grpSpPr>
+      <p:sp>
+        <p:nvSpPr>
+          <p:cNvPr id="2" name="Slide Image Placeholder 1"/>
+          <p:cNvSpPr>
+            <a:spLocks noGrp="1"/>
+          </p:cNvSpPr>
+          <p:nvPr>
+            <p:ph type="sldImg" idx="2"/>
+          </p:nvPr>
+        </p:nvSpPr>
+        <p:spPr/>
+      </p:sp>
+      <p:sp>
+        <p:nvSpPr>
+          <p:cNvPr id="3" name="Notes Placeholder 2"/>
+          <p:cNvSpPr>
+            <a:spLocks noGrp="1"/>
+          </p:cNvSpPr>
+          <p:nvPr>
+            <p:ph type="body" idx="3" sz="quarter"/>
+          </p:nvPr>
+        </p:nvSpPr>
+        <p:spPr/>
+        <p:txBody>
+          <a:bodyPr/>
+          <a:lstStyle/>
+          <a:p>
+            <a:r>
+              <a:rPr>
+                <a:ea typeface="맑은 고딕"/>
+                <a:cs typeface="맑은 고딕"/>
+              </a:rPr>
+              <a:t>혼합주기 나우캐스팅 · 저가 센서 보정 · 커프리스 혈압 · 구조 가상 센싱 · 합성 진단 증강의 다섯 계열에서 같은 결론이 반복된다.</a:t>
+            </a:r>
+          </a:p>
+        </p:txBody>
+      </p:sp>
+      <p:sp>
+        <p:nvSpPr>
+          <p:cNvPr id="4" name="Slide Number Placeholder 3"/>
+          <p:cNvSpPr>
+            <a:spLocks noGrp="1"/>
+          </p:cNvSpPr>
+          <p:nvPr>
+            <p:ph type="sldNum" idx="5" sz="quarter"/>
+          </p:nvPr>
+        </p:nvSpPr>
+        <p:spPr/>
+      </p:sp>
+    </p:spTree>
+  </p:cSld>
+  <p:clrMapOvr>
+    <a:masterClrMapping/>
+  </p:clrMapOvr>
+</p:notes>
+</file>
+
+<file path=ppt/notesSlides/notesSlide57.xml><?xml version="1.0" encoding="utf-8"?>
+<p:notes xmlns:a="http://schemas.openxmlformats.org/drawingml/2006/main" xmlns:p="http://schemas.openxmlformats.org/presentationml/2006/main" xmlns:r="http://schemas.openxmlformats.org/officeDocument/2006/relationships">
+  <p:cSld>
+    <p:spTree>
+      <p:nvGrpSpPr>
+        <p:cNvPr id="1" name=""/>
+        <p:cNvGrpSpPr/>
+        <p:nvPr/>
+      </p:nvGrpSpPr>
+      <p:grpSpPr>
+        <a:xfrm>
+          <a:off x="0" y="0"/>
+          <a:ext cx="0" cy="0"/>
+          <a:chOff x="0" y="0"/>
+          <a:chExt cx="0" cy="0"/>
+        </a:xfrm>
+      </p:grpSpPr>
+      <p:sp>
+        <p:nvSpPr>
+          <p:cNvPr id="2" name="Slide Image Placeholder 1"/>
+          <p:cNvSpPr>
+            <a:spLocks noGrp="1"/>
+          </p:cNvSpPr>
+          <p:nvPr>
+            <p:ph type="sldImg" idx="2"/>
+          </p:nvPr>
+        </p:nvSpPr>
+        <p:spPr/>
+      </p:sp>
+      <p:sp>
+        <p:nvSpPr>
+          <p:cNvPr id="3" name="Notes Placeholder 2"/>
+          <p:cNvSpPr>
+            <a:spLocks noGrp="1"/>
+          </p:cNvSpPr>
+          <p:nvPr>
+            <p:ph type="body" idx="3" sz="quarter"/>
+          </p:nvPr>
+        </p:nvSpPr>
+        <p:spPr/>
+        <p:txBody>
+          <a:bodyPr/>
+          <a:lstStyle/>
+          <a:p>
+            <a:r>
+              <a:rPr>
+                <a:ea typeface="맑은 고딕"/>
+                <a:cs typeface="맑은 고딕"/>
+              </a:rPr>
+              <a:t>우선순위는 비용 대비 정보량 순이다.</a:t>
+            </a:r>
+          </a:p>
+          <a:p>
+            <a:r>
+              <a:rPr>
+                <a:ea typeface="맑은 고딕"/>
+                <a:cs typeface="맑은 고딕"/>
+              </a:rPr>
+              <a:t>조사일 2026-09-05. 출처:</a:t>
+            </a:r>
+          </a:p>
+          <a:p>
+            <a:r>
+              <a:rPr>
+                <a:ea typeface="맑은 고딕"/>
+                <a:cs typeface="맑은 고딕"/>
+              </a:rPr>
+              <a:t>- Diag2Diag: https://arxiv.org/html/2405.05908v4</a:t>
+            </a:r>
+          </a:p>
+          <a:p>
+            <a:r>
+              <a:rPr>
+                <a:ea typeface="맑은 고딕"/>
+                <a:cs typeface="맑은 고딕"/>
+              </a:rPr>
+              <a:t>- Diag2Diag Nat. Comm.: https://www.nature.com/articles/s41467-025-63492-1</a:t>
+            </a:r>
+          </a:p>
+          <a:p>
+            <a:r>
+              <a:rPr>
+                <a:ea typeface="맑은 고딕"/>
+                <a:cs typeface="맑은 고딕"/>
+              </a:rPr>
+              <a:t>- COMPASS 시간 초해상: https://iopscience.iop.org/article/10.1088/1361-6587/ae72c6</a:t>
+            </a:r>
+          </a:p>
+          <a:p>
+            <a:r>
+              <a:rPr>
+                <a:ea typeface="맑은 고딕"/>
+                <a:cs typeface="맑은 고딕"/>
+              </a:rPr>
+              <a:t>- FusionMAE: https://arxiv.org/abs/2509.12945</a:t>
+            </a:r>
+          </a:p>
+          <a:p>
+            <a:r>
+              <a:rPr>
+                <a:ea typeface="맑은 고딕"/>
+                <a:cs typeface="맑은 고딕"/>
+              </a:rPr>
+              <a:t>- TokaMind: https://arxiv.org/html/2602.15084v2</a:t>
+            </a:r>
+          </a:p>
+          <a:p>
+            <a:r>
+              <a:rPr>
+                <a:ea typeface="맑은 고딕"/>
+                <a:cs typeface="맑은 고딕"/>
+              </a:rPr>
+              <a:t>- TokaMark: https://arxiv.org/html/2602.10132v2</a:t>
+            </a:r>
+          </a:p>
+          <a:p>
+            <a:r>
+              <a:rPr>
+                <a:ea typeface="맑은 고딕"/>
+                <a:cs typeface="맑은 고딕"/>
+              </a:rPr>
+              <a:t>- PanoMHD: https://arxiv.org/html/2603.02672</a:t>
+            </a:r>
+          </a:p>
+          <a:p>
+            <a:r>
+              <a:rPr>
+                <a:ea typeface="맑은 고딕"/>
+                <a:cs typeface="맑은 고딕"/>
+              </a:rPr>
+              <a:t>- TCV 멀티모달 VAE: https://arxiv.org/abs/2504.17710</a:t>
+            </a:r>
+          </a:p>
+          <a:p>
+            <a:r>
+              <a:rPr>
+                <a:ea typeface="맑은 고딕"/>
+                <a:cs typeface="맑은 고딕"/>
+              </a:rPr>
+              <a:t>- EAST 지식증류: https://arxiv.org/html/2607.04241</a:t>
+            </a:r>
+          </a:p>
+          <a:p>
+            <a:r>
+              <a:rPr>
+                <a:ea typeface="맑은 고딕"/>
+                <a:cs typeface="맑은 고딕"/>
+              </a:rPr>
+              <a:t>- WEST: https://arxiv.org/html/2602.19110</a:t>
+            </a:r>
+          </a:p>
+          <a:p>
+            <a:r>
+              <a:rPr>
+                <a:ea typeface="맑은 고딕"/>
+                <a:cs typeface="맑은 고딕"/>
+              </a:rPr>
+              <a:t>- EAST XCS ANN: https://iopscience.iop.org/article/10.1088/1741-4326/ad73e8</a:t>
+            </a:r>
+          </a:p>
+          <a:p>
+            <a:r>
+              <a:rPr>
+                <a:ea typeface="맑은 고딕"/>
+                <a:cs typeface="맑은 고딕"/>
+              </a:rPr>
+              <a:t>- Abbate 2025: https://iopscience.iop.org/article/10.1088/1741-4326/adc283</a:t>
+            </a:r>
+          </a:p>
+          <a:p>
+            <a:r>
+              <a:rPr>
+                <a:ea typeface="맑은 고딕"/>
+                <a:cs typeface="맑은 고딕"/>
+              </a:rPr>
+              <a:t>- 합성 진단 증강: https://arxiv.org/abs/2606.08462</a:t>
+            </a:r>
+          </a:p>
+          <a:p>
+            <a:r>
+              <a:rPr>
+                <a:ea typeface="맑은 고딕"/>
+                <a:cs typeface="맑은 고딕"/>
+              </a:rPr>
+              <a:t>- TSI-Bench: https://arxiv.org/abs/2406.12747</a:t>
+            </a:r>
+          </a:p>
+          <a:p>
+            <a:r>
+              <a:rPr>
+                <a:ea typeface="맑은 고딕"/>
+                <a:cs typeface="맑은 고딕"/>
+              </a:rPr>
+              <a:t>- STDiff: https://arxiv.org/html/2508.19011v1</a:t>
+            </a:r>
+          </a:p>
+          <a:p>
+            <a:r>
+              <a:rPr>
+                <a:ea typeface="맑은 고딕"/>
+                <a:cs typeface="맑은 고딕"/>
+              </a:rPr>
+              <a:t>- iTimER: https://arxiv.org/html/2511.06854</a:t>
+            </a:r>
+          </a:p>
+          <a:p>
+            <a:r>
+              <a:rPr>
+                <a:ea typeface="맑은 고딕"/>
+                <a:cs typeface="맑은 고딕"/>
+              </a:rPr>
+              <a:t>- TimeXer: https://github.com/thuml/TimeXer</a:t>
+            </a:r>
+          </a:p>
+          <a:p>
+            <a:r>
+              <a:rPr>
+                <a:ea typeface="맑은 고딕"/>
+                <a:cs typeface="맑은 고딕"/>
+              </a:rPr>
+              <a:t>- TiRex-2: https://arxiv.org/html/2607.01204v1</a:t>
+            </a:r>
+          </a:p>
+          <a:p>
+            <a:r>
+              <a:rPr>
+                <a:ea typeface="맑은 고딕"/>
+                <a:cs typeface="맑은 고딕"/>
+              </a:rPr>
+              <a:t>- TabPFN-TS: https://arxiv.org/abs/2501.02945</a:t>
+            </a:r>
+          </a:p>
+          <a:p>
+            <a:r>
+              <a:rPr>
+                <a:ea typeface="맑은 고딕"/>
+                <a:cs typeface="맑은 고딕"/>
+              </a:rPr>
+              <a:t>- TSFM 벤치마크 경고: https://arxiv.org/html/2510.13654v1</a:t>
+            </a:r>
+          </a:p>
+          <a:p>
+            <a:r>
+              <a:rPr>
+                <a:ea typeface="맑은 고딕"/>
+                <a:cs typeface="맑은 고딕"/>
+              </a:rPr>
+              <a:t>- TimeMAE: https://arxiv.org/html/2303.00320v4</a:t>
+            </a:r>
+          </a:p>
+          <a:p>
+            <a:r>
+              <a:rPr>
+                <a:ea typeface="맑은 고딕"/>
+                <a:cs typeface="맑은 고딕"/>
+              </a:rPr>
+              <a:t>- TokEye: https://arxiv.org/pdf/2602.20317</a:t>
+            </a:r>
+          </a:p>
+          <a:p>
+            <a:r>
+              <a:rPr>
+                <a:ea typeface="맑은 고딕"/>
+                <a:cs typeface="맑은 고딕"/>
+              </a:rPr>
+              <a:t>- RG-ResMoE: https://arxiv.org/html/2608.12251v1</a:t>
+            </a:r>
+          </a:p>
+          <a:p>
+            <a:r>
+              <a:rPr>
+                <a:ea typeface="맑은 고딕"/>
+                <a:cs typeface="맑은 고딕"/>
+              </a:rPr>
+              <a:t>- KalmanNet: https://dl.acm.org/doi/abs/10.1109/tsp.2022.3158588</a:t>
+            </a:r>
+          </a:p>
+          <a:p>
+            <a:r>
+              <a:rPr>
+                <a:ea typeface="맑은 고딕"/>
+                <a:cs typeface="맑은 고딕"/>
+              </a:rPr>
+              <a:t>- DLFM: https://link.springer.com/article/10.1007/s10994-025-06824-y</a:t>
+            </a:r>
+          </a:p>
+          <a:p>
+            <a:r>
+              <a:rPr>
+                <a:ea typeface="맑은 고딕"/>
+                <a:cs typeface="맑은 고딕"/>
+              </a:rPr>
+              <a:t>- 이분산 회귀 병리: https://arxiv.org/pdf/2306.16717</a:t>
+            </a:r>
+          </a:p>
+          <a:p>
+            <a:r>
+              <a:rPr>
+                <a:ea typeface="맑은 고딕"/>
+                <a:cs typeface="맑은 고딕"/>
+              </a:rPr>
+              <a:t>- 반지도 VAE 회귀: https://arxiv.org/pdf/2211.05979</a:t>
+            </a:r>
+          </a:p>
+          <a:p>
+            <a:r>
+              <a:rPr>
+                <a:ea typeface="맑은 고딕"/>
+                <a:cs typeface="맑은 고딕"/>
+              </a:rPr>
+              <a:t>- GP-MIDAS: https://arxiv.org/html/2402.10574v2</a:t>
+            </a:r>
+          </a:p>
+          <a:p>
+            <a:r>
+              <a:rPr>
+                <a:ea typeface="맑은 고딕"/>
+                <a:cs typeface="맑은 고딕"/>
+              </a:rPr>
+              <a:t>- 저가 센서 보정: https://arxiv.org/html/2604.21527v1</a:t>
+            </a:r>
+          </a:p>
+          <a:p>
+            <a:r>
+              <a:rPr>
+                <a:ea typeface="맑은 고딕"/>
+                <a:cs typeface="맑은 고딕"/>
+              </a:rPr>
+              <a:t>- 커프리스 혈압 벤치마크: https://arxiv.org/html/2602.04725v1</a:t>
+            </a:r>
+          </a:p>
+          <a:p>
+            <a:r>
+              <a:rPr>
+                <a:ea typeface="맑은 고딕"/>
+                <a:cs typeface="맑은 고딕"/>
+              </a:rPr>
+              <a:t>- PiGGO: https://arxiv.org/pdf/2604.26593</a:t>
+            </a:r>
+          </a:p>
+          <a:p>
+            <a:r>
+              <a:rPr>
+                <a:ea typeface="맑은 고딕"/>
+                <a:cs typeface="맑은 고딕"/>
+              </a:rPr>
+              <a:t>- 멀티태스크 가상센서: https://arxiv.org/abs/2601.20634</a:t>
+            </a:r>
+          </a:p>
+        </p:txBody>
+      </p:sp>
+      <p:sp>
+        <p:nvSpPr>
+          <p:cNvPr id="4" name="Slide Number Placeholder 3"/>
+          <p:cNvSpPr>
+            <a:spLocks noGrp="1"/>
+          </p:cNvSpPr>
+          <p:nvPr>
+            <p:ph type="sldNum" idx="5" sz="quarter"/>
+          </p:nvPr>
+        </p:nvSpPr>
+        <p:spPr/>
+      </p:sp>
+    </p:spTree>
+  </p:cSld>
+  <p:clrMapOvr>
+    <a:masterClrMapping/>
+  </p:clrMapOvr>
+</p:notes>
+</file>
+
+<file path=ppt/notesSlides/notesSlide58.xml><?xml version="1.0" encoding="utf-8"?>
+<p:notes xmlns:a="http://schemas.openxmlformats.org/drawingml/2006/main" xmlns:p="http://schemas.openxmlformats.org/presentationml/2006/main" xmlns:r="http://schemas.openxmlformats.org/officeDocument/2006/relationships">
+  <p:cSld>
+    <p:spTree>
+      <p:nvGrpSpPr>
+        <p:cNvPr id="1" name=""/>
+        <p:cNvGrpSpPr/>
+        <p:nvPr/>
+      </p:nvGrpSpPr>
+      <p:grpSpPr>
+        <a:xfrm>
+          <a:off x="0" y="0"/>
+          <a:ext cx="0" cy="0"/>
+          <a:chOff x="0" y="0"/>
+          <a:chExt cx="0" cy="0"/>
+        </a:xfrm>
+      </p:grpSpPr>
+      <p:sp>
+        <p:nvSpPr>
+          <p:cNvPr id="2" name="Slide Image Placeholder 1"/>
+          <p:cNvSpPr>
+            <a:spLocks noGrp="1"/>
+          </p:cNvSpPr>
+          <p:nvPr>
+            <p:ph type="sldImg" idx="2"/>
+          </p:nvPr>
+        </p:nvSpPr>
+        <p:spPr/>
+      </p:sp>
+      <p:sp>
+        <p:nvSpPr>
+          <p:cNvPr id="3" name="Notes Placeholder 2"/>
+          <p:cNvSpPr>
+            <a:spLocks noGrp="1"/>
+          </p:cNvSpPr>
+          <p:nvPr>
+            <p:ph type="body" idx="3" sz="quarter"/>
+          </p:nvPr>
+        </p:nvSpPr>
+        <p:spPr/>
+        <p:txBody>
+          <a:bodyPr/>
+          <a:lstStyle/>
+          <a:p>
+            <a:r>
+              <a:rPr>
+                <a:ea typeface="맑은 고딕"/>
+                <a:cs typeface="맑은 고딕"/>
+              </a:rPr>
+              <a:t>음성 결과는 그것을 뒤집을 측정을 지목할 때만 결론으로 인정한다는 규칙을 따른다.</a:t>
             </a:r>
           </a:p>
         </p:txBody>
@@ -18870,6 +20139,4844 @@
                 <a:cs typeface="맑은 고딕"/>
               </a:rPr>
               <a:t>KSTAR 진단 데이터 641개 방전은 코드와 함께 재배포되지 않으며 운영 기관의 데이터 정책을 따른다. 저장소에는 shot 파일이 갖춰진 뒤 분석을 재현하는 데 필요한 모든 것이 들어 있다.</a:t>
+            </a:r>
+          </a:p>
+        </p:txBody>
+      </p:sp>
+    </p:spTree>
+  </p:cSld>
+  <p:clrMapOvr>
+    <a:masterClrMapping/>
+  </p:clrMapOvr>
+</p:sld>
+</file>
+
+<file path=ppt/slides/slide51.xml><?xml version="1.0" encoding="utf-8"?>
+<p:sld xmlns:a="http://schemas.openxmlformats.org/drawingml/2006/main" xmlns:p="http://schemas.openxmlformats.org/presentationml/2006/main" xmlns:r="http://schemas.openxmlformats.org/officeDocument/2006/relationships">
+  <p:cSld>
+    <p:spTree>
+      <p:nvGrpSpPr>
+        <p:cNvPr id="1" name=""/>
+        <p:cNvGrpSpPr/>
+        <p:nvPr/>
+      </p:nvGrpSpPr>
+      <p:grpSpPr/>
+      <p:sp>
+        <p:nvSpPr>
+          <p:cNvPr id="2" name="Title 1"/>
+          <p:cNvSpPr>
+            <a:spLocks noGrp="1"/>
+          </p:cNvSpPr>
+          <p:nvPr>
+            <p:ph type="title"/>
+          </p:nvPr>
+        </p:nvSpPr>
+        <p:spPr>
+          <a:xfrm>
+            <a:off x="4453128" y="1508760"/>
+            <a:ext cx="7296912" cy="3703320"/>
+          </a:xfrm>
+        </p:spPr>
+        <p:txBody>
+          <a:bodyPr wrap="square" anchor="ctr"/>
+          <a:lstStyle/>
+          <a:p>
+            <a:r>
+              <a:rPr b="0" sz="4800">
+                <a:solidFill>
+                  <a:schemeClr val="accent1"/>
+                </a:solidFill>
+                <a:ea typeface="맑은 고딕"/>
+                <a:cs typeface="맑은 고딕"/>
+              </a:rPr>
+              <a:t>Appendix</a:t>
+            </a:r>
+          </a:p>
+        </p:txBody>
+      </p:sp>
+    </p:spTree>
+  </p:cSld>
+  <p:clrMapOvr>
+    <a:masterClrMapping/>
+  </p:clrMapOvr>
+</p:sld>
+</file>
+
+<file path=ppt/slides/slide52.xml><?xml version="1.0" encoding="utf-8"?>
+<p:sld xmlns:a="http://schemas.openxmlformats.org/drawingml/2006/main" xmlns:p="http://schemas.openxmlformats.org/presentationml/2006/main" xmlns:r="http://schemas.openxmlformats.org/officeDocument/2006/relationships">
+  <p:cSld>
+    <p:spTree>
+      <p:nvGrpSpPr>
+        <p:cNvPr id="1" name=""/>
+        <p:cNvGrpSpPr/>
+        <p:nvPr/>
+      </p:nvGrpSpPr>
+      <p:grpSpPr/>
+      <p:sp>
+        <p:nvSpPr>
+          <p:cNvPr id="2" name="Title 1"/>
+          <p:cNvSpPr>
+            <a:spLocks noGrp="1"/>
+          </p:cNvSpPr>
+          <p:nvPr>
+            <p:ph type="title"/>
+          </p:nvPr>
+        </p:nvSpPr>
+        <p:spPr>
+          <a:xfrm>
+            <a:off x="585216" y="704088"/>
+            <a:ext cx="11027664" cy="1014984"/>
+          </a:xfrm>
+        </p:spPr>
+        <p:txBody>
+          <a:bodyPr wrap="square"/>
+          <a:lstStyle/>
+          <a:p>
+            <a:r>
+              <a:rPr b="0" sz="2800">
+                <a:ea typeface="맑은 고딕"/>
+                <a:cs typeface="맑은 고딕"/>
+              </a:rPr>
+              <a:t>시도한 모델의 계보와 닫은 이유 (1/3): 윈도 계열</a:t>
+            </a:r>
+          </a:p>
+        </p:txBody>
+      </p:sp>
+      <p:sp>
+        <p:nvSpPr>
+          <p:cNvPr id="3" name="TextBox 2"/>
+          <p:cNvSpPr txBox="1"/>
+          <p:nvPr/>
+        </p:nvSpPr>
+        <p:spPr>
+          <a:xfrm>
+            <a:off x="585216" y="2029967"/>
+            <a:ext cx="11027664" cy="297688"/>
+          </a:xfrm>
+          <a:prstGeom prst="rect">
+            <a:avLst/>
+          </a:prstGeom>
+          <a:noFill/>
+        </p:spPr>
+        <p:txBody>
+          <a:bodyPr wrap="square">
+            <a:spAutoFit/>
+          </a:bodyPr>
+          <a:lstStyle/>
+          <a:p>
+            <a:pPr>
+              <a:spcAft>
+                <a:spcPts val="300"/>
+              </a:spcAft>
+            </a:pPr>
+            <a:r>
+              <a:rPr sz="1300">
+                <a:ea typeface="맑은 고딕"/>
+                <a:cs typeface="맑은 고딕"/>
+              </a:rPr>
+              <a:t>아래는 W = 4 시대의 잠정 수치이며 확정 프로토콜의 주장에는 쓰지 않는다.</a:t>
+            </a:r>
+          </a:p>
+        </p:txBody>
+      </p:sp>
+      <p:graphicFrame>
+        <p:nvGraphicFramePr>
+          <p:cNvPr id="4" name="Table 3"/>
+          <p:cNvGraphicFramePr>
+            <a:graphicFrameLocks noGrp="1"/>
+          </p:cNvGraphicFramePr>
+          <p:nvPr/>
+        </p:nvGraphicFramePr>
+        <p:xfrm>
+          <a:off x="585216" y="2400807"/>
+          <a:ext cx="11027662" cy="2682240"/>
+        </p:xfrm>
+        <a:graphic>
+          <a:graphicData uri="http://schemas.openxmlformats.org/drawingml/2006/table">
+            <a:tbl>
+              <a:tblPr firstRow="1" bandRow="1">
+                <a:tableStyleId>{5C22544A-7EE6-4342-B048-85BDC9FD1C3A}</a:tableStyleId>
+              </a:tblPr>
+              <a:tblGrid>
+                <a:gridCol w="2642993"/>
+                <a:gridCol w="3189820"/>
+                <a:gridCol w="2734131"/>
+                <a:gridCol w="2460718"/>
+              </a:tblGrid>
+              <a:tr h="274320">
+                <a:tc>
+                  <a:txBody>
+                    <a:bodyPr wrap="square"/>
+                    <a:lstStyle/>
+                    <a:p>
+                      <a:r>
+                        <a:rPr sz="1100" b="1">
+                          <a:ea typeface="맑은 고딕"/>
+                          <a:cs typeface="맑은 고딕"/>
+                        </a:rPr>
+                        <a:t>모델 · 시도</a:t>
+                      </a:r>
+                    </a:p>
+                  </a:txBody>
+                  <a:tcPr marL="54864" marR="54864" marT="18288" marB="18288" anchor="ctr"/>
+                </a:tc>
+                <a:tc>
+                  <a:txBody>
+                    <a:bodyPr wrap="square"/>
+                    <a:lstStyle/>
+                    <a:p>
+                      <a:r>
+                        <a:rPr sz="1100" b="1">
+                          <a:ea typeface="맑은 고딕"/>
+                          <a:cs typeface="맑은 고딕"/>
+                        </a:rPr>
+                        <a:t>무엇을 바꿨나 (통제 변수)</a:t>
+                      </a:r>
+                    </a:p>
+                  </a:txBody>
+                  <a:tcPr marL="54864" marR="54864" marT="18288" marB="18288" anchor="ctr"/>
+                </a:tc>
+                <a:tc>
+                  <a:txBody>
+                    <a:bodyPr wrap="square"/>
+                    <a:lstStyle/>
+                    <a:p>
+                      <a:r>
+                        <a:rPr sz="1100" b="1">
+                          <a:ea typeface="맑은 고딕"/>
+                          <a:cs typeface="맑은 고딕"/>
+                        </a:rPr>
+                        <a:t>결과</a:t>
+                      </a:r>
+                    </a:p>
+                  </a:txBody>
+                  <a:tcPr marL="54864" marR="54864" marT="18288" marB="18288" anchor="ctr"/>
+                </a:tc>
+                <a:tc>
+                  <a:txBody>
+                    <a:bodyPr wrap="square"/>
+                    <a:lstStyle/>
+                    <a:p>
+                      <a:r>
+                        <a:rPr sz="1100" b="1">
+                          <a:ea typeface="맑은 고딕"/>
+                          <a:cs typeface="맑은 고딕"/>
+                        </a:rPr>
+                        <a:t>닫은 이유 · 근거</a:t>
+                      </a:r>
+                    </a:p>
+                  </a:txBody>
+                  <a:tcPr marL="54864" marR="54864" marT="18288" marB="18288" anchor="ctr"/>
+                </a:tc>
+              </a:tr>
+              <a:tr h="401320">
+                <a:tc>
+                  <a:txBody>
+                    <a:bodyPr wrap="square"/>
+                    <a:lstStyle/>
+                    <a:p>
+                      <a:r>
+                        <a:rPr sz="1100" b="0">
+                          <a:ea typeface="맑은 고딕"/>
+                          <a:cs typeface="맑은 고딕"/>
+                        </a:rPr>
+                        <a:t>AutoML 윈도 계열 iter2 → iter9 (GRU + 관측마스킹 multi-head attention)</a:t>
+                      </a:r>
+                    </a:p>
+                  </a:txBody>
+                  <a:tcPr marL="54864" marR="54864" marT="18288" marB="18288" anchor="ctr"/>
+                </a:tc>
+                <a:tc>
+                  <a:txBody>
+                    <a:bodyPr wrap="square"/>
+                    <a:lstStyle/>
+                    <a:p>
+                      <a:r>
+                        <a:rPr sz="1100" b="0">
+                          <a:ea typeface="맑은 고딕"/>
+                          <a:cs typeface="맑은 고딕"/>
+                        </a:rPr>
+                        <a:t>18회 자동 탐색. Pre-LN · attention pooling은 채택, 용량 확대 · skip 변형 · 국소 1D conv는 열화</a:t>
+                      </a:r>
+                    </a:p>
+                  </a:txBody>
+                  <a:tcPr marL="54864" marR="54864" marT="18288" marB="18288" anchor="ctr"/>
+                </a:tc>
+                <a:tc>
+                  <a:txBody>
+                    <a:bodyPr wrap="square"/>
+                    <a:lstStyle/>
+                    <a:p>
+                      <a:r>
+                        <a:rPr sz="1100" b="0">
+                          <a:ea typeface="맑은 고딕"/>
+                          <a:cs typeface="맑은 고딕"/>
+                        </a:rPr>
+                        <a:t>iter7의 val 0.483이 최선이었고 이후의 복잡도 증가는 열화하였다</a:t>
+                      </a:r>
+                    </a:p>
+                  </a:txBody>
+                  <a:tcPr marL="54864" marR="54864" marT="18288" marB="18288" anchor="ctr"/>
+                </a:tc>
+                <a:tc>
+                  <a:txBody>
+                    <a:bodyPr wrap="square"/>
+                    <a:lstStyle/>
+                    <a:p>
+                      <a:r>
+                        <a:rPr sz="1100" b="0">
+                          <a:ea typeface="맑은 고딕"/>
+                          <a:cs typeface="맑은 고딕"/>
+                        </a:rPr>
+                        <a:t>W = 2 윈도 대조군으로 강등 (§8u · §8x)</a:t>
+                      </a:r>
+                    </a:p>
+                  </a:txBody>
+                  <a:tcPr marL="54864" marR="54864" marT="18288" marB="18288" anchor="ctr"/>
+                </a:tc>
+              </a:tr>
+              <a:tr h="401320">
+                <a:tc>
+                  <a:txBody>
+                    <a:bodyPr wrap="square"/>
+                    <a:lstStyle/>
+                    <a:p>
+                      <a:r>
+                        <a:rPr sz="1100" b="0">
+                          <a:ea typeface="맑은 고딕"/>
+                          <a:cs typeface="맑은 고딕"/>
+                        </a:rPr>
+                        <a:t>연속시간 인코더 4종 (GRU-D형 감쇠 · ODE-RNN · Neural CDE · Δt 대각 SSM)</a:t>
+                      </a:r>
+                    </a:p>
+                  </a:txBody>
+                  <a:tcPr marL="54864" marR="54864" marT="18288" marB="18288" anchor="ctr"/>
+                </a:tc>
+                <a:tc>
+                  <a:txBody>
+                    <a:bodyPr wrap="square"/>
+                    <a:lstStyle/>
+                    <a:p>
+                      <a:r>
+                        <a:rPr sz="1100" b="0">
+                          <a:ea typeface="맑은 고딕"/>
+                          <a:cs typeface="맑은 고딕"/>
+                        </a:rPr>
+                        <a:t>이력 인코더만 교체, 4분할 짝지음 bootstrap</a:t>
+                      </a:r>
+                    </a:p>
+                  </a:txBody>
+                  <a:tcPr marL="54864" marR="54864" marT="18288" marB="18288" anchor="ctr"/>
+                </a:tc>
+                <a:tc>
+                  <a:txBody>
+                    <a:bodyPr wrap="square"/>
+                    <a:lstStyle/>
+                    <a:p>
+                      <a:r>
+                        <a:rPr sz="1100" b="0">
+                          <a:ea typeface="맑은 고딕"/>
+                          <a:cs typeface="맑은 고딕"/>
+                        </a:rPr>
+                        <a:t>KEEP 없음. NCDE · SSM은 유의 열세 seed가 생겼다</a:t>
+                      </a:r>
+                    </a:p>
+                  </a:txBody>
+                  <a:tcPr marL="54864" marR="54864" marT="18288" marB="18288" anchor="ctr"/>
+                </a:tc>
+                <a:tc>
+                  <a:txBody>
+                    <a:bodyPr wrap="square"/>
+                    <a:lstStyle/>
+                    <a:p>
+                      <a:r>
+                        <a:rPr sz="1100" b="0">
+                          <a:ea typeface="맑은 고딕"/>
+                          <a:cs typeface="맑은 고딕"/>
+                        </a:rPr>
+                        <a:t>규칙 10 ms 격자에서 Δt 진화는 정보를 더하지 않는다 (§8e, 코드 제거)</a:t>
+                      </a:r>
+                    </a:p>
+                  </a:txBody>
+                  <a:tcPr marL="54864" marR="54864" marT="18288" marB="18288" anchor="ctr"/>
+                </a:tc>
+              </a:tr>
+              <a:tr h="401320">
+                <a:tc>
+                  <a:txBody>
+                    <a:bodyPr wrap="square"/>
+                    <a:lstStyle/>
+                    <a:p>
+                      <a:r>
+                        <a:rPr sz="1100" b="0">
+                          <a:ea typeface="맑은 고딕"/>
+                          <a:cs typeface="맑은 고딕"/>
+                        </a:rPr>
+                        <a:t>파생 Mirnov 특징 (적분 · PCHIP 적분 · |MC| · 이동 RMS)</a:t>
+                      </a:r>
+                    </a:p>
+                  </a:txBody>
+                  <a:tcPr marL="54864" marR="54864" marT="18288" marB="18288" anchor="ctr"/>
+                </a:tc>
+                <a:tc>
+                  <a:txBody>
+                    <a:bodyPr wrap="square"/>
+                    <a:lstStyle/>
+                    <a:p>
+                      <a:r>
+                        <a:rPr sz="1100" b="0">
+                          <a:ea typeface="맑은 고딕"/>
+                          <a:cs typeface="맑은 고딕"/>
+                        </a:rPr>
+                        <a:t>입력 특징만 추가</a:t>
+                      </a:r>
+                    </a:p>
+                  </a:txBody>
+                  <a:tcPr marL="54864" marR="54864" marT="18288" marB="18288" anchor="ctr"/>
+                </a:tc>
+                <a:tc>
+                  <a:txBody>
+                    <a:bodyPr wrap="square"/>
+                    <a:lstStyle/>
+                    <a:p>
+                      <a:r>
+                        <a:rPr sz="1100" b="0">
+                          <a:ea typeface="맑은 고딕"/>
+                          <a:cs typeface="맑은 고딕"/>
+                        </a:rPr>
+                        <a:t>4 seed 짝지음에서 전부 무효</a:t>
+                      </a:r>
+                    </a:p>
+                  </a:txBody>
+                  <a:tcPr marL="54864" marR="54864" marT="18288" marB="18288" anchor="ctr"/>
+                </a:tc>
+                <a:tc>
+                  <a:txBody>
+                    <a:bodyPr wrap="square"/>
+                    <a:lstStyle/>
+                    <a:p>
+                      <a:r>
+                        <a:rPr sz="1100" b="0">
+                          <a:ea typeface="맑은 고딕"/>
+                          <a:cs typeface="맑은 고딕"/>
+                        </a:rPr>
+                        <a:t>앨리어싱으로 이미 잃은 정보는 하류에서 복원되지 않는다 (§8b.2)</a:t>
+                      </a:r>
+                    </a:p>
+                  </a:txBody>
+                  <a:tcPr marL="54864" marR="54864" marT="18288" marB="18288" anchor="ctr"/>
+                </a:tc>
+              </a:tr>
+              <a:tr h="401320">
+                <a:tc>
+                  <a:txBody>
+                    <a:bodyPr wrap="square"/>
+                    <a:lstStyle/>
+                    <a:p>
+                      <a:r>
+                        <a:rPr sz="1100" b="0">
+                          <a:ea typeface="맑은 고딕"/>
+                          <a:cs typeface="맑은 고딕"/>
+                        </a:rPr>
+                        <a:t>윈도 크기 스윕 W = 0 ... 6 (24 run × 2)</a:t>
+                      </a:r>
+                    </a:p>
+                  </a:txBody>
+                  <a:tcPr marL="54864" marR="54864" marT="18288" marB="18288" anchor="ctr"/>
+                </a:tc>
+                <a:tc>
+                  <a:txBody>
+                    <a:bodyPr wrap="square"/>
+                    <a:lstStyle/>
+                    <a:p>
+                      <a:r>
+                        <a:rPr sz="1100" b="0">
+                          <a:ea typeface="맑은 고딕"/>
+                          <a:cs typeface="맑은 고딕"/>
+                        </a:rPr>
+                        <a:t>과거 CES 관측 수</a:t>
+                      </a:r>
+                    </a:p>
+                  </a:txBody>
+                  <a:tcPr marL="54864" marR="54864" marT="18288" marB="18288" anchor="ctr"/>
+                </a:tc>
+                <a:tc>
+                  <a:txBody>
+                    <a:bodyPr wrap="square"/>
+                    <a:lstStyle/>
+                    <a:p>
+                      <a:r>
+                        <a:rPr sz="1100" b="0">
+                          <a:ea typeface="맑은 고딕"/>
+                          <a:cs typeface="맑은 고딕"/>
+                        </a:rPr>
+                        <a:t>Tᵢ는 W = 2에서 plateau, history 0은 붕괴</a:t>
+                      </a:r>
+                    </a:p>
+                  </a:txBody>
+                  <a:tcPr marL="54864" marR="54864" marT="18288" marB="18288" anchor="ctr"/>
+                </a:tc>
+                <a:tc>
+                  <a:txBody>
+                    <a:bodyPr wrap="square"/>
+                    <a:lstStyle/>
+                    <a:p>
+                      <a:r>
+                        <a:rPr sz="1100" b="0">
+                          <a:ea typeface="맑은 고딕"/>
+                          <a:cs typeface="맑은 고딕"/>
+                        </a:rPr>
+                        <a:t>W = 4는 정당화되지 않아 확정 프로토콜은 W = 2 (§8f)</a:t>
+                      </a:r>
+                    </a:p>
+                  </a:txBody>
+                  <a:tcPr marL="54864" marR="54864" marT="18288" marB="18288" anchor="ctr"/>
+                </a:tc>
+              </a:tr>
+              <a:tr h="401320">
+                <a:tc>
+                  <a:txBody>
+                    <a:bodyPr wrap="square"/>
+                    <a:lstStyle/>
+                    <a:p>
+                      <a:r>
+                        <a:rPr sz="1100" b="0">
+                          <a:ea typeface="맑은 고딕"/>
+                          <a:cs typeface="맑은 고딕"/>
+                        </a:rPr>
+                        <a:t>명명항 anchor + Δ (1,258 파라미터)</a:t>
+                      </a:r>
+                    </a:p>
+                  </a:txBody>
+                  <a:tcPr marL="54864" marR="54864" marT="18288" marB="18288" anchor="ctr"/>
+                </a:tc>
+                <a:tc>
+                  <a:txBody>
+                    <a:bodyPr wrap="square"/>
+                    <a:lstStyle/>
+                    <a:p>
+                      <a:r>
+                        <a:rPr sz="1100" b="0">
+                          <a:ea typeface="맑은 고딕"/>
+                          <a:cs typeface="맑은 고딕"/>
+                        </a:rPr>
+                        <a:t>완전히 설명 가능한 선형 항만 남김</a:t>
+                      </a:r>
+                    </a:p>
+                  </a:txBody>
+                  <a:tcPr marL="54864" marR="54864" marT="18288" marB="18288" anchor="ctr"/>
+                </a:tc>
+                <a:tc>
+                  <a:txBody>
+                    <a:bodyPr wrap="square"/>
+                    <a:lstStyle/>
+                    <a:p>
+                      <a:r>
+                        <a:rPr sz="1100" b="0">
+                          <a:ea typeface="맑은 고딕"/>
+                          <a:cs typeface="맑은 고딕"/>
+                        </a:rPr>
+                        <a:t>W = 4 여백의 31.5 %를 회복</a:t>
+                      </a:r>
+                    </a:p>
+                  </a:txBody>
+                  <a:tcPr marL="54864" marR="54864" marT="18288" marB="18288" anchor="ctr"/>
+                </a:tc>
+                <a:tc>
+                  <a:txBody>
+                    <a:bodyPr wrap="square"/>
+                    <a:lstStyle/>
+                    <a:p>
+                      <a:r>
+                        <a:rPr sz="1100" b="0">
+                          <a:ea typeface="맑은 고딕"/>
+                          <a:cs typeface="맑은 고딕"/>
+                        </a:rPr>
+                        <a:t>W = 2에서는 persistence로 붕괴 (§8k · §8z)</a:t>
+                      </a:r>
+                    </a:p>
+                  </a:txBody>
+                  <a:tcPr marL="54864" marR="54864" marT="18288" marB="18288" anchor="ctr"/>
+                </a:tc>
+              </a:tr>
+              <a:tr h="401320">
+                <a:tc>
+                  <a:txBody>
+                    <a:bodyPr wrap="square"/>
+                    <a:lstStyle/>
+                    <a:p>
+                      <a:r>
+                        <a:rPr sz="1100" b="0">
+                          <a:ea typeface="맑은 고딕"/>
+                          <a:cs typeface="맑은 고딕"/>
+                        </a:rPr>
+                        <a:t>W-SLIM (25,602 파라미터로 축소한 윈도 모델)</a:t>
+                      </a:r>
+                    </a:p>
+                  </a:txBody>
+                  <a:tcPr marL="54864" marR="54864" marT="18288" marB="18288" anchor="ctr"/>
+                </a:tc>
+                <a:tc>
+                  <a:txBody>
+                    <a:bodyPr wrap="square"/>
+                    <a:lstStyle/>
+                    <a:p>
+                      <a:r>
+                        <a:rPr sz="1100" b="0">
+                          <a:ea typeface="맑은 고딕"/>
+                          <a:cs typeface="맑은 고딕"/>
+                        </a:rPr>
+                        <a:t>CES_MODEL_FILE 하나</a:t>
+                      </a:r>
+                    </a:p>
+                  </a:txBody>
+                  <a:tcPr marL="54864" marR="54864" marT="18288" marB="18288" anchor="ctr"/>
+                </a:tc>
+                <a:tc>
+                  <a:txBody>
+                    <a:bodyPr wrap="square"/>
+                    <a:lstStyle/>
+                    <a:p>
+                      <a:r>
+                        <a:rPr sz="1100" b="0">
+                          <a:ea typeface="맑은 고딕"/>
+                          <a:cs typeface="맑은 고딕"/>
+                        </a:rPr>
+                        <a:t>Tᵢ -0.087, 4/4 유의 열세. V_rot는 무차이</a:t>
+                      </a:r>
+                    </a:p>
+                  </a:txBody>
+                  <a:tcPr marL="54864" marR="54864" marT="18288" marB="18288" anchor="ctr"/>
+                </a:tc>
+                <a:tc>
+                  <a:txBody>
+                    <a:bodyPr wrap="square"/>
+                    <a:lstStyle/>
+                    <a:p>
+                      <a:r>
+                        <a:rPr sz="1100" b="0">
+                          <a:ea typeface="맑은 고딕"/>
+                          <a:cs typeface="맑은 고딕"/>
+                        </a:rPr>
+                        <a:t>구조가 값을 하므로 비채택 (§8ad)</a:t>
+                      </a:r>
+                    </a:p>
+                  </a:txBody>
+                  <a:tcPr marL="54864" marR="54864" marT="18288" marB="18288" anchor="ctr"/>
+                </a:tc>
+              </a:tr>
+            </a:tbl>
+          </a:graphicData>
+        </a:graphic>
+      </p:graphicFrame>
+    </p:spTree>
+  </p:cSld>
+  <p:clrMapOvr>
+    <a:masterClrMapping/>
+  </p:clrMapOvr>
+</p:sld>
+</file>
+
+<file path=ppt/slides/slide53.xml><?xml version="1.0" encoding="utf-8"?>
+<p:sld xmlns:a="http://schemas.openxmlformats.org/drawingml/2006/main" xmlns:p="http://schemas.openxmlformats.org/presentationml/2006/main" xmlns:r="http://schemas.openxmlformats.org/officeDocument/2006/relationships">
+  <p:cSld>
+    <p:spTree>
+      <p:nvGrpSpPr>
+        <p:cNvPr id="1" name=""/>
+        <p:cNvGrpSpPr/>
+        <p:nvPr/>
+      </p:nvGrpSpPr>
+      <p:grpSpPr/>
+      <p:sp>
+        <p:nvSpPr>
+          <p:cNvPr id="2" name="Title 1"/>
+          <p:cNvSpPr>
+            <a:spLocks noGrp="1"/>
+          </p:cNvSpPr>
+          <p:nvPr>
+            <p:ph type="title"/>
+          </p:nvPr>
+        </p:nvSpPr>
+        <p:spPr>
+          <a:xfrm>
+            <a:off x="585216" y="704088"/>
+            <a:ext cx="11027664" cy="1014984"/>
+          </a:xfrm>
+        </p:spPr>
+        <p:txBody>
+          <a:bodyPr wrap="square"/>
+          <a:lstStyle/>
+          <a:p>
+            <a:r>
+              <a:rPr b="0" sz="2800">
+                <a:ea typeface="맑은 고딕"/>
+                <a:cs typeface="맑은 고딕"/>
+              </a:rPr>
+              <a:t>시도한 모델의 계보와 닫은 이유 (2/3): 시퀀스 계열</a:t>
+            </a:r>
+          </a:p>
+        </p:txBody>
+      </p:sp>
+      <p:sp>
+        <p:nvSpPr>
+          <p:cNvPr id="3" name="TextBox 2"/>
+          <p:cNvSpPr txBox="1"/>
+          <p:nvPr/>
+        </p:nvSpPr>
+        <p:spPr>
+          <a:xfrm>
+            <a:off x="585216" y="2029967"/>
+            <a:ext cx="11027664" cy="297688"/>
+          </a:xfrm>
+          <a:prstGeom prst="rect">
+            <a:avLst/>
+          </a:prstGeom>
+          <a:noFill/>
+        </p:spPr>
+        <p:txBody>
+          <a:bodyPr wrap="square">
+            <a:spAutoFit/>
+          </a:bodyPr>
+          <a:lstStyle/>
+          <a:p>
+            <a:pPr>
+              <a:spcAft>
+                <a:spcPts val="300"/>
+              </a:spcAft>
+            </a:pPr>
+            <a:r>
+              <a:rPr sz="1300">
+                <a:ea typeface="맑은 고딕"/>
+                <a:cs typeface="맑은 고딕"/>
+              </a:rPr>
+              <a:t>확정 프로토콜(W = 2 · held-free · 두 공동 1차 모집단) 아래에서 짝지어 채점하였다.</a:t>
+            </a:r>
+          </a:p>
+        </p:txBody>
+      </p:sp>
+      <p:graphicFrame>
+        <p:nvGraphicFramePr>
+          <p:cNvPr id="4" name="Table 3"/>
+          <p:cNvGraphicFramePr>
+            <a:graphicFrameLocks noGrp="1"/>
+          </p:cNvGraphicFramePr>
+          <p:nvPr/>
+        </p:nvGraphicFramePr>
+        <p:xfrm>
+          <a:off x="585216" y="2400807"/>
+          <a:ext cx="11027662" cy="2682240"/>
+        </p:xfrm>
+        <a:graphic>
+          <a:graphicData uri="http://schemas.openxmlformats.org/drawingml/2006/table">
+            <a:tbl>
+              <a:tblPr firstRow="1" bandRow="1">
+                <a:tableStyleId>{5C22544A-7EE6-4342-B048-85BDC9FD1C3A}</a:tableStyleId>
+              </a:tblPr>
+              <a:tblGrid>
+                <a:gridCol w="2642993"/>
+                <a:gridCol w="3189820"/>
+                <a:gridCol w="2734131"/>
+                <a:gridCol w="2460718"/>
+              </a:tblGrid>
+              <a:tr h="274320">
+                <a:tc>
+                  <a:txBody>
+                    <a:bodyPr wrap="square"/>
+                    <a:lstStyle/>
+                    <a:p>
+                      <a:r>
+                        <a:rPr sz="1100" b="1">
+                          <a:ea typeface="맑은 고딕"/>
+                          <a:cs typeface="맑은 고딕"/>
+                        </a:rPr>
+                        <a:t>모델 · 시도</a:t>
+                      </a:r>
+                    </a:p>
+                  </a:txBody>
+                  <a:tcPr marL="54864" marR="54864" marT="18288" marB="18288" anchor="ctr"/>
+                </a:tc>
+                <a:tc>
+                  <a:txBody>
+                    <a:bodyPr wrap="square"/>
+                    <a:lstStyle/>
+                    <a:p>
+                      <a:r>
+                        <a:rPr sz="1100" b="1">
+                          <a:ea typeface="맑은 고딕"/>
+                          <a:cs typeface="맑은 고딕"/>
+                        </a:rPr>
+                        <a:t>무엇을 바꿨나 (통제 변수)</a:t>
+                      </a:r>
+                    </a:p>
+                  </a:txBody>
+                  <a:tcPr marL="54864" marR="54864" marT="18288" marB="18288" anchor="ctr"/>
+                </a:tc>
+                <a:tc>
+                  <a:txBody>
+                    <a:bodyPr wrap="square"/>
+                    <a:lstStyle/>
+                    <a:p>
+                      <a:r>
+                        <a:rPr sz="1100" b="1">
+                          <a:ea typeface="맑은 고딕"/>
+                          <a:cs typeface="맑은 고딕"/>
+                        </a:rPr>
+                        <a:t>결과</a:t>
+                      </a:r>
+                    </a:p>
+                  </a:txBody>
+                  <a:tcPr marL="54864" marR="54864" marT="18288" marB="18288" anchor="ctr"/>
+                </a:tc>
+                <a:tc>
+                  <a:txBody>
+                    <a:bodyPr wrap="square"/>
+                    <a:lstStyle/>
+                    <a:p>
+                      <a:r>
+                        <a:rPr sz="1100" b="1">
+                          <a:ea typeface="맑은 고딕"/>
+                          <a:cs typeface="맑은 고딕"/>
+                        </a:rPr>
+                        <a:t>닫은 이유 · 근거</a:t>
+                      </a:r>
+                    </a:p>
+                  </a:txBody>
+                  <a:tcPr marL="54864" marR="54864" marT="18288" marB="18288" anchor="ctr"/>
+                </a:tc>
+              </a:tr>
+              <a:tr h="401320">
+                <a:tc>
+                  <a:txBody>
+                    <a:bodyPr wrap="square"/>
+                    <a:lstStyle/>
+                    <a:p>
+                      <a:r>
+                        <a:rPr sz="1100" b="0">
+                          <a:ea typeface="맑은 고딕"/>
+                          <a:cs typeface="맑은 고딕"/>
+                        </a:rPr>
+                        <a:t>seq v1 공유 LSTM (전체 격자 + 마스킹 손실)</a:t>
+                      </a:r>
+                    </a:p>
+                  </a:txBody>
+                  <a:tcPr marL="54864" marR="54864" marT="18288" marB="18288" anchor="ctr"/>
+                </a:tc>
+                <a:tc>
+                  <a:txBody>
+                    <a:bodyPr wrap="square"/>
+                    <a:lstStyle/>
+                    <a:p>
+                      <a:r>
+                        <a:rPr sz="1100" b="0">
+                          <a:ea typeface="맑은 고딕"/>
+                          <a:cs typeface="맑은 고딕"/>
+                        </a:rPr>
+                        <a:t>프레이밍만 교체</a:t>
+                      </a:r>
+                    </a:p>
+                  </a:txBody>
+                  <a:tcPr marL="54864" marR="54864" marT="18288" marB="18288" anchor="ctr"/>
+                </a:tc>
+                <a:tc>
+                  <a:txBody>
+                    <a:bodyPr wrap="square"/>
+                    <a:lstStyle/>
+                    <a:p>
+                      <a:r>
+                        <a:rPr sz="1100" b="0">
+                          <a:ea typeface="맑은 고딕"/>
+                          <a:cs typeface="맑은 고딕"/>
+                        </a:rPr>
+                        <a:t>Tᵢ 4/4 개선, V_rot 4/4 유의 열세</a:t>
+                      </a:r>
+                    </a:p>
+                  </a:txBody>
+                  <a:tcPr marL="54864" marR="54864" marT="18288" marB="18288" anchor="ctr"/>
+                </a:tc>
+                <a:tc>
+                  <a:txBody>
+                    <a:bodyPr wrap="square"/>
+                    <a:lstStyle/>
+                    <a:p>
+                      <a:r>
+                        <a:rPr sz="1100" b="0">
+                          <a:ea typeface="맑은 고딕"/>
+                          <a:cs typeface="맑은 고딕"/>
+                        </a:rPr>
+                        <a:t>라우팅 부재. v2의 두 갈래 설계로 이어짐 (§8d)</a:t>
+                      </a:r>
+                    </a:p>
+                  </a:txBody>
+                  <a:tcPr marL="54864" marR="54864" marT="18288" marB="18288" anchor="ctr"/>
+                </a:tc>
+              </a:tr>
+              <a:tr h="401320">
+                <a:tc>
+                  <a:txBody>
+                    <a:bodyPr wrap="square"/>
+                    <a:lstStyle/>
+                    <a:p>
+                      <a:r>
+                        <a:rPr sz="1100" b="0">
+                          <a:ea typeface="맑은 고딕"/>
+                          <a:cs typeface="맑은 고딕"/>
+                        </a:rPr>
+                        <a:t>seq_v2 두 갈래 인과 LSTM + shot별 표준화 (357,570)</a:t>
+                      </a:r>
+                    </a:p>
+                  </a:txBody>
+                  <a:tcPr marL="54864" marR="54864" marT="18288" marB="18288" anchor="ctr"/>
+                </a:tc>
+                <a:tc>
+                  <a:txBody>
+                    <a:bodyPr wrap="square"/>
+                    <a:lstStyle/>
+                    <a:p>
+                      <a:r>
+                        <a:rPr sz="1100" b="0">
+                          <a:ea typeface="맑은 고딕"/>
+                          <a:cs typeface="맑은 고딕"/>
+                        </a:rPr>
+                        <a:t>V_rot 갈래를 인코더에서 차단 + 표준화</a:t>
+                      </a:r>
+                    </a:p>
+                  </a:txBody>
+                  <a:tcPr marL="54864" marR="54864" marT="18288" marB="18288" anchor="ctr"/>
+                </a:tc>
+                <a:tc>
+                  <a:txBody>
+                    <a:bodyPr wrap="square"/>
+                    <a:lstStyle/>
+                    <a:p>
+                      <a:r>
+                        <a:rPr sz="1100" b="0">
+                          <a:ea typeface="맑은 고딕"/>
+                          <a:cs typeface="맑은 고딕"/>
+                        </a:rPr>
+                        <a:t>B.1 관문 16/16 양수, 인과 GP 대비 4/4</a:t>
+                      </a:r>
+                    </a:p>
+                  </a:txBody>
+                  <a:tcPr marL="54864" marR="54864" marT="18288" marB="18288" anchor="ctr"/>
+                </a:tc>
+                <a:tc>
+                  <a:txBody>
+                    <a:bodyPr wrap="square"/>
+                    <a:lstStyle/>
+                    <a:p>
+                      <a:r>
+                        <a:rPr sz="1100" b="0">
+                          <a:ea typeface="맑은 고딕"/>
+                          <a:cs typeface="맑은 고딕"/>
+                        </a:rPr>
+                        <a:t>채택 백본 (§8t · §8x)</a:t>
+                      </a:r>
+                    </a:p>
+                  </a:txBody>
+                  <a:tcPr marL="54864" marR="54864" marT="18288" marB="18288" anchor="ctr"/>
+                </a:tc>
+              </a:tr>
+              <a:tr h="401320">
+                <a:tc>
+                  <a:txBody>
+                    <a:bodyPr wrap="square"/>
+                    <a:lstStyle/>
+                    <a:p>
+                      <a:r>
+                        <a:rPr sz="1100" b="0">
+                          <a:ea typeface="맑은 고딕"/>
+                          <a:cs typeface="맑은 고딕"/>
+                        </a:rPr>
+                        <a:t>seq v3 관측마스킹 attention 읽기 (396,930)</a:t>
+                      </a:r>
+                    </a:p>
+                  </a:txBody>
+                  <a:tcPr marL="54864" marR="54864" marT="18288" marB="18288" anchor="ctr"/>
+                </a:tc>
+                <a:tc>
+                  <a:txBody>
+                    <a:bodyPr wrap="square"/>
+                    <a:lstStyle/>
+                    <a:p>
+                      <a:r>
+                        <a:rPr sz="1100" b="0">
+                          <a:ea typeface="맑은 고딕"/>
+                          <a:cs typeface="맑은 고딕"/>
+                        </a:rPr>
+                        <a:t>읽기 경로만 추가, 0 초기화</a:t>
+                      </a:r>
+                    </a:p>
+                  </a:txBody>
+                  <a:tcPr marL="54864" marR="54864" marT="18288" marB="18288" anchor="ctr"/>
+                </a:tc>
+                <a:tc>
+                  <a:txBody>
+                    <a:bodyPr wrap="square"/>
+                    <a:lstStyle/>
+                    <a:p>
+                      <a:r>
+                        <a:rPr sz="1100" b="0">
+                          <a:ea typeface="맑은 고딕"/>
+                          <a:cs typeface="맑은 고딕"/>
+                        </a:rPr>
+                        <a:t>val +0.024* / +0.037*, TEST 4/4 양수 · 1/4 유의</a:t>
+                      </a:r>
+                    </a:p>
+                  </a:txBody>
+                  <a:tcPr marL="54864" marR="54864" marT="18288" marB="18288" anchor="ctr"/>
+                </a:tc>
+                <a:tc>
+                  <a:txBody>
+                    <a:bodyPr wrap="square"/>
+                    <a:lstStyle/>
+                    <a:p>
+                      <a:r>
+                        <a:rPr sz="1100" b="0">
+                          <a:ea typeface="맑은 고딕"/>
+                          <a:cs typeface="맑은 고딕"/>
+                        </a:rPr>
+                        <a:t>승격 규칙(유의 ≥ 3/4) 미달 (§8y)</a:t>
+                      </a:r>
+                    </a:p>
+                  </a:txBody>
+                  <a:tcPr marL="54864" marR="54864" marT="18288" marB="18288" anchor="ctr"/>
+                </a:tc>
+              </a:tr>
+              <a:tr h="401320">
+                <a:tc>
+                  <a:txBody>
+                    <a:bodyPr wrap="square"/>
+                    <a:lstStyle/>
+                    <a:p>
+                      <a:r>
+                        <a:rPr sz="1100" b="0">
+                          <a:ea typeface="맑은 고딕"/>
+                          <a:cs typeface="맑은 고딕"/>
+                        </a:rPr>
+                        <a:t>b3k8 해석 가능 칸 (21,498, K = 8 잠재)</a:t>
+                      </a:r>
+                    </a:p>
+                  </a:txBody>
+                  <a:tcPr marL="54864" marR="54864" marT="18288" marB="18288" anchor="ctr"/>
+                </a:tc>
+                <a:tc>
+                  <a:txBody>
+                    <a:bodyPr wrap="square"/>
+                    <a:lstStyle/>
+                    <a:p>
+                      <a:r>
+                        <a:rPr sz="1100" b="0">
+                          <a:ea typeface="맑은 고딕"/>
+                          <a:cs typeface="맑은 고딕"/>
+                        </a:rPr>
+                        <a:t>인코더를 8차원 잠재 + persistence 앵커로 압축</a:t>
+                      </a:r>
+                    </a:p>
+                  </a:txBody>
+                  <a:tcPr marL="54864" marR="54864" marT="18288" marB="18288" anchor="ctr"/>
+                </a:tc>
+                <a:tc>
+                  <a:txBody>
+                    <a:bodyPr wrap="square"/>
+                    <a:lstStyle/>
+                    <a:p>
+                      <a:r>
+                        <a:rPr sz="1100" b="0">
+                          <a:ea typeface="맑은 고딕"/>
+                          <a:cs typeface="맑은 고딕"/>
+                        </a:rPr>
+                        <a:t>컷 모집단에서 백본 +0.002, 포함에서 -0.16 ~ -0.21</a:t>
+                      </a:r>
+                    </a:p>
+                  </a:txBody>
+                  <a:tcPr marL="54864" marR="54864" marT="18288" marB="18288" anchor="ctr"/>
+                </a:tc>
+                <a:tc>
+                  <a:txBody>
+                    <a:bodyPr wrap="square"/>
+                    <a:lstStyle/>
+                    <a:p>
+                      <a:r>
+                        <a:rPr sz="1100" b="0">
+                          <a:ea typeface="맑은 고딕"/>
+                          <a:cs typeface="맑은 고딕"/>
+                        </a:rPr>
+                        <a:t>해석 칸으로만 채택하며 백본을 대체하지 않음 (§8z · §8ab)</a:t>
+                      </a:r>
+                    </a:p>
+                  </a:txBody>
+                  <a:tcPr marL="54864" marR="54864" marT="18288" marB="18288" anchor="ctr"/>
+                </a:tc>
+              </a:tr>
+              <a:tr h="401320">
+                <a:tc>
+                  <a:txBody>
+                    <a:bodyPr wrap="square"/>
+                    <a:lstStyle/>
+                    <a:p>
+                      <a:r>
+                        <a:rPr sz="1100" b="0">
+                          <a:ea typeface="맑은 고딕"/>
+                          <a:cs typeface="맑은 고딕"/>
+                        </a:rPr>
+                        <a:t>폭 스윕 hidden_ti 24 ... 260 (34k ... 879k)</a:t>
+                      </a:r>
+                    </a:p>
+                  </a:txBody>
+                  <a:tcPr marL="54864" marR="54864" marT="18288" marB="18288" anchor="ctr"/>
+                </a:tc>
+                <a:tc>
+                  <a:txBody>
+                    <a:bodyPr wrap="square"/>
+                    <a:lstStyle/>
+                    <a:p>
+                      <a:r>
+                        <a:rPr sz="1100" b="0">
+                          <a:ea typeface="맑은 고딕"/>
+                          <a:cs typeface="맑은 고딕"/>
+                        </a:rPr>
+                        <a:t>Tᵢ 인코더 폭</a:t>
+                      </a:r>
+                    </a:p>
+                  </a:txBody>
+                  <a:tcPr marL="54864" marR="54864" marT="18288" marB="18288" anchor="ctr"/>
+                </a:tc>
+                <a:tc>
+                  <a:txBody>
+                    <a:bodyPr wrap="square"/>
+                    <a:lstStyle/>
+                    <a:p>
+                      <a:r>
+                        <a:rPr sz="1100" b="0">
+                          <a:ea typeface="맑은 고딕"/>
+                          <a:cs typeface="맑은 고딕"/>
+                        </a:rPr>
+                        <a:t>평균 skill이 ±0.008 안에서 평평 (26배)</a:t>
+                      </a:r>
+                    </a:p>
+                  </a:txBody>
+                  <a:tcPr marL="54864" marR="54864" marT="18288" marB="18288" anchor="ctr"/>
+                </a:tc>
+                <a:tc>
+                  <a:txBody>
+                    <a:bodyPr wrap="square"/>
+                    <a:lstStyle/>
+                    <a:p>
+                      <a:r>
+                        <a:rPr sz="1100" b="0">
+                          <a:ea typeface="맑은 고딕"/>
+                          <a:cs typeface="맑은 고딕"/>
+                        </a:rPr>
+                        <a:t>크기 축 닫힘 (§8aa)</a:t>
+                      </a:r>
+                    </a:p>
+                  </a:txBody>
+                  <a:tcPr marL="54864" marR="54864" marT="18288" marB="18288" anchor="ctr"/>
+                </a:tc>
+              </a:tr>
+              <a:tr h="401320">
+                <a:tc>
+                  <a:txBody>
+                    <a:bodyPr wrap="square"/>
+                    <a:lstStyle/>
+                    <a:p>
+                      <a:r>
+                        <a:rPr sz="1100" b="0">
+                          <a:ea typeface="맑은 고딕"/>
+                          <a:cs typeface="맑은 고딕"/>
+                        </a:rPr>
+                        <a:t>최소 모델 v2m · b3m (1k ... 10k)</a:t>
+                      </a:r>
+                    </a:p>
+                  </a:txBody>
+                  <a:tcPr marL="54864" marR="54864" marT="18288" marB="18288" anchor="ctr"/>
+                </a:tc>
+                <a:tc>
+                  <a:txBody>
+                    <a:bodyPr wrap="square"/>
+                    <a:lstStyle/>
+                    <a:p>
+                      <a:r>
+                        <a:rPr sz="1100" b="0">
+                          <a:ea typeface="맑은 고딕"/>
+                          <a:cs typeface="맑은 고딕"/>
+                        </a:rPr>
+                        <a:t>모든 부분을 함께 축소</a:t>
+                      </a:r>
+                    </a:p>
+                  </a:txBody>
+                  <a:tcPr marL="54864" marR="54864" marT="18288" marB="18288" anchor="ctr"/>
+                </a:tc>
+                <a:tc>
+                  <a:txBody>
+                    <a:bodyPr wrap="square"/>
+                    <a:lstStyle/>
+                    <a:p>
+                      <a:r>
+                        <a:rPr sz="1100" b="0">
+                          <a:ea typeface="맑은 고딕"/>
+                          <a:cs typeface="맑은 고딕"/>
+                        </a:rPr>
+                        <a:t>v2m4k(3,898)가 4/4 바닥, v2m2k는 -0.036에 유의 열세 3</a:t>
+                      </a:r>
+                    </a:p>
+                  </a:txBody>
+                  <a:tcPr marL="54864" marR="54864" marT="18288" marB="18288" anchor="ctr"/>
+                </a:tc>
+                <a:tc>
+                  <a:txBody>
+                    <a:bodyPr wrap="square"/>
+                    <a:lstStyle/>
+                    <a:p>
+                      <a:r>
+                        <a:rPr sz="1100" b="0">
+                          <a:ea typeface="맑은 고딕"/>
+                          <a:cs typeface="맑은 고딕"/>
+                        </a:rPr>
+                        <a:t>3.9k 아래에서 skill이 무너짐 (§8ai)</a:t>
+                      </a:r>
+                    </a:p>
+                  </a:txBody>
+                  <a:tcPr marL="54864" marR="54864" marT="18288" marB="18288" anchor="ctr"/>
+                </a:tc>
+              </a:tr>
+            </a:tbl>
+          </a:graphicData>
+        </a:graphic>
+      </p:graphicFrame>
+    </p:spTree>
+  </p:cSld>
+  <p:clrMapOvr>
+    <a:masterClrMapping/>
+  </p:clrMapOvr>
+</p:sld>
+</file>
+
+<file path=ppt/slides/slide54.xml><?xml version="1.0" encoding="utf-8"?>
+<p:sld xmlns:a="http://schemas.openxmlformats.org/drawingml/2006/main" xmlns:p="http://schemas.openxmlformats.org/presentationml/2006/main" xmlns:r="http://schemas.openxmlformats.org/officeDocument/2006/relationships">
+  <p:cSld>
+    <p:spTree>
+      <p:nvGrpSpPr>
+        <p:cNvPr id="1" name=""/>
+        <p:cNvGrpSpPr/>
+        <p:nvPr/>
+      </p:nvGrpSpPr>
+      <p:grpSpPr/>
+      <p:sp>
+        <p:nvSpPr>
+          <p:cNvPr id="2" name="Title 1"/>
+          <p:cNvSpPr>
+            <a:spLocks noGrp="1"/>
+          </p:cNvSpPr>
+          <p:nvPr>
+            <p:ph type="title"/>
+          </p:nvPr>
+        </p:nvSpPr>
+        <p:spPr>
+          <a:xfrm>
+            <a:off x="585216" y="704088"/>
+            <a:ext cx="11027664" cy="1014984"/>
+          </a:xfrm>
+        </p:spPr>
+        <p:txBody>
+          <a:bodyPr wrap="square"/>
+          <a:lstStyle/>
+          <a:p>
+            <a:r>
+              <a:rPr b="0" sz="2650">
+                <a:ea typeface="맑은 고딕"/>
+                <a:cs typeface="맑은 고딕"/>
+              </a:rPr>
+              <a:t>시도한 모델의 계보와 닫은 이유 (3/3): 계열 · 문맥 · 기준선 · 확장 가지</a:t>
+            </a:r>
+          </a:p>
+        </p:txBody>
+      </p:sp>
+      <p:graphicFrame>
+        <p:nvGraphicFramePr>
+          <p:cNvPr id="3" name="Table 2"/>
+          <p:cNvGraphicFramePr>
+            <a:graphicFrameLocks noGrp="1"/>
+          </p:cNvGraphicFramePr>
+          <p:nvPr/>
+        </p:nvGraphicFramePr>
+        <p:xfrm>
+          <a:off x="585216" y="2029967"/>
+          <a:ext cx="11027662" cy="3232912"/>
+        </p:xfrm>
+        <a:graphic>
+          <a:graphicData uri="http://schemas.openxmlformats.org/drawingml/2006/table">
+            <a:tbl>
+              <a:tblPr firstRow="1" bandRow="1">
+                <a:tableStyleId>{5C22544A-7EE6-4342-B048-85BDC9FD1C3A}</a:tableStyleId>
+              </a:tblPr>
+              <a:tblGrid>
+                <a:gridCol w="2642993"/>
+                <a:gridCol w="3189820"/>
+                <a:gridCol w="2734131"/>
+                <a:gridCol w="2460718"/>
+              </a:tblGrid>
+              <a:tr h="274320">
+                <a:tc>
+                  <a:txBody>
+                    <a:bodyPr wrap="square"/>
+                    <a:lstStyle/>
+                    <a:p>
+                      <a:r>
+                        <a:rPr sz="1000" b="1">
+                          <a:ea typeface="맑은 고딕"/>
+                          <a:cs typeface="맑은 고딕"/>
+                        </a:rPr>
+                        <a:t>모델 · 시도</a:t>
+                      </a:r>
+                    </a:p>
+                  </a:txBody>
+                  <a:tcPr marL="54864" marR="54864" marT="18288" marB="18288" anchor="ctr"/>
+                </a:tc>
+                <a:tc>
+                  <a:txBody>
+                    <a:bodyPr wrap="square"/>
+                    <a:lstStyle/>
+                    <a:p>
+                      <a:r>
+                        <a:rPr sz="1000" b="1">
+                          <a:ea typeface="맑은 고딕"/>
+                          <a:cs typeface="맑은 고딕"/>
+                        </a:rPr>
+                        <a:t>무엇을 바꿨나 (통제 변수)</a:t>
+                      </a:r>
+                    </a:p>
+                  </a:txBody>
+                  <a:tcPr marL="54864" marR="54864" marT="18288" marB="18288" anchor="ctr"/>
+                </a:tc>
+                <a:tc>
+                  <a:txBody>
+                    <a:bodyPr wrap="square"/>
+                    <a:lstStyle/>
+                    <a:p>
+                      <a:r>
+                        <a:rPr sz="1000" b="1">
+                          <a:ea typeface="맑은 고딕"/>
+                          <a:cs typeface="맑은 고딕"/>
+                        </a:rPr>
+                        <a:t>결과</a:t>
+                      </a:r>
+                    </a:p>
+                  </a:txBody>
+                  <a:tcPr marL="54864" marR="54864" marT="18288" marB="18288" anchor="ctr"/>
+                </a:tc>
+                <a:tc>
+                  <a:txBody>
+                    <a:bodyPr wrap="square"/>
+                    <a:lstStyle/>
+                    <a:p>
+                      <a:r>
+                        <a:rPr sz="1000" b="1">
+                          <a:ea typeface="맑은 고딕"/>
+                          <a:cs typeface="맑은 고딕"/>
+                        </a:rPr>
+                        <a:t>닫은 이유 · 근거</a:t>
+                      </a:r>
+                    </a:p>
+                  </a:txBody>
+                  <a:tcPr marL="54864" marR="54864" marT="18288" marB="18288" anchor="ctr"/>
+                </a:tc>
+              </a:tr>
+              <a:tr h="369824">
+                <a:tc>
+                  <a:txBody>
+                    <a:bodyPr wrap="square"/>
+                    <a:lstStyle/>
+                    <a:p>
+                      <a:r>
+                        <a:rPr sz="1000" b="0">
+                          <a:ea typeface="맑은 고딕"/>
+                          <a:cs typeface="맑은 고딕"/>
+                        </a:rPr>
+                        <a:t>계열 비교 tcn15 · tcn63 · xfmr63 (확장 합성곱 · 밴드 어텐션)</a:t>
+                      </a:r>
+                    </a:p>
+                  </a:txBody>
+                  <a:tcPr marL="54864" marR="54864" marT="18288" marB="18288" anchor="ctr"/>
+                </a:tc>
+                <a:tc>
+                  <a:txBody>
+                    <a:bodyPr wrap="square"/>
+                    <a:lstStyle/>
+                    <a:p>
+                      <a:r>
+                        <a:rPr sz="1000" b="0">
+                          <a:ea typeface="맑은 고딕"/>
+                          <a:cs typeface="맑은 고딕"/>
+                        </a:rPr>
+                        <a:t>같은 reach에서 연산자만 교체</a:t>
+                      </a:r>
+                    </a:p>
+                  </a:txBody>
+                  <a:tcPr marL="54864" marR="54864" marT="18288" marB="18288" anchor="ctr"/>
+                </a:tc>
+                <a:tc>
+                  <a:txBody>
+                    <a:bodyPr wrap="square"/>
+                    <a:lstStyle/>
+                    <a:p>
+                      <a:r>
+                        <a:rPr sz="1000" b="0">
+                          <a:ea typeface="맑은 고딕"/>
+                          <a:cs typeface="맑은 고딕"/>
+                        </a:rPr>
+                        <a:t>±0.02 동률. 어텐션은 70 ms에서 -0.023 (3/4)</a:t>
+                      </a:r>
+                    </a:p>
+                  </a:txBody>
+                  <a:tcPr marL="54864" marR="54864" marT="18288" marB="18288" anchor="ctr"/>
+                </a:tc>
+                <a:tc>
+                  <a:txBody>
+                    <a:bodyPr wrap="square"/>
+                    <a:lstStyle/>
+                    <a:p>
+                      <a:r>
+                        <a:rPr sz="1000" b="0">
+                          <a:ea typeface="맑은 고딕"/>
+                          <a:cs typeface="맑은 고딕"/>
+                        </a:rPr>
+                        <a:t>계열은 skill이 아니라 비용을 정한다 (§8ag · §8ak)</a:t>
+                      </a:r>
+                    </a:p>
+                  </a:txBody>
+                  <a:tcPr marL="54864" marR="54864" marT="18288" marB="18288" anchor="ctr"/>
+                </a:tc>
+              </a:tr>
+              <a:tr h="369824">
+                <a:tc>
+                  <a:txBody>
+                    <a:bodyPr wrap="square"/>
+                    <a:lstStyle/>
+                    <a:p>
+                      <a:r>
+                        <a:rPr sz="1000" b="0">
+                          <a:ea typeface="맑은 고딕"/>
+                          <a:cs typeface="맑은 고딕"/>
+                        </a:rPr>
+                        <a:t>소형 합성곱 tcn8k · 3k · 2k</a:t>
+                      </a:r>
+                    </a:p>
+                  </a:txBody>
+                  <a:tcPr marL="54864" marR="54864" marT="18288" marB="18288" anchor="ctr"/>
+                </a:tc>
+                <a:tc>
+                  <a:txBody>
+                    <a:bodyPr wrap="square"/>
+                    <a:lstStyle/>
+                    <a:p>
+                      <a:r>
+                        <a:rPr sz="1000" b="0">
+                          <a:ea typeface="맑은 고딕"/>
+                          <a:cs typeface="맑은 고딕"/>
+                        </a:rPr>
+                        <a:t>10k 아래에서 계열</a:t>
+                      </a:r>
+                    </a:p>
+                  </a:txBody>
+                  <a:tcPr marL="54864" marR="54864" marT="18288" marB="18288" anchor="ctr"/>
+                </a:tc>
+                <a:tc>
+                  <a:txBody>
+                    <a:bodyPr wrap="square"/>
+                    <a:lstStyle/>
+                    <a:p>
+                      <a:r>
+                        <a:rPr sz="1000" b="0">
+                          <a:ea typeface="맑은 고딕"/>
+                          <a:cs typeface="맑은 고딕"/>
+                        </a:rPr>
+                        <a:t>크기 맞춘 LSTM 대비 +0.027 ~ +0.040 (3 ~ 4/4)</a:t>
+                      </a:r>
+                    </a:p>
+                  </a:txBody>
+                  <a:tcPr marL="54864" marR="54864" marT="18288" marB="18288" anchor="ctr"/>
+                </a:tc>
+                <a:tc>
+                  <a:txBody>
+                    <a:bodyPr wrap="square"/>
+                    <a:lstStyle/>
+                    <a:p>
+                      <a:r>
+                        <a:rPr sz="1000" b="0">
+                          <a:ea typeface="맑은 고딕"/>
+                          <a:cs typeface="맑은 고딕"/>
+                        </a:rPr>
+                        <a:t>10k 아래에선 conv 우세. tcn2k(1,808)도 인과 GP 4/4 (§8ai)</a:t>
+                      </a:r>
+                    </a:p>
+                  </a:txBody>
+                  <a:tcPr marL="54864" marR="54864" marT="18288" marB="18288" anchor="ctr"/>
+                </a:tc>
+              </a:tr>
+              <a:tr h="369824">
+                <a:tc>
+                  <a:txBody>
+                    <a:bodyPr wrap="square"/>
+                    <a:lstStyle/>
+                    <a:p>
+                      <a:r>
+                        <a:rPr sz="1000" b="0">
+                          <a:ea typeface="맑은 고딕"/>
+                          <a:cs typeface="맑은 고딕"/>
+                        </a:rPr>
+                        <a:t>대각 SSM (S4형) 사다리 6칸</a:t>
+                      </a:r>
+                    </a:p>
+                  </a:txBody>
+                  <a:tcPr marL="54864" marR="54864" marT="18288" marB="18288" anchor="ctr"/>
+                </a:tc>
+                <a:tc>
+                  <a:txBody>
+                    <a:bodyPr wrap="square"/>
+                    <a:lstStyle/>
+                    <a:p>
+                      <a:r>
+                        <a:rPr sz="1000" b="0">
+                          <a:ea typeface="맑은 고딕"/>
+                          <a:cs typeface="맑은 고딕"/>
+                        </a:rPr>
+                        <a:t>상태공간 연산자</a:t>
+                      </a:r>
+                    </a:p>
+                  </a:txBody>
+                  <a:tcPr marL="54864" marR="54864" marT="18288" marB="18288" anchor="ctr"/>
+                </a:tc>
+                <a:tc>
+                  <a:txBody>
+                    <a:bodyPr wrap="square"/>
+                    <a:lstStyle/>
+                    <a:p>
+                      <a:r>
+                        <a:rPr sz="1000" b="0">
+                          <a:ea typeface="맑은 고딕"/>
+                          <a:cs typeface="맑은 고딕"/>
+                        </a:rPr>
+                        <a:t>70 ms까지 문맥을 전환한 뒤 +0.105 천장. 같은 reach LSTM에 -0.022 / -0.044</a:t>
+                      </a:r>
+                    </a:p>
+                  </a:txBody>
+                  <a:tcPr marL="54864" marR="54864" marT="18288" marB="18288" anchor="ctr"/>
+                </a:tc>
+                <a:tc>
+                  <a:txBody>
+                    <a:bodyPr wrap="square"/>
+                    <a:lstStyle/>
+                    <a:p>
+                      <a:r>
+                        <a:rPr sz="1000" b="0">
+                          <a:ea typeface="맑은 고딕"/>
+                          <a:cs typeface="맑은 고딕"/>
+                        </a:rPr>
+                        <a:t>낮은 천장으로 비채택 (§8am 부록)</a:t>
+                      </a:r>
+                    </a:p>
+                  </a:txBody>
+                  <a:tcPr marL="54864" marR="54864" marT="18288" marB="18288" anchor="ctr"/>
+                </a:tc>
+              </a:tr>
+              <a:tr h="369824">
+                <a:tc>
+                  <a:txBody>
+                    <a:bodyPr wrap="square"/>
+                    <a:lstStyle/>
+                    <a:p>
+                      <a:r>
+                        <a:rPr sz="1000" b="0">
+                          <a:ea typeface="맑은 고딕"/>
+                          <a:cs typeface="맑은 고딕"/>
+                        </a:rPr>
+                        <a:t>reach 사다리 v2r2 ... r63 (20 ~ 630 ms)</a:t>
+                      </a:r>
+                    </a:p>
+                  </a:txBody>
+                  <a:tcPr marL="54864" marR="54864" marT="18288" marB="18288" anchor="ctr"/>
+                </a:tc>
+                <a:tc>
+                  <a:txBody>
+                    <a:bodyPr wrap="square"/>
+                    <a:lstStyle/>
+                    <a:p>
+                      <a:r>
+                        <a:rPr sz="1000" b="0">
+                          <a:ea typeface="맑은 고딕"/>
+                          <a:cs typeface="맑은 고딕"/>
+                        </a:rPr>
+                        <a:t>학습 시 문맥 길이</a:t>
+                      </a:r>
+                    </a:p>
+                  </a:txBody>
+                  <a:tcPr marL="54864" marR="54864" marT="18288" marB="18288" anchor="ctr"/>
+                </a:tc>
+                <a:tc>
+                  <a:txBody>
+                    <a:bodyPr wrap="square"/>
+                    <a:lstStyle/>
+                    <a:p>
+                      <a:r>
+                        <a:rPr sz="1000" b="0">
+                          <a:ea typeface="맑은 고딕"/>
+                          <a:cs typeface="맑은 고딕"/>
+                        </a:rPr>
+                        <a:t>50 ~ 70 ms 포화. 승리 방전 비율 0.52 → 0.66</a:t>
+                      </a:r>
+                    </a:p>
+                  </a:txBody>
+                  <a:tcPr marL="54864" marR="54864" marT="18288" marB="18288" anchor="ctr"/>
+                </a:tc>
+                <a:tc>
+                  <a:txBody>
+                    <a:bodyPr wrap="square"/>
+                    <a:lstStyle/>
+                    <a:p>
+                      <a:r>
+                        <a:rPr sz="1000" b="0">
+                          <a:ea typeface="맑은 고딕"/>
+                          <a:cs typeface="맑은 고딕"/>
+                        </a:rPr>
+                        <a:t>긴 문맥 축 닫힘 (§8af · §8al)</a:t>
+                      </a:r>
+                    </a:p>
+                  </a:txBody>
+                  <a:tcPr marL="54864" marR="54864" marT="18288" marB="18288" anchor="ctr"/>
+                </a:tc>
+              </a:tr>
+              <a:tr h="369824">
+                <a:tc>
+                  <a:txBody>
+                    <a:bodyPr wrap="square"/>
+                    <a:lstStyle/>
+                    <a:p>
+                      <a:r>
+                        <a:rPr sz="1000" b="0">
+                          <a:ea typeface="맑은 고딕"/>
+                          <a:cs typeface="맑은 고딕"/>
+                        </a:rPr>
+                        <a:t>오프라인 GP · 인과 GP 팔</a:t>
+                      </a:r>
+                    </a:p>
+                  </a:txBody>
+                  <a:tcPr marL="54864" marR="54864" marT="18288" marB="18288" anchor="ctr"/>
+                </a:tc>
+                <a:tc>
+                  <a:txBody>
+                    <a:bodyPr wrap="square"/>
+                    <a:lstStyle/>
+                    <a:p>
+                      <a:r>
+                        <a:rPr sz="1000" b="0">
+                          <a:ea typeface="맑은 고딕"/>
+                          <a:cs typeface="맑은 고딕"/>
+                        </a:rPr>
+                        <a:t>기준선 추가</a:t>
+                      </a:r>
+                    </a:p>
+                  </a:txBody>
+                  <a:tcPr marL="54864" marR="54864" marT="18288" marB="18288" anchor="ctr"/>
+                </a:tc>
+                <a:tc>
+                  <a:txBody>
+                    <a:bodyPr wrap="square"/>
+                    <a:lstStyle/>
+                    <a:p>
+                      <a:r>
+                        <a:rPr sz="1000" b="0">
+                          <a:ea typeface="맑은 고딕"/>
+                          <a:cs typeface="맑은 고딕"/>
+                        </a:rPr>
+                        <a:t>GP는 PCHIP 4/4 이기고 모델과 동률. 인과 GP는 백본이 4/4</a:t>
+                      </a:r>
+                    </a:p>
+                  </a:txBody>
+                  <a:tcPr marL="54864" marR="54864" marT="18288" marB="18288" anchor="ctr"/>
+                </a:tc>
+                <a:tc>
+                  <a:txBody>
+                    <a:bodyPr wrap="square"/>
+                    <a:lstStyle/>
+                    <a:p>
+                      <a:r>
+                        <a:rPr sz="1000" b="0">
+                          <a:ea typeface="맑은 고딕"/>
+                          <a:cs typeface="맑은 고딕"/>
+                        </a:rPr>
+                        <a:t>오프라인 주장의 상한 = GP 동률 (§8p · §8y)</a:t>
+                      </a:r>
+                    </a:p>
+                  </a:txBody>
+                  <a:tcPr marL="54864" marR="54864" marT="18288" marB="18288" anchor="ctr"/>
+                </a:tc>
+              </a:tr>
+              <a:tr h="369824">
+                <a:tc>
+                  <a:txBody>
+                    <a:bodyPr wrap="square"/>
+                    <a:lstStyle/>
+                    <a:p>
+                      <a:r>
+                        <a:rPr sz="1000" b="0">
+                          <a:ea typeface="맑은 고딕"/>
+                          <a:cs typeface="맑은 고딕"/>
+                        </a:rPr>
+                        <a:t>학습 분산 헤드 vs split conformal (Mondrian)</a:t>
+                      </a:r>
+                    </a:p>
+                  </a:txBody>
+                  <a:tcPr marL="54864" marR="54864" marT="18288" marB="18288" anchor="ctr"/>
+                </a:tc>
+                <a:tc>
+                  <a:txBody>
+                    <a:bodyPr wrap="square"/>
+                    <a:lstStyle/>
+                    <a:p>
+                      <a:r>
+                        <a:rPr sz="1000" b="0">
+                          <a:ea typeface="맑은 고딕"/>
+                          <a:cs typeface="맑은 고딕"/>
+                        </a:rPr>
+                        <a:t>불확실성 방식</a:t>
+                      </a:r>
+                    </a:p>
+                  </a:txBody>
+                  <a:tcPr marL="54864" marR="54864" marT="18288" marB="18288" anchor="ctr"/>
+                </a:tc>
+                <a:tc>
+                  <a:txBody>
+                    <a:bodyPr wrap="square"/>
+                    <a:lstStyle/>
+                    <a:p>
+                      <a:r>
+                        <a:rPr sz="1000" b="0">
+                          <a:ea typeface="맑은 고딕"/>
+                          <a:cs typeface="맑은 고딕"/>
+                        </a:rPr>
+                        <a:t>conformal이 Winkler 32/32 최선</a:t>
+                      </a:r>
+                    </a:p>
+                  </a:txBody>
+                  <a:tcPr marL="54864" marR="54864" marT="18288" marB="18288" anchor="ctr"/>
+                </a:tc>
+                <a:tc>
+                  <a:txBody>
+                    <a:bodyPr wrap="square"/>
+                    <a:lstStyle/>
+                    <a:p>
+                      <a:r>
+                        <a:rPr sz="1000" b="0">
+                          <a:ea typeface="맑은 고딕"/>
+                          <a:cs typeface="맑은 고딕"/>
+                        </a:rPr>
+                        <a:t>재학습이 헤드라인을 교란하므로 사후 보정 채택 (§8m)</a:t>
+                      </a:r>
+                    </a:p>
+                  </a:txBody>
+                  <a:tcPr marL="54864" marR="54864" marT="18288" marB="18288" anchor="ctr"/>
+                </a:tc>
+              </a:tr>
+              <a:tr h="369824">
+                <a:tc>
+                  <a:txBody>
+                    <a:bodyPr wrap="square"/>
+                    <a:lstStyle/>
+                    <a:p>
+                      <a:r>
+                        <a:rPr sz="1000" b="0">
+                          <a:ea typeface="맑은 고딕"/>
+                          <a:cs typeface="맑은 고딕"/>
+                        </a:rPr>
+                        <a:t>양자 VQC · 고정 특징맵 · 저장소 · 커널 (IonQ Forte)</a:t>
+                      </a:r>
+                    </a:p>
+                  </a:txBody>
+                  <a:tcPr marL="54864" marR="54864" marT="18288" marB="18288" anchor="ctr"/>
+                </a:tc>
+                <a:tc>
+                  <a:txBody>
+                    <a:bodyPr wrap="square"/>
+                    <a:lstStyle/>
+                    <a:p>
+                      <a:r>
+                        <a:rPr sz="1000" b="0">
+                          <a:ea typeface="맑은 고딕"/>
+                          <a:cs typeface="맑은 고딕"/>
+                        </a:rPr>
+                        <a:t>추정기 계열</a:t>
+                      </a:r>
+                    </a:p>
+                  </a:txBody>
+                  <a:tcPr marL="54864" marR="54864" marT="18288" marB="18288" anchor="ctr"/>
+                </a:tc>
+                <a:tc>
+                  <a:txBody>
+                    <a:bodyPr wrap="square"/>
+                    <a:lstStyle/>
+                    <a:p>
+                      <a:r>
+                        <a:rPr sz="1000" b="0">
+                          <a:ea typeface="맑은 고딕"/>
+                          <a:cs typeface="맑은 고딕"/>
+                        </a:rPr>
+                        <a:t>무잡음에서도 persistence에 짐(471.5 vs 449.6 eV). 22.9 s/예측, λ = 0.661</a:t>
+                      </a:r>
+                    </a:p>
+                  </a:txBody>
+                  <a:tcPr marL="54864" marR="54864" marT="18288" marB="18288" anchor="ctr"/>
+                </a:tc>
+                <a:tc>
+                  <a:txBody>
+                    <a:bodyPr wrap="square"/>
+                    <a:lstStyle/>
+                    <a:p>
+                      <a:r>
+                        <a:rPr sz="1000" b="0">
+                          <a:ea typeface="맑은 고딕"/>
+                          <a:cs typeface="맑은 고딕"/>
+                        </a:rPr>
+                        <a:t>하드웨어 검증 후 음성 종결 (§8ap)</a:t>
+                      </a:r>
+                    </a:p>
+                  </a:txBody>
+                  <a:tcPr marL="54864" marR="54864" marT="18288" marB="18288" anchor="ctr"/>
+                </a:tc>
+              </a:tr>
+              <a:tr h="369824">
+                <a:tc>
+                  <a:txBody>
+                    <a:bodyPr wrap="square"/>
+                    <a:lstStyle/>
+                    <a:p>
+                      <a:r>
+                        <a:rPr sz="1000" b="0">
+                          <a:ea typeface="맑은 고딕"/>
+                          <a:cs typeface="맑은 고딕"/>
+                        </a:rPr>
+                        <a:t>B.11 VQ 코드북 게이팅 (b3vqC, C = 4 · 8 · 16)</a:t>
+                      </a:r>
+                    </a:p>
+                  </a:txBody>
+                  <a:tcPr marL="54864" marR="54864" marT="18288" marB="18288" anchor="ctr"/>
+                </a:tc>
+                <a:tc>
+                  <a:txBody>
+                    <a:bodyPr wrap="square"/>
+                    <a:lstStyle/>
+                    <a:p>
+                      <a:r>
+                        <a:rPr sz="1000" b="0">
+                          <a:ea typeface="맑은 고딕"/>
+                          <a:cs typeface="맑은 고딕"/>
+                        </a:rPr>
+                        <a:t>읽기 가중치를 이산 코드로 선택</a:t>
+                      </a:r>
+                    </a:p>
+                  </a:txBody>
+                  <a:tcPr marL="54864" marR="54864" marT="18288" marB="18288" anchor="ctr"/>
+                </a:tc>
+                <a:tc>
+                  <a:txBody>
+                    <a:bodyPr wrap="square"/>
+                    <a:lstStyle/>
+                    <a:p>
+                      <a:r>
+                        <a:rPr sz="1000" b="0">
+                          <a:ea typeface="맑은 고딕"/>
+                          <a:cs typeface="맑은 고딕"/>
+                        </a:rPr>
+                        <a:t>사전등록 2026-09-03, val 선별 진행 중</a:t>
+                      </a:r>
+                    </a:p>
+                  </a:txBody>
+                  <a:tcPr marL="54864" marR="54864" marT="18288" marB="18288" anchor="ctr"/>
+                </a:tc>
+                <a:tc>
+                  <a:txBody>
+                    <a:bodyPr wrap="square"/>
+                    <a:lstStyle/>
+                    <a:p>
+                      <a:r>
+                        <a:rPr sz="1000" b="0">
+                          <a:ea typeface="맑은 고딕"/>
+                          <a:cs typeface="맑은 고딕"/>
+                        </a:rPr>
+                        <a:t>미판정 (PREREGISTRATION_B11.md)</a:t>
+                      </a:r>
+                    </a:p>
+                  </a:txBody>
+                  <a:tcPr marL="54864" marR="54864" marT="18288" marB="18288" anchor="ctr"/>
+                </a:tc>
+              </a:tr>
+            </a:tbl>
+          </a:graphicData>
+        </a:graphic>
+      </p:graphicFrame>
+      <p:sp>
+        <p:nvSpPr>
+          <p:cNvPr id="4" name="TextBox 3"/>
+          <p:cNvSpPr txBox="1"/>
+          <p:nvPr/>
+        </p:nvSpPr>
+        <p:spPr>
+          <a:xfrm>
+            <a:off x="585216" y="5354319"/>
+            <a:ext cx="11027664" cy="486664"/>
+          </a:xfrm>
+          <a:prstGeom prst="rect">
+            <a:avLst/>
+          </a:prstGeom>
+          <a:noFill/>
+        </p:spPr>
+        <p:txBody>
+          <a:bodyPr wrap="square">
+            <a:spAutoFit/>
+          </a:bodyPr>
+          <a:lstStyle/>
+          <a:p>
+            <a:pPr>
+              <a:spcAft>
+                <a:spcPts val="300"/>
+              </a:spcAft>
+            </a:pPr>
+            <a:r>
+              <a:rPr sz="1250">
+                <a:ea typeface="맑은 고딕"/>
+                <a:cs typeface="맑은 고딕"/>
+              </a:rPr>
+              <a:t>데이터 처리(held 제거)와 프레이밍(전체 격자 마스킹 손실)이 skill을 움직였고, 아키텍처 미세 변형 · 크기 · 문맥 · 계열은 움직이지 않았다. 이 문장은 총합 MSE에 한정된다(§8aq).</a:t>
+            </a:r>
+          </a:p>
+        </p:txBody>
+      </p:sp>
+    </p:spTree>
+  </p:cSld>
+  <p:clrMapOvr>
+    <a:masterClrMapping/>
+  </p:clrMapOvr>
+</p:sld>
+</file>
+
+<file path=ppt/slides/slide55.xml><?xml version="1.0" encoding="utf-8"?>
+<p:sld xmlns:a="http://schemas.openxmlformats.org/drawingml/2006/main" xmlns:p="http://schemas.openxmlformats.org/presentationml/2006/main" xmlns:r="http://schemas.openxmlformats.org/officeDocument/2006/relationships">
+  <p:cSld>
+    <p:spTree>
+      <p:nvGrpSpPr>
+        <p:cNvPr id="1" name=""/>
+        <p:cNvGrpSpPr/>
+        <p:nvPr/>
+      </p:nvGrpSpPr>
+      <p:grpSpPr/>
+      <p:sp>
+        <p:nvSpPr>
+          <p:cNvPr id="2" name="Title 1"/>
+          <p:cNvSpPr>
+            <a:spLocks noGrp="1"/>
+          </p:cNvSpPr>
+          <p:nvPr>
+            <p:ph type="title"/>
+          </p:nvPr>
+        </p:nvSpPr>
+        <p:spPr>
+          <a:xfrm>
+            <a:off x="585216" y="704088"/>
+            <a:ext cx="11027664" cy="1014984"/>
+          </a:xfrm>
+        </p:spPr>
+        <p:txBody>
+          <a:bodyPr wrap="square"/>
+          <a:lstStyle/>
+          <a:p>
+            <a:r>
+              <a:rPr b="0" sz="2450">
+                <a:ea typeface="맑은 고딕"/>
+                <a:cs typeface="맑은 고딕"/>
+              </a:rPr>
+              <a:t>문헌 조사 (1/4): 핵융합의 진단-대-진단 추정은 여전히 단순한 구조가 주류이다</a:t>
+            </a:r>
+          </a:p>
+        </p:txBody>
+      </p:sp>
+      <p:graphicFrame>
+        <p:nvGraphicFramePr>
+          <p:cNvPr id="3" name="Table 2"/>
+          <p:cNvGraphicFramePr>
+            <a:graphicFrameLocks noGrp="1"/>
+          </p:cNvGraphicFramePr>
+          <p:nvPr/>
+        </p:nvGraphicFramePr>
+        <p:xfrm>
+          <a:off x="585216" y="2029967"/>
+          <a:ext cx="11027661" cy="3760216"/>
+        </p:xfrm>
+        <a:graphic>
+          <a:graphicData uri="http://schemas.openxmlformats.org/drawingml/2006/table">
+            <a:tbl>
+              <a:tblPr firstRow="1" bandRow="1">
+                <a:tableStyleId>{5C22544A-7EE6-4342-B048-85BDC9FD1C3A}</a:tableStyleId>
+              </a:tblPr>
+              <a:tblGrid>
+                <a:gridCol w="2350157"/>
+                <a:gridCol w="3254064"/>
+                <a:gridCol w="2711720"/>
+                <a:gridCol w="2711720"/>
+              </a:tblGrid>
+              <a:tr h="274320">
+                <a:tc>
+                  <a:txBody>
+                    <a:bodyPr wrap="square"/>
+                    <a:lstStyle/>
+                    <a:p>
+                      <a:r>
+                        <a:rPr sz="1000" b="1">
+                          <a:ea typeface="맑은 고딕"/>
+                          <a:cs typeface="맑은 고딕"/>
+                        </a:rPr>
+                        <a:t>논문 (장치, 연도)</a:t>
+                      </a:r>
+                    </a:p>
+                  </a:txBody>
+                  <a:tcPr marL="54864" marR="54864" marT="18288" marB="18288" anchor="ctr"/>
+                </a:tc>
+                <a:tc>
+                  <a:txBody>
+                    <a:bodyPr wrap="square"/>
+                    <a:lstStyle/>
+                    <a:p>
+                      <a:r>
+                        <a:rPr sz="1000" b="1">
+                          <a:ea typeface="맑은 고딕"/>
+                          <a:cs typeface="맑은 고딕"/>
+                        </a:rPr>
+                        <a:t>문제 · 구조</a:t>
+                      </a:r>
+                    </a:p>
+                  </a:txBody>
+                  <a:tcPr marL="54864" marR="54864" marT="18288" marB="18288" anchor="ctr"/>
+                </a:tc>
+                <a:tc>
+                  <a:txBody>
+                    <a:bodyPr wrap="square"/>
+                    <a:lstStyle/>
+                    <a:p>
+                      <a:r>
+                        <a:rPr sz="1000" b="1">
+                          <a:ea typeface="맑은 고딕"/>
+                          <a:cs typeface="맑은 고딕"/>
+                        </a:rPr>
+                        <a:t>데이터 · 결과</a:t>
+                      </a:r>
+                    </a:p>
+                  </a:txBody>
+                  <a:tcPr marL="54864" marR="54864" marT="18288" marB="18288" anchor="ctr"/>
+                </a:tc>
+                <a:tc>
+                  <a:txBody>
+                    <a:bodyPr wrap="square"/>
+                    <a:lstStyle/>
+                    <a:p>
+                      <a:r>
+                        <a:rPr sz="1000" b="1">
+                          <a:ea typeface="맑은 고딕"/>
+                          <a:cs typeface="맑은 고딕"/>
+                        </a:rPr>
+                        <a:t>본 연구에 대한 의미</a:t>
+                      </a:r>
+                    </a:p>
+                  </a:txBody>
+                  <a:tcPr marL="54864" marR="54864" marT="18288" marB="18288" anchor="ctr"/>
+                </a:tc>
+              </a:tr>
+              <a:tr h="369824">
+                <a:tc>
+                  <a:txBody>
+                    <a:bodyPr wrap="square"/>
+                    <a:lstStyle/>
+                    <a:p>
+                      <a:r>
+                        <a:rPr sz="1000" b="0">
+                          <a:ea typeface="맑은 고딕"/>
+                          <a:cs typeface="맑은 고딕"/>
+                        </a:rPr>
+                        <a:t>Diag2Diag (DIII-D, Nat. Comm. 2025)</a:t>
+                      </a:r>
+                    </a:p>
+                  </a:txBody>
+                  <a:tcPr marL="54864" marR="54864" marT="18288" marB="18288" anchor="ctr"/>
+                </a:tc>
+                <a:tc>
+                  <a:txBody>
+                    <a:bodyPr wrap="square"/>
+                    <a:lstStyle/>
+                    <a:p>
+                      <a:r>
+                        <a:rPr sz="1000" b="0">
+                          <a:ea typeface="맑은 고딕"/>
+                          <a:cs typeface="맑은 고딕"/>
+                        </a:rPr>
+                        <a:t>Thomson 200 Hz → 500 kHz 시간 초해상. 무기억 MLP 236 → 952 → 80에 1 · 2차 미분 특징</a:t>
+                      </a:r>
+                    </a:p>
+                  </a:txBody>
+                  <a:tcPr marL="54864" marR="54864" marT="18288" marB="18288" anchor="ctr"/>
+                </a:tc>
+                <a:tc>
+                  <a:txBody>
+                    <a:bodyPr wrap="square"/>
+                    <a:lstStyle/>
+                    <a:p>
+                      <a:r>
+                        <a:rPr sz="1000" b="0">
+                          <a:ea typeface="맑은 고딕"/>
+                          <a:cs typeface="맑은 고딕"/>
+                        </a:rPr>
+                        <a:t>4,000 방전, R² 0.92, BNN 불확실성</a:t>
+                      </a:r>
+                    </a:p>
+                  </a:txBody>
+                  <a:tcPr marL="54864" marR="54864" marT="18288" marB="18288" anchor="ctr"/>
+                </a:tc>
+                <a:tc>
+                  <a:txBody>
+                    <a:bodyPr wrap="square"/>
+                    <a:lstStyle/>
+                    <a:p>
+                      <a:r>
+                        <a:rPr sz="1000" b="0">
+                          <a:ea typeface="맑은 고딕"/>
+                          <a:cs typeface="맑은 고딕"/>
+                        </a:rPr>
+                        <a:t>가장 가까운 문제가 가장 단순한 구조로 풀린다. seq_v2는 이미 인과 상태를 갖는다</a:t>
+                      </a:r>
+                    </a:p>
+                  </a:txBody>
+                  <a:tcPr marL="54864" marR="54864" marT="18288" marB="18288" anchor="ctr"/>
+                </a:tc>
+              </a:tr>
+              <a:tr h="369824">
+                <a:tc>
+                  <a:txBody>
+                    <a:bodyPr wrap="square"/>
+                    <a:lstStyle/>
+                    <a:p>
+                      <a:r>
+                        <a:rPr sz="1000" b="0">
+                          <a:ea typeface="맑은 고딕"/>
+                          <a:cs typeface="맑은 고딕"/>
+                        </a:rPr>
+                        <a:t>COMPASS 시간 초해상 (PPCF 2025)</a:t>
+                      </a:r>
+                    </a:p>
+                  </a:txBody>
+                  <a:tcPr marL="54864" marR="54864" marT="18288" marB="18288" anchor="ctr"/>
+                </a:tc>
+                <a:tc>
+                  <a:txBody>
+                    <a:bodyPr wrap="square"/>
+                    <a:lstStyle/>
+                    <a:p>
+                      <a:r>
+                        <a:rPr sz="1000" b="0">
+                          <a:ea typeface="맑은 고딕"/>
+                          <a:cs typeface="맑은 고딕"/>
+                        </a:rPr>
+                        <a:t>SXR · AXUV → Thomson Tₑ · nₑ. 4 × 256 MLP</a:t>
+                      </a:r>
+                    </a:p>
+                  </a:txBody>
+                  <a:tcPr marL="54864" marR="54864" marT="18288" marB="18288" anchor="ctr"/>
+                </a:tc>
+                <a:tc>
+                  <a:txBody>
+                    <a:bodyPr wrap="square"/>
+                    <a:lstStyle/>
+                    <a:p>
+                      <a:r>
+                        <a:rPr sz="1000" b="0">
+                          <a:ea typeface="맑은 고딕"/>
+                          <a:cs typeface="맑은 고딕"/>
+                        </a:rPr>
+                        <a:t>2,764 방전. 측정 불확실성 1/σ 가중 Huber 손실, 코어 MAPE 5 %</a:t>
+                      </a:r>
+                    </a:p>
+                  </a:txBody>
+                  <a:tcPr marL="54864" marR="54864" marT="18288" marB="18288" anchor="ctr"/>
+                </a:tc>
+                <a:tc>
+                  <a:txBody>
+                    <a:bodyPr wrap="square"/>
+                    <a:lstStyle/>
+                    <a:p>
+                      <a:r>
+                        <a:rPr sz="1000" b="0">
+                          <a:ea typeface="맑은 고딕"/>
+                          <a:cs typeface="맑은 고딕"/>
+                        </a:rPr>
+                        <a:t>불확실성 가중 손실은 §8aq의 꼬리 발견과 직결된다</a:t>
+                      </a:r>
+                    </a:p>
+                  </a:txBody>
+                  <a:tcPr marL="54864" marR="54864" marT="18288" marB="18288" anchor="ctr"/>
+                </a:tc>
+              </a:tr>
+              <a:tr h="369824">
+                <a:tc>
+                  <a:txBody>
+                    <a:bodyPr wrap="square"/>
+                    <a:lstStyle/>
+                    <a:p>
+                      <a:r>
+                        <a:rPr sz="1000" b="0">
+                          <a:ea typeface="맑은 고딕"/>
+                          <a:cs typeface="맑은 고딕"/>
+                        </a:rPr>
+                        <a:t>FusionMAE (HL-3, Comm. Phys. 2026)</a:t>
+                      </a:r>
+                    </a:p>
+                  </a:txBody>
+                  <a:tcPr marL="54864" marR="54864" marT="18288" marB="18288" anchor="ctr"/>
+                </a:tc>
+                <a:tc>
+                  <a:txBody>
+                    <a:bodyPr wrap="square"/>
+                    <a:lstStyle/>
+                    <a:p>
+                      <a:r>
+                        <a:rPr sz="1000" b="0">
+                          <a:ea typeface="맑은 고딕"/>
+                          <a:cs typeface="맑은 고딕"/>
+                        </a:rPr>
+                        <a:t>88채널 × 10 ms 마스크 오토인코더(MAE). 결측 채널 복원 = 가상 백업 진단</a:t>
+                      </a:r>
+                    </a:p>
+                  </a:txBody>
+                  <a:tcPr marL="54864" marR="54864" marT="18288" marB="18288" anchor="ctr"/>
+                </a:tc>
+                <a:tc>
+                  <a:txBody>
+                    <a:bodyPr wrap="square"/>
+                    <a:lstStyle/>
+                    <a:p>
+                      <a:r>
+                        <a:rPr sz="1000" b="0">
+                          <a:ea typeface="맑은 고딕"/>
+                          <a:cs typeface="맑은 고딕"/>
+                        </a:rPr>
+                        <a:t>복원 신뢰도 96.7 ~ 97.2 %</a:t>
+                      </a:r>
+                    </a:p>
+                  </a:txBody>
+                  <a:tcPr marL="54864" marR="54864" marT="18288" marB="18288" anchor="ctr"/>
+                </a:tc>
+                <a:tc>
+                  <a:txBody>
+                    <a:bodyPr wrap="square"/>
+                    <a:lstStyle/>
+                    <a:p>
+                      <a:r>
+                        <a:rPr sz="1000" b="0">
+                          <a:ea typeface="맑은 고딕"/>
+                          <a:cs typeface="맑은 고딕"/>
+                        </a:rPr>
+                        <a:t>본 과제를 MAE의 결측 채널 복원으로 보는 프레임. 사전학습 축은 미개척</a:t>
+                      </a:r>
+                    </a:p>
+                  </a:txBody>
+                  <a:tcPr marL="54864" marR="54864" marT="18288" marB="18288" anchor="ctr"/>
+                </a:tc>
+              </a:tr>
+              <a:tr h="369824">
+                <a:tc>
+                  <a:txBody>
+                    <a:bodyPr wrap="square"/>
+                    <a:lstStyle/>
+                    <a:p>
+                      <a:r>
+                        <a:rPr sz="1000" b="0">
+                          <a:ea typeface="맑은 고딕"/>
+                          <a:cs typeface="맑은 고딕"/>
+                        </a:rPr>
+                        <a:t>TokaMind (MAST, 2026)</a:t>
+                      </a:r>
+                    </a:p>
+                  </a:txBody>
+                  <a:tcPr marL="54864" marR="54864" marT="18288" marB="18288" anchor="ctr"/>
+                </a:tc>
+                <a:tc>
+                  <a:txBody>
+                    <a:bodyPr wrap="square"/>
+                    <a:lstStyle/>
+                    <a:p>
+                      <a:r>
+                        <a:rPr sz="1000" b="0">
+                          <a:ea typeface="맑은 고딕"/>
+                          <a:cs typeface="맑은 고딕"/>
+                        </a:rPr>
+                        <a:t>7M 미만 멀티모달 트랜스포머. DCT 임베딩, 5 ms 청크로 다중 샘플링률 처리</a:t>
+                      </a:r>
+                    </a:p>
+                  </a:txBody>
+                  <a:tcPr marL="54864" marR="54864" marT="18288" marB="18288" anchor="ctr"/>
+                </a:tc>
+                <a:tc>
+                  <a:txBody>
+                    <a:bodyPr wrap="square"/>
+                    <a:lstStyle/>
+                    <a:p>
+                      <a:r>
+                        <a:rPr sz="1000" b="0">
+                          <a:ea typeface="맑은 고딕"/>
+                          <a:cs typeface="맑은 고딕"/>
+                        </a:rPr>
+                        <a:t>11,573 방전. 미세조정 이득 전체 +0.017, 프로파일 -0.005, MHD +0.05</a:t>
+                      </a:r>
+                    </a:p>
+                  </a:txBody>
+                  <a:tcPr marL="54864" marR="54864" marT="18288" marB="18288" anchor="ctr"/>
+                </a:tc>
+                <a:tc>
+                  <a:txBody>
+                    <a:bodyPr wrap="square"/>
+                    <a:lstStyle/>
+                    <a:p>
+                      <a:r>
+                        <a:rPr sz="1000" b="0">
+                          <a:ea typeface="맑은 고딕"/>
+                          <a:cs typeface="맑은 고딕"/>
+                        </a:rPr>
+                        <a:t>프로파일류에는 사전학습이 거의 도움이 되지 않는다</a:t>
+                      </a:r>
+                    </a:p>
+                  </a:txBody>
+                  <a:tcPr marL="54864" marR="54864" marT="18288" marB="18288" anchor="ctr"/>
+                </a:tc>
+              </a:tr>
+              <a:tr h="369824">
+                <a:tc>
+                  <a:txBody>
+                    <a:bodyPr wrap="square"/>
+                    <a:lstStyle/>
+                    <a:p>
+                      <a:r>
+                        <a:rPr sz="1000" b="0">
+                          <a:ea typeface="맑은 고딕"/>
+                          <a:cs typeface="맑은 고딕"/>
+                        </a:rPr>
+                        <a:t>PanoMHD (KSTAR, 2026)</a:t>
+                      </a:r>
+                    </a:p>
+                  </a:txBody>
+                  <a:tcPr marL="54864" marR="54864" marT="18288" marB="18288" anchor="ctr"/>
+                </a:tc>
+                <a:tc>
+                  <a:txBody>
+                    <a:bodyPr wrap="square"/>
+                    <a:lstStyle/>
+                    <a:p>
+                      <a:r>
+                        <a:rPr sz="1000" b="0">
+                          <a:ea typeface="맑은 고딕"/>
+                          <a:cs typeface="맑은 고딕"/>
+                        </a:rPr>
+                        <a:t>Mirnov 스펙트로그램의 VQ-VAE 토큰 + 457M GPT-2</a:t>
+                      </a:r>
+                    </a:p>
+                  </a:txBody>
+                  <a:tcPr marL="54864" marR="54864" marT="18288" marB="18288" anchor="ctr"/>
+                </a:tc>
+                <a:tc>
+                  <a:txBody>
+                    <a:bodyPr wrap="square"/>
+                    <a:lstStyle/>
+                    <a:p>
+                      <a:r>
+                        <a:rPr sz="1000" b="0">
+                          <a:ea typeface="맑은 고딕"/>
+                          <a:cs typeface="맑은 고딕"/>
+                        </a:rPr>
+                        <a:t>978 방전, βN R² 0.987</a:t>
+                      </a:r>
+                    </a:p>
+                  </a:txBody>
+                  <a:tcPr marL="54864" marR="54864" marT="18288" marB="18288" anchor="ctr"/>
+                </a:tc>
+                <a:tc>
+                  <a:txBody>
+                    <a:bodyPr wrap="square"/>
+                    <a:lstStyle/>
+                    <a:p>
+                      <a:r>
+                        <a:rPr sz="1000" b="0">
+                          <a:ea typeface="맑은 고딕"/>
+                          <a:cs typeface="맑은 고딕"/>
+                        </a:rPr>
+                        <a:t>KSTAR에서 이산 코드북이 작동한 선례. 단 원시 2 MHz MC가 전제(B.6)</a:t>
+                      </a:r>
+                    </a:p>
+                  </a:txBody>
+                  <a:tcPr marL="54864" marR="54864" marT="18288" marB="18288" anchor="ctr"/>
+                </a:tc>
+              </a:tr>
+              <a:tr h="369824">
+                <a:tc>
+                  <a:txBody>
+                    <a:bodyPr wrap="square"/>
+                    <a:lstStyle/>
+                    <a:p>
+                      <a:r>
+                        <a:rPr sz="1000" b="0">
+                          <a:ea typeface="맑은 고딕"/>
+                          <a:cs typeface="맑은 고딕"/>
+                        </a:rPr>
+                        <a:t>TokaFormer · EAST 지식증류 (2025 ~ 26)</a:t>
+                      </a:r>
+                    </a:p>
+                  </a:txBody>
+                  <a:tcPr marL="54864" marR="54864" marT="18288" marB="18288" anchor="ctr"/>
+                </a:tc>
+                <a:tc>
+                  <a:txBody>
+                    <a:bodyPr wrap="square"/>
+                    <a:lstStyle/>
+                    <a:p>
+                      <a:r>
+                        <a:rPr sz="1000" b="0">
+                          <a:ea typeface="맑은 고딕"/>
+                          <a:cs typeface="맑은 고딕"/>
+                        </a:rPr>
+                        <a:t>붕괴 예측. 1D conv 임베딩 → 모달리티별 Transformer 후기 융합</a:t>
+                      </a:r>
+                    </a:p>
+                  </a:txBody>
+                  <a:tcPr marL="54864" marR="54864" marT="18288" marB="18288" anchor="ctr"/>
+                </a:tc>
+                <a:tc>
+                  <a:txBody>
+                    <a:bodyPr wrap="square"/>
+                    <a:lstStyle/>
+                    <a:p>
+                      <a:r>
+                        <a:rPr sz="1000" b="0">
+                          <a:ea typeface="맑은 고딕"/>
+                          <a:cs typeface="맑은 고딕"/>
+                        </a:rPr>
+                        <a:t>20 μs Mirnov와 1 ms 스칼라의 융합</a:t>
+                      </a:r>
+                    </a:p>
+                  </a:txBody>
+                  <a:tcPr marL="54864" marR="54864" marT="18288" marB="18288" anchor="ctr"/>
+                </a:tc>
+                <a:tc>
+                  <a:txBody>
+                    <a:bodyPr wrap="square"/>
+                    <a:lstStyle/>
+                    <a:p>
+                      <a:r>
+                        <a:rPr sz="1000" b="0">
+                          <a:ea typeface="맑은 고딕"/>
+                          <a:cs typeface="맑은 고딕"/>
+                        </a:rPr>
+                        <a:t>CNN + Transformer가 주류인 곳은 붕괴 예측이며 회귀 천장 문제가 아니다</a:t>
+                      </a:r>
+                    </a:p>
+                  </a:txBody>
+                  <a:tcPr marL="54864" marR="54864" marT="18288" marB="18288" anchor="ctr"/>
+                </a:tc>
+              </a:tr>
+              <a:tr h="369824">
+                <a:tc>
+                  <a:txBody>
+                    <a:bodyPr wrap="square"/>
+                    <a:lstStyle/>
+                    <a:p>
+                      <a:r>
+                        <a:rPr sz="1000" b="0">
+                          <a:ea typeface="맑은 고딕"/>
+                          <a:cs typeface="맑은 고딕"/>
+                        </a:rPr>
+                        <a:t>WEST (2026)</a:t>
+                      </a:r>
+                    </a:p>
+                  </a:txBody>
+                  <a:tcPr marL="54864" marR="54864" marT="18288" marB="18288" anchor="ctr"/>
+                </a:tc>
+                <a:tc>
+                  <a:txBody>
+                    <a:bodyPr wrap="square"/>
+                    <a:lstStyle/>
+                    <a:p>
+                      <a:r>
+                        <a:rPr sz="1000" b="0">
+                          <a:ea typeface="맑은 고딕"/>
+                          <a:cs typeface="맑은 고딕"/>
+                        </a:rPr>
+                        <a:t>사전 방전 설정 → 전역 파라미터. Transformer / LSTM / MLP 비교</a:t>
+                      </a:r>
+                    </a:p>
+                  </a:txBody>
+                  <a:tcPr marL="54864" marR="54864" marT="18288" marB="18288" anchor="ctr"/>
+                </a:tc>
+                <a:tc>
+                  <a:txBody>
+                    <a:bodyPr wrap="square"/>
+                    <a:lstStyle/>
+                    <a:p>
+                      <a:r>
+                        <a:rPr sz="1000" b="0">
+                          <a:ea typeface="맑은 고딕"/>
+                          <a:cs typeface="맑은 고딕"/>
+                        </a:rPr>
+                        <a:t>550 방전. MSE 0.0096 / 0.015 / 0.022</a:t>
+                      </a:r>
+                    </a:p>
+                  </a:txBody>
+                  <a:tcPr marL="54864" marR="54864" marT="18288" marB="18288" anchor="ctr"/>
+                </a:tc>
+                <a:tc>
+                  <a:txBody>
+                    <a:bodyPr wrap="square"/>
+                    <a:lstStyle/>
+                    <a:p>
+                      <a:r>
+                        <a:rPr sz="1000" b="0">
+                          <a:ea typeface="맑은 고딕"/>
+                          <a:cs typeface="맑은 고딕"/>
+                        </a:rPr>
+                        <a:t>작은 데이터에서 Transformer가 이긴 사례이나 10 ~ 70 s 장기 의존 과제이다</a:t>
+                      </a:r>
+                    </a:p>
+                  </a:txBody>
+                  <a:tcPr marL="54864" marR="54864" marT="18288" marB="18288" anchor="ctr"/>
+                </a:tc>
+              </a:tr>
+              <a:tr h="527304">
+                <a:tc>
+                  <a:txBody>
+                    <a:bodyPr wrap="square"/>
+                    <a:lstStyle/>
+                    <a:p>
+                      <a:r>
+                        <a:rPr sz="1000" b="0">
+                          <a:ea typeface="맑은 고딕"/>
+                          <a:cs typeface="맑은 고딕"/>
+                        </a:rPr>
+                        <a:t>EAST XCS ANN (NF 2024)</a:t>
+                      </a:r>
+                    </a:p>
+                  </a:txBody>
+                  <a:tcPr marL="54864" marR="54864" marT="18288" marB="18288" anchor="ctr"/>
+                </a:tc>
+                <a:tc>
+                  <a:txBody>
+                    <a:bodyPr wrap="square"/>
+                    <a:lstStyle/>
+                    <a:p>
+                      <a:r>
+                        <a:rPr sz="1000" b="0">
+                          <a:ea typeface="맑은 고딕"/>
+                          <a:cs typeface="맑은 고딕"/>
+                        </a:rPr>
+                        <a:t>X선 결정 분광 스펙트럼 → Tᵢ · 회전. 2 × 9 DNN, 31k CNN</a:t>
+                      </a:r>
+                    </a:p>
+                  </a:txBody>
+                  <a:tcPr marL="54864" marR="54864" marT="18288" marB="18288" anchor="ctr"/>
+                </a:tc>
+                <a:tc>
+                  <a:txBody>
+                    <a:bodyPr wrap="square"/>
+                    <a:lstStyle/>
+                    <a:p>
+                      <a:r>
+                        <a:rPr sz="1000" b="0">
+                          <a:ea typeface="맑은 고딕"/>
+                          <a:cs typeface="맑은 고딕"/>
+                        </a:rPr>
+                        <a:t>530 방전, R² 0.96, 시간 이력 없음</a:t>
+                      </a:r>
+                    </a:p>
+                  </a:txBody>
+                  <a:tcPr marL="54864" marR="54864" marT="18288" marB="18288" anchor="ctr"/>
+                </a:tc>
+                <a:tc>
+                  <a:txBody>
+                    <a:bodyPr wrap="square"/>
+                    <a:lstStyle/>
+                    <a:p>
+                      <a:r>
+                        <a:rPr sz="1000" b="0">
+                          <a:ea typeface="맑은 고딕"/>
+                          <a:cs typeface="맑은 고딕"/>
+                        </a:rPr>
+                        <a:t>회전을 실제로 추론한 선례이며 입력은 도플러 분광이다. 우리의 V_rot 경로가 어떤 입력을 확보해야 하는지를 가리킨다</a:t>
+                      </a:r>
+                    </a:p>
+                  </a:txBody>
+                  <a:tcPr marL="54864" marR="54864" marT="18288" marB="18288" anchor="ctr"/>
+                </a:tc>
+              </a:tr>
+              <a:tr h="369824">
+                <a:tc>
+                  <a:txBody>
+                    <a:bodyPr wrap="square"/>
+                    <a:lstStyle/>
+                    <a:p>
+                      <a:r>
+                        <a:rPr sz="1000" b="0">
+                          <a:ea typeface="맑은 고딕"/>
+                          <a:cs typeface="맑은 고딕"/>
+                        </a:rPr>
+                        <a:t>TCV 멀티모달 VAE (2025) · Abbate 물리 + 데이터 메타학습 (NF 2025)</a:t>
+                      </a:r>
+                    </a:p>
+                  </a:txBody>
+                  <a:tcPr marL="54864" marR="54864" marT="18288" marB="18288" anchor="ctr"/>
+                </a:tc>
+                <a:tc>
+                  <a:txBody>
+                    <a:bodyPr wrap="square"/>
+                    <a:lstStyle/>
+                    <a:p>
+                      <a:r>
+                        <a:rPr sz="1000" b="0">
+                          <a:ea typeface="맑은 고딕"/>
+                          <a:cs typeface="맑은 고딕"/>
+                        </a:rPr>
+                        <a:t>상태 감시용 순차 VAE · 물리 모델로 외삽</a:t>
+                      </a:r>
+                    </a:p>
+                  </a:txBody>
+                  <a:tcPr marL="54864" marR="54864" marT="18288" marB="18288" anchor="ctr"/>
+                </a:tc>
+                <a:tc>
+                  <a:txBody>
+                    <a:bodyPr wrap="square"/>
+                    <a:lstStyle/>
+                    <a:p>
+                      <a:r>
+                        <a:rPr sz="1000" b="0">
+                          <a:ea typeface="맑은 고딕"/>
+                          <a:cs typeface="맑은 고딕"/>
+                        </a:rPr>
+                        <a:t>1,600 방전 · 외삽 5 ~ 10 % 개선</a:t>
+                      </a:r>
+                    </a:p>
+                  </a:txBody>
+                  <a:tcPr marL="54864" marR="54864" marT="18288" marB="18288" anchor="ctr"/>
+                </a:tc>
+                <a:tc>
+                  <a:txBody>
+                    <a:bodyPr wrap="square"/>
+                    <a:lstStyle/>
+                    <a:p>
+                      <a:r>
+                        <a:rPr sz="1000" b="0">
+                          <a:ea typeface="맑은 고딕"/>
+                          <a:cs typeface="맑은 고딕"/>
+                        </a:rPr>
+                        <a:t>VAE의 용도는 해석 · 이상탐지이고, 물리 모델은 외삽을 맡는다</a:t>
+                      </a:r>
+                    </a:p>
+                  </a:txBody>
+                  <a:tcPr marL="54864" marR="54864" marT="18288" marB="18288" anchor="ctr"/>
+                </a:tc>
+              </a:tr>
+            </a:tbl>
+          </a:graphicData>
+        </a:graphic>
+      </p:graphicFrame>
+    </p:spTree>
+  </p:cSld>
+  <p:clrMapOvr>
+    <a:masterClrMapping/>
+  </p:clrMapOvr>
+</p:sld>
+</file>
+
+<file path=ppt/slides/slide56.xml><?xml version="1.0" encoding="utf-8"?>
+<p:sld xmlns:a="http://schemas.openxmlformats.org/drawingml/2006/main" xmlns:p="http://schemas.openxmlformats.org/presentationml/2006/main" xmlns:r="http://schemas.openxmlformats.org/officeDocument/2006/relationships">
+  <p:cSld>
+    <p:spTree>
+      <p:nvGrpSpPr>
+        <p:cNvPr id="1" name=""/>
+        <p:cNvGrpSpPr/>
+        <p:nvPr/>
+      </p:nvGrpSpPr>
+      <p:grpSpPr/>
+      <p:sp>
+        <p:nvSpPr>
+          <p:cNvPr id="2" name="Title 1"/>
+          <p:cNvSpPr>
+            <a:spLocks noGrp="1"/>
+          </p:cNvSpPr>
+          <p:nvPr>
+            <p:ph type="title"/>
+          </p:nvPr>
+        </p:nvSpPr>
+        <p:spPr>
+          <a:xfrm>
+            <a:off x="585216" y="704088"/>
+            <a:ext cx="11027664" cy="1014984"/>
+          </a:xfrm>
+        </p:spPr>
+        <p:txBody>
+          <a:bodyPr wrap="square"/>
+          <a:lstStyle/>
+          <a:p>
+            <a:r>
+              <a:rPr b="0" sz="2650">
+                <a:ea typeface="맑은 고딕"/>
+                <a:cs typeface="맑은 고딕"/>
+              </a:rPr>
+              <a:t>문헌 조사 (2/4): 일반 시계열 · 센서 예측의 주류와 본 데이터에 대한 판정</a:t>
+            </a:r>
+          </a:p>
+        </p:txBody>
+      </p:sp>
+      <p:graphicFrame>
+        <p:nvGraphicFramePr>
+          <p:cNvPr id="3" name="Table 2"/>
+          <p:cNvGraphicFramePr>
+            <a:graphicFrameLocks noGrp="1"/>
+          </p:cNvGraphicFramePr>
+          <p:nvPr/>
+        </p:nvGraphicFramePr>
+        <p:xfrm>
+          <a:off x="585216" y="2029967"/>
+          <a:ext cx="11027662" cy="3760216"/>
+        </p:xfrm>
+        <a:graphic>
+          <a:graphicData uri="http://schemas.openxmlformats.org/drawingml/2006/table">
+            <a:tbl>
+              <a:tblPr firstRow="1" bandRow="1">
+                <a:tableStyleId>{5C22544A-7EE6-4342-B048-85BDC9FD1C3A}</a:tableStyleId>
+              </a:tblPr>
+              <a:tblGrid>
+                <a:gridCol w="1988595"/>
+                <a:gridCol w="2711720"/>
+                <a:gridCol w="3525236"/>
+                <a:gridCol w="2802111"/>
+              </a:tblGrid>
+              <a:tr h="274320">
+                <a:tc>
+                  <a:txBody>
+                    <a:bodyPr wrap="square"/>
+                    <a:lstStyle/>
+                    <a:p>
+                      <a:r>
+                        <a:rPr sz="1000" b="1">
+                          <a:ea typeface="맑은 고딕"/>
+                          <a:cs typeface="맑은 고딕"/>
+                        </a:rPr>
+                        <a:t>방법군</a:t>
+                      </a:r>
+                    </a:p>
+                  </a:txBody>
+                  <a:tcPr marL="54864" marR="54864" marT="18288" marB="18288" anchor="ctr"/>
+                </a:tc>
+                <a:tc>
+                  <a:txBody>
+                    <a:bodyPr wrap="square"/>
+                    <a:lstStyle/>
+                    <a:p>
+                      <a:r>
+                        <a:rPr sz="1000" b="1">
+                          <a:ea typeface="맑은 고딕"/>
+                          <a:cs typeface="맑은 고딕"/>
+                        </a:rPr>
+                        <a:t>대표 (연도)</a:t>
+                      </a:r>
+                    </a:p>
+                  </a:txBody>
+                  <a:tcPr marL="54864" marR="54864" marT="18288" marB="18288" anchor="ctr"/>
+                </a:tc>
+                <a:tc>
+                  <a:txBody>
+                    <a:bodyPr wrap="square"/>
+                    <a:lstStyle/>
+                    <a:p>
+                      <a:r>
+                        <a:rPr sz="1000" b="1">
+                          <a:ea typeface="맑은 고딕"/>
+                          <a:cs typeface="맑은 고딕"/>
+                        </a:rPr>
+                        <a:t>문헌의 주장</a:t>
+                      </a:r>
+                    </a:p>
+                  </a:txBody>
+                  <a:tcPr marL="54864" marR="54864" marT="18288" marB="18288" anchor="ctr"/>
+                </a:tc>
+                <a:tc>
+                  <a:txBody>
+                    <a:bodyPr wrap="square"/>
+                    <a:lstStyle/>
+                    <a:p>
+                      <a:r>
+                        <a:rPr sz="1000" b="1">
+                          <a:ea typeface="맑은 고딕"/>
+                          <a:cs typeface="맑은 고딕"/>
+                        </a:rPr>
+                        <a:t>본 데이터에 대한 판정</a:t>
+                      </a:r>
+                    </a:p>
+                  </a:txBody>
+                  <a:tcPr marL="54864" marR="54864" marT="18288" marB="18288" anchor="ctr"/>
+                </a:tc>
+              </a:tr>
+              <a:tr h="527304">
+                <a:tc>
+                  <a:txBody>
+                    <a:bodyPr wrap="square"/>
+                    <a:lstStyle/>
+                    <a:p>
+                      <a:r>
+                        <a:rPr sz="1000" b="0">
+                          <a:ea typeface="맑은 고딕"/>
+                          <a:cs typeface="맑은 고딕"/>
+                        </a:rPr>
+                        <a:t>결측 대체 (imputation)</a:t>
+                      </a:r>
+                    </a:p>
+                  </a:txBody>
+                  <a:tcPr marL="54864" marR="54864" marT="18288" marB="18288" anchor="ctr"/>
+                </a:tc>
+                <a:tc>
+                  <a:txBody>
+                    <a:bodyPr wrap="square"/>
+                    <a:lstStyle/>
+                    <a:p>
+                      <a:r>
+                        <a:rPr sz="1000" b="0">
+                          <a:ea typeface="맑은 고딕"/>
+                          <a:cs typeface="맑은 고딕"/>
+                        </a:rPr>
+                        <a:t>TSI-Bench 28개 (2024) · STDiff (2025)</a:t>
+                      </a:r>
+                    </a:p>
+                  </a:txBody>
+                  <a:tcPr marL="54864" marR="54864" marT="18288" marB="18288" anchor="ctr"/>
+                </a:tc>
+                <a:tc>
+                  <a:txBody>
+                    <a:bodyPr wrap="square"/>
+                    <a:lstStyle/>
+                    <a:p>
+                      <a:r>
+                        <a:rPr sz="1000" b="0">
+                          <a:ea typeface="맑은 고딕"/>
+                          <a:cs typeface="맑은 고딕"/>
+                        </a:rPr>
+                        <a:t>점 결측에선 선형보간이 딥러닝 전부를 이기는 데이터셋이 있고 블록 결측에서만 딥이 필요하다. 윈도 기반은 긴 공백에서 평탄화된다</a:t>
+                      </a:r>
+                    </a:p>
+                  </a:txBody>
+                  <a:tcPr marL="54864" marR="54864" marT="18288" marB="18288" anchor="ctr"/>
+                </a:tc>
+                <a:tc>
+                  <a:txBody>
+                    <a:bodyPr wrap="square"/>
+                    <a:lstStyle/>
+                    <a:p>
+                      <a:r>
+                        <a:rPr sz="1000" b="0">
+                          <a:ea typeface="맑은 고딕"/>
+                          <a:cs typeface="맑은 고딕"/>
+                        </a:rPr>
+                        <a:t>GP 동률(§8p)의 문헌 재확인. seq_v2는 이미 상태전이형이다</a:t>
+                      </a:r>
+                    </a:p>
+                  </a:txBody>
+                  <a:tcPr marL="54864" marR="54864" marT="18288" marB="18288" anchor="ctr"/>
+                </a:tc>
+              </a:tr>
+              <a:tr h="369824">
+                <a:tc>
+                  <a:txBody>
+                    <a:bodyPr wrap="square"/>
+                    <a:lstStyle/>
+                    <a:p>
+                      <a:r>
+                        <a:rPr sz="1000" b="0">
+                          <a:ea typeface="맑은 고딕"/>
+                          <a:cs typeface="맑은 고딕"/>
+                        </a:rPr>
+                        <a:t>불규칙 샘플링</a:t>
+                      </a:r>
+                    </a:p>
+                  </a:txBody>
+                  <a:tcPr marL="54864" marR="54864" marT="18288" marB="18288" anchor="ctr"/>
+                </a:tc>
+                <a:tc>
+                  <a:txBody>
+                    <a:bodyPr wrap="square"/>
+                    <a:lstStyle/>
+                    <a:p>
+                      <a:r>
+                        <a:rPr sz="1000" b="0">
+                          <a:ea typeface="맑은 고딕"/>
+                          <a:cs typeface="맑은 고딕"/>
+                        </a:rPr>
+                        <a:t>Neural CDE · mTAN · ContiFormer · iTimER (2025)</a:t>
+                      </a:r>
+                    </a:p>
+                  </a:txBody>
+                  <a:tcPr marL="54864" marR="54864" marT="18288" marB="18288" anchor="ctr"/>
+                </a:tc>
+                <a:tc>
+                  <a:txBody>
+                    <a:bodyPr wrap="square"/>
+                    <a:lstStyle/>
+                    <a:p>
+                      <a:r>
+                        <a:rPr sz="1000" b="0">
+                          <a:ea typeface="맑은 고딕"/>
+                          <a:cs typeface="맑은 고딕"/>
+                        </a:rPr>
+                        <a:t>연속시간 ODE와 어텐션이 주류</a:t>
+                      </a:r>
+                    </a:p>
+                  </a:txBody>
+                  <a:tcPr marL="54864" marR="54864" marT="18288" marB="18288" anchor="ctr"/>
+                </a:tc>
+                <a:tc>
+                  <a:txBody>
+                    <a:bodyPr wrap="square"/>
+                    <a:lstStyle/>
+                    <a:p>
+                      <a:r>
+                        <a:rPr sz="1000" b="0">
+                          <a:ea typeface="맑은 고딕"/>
+                          <a:cs typeface="맑은 고딕"/>
+                        </a:rPr>
+                        <a:t>격자는 규칙 10 ms이고 결측만 있다. staleness 채널로 처리 완료 (§8e)</a:t>
+                      </a:r>
+                    </a:p>
+                  </a:txBody>
+                  <a:tcPr marL="54864" marR="54864" marT="18288" marB="18288" anchor="ctr"/>
+                </a:tc>
+              </a:tr>
+              <a:tr h="369824">
+                <a:tc>
+                  <a:txBody>
+                    <a:bodyPr wrap="square"/>
+                    <a:lstStyle/>
+                    <a:p>
+                      <a:r>
+                        <a:rPr sz="1000" b="0">
+                          <a:ea typeface="맑은 고딕"/>
+                          <a:cs typeface="맑은 고딕"/>
+                        </a:rPr>
+                        <a:t>예측 백본 논쟁</a:t>
+                      </a:r>
+                    </a:p>
+                  </a:txBody>
+                  <a:tcPr marL="54864" marR="54864" marT="18288" marB="18288" anchor="ctr"/>
+                </a:tc>
+                <a:tc>
+                  <a:txBody>
+                    <a:bodyPr wrap="square"/>
+                    <a:lstStyle/>
+                    <a:p>
+                      <a:r>
+                        <a:rPr sz="1000" b="0">
+                          <a:ea typeface="맑은 고딕"/>
+                          <a:cs typeface="맑은 고딕"/>
+                        </a:rPr>
+                        <a:t>DLinear vs PatchTST · iTransformer · TimeXer (2024), Mamba 혼합, xLSTM</a:t>
+                      </a:r>
+                    </a:p>
+                  </a:txBody>
+                  <a:tcPr marL="54864" marR="54864" marT="18288" marB="18288" anchor="ctr"/>
+                </a:tc>
+                <a:tc>
+                  <a:txBody>
+                    <a:bodyPr wrap="square"/>
+                    <a:lstStyle/>
+                    <a:p>
+                      <a:r>
+                        <a:rPr sz="1000" b="0">
+                          <a:ea typeface="맑은 고딕"/>
+                          <a:cs typeface="맑은 고딕"/>
+                        </a:rPr>
+                        <a:t>계열 우열이 데이터마다 뒤집힌다</a:t>
+                      </a:r>
+                    </a:p>
+                  </a:txBody>
+                  <a:tcPr marL="54864" marR="54864" marT="18288" marB="18288" anchor="ctr"/>
+                </a:tc>
+                <a:tc>
+                  <a:txBody>
+                    <a:bodyPr wrap="square"/>
+                    <a:lstStyle/>
+                    <a:p>
+                      <a:r>
+                        <a:rPr sz="1000" b="0">
+                          <a:ea typeface="맑은 고딕"/>
+                          <a:cs typeface="맑은 고딕"/>
+                        </a:rPr>
+                        <a:t>B.9와 정합. 150 ms · 10k 파라미터 위에선 계열이 무관하다</a:t>
+                      </a:r>
+                    </a:p>
+                  </a:txBody>
+                  <a:tcPr marL="54864" marR="54864" marT="18288" marB="18288" anchor="ctr"/>
+                </a:tc>
+              </a:tr>
+              <a:tr h="369824">
+                <a:tc>
+                  <a:txBody>
+                    <a:bodyPr wrap="square"/>
+                    <a:lstStyle/>
+                    <a:p>
+                      <a:r>
+                        <a:rPr sz="1000" b="0">
+                          <a:ea typeface="맑은 고딕"/>
+                          <a:cs typeface="맑은 고딕"/>
+                        </a:rPr>
+                        <a:t>파운데이션 모델</a:t>
+                      </a:r>
+                    </a:p>
+                  </a:txBody>
+                  <a:tcPr marL="54864" marR="54864" marT="18288" marB="18288" anchor="ctr"/>
+                </a:tc>
+                <a:tc>
+                  <a:txBody>
+                    <a:bodyPr wrap="square"/>
+                    <a:lstStyle/>
+                    <a:p>
+                      <a:r>
+                        <a:rPr sz="1000" b="0">
+                          <a:ea typeface="맑은 고딕"/>
+                          <a:cs typeface="맑은 고딕"/>
+                        </a:rPr>
+                        <a:t>Chronos-2 (120M) · TiRex-2 (xLSTM, 스트리밍) · TabPFN-TS (11M) · Toto</a:t>
+                      </a:r>
+                    </a:p>
+                  </a:txBody>
+                  <a:tcPr marL="54864" marR="54864" marT="18288" marB="18288" anchor="ctr"/>
+                </a:tc>
+                <a:tc>
+                  <a:txBody>
+                    <a:bodyPr wrap="square"/>
+                    <a:lstStyle/>
+                    <a:p>
+                      <a:r>
+                        <a:rPr sz="1000" b="0">
+                          <a:ea typeface="맑은 고딕"/>
+                          <a:cs typeface="맑은 고딕"/>
+                        </a:rPr>
+                        <a:t>제로샷으로 강하다. 단 벤치마크 오염 경고(데이터셋 93 %가 어딘가의 사전학습에 쓰임)</a:t>
+                      </a:r>
+                    </a:p>
+                  </a:txBody>
+                  <a:tcPr marL="54864" marR="54864" marT="18288" marB="18288" anchor="ctr"/>
+                </a:tc>
+                <a:tc>
+                  <a:txBody>
+                    <a:bodyPr wrap="square"/>
+                    <a:lstStyle/>
+                    <a:p>
+                      <a:r>
+                        <a:rPr sz="1000" b="0">
+                          <a:ea typeface="맑은 고딕"/>
+                          <a:cs typeface="맑은 고딕"/>
+                        </a:rPr>
+                        <a:t>KSTAR는 오염이 불가능하다. 학습 없는 대조군으로 가치가 있다</a:t>
+                      </a:r>
+                    </a:p>
+                  </a:txBody>
+                  <a:tcPr marL="54864" marR="54864" marT="18288" marB="18288" anchor="ctr"/>
+                </a:tc>
+              </a:tr>
+              <a:tr h="369824">
+                <a:tc>
+                  <a:txBody>
+                    <a:bodyPr wrap="square"/>
+                    <a:lstStyle/>
+                    <a:p>
+                      <a:r>
+                        <a:rPr sz="1000" b="0">
+                          <a:ea typeface="맑은 고딕"/>
+                          <a:cs typeface="맑은 고딕"/>
+                        </a:rPr>
+                        <a:t>자기지도 사전학습</a:t>
+                      </a:r>
+                    </a:p>
+                  </a:txBody>
+                  <a:tcPr marL="54864" marR="54864" marT="18288" marB="18288" anchor="ctr"/>
+                </a:tc>
+                <a:tc>
+                  <a:txBody>
+                    <a:bodyPr wrap="square"/>
+                    <a:lstStyle/>
+                    <a:p>
+                      <a:r>
+                        <a:rPr sz="1000" b="0">
+                          <a:ea typeface="맑은 고딕"/>
+                          <a:cs typeface="맑은 고딕"/>
+                        </a:rPr>
+                        <a:t>TimeMAE (2026) · Ti-MAE · TokEye (핵융합, 2026)</a:t>
+                      </a:r>
+                    </a:p>
+                  </a:txBody>
+                  <a:tcPr marL="54864" marR="54864" marT="18288" marB="18288" anchor="ctr"/>
+                </a:tc>
+                <a:tc>
+                  <a:txBody>
+                    <a:bodyPr wrap="square"/>
+                    <a:lstStyle/>
+                    <a:p>
+                      <a:r>
+                        <a:rPr sz="1000" b="0">
+                          <a:ea typeface="맑은 고딕"/>
+                          <a:cs typeface="맑은 고딕"/>
+                        </a:rPr>
+                        <a:t>라벨이 희소할 때 이득</a:t>
+                      </a:r>
+                    </a:p>
+                  </a:txBody>
+                  <a:tcPr marL="54864" marR="54864" marT="18288" marB="18288" anchor="ctr"/>
+                </a:tc>
+                <a:tc>
+                  <a:txBody>
+                    <a:bodyPr wrap="square"/>
+                    <a:lstStyle/>
+                    <a:p>
+                      <a:r>
+                        <a:rPr sz="1000" b="0">
+                          <a:ea typeface="맑은 고딕"/>
+                          <a:cs typeface="맑은 고딕"/>
+                        </a:rPr>
+                        <a:t>Tᵢ 라벨은 92 % 관측이고 TokaMind의 프로파일 이득은 음수이다</a:t>
+                      </a:r>
+                    </a:p>
+                  </a:txBody>
+                  <a:tcPr marL="54864" marR="54864" marT="18288" marB="18288" anchor="ctr"/>
+                </a:tc>
+              </a:tr>
+              <a:tr h="369824">
+                <a:tc>
+                  <a:txBody>
+                    <a:bodyPr wrap="square"/>
+                    <a:lstStyle/>
+                    <a:p>
+                      <a:r>
+                        <a:rPr sz="1000" b="0">
+                          <a:ea typeface="맑은 고딕"/>
+                          <a:cs typeface="맑은 고딕"/>
+                        </a:rPr>
+                        <a:t>소프트센서 (공정 산업)</a:t>
+                      </a:r>
+                    </a:p>
+                  </a:txBody>
+                  <a:tcPr marL="54864" marR="54864" marT="18288" marB="18288" anchor="ctr"/>
+                </a:tc>
+                <a:tc>
+                  <a:txBody>
+                    <a:bodyPr wrap="square"/>
+                    <a:lstStyle/>
+                    <a:p>
+                      <a:r>
+                        <a:rPr sz="1000" b="0">
+                          <a:ea typeface="맑은 고딕"/>
+                          <a:cs typeface="맑은 고딕"/>
+                        </a:rPr>
+                        <a:t>반지도 VAE 회귀 · Soft-Sensing Transformer · ConFormer</a:t>
+                      </a:r>
+                    </a:p>
+                  </a:txBody>
+                  <a:tcPr marL="54864" marR="54864" marT="18288" marB="18288" anchor="ctr"/>
+                </a:tc>
+                <a:tc>
+                  <a:txBody>
+                    <a:bodyPr wrap="square"/>
+                    <a:lstStyle/>
+                    <a:p>
+                      <a:r>
+                        <a:rPr sz="1000" b="0">
+                          <a:ea typeface="맑은 고딕"/>
+                          <a:cs typeface="맑은 고딕"/>
+                        </a:rPr>
+                        <a:t>반지도가 핵심. MLP 백본이 Transformer와 동급인 보고도 있다</a:t>
+                      </a:r>
+                    </a:p>
+                  </a:txBody>
+                  <a:tcPr marL="54864" marR="54864" marT="18288" marB="18288" anchor="ctr"/>
+                </a:tc>
+                <a:tc>
+                  <a:txBody>
+                    <a:bodyPr wrap="square"/>
+                    <a:lstStyle/>
+                    <a:p>
+                      <a:r>
+                        <a:rPr sz="1000" b="0">
+                          <a:ea typeface="맑은 고딕"/>
+                          <a:cs typeface="맑은 고딕"/>
+                        </a:rPr>
+                        <a:t>Tᵢ에는 반지도 이득 조건이 없다. V_rot는 라벨이 아니라 입력을 늘리는 문제로 남아 있다</a:t>
+                      </a:r>
+                    </a:p>
+                  </a:txBody>
+                  <a:tcPr marL="54864" marR="54864" marT="18288" marB="18288" anchor="ctr"/>
+                </a:tc>
+              </a:tr>
+              <a:tr h="369824">
+                <a:tc>
+                  <a:txBody>
+                    <a:bodyPr wrap="square"/>
+                    <a:lstStyle/>
+                    <a:p>
+                      <a:r>
+                        <a:rPr sz="1000" b="0">
+                          <a:ea typeface="맑은 고딕"/>
+                          <a:cs typeface="맑은 고딕"/>
+                        </a:rPr>
+                        <a:t>MoE · 레짐 게이팅</a:t>
+                      </a:r>
+                    </a:p>
+                  </a:txBody>
+                  <a:tcPr marL="54864" marR="54864" marT="18288" marB="18288" anchor="ctr"/>
+                </a:tc>
+                <a:tc>
+                  <a:txBody>
+                    <a:bodyPr wrap="square"/>
+                    <a:lstStyle/>
+                    <a:p>
+                      <a:r>
+                        <a:rPr sz="1000" b="0">
+                          <a:ea typeface="맑은 고딕"/>
+                          <a:cs typeface="맑은 고딕"/>
+                        </a:rPr>
+                        <a:t>RG-ResMoE (2026) · Dynamic TMoE</a:t>
+                      </a:r>
+                    </a:p>
+                  </a:txBody>
+                  <a:tcPr marL="54864" marR="54864" marT="18288" marB="18288" anchor="ctr"/>
+                </a:tc>
+                <a:tc>
+                  <a:txBody>
+                    <a:bodyPr wrap="square"/>
+                    <a:lstStyle/>
+                    <a:p>
+                      <a:r>
+                        <a:rPr sz="1000" b="0">
+                          <a:ea typeface="맑은 고딕"/>
+                          <a:cs typeface="맑은 고딕"/>
+                        </a:rPr>
+                        <a:t>동결 기저 + 잔차 전문가 + soft 게이트. hard top-1 라우팅은 유의하게 열세</a:t>
+                      </a:r>
+                    </a:p>
+                  </a:txBody>
+                  <a:tcPr marL="54864" marR="54864" marT="18288" marB="18288" anchor="ctr"/>
+                </a:tc>
+                <a:tc>
+                  <a:txBody>
+                    <a:bodyPr wrap="square"/>
+                    <a:lstStyle/>
+                    <a:p>
+                      <a:r>
+                        <a:rPr sz="1000" b="0">
+                          <a:ea typeface="맑은 고딕"/>
+                          <a:cs typeface="맑은 고딕"/>
+                        </a:rPr>
+                        <a:t>B.11(hard argmin VQ)의 직접 선례. soft 게이트 자매 팔이 필요하다</a:t>
+                      </a:r>
+                    </a:p>
+                  </a:txBody>
+                  <a:tcPr marL="54864" marR="54864" marT="18288" marB="18288" anchor="ctr"/>
+                </a:tc>
+              </a:tr>
+              <a:tr h="369824">
+                <a:tc>
+                  <a:txBody>
+                    <a:bodyPr wrap="square"/>
+                    <a:lstStyle/>
+                    <a:p>
+                      <a:r>
+                        <a:rPr sz="1000" b="0">
+                          <a:ea typeface="맑은 고딕"/>
+                          <a:cs typeface="맑은 고딕"/>
+                        </a:rPr>
+                        <a:t>학습 상태추정</a:t>
+                      </a:r>
+                    </a:p>
+                  </a:txBody>
+                  <a:tcPr marL="54864" marR="54864" marT="18288" marB="18288" anchor="ctr"/>
+                </a:tc>
+                <a:tc>
+                  <a:txBody>
+                    <a:bodyPr wrap="square"/>
+                    <a:lstStyle/>
+                    <a:p>
+                      <a:r>
+                        <a:rPr sz="1000" b="0">
+                          <a:ea typeface="맑은 고딕"/>
+                          <a:cs typeface="맑은 고딕"/>
+                        </a:rPr>
+                        <a:t>KalmanNet · Bayesian KalmanNet (2025) · DLFM (2025)</a:t>
+                      </a:r>
+                    </a:p>
+                  </a:txBody>
+                  <a:tcPr marL="54864" marR="54864" marT="18288" marB="18288" anchor="ctr"/>
+                </a:tc>
+                <a:tc>
+                  <a:txBody>
+                    <a:bodyPr wrap="square"/>
+                    <a:lstStyle/>
+                    <a:p>
+                      <a:r>
+                        <a:rPr sz="1000" b="0">
+                          <a:ea typeface="맑은 고딕"/>
+                          <a:cs typeface="맑은 고딕"/>
+                        </a:rPr>
+                        <a:t>프로세스 모델은 두고 칼만 이득만 학습한다</a:t>
+                      </a:r>
+                    </a:p>
+                  </a:txBody>
+                  <a:tcPr marL="54864" marR="54864" marT="18288" marB="18288" anchor="ctr"/>
+                </a:tc>
+                <a:tc>
+                  <a:txBody>
+                    <a:bodyPr wrap="square"/>
+                    <a:lstStyle/>
+                    <a:p>
+                      <a:r>
+                        <a:rPr sz="1000" b="0">
+                          <a:ea typeface="맑은 고딕"/>
+                          <a:cs typeface="맑은 고딕"/>
+                        </a:rPr>
+                        <a:t>'persistence 신뢰 / 보정' 스위치의 원리적 형태이다</a:t>
+                      </a:r>
+                    </a:p>
+                  </a:txBody>
+                  <a:tcPr marL="54864" marR="54864" marT="18288" marB="18288" anchor="ctr"/>
+                </a:tc>
+              </a:tr>
+              <a:tr h="369824">
+                <a:tc>
+                  <a:txBody>
+                    <a:bodyPr wrap="square"/>
+                    <a:lstStyle/>
+                    <a:p>
+                      <a:r>
+                        <a:rPr sz="1000" b="0">
+                          <a:ea typeface="맑은 고딕"/>
+                          <a:cs typeface="맑은 고딕"/>
+                        </a:rPr>
+                        <a:t>이분산 · 강건 회귀</a:t>
+                      </a:r>
+                    </a:p>
+                  </a:txBody>
+                  <a:tcPr marL="54864" marR="54864" marT="18288" marB="18288" anchor="ctr"/>
+                </a:tc>
+                <a:tc>
+                  <a:txBody>
+                    <a:bodyPr wrap="square"/>
+                    <a:lstStyle/>
+                    <a:p>
+                      <a:r>
+                        <a:rPr sz="1000" b="0">
+                          <a:ea typeface="맑은 고딕"/>
+                          <a:cs typeface="맑은 고딕"/>
+                        </a:rPr>
+                        <a:t>가우시안 NLL 병리 (2023) · β-NLL · Student-t 헤드</a:t>
+                      </a:r>
+                    </a:p>
+                  </a:txBody>
+                  <a:tcPr marL="54864" marR="54864" marT="18288" marB="18288" anchor="ctr"/>
+                </a:tc>
+                <a:tc>
+                  <a:txBody>
+                    <a:bodyPr wrap="square"/>
+                    <a:lstStyle/>
+                    <a:p>
+                      <a:r>
+                        <a:rPr sz="1000" b="0">
+                          <a:ea typeface="맑은 고딕"/>
+                          <a:cs typeface="맑은 고딕"/>
+                        </a:rPr>
+                        <a:t>예측 분산이 평균의 그래디언트를 오염시켜 stop-grad가 필요하다</a:t>
+                      </a:r>
+                    </a:p>
+                  </a:txBody>
+                  <a:tcPr marL="54864" marR="54864" marT="18288" marB="18288" anchor="ctr"/>
+                </a:tc>
+                <a:tc>
+                  <a:txBody>
+                    <a:bodyPr wrap="square"/>
+                    <a:lstStyle/>
+                    <a:p>
+                      <a:r>
+                        <a:rPr sz="1000" b="0">
+                          <a:ea typeface="맑은 고딕"/>
+                          <a:cs typeface="맑은 고딕"/>
+                        </a:rPr>
+                        <a:t>§8aq가 지목한 유일하게 열리지 않은 축이다</a:t>
+                      </a:r>
+                    </a:p>
+                  </a:txBody>
+                  <a:tcPr marL="54864" marR="54864" marT="18288" marB="18288" anchor="ctr"/>
+                </a:tc>
+              </a:tr>
+            </a:tbl>
+          </a:graphicData>
+        </a:graphic>
+      </p:graphicFrame>
+    </p:spTree>
+  </p:cSld>
+  <p:clrMapOvr>
+    <a:masterClrMapping/>
+  </p:clrMapOvr>
+</p:sld>
+</file>
+
+<file path=ppt/slides/slide57.xml><?xml version="1.0" encoding="utf-8"?>
+<p:sld xmlns:a="http://schemas.openxmlformats.org/drawingml/2006/main" xmlns:p="http://schemas.openxmlformats.org/presentationml/2006/main" xmlns:r="http://schemas.openxmlformats.org/officeDocument/2006/relationships">
+  <p:cSld>
+    <p:spTree>
+      <p:nvGrpSpPr>
+        <p:cNvPr id="1" name=""/>
+        <p:cNvGrpSpPr/>
+        <p:nvPr/>
+      </p:nvGrpSpPr>
+      <p:grpSpPr/>
+      <p:sp>
+        <p:nvSpPr>
+          <p:cNvPr id="2" name="Title 1"/>
+          <p:cNvSpPr>
+            <a:spLocks noGrp="1"/>
+          </p:cNvSpPr>
+          <p:nvPr>
+            <p:ph type="title"/>
+          </p:nvPr>
+        </p:nvSpPr>
+        <p:spPr>
+          <a:xfrm>
+            <a:off x="585216" y="704088"/>
+            <a:ext cx="11027664" cy="1014984"/>
+          </a:xfrm>
+        </p:spPr>
+        <p:txBody>
+          <a:bodyPr wrap="square"/>
+          <a:lstStyle/>
+          <a:p>
+            <a:r>
+              <a:rPr b="0" sz="2800">
+                <a:ea typeface="맑은 고딕"/>
+                <a:cs typeface="맑은 고딕"/>
+              </a:rPr>
+              <a:t>문헌 조사 (3/4): 구조적으로 동형인 분야에서 반복되는 교훈</a:t>
+            </a:r>
+          </a:p>
+        </p:txBody>
+      </p:sp>
+      <p:graphicFrame>
+        <p:nvGraphicFramePr>
+          <p:cNvPr id="3" name="Table 2"/>
+          <p:cNvGraphicFramePr>
+            <a:graphicFrameLocks noGrp="1"/>
+          </p:cNvGraphicFramePr>
+          <p:nvPr/>
+        </p:nvGraphicFramePr>
+        <p:xfrm>
+          <a:off x="585216" y="2029967"/>
+          <a:ext cx="11027662" cy="2428240"/>
+        </p:xfrm>
+        <a:graphic>
+          <a:graphicData uri="http://schemas.openxmlformats.org/drawingml/2006/table">
+            <a:tbl>
+              <a:tblPr firstRow="1" bandRow="1">
+                <a:tableStyleId>{5C22544A-7EE6-4342-B048-85BDC9FD1C3A}</a:tableStyleId>
+              </a:tblPr>
+              <a:tblGrid>
+                <a:gridCol w="2350157"/>
+                <a:gridCol w="2440548"/>
+                <a:gridCol w="3163674"/>
+                <a:gridCol w="3073283"/>
+              </a:tblGrid>
+              <a:tr h="274320">
+                <a:tc>
+                  <a:txBody>
+                    <a:bodyPr wrap="square"/>
+                    <a:lstStyle/>
+                    <a:p>
+                      <a:r>
+                        <a:rPr sz="1100" b="1">
+                          <a:ea typeface="맑은 고딕"/>
+                          <a:cs typeface="맑은 고딕"/>
+                        </a:rPr>
+                        <a:t>분야</a:t>
+                      </a:r>
+                    </a:p>
+                  </a:txBody>
+                  <a:tcPr marL="54864" marR="54864" marT="18288" marB="18288" anchor="ctr"/>
+                </a:tc>
+                <a:tc>
+                  <a:txBody>
+                    <a:bodyPr wrap="square"/>
+                    <a:lstStyle/>
+                    <a:p>
+                      <a:r>
+                        <a:rPr sz="1100" b="1">
+                          <a:ea typeface="맑은 고딕"/>
+                          <a:cs typeface="맑은 고딕"/>
+                        </a:rPr>
+                        <a:t>동형 관계</a:t>
+                      </a:r>
+                    </a:p>
+                  </a:txBody>
+                  <a:tcPr marL="54864" marR="54864" marT="18288" marB="18288" anchor="ctr"/>
+                </a:tc>
+                <a:tc>
+                  <a:txBody>
+                    <a:bodyPr wrap="square"/>
+                    <a:lstStyle/>
+                    <a:p>
+                      <a:r>
+                        <a:rPr sz="1100" b="1">
+                          <a:ea typeface="맑은 고딕"/>
+                          <a:cs typeface="맑은 고딕"/>
+                        </a:rPr>
+                        <a:t>주류 방법</a:t>
+                      </a:r>
+                    </a:p>
+                  </a:txBody>
+                  <a:tcPr marL="54864" marR="54864" marT="18288" marB="18288" anchor="ctr"/>
+                </a:tc>
+                <a:tc>
+                  <a:txBody>
+                    <a:bodyPr wrap="square"/>
+                    <a:lstStyle/>
+                    <a:p>
+                      <a:r>
+                        <a:rPr sz="1100" b="1">
+                          <a:ea typeface="맑은 고딕"/>
+                          <a:cs typeface="맑은 고딕"/>
+                        </a:rPr>
+                        <a:t>교훈</a:t>
+                      </a:r>
+                    </a:p>
+                  </a:txBody>
+                  <a:tcPr marL="54864" marR="54864" marT="18288" marB="18288" anchor="ctr"/>
+                </a:tc>
+              </a:tr>
+              <a:tr h="401320">
+                <a:tc>
+                  <a:txBody>
+                    <a:bodyPr wrap="square"/>
+                    <a:lstStyle/>
+                    <a:p>
+                      <a:r>
+                        <a:rPr sz="1100" b="0">
+                          <a:ea typeface="맑은 고딕"/>
+                          <a:cs typeface="맑은 고딕"/>
+                        </a:rPr>
+                        <a:t>혼합주기 나우캐스팅 MIDAS (경제)</a:t>
+                      </a:r>
+                    </a:p>
+                  </a:txBody>
+                  <a:tcPr marL="54864" marR="54864" marT="18288" marB="18288" anchor="ctr"/>
+                </a:tc>
+                <a:tc>
+                  <a:txBody>
+                    <a:bodyPr wrap="square"/>
+                    <a:lstStyle/>
+                    <a:p>
+                      <a:r>
+                        <a:rPr sz="1100" b="0">
+                          <a:ea typeface="맑은 고딕"/>
+                          <a:cs typeface="맑은 고딕"/>
+                        </a:rPr>
+                        <a:t>고빈도 입력 → 저빈도 타깃</a:t>
+                      </a:r>
+                    </a:p>
+                  </a:txBody>
+                  <a:tcPr marL="54864" marR="54864" marT="18288" marB="18288" anchor="ctr"/>
+                </a:tc>
+                <a:tc>
+                  <a:txBody>
+                    <a:bodyPr wrap="square"/>
+                    <a:lstStyle/>
+                    <a:p>
+                      <a:r>
+                        <a:rPr sz="1100" b="0">
+                          <a:ea typeface="맑은 고딕"/>
+                          <a:cs typeface="맑은 고딕"/>
+                        </a:rPr>
+                        <a:t>U-MIDAS + 소형 NN 라그 가중 · GP-MIDAS (2024)</a:t>
+                      </a:r>
+                    </a:p>
+                  </a:txBody>
+                  <a:tcPr marL="54864" marR="54864" marT="18288" marB="18288" anchor="ctr"/>
+                </a:tc>
+                <a:tc>
+                  <a:txBody>
+                    <a:bodyPr wrap="square"/>
+                    <a:lstStyle/>
+                    <a:p>
+                      <a:r>
+                        <a:rPr sz="1100" b="0">
+                          <a:ea typeface="맑은 고딕"/>
+                          <a:cs typeface="맑은 고딕"/>
+                        </a:rPr>
+                        <a:t>파라메트릭 라그 구조로 충분하다. reach 사다리 · b3k8과 정합</a:t>
+                      </a:r>
+                    </a:p>
+                  </a:txBody>
+                  <a:tcPr marL="54864" marR="54864" marT="18288" marB="18288" anchor="ctr"/>
+                </a:tc>
+              </a:tr>
+              <a:tr h="401320">
+                <a:tc>
+                  <a:txBody>
+                    <a:bodyPr wrap="square"/>
+                    <a:lstStyle/>
+                    <a:p>
+                      <a:r>
+                        <a:rPr sz="1100" b="0">
+                          <a:ea typeface="맑은 고딕"/>
+                          <a:cs typeface="맑은 고딕"/>
+                        </a:rPr>
+                        <a:t>저가 센서 보정 (대기질, 2025 ~ 26)</a:t>
+                      </a:r>
+                    </a:p>
+                  </a:txBody>
+                  <a:tcPr marL="54864" marR="54864" marT="18288" marB="18288" anchor="ctr"/>
+                </a:tc>
+                <a:tc>
+                  <a:txBody>
+                    <a:bodyPr wrap="square"/>
+                    <a:lstStyle/>
+                    <a:p>
+                      <a:r>
+                        <a:rPr sz="1100" b="0">
+                          <a:ea typeface="맑은 고딕"/>
+                          <a:cs typeface="맑은 고딕"/>
+                        </a:rPr>
+                        <a:t>밀집 저가 센서 → 희소 기준 측정</a:t>
+                      </a:r>
+                    </a:p>
+                  </a:txBody>
+                  <a:tcPr marL="54864" marR="54864" marT="18288" marB="18288" anchor="ctr"/>
+                </a:tc>
+                <a:tc>
+                  <a:txBody>
+                    <a:bodyPr wrap="square"/>
+                    <a:lstStyle/>
+                    <a:p>
+                      <a:r>
+                        <a:rPr sz="1100" b="0">
+                          <a:ea typeface="맑은 고딕"/>
+                          <a:cs typeface="맑은 고딕"/>
+                        </a:rPr>
+                        <a:t>LSTM · GBM. 기준국에서 먼 센서는 도메인 적응</a:t>
+                      </a:r>
+                    </a:p>
+                  </a:txBody>
+                  <a:tcPr marL="54864" marR="54864" marT="18288" marB="18288" anchor="ctr"/>
+                </a:tc>
+                <a:tc>
+                  <a:txBody>
+                    <a:bodyPr wrap="square"/>
+                    <a:lstStyle/>
+                    <a:p>
+                      <a:r>
+                        <a:rPr sz="1100" b="0">
+                          <a:ea typeface="맑은 고딕"/>
+                          <a:cs typeface="맑은 고딕"/>
+                        </a:rPr>
+                        <a:t>캠페인 이동(§8n)과 shot별 표준화(§8s)가 같은 처방이다</a:t>
+                      </a:r>
+                    </a:p>
+                  </a:txBody>
+                  <a:tcPr marL="54864" marR="54864" marT="18288" marB="18288" anchor="ctr"/>
+                </a:tc>
+              </a:tr>
+              <a:tr h="401320">
+                <a:tc>
+                  <a:txBody>
+                    <a:bodyPr wrap="square"/>
+                    <a:lstStyle/>
+                    <a:p>
+                      <a:r>
+                        <a:rPr sz="1100" b="0">
+                          <a:ea typeface="맑은 고딕"/>
+                          <a:cs typeface="맑은 고딕"/>
+                        </a:rPr>
+                        <a:t>커프리스 혈압 PPG (2025 ~ 26)</a:t>
+                      </a:r>
+                    </a:p>
+                  </a:txBody>
+                  <a:tcPr marL="54864" marR="54864" marT="18288" marB="18288" anchor="ctr"/>
+                </a:tc>
+                <a:tc>
+                  <a:txBody>
+                    <a:bodyPr wrap="square"/>
+                    <a:lstStyle/>
+                    <a:p>
+                      <a:r>
+                        <a:rPr sz="1100" b="0">
+                          <a:ea typeface="맑은 고딕"/>
+                          <a:cs typeface="맑은 고딕"/>
+                        </a:rPr>
+                        <a:t>연속 파형 → 간헐 기준값</a:t>
+                      </a:r>
+                    </a:p>
+                  </a:txBody>
+                  <a:tcPr marL="54864" marR="54864" marT="18288" marB="18288" anchor="ctr"/>
+                </a:tc>
+                <a:tc>
+                  <a:txBody>
+                    <a:bodyPr wrap="square"/>
+                    <a:lstStyle/>
+                    <a:p>
+                      <a:r>
+                        <a:rPr sz="1100" b="0">
+                          <a:ea typeface="맑은 고딕"/>
+                          <a:cs typeface="맑은 고딕"/>
+                        </a:rPr>
+                        <a:t>CNN + Transformer 병렬 등. 보정 기반 &gt; 보정 없음</a:t>
+                      </a:r>
+                    </a:p>
+                  </a:txBody>
+                  <a:tcPr marL="54864" marR="54864" marT="18288" marB="18288" anchor="ctr"/>
+                </a:tc>
+                <a:tc>
+                  <a:txBody>
+                    <a:bodyPr wrap="square"/>
+                    <a:lstStyle/>
+                    <a:p>
+                      <a:r>
+                        <a:rPr sz="1100" b="0">
+                          <a:ea typeface="맑은 고딕"/>
+                          <a:cs typeface="맑은 고딕"/>
+                        </a:rPr>
+                        <a:t>개체별 보정이 구조보다 크다 (§8s와 동일)</a:t>
+                      </a:r>
+                    </a:p>
+                  </a:txBody>
+                  <a:tcPr marL="54864" marR="54864" marT="18288" marB="18288" anchor="ctr"/>
+                </a:tc>
+              </a:tr>
+              <a:tr h="274320">
+                <a:tc>
+                  <a:txBody>
+                    <a:bodyPr wrap="square"/>
+                    <a:lstStyle/>
+                    <a:p>
+                      <a:r>
+                        <a:rPr sz="1100" b="0">
+                          <a:ea typeface="맑은 고딕"/>
+                          <a:cs typeface="맑은 고딕"/>
+                        </a:rPr>
+                        <a:t>구조 가상 센싱 SHM (2025 ~ 26)</a:t>
+                      </a:r>
+                    </a:p>
+                  </a:txBody>
+                  <a:tcPr marL="54864" marR="54864" marT="18288" marB="18288" anchor="ctr"/>
+                </a:tc>
+                <a:tc>
+                  <a:txBody>
+                    <a:bodyPr wrap="square"/>
+                    <a:lstStyle/>
+                    <a:p>
+                      <a:r>
+                        <a:rPr sz="1100" b="0">
+                          <a:ea typeface="맑은 고딕"/>
+                          <a:cs typeface="맑은 고딕"/>
+                        </a:rPr>
+                        <a:t>희소 센서 → 전체장</a:t>
+                      </a:r>
+                    </a:p>
+                  </a:txBody>
+                  <a:tcPr marL="54864" marR="54864" marT="18288" marB="18288" anchor="ctr"/>
+                </a:tc>
+                <a:tc>
+                  <a:txBody>
+                    <a:bodyPr wrap="square"/>
+                    <a:lstStyle/>
+                    <a:p>
+                      <a:r>
+                        <a:rPr sz="1100" b="0">
+                          <a:ea typeface="맑은 고딕"/>
+                          <a:cs typeface="맑은 고딕"/>
+                        </a:rPr>
+                        <a:t>칼만 · 물리유도 그래프 칼만 · PDE 제약 최적화</a:t>
+                      </a:r>
+                    </a:p>
+                  </a:txBody>
+                  <a:tcPr marL="54864" marR="54864" marT="18288" marB="18288" anchor="ctr"/>
+                </a:tc>
+                <a:tc>
+                  <a:txBody>
+                    <a:bodyPr wrap="square"/>
+                    <a:lstStyle/>
+                    <a:p>
+                      <a:r>
+                        <a:rPr sz="1100" b="0">
+                          <a:ea typeface="맑은 고딕"/>
+                          <a:cs typeface="맑은 고딕"/>
+                        </a:rPr>
+                        <a:t>상태추정 프레임이 주류이다 (§8t 재확인)</a:t>
+                      </a:r>
+                    </a:p>
+                  </a:txBody>
+                  <a:tcPr marL="54864" marR="54864" marT="18288" marB="18288" anchor="ctr"/>
+                </a:tc>
+              </a:tr>
+              <a:tr h="274320">
+                <a:tc>
+                  <a:txBody>
+                    <a:bodyPr wrap="square"/>
+                    <a:lstStyle/>
+                    <a:p>
+                      <a:r>
+                        <a:rPr sz="1100" b="0">
+                          <a:ea typeface="맑은 고딕"/>
+                          <a:cs typeface="맑은 고딕"/>
+                        </a:rPr>
+                        <a:t>멀티태스크 가상센서 (2026)</a:t>
+                      </a:r>
+                    </a:p>
+                  </a:txBody>
+                  <a:tcPr marL="54864" marR="54864" marT="18288" marB="18288" anchor="ctr"/>
+                </a:tc>
+                <a:tc>
+                  <a:txBody>
+                    <a:bodyPr wrap="square"/>
+                    <a:lstStyle/>
+                    <a:p>
+                      <a:r>
+                        <a:rPr sz="1100" b="0">
+                          <a:ea typeface="맑은 고딕"/>
+                          <a:cs typeface="맑은 고딕"/>
+                        </a:rPr>
+                        <a:t>수백 타깃 통합</a:t>
+                      </a:r>
+                    </a:p>
+                  </a:txBody>
+                  <a:tcPr marL="54864" marR="54864" marT="18288" marB="18288" anchor="ctr"/>
+                </a:tc>
+                <a:tc>
+                  <a:txBody>
+                    <a:bodyPr wrap="square"/>
+                    <a:lstStyle/>
+                    <a:p>
+                      <a:r>
+                        <a:rPr sz="1100" b="0">
+                          <a:ea typeface="맑은 고딕"/>
+                          <a:cs typeface="맑은 고딕"/>
+                        </a:rPr>
+                        <a:t>입력 선택을 학습하는 단일 모델</a:t>
+                      </a:r>
+                    </a:p>
+                  </a:txBody>
+                  <a:tcPr marL="54864" marR="54864" marT="18288" marB="18288" anchor="ctr"/>
+                </a:tc>
+                <a:tc>
+                  <a:txBody>
+                    <a:bodyPr wrap="square"/>
+                    <a:lstStyle/>
+                    <a:p>
+                      <a:r>
+                        <a:rPr sz="1100" b="0">
+                          <a:ea typeface="맑은 고딕"/>
+                          <a:cs typeface="맑은 고딕"/>
+                        </a:rPr>
+                        <a:t>타깃이 둘인 본 연구와 무관하다</a:t>
+                      </a:r>
+                    </a:p>
+                  </a:txBody>
+                  <a:tcPr marL="54864" marR="54864" marT="18288" marB="18288" anchor="ctr"/>
+                </a:tc>
+              </a:tr>
+              <a:tr h="401320">
+                <a:tc>
+                  <a:txBody>
+                    <a:bodyPr wrap="square"/>
+                    <a:lstStyle/>
+                    <a:p>
+                      <a:r>
+                        <a:rPr sz="1100" b="0">
+                          <a:ea typeface="맑은 고딕"/>
+                          <a:cs typeface="맑은 고딕"/>
+                        </a:rPr>
+                        <a:t>합성 진단 증강 (EAST → J-TEXT, 2026)</a:t>
+                      </a:r>
+                    </a:p>
+                  </a:txBody>
+                  <a:tcPr marL="54864" marR="54864" marT="18288" marB="18288" anchor="ctr"/>
+                </a:tc>
+                <a:tc>
+                  <a:txBody>
+                    <a:bodyPr wrap="square"/>
+                    <a:lstStyle/>
+                    <a:p>
+                      <a:r>
+                        <a:rPr sz="1100" b="0">
+                          <a:ea typeface="맑은 고딕"/>
+                          <a:cs typeface="맑은 고딕"/>
+                        </a:rPr>
+                        <a:t>데이터 없는 장치</a:t>
+                      </a:r>
+                    </a:p>
+                  </a:txBody>
+                  <a:tcPr marL="54864" marR="54864" marT="18288" marB="18288" anchor="ctr"/>
+                </a:tc>
+                <a:tc>
+                  <a:txBody>
+                    <a:bodyPr wrap="square"/>
+                    <a:lstStyle/>
+                    <a:p>
+                      <a:r>
+                        <a:rPr sz="1100" b="0">
+                          <a:ea typeface="맑은 고딕"/>
+                          <a:cs typeface="맑은 고딕"/>
+                        </a:rPr>
+                        <a:t>NIMROD 합성 진단 + 도메인 적응, 조기 경보 50 → 57 %</a:t>
+                      </a:r>
+                    </a:p>
+                  </a:txBody>
+                  <a:tcPr marL="54864" marR="54864" marT="18288" marB="18288" anchor="ctr"/>
+                </a:tc>
+                <a:tc>
+                  <a:txBody>
+                    <a:bodyPr wrap="square"/>
+                    <a:lstStyle/>
+                    <a:p>
+                      <a:r>
+                        <a:rPr sz="1100" b="0">
+                          <a:ea typeface="맑은 고딕"/>
+                          <a:cs typeface="맑은 고딕"/>
+                        </a:rPr>
+                        <a:t>NBI가 없으면 합성 토크 채널은 시뮬레이션에서만 온다</a:t>
+                      </a:r>
+                    </a:p>
+                  </a:txBody>
+                  <a:tcPr marL="54864" marR="54864" marT="18288" marB="18288" anchor="ctr"/>
+                </a:tc>
+              </a:tr>
+            </a:tbl>
+          </a:graphicData>
+        </a:graphic>
+      </p:graphicFrame>
+      <p:sp>
+        <p:nvSpPr>
+          <p:cNvPr id="4" name="TextBox 3"/>
+          <p:cNvSpPr txBox="1"/>
+          <p:nvPr/>
+        </p:nvSpPr>
+        <p:spPr>
+          <a:xfrm>
+            <a:off x="585216" y="4549648"/>
+            <a:ext cx="11027664" cy="486664"/>
+          </a:xfrm>
+          <a:prstGeom prst="rect">
+            <a:avLst/>
+          </a:prstGeom>
+          <a:noFill/>
+        </p:spPr>
+        <p:txBody>
+          <a:bodyPr wrap="square">
+            <a:spAutoFit/>
+          </a:bodyPr>
+          <a:lstStyle/>
+          <a:p>
+            <a:pPr>
+              <a:spcAft>
+                <a:spcPts val="300"/>
+              </a:spcAft>
+            </a:pPr>
+            <a:r>
+              <a:rPr sz="1250">
+                <a:ea typeface="맑은 고딕"/>
+                <a:cs typeface="맑은 고딕"/>
+              </a:rPr>
+              <a:t>동형 분야가 반복해 말하는 것은 표현력이 아니라 개체별 보정과 상태추정 프레임이며, 이는 본 연구의 shot별 표준화와 전체격자 인과 프레이밍이 이미 취한 선택이다.</a:t>
+            </a:r>
+          </a:p>
+        </p:txBody>
+      </p:sp>
+    </p:spTree>
+  </p:cSld>
+  <p:clrMapOvr>
+    <a:masterClrMapping/>
+  </p:clrMapOvr>
+</p:sld>
+</file>
+
+<file path=ppt/slides/slide58.xml><?xml version="1.0" encoding="utf-8"?>
+<p:sld xmlns:a="http://schemas.openxmlformats.org/drawingml/2006/main" xmlns:p="http://schemas.openxmlformats.org/presentationml/2006/main" xmlns:r="http://schemas.openxmlformats.org/officeDocument/2006/relationships">
+  <p:cSld>
+    <p:spTree>
+      <p:nvGrpSpPr>
+        <p:cNvPr id="1" name=""/>
+        <p:cNvGrpSpPr/>
+        <p:nvPr/>
+      </p:nvGrpSpPr>
+      <p:grpSpPr/>
+      <p:sp>
+        <p:nvSpPr>
+          <p:cNvPr id="2" name="Title 1"/>
+          <p:cNvSpPr>
+            <a:spLocks noGrp="1"/>
+          </p:cNvSpPr>
+          <p:nvPr>
+            <p:ph type="title"/>
+          </p:nvPr>
+        </p:nvSpPr>
+        <p:spPr>
+          <a:xfrm>
+            <a:off x="585216" y="704088"/>
+            <a:ext cx="11027664" cy="1014984"/>
+          </a:xfrm>
+        </p:spPr>
+        <p:txBody>
+          <a:bodyPr wrap="square"/>
+          <a:lstStyle/>
+          <a:p>
+            <a:r>
+              <a:rPr b="0" sz="2250">
+                <a:ea typeface="맑은 고딕"/>
+                <a:cs typeface="맑은 고딕"/>
+              </a:rPr>
+              <a:t>문헌 조사 (4/4): 문헌이 지목하는 다음 팔은 표현력이 아니라 손실 · 게이팅 · 입력이다</a:t>
+            </a:r>
+          </a:p>
+        </p:txBody>
+      </p:sp>
+      <p:sp>
+        <p:nvSpPr>
+          <p:cNvPr id="3" name="TextBox 2"/>
+          <p:cNvSpPr txBox="1"/>
+          <p:nvPr/>
+        </p:nvSpPr>
+        <p:spPr>
+          <a:xfrm>
+            <a:off x="585216" y="2029967"/>
+            <a:ext cx="11027664" cy="297688"/>
+          </a:xfrm>
+          <a:prstGeom prst="rect">
+            <a:avLst/>
+          </a:prstGeom>
+          <a:noFill/>
+        </p:spPr>
+        <p:txBody>
+          <a:bodyPr wrap="square">
+            <a:spAutoFit/>
+          </a:bodyPr>
+          <a:lstStyle/>
+          <a:p>
+            <a:pPr>
+              <a:spcAft>
+                <a:spcPts val="300"/>
+              </a:spcAft>
+            </a:pPr>
+            <a:r>
+              <a:rPr sz="1300">
+                <a:ea typeface="맑은 고딕"/>
+                <a:cs typeface="맑은 고딕"/>
+              </a:rPr>
+              <a:t>각 행은 통제 변수가 하나이며, TEST를 여는 팔은 사전등록 뒤에만 실행한다.</a:t>
+            </a:r>
+          </a:p>
+        </p:txBody>
+      </p:sp>
+      <p:graphicFrame>
+        <p:nvGraphicFramePr>
+          <p:cNvPr id="4" name="Table 3"/>
+          <p:cNvGraphicFramePr>
+            <a:graphicFrameLocks noGrp="1"/>
+          </p:cNvGraphicFramePr>
+          <p:nvPr/>
+        </p:nvGraphicFramePr>
+        <p:xfrm>
+          <a:off x="585216" y="2400807"/>
+          <a:ext cx="11027661" cy="2555240"/>
+        </p:xfrm>
+        <a:graphic>
+          <a:graphicData uri="http://schemas.openxmlformats.org/drawingml/2006/table">
+            <a:tbl>
+              <a:tblPr firstRow="1" bandRow="1">
+                <a:tableStyleId>{5C22544A-7EE6-4342-B048-85BDC9FD1C3A}</a:tableStyleId>
+              </a:tblPr>
+              <a:tblGrid>
+                <a:gridCol w="632734"/>
+                <a:gridCol w="3886799"/>
+                <a:gridCol w="2350157"/>
+                <a:gridCol w="1627032"/>
+                <a:gridCol w="2530939"/>
+              </a:tblGrid>
+              <a:tr h="274320">
+                <a:tc>
+                  <a:txBody>
+                    <a:bodyPr wrap="square"/>
+                    <a:lstStyle/>
+                    <a:p>
+                      <a:r>
+                        <a:rPr sz="1100" b="1">
+                          <a:ea typeface="맑은 고딕"/>
+                          <a:cs typeface="맑은 고딕"/>
+                        </a:rPr>
+                        <a:t>순위</a:t>
+                      </a:r>
+                    </a:p>
+                  </a:txBody>
+                  <a:tcPr marL="54864" marR="54864" marT="18288" marB="18288" anchor="ctr"/>
+                </a:tc>
+                <a:tc>
+                  <a:txBody>
+                    <a:bodyPr wrap="square"/>
+                    <a:lstStyle/>
+                    <a:p>
+                      <a:r>
+                        <a:rPr sz="1100" b="1">
+                          <a:ea typeface="맑은 고딕"/>
+                          <a:cs typeface="맑은 고딕"/>
+                        </a:rPr>
+                        <a:t>실험 팔 (통제 변수 하나)</a:t>
+                      </a:r>
+                    </a:p>
+                  </a:txBody>
+                  <a:tcPr marL="54864" marR="54864" marT="18288" marB="18288" anchor="ctr"/>
+                </a:tc>
+                <a:tc>
+                  <a:txBody>
+                    <a:bodyPr wrap="square"/>
+                    <a:lstStyle/>
+                    <a:p>
+                      <a:r>
+                        <a:rPr sz="1100" b="1">
+                          <a:ea typeface="맑은 고딕"/>
+                          <a:cs typeface="맑은 고딕"/>
+                        </a:rPr>
+                        <a:t>출처</a:t>
+                      </a:r>
+                    </a:p>
+                  </a:txBody>
+                  <a:tcPr marL="54864" marR="54864" marT="18288" marB="18288" anchor="ctr"/>
+                </a:tc>
+                <a:tc>
+                  <a:txBody>
+                    <a:bodyPr wrap="square"/>
+                    <a:lstStyle/>
+                    <a:p>
+                      <a:r>
+                        <a:rPr sz="1100" b="1">
+                          <a:ea typeface="맑은 고딕"/>
+                          <a:cs typeface="맑은 고딕"/>
+                        </a:rPr>
+                        <a:t>비용</a:t>
+                      </a:r>
+                    </a:p>
+                  </a:txBody>
+                  <a:tcPr marL="54864" marR="54864" marT="18288" marB="18288" anchor="ctr"/>
+                </a:tc>
+                <a:tc>
+                  <a:txBody>
+                    <a:bodyPr wrap="square"/>
+                    <a:lstStyle/>
+                    <a:p>
+                      <a:r>
+                        <a:rPr sz="1100" b="1">
+                          <a:ea typeface="맑은 고딕"/>
+                          <a:cs typeface="맑은 고딕"/>
+                        </a:rPr>
+                        <a:t>사전등록 판정 지표</a:t>
+                      </a:r>
+                    </a:p>
+                  </a:txBody>
+                  <a:tcPr marL="54864" marR="54864" marT="18288" marB="18288" anchor="ctr"/>
+                </a:tc>
+              </a:tr>
+              <a:tr h="401320">
+                <a:tc>
+                  <a:txBody>
+                    <a:bodyPr wrap="square"/>
+                    <a:lstStyle/>
+                    <a:p>
+                      <a:r>
+                        <a:rPr sz="1100" b="0">
+                          <a:ea typeface="맑은 고딕"/>
+                          <a:cs typeface="맑은 고딕"/>
+                        </a:rPr>
+                        <a:t>1</a:t>
+                      </a:r>
+                    </a:p>
+                  </a:txBody>
+                  <a:tcPr marL="54864" marR="54864" marT="18288" marB="18288" anchor="ctr"/>
+                </a:tc>
+                <a:tc>
+                  <a:txBody>
+                    <a:bodyPr wrap="square"/>
+                    <a:lstStyle/>
+                    <a:p>
+                      <a:r>
+                        <a:rPr sz="1100" b="0">
+                          <a:ea typeface="맑은 고딕"/>
+                          <a:cs typeface="맑은 고딕"/>
+                        </a:rPr>
+                        <a:t>seq_v2 손실을 σ_meas 가중 Huber 또는 Student-t NLL로 교체</a:t>
+                      </a:r>
+                    </a:p>
+                  </a:txBody>
+                  <a:tcPr marL="54864" marR="54864" marT="18288" marB="18288" anchor="ctr"/>
+                </a:tc>
+                <a:tc>
+                  <a:txBody>
+                    <a:bodyPr wrap="square"/>
+                    <a:lstStyle/>
+                    <a:p>
+                      <a:r>
+                        <a:rPr sz="1100" b="0">
+                          <a:ea typeface="맑은 고딕"/>
+                          <a:cs typeface="맑은 고딕"/>
+                        </a:rPr>
+                        <a:t>COMPASS · Toto · §8aq</a:t>
+                      </a:r>
+                    </a:p>
+                  </a:txBody>
+                  <a:tcPr marL="54864" marR="54864" marT="18288" marB="18288" anchor="ctr"/>
+                </a:tc>
+                <a:tc>
+                  <a:txBody>
+                    <a:bodyPr wrap="square"/>
+                    <a:lstStyle/>
+                    <a:p>
+                      <a:r>
+                        <a:rPr sz="1100" b="0">
+                          <a:ea typeface="맑은 고딕"/>
+                          <a:cs typeface="맑은 고딕"/>
+                        </a:rPr>
+                        <a:t>재학습 4 × 3 seed</a:t>
+                      </a:r>
+                    </a:p>
+                  </a:txBody>
+                  <a:tcPr marL="54864" marR="54864" marT="18288" marB="18288" anchor="ctr"/>
+                </a:tc>
+                <a:tc>
+                  <a:txBody>
+                    <a:bodyPr wrap="square"/>
+                    <a:lstStyle/>
+                    <a:p>
+                      <a:r>
+                        <a:rPr sz="1100" b="0">
+                          <a:ea typeface="맑은 고딕"/>
+                          <a:cs typeface="맑은 고딕"/>
+                        </a:rPr>
+                        <a:t>벌크 MAD skill 개선, 총합 MSE 비열세</a:t>
+                      </a:r>
+                    </a:p>
+                  </a:txBody>
+                  <a:tcPr marL="54864" marR="54864" marT="18288" marB="18288" anchor="ctr"/>
+                </a:tc>
+              </a:tr>
+              <a:tr h="401320">
+                <a:tc>
+                  <a:txBody>
+                    <a:bodyPr wrap="square"/>
+                    <a:lstStyle/>
+                    <a:p>
+                      <a:r>
+                        <a:rPr sz="1100" b="0">
+                          <a:ea typeface="맑은 고딕"/>
+                          <a:cs typeface="맑은 고딕"/>
+                        </a:rPr>
+                        <a:t>2</a:t>
+                      </a:r>
+                    </a:p>
+                  </a:txBody>
+                  <a:tcPr marL="54864" marR="54864" marT="18288" marB="18288" anchor="ctr"/>
+                </a:tc>
+                <a:tc>
+                  <a:txBody>
+                    <a:bodyPr wrap="square"/>
+                    <a:lstStyle/>
+                    <a:p>
+                      <a:r>
+                        <a:rPr sz="1100" b="0">
+                          <a:ea typeface="맑은 고딕"/>
+                          <a:cs typeface="맑은 고딕"/>
+                        </a:rPr>
+                        <a:t>B.11 자매 팔: soft 게이트 + persistence 축소 페널티, 기저 = 인과 GP</a:t>
+                      </a:r>
+                    </a:p>
+                  </a:txBody>
+                  <a:tcPr marL="54864" marR="54864" marT="18288" marB="18288" anchor="ctr"/>
+                </a:tc>
+                <a:tc>
+                  <a:txBody>
+                    <a:bodyPr wrap="square"/>
+                    <a:lstStyle/>
+                    <a:p>
+                      <a:r>
+                        <a:rPr sz="1100" b="0">
+                          <a:ea typeface="맑은 고딕"/>
+                          <a:cs typeface="맑은 고딕"/>
+                        </a:rPr>
+                        <a:t>RG-ResMoE</a:t>
+                      </a:r>
+                    </a:p>
+                  </a:txBody>
+                  <a:tcPr marL="54864" marR="54864" marT="18288" marB="18288" anchor="ctr"/>
+                </a:tc>
+                <a:tc>
+                  <a:txBody>
+                    <a:bodyPr wrap="square"/>
+                    <a:lstStyle/>
+                    <a:p>
+                      <a:r>
+                        <a:rPr sz="1100" b="0">
+                          <a:ea typeface="맑은 고딕"/>
+                          <a:cs typeface="맑은 고딕"/>
+                        </a:rPr>
+                        <a:t>b3k8 위 소형</a:t>
+                      </a:r>
+                    </a:p>
+                  </a:txBody>
+                  <a:tcPr marL="54864" marR="54864" marT="18288" marB="18288" anchor="ctr"/>
+                </a:tc>
+                <a:tc>
+                  <a:txBody>
+                    <a:bodyPr wrap="square"/>
+                    <a:lstStyle/>
+                    <a:p>
+                      <a:r>
+                        <a:rPr sz="1100" b="0">
+                          <a:ea typeface="맑은 고딕"/>
+                          <a:cs typeface="맑은 고딕"/>
+                        </a:rPr>
+                        <a:t>조용 3분위 승률 +0.05</a:t>
+                      </a:r>
+                    </a:p>
+                  </a:txBody>
+                  <a:tcPr marL="54864" marR="54864" marT="18288" marB="18288" anchor="ctr"/>
+                </a:tc>
+              </a:tr>
+              <a:tr h="401320">
+                <a:tc>
+                  <a:txBody>
+                    <a:bodyPr wrap="square"/>
+                    <a:lstStyle/>
+                    <a:p>
+                      <a:r>
+                        <a:rPr sz="1100" b="0">
+                          <a:ea typeface="맑은 고딕"/>
+                          <a:cs typeface="맑은 고딕"/>
+                        </a:rPr>
+                        <a:t>3</a:t>
+                      </a:r>
+                    </a:p>
+                  </a:txBody>
+                  <a:tcPr marL="54864" marR="54864" marT="18288" marB="18288" anchor="ctr"/>
+                </a:tc>
+                <a:tc>
+                  <a:txBody>
+                    <a:bodyPr wrap="square"/>
+                    <a:lstStyle/>
+                    <a:p>
+                      <a:r>
+                        <a:rPr sz="1100" b="0">
+                          <a:ea typeface="맑은 고딕"/>
+                          <a:cs typeface="맑은 고딕"/>
+                        </a:rPr>
+                        <a:t>KalmanNet 팔: 프로세스 = 인과 GP, 관측 = 고속 15채널, 이득 = 소형 GRU</a:t>
+                      </a:r>
+                    </a:p>
+                  </a:txBody>
+                  <a:tcPr marL="54864" marR="54864" marT="18288" marB="18288" anchor="ctr"/>
+                </a:tc>
+                <a:tc>
+                  <a:txBody>
+                    <a:bodyPr wrap="square"/>
+                    <a:lstStyle/>
+                    <a:p>
+                      <a:r>
+                        <a:rPr sz="1100" b="0">
+                          <a:ea typeface="맑은 고딕"/>
+                          <a:cs typeface="맑은 고딕"/>
+                        </a:rPr>
+                        <a:t>KalmanNet 계열</a:t>
+                      </a:r>
+                    </a:p>
+                  </a:txBody>
+                  <a:tcPr marL="54864" marR="54864" marT="18288" marB="18288" anchor="ctr"/>
+                </a:tc>
+                <a:tc>
+                  <a:txBody>
+                    <a:bodyPr wrap="square"/>
+                    <a:lstStyle/>
+                    <a:p>
+                      <a:r>
+                        <a:rPr sz="1100" b="0">
+                          <a:ea typeface="맑은 고딕"/>
+                          <a:cs typeface="맑은 고딕"/>
+                        </a:rPr>
+                        <a:t>신규 코드</a:t>
+                      </a:r>
+                    </a:p>
+                  </a:txBody>
+                  <a:tcPr marL="54864" marR="54864" marT="18288" marB="18288" anchor="ctr"/>
+                </a:tc>
+                <a:tc>
+                  <a:txBody>
+                    <a:bodyPr wrap="square"/>
+                    <a:lstStyle/>
+                    <a:p>
+                      <a:r>
+                        <a:rPr sz="1100" b="0">
+                          <a:ea typeface="맑은 고딕"/>
+                          <a:cs typeface="맑은 고딕"/>
+                        </a:rPr>
+                        <a:t>조용 3분위 승률 + 구간 보정</a:t>
+                      </a:r>
+                    </a:p>
+                  </a:txBody>
+                  <a:tcPr marL="54864" marR="54864" marT="18288" marB="18288" anchor="ctr"/>
+                </a:tc>
+              </a:tr>
+              <a:tr h="401320">
+                <a:tc>
+                  <a:txBody>
+                    <a:bodyPr wrap="square"/>
+                    <a:lstStyle/>
+                    <a:p>
+                      <a:r>
+                        <a:rPr sz="1100" b="0">
+                          <a:ea typeface="맑은 고딕"/>
+                          <a:cs typeface="맑은 고딕"/>
+                        </a:rPr>
+                        <a:t>4</a:t>
+                      </a:r>
+                    </a:p>
+                  </a:txBody>
+                  <a:tcPr marL="54864" marR="54864" marT="18288" marB="18288" anchor="ctr"/>
+                </a:tc>
+                <a:tc>
+                  <a:txBody>
+                    <a:bodyPr wrap="square"/>
+                    <a:lstStyle/>
+                    <a:p>
+                      <a:r>
+                        <a:rPr sz="1100" b="0">
+                          <a:ea typeface="맑은 고딕"/>
+                          <a:cs typeface="맑은 고딕"/>
+                        </a:rPr>
+                        <a:t>V_rot 입력 확장: 원시 kHz Mirnov 특징(B.6 A1) · NBI 토크 채널 · 도플러 분광 입력</a:t>
+                      </a:r>
+                    </a:p>
+                  </a:txBody>
+                  <a:tcPr marL="54864" marR="54864" marT="18288" marB="18288" anchor="ctr"/>
+                </a:tc>
+                <a:tc>
+                  <a:txBody>
+                    <a:bodyPr wrap="square"/>
+                    <a:lstStyle/>
+                    <a:p>
+                      <a:r>
+                        <a:rPr sz="1100" b="0">
+                          <a:ea typeface="맑은 고딕"/>
+                          <a:cs typeface="맑은 고딕"/>
+                        </a:rPr>
+                        <a:t>EAST XCS · PanoMHD · 합성 진단 증강</a:t>
+                      </a:r>
+                    </a:p>
+                  </a:txBody>
+                  <a:tcPr marL="54864" marR="54864" marT="18288" marB="18288" anchor="ctr"/>
+                </a:tc>
+                <a:tc>
+                  <a:txBody>
+                    <a:bodyPr wrap="square"/>
+                    <a:lstStyle/>
+                    <a:p>
+                      <a:r>
+                        <a:rPr sz="1100" b="0">
+                          <a:ea typeface="맑은 고딕"/>
+                          <a:cs typeface="맑은 고딕"/>
+                        </a:rPr>
+                        <a:t>데이터 획득</a:t>
+                      </a:r>
+                    </a:p>
+                  </a:txBody>
+                  <a:tcPr marL="54864" marR="54864" marT="18288" marB="18288" anchor="ctr"/>
+                </a:tc>
+                <a:tc>
+                  <a:txBody>
+                    <a:bodyPr wrap="square"/>
+                    <a:lstStyle/>
+                    <a:p>
+                      <a:r>
+                        <a:rPr sz="1100" b="0">
+                          <a:ea typeface="맑은 고딕"/>
+                          <a:cs typeface="맑은 고딕"/>
+                        </a:rPr>
+                        <a:t>변동 3분위 V_rot 승률이 먼저 오를 것</a:t>
+                      </a:r>
+                    </a:p>
+                  </a:txBody>
+                  <a:tcPr marL="54864" marR="54864" marT="18288" marB="18288" anchor="ctr"/>
+                </a:tc>
+              </a:tr>
+              <a:tr h="401320">
+                <a:tc>
+                  <a:txBody>
+                    <a:bodyPr wrap="square"/>
+                    <a:lstStyle/>
+                    <a:p>
+                      <a:r>
+                        <a:rPr sz="1100" b="0">
+                          <a:ea typeface="맑은 고딕"/>
+                          <a:cs typeface="맑은 고딕"/>
+                        </a:rPr>
+                        <a:t>5</a:t>
+                      </a:r>
+                    </a:p>
+                  </a:txBody>
+                  <a:tcPr marL="54864" marR="54864" marT="18288" marB="18288" anchor="ctr"/>
+                </a:tc>
+                <a:tc>
+                  <a:txBody>
+                    <a:bodyPr wrap="square"/>
+                    <a:lstStyle/>
+                    <a:p>
+                      <a:r>
+                        <a:rPr sz="1100" b="0">
+                          <a:ea typeface="맑은 고딕"/>
+                          <a:cs typeface="맑은 고딕"/>
+                        </a:rPr>
+                        <a:t>제로샷 대조군: TabPFN-v2 회귀(행 특징) · TiRex-2 / Chronos-2(과거 공변량)</a:t>
+                      </a:r>
+                    </a:p>
+                  </a:txBody>
+                  <a:tcPr marL="54864" marR="54864" marT="18288" marB="18288" anchor="ctr"/>
+                </a:tc>
+                <a:tc>
+                  <a:txBody>
+                    <a:bodyPr wrap="square"/>
+                    <a:lstStyle/>
+                    <a:p>
+                      <a:r>
+                        <a:rPr sz="1100" b="0">
+                          <a:ea typeface="맑은 고딕"/>
+                          <a:cs typeface="맑은 고딕"/>
+                        </a:rPr>
+                        <a:t>fev-bench · TSI-Bench</a:t>
+                      </a:r>
+                    </a:p>
+                  </a:txBody>
+                  <a:tcPr marL="54864" marR="54864" marT="18288" marB="18288" anchor="ctr"/>
+                </a:tc>
+                <a:tc>
+                  <a:txBody>
+                    <a:bodyPr wrap="square"/>
+                    <a:lstStyle/>
+                    <a:p>
+                      <a:r>
+                        <a:rPr sz="1100" b="0">
+                          <a:ea typeface="맑은 고딕"/>
+                          <a:cs typeface="맑은 고딕"/>
+                        </a:rPr>
+                        <a:t>학습 없음</a:t>
+                      </a:r>
+                    </a:p>
+                  </a:txBody>
+                  <a:tcPr marL="54864" marR="54864" marT="18288" marB="18288" anchor="ctr"/>
+                </a:tc>
+                <a:tc>
+                  <a:txBody>
+                    <a:bodyPr wrap="square"/>
+                    <a:lstStyle/>
+                    <a:p>
+                      <a:r>
+                        <a:rPr sz="1100" b="0">
+                          <a:ea typeface="맑은 고딕"/>
+                          <a:cs typeface="맑은 고딕"/>
+                        </a:rPr>
+                        <a:t>인과 GP 대비 4/4</a:t>
+                      </a:r>
+                    </a:p>
+                  </a:txBody>
+                  <a:tcPr marL="54864" marR="54864" marT="18288" marB="18288" anchor="ctr"/>
+                </a:tc>
+              </a:tr>
+              <a:tr h="274320">
+                <a:tc>
+                  <a:txBody>
+                    <a:bodyPr wrap="square"/>
+                    <a:lstStyle/>
+                    <a:p>
+                      <a:r>
+                        <a:rPr sz="1100" b="0">
+                          <a:ea typeface="맑은 고딕"/>
+                          <a:cs typeface="맑은 고딕"/>
+                        </a:rPr>
+                        <a:t>6</a:t>
+                      </a:r>
+                    </a:p>
+                  </a:txBody>
+                  <a:tcPr marL="54864" marR="54864" marT="18288" marB="18288" anchor="ctr"/>
+                </a:tc>
+                <a:tc>
+                  <a:txBody>
+                    <a:bodyPr wrap="square"/>
+                    <a:lstStyle/>
+                    <a:p>
+                      <a:r>
+                        <a:rPr sz="1100" b="0">
+                          <a:ea typeface="맑은 고딕"/>
+                          <a:cs typeface="맑은 고딕"/>
+                        </a:rPr>
+                        <a:t>FusionMAE식 사전학습 후 미세조정</a:t>
+                      </a:r>
+                    </a:p>
+                  </a:txBody>
+                  <a:tcPr marL="54864" marR="54864" marT="18288" marB="18288" anchor="ctr"/>
+                </a:tc>
+                <a:tc>
+                  <a:txBody>
+                    <a:bodyPr wrap="square"/>
+                    <a:lstStyle/>
+                    <a:p>
+                      <a:r>
+                        <a:rPr sz="1100" b="0">
+                          <a:ea typeface="맑은 고딕"/>
+                          <a:cs typeface="맑은 고딕"/>
+                        </a:rPr>
+                        <a:t>FusionMAE · TokaMind</a:t>
+                      </a:r>
+                    </a:p>
+                  </a:txBody>
+                  <a:tcPr marL="54864" marR="54864" marT="18288" marB="18288" anchor="ctr"/>
+                </a:tc>
+                <a:tc>
+                  <a:txBody>
+                    <a:bodyPr wrap="square"/>
+                    <a:lstStyle/>
+                    <a:p>
+                      <a:r>
+                        <a:rPr sz="1100" b="0">
+                          <a:ea typeface="맑은 고딕"/>
+                          <a:cs typeface="맑은 고딕"/>
+                        </a:rPr>
+                        <a:t>GPU 필요</a:t>
+                      </a:r>
+                    </a:p>
+                  </a:txBody>
+                  <a:tcPr marL="54864" marR="54864" marT="18288" marB="18288" anchor="ctr"/>
+                </a:tc>
+                <a:tc>
+                  <a:txBody>
+                    <a:bodyPr wrap="square"/>
+                    <a:lstStyle/>
+                    <a:p>
+                      <a:r>
+                        <a:rPr sz="1100" b="0">
+                          <a:ea typeface="맑은 고딕"/>
+                          <a:cs typeface="맑은 고딕"/>
+                        </a:rPr>
+                        <a:t>기대 이득 ≈ 0, 순위 최하</a:t>
+                      </a:r>
+                    </a:p>
+                  </a:txBody>
+                  <a:tcPr marL="54864" marR="54864" marT="18288" marB="18288" anchor="ctr"/>
+                </a:tc>
+              </a:tr>
+            </a:tbl>
+          </a:graphicData>
+        </a:graphic>
+      </p:graphicFrame>
+    </p:spTree>
+  </p:cSld>
+  <p:clrMapOvr>
+    <a:masterClrMapping/>
+  </p:clrMapOvr>
+</p:sld>
+</file>
+
+<file path=ppt/slides/slide59.xml><?xml version="1.0" encoding="utf-8"?>
+<p:sld xmlns:a="http://schemas.openxmlformats.org/drawingml/2006/main" xmlns:p="http://schemas.openxmlformats.org/presentationml/2006/main" xmlns:r="http://schemas.openxmlformats.org/officeDocument/2006/relationships">
+  <p:cSld>
+    <p:spTree>
+      <p:nvGrpSpPr>
+        <p:cNvPr id="1" name=""/>
+        <p:cNvGrpSpPr/>
+        <p:nvPr/>
+      </p:nvGrpSpPr>
+      <p:grpSpPr/>
+      <p:sp>
+        <p:nvSpPr>
+          <p:cNvPr id="2" name="Title 1"/>
+          <p:cNvSpPr>
+            <a:spLocks noGrp="1"/>
+          </p:cNvSpPr>
+          <p:nvPr>
+            <p:ph type="title"/>
+          </p:nvPr>
+        </p:nvSpPr>
+        <p:spPr>
+          <a:xfrm>
+            <a:off x="585216" y="704088"/>
+            <a:ext cx="11027664" cy="1014984"/>
+          </a:xfrm>
+        </p:spPr>
+        <p:txBody>
+          <a:bodyPr wrap="square"/>
+          <a:lstStyle/>
+          <a:p>
+            <a:r>
+              <a:rPr b="0" sz="2800">
+                <a:ea typeface="맑은 고딕"/>
+                <a:cs typeface="맑은 고딕"/>
+              </a:rPr>
+              <a:t>권하지 않는 방향과, 열려 있는 V_rot</a:t>
+            </a:r>
+          </a:p>
+        </p:txBody>
+      </p:sp>
+      <p:sp>
+        <p:nvSpPr>
+          <p:cNvPr id="3" name="Content Placeholder 2"/>
+          <p:cNvSpPr>
+            <a:spLocks noGrp="1"/>
+          </p:cNvSpPr>
+          <p:nvPr>
+            <p:ph idx="1"/>
+          </p:nvPr>
+        </p:nvSpPr>
+        <p:spPr>
+          <a:xfrm>
+            <a:off x="585216" y="2176272"/>
+            <a:ext cx="11027664" cy="3675887"/>
+          </a:xfrm>
+        </p:spPr>
+        <p:txBody>
+          <a:bodyPr wrap="square"/>
+          <a:lstStyle/>
+          <a:p>
+            <a:pPr>
+              <a:spcAft>
+                <a:spcPts val="600"/>
+              </a:spcAft>
+            </a:pPr>
+            <a:r>
+              <a:rPr sz="1800">
+                <a:ea typeface="맑은 고딕"/>
+                <a:cs typeface="맑은 고딕"/>
+              </a:rPr>
+              <a:t>권하지 않는 방향은 다음 셋이다.</a:t>
+            </a:r>
+          </a:p>
+          <a:p>
+            <a:pPr lvl="1">
+              <a:spcAft>
+                <a:spcPts val="300"/>
+              </a:spcAft>
+            </a:pPr>
+            <a:r>
+              <a:rPr sz="1600">
+                <a:ea typeface="맑은 고딕"/>
+                <a:cs typeface="맑은 고딕"/>
+              </a:rPr>
+              <a:t>CNN 뒤 Transformer와 VAE 잠재는 표현력 축이며 세 번 닫혔다(§8aa · §8ag · §8aq).</a:t>
+            </a:r>
+          </a:p>
+          <a:p>
+            <a:pPr lvl="1">
+              <a:spcAft>
+                <a:spcPts val="300"/>
+              </a:spcAft>
+            </a:pPr>
+            <a:r>
+              <a:rPr sz="1600">
+                <a:ea typeface="맑은 고딕"/>
+                <a:cs typeface="맑은 고딕"/>
+              </a:rPr>
+              <a:t>Neural CDE 계열은 규칙 10 ms 격자에서 이미 음성으로 판정되었다(§8e).</a:t>
+            </a:r>
+          </a:p>
+          <a:p>
+            <a:pPr lvl="1">
+              <a:spcAft>
+                <a:spcPts val="300"/>
+              </a:spcAft>
+            </a:pPr>
+            <a:r>
+              <a:rPr sz="1600">
+                <a:ea typeface="맑은 고딕"/>
+                <a:cs typeface="맑은 고딕"/>
+              </a:rPr>
+              <a:t>확산 대체는 추론이 느리고 점 결측 벤치마크에서 선형보간에 진다(TSI-Bench).</a:t>
+            </a:r>
+          </a:p>
+          <a:p>
+            <a:pPr>
+              <a:spcAft>
+                <a:spcPts val="600"/>
+              </a:spcAft>
+            </a:pPr>
+            <a:r>
+              <a:rPr sz="1800">
+                <a:ea typeface="맑은 고딕"/>
+                <a:cs typeface="맑은 고딕"/>
+              </a:rPr>
+              <a:t>회전은 닫힌 결론이 아니라 열린 과제이다.</a:t>
+            </a:r>
+          </a:p>
+          <a:p>
+            <a:pPr lvl="1">
+              <a:spcAft>
+                <a:spcPts val="300"/>
+              </a:spcAft>
+            </a:pPr>
+            <a:r>
+              <a:rPr sz="1600">
+                <a:ea typeface="맑은 고딕"/>
+                <a:cs typeface="맑은 고딕"/>
+              </a:rPr>
+              <a:t>V_rot는 열린 과제이며 닫힌 결론이 아니다.</a:t>
+            </a:r>
+          </a:p>
+          <a:p>
+            <a:pPr lvl="1">
+              <a:spcAft>
+                <a:spcPts val="300"/>
+              </a:spcAft>
+            </a:pPr>
+            <a:r>
+              <a:rPr sz="1600">
+                <a:ea typeface="맑은 고딕"/>
+                <a:cs typeface="맑은 고딕"/>
+              </a:rPr>
+              <a:t>§8ar의 항별 감사는 현재 입력이 닿는 항이 없음을 보였을 뿐이다.</a:t>
+            </a:r>
+          </a:p>
+          <a:p>
+            <a:pPr lvl="1">
+              <a:spcAft>
+                <a:spcPts val="300"/>
+              </a:spcAft>
+            </a:pPr>
+            <a:r>
+              <a:rPr sz="1600">
+                <a:ea typeface="맑은 고딕"/>
+                <a:cs typeface="맑은 고딕"/>
+              </a:rPr>
+              <a:t>그것을 뒤집을 측정이 함께 지목되어 있다: 원시 kHz Mirnov(B.6, shot 집합 동결),</a:t>
+            </a:r>
+          </a:p>
+          <a:p>
+            <a:pPr lvl="1">
+              <a:spcAft>
+                <a:spcPts val="300"/>
+              </a:spcAft>
+            </a:pPr>
+            <a:r>
+              <a:rPr sz="1600">
+                <a:ea typeface="맑은 고딕"/>
+                <a:cs typeface="맑은 고딕"/>
+              </a:rPr>
+              <a:t>NBI 토크 채널, CES 피팅 품질 메타데이터, 그리고 도플러 분광 입력의 확보이다.</a:t>
             </a:r>
           </a:p>
         </p:txBody>

--- a/docs/presentation/KSTAR_CES_졸논정리_논문흐름.pptx
+++ b/docs/presentation/KSTAR_CES_졸논정리_논문흐름.pptx
@@ -67,6 +67,8 @@
     <p:sldId id="312" r:id="rId63"/>
     <p:sldId id="313" r:id="rId64"/>
     <p:sldId id="314" r:id="rId65"/>
+    <p:sldId id="315" r:id="rId66"/>
+    <p:sldId id="316" r:id="rId67"/>
   </p:sldIdLst>
   <p:sldSz cx="12192000" cy="6858000"/>
   <p:notesSz cx="6858000" cy="9144000"/>
@@ -4366,6 +4368,33 @@
                 <a:ea typeface="맑은 고딕"/>
                 <a:cs typeface="맑은 고딕"/>
               </a:rPr>
+              <a:t>- TokEye: https://arxiv.org/pdf/2602.20317</a:t>
+            </a:r>
+          </a:p>
+          <a:p>
+            <a:r>
+              <a:rPr>
+                <a:ea typeface="맑은 고딕"/>
+                <a:cs typeface="맑은 고딕"/>
+              </a:rPr>
+              <a:t>- KSTAR EPED 재구성: https://link.springer.com/article/10.1007/s40042-026-01580-1</a:t>
+            </a:r>
+          </a:p>
+          <a:p>
+            <a:r>
+              <a:rPr>
+                <a:ea typeface="맑은 고딕"/>
+                <a:cs typeface="맑은 고딕"/>
+              </a:rPr>
+              <a:t>- DIII-D 코일 shot-to-shot: https://www.ans.org/news/2026-08-18/article-8302/new-ml-framework-predicts-shifts-between-shots-at-diiid/</a:t>
+            </a:r>
+          </a:p>
+          <a:p>
+            <a:r>
+              <a:rPr>
+                <a:ea typeface="맑은 고딕"/>
+                <a:cs typeface="맑은 고딕"/>
+              </a:rPr>
               <a:t>- TSI-Bench: https://arxiv.org/abs/2406.12747</a:t>
             </a:r>
           </a:p>
@@ -4393,6 +4422,15 @@
                 <a:ea typeface="맑은 고딕"/>
                 <a:cs typeface="맑은 고딕"/>
               </a:rPr>
+              <a:t>- Neural CDE 보정기: https://arxiv.org/html/2512.12116v3</a:t>
+            </a:r>
+          </a:p>
+          <a:p>
+            <a:r>
+              <a:rPr>
+                <a:ea typeface="맑은 고딕"/>
+                <a:cs typeface="맑은 고딕"/>
+              </a:rPr>
               <a:t>- TimeXer: https://github.com/thuml/TimeXer</a:t>
             </a:r>
           </a:p>
@@ -4438,7 +4476,7 @@
                 <a:ea typeface="맑은 고딕"/>
                 <a:cs typeface="맑은 고딕"/>
               </a:rPr>
-              <a:t>- TokEye: https://arxiv.org/pdf/2602.20317</a:t>
+              <a:t>- RG-ResMoE: https://arxiv.org/html/2608.12251v1</a:t>
             </a:r>
           </a:p>
           <a:p>
@@ -4447,7 +4485,7 @@
                 <a:ea typeface="맑은 고딕"/>
                 <a:cs typeface="맑은 고딕"/>
               </a:rPr>
-              <a:t>- RG-ResMoE: https://arxiv.org/html/2608.12251v1</a:t>
+              <a:t>- KalmanNet: https://dl.acm.org/doi/abs/10.1109/tsp.2022.3158588</a:t>
             </a:r>
           </a:p>
           <a:p>
@@ -4456,7 +4494,7 @@
                 <a:ea typeface="맑은 고딕"/>
                 <a:cs typeface="맑은 고딕"/>
               </a:rPr>
-              <a:t>- KalmanNet: https://dl.acm.org/doi/abs/10.1109/tsp.2022.3158588</a:t>
+              <a:t>- Unscented KalmanNet: https://arxiv.org/html/2608.04201</a:t>
             </a:r>
           </a:p>
           <a:p>
@@ -4602,7 +4640,340 @@
                 <a:ea typeface="맑은 고딕"/>
                 <a:cs typeface="맑은 고딕"/>
               </a:rPr>
-              <a:t>마지막 열은 본 저장소의 통제 실험 판정이며, 새 계열을 도입하기 전에 이 열을 먼저 읽는다.</a:t>
+              <a:t>2026-09-05 조사한 핵융합 12편의 요약이다.</a:t>
+            </a:r>
+          </a:p>
+          <a:p>
+            <a:r>
+              <a:rPr>
+                <a:ea typeface="맑은 고딕"/>
+                <a:cs typeface="맑은 고딕"/>
+              </a:rPr>
+              <a:t>조사일 2026-09-05. 출처:</a:t>
+            </a:r>
+          </a:p>
+          <a:p>
+            <a:r>
+              <a:rPr>
+                <a:ea typeface="맑은 고딕"/>
+                <a:cs typeface="맑은 고딕"/>
+              </a:rPr>
+              <a:t>- Diag2Diag: https://arxiv.org/html/2405.05908v4</a:t>
+            </a:r>
+          </a:p>
+          <a:p>
+            <a:r>
+              <a:rPr>
+                <a:ea typeface="맑은 고딕"/>
+                <a:cs typeface="맑은 고딕"/>
+              </a:rPr>
+              <a:t>- Diag2Diag Nat. Comm.: https://www.nature.com/articles/s41467-025-63492-1</a:t>
+            </a:r>
+          </a:p>
+          <a:p>
+            <a:r>
+              <a:rPr>
+                <a:ea typeface="맑은 고딕"/>
+                <a:cs typeface="맑은 고딕"/>
+              </a:rPr>
+              <a:t>- COMPASS 시간 초해상: https://iopscience.iop.org/article/10.1088/1361-6587/ae72c6</a:t>
+            </a:r>
+          </a:p>
+          <a:p>
+            <a:r>
+              <a:rPr>
+                <a:ea typeface="맑은 고딕"/>
+                <a:cs typeface="맑은 고딕"/>
+              </a:rPr>
+              <a:t>- FusionMAE: https://arxiv.org/abs/2509.12945</a:t>
+            </a:r>
+          </a:p>
+          <a:p>
+            <a:r>
+              <a:rPr>
+                <a:ea typeface="맑은 고딕"/>
+                <a:cs typeface="맑은 고딕"/>
+              </a:rPr>
+              <a:t>- TokaMind: https://arxiv.org/html/2602.15084v2</a:t>
+            </a:r>
+          </a:p>
+          <a:p>
+            <a:r>
+              <a:rPr>
+                <a:ea typeface="맑은 고딕"/>
+                <a:cs typeface="맑은 고딕"/>
+              </a:rPr>
+              <a:t>- TokaMark: https://arxiv.org/html/2602.10132v2</a:t>
+            </a:r>
+          </a:p>
+          <a:p>
+            <a:r>
+              <a:rPr>
+                <a:ea typeface="맑은 고딕"/>
+                <a:cs typeface="맑은 고딕"/>
+              </a:rPr>
+              <a:t>- PanoMHD: https://arxiv.org/html/2603.02672</a:t>
+            </a:r>
+          </a:p>
+          <a:p>
+            <a:r>
+              <a:rPr>
+                <a:ea typeface="맑은 고딕"/>
+                <a:cs typeface="맑은 고딕"/>
+              </a:rPr>
+              <a:t>- TCV 멀티모달 VAE: https://arxiv.org/abs/2504.17710</a:t>
+            </a:r>
+          </a:p>
+          <a:p>
+            <a:r>
+              <a:rPr>
+                <a:ea typeface="맑은 고딕"/>
+                <a:cs typeface="맑은 고딕"/>
+              </a:rPr>
+              <a:t>- EAST 지식증류: https://arxiv.org/html/2607.04241</a:t>
+            </a:r>
+          </a:p>
+          <a:p>
+            <a:r>
+              <a:rPr>
+                <a:ea typeface="맑은 고딕"/>
+                <a:cs typeface="맑은 고딕"/>
+              </a:rPr>
+              <a:t>- WEST: https://arxiv.org/html/2602.19110</a:t>
+            </a:r>
+          </a:p>
+          <a:p>
+            <a:r>
+              <a:rPr>
+                <a:ea typeface="맑은 고딕"/>
+                <a:cs typeface="맑은 고딕"/>
+              </a:rPr>
+              <a:t>- EAST XCS ANN: https://iopscience.iop.org/article/10.1088/1741-4326/ad73e8</a:t>
+            </a:r>
+          </a:p>
+          <a:p>
+            <a:r>
+              <a:rPr>
+                <a:ea typeface="맑은 고딕"/>
+                <a:cs typeface="맑은 고딕"/>
+              </a:rPr>
+              <a:t>- Abbate 2025: https://iopscience.iop.org/article/10.1088/1741-4326/adc283</a:t>
+            </a:r>
+          </a:p>
+          <a:p>
+            <a:r>
+              <a:rPr>
+                <a:ea typeface="맑은 고딕"/>
+                <a:cs typeface="맑은 고딕"/>
+              </a:rPr>
+              <a:t>- 합성 진단 증강: https://arxiv.org/abs/2606.08462</a:t>
+            </a:r>
+          </a:p>
+          <a:p>
+            <a:r>
+              <a:rPr>
+                <a:ea typeface="맑은 고딕"/>
+                <a:cs typeface="맑은 고딕"/>
+              </a:rPr>
+              <a:t>- TokEye: https://arxiv.org/pdf/2602.20317</a:t>
+            </a:r>
+          </a:p>
+          <a:p>
+            <a:r>
+              <a:rPr>
+                <a:ea typeface="맑은 고딕"/>
+                <a:cs typeface="맑은 고딕"/>
+              </a:rPr>
+              <a:t>- KSTAR EPED 재구성: https://link.springer.com/article/10.1007/s40042-026-01580-1</a:t>
+            </a:r>
+          </a:p>
+          <a:p>
+            <a:r>
+              <a:rPr>
+                <a:ea typeface="맑은 고딕"/>
+                <a:cs typeface="맑은 고딕"/>
+              </a:rPr>
+              <a:t>- DIII-D 코일 shot-to-shot: https://www.ans.org/news/2026-08-18/article-8302/new-ml-framework-predicts-shifts-between-shots-at-diiid/</a:t>
+            </a:r>
+          </a:p>
+          <a:p>
+            <a:r>
+              <a:rPr>
+                <a:ea typeface="맑은 고딕"/>
+                <a:cs typeface="맑은 고딕"/>
+              </a:rPr>
+              <a:t>- TSI-Bench: https://arxiv.org/abs/2406.12747</a:t>
+            </a:r>
+          </a:p>
+          <a:p>
+            <a:r>
+              <a:rPr>
+                <a:ea typeface="맑은 고딕"/>
+                <a:cs typeface="맑은 고딕"/>
+              </a:rPr>
+              <a:t>- STDiff: https://arxiv.org/html/2508.19011v1</a:t>
+            </a:r>
+          </a:p>
+          <a:p>
+            <a:r>
+              <a:rPr>
+                <a:ea typeface="맑은 고딕"/>
+                <a:cs typeface="맑은 고딕"/>
+              </a:rPr>
+              <a:t>- iTimER: https://arxiv.org/html/2511.06854</a:t>
+            </a:r>
+          </a:p>
+          <a:p>
+            <a:r>
+              <a:rPr>
+                <a:ea typeface="맑은 고딕"/>
+                <a:cs typeface="맑은 고딕"/>
+              </a:rPr>
+              <a:t>- Neural CDE 보정기: https://arxiv.org/html/2512.12116v3</a:t>
+            </a:r>
+          </a:p>
+          <a:p>
+            <a:r>
+              <a:rPr>
+                <a:ea typeface="맑은 고딕"/>
+                <a:cs typeface="맑은 고딕"/>
+              </a:rPr>
+              <a:t>- TimeXer: https://github.com/thuml/TimeXer</a:t>
+            </a:r>
+          </a:p>
+          <a:p>
+            <a:r>
+              <a:rPr>
+                <a:ea typeface="맑은 고딕"/>
+                <a:cs typeface="맑은 고딕"/>
+              </a:rPr>
+              <a:t>- TiRex-2: https://arxiv.org/html/2607.01204v1</a:t>
+            </a:r>
+          </a:p>
+          <a:p>
+            <a:r>
+              <a:rPr>
+                <a:ea typeface="맑은 고딕"/>
+                <a:cs typeface="맑은 고딕"/>
+              </a:rPr>
+              <a:t>- TabPFN-TS: https://arxiv.org/abs/2501.02945</a:t>
+            </a:r>
+          </a:p>
+          <a:p>
+            <a:r>
+              <a:rPr>
+                <a:ea typeface="맑은 고딕"/>
+                <a:cs typeface="맑은 고딕"/>
+              </a:rPr>
+              <a:t>- TSFM 벤치마크 경고: https://arxiv.org/html/2510.13654v1</a:t>
+            </a:r>
+          </a:p>
+          <a:p>
+            <a:r>
+              <a:rPr>
+                <a:ea typeface="맑은 고딕"/>
+                <a:cs typeface="맑은 고딕"/>
+              </a:rPr>
+              <a:t>- TimeMAE: https://arxiv.org/html/2303.00320v4</a:t>
+            </a:r>
+          </a:p>
+          <a:p>
+            <a:r>
+              <a:rPr>
+                <a:ea typeface="맑은 고딕"/>
+                <a:cs typeface="맑은 고딕"/>
+              </a:rPr>
+              <a:t>- RG-ResMoE: https://arxiv.org/html/2608.12251v1</a:t>
+            </a:r>
+          </a:p>
+          <a:p>
+            <a:r>
+              <a:rPr>
+                <a:ea typeface="맑은 고딕"/>
+                <a:cs typeface="맑은 고딕"/>
+              </a:rPr>
+              <a:t>- KalmanNet: https://dl.acm.org/doi/abs/10.1109/tsp.2022.3158588</a:t>
+            </a:r>
+          </a:p>
+          <a:p>
+            <a:r>
+              <a:rPr>
+                <a:ea typeface="맑은 고딕"/>
+                <a:cs typeface="맑은 고딕"/>
+              </a:rPr>
+              <a:t>- Unscented KalmanNet: https://arxiv.org/html/2608.04201</a:t>
+            </a:r>
+          </a:p>
+          <a:p>
+            <a:r>
+              <a:rPr>
+                <a:ea typeface="맑은 고딕"/>
+                <a:cs typeface="맑은 고딕"/>
+              </a:rPr>
+              <a:t>- DLFM: https://link.springer.com/article/10.1007/s10994-025-06824-y</a:t>
+            </a:r>
+          </a:p>
+          <a:p>
+            <a:r>
+              <a:rPr>
+                <a:ea typeface="맑은 고딕"/>
+                <a:cs typeface="맑은 고딕"/>
+              </a:rPr>
+              <a:t>- 이분산 회귀 병리: https://arxiv.org/pdf/2306.16717</a:t>
+            </a:r>
+          </a:p>
+          <a:p>
+            <a:r>
+              <a:rPr>
+                <a:ea typeface="맑은 고딕"/>
+                <a:cs typeface="맑은 고딕"/>
+              </a:rPr>
+              <a:t>- 반지도 VAE 회귀: https://arxiv.org/pdf/2211.05979</a:t>
+            </a:r>
+          </a:p>
+          <a:p>
+            <a:r>
+              <a:rPr>
+                <a:ea typeface="맑은 고딕"/>
+                <a:cs typeface="맑은 고딕"/>
+              </a:rPr>
+              <a:t>- GP-MIDAS: https://arxiv.org/html/2402.10574v2</a:t>
+            </a:r>
+          </a:p>
+          <a:p>
+            <a:r>
+              <a:rPr>
+                <a:ea typeface="맑은 고딕"/>
+                <a:cs typeface="맑은 고딕"/>
+              </a:rPr>
+              <a:t>- 저가 센서 보정: https://arxiv.org/html/2604.21527v1</a:t>
+            </a:r>
+          </a:p>
+          <a:p>
+            <a:r>
+              <a:rPr>
+                <a:ea typeface="맑은 고딕"/>
+                <a:cs typeface="맑은 고딕"/>
+              </a:rPr>
+              <a:t>- 커프리스 혈압 벤치마크: https://arxiv.org/html/2602.04725v1</a:t>
+            </a:r>
+          </a:p>
+          <a:p>
+            <a:r>
+              <a:rPr>
+                <a:ea typeface="맑은 고딕"/>
+                <a:cs typeface="맑은 고딕"/>
+              </a:rPr>
+              <a:t>- PiGGO: https://arxiv.org/pdf/2604.26593</a:t>
+            </a:r>
+          </a:p>
+          <a:p>
+            <a:r>
+              <a:rPr>
+                <a:ea typeface="맑은 고딕"/>
+                <a:cs typeface="맑은 고딕"/>
+              </a:rPr>
+              <a:t>- 멀티태스크 가상센서: https://arxiv.org/abs/2601.20634</a:t>
             </a:r>
           </a:p>
         </p:txBody>
@@ -4676,7 +5047,7 @@
                 <a:ea typeface="맑은 고딕"/>
                 <a:cs typeface="맑은 고딕"/>
               </a:rPr>
-              <a:t>혼합주기 나우캐스팅 · 저가 센서 보정 · 커프리스 혈압 · 구조 가상 센싱 · 합성 진단 증강의 다섯 계열에서 같은 결론이 반복된다.</a:t>
+              <a:t>마지막 열은 본 저장소의 통제 실험 판정이며, 새 계열을 도입하기 전에 이 열을 먼저 읽는다.</a:t>
             </a:r>
           </a:p>
         </p:txBody>
@@ -4750,304 +5121,7 @@
                 <a:ea typeface="맑은 고딕"/>
                 <a:cs typeface="맑은 고딕"/>
               </a:rPr>
-              <a:t>우선순위는 비용 대비 정보량 순이다.</a:t>
-            </a:r>
-          </a:p>
-          <a:p>
-            <a:r>
-              <a:rPr>
-                <a:ea typeface="맑은 고딕"/>
-                <a:cs typeface="맑은 고딕"/>
-              </a:rPr>
-              <a:t>조사일 2026-09-05. 출처:</a:t>
-            </a:r>
-          </a:p>
-          <a:p>
-            <a:r>
-              <a:rPr>
-                <a:ea typeface="맑은 고딕"/>
-                <a:cs typeface="맑은 고딕"/>
-              </a:rPr>
-              <a:t>- Diag2Diag: https://arxiv.org/html/2405.05908v4</a:t>
-            </a:r>
-          </a:p>
-          <a:p>
-            <a:r>
-              <a:rPr>
-                <a:ea typeface="맑은 고딕"/>
-                <a:cs typeface="맑은 고딕"/>
-              </a:rPr>
-              <a:t>- Diag2Diag Nat. Comm.: https://www.nature.com/articles/s41467-025-63492-1</a:t>
-            </a:r>
-          </a:p>
-          <a:p>
-            <a:r>
-              <a:rPr>
-                <a:ea typeface="맑은 고딕"/>
-                <a:cs typeface="맑은 고딕"/>
-              </a:rPr>
-              <a:t>- COMPASS 시간 초해상: https://iopscience.iop.org/article/10.1088/1361-6587/ae72c6</a:t>
-            </a:r>
-          </a:p>
-          <a:p>
-            <a:r>
-              <a:rPr>
-                <a:ea typeface="맑은 고딕"/>
-                <a:cs typeface="맑은 고딕"/>
-              </a:rPr>
-              <a:t>- FusionMAE: https://arxiv.org/abs/2509.12945</a:t>
-            </a:r>
-          </a:p>
-          <a:p>
-            <a:r>
-              <a:rPr>
-                <a:ea typeface="맑은 고딕"/>
-                <a:cs typeface="맑은 고딕"/>
-              </a:rPr>
-              <a:t>- TokaMind: https://arxiv.org/html/2602.15084v2</a:t>
-            </a:r>
-          </a:p>
-          <a:p>
-            <a:r>
-              <a:rPr>
-                <a:ea typeface="맑은 고딕"/>
-                <a:cs typeface="맑은 고딕"/>
-              </a:rPr>
-              <a:t>- TokaMark: https://arxiv.org/html/2602.10132v2</a:t>
-            </a:r>
-          </a:p>
-          <a:p>
-            <a:r>
-              <a:rPr>
-                <a:ea typeface="맑은 고딕"/>
-                <a:cs typeface="맑은 고딕"/>
-              </a:rPr>
-              <a:t>- PanoMHD: https://arxiv.org/html/2603.02672</a:t>
-            </a:r>
-          </a:p>
-          <a:p>
-            <a:r>
-              <a:rPr>
-                <a:ea typeface="맑은 고딕"/>
-                <a:cs typeface="맑은 고딕"/>
-              </a:rPr>
-              <a:t>- TCV 멀티모달 VAE: https://arxiv.org/abs/2504.17710</a:t>
-            </a:r>
-          </a:p>
-          <a:p>
-            <a:r>
-              <a:rPr>
-                <a:ea typeface="맑은 고딕"/>
-                <a:cs typeface="맑은 고딕"/>
-              </a:rPr>
-              <a:t>- EAST 지식증류: https://arxiv.org/html/2607.04241</a:t>
-            </a:r>
-          </a:p>
-          <a:p>
-            <a:r>
-              <a:rPr>
-                <a:ea typeface="맑은 고딕"/>
-                <a:cs typeface="맑은 고딕"/>
-              </a:rPr>
-              <a:t>- WEST: https://arxiv.org/html/2602.19110</a:t>
-            </a:r>
-          </a:p>
-          <a:p>
-            <a:r>
-              <a:rPr>
-                <a:ea typeface="맑은 고딕"/>
-                <a:cs typeface="맑은 고딕"/>
-              </a:rPr>
-              <a:t>- EAST XCS ANN: https://iopscience.iop.org/article/10.1088/1741-4326/ad73e8</a:t>
-            </a:r>
-          </a:p>
-          <a:p>
-            <a:r>
-              <a:rPr>
-                <a:ea typeface="맑은 고딕"/>
-                <a:cs typeface="맑은 고딕"/>
-              </a:rPr>
-              <a:t>- Abbate 2025: https://iopscience.iop.org/article/10.1088/1741-4326/adc283</a:t>
-            </a:r>
-          </a:p>
-          <a:p>
-            <a:r>
-              <a:rPr>
-                <a:ea typeface="맑은 고딕"/>
-                <a:cs typeface="맑은 고딕"/>
-              </a:rPr>
-              <a:t>- 합성 진단 증강: https://arxiv.org/abs/2606.08462</a:t>
-            </a:r>
-          </a:p>
-          <a:p>
-            <a:r>
-              <a:rPr>
-                <a:ea typeface="맑은 고딕"/>
-                <a:cs typeface="맑은 고딕"/>
-              </a:rPr>
-              <a:t>- TSI-Bench: https://arxiv.org/abs/2406.12747</a:t>
-            </a:r>
-          </a:p>
-          <a:p>
-            <a:r>
-              <a:rPr>
-                <a:ea typeface="맑은 고딕"/>
-                <a:cs typeface="맑은 고딕"/>
-              </a:rPr>
-              <a:t>- STDiff: https://arxiv.org/html/2508.19011v1</a:t>
-            </a:r>
-          </a:p>
-          <a:p>
-            <a:r>
-              <a:rPr>
-                <a:ea typeface="맑은 고딕"/>
-                <a:cs typeface="맑은 고딕"/>
-              </a:rPr>
-              <a:t>- iTimER: https://arxiv.org/html/2511.06854</a:t>
-            </a:r>
-          </a:p>
-          <a:p>
-            <a:r>
-              <a:rPr>
-                <a:ea typeface="맑은 고딕"/>
-                <a:cs typeface="맑은 고딕"/>
-              </a:rPr>
-              <a:t>- TimeXer: https://github.com/thuml/TimeXer</a:t>
-            </a:r>
-          </a:p>
-          <a:p>
-            <a:r>
-              <a:rPr>
-                <a:ea typeface="맑은 고딕"/>
-                <a:cs typeface="맑은 고딕"/>
-              </a:rPr>
-              <a:t>- TiRex-2: https://arxiv.org/html/2607.01204v1</a:t>
-            </a:r>
-          </a:p>
-          <a:p>
-            <a:r>
-              <a:rPr>
-                <a:ea typeface="맑은 고딕"/>
-                <a:cs typeface="맑은 고딕"/>
-              </a:rPr>
-              <a:t>- TabPFN-TS: https://arxiv.org/abs/2501.02945</a:t>
-            </a:r>
-          </a:p>
-          <a:p>
-            <a:r>
-              <a:rPr>
-                <a:ea typeface="맑은 고딕"/>
-                <a:cs typeface="맑은 고딕"/>
-              </a:rPr>
-              <a:t>- TSFM 벤치마크 경고: https://arxiv.org/html/2510.13654v1</a:t>
-            </a:r>
-          </a:p>
-          <a:p>
-            <a:r>
-              <a:rPr>
-                <a:ea typeface="맑은 고딕"/>
-                <a:cs typeface="맑은 고딕"/>
-              </a:rPr>
-              <a:t>- TimeMAE: https://arxiv.org/html/2303.00320v4</a:t>
-            </a:r>
-          </a:p>
-          <a:p>
-            <a:r>
-              <a:rPr>
-                <a:ea typeface="맑은 고딕"/>
-                <a:cs typeface="맑은 고딕"/>
-              </a:rPr>
-              <a:t>- TokEye: https://arxiv.org/pdf/2602.20317</a:t>
-            </a:r>
-          </a:p>
-          <a:p>
-            <a:r>
-              <a:rPr>
-                <a:ea typeface="맑은 고딕"/>
-                <a:cs typeface="맑은 고딕"/>
-              </a:rPr>
-              <a:t>- RG-ResMoE: https://arxiv.org/html/2608.12251v1</a:t>
-            </a:r>
-          </a:p>
-          <a:p>
-            <a:r>
-              <a:rPr>
-                <a:ea typeface="맑은 고딕"/>
-                <a:cs typeface="맑은 고딕"/>
-              </a:rPr>
-              <a:t>- KalmanNet: https://dl.acm.org/doi/abs/10.1109/tsp.2022.3158588</a:t>
-            </a:r>
-          </a:p>
-          <a:p>
-            <a:r>
-              <a:rPr>
-                <a:ea typeface="맑은 고딕"/>
-                <a:cs typeface="맑은 고딕"/>
-              </a:rPr>
-              <a:t>- DLFM: https://link.springer.com/article/10.1007/s10994-025-06824-y</a:t>
-            </a:r>
-          </a:p>
-          <a:p>
-            <a:r>
-              <a:rPr>
-                <a:ea typeface="맑은 고딕"/>
-                <a:cs typeface="맑은 고딕"/>
-              </a:rPr>
-              <a:t>- 이분산 회귀 병리: https://arxiv.org/pdf/2306.16717</a:t>
-            </a:r>
-          </a:p>
-          <a:p>
-            <a:r>
-              <a:rPr>
-                <a:ea typeface="맑은 고딕"/>
-                <a:cs typeface="맑은 고딕"/>
-              </a:rPr>
-              <a:t>- 반지도 VAE 회귀: https://arxiv.org/pdf/2211.05979</a:t>
-            </a:r>
-          </a:p>
-          <a:p>
-            <a:r>
-              <a:rPr>
-                <a:ea typeface="맑은 고딕"/>
-                <a:cs typeface="맑은 고딕"/>
-              </a:rPr>
-              <a:t>- GP-MIDAS: https://arxiv.org/html/2402.10574v2</a:t>
-            </a:r>
-          </a:p>
-          <a:p>
-            <a:r>
-              <a:rPr>
-                <a:ea typeface="맑은 고딕"/>
-                <a:cs typeface="맑은 고딕"/>
-              </a:rPr>
-              <a:t>- 저가 센서 보정: https://arxiv.org/html/2604.21527v1</a:t>
-            </a:r>
-          </a:p>
-          <a:p>
-            <a:r>
-              <a:rPr>
-                <a:ea typeface="맑은 고딕"/>
-                <a:cs typeface="맑은 고딕"/>
-              </a:rPr>
-              <a:t>- 커프리스 혈압 벤치마크: https://arxiv.org/html/2602.04725v1</a:t>
-            </a:r>
-          </a:p>
-          <a:p>
-            <a:r>
-              <a:rPr>
-                <a:ea typeface="맑은 고딕"/>
-                <a:cs typeface="맑은 고딕"/>
-              </a:rPr>
-              <a:t>- PiGGO: https://arxiv.org/pdf/2604.26593</a:t>
-            </a:r>
-          </a:p>
-          <a:p>
-            <a:r>
-              <a:rPr>
-                <a:ea typeface="맑은 고딕"/>
-                <a:cs typeface="맑은 고딕"/>
-              </a:rPr>
-              <a:t>- 멀티태스크 가상센서: https://arxiv.org/abs/2601.20634</a:t>
+              <a:t>마지막 열은 본 저장소의 통제 실험 판정이며, 새 계열을 도입하기 전에 이 열을 먼저 읽는다.</a:t>
             </a:r>
           </a:p>
         </p:txBody>
@@ -5121,7 +5195,414 @@
                 <a:ea typeface="맑은 고딕"/>
                 <a:cs typeface="맑은 고딕"/>
               </a:rPr>
-              <a:t>음성 결과는 그것을 뒤집을 측정을 지목할 때만 결론으로 인정한다는 규칙을 따른다.</a:t>
+              <a:t>혼합주기 나우캐스팅 · 저가 센서 보정 · 커프리스 혈압 · 구조 가상 센싱 · 합성 진단 증강의 다섯 계열에서 같은 결론이 반복된다.</a:t>
+            </a:r>
+          </a:p>
+        </p:txBody>
+      </p:sp>
+      <p:sp>
+        <p:nvSpPr>
+          <p:cNvPr id="4" name="Slide Number Placeholder 3"/>
+          <p:cNvSpPr>
+            <a:spLocks noGrp="1"/>
+          </p:cNvSpPr>
+          <p:nvPr>
+            <p:ph type="sldNum" idx="5" sz="quarter"/>
+          </p:nvPr>
+        </p:nvSpPr>
+        <p:spPr/>
+      </p:sp>
+    </p:spTree>
+  </p:cSld>
+  <p:clrMapOvr>
+    <a:masterClrMapping/>
+  </p:clrMapOvr>
+</p:notes>
+</file>
+
+<file path=ppt/notesSlides/notesSlide59.xml><?xml version="1.0" encoding="utf-8"?>
+<p:notes xmlns:a="http://schemas.openxmlformats.org/drawingml/2006/main" xmlns:p="http://schemas.openxmlformats.org/presentationml/2006/main" xmlns:r="http://schemas.openxmlformats.org/officeDocument/2006/relationships">
+  <p:cSld>
+    <p:spTree>
+      <p:nvGrpSpPr>
+        <p:cNvPr id="1" name=""/>
+        <p:cNvGrpSpPr/>
+        <p:nvPr/>
+      </p:nvGrpSpPr>
+      <p:grpSpPr>
+        <a:xfrm>
+          <a:off x="0" y="0"/>
+          <a:ext cx="0" cy="0"/>
+          <a:chOff x="0" y="0"/>
+          <a:chExt cx="0" cy="0"/>
+        </a:xfrm>
+      </p:grpSpPr>
+      <p:sp>
+        <p:nvSpPr>
+          <p:cNvPr id="2" name="Slide Image Placeholder 1"/>
+          <p:cNvSpPr>
+            <a:spLocks noGrp="1"/>
+          </p:cNvSpPr>
+          <p:nvPr>
+            <p:ph type="sldImg" idx="2"/>
+          </p:nvPr>
+        </p:nvSpPr>
+        <p:spPr/>
+      </p:sp>
+      <p:sp>
+        <p:nvSpPr>
+          <p:cNvPr id="3" name="Notes Placeholder 2"/>
+          <p:cNvSpPr>
+            <a:spLocks noGrp="1"/>
+          </p:cNvSpPr>
+          <p:nvPr>
+            <p:ph type="body" idx="3" sz="quarter"/>
+          </p:nvPr>
+        </p:nvSpPr>
+        <p:spPr/>
+        <p:txBody>
+          <a:bodyPr/>
+          <a:lstStyle/>
+          <a:p>
+            <a:r>
+              <a:rPr>
+                <a:ea typeface="맑은 고딕"/>
+                <a:cs typeface="맑은 고딕"/>
+              </a:rPr>
+              <a:t>우선순위는 비용 대비 정보량 순이다.</a:t>
+            </a:r>
+          </a:p>
+          <a:p>
+            <a:r>
+              <a:rPr>
+                <a:ea typeface="맑은 고딕"/>
+                <a:cs typeface="맑은 고딕"/>
+              </a:rPr>
+              <a:t>조사일 2026-09-05. 출처:</a:t>
+            </a:r>
+          </a:p>
+          <a:p>
+            <a:r>
+              <a:rPr>
+                <a:ea typeface="맑은 고딕"/>
+                <a:cs typeface="맑은 고딕"/>
+              </a:rPr>
+              <a:t>- Diag2Diag: https://arxiv.org/html/2405.05908v4</a:t>
+            </a:r>
+          </a:p>
+          <a:p>
+            <a:r>
+              <a:rPr>
+                <a:ea typeface="맑은 고딕"/>
+                <a:cs typeface="맑은 고딕"/>
+              </a:rPr>
+              <a:t>- Diag2Diag Nat. Comm.: https://www.nature.com/articles/s41467-025-63492-1</a:t>
+            </a:r>
+          </a:p>
+          <a:p>
+            <a:r>
+              <a:rPr>
+                <a:ea typeface="맑은 고딕"/>
+                <a:cs typeface="맑은 고딕"/>
+              </a:rPr>
+              <a:t>- COMPASS 시간 초해상: https://iopscience.iop.org/article/10.1088/1361-6587/ae72c6</a:t>
+            </a:r>
+          </a:p>
+          <a:p>
+            <a:r>
+              <a:rPr>
+                <a:ea typeface="맑은 고딕"/>
+                <a:cs typeface="맑은 고딕"/>
+              </a:rPr>
+              <a:t>- FusionMAE: https://arxiv.org/abs/2509.12945</a:t>
+            </a:r>
+          </a:p>
+          <a:p>
+            <a:r>
+              <a:rPr>
+                <a:ea typeface="맑은 고딕"/>
+                <a:cs typeface="맑은 고딕"/>
+              </a:rPr>
+              <a:t>- TokaMind: https://arxiv.org/html/2602.15084v2</a:t>
+            </a:r>
+          </a:p>
+          <a:p>
+            <a:r>
+              <a:rPr>
+                <a:ea typeface="맑은 고딕"/>
+                <a:cs typeface="맑은 고딕"/>
+              </a:rPr>
+              <a:t>- TokaMark: https://arxiv.org/html/2602.10132v2</a:t>
+            </a:r>
+          </a:p>
+          <a:p>
+            <a:r>
+              <a:rPr>
+                <a:ea typeface="맑은 고딕"/>
+                <a:cs typeface="맑은 고딕"/>
+              </a:rPr>
+              <a:t>- PanoMHD: https://arxiv.org/html/2603.02672</a:t>
+            </a:r>
+          </a:p>
+          <a:p>
+            <a:r>
+              <a:rPr>
+                <a:ea typeface="맑은 고딕"/>
+                <a:cs typeface="맑은 고딕"/>
+              </a:rPr>
+              <a:t>- TCV 멀티모달 VAE: https://arxiv.org/abs/2504.17710</a:t>
+            </a:r>
+          </a:p>
+          <a:p>
+            <a:r>
+              <a:rPr>
+                <a:ea typeface="맑은 고딕"/>
+                <a:cs typeface="맑은 고딕"/>
+              </a:rPr>
+              <a:t>- EAST 지식증류: https://arxiv.org/html/2607.04241</a:t>
+            </a:r>
+          </a:p>
+          <a:p>
+            <a:r>
+              <a:rPr>
+                <a:ea typeface="맑은 고딕"/>
+                <a:cs typeface="맑은 고딕"/>
+              </a:rPr>
+              <a:t>- WEST: https://arxiv.org/html/2602.19110</a:t>
+            </a:r>
+          </a:p>
+          <a:p>
+            <a:r>
+              <a:rPr>
+                <a:ea typeface="맑은 고딕"/>
+                <a:cs typeface="맑은 고딕"/>
+              </a:rPr>
+              <a:t>- EAST XCS ANN: https://iopscience.iop.org/article/10.1088/1741-4326/ad73e8</a:t>
+            </a:r>
+          </a:p>
+          <a:p>
+            <a:r>
+              <a:rPr>
+                <a:ea typeface="맑은 고딕"/>
+                <a:cs typeface="맑은 고딕"/>
+              </a:rPr>
+              <a:t>- Abbate 2025: https://iopscience.iop.org/article/10.1088/1741-4326/adc283</a:t>
+            </a:r>
+          </a:p>
+          <a:p>
+            <a:r>
+              <a:rPr>
+                <a:ea typeface="맑은 고딕"/>
+                <a:cs typeface="맑은 고딕"/>
+              </a:rPr>
+              <a:t>- 합성 진단 증강: https://arxiv.org/abs/2606.08462</a:t>
+            </a:r>
+          </a:p>
+          <a:p>
+            <a:r>
+              <a:rPr>
+                <a:ea typeface="맑은 고딕"/>
+                <a:cs typeface="맑은 고딕"/>
+              </a:rPr>
+              <a:t>- TokEye: https://arxiv.org/pdf/2602.20317</a:t>
+            </a:r>
+          </a:p>
+          <a:p>
+            <a:r>
+              <a:rPr>
+                <a:ea typeface="맑은 고딕"/>
+                <a:cs typeface="맑은 고딕"/>
+              </a:rPr>
+              <a:t>- KSTAR EPED 재구성: https://link.springer.com/article/10.1007/s40042-026-01580-1</a:t>
+            </a:r>
+          </a:p>
+          <a:p>
+            <a:r>
+              <a:rPr>
+                <a:ea typeface="맑은 고딕"/>
+                <a:cs typeface="맑은 고딕"/>
+              </a:rPr>
+              <a:t>- DIII-D 코일 shot-to-shot: https://www.ans.org/news/2026-08-18/article-8302/new-ml-framework-predicts-shifts-between-shots-at-diiid/</a:t>
+            </a:r>
+          </a:p>
+          <a:p>
+            <a:r>
+              <a:rPr>
+                <a:ea typeface="맑은 고딕"/>
+                <a:cs typeface="맑은 고딕"/>
+              </a:rPr>
+              <a:t>- TSI-Bench: https://arxiv.org/abs/2406.12747</a:t>
+            </a:r>
+          </a:p>
+          <a:p>
+            <a:r>
+              <a:rPr>
+                <a:ea typeface="맑은 고딕"/>
+                <a:cs typeface="맑은 고딕"/>
+              </a:rPr>
+              <a:t>- STDiff: https://arxiv.org/html/2508.19011v1</a:t>
+            </a:r>
+          </a:p>
+          <a:p>
+            <a:r>
+              <a:rPr>
+                <a:ea typeface="맑은 고딕"/>
+                <a:cs typeface="맑은 고딕"/>
+              </a:rPr>
+              <a:t>- iTimER: https://arxiv.org/html/2511.06854</a:t>
+            </a:r>
+          </a:p>
+          <a:p>
+            <a:r>
+              <a:rPr>
+                <a:ea typeface="맑은 고딕"/>
+                <a:cs typeface="맑은 고딕"/>
+              </a:rPr>
+              <a:t>- Neural CDE 보정기: https://arxiv.org/html/2512.12116v3</a:t>
+            </a:r>
+          </a:p>
+          <a:p>
+            <a:r>
+              <a:rPr>
+                <a:ea typeface="맑은 고딕"/>
+                <a:cs typeface="맑은 고딕"/>
+              </a:rPr>
+              <a:t>- TimeXer: https://github.com/thuml/TimeXer</a:t>
+            </a:r>
+          </a:p>
+          <a:p>
+            <a:r>
+              <a:rPr>
+                <a:ea typeface="맑은 고딕"/>
+                <a:cs typeface="맑은 고딕"/>
+              </a:rPr>
+              <a:t>- TiRex-2: https://arxiv.org/html/2607.01204v1</a:t>
+            </a:r>
+          </a:p>
+          <a:p>
+            <a:r>
+              <a:rPr>
+                <a:ea typeface="맑은 고딕"/>
+                <a:cs typeface="맑은 고딕"/>
+              </a:rPr>
+              <a:t>- TabPFN-TS: https://arxiv.org/abs/2501.02945</a:t>
+            </a:r>
+          </a:p>
+          <a:p>
+            <a:r>
+              <a:rPr>
+                <a:ea typeface="맑은 고딕"/>
+                <a:cs typeface="맑은 고딕"/>
+              </a:rPr>
+              <a:t>- TSFM 벤치마크 경고: https://arxiv.org/html/2510.13654v1</a:t>
+            </a:r>
+          </a:p>
+          <a:p>
+            <a:r>
+              <a:rPr>
+                <a:ea typeface="맑은 고딕"/>
+                <a:cs typeface="맑은 고딕"/>
+              </a:rPr>
+              <a:t>- TimeMAE: https://arxiv.org/html/2303.00320v4</a:t>
+            </a:r>
+          </a:p>
+          <a:p>
+            <a:r>
+              <a:rPr>
+                <a:ea typeface="맑은 고딕"/>
+                <a:cs typeface="맑은 고딕"/>
+              </a:rPr>
+              <a:t>- RG-ResMoE: https://arxiv.org/html/2608.12251v1</a:t>
+            </a:r>
+          </a:p>
+          <a:p>
+            <a:r>
+              <a:rPr>
+                <a:ea typeface="맑은 고딕"/>
+                <a:cs typeface="맑은 고딕"/>
+              </a:rPr>
+              <a:t>- KalmanNet: https://dl.acm.org/doi/abs/10.1109/tsp.2022.3158588</a:t>
+            </a:r>
+          </a:p>
+          <a:p>
+            <a:r>
+              <a:rPr>
+                <a:ea typeface="맑은 고딕"/>
+                <a:cs typeface="맑은 고딕"/>
+              </a:rPr>
+              <a:t>- Unscented KalmanNet: https://arxiv.org/html/2608.04201</a:t>
+            </a:r>
+          </a:p>
+          <a:p>
+            <a:r>
+              <a:rPr>
+                <a:ea typeface="맑은 고딕"/>
+                <a:cs typeface="맑은 고딕"/>
+              </a:rPr>
+              <a:t>- DLFM: https://link.springer.com/article/10.1007/s10994-025-06824-y</a:t>
+            </a:r>
+          </a:p>
+          <a:p>
+            <a:r>
+              <a:rPr>
+                <a:ea typeface="맑은 고딕"/>
+                <a:cs typeface="맑은 고딕"/>
+              </a:rPr>
+              <a:t>- 이분산 회귀 병리: https://arxiv.org/pdf/2306.16717</a:t>
+            </a:r>
+          </a:p>
+          <a:p>
+            <a:r>
+              <a:rPr>
+                <a:ea typeface="맑은 고딕"/>
+                <a:cs typeface="맑은 고딕"/>
+              </a:rPr>
+              <a:t>- 반지도 VAE 회귀: https://arxiv.org/pdf/2211.05979</a:t>
+            </a:r>
+          </a:p>
+          <a:p>
+            <a:r>
+              <a:rPr>
+                <a:ea typeface="맑은 고딕"/>
+                <a:cs typeface="맑은 고딕"/>
+              </a:rPr>
+              <a:t>- GP-MIDAS: https://arxiv.org/html/2402.10574v2</a:t>
+            </a:r>
+          </a:p>
+          <a:p>
+            <a:r>
+              <a:rPr>
+                <a:ea typeface="맑은 고딕"/>
+                <a:cs typeface="맑은 고딕"/>
+              </a:rPr>
+              <a:t>- 저가 센서 보정: https://arxiv.org/html/2604.21527v1</a:t>
+            </a:r>
+          </a:p>
+          <a:p>
+            <a:r>
+              <a:rPr>
+                <a:ea typeface="맑은 고딕"/>
+                <a:cs typeface="맑은 고딕"/>
+              </a:rPr>
+              <a:t>- 커프리스 혈압 벤치마크: https://arxiv.org/html/2602.04725v1</a:t>
+            </a:r>
+          </a:p>
+          <a:p>
+            <a:r>
+              <a:rPr>
+                <a:ea typeface="맑은 고딕"/>
+                <a:cs typeface="맑은 고딕"/>
+              </a:rPr>
+              <a:t>- PiGGO: https://arxiv.org/pdf/2604.26593</a:t>
+            </a:r>
+          </a:p>
+          <a:p>
+            <a:r>
+              <a:rPr>
+                <a:ea typeface="맑은 고딕"/>
+                <a:cs typeface="맑은 고딕"/>
+              </a:rPr>
+              <a:t>- 멀티태스크 가상센서: https://arxiv.org/abs/2601.20634</a:t>
             </a:r>
           </a:p>
         </p:txBody>
@@ -5196,6 +5677,80 @@
                 <a:cs typeface="맑은 고딕"/>
               </a:rPr>
               <a:t>sec:related</a:t>
+            </a:r>
+          </a:p>
+        </p:txBody>
+      </p:sp>
+      <p:sp>
+        <p:nvSpPr>
+          <p:cNvPr id="4" name="Slide Number Placeholder 3"/>
+          <p:cNvSpPr>
+            <a:spLocks noGrp="1"/>
+          </p:cNvSpPr>
+          <p:nvPr>
+            <p:ph type="sldNum" idx="5" sz="quarter"/>
+          </p:nvPr>
+        </p:nvSpPr>
+        <p:spPr/>
+      </p:sp>
+    </p:spTree>
+  </p:cSld>
+  <p:clrMapOvr>
+    <a:masterClrMapping/>
+  </p:clrMapOvr>
+</p:notes>
+</file>
+
+<file path=ppt/notesSlides/notesSlide60.xml><?xml version="1.0" encoding="utf-8"?>
+<p:notes xmlns:a="http://schemas.openxmlformats.org/drawingml/2006/main" xmlns:p="http://schemas.openxmlformats.org/presentationml/2006/main" xmlns:r="http://schemas.openxmlformats.org/officeDocument/2006/relationships">
+  <p:cSld>
+    <p:spTree>
+      <p:nvGrpSpPr>
+        <p:cNvPr id="1" name=""/>
+        <p:cNvGrpSpPr/>
+        <p:nvPr/>
+      </p:nvGrpSpPr>
+      <p:grpSpPr>
+        <a:xfrm>
+          <a:off x="0" y="0"/>
+          <a:ext cx="0" cy="0"/>
+          <a:chOff x="0" y="0"/>
+          <a:chExt cx="0" cy="0"/>
+        </a:xfrm>
+      </p:grpSpPr>
+      <p:sp>
+        <p:nvSpPr>
+          <p:cNvPr id="2" name="Slide Image Placeholder 1"/>
+          <p:cNvSpPr>
+            <a:spLocks noGrp="1"/>
+          </p:cNvSpPr>
+          <p:nvPr>
+            <p:ph type="sldImg" idx="2"/>
+          </p:nvPr>
+        </p:nvSpPr>
+        <p:spPr/>
+      </p:sp>
+      <p:sp>
+        <p:nvSpPr>
+          <p:cNvPr id="3" name="Notes Placeholder 2"/>
+          <p:cNvSpPr>
+            <a:spLocks noGrp="1"/>
+          </p:cNvSpPr>
+          <p:nvPr>
+            <p:ph type="body" idx="3" sz="quarter"/>
+          </p:nvPr>
+        </p:nvSpPr>
+        <p:spPr/>
+        <p:txBody>
+          <a:bodyPr/>
+          <a:lstStyle/>
+          <a:p>
+            <a:r>
+              <a:rPr>
+                <a:ea typeface="맑은 고딕"/>
+                <a:cs typeface="맑은 고딕"/>
+              </a:rPr>
+              <a:t>음성 결과는 그것을 뒤집을 측정을 지목할 때만 결론으로 인정한다는 규칙을 따른다.</a:t>
             </a:r>
           </a:p>
         </p:txBody>
@@ -20289,7 +20844,7 @@
         </p:nvGraphicFramePr>
         <p:xfrm>
           <a:off x="585216" y="2400807"/>
-          <a:ext cx="11027662" cy="2682240"/>
+          <a:ext cx="11027662" cy="3201924"/>
         </p:xfrm>
         <a:graphic>
           <a:graphicData uri="http://schemas.openxmlformats.org/drawingml/2006/table">
@@ -20298,10 +20853,11 @@
                 <a:tableStyleId>{5C22544A-7EE6-4342-B048-85BDC9FD1C3A}</a:tableStyleId>
               </a:tblPr>
               <a:tblGrid>
-                <a:gridCol w="2642993"/>
-                <a:gridCol w="3189820"/>
-                <a:gridCol w="2734131"/>
                 <a:gridCol w="2460718"/>
+                <a:gridCol w="1002514"/>
+                <a:gridCol w="2825269"/>
+                <a:gridCol w="2551856"/>
+                <a:gridCol w="2187305"/>
               </a:tblGrid>
               <a:tr h="274320">
                 <a:tc>
@@ -20330,6 +20886,22 @@
                           <a:ea typeface="맑은 고딕"/>
                           <a:cs typeface="맑은 고딕"/>
                         </a:rPr>
+                        <a:t>시기</a:t>
+                      </a:r>
+                    </a:p>
+                  </a:txBody>
+                  <a:tcPr marL="54864" marR="54864" marT="18288" marB="18288" anchor="ctr"/>
+                </a:tc>
+                <a:tc>
+                  <a:txBody>
+                    <a:bodyPr wrap="square"/>
+                    <a:lstStyle/>
+                    <a:p>
+                      <a:r>
+                        <a:rPr sz="1100" b="1">
+                          <a:ea typeface="맑은 고딕"/>
+                          <a:cs typeface="맑은 고딕"/>
+                        </a:rPr>
                         <a:t>무엇을 바꿨나 (통제 변수)</a:t>
                       </a:r>
                     </a:p>
@@ -20363,6 +20935,252 @@
                           <a:cs typeface="맑은 고딕"/>
                         </a:rPr>
                         <a:t>닫은 이유 · 근거</a:t>
+                      </a:r>
+                    </a:p>
+                  </a:txBody>
+                  <a:tcPr marL="54864" marR="54864" marT="18288" marB="18288" anchor="ctr"/>
+                </a:tc>
+              </a:tr>
+              <a:tr h="574548">
+                <a:tc>
+                  <a:txBody>
+                    <a:bodyPr wrap="square"/>
+                    <a:lstStyle/>
+                    <a:p>
+                      <a:r>
+                        <a:rPr sz="1100" b="0">
+                          <a:ea typeface="맑은 고딕"/>
+                          <a:cs typeface="맑은 고딕"/>
+                        </a:rPr>
+                        <a:t>AutoML 윈도 계열 iter2 → iter9 (GRU + 관측마스킹 multi-head attention)</a:t>
+                      </a:r>
+                    </a:p>
+                  </a:txBody>
+                  <a:tcPr marL="54864" marR="54864" marT="18288" marB="18288" anchor="ctr"/>
+                </a:tc>
+                <a:tc>
+                  <a:txBody>
+                    <a:bodyPr wrap="square"/>
+                    <a:lstStyle/>
+                    <a:p>
+                      <a:r>
+                        <a:rPr sz="1100" b="0">
+                          <a:ea typeface="맑은 고딕"/>
+                          <a:cs typeface="맑은 고딕"/>
+                        </a:rPr>
+                        <a:t>2026-06</a:t>
+                      </a:r>
+                    </a:p>
+                  </a:txBody>
+                  <a:tcPr marL="54864" marR="54864" marT="18288" marB="18288" anchor="ctr"/>
+                </a:tc>
+                <a:tc>
+                  <a:txBody>
+                    <a:bodyPr wrap="square"/>
+                    <a:lstStyle/>
+                    <a:p>
+                      <a:r>
+                        <a:rPr sz="1100" b="0">
+                          <a:ea typeface="맑은 고딕"/>
+                          <a:cs typeface="맑은 고딕"/>
+                        </a:rPr>
+                        <a:t>18회 자동 탐색. Pre-LN · attention pooling은 채택, 용량 확대 · skip 변형 · 국소 1D conv는 열화</a:t>
+                      </a:r>
+                    </a:p>
+                  </a:txBody>
+                  <a:tcPr marL="54864" marR="54864" marT="18288" marB="18288" anchor="ctr"/>
+                </a:tc>
+                <a:tc>
+                  <a:txBody>
+                    <a:bodyPr wrap="square"/>
+                    <a:lstStyle/>
+                    <a:p>
+                      <a:r>
+                        <a:rPr sz="1100" b="0">
+                          <a:ea typeface="맑은 고딕"/>
+                          <a:cs typeface="맑은 고딕"/>
+                        </a:rPr>
+                        <a:t>iter7의 val 0.483이 최선이었고 이후의 복잡도 증가는 열화하였다</a:t>
+                      </a:r>
+                    </a:p>
+                  </a:txBody>
+                  <a:tcPr marL="54864" marR="54864" marT="18288" marB="18288" anchor="ctr"/>
+                </a:tc>
+                <a:tc>
+                  <a:txBody>
+                    <a:bodyPr wrap="square"/>
+                    <a:lstStyle/>
+                    <a:p>
+                      <a:r>
+                        <a:rPr sz="1100" b="0">
+                          <a:ea typeface="맑은 고딕"/>
+                          <a:cs typeface="맑은 고딕"/>
+                        </a:rPr>
+                        <a:t>W = 2 윈도 대조군으로 강등 (§8u · §8x)</a:t>
+                      </a:r>
+                    </a:p>
+                  </a:txBody>
+                  <a:tcPr marL="54864" marR="54864" marT="18288" marB="18288" anchor="ctr"/>
+                </a:tc>
+              </a:tr>
+              <a:tr h="574548">
+                <a:tc>
+                  <a:txBody>
+                    <a:bodyPr wrap="square"/>
+                    <a:lstStyle/>
+                    <a:p>
+                      <a:r>
+                        <a:rPr sz="1100" b="0">
+                          <a:ea typeface="맑은 고딕"/>
+                          <a:cs typeface="맑은 고딕"/>
+                        </a:rPr>
+                        <a:t>연속시간 인코더 4종 (GRU-D형 감쇠 · ODE-RNN · Neural CDE · Δt 대각 SSM)</a:t>
+                      </a:r>
+                    </a:p>
+                  </a:txBody>
+                  <a:tcPr marL="54864" marR="54864" marT="18288" marB="18288" anchor="ctr"/>
+                </a:tc>
+                <a:tc>
+                  <a:txBody>
+                    <a:bodyPr wrap="square"/>
+                    <a:lstStyle/>
+                    <a:p>
+                      <a:r>
+                        <a:rPr sz="1100" b="0">
+                          <a:ea typeface="맑은 고딕"/>
+                          <a:cs typeface="맑은 고딕"/>
+                        </a:rPr>
+                        <a:t>2026-07-30</a:t>
+                      </a:r>
+                    </a:p>
+                  </a:txBody>
+                  <a:tcPr marL="54864" marR="54864" marT="18288" marB="18288" anchor="ctr"/>
+                </a:tc>
+                <a:tc>
+                  <a:txBody>
+                    <a:bodyPr wrap="square"/>
+                    <a:lstStyle/>
+                    <a:p>
+                      <a:r>
+                        <a:rPr sz="1100" b="0">
+                          <a:ea typeface="맑은 고딕"/>
+                          <a:cs typeface="맑은 고딕"/>
+                        </a:rPr>
+                        <a:t>이력 인코더만 교체, 4분할 짝지음 bootstrap</a:t>
+                      </a:r>
+                    </a:p>
+                  </a:txBody>
+                  <a:tcPr marL="54864" marR="54864" marT="18288" marB="18288" anchor="ctr"/>
+                </a:tc>
+                <a:tc>
+                  <a:txBody>
+                    <a:bodyPr wrap="square"/>
+                    <a:lstStyle/>
+                    <a:p>
+                      <a:r>
+                        <a:rPr sz="1100" b="0">
+                          <a:ea typeface="맑은 고딕"/>
+                          <a:cs typeface="맑은 고딕"/>
+                        </a:rPr>
+                        <a:t>KEEP 없음. NCDE · SSM은 유의 열세 seed가 생겼다</a:t>
+                      </a:r>
+                    </a:p>
+                  </a:txBody>
+                  <a:tcPr marL="54864" marR="54864" marT="18288" marB="18288" anchor="ctr"/>
+                </a:tc>
+                <a:tc>
+                  <a:txBody>
+                    <a:bodyPr wrap="square"/>
+                    <a:lstStyle/>
+                    <a:p>
+                      <a:r>
+                        <a:rPr sz="1100" b="0">
+                          <a:ea typeface="맑은 고딕"/>
+                          <a:cs typeface="맑은 고딕"/>
+                        </a:rPr>
+                        <a:t>규칙 10 ms 격자에서 Δt 진화는 정보를 더하지 않는다 (§8e, 코드 제거)</a:t>
+                      </a:r>
+                    </a:p>
+                  </a:txBody>
+                  <a:tcPr marL="54864" marR="54864" marT="18288" marB="18288" anchor="ctr"/>
+                </a:tc>
+              </a:tr>
+              <a:tr h="574548">
+                <a:tc>
+                  <a:txBody>
+                    <a:bodyPr wrap="square"/>
+                    <a:lstStyle/>
+                    <a:p>
+                      <a:r>
+                        <a:rPr sz="1100" b="0">
+                          <a:ea typeface="맑은 고딕"/>
+                          <a:cs typeface="맑은 고딕"/>
+                        </a:rPr>
+                        <a:t>파생 Mirnov 특징 (적분 · PCHIP 적분 · |MC| · 이동 RMS)</a:t>
+                      </a:r>
+                    </a:p>
+                  </a:txBody>
+                  <a:tcPr marL="54864" marR="54864" marT="18288" marB="18288" anchor="ctr"/>
+                </a:tc>
+                <a:tc>
+                  <a:txBody>
+                    <a:bodyPr wrap="square"/>
+                    <a:lstStyle/>
+                    <a:p>
+                      <a:r>
+                        <a:rPr sz="1100" b="0">
+                          <a:ea typeface="맑은 고딕"/>
+                          <a:cs typeface="맑은 고딕"/>
+                        </a:rPr>
+                        <a:t>2026-08</a:t>
+                      </a:r>
+                    </a:p>
+                  </a:txBody>
+                  <a:tcPr marL="54864" marR="54864" marT="18288" marB="18288" anchor="ctr"/>
+                </a:tc>
+                <a:tc>
+                  <a:txBody>
+                    <a:bodyPr wrap="square"/>
+                    <a:lstStyle/>
+                    <a:p>
+                      <a:r>
+                        <a:rPr sz="1100" b="0">
+                          <a:ea typeface="맑은 고딕"/>
+                          <a:cs typeface="맑은 고딕"/>
+                        </a:rPr>
+                        <a:t>입력 특징만 추가</a:t>
+                      </a:r>
+                    </a:p>
+                  </a:txBody>
+                  <a:tcPr marL="54864" marR="54864" marT="18288" marB="18288" anchor="ctr"/>
+                </a:tc>
+                <a:tc>
+                  <a:txBody>
+                    <a:bodyPr wrap="square"/>
+                    <a:lstStyle/>
+                    <a:p>
+                      <a:r>
+                        <a:rPr sz="1100" b="0">
+                          <a:ea typeface="맑은 고딕"/>
+                          <a:cs typeface="맑은 고딕"/>
+                        </a:rPr>
+                        <a:t>4 seed 짝지음에서 전부 무효. MC의 lag-1 자기상관 -0.009 (BES +0.568 · ECEI +0.572)</a:t>
+                      </a:r>
+                    </a:p>
+                  </a:txBody>
+                  <a:tcPr marL="54864" marR="54864" marT="18288" marB="18288" anchor="ctr"/>
+                </a:tc>
+                <a:tc>
+                  <a:txBody>
+                    <a:bodyPr wrap="square"/>
+                    <a:lstStyle/>
+                    <a:p>
+                      <a:r>
+                        <a:rPr sz="1100" b="0">
+                          <a:ea typeface="맑은 고딕"/>
+                          <a:cs typeface="맑은 고딕"/>
+                        </a:rPr>
+                        <a:t>앨리어싱으로 이미 잃은 정보는 하류에서 복원되지 않는다 (§8b.2)</a:t>
                       </a:r>
                     </a:p>
                   </a:txBody>
@@ -20380,7 +21198,7 @@
                           <a:ea typeface="맑은 고딕"/>
                           <a:cs typeface="맑은 고딕"/>
                         </a:rPr>
-                        <a:t>AutoML 윈도 계열 iter2 → iter9 (GRU + 관측마스킹 multi-head attention)</a:t>
+                        <a:t>윈도 크기 스윕 W = 0 ... 6 (24 run × 2)</a:t>
                       </a:r>
                     </a:p>
                   </a:txBody>
@@ -20396,7 +21214,7 @@
                           <a:ea typeface="맑은 고딕"/>
                           <a:cs typeface="맑은 고딕"/>
                         </a:rPr>
-                        <a:t>18회 자동 탐색. Pre-LN · attention pooling은 채택, 용량 확대 · skip 변형 · 국소 1D conv는 열화</a:t>
+                        <a:t>2026-08-04</a:t>
                       </a:r>
                     </a:p>
                   </a:txBody>
@@ -20412,7 +21230,7 @@
                           <a:ea typeface="맑은 고딕"/>
                           <a:cs typeface="맑은 고딕"/>
                         </a:rPr>
-                        <a:t>iter7의 val 0.483이 최선이었고 이후의 복잡도 증가는 열화하였다</a:t>
+                        <a:t>과거 CES 관측 수</a:t>
                       </a:r>
                     </a:p>
                   </a:txBody>
@@ -20428,7 +21246,23 @@
                           <a:ea typeface="맑은 고딕"/>
                           <a:cs typeface="맑은 고딕"/>
                         </a:rPr>
-                        <a:t>W = 2 윈도 대조군으로 강등 (§8u · §8x)</a:t>
+                        <a:t>Tᵢ는 W = 2에서 plateau, history 0은 둘 다 붕괴</a:t>
+                      </a:r>
+                    </a:p>
+                  </a:txBody>
+                  <a:tcPr marL="54864" marR="54864" marT="18288" marB="18288" anchor="ctr"/>
+                </a:tc>
+                <a:tc>
+                  <a:txBody>
+                    <a:bodyPr wrap="square"/>
+                    <a:lstStyle/>
+                    <a:p>
+                      <a:r>
+                        <a:rPr sz="1100" b="0">
+                          <a:ea typeface="맑은 고딕"/>
+                          <a:cs typeface="맑은 고딕"/>
+                        </a:rPr>
+                        <a:t>W = 4는 정당화되지 않아 확정 프로토콜은 W = 2 (§8f)</a:t>
                       </a:r>
                     </a:p>
                   </a:txBody>
@@ -20446,7 +21280,7 @@
                           <a:ea typeface="맑은 고딕"/>
                           <a:cs typeface="맑은 고딕"/>
                         </a:rPr>
-                        <a:t>연속시간 인코더 4종 (GRU-D형 감쇠 · ODE-RNN · Neural CDE · Δt 대각 SSM)</a:t>
+                        <a:t>명명항 anchor + Δ (1,258 파라미터)</a:t>
                       </a:r>
                     </a:p>
                   </a:txBody>
@@ -20462,7 +21296,7 @@
                           <a:ea typeface="맑은 고딕"/>
                           <a:cs typeface="맑은 고딕"/>
                         </a:rPr>
-                        <a:t>이력 인코더만 교체, 4분할 짝지음 bootstrap</a:t>
+                        <a:t>2026-08-05</a:t>
                       </a:r>
                     </a:p>
                   </a:txBody>
@@ -20478,7 +21312,7 @@
                           <a:ea typeface="맑은 고딕"/>
                           <a:cs typeface="맑은 고딕"/>
                         </a:rPr>
-                        <a:t>KEEP 없음. NCDE · SSM은 유의 열세 seed가 생겼다</a:t>
+                        <a:t>완전히 설명 가능한 선형 항만 남김</a:t>
                       </a:r>
                     </a:p>
                   </a:txBody>
@@ -20494,7 +21328,23 @@
                           <a:ea typeface="맑은 고딕"/>
                           <a:cs typeface="맑은 고딕"/>
                         </a:rPr>
-                        <a:t>규칙 10 ms 격자에서 Δt 진화는 정보를 더하지 않는다 (§8e, 코드 제거)</a:t>
+                        <a:t>W = 4 여백의 31.5 %를 회복</a:t>
+                      </a:r>
+                    </a:p>
+                  </a:txBody>
+                  <a:tcPr marL="54864" marR="54864" marT="18288" marB="18288" anchor="ctr"/>
+                </a:tc>
+                <a:tc>
+                  <a:txBody>
+                    <a:bodyPr wrap="square"/>
+                    <a:lstStyle/>
+                    <a:p>
+                      <a:r>
+                        <a:rPr sz="1100" b="0">
+                          <a:ea typeface="맑은 고딕"/>
+                          <a:cs typeface="맑은 고딕"/>
+                        </a:rPr>
+                        <a:t>W = 2에서는 persistence로 붕괴 (§8k · §8z)</a:t>
                       </a:r>
                     </a:p>
                   </a:txBody>
@@ -20512,7 +21362,7 @@
                           <a:ea typeface="맑은 고딕"/>
                           <a:cs typeface="맑은 고딕"/>
                         </a:rPr>
-                        <a:t>파생 Mirnov 특징 (적분 · PCHIP 적분 · |MC| · 이동 RMS)</a:t>
+                        <a:t>W-SLIM (25,602 파라미터로 축소한 윈도 모델)</a:t>
                       </a:r>
                     </a:p>
                   </a:txBody>
@@ -20528,7 +21378,7 @@
                           <a:ea typeface="맑은 고딕"/>
                           <a:cs typeface="맑은 고딕"/>
                         </a:rPr>
-                        <a:t>입력 특징만 추가</a:t>
+                        <a:t>2026-08-17</a:t>
                       </a:r>
                     </a:p>
                   </a:txBody>
@@ -20544,7 +21394,7 @@
                           <a:ea typeface="맑은 고딕"/>
                           <a:cs typeface="맑은 고딕"/>
                         </a:rPr>
-                        <a:t>4 seed 짝지음에서 전부 무효</a:t>
+                        <a:t>CES_MODEL_FILE 하나. 201,258 → 25,602 파라미터, 57 → 21 연산자, 3.02 → 0.66 ms</a:t>
                       </a:r>
                     </a:p>
                   </a:txBody>
@@ -20560,189 +21410,7 @@
                           <a:ea typeface="맑은 고딕"/>
                           <a:cs typeface="맑은 고딕"/>
                         </a:rPr>
-                        <a:t>앨리어싱으로 이미 잃은 정보는 하류에서 복원되지 않는다 (§8b.2)</a:t>
-                      </a:r>
-                    </a:p>
-                  </a:txBody>
-                  <a:tcPr marL="54864" marR="54864" marT="18288" marB="18288" anchor="ctr"/>
-                </a:tc>
-              </a:tr>
-              <a:tr h="401320">
-                <a:tc>
-                  <a:txBody>
-                    <a:bodyPr wrap="square"/>
-                    <a:lstStyle/>
-                    <a:p>
-                      <a:r>
-                        <a:rPr sz="1100" b="0">
-                          <a:ea typeface="맑은 고딕"/>
-                          <a:cs typeface="맑은 고딕"/>
-                        </a:rPr>
-                        <a:t>윈도 크기 스윕 W = 0 ... 6 (24 run × 2)</a:t>
-                      </a:r>
-                    </a:p>
-                  </a:txBody>
-                  <a:tcPr marL="54864" marR="54864" marT="18288" marB="18288" anchor="ctr"/>
-                </a:tc>
-                <a:tc>
-                  <a:txBody>
-                    <a:bodyPr wrap="square"/>
-                    <a:lstStyle/>
-                    <a:p>
-                      <a:r>
-                        <a:rPr sz="1100" b="0">
-                          <a:ea typeface="맑은 고딕"/>
-                          <a:cs typeface="맑은 고딕"/>
-                        </a:rPr>
-                        <a:t>과거 CES 관측 수</a:t>
-                      </a:r>
-                    </a:p>
-                  </a:txBody>
-                  <a:tcPr marL="54864" marR="54864" marT="18288" marB="18288" anchor="ctr"/>
-                </a:tc>
-                <a:tc>
-                  <a:txBody>
-                    <a:bodyPr wrap="square"/>
-                    <a:lstStyle/>
-                    <a:p>
-                      <a:r>
-                        <a:rPr sz="1100" b="0">
-                          <a:ea typeface="맑은 고딕"/>
-                          <a:cs typeface="맑은 고딕"/>
-                        </a:rPr>
-                        <a:t>Tᵢ는 W = 2에서 plateau, history 0은 붕괴</a:t>
-                      </a:r>
-                    </a:p>
-                  </a:txBody>
-                  <a:tcPr marL="54864" marR="54864" marT="18288" marB="18288" anchor="ctr"/>
-                </a:tc>
-                <a:tc>
-                  <a:txBody>
-                    <a:bodyPr wrap="square"/>
-                    <a:lstStyle/>
-                    <a:p>
-                      <a:r>
-                        <a:rPr sz="1100" b="0">
-                          <a:ea typeface="맑은 고딕"/>
-                          <a:cs typeface="맑은 고딕"/>
-                        </a:rPr>
-                        <a:t>W = 4는 정당화되지 않아 확정 프로토콜은 W = 2 (§8f)</a:t>
-                      </a:r>
-                    </a:p>
-                  </a:txBody>
-                  <a:tcPr marL="54864" marR="54864" marT="18288" marB="18288" anchor="ctr"/>
-                </a:tc>
-              </a:tr>
-              <a:tr h="401320">
-                <a:tc>
-                  <a:txBody>
-                    <a:bodyPr wrap="square"/>
-                    <a:lstStyle/>
-                    <a:p>
-                      <a:r>
-                        <a:rPr sz="1100" b="0">
-                          <a:ea typeface="맑은 고딕"/>
-                          <a:cs typeface="맑은 고딕"/>
-                        </a:rPr>
-                        <a:t>명명항 anchor + Δ (1,258 파라미터)</a:t>
-                      </a:r>
-                    </a:p>
-                  </a:txBody>
-                  <a:tcPr marL="54864" marR="54864" marT="18288" marB="18288" anchor="ctr"/>
-                </a:tc>
-                <a:tc>
-                  <a:txBody>
-                    <a:bodyPr wrap="square"/>
-                    <a:lstStyle/>
-                    <a:p>
-                      <a:r>
-                        <a:rPr sz="1100" b="0">
-                          <a:ea typeface="맑은 고딕"/>
-                          <a:cs typeface="맑은 고딕"/>
-                        </a:rPr>
-                        <a:t>완전히 설명 가능한 선형 항만 남김</a:t>
-                      </a:r>
-                    </a:p>
-                  </a:txBody>
-                  <a:tcPr marL="54864" marR="54864" marT="18288" marB="18288" anchor="ctr"/>
-                </a:tc>
-                <a:tc>
-                  <a:txBody>
-                    <a:bodyPr wrap="square"/>
-                    <a:lstStyle/>
-                    <a:p>
-                      <a:r>
-                        <a:rPr sz="1100" b="0">
-                          <a:ea typeface="맑은 고딕"/>
-                          <a:cs typeface="맑은 고딕"/>
-                        </a:rPr>
-                        <a:t>W = 4 여백의 31.5 %를 회복</a:t>
-                      </a:r>
-                    </a:p>
-                  </a:txBody>
-                  <a:tcPr marL="54864" marR="54864" marT="18288" marB="18288" anchor="ctr"/>
-                </a:tc>
-                <a:tc>
-                  <a:txBody>
-                    <a:bodyPr wrap="square"/>
-                    <a:lstStyle/>
-                    <a:p>
-                      <a:r>
-                        <a:rPr sz="1100" b="0">
-                          <a:ea typeface="맑은 고딕"/>
-                          <a:cs typeface="맑은 고딕"/>
-                        </a:rPr>
-                        <a:t>W = 2에서는 persistence로 붕괴 (§8k · §8z)</a:t>
-                      </a:r>
-                    </a:p>
-                  </a:txBody>
-                  <a:tcPr marL="54864" marR="54864" marT="18288" marB="18288" anchor="ctr"/>
-                </a:tc>
-              </a:tr>
-              <a:tr h="401320">
-                <a:tc>
-                  <a:txBody>
-                    <a:bodyPr wrap="square"/>
-                    <a:lstStyle/>
-                    <a:p>
-                      <a:r>
-                        <a:rPr sz="1100" b="0">
-                          <a:ea typeface="맑은 고딕"/>
-                          <a:cs typeface="맑은 고딕"/>
-                        </a:rPr>
-                        <a:t>W-SLIM (25,602 파라미터로 축소한 윈도 모델)</a:t>
-                      </a:r>
-                    </a:p>
-                  </a:txBody>
-                  <a:tcPr marL="54864" marR="54864" marT="18288" marB="18288" anchor="ctr"/>
-                </a:tc>
-                <a:tc>
-                  <a:txBody>
-                    <a:bodyPr wrap="square"/>
-                    <a:lstStyle/>
-                    <a:p>
-                      <a:r>
-                        <a:rPr sz="1100" b="0">
-                          <a:ea typeface="맑은 고딕"/>
-                          <a:cs typeface="맑은 고딕"/>
-                        </a:rPr>
-                        <a:t>CES_MODEL_FILE 하나</a:t>
-                      </a:r>
-                    </a:p>
-                  </a:txBody>
-                  <a:tcPr marL="54864" marR="54864" marT="18288" marB="18288" anchor="ctr"/>
-                </a:tc>
-                <a:tc>
-                  <a:txBody>
-                    <a:bodyPr wrap="square"/>
-                    <a:lstStyle/>
-                    <a:p>
-                      <a:r>
-                        <a:rPr sz="1100" b="0">
-                          <a:ea typeface="맑은 고딕"/>
-                          <a:cs typeface="맑은 고딕"/>
-                        </a:rPr>
-                        <a:t>Tᵢ -0.087, 4/4 유의 열세. V_rot는 무차이</a:t>
+                        <a:t>Tᵢ -0.087, 4/4 유의 열세. V_rot는 +0.005로 무차이</a:t>
                       </a:r>
                     </a:p>
                   </a:txBody>
@@ -20873,10 +21541,11 @@
                 <a:tableStyleId>{5C22544A-7EE6-4342-B048-85BDC9FD1C3A}</a:tableStyleId>
               </a:tblPr>
               <a:tblGrid>
-                <a:gridCol w="2642993"/>
-                <a:gridCol w="3189820"/>
-                <a:gridCol w="2734131"/>
                 <a:gridCol w="2460718"/>
+                <a:gridCol w="1002514"/>
+                <a:gridCol w="2825269"/>
+                <a:gridCol w="2551856"/>
+                <a:gridCol w="2187305"/>
               </a:tblGrid>
               <a:tr h="274320">
                 <a:tc>
@@ -20905,6 +21574,22 @@
                           <a:ea typeface="맑은 고딕"/>
                           <a:cs typeface="맑은 고딕"/>
                         </a:rPr>
+                        <a:t>시기</a:t>
+                      </a:r>
+                    </a:p>
+                  </a:txBody>
+                  <a:tcPr marL="54864" marR="54864" marT="18288" marB="18288" anchor="ctr"/>
+                </a:tc>
+                <a:tc>
+                  <a:txBody>
+                    <a:bodyPr wrap="square"/>
+                    <a:lstStyle/>
+                    <a:p>
+                      <a:r>
+                        <a:rPr sz="1100" b="1">
+                          <a:ea typeface="맑은 고딕"/>
+                          <a:cs typeface="맑은 고딕"/>
+                        </a:rPr>
                         <a:t>무엇을 바꿨나 (통제 변수)</a:t>
                       </a:r>
                     </a:p>
@@ -20971,6 +21656,22 @@
                           <a:ea typeface="맑은 고딕"/>
                           <a:cs typeface="맑은 고딕"/>
                         </a:rPr>
+                        <a:t>2026-07-30</a:t>
+                      </a:r>
+                    </a:p>
+                  </a:txBody>
+                  <a:tcPr marL="54864" marR="54864" marT="18288" marB="18288" anchor="ctr"/>
+                </a:tc>
+                <a:tc>
+                  <a:txBody>
+                    <a:bodyPr wrap="square"/>
+                    <a:lstStyle/>
+                    <a:p>
+                      <a:r>
+                        <a:rPr sz="1100" b="0">
+                          <a:ea typeface="맑은 고딕"/>
+                          <a:cs typeface="맑은 고딕"/>
+                        </a:rPr>
                         <a:t>프레이밍만 교체</a:t>
                       </a:r>
                     </a:p>
@@ -21037,6 +21738,22 @@
                           <a:ea typeface="맑은 고딕"/>
                           <a:cs typeface="맑은 고딕"/>
                         </a:rPr>
+                        <a:t>2026-08-09</a:t>
+                      </a:r>
+                    </a:p>
+                  </a:txBody>
+                  <a:tcPr marL="54864" marR="54864" marT="18288" marB="18288" anchor="ctr"/>
+                </a:tc>
+                <a:tc>
+                  <a:txBody>
+                    <a:bodyPr wrap="square"/>
+                    <a:lstStyle/>
+                    <a:p>
+                      <a:r>
+                        <a:rPr sz="1100" b="0">
+                          <a:ea typeface="맑은 고딕"/>
+                          <a:cs typeface="맑은 고딕"/>
+                        </a:rPr>
                         <a:t>V_rot 갈래를 인코더에서 차단 + 표준화</a:t>
                       </a:r>
                     </a:p>
@@ -21053,7 +21770,7 @@
                           <a:ea typeface="맑은 고딕"/>
                           <a:cs typeface="맑은 고딕"/>
                         </a:rPr>
-                        <a:t>B.1 관문 16/16 양수, 인과 GP 대비 4/4</a:t>
+                        <a:t>B.1 관문 16/16 양수, 인과 GP 대비 4/4 (+0.078 ... +0.138), 학습 비용 1/10</a:t>
                       </a:r>
                     </a:p>
                   </a:txBody>
@@ -21103,6 +21820,22 @@
                           <a:ea typeface="맑은 고딕"/>
                           <a:cs typeface="맑은 고딕"/>
                         </a:rPr>
+                        <a:t>2026-08-14</a:t>
+                      </a:r>
+                    </a:p>
+                  </a:txBody>
+                  <a:tcPr marL="54864" marR="54864" marT="18288" marB="18288" anchor="ctr"/>
+                </a:tc>
+                <a:tc>
+                  <a:txBody>
+                    <a:bodyPr wrap="square"/>
+                    <a:lstStyle/>
+                    <a:p>
+                      <a:r>
+                        <a:rPr sz="1100" b="0">
+                          <a:ea typeface="맑은 고딕"/>
+                          <a:cs typeface="맑은 고딕"/>
+                        </a:rPr>
                         <a:t>읽기 경로만 추가, 0 초기화</a:t>
                       </a:r>
                     </a:p>
@@ -21169,6 +21902,22 @@
                           <a:ea typeface="맑은 고딕"/>
                           <a:cs typeface="맑은 고딕"/>
                         </a:rPr>
+                        <a:t>2026-08-15</a:t>
+                      </a:r>
+                    </a:p>
+                  </a:txBody>
+                  <a:tcPr marL="54864" marR="54864" marT="18288" marB="18288" anchor="ctr"/>
+                </a:tc>
+                <a:tc>
+                  <a:txBody>
+                    <a:bodyPr wrap="square"/>
+                    <a:lstStyle/>
+                    <a:p>
+                      <a:r>
+                        <a:rPr sz="1100" b="0">
+                          <a:ea typeface="맑은 고딕"/>
+                          <a:cs typeface="맑은 고딕"/>
+                        </a:rPr>
                         <a:t>인코더를 8차원 잠재 + persistence 앵커로 압축</a:t>
                       </a:r>
                     </a:p>
@@ -21235,6 +21984,22 @@
                           <a:ea typeface="맑은 고딕"/>
                           <a:cs typeface="맑은 고딕"/>
                         </a:rPr>
+                        <a:t>2026-08-15</a:t>
+                      </a:r>
+                    </a:p>
+                  </a:txBody>
+                  <a:tcPr marL="54864" marR="54864" marT="18288" marB="18288" anchor="ctr"/>
+                </a:tc>
+                <a:tc>
+                  <a:txBody>
+                    <a:bodyPr wrap="square"/>
+                    <a:lstStyle/>
+                    <a:p>
+                      <a:r>
+                        <a:rPr sz="1100" b="0">
+                          <a:ea typeface="맑은 고딕"/>
+                          <a:cs typeface="맑은 고딕"/>
+                        </a:rPr>
                         <a:t>Tᵢ 인코더 폭</a:t>
                       </a:r>
                     </a:p>
@@ -21251,7 +22016,7 @@
                           <a:ea typeface="맑은 고딕"/>
                           <a:cs typeface="맑은 고딕"/>
                         </a:rPr>
-                        <a:t>평균 skill이 ±0.008 안에서 평평 (26배)</a:t>
+                        <a:t>평균 skill이 ±0.008 안에서 평평 (26배), 무릎 없음</a:t>
                       </a:r>
                     </a:p>
                   </a:txBody>
@@ -21267,7 +22032,7 @@
                           <a:ea typeface="맑은 고딕"/>
                           <a:cs typeface="맑은 고딕"/>
                         </a:rPr>
-                        <a:t>크기 축 닫힘 (§8aa)</a:t>
+                        <a:t>크기 축 닫힘 (§8aa) — 단 총합 MSE에 한정된다(§8aq)</a:t>
                       </a:r>
                     </a:p>
                   </a:txBody>
@@ -21286,6 +22051,22 @@
                           <a:cs typeface="맑은 고딕"/>
                         </a:rPr>
                         <a:t>최소 모델 v2m · b3m (1k ... 10k)</a:t>
+                      </a:r>
+                    </a:p>
+                  </a:txBody>
+                  <a:tcPr marL="54864" marR="54864" marT="18288" marB="18288" anchor="ctr"/>
+                </a:tc>
+                <a:tc>
+                  <a:txBody>
+                    <a:bodyPr wrap="square"/>
+                    <a:lstStyle/>
+                    <a:p>
+                      <a:r>
+                        <a:rPr sz="1100" b="0">
+                          <a:ea typeface="맑은 고딕"/>
+                          <a:cs typeface="맑은 고딕"/>
+                        </a:rPr>
+                        <a:t>2026-08-19</a:t>
                       </a:r>
                     </a:p>
                   </a:txBody>
@@ -21411,10 +22192,11 @@
                 <a:tableStyleId>{5C22544A-7EE6-4342-B048-85BDC9FD1C3A}</a:tableStyleId>
               </a:tblPr>
               <a:tblGrid>
-                <a:gridCol w="2642993"/>
-                <a:gridCol w="3189820"/>
-                <a:gridCol w="2734131"/>
                 <a:gridCol w="2460718"/>
+                <a:gridCol w="1002514"/>
+                <a:gridCol w="2825269"/>
+                <a:gridCol w="2551856"/>
+                <a:gridCol w="2187305"/>
               </a:tblGrid>
               <a:tr h="274320">
                 <a:tc>
@@ -21443,6 +22225,22 @@
                           <a:ea typeface="맑은 고딕"/>
                           <a:cs typeface="맑은 고딕"/>
                         </a:rPr>
+                        <a:t>시기</a:t>
+                      </a:r>
+                    </a:p>
+                  </a:txBody>
+                  <a:tcPr marL="54864" marR="54864" marT="18288" marB="18288" anchor="ctr"/>
+                </a:tc>
+                <a:tc>
+                  <a:txBody>
+                    <a:bodyPr wrap="square"/>
+                    <a:lstStyle/>
+                    <a:p>
+                      <a:r>
+                        <a:rPr sz="1000" b="1">
+                          <a:ea typeface="맑은 고딕"/>
+                          <a:cs typeface="맑은 고딕"/>
+                        </a:rPr>
                         <a:t>무엇을 바꿨나 (통제 변수)</a:t>
                       </a:r>
                     </a:p>
@@ -21509,6 +22307,22 @@
                           <a:ea typeface="맑은 고딕"/>
                           <a:cs typeface="맑은 고딕"/>
                         </a:rPr>
+                        <a:t>2026-08-19</a:t>
+                      </a:r>
+                    </a:p>
+                  </a:txBody>
+                  <a:tcPr marL="54864" marR="54864" marT="18288" marB="18288" anchor="ctr"/>
+                </a:tc>
+                <a:tc>
+                  <a:txBody>
+                    <a:bodyPr wrap="square"/>
+                    <a:lstStyle/>
+                    <a:p>
+                      <a:r>
+                        <a:rPr sz="1000" b="0">
+                          <a:ea typeface="맑은 고딕"/>
+                          <a:cs typeface="맑은 고딕"/>
+                        </a:rPr>
                         <a:t>같은 reach에서 연산자만 교체</a:t>
                       </a:r>
                     </a:p>
@@ -21575,6 +22389,22 @@
                           <a:ea typeface="맑은 고딕"/>
                           <a:cs typeface="맑은 고딕"/>
                         </a:rPr>
+                        <a:t>2026-08-19</a:t>
+                      </a:r>
+                    </a:p>
+                  </a:txBody>
+                  <a:tcPr marL="54864" marR="54864" marT="18288" marB="18288" anchor="ctr"/>
+                </a:tc>
+                <a:tc>
+                  <a:txBody>
+                    <a:bodyPr wrap="square"/>
+                    <a:lstStyle/>
+                    <a:p>
+                      <a:r>
+                        <a:rPr sz="1000" b="0">
+                          <a:ea typeface="맑은 고딕"/>
+                          <a:cs typeface="맑은 고딕"/>
+                        </a:rPr>
                         <a:t>10k 아래에서 계열</a:t>
                       </a:r>
                     </a:p>
@@ -21641,6 +22471,22 @@
                           <a:ea typeface="맑은 고딕"/>
                           <a:cs typeface="맑은 고딕"/>
                         </a:rPr>
+                        <a:t>2026-08-21</a:t>
+                      </a:r>
+                    </a:p>
+                  </a:txBody>
+                  <a:tcPr marL="54864" marR="54864" marT="18288" marB="18288" anchor="ctr"/>
+                </a:tc>
+                <a:tc>
+                  <a:txBody>
+                    <a:bodyPr wrap="square"/>
+                    <a:lstStyle/>
+                    <a:p>
+                      <a:r>
+                        <a:rPr sz="1000" b="0">
+                          <a:ea typeface="맑은 고딕"/>
+                          <a:cs typeface="맑은 고딕"/>
+                        </a:rPr>
                         <a:t>상태공간 연산자</a:t>
                       </a:r>
                     </a:p>
@@ -21707,6 +22553,22 @@
                           <a:ea typeface="맑은 고딕"/>
                           <a:cs typeface="맑은 고딕"/>
                         </a:rPr>
+                        <a:t>2026-08-20</a:t>
+                      </a:r>
+                    </a:p>
+                  </a:txBody>
+                  <a:tcPr marL="54864" marR="54864" marT="18288" marB="18288" anchor="ctr"/>
+                </a:tc>
+                <a:tc>
+                  <a:txBody>
+                    <a:bodyPr wrap="square"/>
+                    <a:lstStyle/>
+                    <a:p>
+                      <a:r>
+                        <a:rPr sz="1000" b="0">
+                          <a:ea typeface="맑은 고딕"/>
+                          <a:cs typeface="맑은 고딕"/>
+                        </a:rPr>
                         <a:t>학습 시 문맥 길이</a:t>
                       </a:r>
                     </a:p>
@@ -21773,6 +22635,22 @@
                           <a:ea typeface="맑은 고딕"/>
                           <a:cs typeface="맑은 고딕"/>
                         </a:rPr>
+                        <a:t>2026-08-05</a:t>
+                      </a:r>
+                    </a:p>
+                  </a:txBody>
+                  <a:tcPr marL="54864" marR="54864" marT="18288" marB="18288" anchor="ctr"/>
+                </a:tc>
+                <a:tc>
+                  <a:txBody>
+                    <a:bodyPr wrap="square"/>
+                    <a:lstStyle/>
+                    <a:p>
+                      <a:r>
+                        <a:rPr sz="1000" b="0">
+                          <a:ea typeface="맑은 고딕"/>
+                          <a:cs typeface="맑은 고딕"/>
+                        </a:rPr>
                         <a:t>기준선 추가</a:t>
                       </a:r>
                     </a:p>
@@ -21839,6 +22717,22 @@
                           <a:ea typeface="맑은 고딕"/>
                           <a:cs typeface="맑은 고딕"/>
                         </a:rPr>
+                        <a:t>2026-08-05</a:t>
+                      </a:r>
+                    </a:p>
+                  </a:txBody>
+                  <a:tcPr marL="54864" marR="54864" marT="18288" marB="18288" anchor="ctr"/>
+                </a:tc>
+                <a:tc>
+                  <a:txBody>
+                    <a:bodyPr wrap="square"/>
+                    <a:lstStyle/>
+                    <a:p>
+                      <a:r>
+                        <a:rPr sz="1000" b="0">
+                          <a:ea typeface="맑은 고딕"/>
+                          <a:cs typeface="맑은 고딕"/>
+                        </a:rPr>
                         <a:t>불확실성 방식</a:t>
                       </a:r>
                     </a:p>
@@ -21905,6 +22799,22 @@
                           <a:ea typeface="맑은 고딕"/>
                           <a:cs typeface="맑은 고딕"/>
                         </a:rPr>
+                        <a:t>2026-07-26 → 08-24</a:t>
+                      </a:r>
+                    </a:p>
+                  </a:txBody>
+                  <a:tcPr marL="54864" marR="54864" marT="18288" marB="18288" anchor="ctr"/>
+                </a:tc>
+                <a:tc>
+                  <a:txBody>
+                    <a:bodyPr wrap="square"/>
+                    <a:lstStyle/>
+                    <a:p>
+                      <a:r>
+                        <a:rPr sz="1000" b="0">
+                          <a:ea typeface="맑은 고딕"/>
+                          <a:cs typeface="맑은 고딕"/>
+                        </a:rPr>
                         <a:t>추정기 계열</a:t>
                       </a:r>
                     </a:p>
@@ -21971,6 +22881,22 @@
                           <a:ea typeface="맑은 고딕"/>
                           <a:cs typeface="맑은 고딕"/>
                         </a:rPr>
+                        <a:t>2026-09-03</a:t>
+                      </a:r>
+                    </a:p>
+                  </a:txBody>
+                  <a:tcPr marL="54864" marR="54864" marT="18288" marB="18288" anchor="ctr"/>
+                </a:tc>
+                <a:tc>
+                  <a:txBody>
+                    <a:bodyPr wrap="square"/>
+                    <a:lstStyle/>
+                    <a:p>
+                      <a:r>
+                        <a:rPr sz="1000" b="0">
+                          <a:ea typeface="맑은 고딕"/>
+                          <a:cs typeface="맑은 고딕"/>
+                        </a:rPr>
                         <a:t>읽기 가중치를 이산 코드로 선택</a:t>
                       </a:r>
                     </a:p>
@@ -21987,7 +22913,7 @@
                           <a:ea typeface="맑은 고딕"/>
                           <a:cs typeface="맑은 고딕"/>
                         </a:rPr>
-                        <a:t>사전등록 2026-09-03, val 선별 진행 중</a:t>
+                        <a:t>사전등록 완료, val 선별 진행 중. 조용 3분위 Tᵢ 승률 42 %가 출발점</a:t>
                       </a:r>
                     </a:p>
                   </a:txBody>
@@ -22090,26 +23016,63 @@
           <a:lstStyle/>
           <a:p>
             <a:r>
-              <a:rPr b="0" sz="2450">
-                <a:ea typeface="맑은 고딕"/>
-                <a:cs typeface="맑은 고딕"/>
-              </a:rPr>
-              <a:t>문헌 조사 (1/4): 핵융합의 진단-대-진단 추정은 여전히 단순한 구조가 주류이다</a:t>
+              <a:rPr b="0" sz="2250">
+                <a:ea typeface="맑은 고딕"/>
+                <a:cs typeface="맑은 고딕"/>
+              </a:rPr>
+              <a:t>문헌 조사 (1/4, 1쪽): 핵융합의 진단-대-진단 추정은 여전히 단순한 구조가 주류이다</a:t>
+            </a:r>
+          </a:p>
+        </p:txBody>
+      </p:sp>
+      <p:sp>
+        <p:nvSpPr>
+          <p:cNvPr id="3" name="TextBox 2"/>
+          <p:cNvSpPr txBox="1"/>
+          <p:nvPr/>
+        </p:nvSpPr>
+        <p:spPr>
+          <a:xfrm>
+            <a:off x="585216" y="2029967"/>
+            <a:ext cx="11027664" cy="297688"/>
+          </a:xfrm>
+          <a:prstGeom prst="rect">
+            <a:avLst/>
+          </a:prstGeom>
+          <a:noFill/>
+        </p:spPr>
+        <p:txBody>
+          <a:bodyPr wrap="square">
+            <a:spAutoFit/>
+          </a:bodyPr>
+          <a:lstStyle/>
+          <a:p>
+            <a:pPr>
+              <a:spcAft>
+                <a:spcPts val="300"/>
+              </a:spcAft>
+            </a:pPr>
+            <a:r>
+              <a:rPr sz="1300">
+                <a:ea typeface="맑은 고딕"/>
+                <a:cs typeface="맑은 고딕"/>
+              </a:rPr>
+              <a:t>장치와 연도를 따로 두었다.</a:t>
             </a:r>
           </a:p>
         </p:txBody>
       </p:sp>
       <p:graphicFrame>
         <p:nvGraphicFramePr>
-          <p:cNvPr id="3" name="Table 2"/>
+          <p:cNvPr id="4" name="Table 3"/>
           <p:cNvGraphicFramePr>
             <a:graphicFrameLocks noGrp="1"/>
           </p:cNvGraphicFramePr>
           <p:nvPr/>
         </p:nvGraphicFramePr>
         <p:xfrm>
-          <a:off x="585216" y="2029967"/>
-          <a:ext cx="11027661" cy="3760216"/>
+          <a:off x="585216" y="2400807"/>
+          <a:ext cx="11027661" cy="3083809"/>
         </p:xfrm>
         <a:graphic>
           <a:graphicData uri="http://schemas.openxmlformats.org/drawingml/2006/table">
@@ -22118,10 +23081,13 @@
                 <a:tableStyleId>{5C22544A-7EE6-4342-B048-85BDC9FD1C3A}</a:tableStyleId>
               </a:tblPr>
               <a:tblGrid>
-                <a:gridCol w="2350157"/>
-                <a:gridCol w="3254064"/>
-                <a:gridCol w="2711720"/>
-                <a:gridCol w="2711720"/>
+                <a:gridCol w="1552631"/>
+                <a:gridCol w="836032"/>
+                <a:gridCol w="676788"/>
+                <a:gridCol w="1473009"/>
+                <a:gridCol w="2428474"/>
+                <a:gridCol w="1234142"/>
+                <a:gridCol w="2826585"/>
               </a:tblGrid>
               <a:tr h="274320">
                 <a:tc>
@@ -22130,653 +23096,791 @@
                     <a:lstStyle/>
                     <a:p>
                       <a:r>
-                        <a:rPr sz="1000" b="1">
-                          <a:ea typeface="맑은 고딕"/>
-                          <a:cs typeface="맑은 고딕"/>
-                        </a:rPr>
-                        <a:t>논문 (장치, 연도)</a:t>
-                      </a:r>
-                    </a:p>
-                  </a:txBody>
-                  <a:tcPr marL="54864" marR="54864" marT="18288" marB="18288" anchor="ctr"/>
-                </a:tc>
-                <a:tc>
-                  <a:txBody>
-                    <a:bodyPr wrap="square"/>
-                    <a:lstStyle/>
-                    <a:p>
-                      <a:r>
-                        <a:rPr sz="1000" b="1">
-                          <a:ea typeface="맑은 고딕"/>
-                          <a:cs typeface="맑은 고딕"/>
-                        </a:rPr>
-                        <a:t>문제 · 구조</a:t>
-                      </a:r>
-                    </a:p>
-                  </a:txBody>
-                  <a:tcPr marL="54864" marR="54864" marT="18288" marB="18288" anchor="ctr"/>
-                </a:tc>
-                <a:tc>
-                  <a:txBody>
-                    <a:bodyPr wrap="square"/>
-                    <a:lstStyle/>
-                    <a:p>
-                      <a:r>
-                        <a:rPr sz="1000" b="1">
-                          <a:ea typeface="맑은 고딕"/>
-                          <a:cs typeface="맑은 고딕"/>
-                        </a:rPr>
-                        <a:t>데이터 · 결과</a:t>
-                      </a:r>
-                    </a:p>
-                  </a:txBody>
-                  <a:tcPr marL="54864" marR="54864" marT="18288" marB="18288" anchor="ctr"/>
-                </a:tc>
-                <a:tc>
-                  <a:txBody>
-                    <a:bodyPr wrap="square"/>
-                    <a:lstStyle/>
-                    <a:p>
-                      <a:r>
-                        <a:rPr sz="1000" b="1">
-                          <a:ea typeface="맑은 고딕"/>
-                          <a:cs typeface="맑은 고딕"/>
-                        </a:rPr>
-                        <a:t>본 연구에 대한 의미</a:t>
+                        <a:rPr sz="1050" b="1">
+                          <a:ea typeface="맑은 고딕"/>
+                          <a:cs typeface="맑은 고딕"/>
+                        </a:rPr>
+                        <a:t>논문</a:t>
+                      </a:r>
+                    </a:p>
+                  </a:txBody>
+                  <a:tcPr marL="54864" marR="54864" marT="18288" marB="18288" anchor="ctr"/>
+                </a:tc>
+                <a:tc>
+                  <a:txBody>
+                    <a:bodyPr wrap="square"/>
+                    <a:lstStyle/>
+                    <a:p>
+                      <a:r>
+                        <a:rPr sz="1050" b="1">
+                          <a:ea typeface="맑은 고딕"/>
+                          <a:cs typeface="맑은 고딕"/>
+                        </a:rPr>
+                        <a:t>장치</a:t>
+                      </a:r>
+                    </a:p>
+                  </a:txBody>
+                  <a:tcPr marL="54864" marR="54864" marT="18288" marB="18288" anchor="ctr"/>
+                </a:tc>
+                <a:tc>
+                  <a:txBody>
+                    <a:bodyPr wrap="square"/>
+                    <a:lstStyle/>
+                    <a:p>
+                      <a:r>
+                        <a:rPr sz="1050" b="1">
+                          <a:ea typeface="맑은 고딕"/>
+                          <a:cs typeface="맑은 고딕"/>
+                        </a:rPr>
+                        <a:t>연도</a:t>
+                      </a:r>
+                    </a:p>
+                  </a:txBody>
+                  <a:tcPr marL="54864" marR="54864" marT="18288" marB="18288" anchor="ctr"/>
+                </a:tc>
+                <a:tc>
+                  <a:txBody>
+                    <a:bodyPr wrap="square"/>
+                    <a:lstStyle/>
+                    <a:p>
+                      <a:r>
+                        <a:rPr sz="1050" b="1">
+                          <a:ea typeface="맑은 고딕"/>
+                          <a:cs typeface="맑은 고딕"/>
+                        </a:rPr>
+                        <a:t>문제</a:t>
+                      </a:r>
+                    </a:p>
+                  </a:txBody>
+                  <a:tcPr marL="54864" marR="54864" marT="18288" marB="18288" anchor="ctr"/>
+                </a:tc>
+                <a:tc>
+                  <a:txBody>
+                    <a:bodyPr wrap="square"/>
+                    <a:lstStyle/>
+                    <a:p>
+                      <a:r>
+                        <a:rPr sz="1050" b="1">
+                          <a:ea typeface="맑은 고딕"/>
+                          <a:cs typeface="맑은 고딕"/>
+                        </a:rPr>
+                        <a:t>구조</a:t>
+                      </a:r>
+                    </a:p>
+                  </a:txBody>
+                  <a:tcPr marL="54864" marR="54864" marT="18288" marB="18288" anchor="ctr"/>
+                </a:tc>
+                <a:tc>
+                  <a:txBody>
+                    <a:bodyPr wrap="square"/>
+                    <a:lstStyle/>
+                    <a:p>
+                      <a:r>
+                        <a:rPr sz="1050" b="1">
+                          <a:ea typeface="맑은 고딕"/>
+                          <a:cs typeface="맑은 고딕"/>
+                        </a:rPr>
+                        <a:t>데이터</a:t>
+                      </a:r>
+                    </a:p>
+                  </a:txBody>
+                  <a:tcPr marL="54864" marR="54864" marT="18288" marB="18288" anchor="ctr"/>
+                </a:tc>
+                <a:tc>
+                  <a:txBody>
+                    <a:bodyPr wrap="square"/>
+                    <a:lstStyle/>
+                    <a:p>
+                      <a:r>
+                        <a:rPr sz="1050" b="1">
+                          <a:ea typeface="맑은 고딕"/>
+                          <a:cs typeface="맑은 고딕"/>
+                        </a:rPr>
+                        <a:t>우리에게 의미</a:t>
                       </a:r>
                     </a:p>
                   </a:txBody>
                   <a:tcPr marL="54864" marR="54864" marT="18288" marB="18288" anchor="ctr"/>
                 </a:tc>
               </a:tr>
-              <a:tr h="369824">
-                <a:tc>
-                  <a:txBody>
-                    <a:bodyPr wrap="square"/>
-                    <a:lstStyle/>
-                    <a:p>
-                      <a:r>
-                        <a:rPr sz="1000" b="0">
-                          <a:ea typeface="맑은 고딕"/>
-                          <a:cs typeface="맑은 고딕"/>
-                        </a:rPr>
-                        <a:t>Diag2Diag (DIII-D, Nat. Comm. 2025)</a:t>
-                      </a:r>
-                    </a:p>
-                  </a:txBody>
-                  <a:tcPr marL="54864" marR="54864" marT="18288" marB="18288" anchor="ctr"/>
-                </a:tc>
-                <a:tc>
-                  <a:txBody>
-                    <a:bodyPr wrap="square"/>
-                    <a:lstStyle/>
-                    <a:p>
-                      <a:r>
-                        <a:rPr sz="1000" b="0">
-                          <a:ea typeface="맑은 고딕"/>
-                          <a:cs typeface="맑은 고딕"/>
-                        </a:rPr>
-                        <a:t>Thomson 200 Hz → 500 kHz 시간 초해상. 무기억 MLP 236 → 952 → 80에 1 · 2차 미분 특징</a:t>
-                      </a:r>
-                    </a:p>
-                  </a:txBody>
-                  <a:tcPr marL="54864" marR="54864" marT="18288" marB="18288" anchor="ctr"/>
-                </a:tc>
-                <a:tc>
-                  <a:txBody>
-                    <a:bodyPr wrap="square"/>
-                    <a:lstStyle/>
-                    <a:p>
-                      <a:r>
-                        <a:rPr sz="1000" b="0">
-                          <a:ea typeface="맑은 고딕"/>
-                          <a:cs typeface="맑은 고딕"/>
-                        </a:rPr>
-                        <a:t>4,000 방전, R² 0.92, BNN 불확실성</a:t>
-                      </a:r>
-                    </a:p>
-                  </a:txBody>
-                  <a:tcPr marL="54864" marR="54864" marT="18288" marB="18288" anchor="ctr"/>
-                </a:tc>
-                <a:tc>
-                  <a:txBody>
-                    <a:bodyPr wrap="square"/>
-                    <a:lstStyle/>
-                    <a:p>
-                      <a:r>
-                        <a:rPr sz="1000" b="0">
-                          <a:ea typeface="맑은 고딕"/>
-                          <a:cs typeface="맑은 고딕"/>
-                        </a:rPr>
-                        <a:t>가장 가까운 문제가 가장 단순한 구조로 풀린다. seq_v2는 이미 인과 상태를 갖는다</a:t>
+              <a:tr h="716279">
+                <a:tc>
+                  <a:txBody>
+                    <a:bodyPr wrap="square"/>
+                    <a:lstStyle/>
+                    <a:p>
+                      <a:r>
+                        <a:rPr sz="1050" b="0">
+                          <a:ea typeface="맑은 고딕"/>
+                          <a:cs typeface="맑은 고딕"/>
+                        </a:rPr>
+                        <a:t>Diag2Diag (Nat. Comm.)</a:t>
+                      </a:r>
+                    </a:p>
+                  </a:txBody>
+                  <a:tcPr marL="54864" marR="54864" marT="18288" marB="18288" anchor="ctr"/>
+                </a:tc>
+                <a:tc>
+                  <a:txBody>
+                    <a:bodyPr wrap="square"/>
+                    <a:lstStyle/>
+                    <a:p>
+                      <a:r>
+                        <a:rPr sz="1050" b="0">
+                          <a:ea typeface="맑은 고딕"/>
+                          <a:cs typeface="맑은 고딕"/>
+                        </a:rPr>
+                        <a:t>DIII-D</a:t>
+                      </a:r>
+                    </a:p>
+                  </a:txBody>
+                  <a:tcPr marL="54864" marR="54864" marT="18288" marB="18288" anchor="ctr"/>
+                </a:tc>
+                <a:tc>
+                  <a:txBody>
+                    <a:bodyPr wrap="square"/>
+                    <a:lstStyle/>
+                    <a:p>
+                      <a:r>
+                        <a:rPr sz="1050" b="0">
+                          <a:ea typeface="맑은 고딕"/>
+                          <a:cs typeface="맑은 고딕"/>
+                        </a:rPr>
+                        <a:t>2025</a:t>
+                      </a:r>
+                    </a:p>
+                  </a:txBody>
+                  <a:tcPr marL="54864" marR="54864" marT="18288" marB="18288" anchor="ctr"/>
+                </a:tc>
+                <a:tc>
+                  <a:txBody>
+                    <a:bodyPr wrap="square"/>
+                    <a:lstStyle/>
+                    <a:p>
+                      <a:r>
+                        <a:rPr sz="1050" b="0">
+                          <a:ea typeface="맑은 고딕"/>
+                          <a:cs typeface="맑은 고딕"/>
+                        </a:rPr>
+                        <a:t>Thomson 200 Hz를 500 kHz로 시간 초해상도</a:t>
+                      </a:r>
+                    </a:p>
+                  </a:txBody>
+                  <a:tcPr marL="54864" marR="54864" marT="18288" marB="18288" anchor="ctr"/>
+                </a:tc>
+                <a:tc>
+                  <a:txBody>
+                    <a:bodyPr wrap="square"/>
+                    <a:lstStyle/>
+                    <a:p>
+                      <a:r>
+                        <a:rPr sz="1050" b="0">
+                          <a:ea typeface="맑은 고딕"/>
+                          <a:cs typeface="맑은 고딕"/>
+                        </a:rPr>
+                        <a:t>무기억 MLP 236→952→80, 1·2차 미분 특징으로 시간 문맥 대체, L1 손실, BNN 불확실성</a:t>
+                      </a:r>
+                    </a:p>
+                  </a:txBody>
+                  <a:tcPr marL="54864" marR="54864" marT="18288" marB="18288" anchor="ctr"/>
+                </a:tc>
+                <a:tc>
+                  <a:txBody>
+                    <a:bodyPr wrap="square"/>
+                    <a:lstStyle/>
+                    <a:p>
+                      <a:r>
+                        <a:rPr sz="1050" b="0">
+                          <a:ea typeface="맑은 고딕"/>
+                          <a:cs typeface="맑은 고딕"/>
+                        </a:rPr>
+                        <a:t>4,000 방전, 13.5만 샘플</a:t>
+                      </a:r>
+                    </a:p>
+                  </a:txBody>
+                  <a:tcPr marL="54864" marR="54864" marT="18288" marB="18288" anchor="ctr"/>
+                </a:tc>
+                <a:tc>
+                  <a:txBody>
+                    <a:bodyPr wrap="square"/>
+                    <a:lstStyle/>
+                    <a:p>
+                      <a:r>
+                        <a:rPr sz="1050" b="0">
+                          <a:ea typeface="맑은 고딕"/>
+                          <a:cs typeface="맑은 고딕"/>
+                        </a:rPr>
+                        <a:t>우리와 가장 가까운 문제가 가장 단순한 구조로 풀림. 저자 스스로 "TS 샘플링이 불규칙해서 RNN 대신 무기억"이라 밝힘. 우리 seq_v2는 이미 그 위 단계</a:t>
                       </a:r>
                     </a:p>
                   </a:txBody>
                   <a:tcPr marL="54864" marR="54864" marT="18288" marB="18288" anchor="ctr"/>
                 </a:tc>
               </a:tr>
-              <a:tr h="369824">
-                <a:tc>
-                  <a:txBody>
-                    <a:bodyPr wrap="square"/>
-                    <a:lstStyle/>
-                    <a:p>
-                      <a:r>
-                        <a:rPr sz="1000" b="0">
-                          <a:ea typeface="맑은 고딕"/>
-                          <a:cs typeface="맑은 고딕"/>
-                        </a:rPr>
-                        <a:t>COMPASS 시간 초해상 (PPCF 2025)</a:t>
-                      </a:r>
-                    </a:p>
-                  </a:txBody>
-                  <a:tcPr marL="54864" marR="54864" marT="18288" marB="18288" anchor="ctr"/>
-                </a:tc>
-                <a:tc>
-                  <a:txBody>
-                    <a:bodyPr wrap="square"/>
-                    <a:lstStyle/>
-                    <a:p>
-                      <a:r>
-                        <a:rPr sz="1000" b="0">
-                          <a:ea typeface="맑은 고딕"/>
-                          <a:cs typeface="맑은 고딕"/>
-                        </a:rPr>
-                        <a:t>SXR · AXUV → Thomson Tₑ · nₑ. 4 × 256 MLP</a:t>
-                      </a:r>
-                    </a:p>
-                  </a:txBody>
-                  <a:tcPr marL="54864" marR="54864" marT="18288" marB="18288" anchor="ctr"/>
-                </a:tc>
-                <a:tc>
-                  <a:txBody>
-                    <a:bodyPr wrap="square"/>
-                    <a:lstStyle/>
-                    <a:p>
-                      <a:r>
-                        <a:rPr sz="1000" b="0">
-                          <a:ea typeface="맑은 고딕"/>
-                          <a:cs typeface="맑은 고딕"/>
-                        </a:rPr>
-                        <a:t>2,764 방전. 측정 불확실성 1/σ 가중 Huber 손실, 코어 MAPE 5 %</a:t>
-                      </a:r>
-                    </a:p>
-                  </a:txBody>
-                  <a:tcPr marL="54864" marR="54864" marT="18288" marB="18288" anchor="ctr"/>
-                </a:tc>
-                <a:tc>
-                  <a:txBody>
-                    <a:bodyPr wrap="square"/>
-                    <a:lstStyle/>
-                    <a:p>
-                      <a:r>
-                        <a:rPr sz="1000" b="0">
-                          <a:ea typeface="맑은 고딕"/>
-                          <a:cs typeface="맑은 고딕"/>
-                        </a:rPr>
-                        <a:t>불확실성 가중 손실은 §8aq의 꼬리 발견과 직결된다</a:t>
+              <a:tr h="385571">
+                <a:tc>
+                  <a:txBody>
+                    <a:bodyPr wrap="square"/>
+                    <a:lstStyle/>
+                    <a:p>
+                      <a:r>
+                        <a:rPr sz="1050" b="0">
+                          <a:ea typeface="맑은 고딕"/>
+                          <a:cs typeface="맑은 고딕"/>
+                        </a:rPr>
+                        <a:t>COMPASS 시간 초해상도 (PPCF)</a:t>
+                      </a:r>
+                    </a:p>
+                  </a:txBody>
+                  <a:tcPr marL="54864" marR="54864" marT="18288" marB="18288" anchor="ctr"/>
+                </a:tc>
+                <a:tc>
+                  <a:txBody>
+                    <a:bodyPr wrap="square"/>
+                    <a:lstStyle/>
+                    <a:p>
+                      <a:r>
+                        <a:rPr sz="1050" b="0">
+                          <a:ea typeface="맑은 고딕"/>
+                          <a:cs typeface="맑은 고딕"/>
+                        </a:rPr>
+                        <a:t>COMPASS</a:t>
+                      </a:r>
+                    </a:p>
+                  </a:txBody>
+                  <a:tcPr marL="54864" marR="54864" marT="18288" marB="18288" anchor="ctr"/>
+                </a:tc>
+                <a:tc>
+                  <a:txBody>
+                    <a:bodyPr wrap="square"/>
+                    <a:lstStyle/>
+                    <a:p>
+                      <a:r>
+                        <a:rPr sz="1050" b="0">
+                          <a:ea typeface="맑은 고딕"/>
+                          <a:cs typeface="맑은 고딕"/>
+                        </a:rPr>
+                        <a:t>2025/26</a:t>
+                      </a:r>
+                    </a:p>
+                  </a:txBody>
+                  <a:tcPr marL="54864" marR="54864" marT="18288" marB="18288" anchor="ctr"/>
+                </a:tc>
+                <a:tc>
+                  <a:txBody>
+                    <a:bodyPr wrap="square"/>
+                    <a:lstStyle/>
+                    <a:p>
+                      <a:r>
+                        <a:rPr sz="1050" b="0">
+                          <a:ea typeface="맑은 고딕"/>
+                          <a:cs typeface="맑은 고딕"/>
+                        </a:rPr>
+                        <a:t>SXR·AXUV로 Te/ne 프로파일</a:t>
+                      </a:r>
+                    </a:p>
+                  </a:txBody>
+                  <a:tcPr marL="54864" marR="54864" marT="18288" marB="18288" anchor="ctr"/>
+                </a:tc>
+                <a:tc>
+                  <a:txBody>
+                    <a:bodyPr wrap="square"/>
+                    <a:lstStyle/>
+                    <a:p>
+                      <a:r>
+                        <a:rPr sz="1050" b="0">
+                          <a:ea typeface="맑은 고딕"/>
+                          <a:cs typeface="맑은 고딕"/>
+                        </a:rPr>
+                        <a:t>4×256 MLP, 측정 불확실성 1/σ 가중 Huber</a:t>
+                      </a:r>
+                    </a:p>
+                  </a:txBody>
+                  <a:tcPr marL="54864" marR="54864" marT="18288" marB="18288" anchor="ctr"/>
+                </a:tc>
+                <a:tc>
+                  <a:txBody>
+                    <a:bodyPr wrap="square"/>
+                    <a:lstStyle/>
+                    <a:p>
+                      <a:r>
+                        <a:rPr sz="1050" b="0">
+                          <a:ea typeface="맑은 고딕"/>
+                          <a:cs typeface="맑은 고딕"/>
+                        </a:rPr>
+                        <a:t>2,764 방전, 방전 단위 5-fold</a:t>
+                      </a:r>
+                    </a:p>
+                  </a:txBody>
+                  <a:tcPr marL="54864" marR="54864" marT="18288" marB="18288" anchor="ctr"/>
+                </a:tc>
+                <a:tc>
+                  <a:txBody>
+                    <a:bodyPr wrap="square"/>
+                    <a:lstStyle/>
+                    <a:p>
+                      <a:r>
+                        <a:rPr sz="1050" b="0">
+                          <a:ea typeface="맑은 고딕"/>
+                          <a:cs typeface="맑은 고딕"/>
+                        </a:rPr>
+                        <a:t>가중 Huber는 §8aq의 "상위 1 % 변화가 제곱질량 46.6 %" 발견과 직결. 우리는 MSE만 씀</a:t>
                       </a:r>
                     </a:p>
                   </a:txBody>
                   <a:tcPr marL="54864" marR="54864" marT="18288" marB="18288" anchor="ctr"/>
                 </a:tc>
               </a:tr>
-              <a:tr h="369824">
-                <a:tc>
-                  <a:txBody>
-                    <a:bodyPr wrap="square"/>
-                    <a:lstStyle/>
-                    <a:p>
-                      <a:r>
-                        <a:rPr sz="1000" b="0">
-                          <a:ea typeface="맑은 고딕"/>
-                          <a:cs typeface="맑은 고딕"/>
-                        </a:rPr>
-                        <a:t>FusionMAE (HL-3, Comm. Phys. 2026)</a:t>
-                      </a:r>
-                    </a:p>
-                  </a:txBody>
-                  <a:tcPr marL="54864" marR="54864" marT="18288" marB="18288" anchor="ctr"/>
-                </a:tc>
-                <a:tc>
-                  <a:txBody>
-                    <a:bodyPr wrap="square"/>
-                    <a:lstStyle/>
-                    <a:p>
-                      <a:r>
-                        <a:rPr sz="1000" b="0">
-                          <a:ea typeface="맑은 고딕"/>
-                          <a:cs typeface="맑은 고딕"/>
-                        </a:rPr>
-                        <a:t>88채널 × 10 ms 마스크 오토인코더(MAE). 결측 채널 복원 = 가상 백업 진단</a:t>
-                      </a:r>
-                    </a:p>
-                  </a:txBody>
-                  <a:tcPr marL="54864" marR="54864" marT="18288" marB="18288" anchor="ctr"/>
-                </a:tc>
-                <a:tc>
-                  <a:txBody>
-                    <a:bodyPr wrap="square"/>
-                    <a:lstStyle/>
-                    <a:p>
-                      <a:r>
-                        <a:rPr sz="1000" b="0">
-                          <a:ea typeface="맑은 고딕"/>
-                          <a:cs typeface="맑은 고딕"/>
-                        </a:rPr>
-                        <a:t>복원 신뢰도 96.7 ~ 97.2 %</a:t>
-                      </a:r>
-                    </a:p>
-                  </a:txBody>
-                  <a:tcPr marL="54864" marR="54864" marT="18288" marB="18288" anchor="ctr"/>
-                </a:tc>
-                <a:tc>
-                  <a:txBody>
-                    <a:bodyPr wrap="square"/>
-                    <a:lstStyle/>
-                    <a:p>
-                      <a:r>
-                        <a:rPr sz="1000" b="0">
-                          <a:ea typeface="맑은 고딕"/>
-                          <a:cs typeface="맑은 고딕"/>
-                        </a:rPr>
-                        <a:t>본 과제를 MAE의 결측 채널 복원으로 보는 프레임. 사전학습 축은 미개척</a:t>
+              <a:tr h="385571">
+                <a:tc>
+                  <a:txBody>
+                    <a:bodyPr wrap="square"/>
+                    <a:lstStyle/>
+                    <a:p>
+                      <a:r>
+                        <a:rPr sz="1050" b="0">
+                          <a:ea typeface="맑은 고딕"/>
+                          <a:cs typeface="맑은 고딕"/>
+                        </a:rPr>
+                        <a:t>FusionMAE (Comm. Phys.)</a:t>
+                      </a:r>
+                    </a:p>
+                  </a:txBody>
+                  <a:tcPr marL="54864" marR="54864" marT="18288" marB="18288" anchor="ctr"/>
+                </a:tc>
+                <a:tc>
+                  <a:txBody>
+                    <a:bodyPr wrap="square"/>
+                    <a:lstStyle/>
+                    <a:p>
+                      <a:r>
+                        <a:rPr sz="1050" b="0">
+                          <a:ea typeface="맑은 고딕"/>
+                          <a:cs typeface="맑은 고딕"/>
+                        </a:rPr>
+                        <a:t>HL-3</a:t>
+                      </a:r>
+                    </a:p>
+                  </a:txBody>
+                  <a:tcPr marL="54864" marR="54864" marT="18288" marB="18288" anchor="ctr"/>
+                </a:tc>
+                <a:tc>
+                  <a:txBody>
+                    <a:bodyPr wrap="square"/>
+                    <a:lstStyle/>
+                    <a:p>
+                      <a:r>
+                        <a:rPr sz="1050" b="0">
+                          <a:ea typeface="맑은 고딕"/>
+                          <a:cs typeface="맑은 고딕"/>
+                        </a:rPr>
+                        <a:t>2026</a:t>
+                      </a:r>
+                    </a:p>
+                  </a:txBody>
+                  <a:tcPr marL="54864" marR="54864" marT="18288" marB="18288" anchor="ctr"/>
+                </a:tc>
+                <a:tc>
+                  <a:txBody>
+                    <a:bodyPr wrap="square"/>
+                    <a:lstStyle/>
+                    <a:p>
+                      <a:r>
+                        <a:rPr sz="1050" b="0">
+                          <a:ea typeface="맑은 고딕"/>
+                          <a:cs typeface="맑은 고딕"/>
+                        </a:rPr>
+                        <a:t>88채널×10 ms 토큰의 마스크 오토인코더</a:t>
+                      </a:r>
+                    </a:p>
+                  </a:txBody>
+                  <a:tcPr marL="54864" marR="54864" marT="18288" marB="18288" anchor="ctr"/>
+                </a:tc>
+                <a:tc>
+                  <a:txBody>
+                    <a:bodyPr wrap="square"/>
+                    <a:lstStyle/>
+                    <a:p>
+                      <a:r>
+                        <a:rPr sz="1050" b="0">
+                          <a:ea typeface="맑은 고딕"/>
+                          <a:cs typeface="맑은 고딕"/>
+                        </a:rPr>
+                        <a:t>Transformer MAE, 결측 채널 재구성 = "가상 백업 진단", 96.7 ~ 97.2 %</a:t>
+                      </a:r>
+                    </a:p>
+                  </a:txBody>
+                  <a:tcPr marL="54864" marR="54864" marT="18288" marB="18288" anchor="ctr"/>
+                </a:tc>
+                <a:tc>
+                  <a:txBody>
+                    <a:bodyPr wrap="square"/>
+                    <a:lstStyle/>
+                    <a:p>
+                      <a:r>
+                        <a:rPr sz="1050" b="0">
+                          <a:ea typeface="맑은 고딕"/>
+                          <a:cs typeface="맑은 고딕"/>
+                        </a:rPr>
+                        <a:t>대규모 HL-3</a:t>
+                      </a:r>
+                    </a:p>
+                  </a:txBody>
+                  <a:tcPr marL="54864" marR="54864" marT="18288" marB="18288" anchor="ctr"/>
+                </a:tc>
+                <a:tc>
+                  <a:txBody>
+                    <a:bodyPr wrap="square"/>
+                    <a:lstStyle/>
+                    <a:p>
+                      <a:r>
+                        <a:rPr sz="1050" b="0">
+                          <a:ea typeface="맑은 고딕"/>
+                          <a:cs typeface="맑은 고딕"/>
+                        </a:rPr>
+                        <a:t>우리 과제를 MAE의 결측 채널 복원으로 보는 프레임. 사전학습 축은 우리 repo에 없음</a:t>
                       </a:r>
                     </a:p>
                   </a:txBody>
                   <a:tcPr marL="54864" marR="54864" marT="18288" marB="18288" anchor="ctr"/>
                 </a:tc>
               </a:tr>
-              <a:tr h="369824">
-                <a:tc>
-                  <a:txBody>
-                    <a:bodyPr wrap="square"/>
-                    <a:lstStyle/>
-                    <a:p>
-                      <a:r>
-                        <a:rPr sz="1000" b="0">
-                          <a:ea typeface="맑은 고딕"/>
-                          <a:cs typeface="맑은 고딕"/>
-                        </a:rPr>
-                        <a:t>TokaMind (MAST, 2026)</a:t>
-                      </a:r>
-                    </a:p>
-                  </a:txBody>
-                  <a:tcPr marL="54864" marR="54864" marT="18288" marB="18288" anchor="ctr"/>
-                </a:tc>
-                <a:tc>
-                  <a:txBody>
-                    <a:bodyPr wrap="square"/>
-                    <a:lstStyle/>
-                    <a:p>
-                      <a:r>
-                        <a:rPr sz="1000" b="0">
-                          <a:ea typeface="맑은 고딕"/>
-                          <a:cs typeface="맑은 고딕"/>
-                        </a:rPr>
-                        <a:t>7M 미만 멀티모달 트랜스포머. DCT 임베딩, 5 ms 청크로 다중 샘플링률 처리</a:t>
-                      </a:r>
-                    </a:p>
-                  </a:txBody>
-                  <a:tcPr marL="54864" marR="54864" marT="18288" marB="18288" anchor="ctr"/>
-                </a:tc>
-                <a:tc>
-                  <a:txBody>
-                    <a:bodyPr wrap="square"/>
-                    <a:lstStyle/>
-                    <a:p>
-                      <a:r>
-                        <a:rPr sz="1000" b="0">
-                          <a:ea typeface="맑은 고딕"/>
-                          <a:cs typeface="맑은 고딕"/>
-                        </a:rPr>
-                        <a:t>11,573 방전. 미세조정 이득 전체 +0.017, 프로파일 -0.005, MHD +0.05</a:t>
-                      </a:r>
-                    </a:p>
-                  </a:txBody>
-                  <a:tcPr marL="54864" marR="54864" marT="18288" marB="18288" anchor="ctr"/>
-                </a:tc>
-                <a:tc>
-                  <a:txBody>
-                    <a:bodyPr wrap="square"/>
-                    <a:lstStyle/>
-                    <a:p>
-                      <a:r>
-                        <a:rPr sz="1000" b="0">
-                          <a:ea typeface="맑은 고딕"/>
-                          <a:cs typeface="맑은 고딕"/>
-                        </a:rPr>
-                        <a:t>프로파일류에는 사전학습이 거의 도움이 되지 않는다</a:t>
+              <a:tr h="550926">
+                <a:tc>
+                  <a:txBody>
+                    <a:bodyPr wrap="square"/>
+                    <a:lstStyle/>
+                    <a:p>
+                      <a:r>
+                        <a:rPr sz="1050" b="0">
+                          <a:ea typeface="맑은 고딕"/>
+                          <a:cs typeface="맑은 고딕"/>
+                        </a:rPr>
+                        <a:t>TokaMind</a:t>
+                      </a:r>
+                    </a:p>
+                  </a:txBody>
+                  <a:tcPr marL="54864" marR="54864" marT="18288" marB="18288" anchor="ctr"/>
+                </a:tc>
+                <a:tc>
+                  <a:txBody>
+                    <a:bodyPr wrap="square"/>
+                    <a:lstStyle/>
+                    <a:p>
+                      <a:r>
+                        <a:rPr sz="1050" b="0">
+                          <a:ea typeface="맑은 고딕"/>
+                          <a:cs typeface="맑은 고딕"/>
+                        </a:rPr>
+                        <a:t>MAST</a:t>
+                      </a:r>
+                    </a:p>
+                  </a:txBody>
+                  <a:tcPr marL="54864" marR="54864" marT="18288" marB="18288" anchor="ctr"/>
+                </a:tc>
+                <a:tc>
+                  <a:txBody>
+                    <a:bodyPr wrap="square"/>
+                    <a:lstStyle/>
+                    <a:p>
+                      <a:r>
+                        <a:rPr sz="1050" b="0">
+                          <a:ea typeface="맑은 고딕"/>
+                          <a:cs typeface="맑은 고딕"/>
+                        </a:rPr>
+                        <a:t>2026</a:t>
+                      </a:r>
+                    </a:p>
+                  </a:txBody>
+                  <a:tcPr marL="54864" marR="54864" marT="18288" marB="18288" anchor="ctr"/>
+                </a:tc>
+                <a:tc>
+                  <a:txBody>
+                    <a:bodyPr wrap="square"/>
+                    <a:lstStyle/>
+                    <a:p>
+                      <a:r>
+                        <a:rPr sz="1050" b="0">
+                          <a:ea typeface="맑은 고딕"/>
+                          <a:cs typeface="맑은 고딕"/>
+                        </a:rPr>
+                        <a:t>멀티모달 파운데이션 모델</a:t>
+                      </a:r>
+                    </a:p>
+                  </a:txBody>
+                  <a:tcPr marL="54864" marR="54864" marT="18288" marB="18288" anchor="ctr"/>
+                </a:tc>
+                <a:tc>
+                  <a:txBody>
+                    <a:bodyPr wrap="square"/>
+                    <a:lstStyle/>
+                    <a:p>
+                      <a:r>
+                        <a:rPr sz="1050" b="0">
+                          <a:ea typeface="맑은 고딕"/>
+                          <a:cs typeface="맑은 고딕"/>
+                        </a:rPr>
+                        <a:t>7M 미만 트랜스포머, DCT 임베딩, 5 ms 청크로 0.2 ~ 500 kHz 다중 샘플링률 처리, 결측 마스크</a:t>
+                      </a:r>
+                    </a:p>
+                  </a:txBody>
+                  <a:tcPr marL="54864" marR="54864" marT="18288" marB="18288" anchor="ctr"/>
+                </a:tc>
+                <a:tc>
+                  <a:txBody>
+                    <a:bodyPr wrap="square"/>
+                    <a:lstStyle/>
+                    <a:p>
+                      <a:r>
+                        <a:rPr sz="1050" b="0">
+                          <a:ea typeface="맑은 고딕"/>
+                          <a:cs typeface="맑은 고딕"/>
+                        </a:rPr>
+                        <a:t>11,573 방전</a:t>
+                      </a:r>
+                    </a:p>
+                  </a:txBody>
+                  <a:tcPr marL="54864" marR="54864" marT="18288" marB="18288" anchor="ctr"/>
+                </a:tc>
+                <a:tc>
+                  <a:txBody>
+                    <a:bodyPr wrap="square"/>
+                    <a:lstStyle/>
+                    <a:p>
+                      <a:r>
+                        <a:rPr sz="1050" b="0">
+                          <a:ea typeface="맑은 고딕"/>
+                          <a:cs typeface="맑은 고딕"/>
+                        </a:rPr>
+                        <a:t>사전학습 후 미세조정 이득: 전체 +0.017 NRMSE, 프로파일 그룹은 -0.005, MHD만 +0.05. 프로파일류에는 사전학습이 거의 안 듦</a:t>
                       </a:r>
                     </a:p>
                   </a:txBody>
                   <a:tcPr marL="54864" marR="54864" marT="18288" marB="18288" anchor="ctr"/>
                 </a:tc>
               </a:tr>
-              <a:tr h="369824">
-                <a:tc>
-                  <a:txBody>
-                    <a:bodyPr wrap="square"/>
-                    <a:lstStyle/>
-                    <a:p>
-                      <a:r>
-                        <a:rPr sz="1000" b="0">
-                          <a:ea typeface="맑은 고딕"/>
-                          <a:cs typeface="맑은 고딕"/>
-                        </a:rPr>
-                        <a:t>PanoMHD (KSTAR, 2026)</a:t>
-                      </a:r>
-                    </a:p>
-                  </a:txBody>
-                  <a:tcPr marL="54864" marR="54864" marT="18288" marB="18288" anchor="ctr"/>
-                </a:tc>
-                <a:tc>
-                  <a:txBody>
-                    <a:bodyPr wrap="square"/>
-                    <a:lstStyle/>
-                    <a:p>
-                      <a:r>
-                        <a:rPr sz="1000" b="0">
-                          <a:ea typeface="맑은 고딕"/>
-                          <a:cs typeface="맑은 고딕"/>
-                        </a:rPr>
-                        <a:t>Mirnov 스펙트로그램의 VQ-VAE 토큰 + 457M GPT-2</a:t>
-                      </a:r>
-                    </a:p>
-                  </a:txBody>
-                  <a:tcPr marL="54864" marR="54864" marT="18288" marB="18288" anchor="ctr"/>
-                </a:tc>
-                <a:tc>
-                  <a:txBody>
-                    <a:bodyPr wrap="square"/>
-                    <a:lstStyle/>
-                    <a:p>
-                      <a:r>
-                        <a:rPr sz="1000" b="0">
-                          <a:ea typeface="맑은 고딕"/>
-                          <a:cs typeface="맑은 고딕"/>
-                        </a:rPr>
-                        <a:t>978 방전, βN R² 0.987</a:t>
-                      </a:r>
-                    </a:p>
-                  </a:txBody>
-                  <a:tcPr marL="54864" marR="54864" marT="18288" marB="18288" anchor="ctr"/>
-                </a:tc>
-                <a:tc>
-                  <a:txBody>
-                    <a:bodyPr wrap="square"/>
-                    <a:lstStyle/>
-                    <a:p>
-                      <a:r>
-                        <a:rPr sz="1000" b="0">
-                          <a:ea typeface="맑은 고딕"/>
-                          <a:cs typeface="맑은 고딕"/>
-                        </a:rPr>
-                        <a:t>KSTAR에서 이산 코드북이 작동한 선례. 단 원시 2 MHz MC가 전제(B.6)</a:t>
+              <a:tr h="385571">
+                <a:tc>
+                  <a:txBody>
+                    <a:bodyPr wrap="square"/>
+                    <a:lstStyle/>
+                    <a:p>
+                      <a:r>
+                        <a:rPr sz="1050" b="0">
+                          <a:ea typeface="맑은 고딕"/>
+                          <a:cs typeface="맑은 고딕"/>
+                        </a:rPr>
+                        <a:t>TokaMark</a:t>
+                      </a:r>
+                    </a:p>
+                  </a:txBody>
+                  <a:tcPr marL="54864" marR="54864" marT="18288" marB="18288" anchor="ctr"/>
+                </a:tc>
+                <a:tc>
+                  <a:txBody>
+                    <a:bodyPr wrap="square"/>
+                    <a:lstStyle/>
+                    <a:p>
+                      <a:r>
+                        <a:rPr sz="1050" b="0">
+                          <a:ea typeface="맑은 고딕"/>
+                          <a:cs typeface="맑은 고딕"/>
+                        </a:rPr>
+                        <a:t>MAST</a:t>
+                      </a:r>
+                    </a:p>
+                  </a:txBody>
+                  <a:tcPr marL="54864" marR="54864" marT="18288" marB="18288" anchor="ctr"/>
+                </a:tc>
+                <a:tc>
+                  <a:txBody>
+                    <a:bodyPr wrap="square"/>
+                    <a:lstStyle/>
+                    <a:p>
+                      <a:r>
+                        <a:rPr sz="1050" b="0">
+                          <a:ea typeface="맑은 고딕"/>
+                          <a:cs typeface="맑은 고딕"/>
+                        </a:rPr>
+                        <a:t>2026</a:t>
+                      </a:r>
+                    </a:p>
+                  </a:txBody>
+                  <a:tcPr marL="54864" marR="54864" marT="18288" marB="18288" anchor="ctr"/>
+                </a:tc>
+                <a:tc>
+                  <a:txBody>
+                    <a:bodyPr wrap="square"/>
+                    <a:lstStyle/>
+                    <a:p>
+                      <a:r>
+                        <a:rPr sz="1050" b="0">
+                          <a:ea typeface="맑은 고딕"/>
+                          <a:cs typeface="맑은 고딕"/>
+                        </a:rPr>
+                        <a:t>14개 과제 벤치마크</a:t>
+                      </a:r>
+                    </a:p>
+                  </a:txBody>
+                  <a:tcPr marL="54864" marR="54864" marT="18288" marB="18288" anchor="ctr"/>
+                </a:tc>
+                <a:tc>
+                  <a:txBody>
+                    <a:bodyPr wrap="square"/>
+                    <a:lstStyle/>
+                    <a:p>
+                      <a:r>
+                        <a:rPr sz="1050" b="0">
+                          <a:ea typeface="맑은 고딕"/>
+                          <a:cs typeface="맑은 고딕"/>
+                        </a:rPr>
+                        <a:t>다중 분기 conv 인코더-디코더 베이스라인, shot 단위 분할</a:t>
+                      </a:r>
+                    </a:p>
+                  </a:txBody>
+                  <a:tcPr marL="54864" marR="54864" marT="18288" marB="18288" anchor="ctr"/>
+                </a:tc>
+                <a:tc>
+                  <a:txBody>
+                    <a:bodyPr wrap="square"/>
+                    <a:lstStyle/>
+                    <a:p>
+                      <a:r>
+                        <a:rPr sz="1050" b="0">
+                          <a:ea typeface="맑은 고딕"/>
+                          <a:cs typeface="맑은 고딕"/>
+                        </a:rPr>
+                        <a:t>위와 동일</a:t>
+                      </a:r>
+                    </a:p>
+                  </a:txBody>
+                  <a:tcPr marL="54864" marR="54864" marT="18288" marB="18288" anchor="ctr"/>
+                </a:tc>
+                <a:tc>
+                  <a:txBody>
+                    <a:bodyPr wrap="square"/>
+                    <a:lstStyle/>
+                    <a:p>
+                      <a:r>
+                        <a:rPr sz="1050" b="0">
+                          <a:ea typeface="맑은 고딕"/>
+                          <a:cs typeface="맑은 고딕"/>
+                        </a:rPr>
+                        <a:t>프로파일 동역학 NRMSE 0.34, MHD 0.48. 커뮤니티 기준선도 conv</a:t>
                       </a:r>
                     </a:p>
                   </a:txBody>
                   <a:tcPr marL="54864" marR="54864" marT="18288" marB="18288" anchor="ctr"/>
                 </a:tc>
               </a:tr>
-              <a:tr h="369824">
-                <a:tc>
-                  <a:txBody>
-                    <a:bodyPr wrap="square"/>
-                    <a:lstStyle/>
-                    <a:p>
-                      <a:r>
-                        <a:rPr sz="1000" b="0">
-                          <a:ea typeface="맑은 고딕"/>
-                          <a:cs typeface="맑은 고딕"/>
-                        </a:rPr>
-                        <a:t>TokaFormer · EAST 지식증류 (2025 ~ 26)</a:t>
-                      </a:r>
-                    </a:p>
-                  </a:txBody>
-                  <a:tcPr marL="54864" marR="54864" marT="18288" marB="18288" anchor="ctr"/>
-                </a:tc>
-                <a:tc>
-                  <a:txBody>
-                    <a:bodyPr wrap="square"/>
-                    <a:lstStyle/>
-                    <a:p>
-                      <a:r>
-                        <a:rPr sz="1000" b="0">
-                          <a:ea typeface="맑은 고딕"/>
-                          <a:cs typeface="맑은 고딕"/>
-                        </a:rPr>
-                        <a:t>붕괴 예측. 1D conv 임베딩 → 모달리티별 Transformer 후기 융합</a:t>
-                      </a:r>
-                    </a:p>
-                  </a:txBody>
-                  <a:tcPr marL="54864" marR="54864" marT="18288" marB="18288" anchor="ctr"/>
-                </a:tc>
-                <a:tc>
-                  <a:txBody>
-                    <a:bodyPr wrap="square"/>
-                    <a:lstStyle/>
-                    <a:p>
-                      <a:r>
-                        <a:rPr sz="1000" b="0">
-                          <a:ea typeface="맑은 고딕"/>
-                          <a:cs typeface="맑은 고딕"/>
-                        </a:rPr>
-                        <a:t>20 μs Mirnov와 1 ms 스칼라의 융합</a:t>
-                      </a:r>
-                    </a:p>
-                  </a:txBody>
-                  <a:tcPr marL="54864" marR="54864" marT="18288" marB="18288" anchor="ctr"/>
-                </a:tc>
-                <a:tc>
-                  <a:txBody>
-                    <a:bodyPr wrap="square"/>
-                    <a:lstStyle/>
-                    <a:p>
-                      <a:r>
-                        <a:rPr sz="1000" b="0">
-                          <a:ea typeface="맑은 고딕"/>
-                          <a:cs typeface="맑은 고딕"/>
-                        </a:rPr>
-                        <a:t>CNN + Transformer가 주류인 곳은 붕괴 예측이며 회귀 천장 문제가 아니다</a:t>
-                      </a:r>
-                    </a:p>
-                  </a:txBody>
-                  <a:tcPr marL="54864" marR="54864" marT="18288" marB="18288" anchor="ctr"/>
-                </a:tc>
-              </a:tr>
-              <a:tr h="369824">
-                <a:tc>
-                  <a:txBody>
-                    <a:bodyPr wrap="square"/>
-                    <a:lstStyle/>
-                    <a:p>
-                      <a:r>
-                        <a:rPr sz="1000" b="0">
-                          <a:ea typeface="맑은 고딕"/>
-                          <a:cs typeface="맑은 고딕"/>
-                        </a:rPr>
-                        <a:t>WEST (2026)</a:t>
-                      </a:r>
-                    </a:p>
-                  </a:txBody>
-                  <a:tcPr marL="54864" marR="54864" marT="18288" marB="18288" anchor="ctr"/>
-                </a:tc>
-                <a:tc>
-                  <a:txBody>
-                    <a:bodyPr wrap="square"/>
-                    <a:lstStyle/>
-                    <a:p>
-                      <a:r>
-                        <a:rPr sz="1000" b="0">
-                          <a:ea typeface="맑은 고딕"/>
-                          <a:cs typeface="맑은 고딕"/>
-                        </a:rPr>
-                        <a:t>사전 방전 설정 → 전역 파라미터. Transformer / LSTM / MLP 비교</a:t>
-                      </a:r>
-                    </a:p>
-                  </a:txBody>
-                  <a:tcPr marL="54864" marR="54864" marT="18288" marB="18288" anchor="ctr"/>
-                </a:tc>
-                <a:tc>
-                  <a:txBody>
-                    <a:bodyPr wrap="square"/>
-                    <a:lstStyle/>
-                    <a:p>
-                      <a:r>
-                        <a:rPr sz="1000" b="0">
-                          <a:ea typeface="맑은 고딕"/>
-                          <a:cs typeface="맑은 고딕"/>
-                        </a:rPr>
-                        <a:t>550 방전. MSE 0.0096 / 0.015 / 0.022</a:t>
-                      </a:r>
-                    </a:p>
-                  </a:txBody>
-                  <a:tcPr marL="54864" marR="54864" marT="18288" marB="18288" anchor="ctr"/>
-                </a:tc>
-                <a:tc>
-                  <a:txBody>
-                    <a:bodyPr wrap="square"/>
-                    <a:lstStyle/>
-                    <a:p>
-                      <a:r>
-                        <a:rPr sz="1000" b="0">
-                          <a:ea typeface="맑은 고딕"/>
-                          <a:cs typeface="맑은 고딕"/>
-                        </a:rPr>
-                        <a:t>작은 데이터에서 Transformer가 이긴 사례이나 10 ~ 70 s 장기 의존 과제이다</a:t>
-                      </a:r>
-                    </a:p>
-                  </a:txBody>
-                  <a:tcPr marL="54864" marR="54864" marT="18288" marB="18288" anchor="ctr"/>
-                </a:tc>
-              </a:tr>
-              <a:tr h="527304">
-                <a:tc>
-                  <a:txBody>
-                    <a:bodyPr wrap="square"/>
-                    <a:lstStyle/>
-                    <a:p>
-                      <a:r>
-                        <a:rPr sz="1000" b="0">
-                          <a:ea typeface="맑은 고딕"/>
-                          <a:cs typeface="맑은 고딕"/>
-                        </a:rPr>
-                        <a:t>EAST XCS ANN (NF 2024)</a:t>
-                      </a:r>
-                    </a:p>
-                  </a:txBody>
-                  <a:tcPr marL="54864" marR="54864" marT="18288" marB="18288" anchor="ctr"/>
-                </a:tc>
-                <a:tc>
-                  <a:txBody>
-                    <a:bodyPr wrap="square"/>
-                    <a:lstStyle/>
-                    <a:p>
-                      <a:r>
-                        <a:rPr sz="1000" b="0">
-                          <a:ea typeface="맑은 고딕"/>
-                          <a:cs typeface="맑은 고딕"/>
-                        </a:rPr>
-                        <a:t>X선 결정 분광 스펙트럼 → Tᵢ · 회전. 2 × 9 DNN, 31k CNN</a:t>
-                      </a:r>
-                    </a:p>
-                  </a:txBody>
-                  <a:tcPr marL="54864" marR="54864" marT="18288" marB="18288" anchor="ctr"/>
-                </a:tc>
-                <a:tc>
-                  <a:txBody>
-                    <a:bodyPr wrap="square"/>
-                    <a:lstStyle/>
-                    <a:p>
-                      <a:r>
-                        <a:rPr sz="1000" b="0">
-                          <a:ea typeface="맑은 고딕"/>
-                          <a:cs typeface="맑은 고딕"/>
-                        </a:rPr>
-                        <a:t>530 방전, R² 0.96, 시간 이력 없음</a:t>
-                      </a:r>
-                    </a:p>
-                  </a:txBody>
-                  <a:tcPr marL="54864" marR="54864" marT="18288" marB="18288" anchor="ctr"/>
-                </a:tc>
-                <a:tc>
-                  <a:txBody>
-                    <a:bodyPr wrap="square"/>
-                    <a:lstStyle/>
-                    <a:p>
-                      <a:r>
-                        <a:rPr sz="1000" b="0">
-                          <a:ea typeface="맑은 고딕"/>
-                          <a:cs typeface="맑은 고딕"/>
-                        </a:rPr>
-                        <a:t>회전을 실제로 추론한 선례이며 입력은 도플러 분광이다. 우리의 V_rot 경로가 어떤 입력을 확보해야 하는지를 가리킨다</a:t>
-                      </a:r>
-                    </a:p>
-                  </a:txBody>
-                  <a:tcPr marL="54864" marR="54864" marT="18288" marB="18288" anchor="ctr"/>
-                </a:tc>
-              </a:tr>
-              <a:tr h="369824">
-                <a:tc>
-                  <a:txBody>
-                    <a:bodyPr wrap="square"/>
-                    <a:lstStyle/>
-                    <a:p>
-                      <a:r>
-                        <a:rPr sz="1000" b="0">
-                          <a:ea typeface="맑은 고딕"/>
-                          <a:cs typeface="맑은 고딕"/>
-                        </a:rPr>
-                        <a:t>TCV 멀티모달 VAE (2025) · Abbate 물리 + 데이터 메타학습 (NF 2025)</a:t>
-                      </a:r>
-                    </a:p>
-                  </a:txBody>
-                  <a:tcPr marL="54864" marR="54864" marT="18288" marB="18288" anchor="ctr"/>
-                </a:tc>
-                <a:tc>
-                  <a:txBody>
-                    <a:bodyPr wrap="square"/>
-                    <a:lstStyle/>
-                    <a:p>
-                      <a:r>
-                        <a:rPr sz="1000" b="0">
-                          <a:ea typeface="맑은 고딕"/>
-                          <a:cs typeface="맑은 고딕"/>
-                        </a:rPr>
-                        <a:t>상태 감시용 순차 VAE · 물리 모델로 외삽</a:t>
-                      </a:r>
-                    </a:p>
-                  </a:txBody>
-                  <a:tcPr marL="54864" marR="54864" marT="18288" marB="18288" anchor="ctr"/>
-                </a:tc>
-                <a:tc>
-                  <a:txBody>
-                    <a:bodyPr wrap="square"/>
-                    <a:lstStyle/>
-                    <a:p>
-                      <a:r>
-                        <a:rPr sz="1000" b="0">
-                          <a:ea typeface="맑은 고딕"/>
-                          <a:cs typeface="맑은 고딕"/>
-                        </a:rPr>
-                        <a:t>1,600 방전 · 외삽 5 ~ 10 % 개선</a:t>
-                      </a:r>
-                    </a:p>
-                  </a:txBody>
-                  <a:tcPr marL="54864" marR="54864" marT="18288" marB="18288" anchor="ctr"/>
-                </a:tc>
-                <a:tc>
-                  <a:txBody>
-                    <a:bodyPr wrap="square"/>
-                    <a:lstStyle/>
-                    <a:p>
-                      <a:r>
-                        <a:rPr sz="1000" b="0">
-                          <a:ea typeface="맑은 고딕"/>
-                          <a:cs typeface="맑은 고딕"/>
-                        </a:rPr>
-                        <a:t>VAE의 용도는 해석 · 이상탐지이고, 물리 모델은 외삽을 맡는다</a:t>
+              <a:tr h="385571">
+                <a:tc>
+                  <a:txBody>
+                    <a:bodyPr wrap="square"/>
+                    <a:lstStyle/>
+                    <a:p>
+                      <a:r>
+                        <a:rPr sz="1050" b="0">
+                          <a:ea typeface="맑은 고딕"/>
+                          <a:cs typeface="맑은 고딕"/>
+                        </a:rPr>
+                        <a:t>PanoMHD</a:t>
+                      </a:r>
+                    </a:p>
+                  </a:txBody>
+                  <a:tcPr marL="54864" marR="54864" marT="18288" marB="18288" anchor="ctr"/>
+                </a:tc>
+                <a:tc>
+                  <a:txBody>
+                    <a:bodyPr wrap="square"/>
+                    <a:lstStyle/>
+                    <a:p>
+                      <a:r>
+                        <a:rPr sz="1050" b="0">
+                          <a:ea typeface="맑은 고딕"/>
+                          <a:cs typeface="맑은 고딕"/>
+                        </a:rPr>
+                        <a:t>KSTAR</a:t>
+                      </a:r>
+                    </a:p>
+                  </a:txBody>
+                  <a:tcPr marL="54864" marR="54864" marT="18288" marB="18288" anchor="ctr"/>
+                </a:tc>
+                <a:tc>
+                  <a:txBody>
+                    <a:bodyPr wrap="square"/>
+                    <a:lstStyle/>
+                    <a:p>
+                      <a:r>
+                        <a:rPr sz="1050" b="0">
+                          <a:ea typeface="맑은 고딕"/>
+                          <a:cs typeface="맑은 고딕"/>
+                        </a:rPr>
+                        <a:t>2026</a:t>
+                      </a:r>
+                    </a:p>
+                  </a:txBody>
+                  <a:tcPr marL="54864" marR="54864" marT="18288" marB="18288" anchor="ctr"/>
+                </a:tc>
+                <a:tc>
+                  <a:txBody>
+                    <a:bodyPr wrap="square"/>
+                    <a:lstStyle/>
+                    <a:p>
+                      <a:r>
+                        <a:rPr sz="1050" b="0">
+                          <a:ea typeface="맑은 고딕"/>
+                          <a:cs typeface="맑은 고딕"/>
+                        </a:rPr>
+                        <a:t>Mirnov만으로 βN·H89·L/H</a:t>
+                      </a:r>
+                    </a:p>
+                  </a:txBody>
+                  <a:tcPr marL="54864" marR="54864" marT="18288" marB="18288" anchor="ctr"/>
+                </a:tc>
+                <a:tc>
+                  <a:txBody>
+                    <a:bodyPr wrap="square"/>
+                    <a:lstStyle/>
+                    <a:p>
+                      <a:r>
+                        <a:rPr sz="1050" b="0">
+                          <a:ea typeface="맑은 고딕"/>
+                          <a:cs typeface="맑은 고딕"/>
+                        </a:rPr>
+                        <a:t>VQ-VAE 토큰 + 457M GPT-2</a:t>
+                      </a:r>
+                    </a:p>
+                  </a:txBody>
+                  <a:tcPr marL="54864" marR="54864" marT="18288" marB="18288" anchor="ctr"/>
+                </a:tc>
+                <a:tc>
+                  <a:txBody>
+                    <a:bodyPr wrap="square"/>
+                    <a:lstStyle/>
+                    <a:p>
+                      <a:r>
+                        <a:rPr sz="1050" b="0">
+                          <a:ea typeface="맑은 고딕"/>
+                          <a:cs typeface="맑은 고딕"/>
+                        </a:rPr>
+                        <a:t>978 방전, 2 MHz 원시 MC</a:t>
+                      </a:r>
+                    </a:p>
+                  </a:txBody>
+                  <a:tcPr marL="54864" marR="54864" marT="18288" marB="18288" anchor="ctr"/>
+                </a:tc>
+                <a:tc>
+                  <a:txBody>
+                    <a:bodyPr wrap="square"/>
+                    <a:lstStyle/>
+                    <a:p>
+                      <a:r>
+                        <a:rPr sz="1050" b="0">
+                          <a:ea typeface="맑은 고딕"/>
+                          <a:cs typeface="맑은 고딕"/>
+                        </a:rPr>
+                        <a:t>KSTAR에서 이산 코드북이 작동한 선례. 단 원시 μs MC 기준이라 B.6가 전제</a:t>
                       </a:r>
                     </a:p>
                   </a:txBody>
@@ -22826,26 +23930,63 @@
           <a:lstStyle/>
           <a:p>
             <a:r>
-              <a:rPr b="0" sz="2650">
-                <a:ea typeface="맑은 고딕"/>
-                <a:cs typeface="맑은 고딕"/>
-              </a:rPr>
-              <a:t>문헌 조사 (2/4): 일반 시계열 · 센서 예측의 주류와 본 데이터에 대한 판정</a:t>
+              <a:rPr b="0" sz="2250">
+                <a:ea typeface="맑은 고딕"/>
+                <a:cs typeface="맑은 고딕"/>
+              </a:rPr>
+              <a:t>문헌 조사 (1/4, 2쪽): 핵융합의 진단-대-진단 추정은 여전히 단순한 구조가 주류이다</a:t>
+            </a:r>
+          </a:p>
+        </p:txBody>
+      </p:sp>
+      <p:sp>
+        <p:nvSpPr>
+          <p:cNvPr id="3" name="TextBox 2"/>
+          <p:cNvSpPr txBox="1"/>
+          <p:nvPr/>
+        </p:nvSpPr>
+        <p:spPr>
+          <a:xfrm>
+            <a:off x="585216" y="2029967"/>
+            <a:ext cx="11027664" cy="297688"/>
+          </a:xfrm>
+          <a:prstGeom prst="rect">
+            <a:avLst/>
+          </a:prstGeom>
+          <a:noFill/>
+        </p:spPr>
+        <p:txBody>
+          <a:bodyPr wrap="square">
+            <a:spAutoFit/>
+          </a:bodyPr>
+          <a:lstStyle/>
+          <a:p>
+            <a:pPr>
+              <a:spcAft>
+                <a:spcPts val="300"/>
+              </a:spcAft>
+            </a:pPr>
+            <a:r>
+              <a:rPr sz="1300">
+                <a:ea typeface="맑은 고딕"/>
+                <a:cs typeface="맑은 고딕"/>
+              </a:rPr>
+              <a:t>장치와 연도를 따로 두었다.</a:t>
             </a:r>
           </a:p>
         </p:txBody>
       </p:sp>
       <p:graphicFrame>
         <p:nvGraphicFramePr>
-          <p:cNvPr id="3" name="Table 2"/>
+          <p:cNvPr id="4" name="Table 3"/>
           <p:cNvGraphicFramePr>
             <a:graphicFrameLocks noGrp="1"/>
           </p:cNvGraphicFramePr>
           <p:nvPr/>
         </p:nvGraphicFramePr>
         <p:xfrm>
-          <a:off x="585216" y="2029967"/>
-          <a:ext cx="11027662" cy="3760216"/>
+          <a:off x="585216" y="2400807"/>
+          <a:ext cx="11027661" cy="3201924"/>
         </p:xfrm>
         <a:graphic>
           <a:graphicData uri="http://schemas.openxmlformats.org/drawingml/2006/table">
@@ -22854,10 +23995,13 @@
                 <a:tableStyleId>{5C22544A-7EE6-4342-B048-85BDC9FD1C3A}</a:tableStyleId>
               </a:tblPr>
               <a:tblGrid>
-                <a:gridCol w="1988595"/>
-                <a:gridCol w="2711720"/>
-                <a:gridCol w="3525236"/>
-                <a:gridCol w="2802111"/>
+                <a:gridCol w="1552631"/>
+                <a:gridCol w="836032"/>
+                <a:gridCol w="676788"/>
+                <a:gridCol w="1473009"/>
+                <a:gridCol w="2428474"/>
+                <a:gridCol w="1234142"/>
+                <a:gridCol w="2826585"/>
               </a:tblGrid>
               <a:tr h="274320">
                 <a:tc>
@@ -22866,653 +24010,791 @@
                     <a:lstStyle/>
                     <a:p>
                       <a:r>
-                        <a:rPr sz="1000" b="1">
-                          <a:ea typeface="맑은 고딕"/>
-                          <a:cs typeface="맑은 고딕"/>
-                        </a:rPr>
-                        <a:t>방법군</a:t>
-                      </a:r>
-                    </a:p>
-                  </a:txBody>
-                  <a:tcPr marL="54864" marR="54864" marT="18288" marB="18288" anchor="ctr"/>
-                </a:tc>
-                <a:tc>
-                  <a:txBody>
-                    <a:bodyPr wrap="square"/>
-                    <a:lstStyle/>
-                    <a:p>
-                      <a:r>
-                        <a:rPr sz="1000" b="1">
-                          <a:ea typeface="맑은 고딕"/>
-                          <a:cs typeface="맑은 고딕"/>
-                        </a:rPr>
-                        <a:t>대표 (연도)</a:t>
-                      </a:r>
-                    </a:p>
-                  </a:txBody>
-                  <a:tcPr marL="54864" marR="54864" marT="18288" marB="18288" anchor="ctr"/>
-                </a:tc>
-                <a:tc>
-                  <a:txBody>
-                    <a:bodyPr wrap="square"/>
-                    <a:lstStyle/>
-                    <a:p>
-                      <a:r>
-                        <a:rPr sz="1000" b="1">
-                          <a:ea typeface="맑은 고딕"/>
-                          <a:cs typeface="맑은 고딕"/>
-                        </a:rPr>
-                        <a:t>문헌의 주장</a:t>
-                      </a:r>
-                    </a:p>
-                  </a:txBody>
-                  <a:tcPr marL="54864" marR="54864" marT="18288" marB="18288" anchor="ctr"/>
-                </a:tc>
-                <a:tc>
-                  <a:txBody>
-                    <a:bodyPr wrap="square"/>
-                    <a:lstStyle/>
-                    <a:p>
-                      <a:r>
-                        <a:rPr sz="1000" b="1">
-                          <a:ea typeface="맑은 고딕"/>
-                          <a:cs typeface="맑은 고딕"/>
-                        </a:rPr>
-                        <a:t>본 데이터에 대한 판정</a:t>
+                        <a:rPr sz="1100" b="1">
+                          <a:ea typeface="맑은 고딕"/>
+                          <a:cs typeface="맑은 고딕"/>
+                        </a:rPr>
+                        <a:t>논문</a:t>
+                      </a:r>
+                    </a:p>
+                  </a:txBody>
+                  <a:tcPr marL="54864" marR="54864" marT="18288" marB="18288" anchor="ctr"/>
+                </a:tc>
+                <a:tc>
+                  <a:txBody>
+                    <a:bodyPr wrap="square"/>
+                    <a:lstStyle/>
+                    <a:p>
+                      <a:r>
+                        <a:rPr sz="1100" b="1">
+                          <a:ea typeface="맑은 고딕"/>
+                          <a:cs typeface="맑은 고딕"/>
+                        </a:rPr>
+                        <a:t>장치</a:t>
+                      </a:r>
+                    </a:p>
+                  </a:txBody>
+                  <a:tcPr marL="54864" marR="54864" marT="18288" marB="18288" anchor="ctr"/>
+                </a:tc>
+                <a:tc>
+                  <a:txBody>
+                    <a:bodyPr wrap="square"/>
+                    <a:lstStyle/>
+                    <a:p>
+                      <a:r>
+                        <a:rPr sz="1100" b="1">
+                          <a:ea typeface="맑은 고딕"/>
+                          <a:cs typeface="맑은 고딕"/>
+                        </a:rPr>
+                        <a:t>연도</a:t>
+                      </a:r>
+                    </a:p>
+                  </a:txBody>
+                  <a:tcPr marL="54864" marR="54864" marT="18288" marB="18288" anchor="ctr"/>
+                </a:tc>
+                <a:tc>
+                  <a:txBody>
+                    <a:bodyPr wrap="square"/>
+                    <a:lstStyle/>
+                    <a:p>
+                      <a:r>
+                        <a:rPr sz="1100" b="1">
+                          <a:ea typeface="맑은 고딕"/>
+                          <a:cs typeface="맑은 고딕"/>
+                        </a:rPr>
+                        <a:t>문제</a:t>
+                      </a:r>
+                    </a:p>
+                  </a:txBody>
+                  <a:tcPr marL="54864" marR="54864" marT="18288" marB="18288" anchor="ctr"/>
+                </a:tc>
+                <a:tc>
+                  <a:txBody>
+                    <a:bodyPr wrap="square"/>
+                    <a:lstStyle/>
+                    <a:p>
+                      <a:r>
+                        <a:rPr sz="1100" b="1">
+                          <a:ea typeface="맑은 고딕"/>
+                          <a:cs typeface="맑은 고딕"/>
+                        </a:rPr>
+                        <a:t>구조</a:t>
+                      </a:r>
+                    </a:p>
+                  </a:txBody>
+                  <a:tcPr marL="54864" marR="54864" marT="18288" marB="18288" anchor="ctr"/>
+                </a:tc>
+                <a:tc>
+                  <a:txBody>
+                    <a:bodyPr wrap="square"/>
+                    <a:lstStyle/>
+                    <a:p>
+                      <a:r>
+                        <a:rPr sz="1100" b="1">
+                          <a:ea typeface="맑은 고딕"/>
+                          <a:cs typeface="맑은 고딕"/>
+                        </a:rPr>
+                        <a:t>데이터</a:t>
+                      </a:r>
+                    </a:p>
+                  </a:txBody>
+                  <a:tcPr marL="54864" marR="54864" marT="18288" marB="18288" anchor="ctr"/>
+                </a:tc>
+                <a:tc>
+                  <a:txBody>
+                    <a:bodyPr wrap="square"/>
+                    <a:lstStyle/>
+                    <a:p>
+                      <a:r>
+                        <a:rPr sz="1100" b="1">
+                          <a:ea typeface="맑은 고딕"/>
+                          <a:cs typeface="맑은 고딕"/>
+                        </a:rPr>
+                        <a:t>우리에게 의미</a:t>
                       </a:r>
                     </a:p>
                   </a:txBody>
                   <a:tcPr marL="54864" marR="54864" marT="18288" marB="18288" anchor="ctr"/>
                 </a:tc>
               </a:tr>
-              <a:tr h="527304">
-                <a:tc>
-                  <a:txBody>
-                    <a:bodyPr wrap="square"/>
-                    <a:lstStyle/>
-                    <a:p>
-                      <a:r>
-                        <a:rPr sz="1000" b="0">
-                          <a:ea typeface="맑은 고딕"/>
-                          <a:cs typeface="맑은 고딕"/>
-                        </a:rPr>
-                        <a:t>결측 대체 (imputation)</a:t>
-                      </a:r>
-                    </a:p>
-                  </a:txBody>
-                  <a:tcPr marL="54864" marR="54864" marT="18288" marB="18288" anchor="ctr"/>
-                </a:tc>
-                <a:tc>
-                  <a:txBody>
-                    <a:bodyPr wrap="square"/>
-                    <a:lstStyle/>
-                    <a:p>
-                      <a:r>
-                        <a:rPr sz="1000" b="0">
-                          <a:ea typeface="맑은 고딕"/>
-                          <a:cs typeface="맑은 고딕"/>
-                        </a:rPr>
-                        <a:t>TSI-Bench 28개 (2024) · STDiff (2025)</a:t>
-                      </a:r>
-                    </a:p>
-                  </a:txBody>
-                  <a:tcPr marL="54864" marR="54864" marT="18288" marB="18288" anchor="ctr"/>
-                </a:tc>
-                <a:tc>
-                  <a:txBody>
-                    <a:bodyPr wrap="square"/>
-                    <a:lstStyle/>
-                    <a:p>
-                      <a:r>
-                        <a:rPr sz="1000" b="0">
-                          <a:ea typeface="맑은 고딕"/>
-                          <a:cs typeface="맑은 고딕"/>
-                        </a:rPr>
-                        <a:t>점 결측에선 선형보간이 딥러닝 전부를 이기는 데이터셋이 있고 블록 결측에서만 딥이 필요하다. 윈도 기반은 긴 공백에서 평탄화된다</a:t>
-                      </a:r>
-                    </a:p>
-                  </a:txBody>
-                  <a:tcPr marL="54864" marR="54864" marT="18288" marB="18288" anchor="ctr"/>
-                </a:tc>
-                <a:tc>
-                  <a:txBody>
-                    <a:bodyPr wrap="square"/>
-                    <a:lstStyle/>
-                    <a:p>
-                      <a:r>
-                        <a:rPr sz="1000" b="0">
-                          <a:ea typeface="맑은 고딕"/>
-                          <a:cs typeface="맑은 고딕"/>
-                        </a:rPr>
-                        <a:t>GP 동률(§8p)의 문헌 재확인. seq_v2는 이미 상태전이형이다</a:t>
+              <a:tr h="401320">
+                <a:tc>
+                  <a:txBody>
+                    <a:bodyPr wrap="square"/>
+                    <a:lstStyle/>
+                    <a:p>
+                      <a:r>
+                        <a:rPr sz="1100" b="0">
+                          <a:ea typeface="맑은 고딕"/>
+                          <a:cs typeface="맑은 고딕"/>
+                        </a:rPr>
+                        <a:t>멀티모달 VAE</a:t>
+                      </a:r>
+                    </a:p>
+                  </a:txBody>
+                  <a:tcPr marL="54864" marR="54864" marT="18288" marB="18288" anchor="ctr"/>
+                </a:tc>
+                <a:tc>
+                  <a:txBody>
+                    <a:bodyPr wrap="square"/>
+                    <a:lstStyle/>
+                    <a:p>
+                      <a:r>
+                        <a:rPr sz="1100" b="0">
+                          <a:ea typeface="맑은 고딕"/>
+                          <a:cs typeface="맑은 고딕"/>
+                        </a:rPr>
+                        <a:t>TCV</a:t>
+                      </a:r>
+                    </a:p>
+                  </a:txBody>
+                  <a:tcPr marL="54864" marR="54864" marT="18288" marB="18288" anchor="ctr"/>
+                </a:tc>
+                <a:tc>
+                  <a:txBody>
+                    <a:bodyPr wrap="square"/>
+                    <a:lstStyle/>
+                    <a:p>
+                      <a:r>
+                        <a:rPr sz="1100" b="0">
+                          <a:ea typeface="맑은 고딕"/>
+                          <a:cs typeface="맑은 고딕"/>
+                        </a:rPr>
+                        <a:t>2025</a:t>
+                      </a:r>
+                    </a:p>
+                  </a:txBody>
+                  <a:tcPr marL="54864" marR="54864" marT="18288" marB="18288" anchor="ctr"/>
+                </a:tc>
+                <a:tc>
+                  <a:txBody>
+                    <a:bodyPr wrap="square"/>
+                    <a:lstStyle/>
+                    <a:p>
+                      <a:r>
+                        <a:rPr sz="1100" b="0">
+                          <a:ea typeface="맑은 고딕"/>
+                          <a:cs typeface="맑은 고딕"/>
+                        </a:rPr>
+                        <a:t>상태 감시·붕괴 유형</a:t>
+                      </a:r>
+                    </a:p>
+                  </a:txBody>
+                  <a:tcPr marL="54864" marR="54864" marT="18288" marB="18288" anchor="ctr"/>
+                </a:tc>
+                <a:tc>
+                  <a:txBody>
+                    <a:bodyPr wrap="square"/>
+                    <a:lstStyle/>
+                    <a:p>
+                      <a:r>
+                        <a:rPr sz="1100" b="0">
+                          <a:ea typeface="맑은 고딕"/>
+                          <a:cs typeface="맑은 고딕"/>
+                        </a:rPr>
+                        <a:t>모달리티별 인코더의 순차 VAE</a:t>
+                      </a:r>
+                    </a:p>
+                  </a:txBody>
+                  <a:tcPr marL="54864" marR="54864" marT="18288" marB="18288" anchor="ctr"/>
+                </a:tc>
+                <a:tc>
+                  <a:txBody>
+                    <a:bodyPr wrap="square"/>
+                    <a:lstStyle/>
+                    <a:p>
+                      <a:r>
+                        <a:rPr sz="1100" b="0">
+                          <a:ea typeface="맑은 고딕"/>
+                          <a:cs typeface="맑은 고딕"/>
+                        </a:rPr>
+                        <a:t>1,600 방전</a:t>
+                      </a:r>
+                    </a:p>
+                  </a:txBody>
+                  <a:tcPr marL="54864" marR="54864" marT="18288" marB="18288" anchor="ctr"/>
+                </a:tc>
+                <a:tc>
+                  <a:txBody>
+                    <a:bodyPr wrap="square"/>
+                    <a:lstStyle/>
+                    <a:p>
+                      <a:r>
+                        <a:rPr sz="1100" b="0">
+                          <a:ea typeface="맑은 고딕"/>
+                          <a:cs typeface="맑은 고딕"/>
+                        </a:rPr>
+                        <a:t>VAE 용도는 회귀 정확도가 아니라 해석·이상탐지</a:t>
                       </a:r>
                     </a:p>
                   </a:txBody>
                   <a:tcPr marL="54864" marR="54864" marT="18288" marB="18288" anchor="ctr"/>
                 </a:tc>
               </a:tr>
-              <a:tr h="369824">
-                <a:tc>
-                  <a:txBody>
-                    <a:bodyPr wrap="square"/>
-                    <a:lstStyle/>
-                    <a:p>
-                      <a:r>
-                        <a:rPr sz="1000" b="0">
-                          <a:ea typeface="맑은 고딕"/>
-                          <a:cs typeface="맑은 고딕"/>
-                        </a:rPr>
-                        <a:t>불규칙 샘플링</a:t>
-                      </a:r>
-                    </a:p>
-                  </a:txBody>
-                  <a:tcPr marL="54864" marR="54864" marT="18288" marB="18288" anchor="ctr"/>
-                </a:tc>
-                <a:tc>
-                  <a:txBody>
-                    <a:bodyPr wrap="square"/>
-                    <a:lstStyle/>
-                    <a:p>
-                      <a:r>
-                        <a:rPr sz="1000" b="0">
-                          <a:ea typeface="맑은 고딕"/>
-                          <a:cs typeface="맑은 고딕"/>
-                        </a:rPr>
-                        <a:t>Neural CDE · mTAN · ContiFormer · iTimER (2025)</a:t>
-                      </a:r>
-                    </a:p>
-                  </a:txBody>
-                  <a:tcPr marL="54864" marR="54864" marT="18288" marB="18288" anchor="ctr"/>
-                </a:tc>
-                <a:tc>
-                  <a:txBody>
-                    <a:bodyPr wrap="square"/>
-                    <a:lstStyle/>
-                    <a:p>
-                      <a:r>
-                        <a:rPr sz="1000" b="0">
-                          <a:ea typeface="맑은 고딕"/>
-                          <a:cs typeface="맑은 고딕"/>
-                        </a:rPr>
-                        <a:t>연속시간 ODE와 어텐션이 주류</a:t>
-                      </a:r>
-                    </a:p>
-                  </a:txBody>
-                  <a:tcPr marL="54864" marR="54864" marT="18288" marB="18288" anchor="ctr"/>
-                </a:tc>
-                <a:tc>
-                  <a:txBody>
-                    <a:bodyPr wrap="square"/>
-                    <a:lstStyle/>
-                    <a:p>
-                      <a:r>
-                        <a:rPr sz="1000" b="0">
-                          <a:ea typeface="맑은 고딕"/>
-                          <a:cs typeface="맑은 고딕"/>
-                        </a:rPr>
-                        <a:t>격자는 규칙 10 ms이고 결측만 있다. staleness 채널로 처리 완료 (§8e)</a:t>
+              <a:tr h="574548">
+                <a:tc>
+                  <a:txBody>
+                    <a:bodyPr wrap="square"/>
+                    <a:lstStyle/>
+                    <a:p>
+                      <a:r>
+                        <a:rPr sz="1100" b="0">
+                          <a:ea typeface="맑은 고딕"/>
+                          <a:cs typeface="맑은 고딕"/>
+                        </a:rPr>
+                        <a:t>TokaFormer, EAST 지식증류</a:t>
+                      </a:r>
+                    </a:p>
+                  </a:txBody>
+                  <a:tcPr marL="54864" marR="54864" marT="18288" marB="18288" anchor="ctr"/>
+                </a:tc>
+                <a:tc>
+                  <a:txBody>
+                    <a:bodyPr wrap="square"/>
+                    <a:lstStyle/>
+                    <a:p>
+                      <a:r>
+                        <a:rPr sz="1100" b="0">
+                          <a:ea typeface="맑은 고딕"/>
+                          <a:cs typeface="맑은 고딕"/>
+                        </a:rPr>
+                        <a:t>EAST 외</a:t>
+                      </a:r>
+                    </a:p>
+                  </a:txBody>
+                  <a:tcPr marL="54864" marR="54864" marT="18288" marB="18288" anchor="ctr"/>
+                </a:tc>
+                <a:tc>
+                  <a:txBody>
+                    <a:bodyPr wrap="square"/>
+                    <a:lstStyle/>
+                    <a:p>
+                      <a:r>
+                        <a:rPr sz="1100" b="0">
+                          <a:ea typeface="맑은 고딕"/>
+                          <a:cs typeface="맑은 고딕"/>
+                        </a:rPr>
+                        <a:t>2025 ~ 26</a:t>
+                      </a:r>
+                    </a:p>
+                  </a:txBody>
+                  <a:tcPr marL="54864" marR="54864" marT="18288" marB="18288" anchor="ctr"/>
+                </a:tc>
+                <a:tc>
+                  <a:txBody>
+                    <a:bodyPr wrap="square"/>
+                    <a:lstStyle/>
+                    <a:p>
+                      <a:r>
+                        <a:rPr sz="1100" b="0">
+                          <a:ea typeface="맑은 고딕"/>
+                          <a:cs typeface="맑은 고딕"/>
+                        </a:rPr>
+                        <a:t>붕괴 예측</a:t>
+                      </a:r>
+                    </a:p>
+                  </a:txBody>
+                  <a:tcPr marL="54864" marR="54864" marT="18288" marB="18288" anchor="ctr"/>
+                </a:tc>
+                <a:tc>
+                  <a:txBody>
+                    <a:bodyPr wrap="square"/>
+                    <a:lstStyle/>
+                    <a:p>
+                      <a:r>
+                        <a:rPr sz="1100" b="0">
+                          <a:ea typeface="맑은 고딕"/>
+                          <a:cs typeface="맑은 고딕"/>
+                        </a:rPr>
+                        <a:t>1D conv 임베딩 후 모달리티별 Transformer(dual tower), 후기 융합</a:t>
+                      </a:r>
+                    </a:p>
+                  </a:txBody>
+                  <a:tcPr marL="54864" marR="54864" marT="18288" marB="18288" anchor="ctr"/>
+                </a:tc>
+                <a:tc>
+                  <a:txBody>
+                    <a:bodyPr wrap="square"/>
+                    <a:lstStyle/>
+                    <a:p>
+                      <a:r>
+                        <a:rPr sz="1100" b="0">
+                          <a:ea typeface="맑은 고딕"/>
+                          <a:cs typeface="맑은 고딕"/>
+                        </a:rPr>
+                        <a:t>20 μs Mirnov + 1 ms 스칼라</a:t>
+                      </a:r>
+                    </a:p>
+                  </a:txBody>
+                  <a:tcPr marL="54864" marR="54864" marT="18288" marB="18288" anchor="ctr"/>
+                </a:tc>
+                <a:tc>
+                  <a:txBody>
+                    <a:bodyPr wrap="square"/>
+                    <a:lstStyle/>
+                    <a:p>
+                      <a:r>
+                        <a:rPr sz="1100" b="0">
+                          <a:ea typeface="맑은 고딕"/>
+                          <a:cs typeface="맑은 고딕"/>
+                        </a:rPr>
+                        <a:t>CNN+Transformer가 주류인 곳은 붕괴 예측. 20 μs Mirnov와 1 ms 스칼라의 융합 문제이지 회귀 천장 문제가 아님</a:t>
                       </a:r>
                     </a:p>
                   </a:txBody>
                   <a:tcPr marL="54864" marR="54864" marT="18288" marB="18288" anchor="ctr"/>
                 </a:tc>
               </a:tr>
-              <a:tr h="369824">
-                <a:tc>
-                  <a:txBody>
-                    <a:bodyPr wrap="square"/>
-                    <a:lstStyle/>
-                    <a:p>
-                      <a:r>
-                        <a:rPr sz="1000" b="0">
-                          <a:ea typeface="맑은 고딕"/>
-                          <a:cs typeface="맑은 고딕"/>
-                        </a:rPr>
-                        <a:t>예측 백본 논쟁</a:t>
-                      </a:r>
-                    </a:p>
-                  </a:txBody>
-                  <a:tcPr marL="54864" marR="54864" marT="18288" marB="18288" anchor="ctr"/>
-                </a:tc>
-                <a:tc>
-                  <a:txBody>
-                    <a:bodyPr wrap="square"/>
-                    <a:lstStyle/>
-                    <a:p>
-                      <a:r>
-                        <a:rPr sz="1000" b="0">
-                          <a:ea typeface="맑은 고딕"/>
-                          <a:cs typeface="맑은 고딕"/>
-                        </a:rPr>
-                        <a:t>DLinear vs PatchTST · iTransformer · TimeXer (2024), Mamba 혼합, xLSTM</a:t>
-                      </a:r>
-                    </a:p>
-                  </a:txBody>
-                  <a:tcPr marL="54864" marR="54864" marT="18288" marB="18288" anchor="ctr"/>
-                </a:tc>
-                <a:tc>
-                  <a:txBody>
-                    <a:bodyPr wrap="square"/>
-                    <a:lstStyle/>
-                    <a:p>
-                      <a:r>
-                        <a:rPr sz="1000" b="0">
-                          <a:ea typeface="맑은 고딕"/>
-                          <a:cs typeface="맑은 고딕"/>
-                        </a:rPr>
-                        <a:t>계열 우열이 데이터마다 뒤집힌다</a:t>
-                      </a:r>
-                    </a:p>
-                  </a:txBody>
-                  <a:tcPr marL="54864" marR="54864" marT="18288" marB="18288" anchor="ctr"/>
-                </a:tc>
-                <a:tc>
-                  <a:txBody>
-                    <a:bodyPr wrap="square"/>
-                    <a:lstStyle/>
-                    <a:p>
-                      <a:r>
-                        <a:rPr sz="1000" b="0">
-                          <a:ea typeface="맑은 고딕"/>
-                          <a:cs typeface="맑은 고딕"/>
-                        </a:rPr>
-                        <a:t>B.9와 정합. 150 ms · 10k 파라미터 위에선 계열이 무관하다</a:t>
+              <a:tr h="401320">
+                <a:tc>
+                  <a:txBody>
+                    <a:bodyPr wrap="square"/>
+                    <a:lstStyle/>
+                    <a:p>
+                      <a:r>
+                        <a:rPr sz="1100" b="0">
+                          <a:ea typeface="맑은 고딕"/>
+                          <a:cs typeface="맑은 고딕"/>
+                        </a:rPr>
+                        <a:t>WEST</a:t>
+                      </a:r>
+                    </a:p>
+                  </a:txBody>
+                  <a:tcPr marL="54864" marR="54864" marT="18288" marB="18288" anchor="ctr"/>
+                </a:tc>
+                <a:tc>
+                  <a:txBody>
+                    <a:bodyPr wrap="square"/>
+                    <a:lstStyle/>
+                    <a:p>
+                      <a:r>
+                        <a:rPr sz="1100" b="0">
+                          <a:ea typeface="맑은 고딕"/>
+                          <a:cs typeface="맑은 고딕"/>
+                        </a:rPr>
+                        <a:t>WEST</a:t>
+                      </a:r>
+                    </a:p>
+                  </a:txBody>
+                  <a:tcPr marL="54864" marR="54864" marT="18288" marB="18288" anchor="ctr"/>
+                </a:tc>
+                <a:tc>
+                  <a:txBody>
+                    <a:bodyPr wrap="square"/>
+                    <a:lstStyle/>
+                    <a:p>
+                      <a:r>
+                        <a:rPr sz="1100" b="0">
+                          <a:ea typeface="맑은 고딕"/>
+                          <a:cs typeface="맑은 고딕"/>
+                        </a:rPr>
+                        <a:t>2026</a:t>
+                      </a:r>
+                    </a:p>
+                  </a:txBody>
+                  <a:tcPr marL="54864" marR="54864" marT="18288" marB="18288" anchor="ctr"/>
+                </a:tc>
+                <a:tc>
+                  <a:txBody>
+                    <a:bodyPr wrap="square"/>
+                    <a:lstStyle/>
+                    <a:p>
+                      <a:r>
+                        <a:rPr sz="1100" b="0">
+                          <a:ea typeface="맑은 고딕"/>
+                          <a:cs typeface="맑은 고딕"/>
+                        </a:rPr>
+                        <a:t>사전 방전 설정으로 전역 파라미터</a:t>
+                      </a:r>
+                    </a:p>
+                  </a:txBody>
+                  <a:tcPr marL="54864" marR="54864" marT="18288" marB="18288" anchor="ctr"/>
+                </a:tc>
+                <a:tc>
+                  <a:txBody>
+                    <a:bodyPr wrap="square"/>
+                    <a:lstStyle/>
+                    <a:p>
+                      <a:r>
+                        <a:rPr sz="1100" b="0">
+                          <a:ea typeface="맑은 고딕"/>
+                          <a:cs typeface="맑은 고딕"/>
+                        </a:rPr>
+                        <a:t>Transformer 0.0096 &lt; LSTM 0.015 &lt; MLP 0.022 MSE</a:t>
+                      </a:r>
+                    </a:p>
+                  </a:txBody>
+                  <a:tcPr marL="54864" marR="54864" marT="18288" marB="18288" anchor="ctr"/>
+                </a:tc>
+                <a:tc>
+                  <a:txBody>
+                    <a:bodyPr wrap="square"/>
+                    <a:lstStyle/>
+                    <a:p>
+                      <a:r>
+                        <a:rPr sz="1100" b="0">
+                          <a:ea typeface="맑은 고딕"/>
+                          <a:cs typeface="맑은 고딕"/>
+                        </a:rPr>
+                        <a:t>550 방전, 1.2만 윈도</a:t>
+                      </a:r>
+                    </a:p>
+                  </a:txBody>
+                  <a:tcPr marL="54864" marR="54864" marT="18288" marB="18288" anchor="ctr"/>
+                </a:tc>
+                <a:tc>
+                  <a:txBody>
+                    <a:bodyPr wrap="square"/>
+                    <a:lstStyle/>
+                    <a:p>
+                      <a:r>
+                        <a:rPr sz="1100" b="0">
+                          <a:ea typeface="맑은 고딕"/>
+                          <a:cs typeface="맑은 고딕"/>
+                        </a:rPr>
+                        <a:t>작은 데이터에서 Transformer가 이긴 사례. 단 10 ~ 70 s 장기 의존 과제</a:t>
                       </a:r>
                     </a:p>
                   </a:txBody>
                   <a:tcPr marL="54864" marR="54864" marT="18288" marB="18288" anchor="ctr"/>
                 </a:tc>
               </a:tr>
-              <a:tr h="369824">
-                <a:tc>
-                  <a:txBody>
-                    <a:bodyPr wrap="square"/>
-                    <a:lstStyle/>
-                    <a:p>
-                      <a:r>
-                        <a:rPr sz="1000" b="0">
-                          <a:ea typeface="맑은 고딕"/>
-                          <a:cs typeface="맑은 고딕"/>
-                        </a:rPr>
-                        <a:t>파운데이션 모델</a:t>
-                      </a:r>
-                    </a:p>
-                  </a:txBody>
-                  <a:tcPr marL="54864" marR="54864" marT="18288" marB="18288" anchor="ctr"/>
-                </a:tc>
-                <a:tc>
-                  <a:txBody>
-                    <a:bodyPr wrap="square"/>
-                    <a:lstStyle/>
-                    <a:p>
-                      <a:r>
-                        <a:rPr sz="1000" b="0">
-                          <a:ea typeface="맑은 고딕"/>
-                          <a:cs typeface="맑은 고딕"/>
-                        </a:rPr>
-                        <a:t>Chronos-2 (120M) · TiRex-2 (xLSTM, 스트리밍) · TabPFN-TS (11M) · Toto</a:t>
-                      </a:r>
-                    </a:p>
-                  </a:txBody>
-                  <a:tcPr marL="54864" marR="54864" marT="18288" marB="18288" anchor="ctr"/>
-                </a:tc>
-                <a:tc>
-                  <a:txBody>
-                    <a:bodyPr wrap="square"/>
-                    <a:lstStyle/>
-                    <a:p>
-                      <a:r>
-                        <a:rPr sz="1000" b="0">
-                          <a:ea typeface="맑은 고딕"/>
-                          <a:cs typeface="맑은 고딕"/>
-                        </a:rPr>
-                        <a:t>제로샷으로 강하다. 단 벤치마크 오염 경고(데이터셋 93 %가 어딘가의 사전학습에 쓰임)</a:t>
-                      </a:r>
-                    </a:p>
-                  </a:txBody>
-                  <a:tcPr marL="54864" marR="54864" marT="18288" marB="18288" anchor="ctr"/>
-                </a:tc>
-                <a:tc>
-                  <a:txBody>
-                    <a:bodyPr wrap="square"/>
-                    <a:lstStyle/>
-                    <a:p>
-                      <a:r>
-                        <a:rPr sz="1000" b="0">
-                          <a:ea typeface="맑은 고딕"/>
-                          <a:cs typeface="맑은 고딕"/>
-                        </a:rPr>
-                        <a:t>KSTAR는 오염이 불가능하다. 학습 없는 대조군으로 가치가 있다</a:t>
+              <a:tr h="747776">
+                <a:tc>
+                  <a:txBody>
+                    <a:bodyPr wrap="square"/>
+                    <a:lstStyle/>
+                    <a:p>
+                      <a:r>
+                        <a:rPr sz="1100" b="0">
+                          <a:ea typeface="맑은 고딕"/>
+                          <a:cs typeface="맑은 고딕"/>
+                        </a:rPr>
+                        <a:t>EAST XCS ANN (NF)</a:t>
+                      </a:r>
+                    </a:p>
+                  </a:txBody>
+                  <a:tcPr marL="54864" marR="54864" marT="18288" marB="18288" anchor="ctr"/>
+                </a:tc>
+                <a:tc>
+                  <a:txBody>
+                    <a:bodyPr wrap="square"/>
+                    <a:lstStyle/>
+                    <a:p>
+                      <a:r>
+                        <a:rPr sz="1100" b="0">
+                          <a:ea typeface="맑은 고딕"/>
+                          <a:cs typeface="맑은 고딕"/>
+                        </a:rPr>
+                        <a:t>EAST</a:t>
+                      </a:r>
+                    </a:p>
+                  </a:txBody>
+                  <a:tcPr marL="54864" marR="54864" marT="18288" marB="18288" anchor="ctr"/>
+                </a:tc>
+                <a:tc>
+                  <a:txBody>
+                    <a:bodyPr wrap="square"/>
+                    <a:lstStyle/>
+                    <a:p>
+                      <a:r>
+                        <a:rPr sz="1100" b="0">
+                          <a:ea typeface="맑은 고딕"/>
+                          <a:cs typeface="맑은 고딕"/>
+                        </a:rPr>
+                        <a:t>2024</a:t>
+                      </a:r>
+                    </a:p>
+                  </a:txBody>
+                  <a:tcPr marL="54864" marR="54864" marT="18288" marB="18288" anchor="ctr"/>
+                </a:tc>
+                <a:tc>
+                  <a:txBody>
+                    <a:bodyPr wrap="square"/>
+                    <a:lstStyle/>
+                    <a:p>
+                      <a:r>
+                        <a:rPr sz="1100" b="0">
+                          <a:ea typeface="맑은 고딕"/>
+                          <a:cs typeface="맑은 고딕"/>
+                        </a:rPr>
+                        <a:t>스펙트럼으로 Ti·회전</a:t>
+                      </a:r>
+                    </a:p>
+                  </a:txBody>
+                  <a:tcPr marL="54864" marR="54864" marT="18288" marB="18288" anchor="ctr"/>
+                </a:tc>
+                <a:tc>
+                  <a:txBody>
+                    <a:bodyPr wrap="square"/>
+                    <a:lstStyle/>
+                    <a:p>
+                      <a:r>
+                        <a:rPr sz="1100" b="0">
+                          <a:ea typeface="맑은 고딕"/>
+                          <a:cs typeface="맑은 고딕"/>
+                        </a:rPr>
+                        <a:t>2×9 DNN, 31k CNN, R² 0.96</a:t>
+                      </a:r>
+                    </a:p>
+                  </a:txBody>
+                  <a:tcPr marL="54864" marR="54864" marT="18288" marB="18288" anchor="ctr"/>
+                </a:tc>
+                <a:tc>
+                  <a:txBody>
+                    <a:bodyPr wrap="square"/>
+                    <a:lstStyle/>
+                    <a:p>
+                      <a:r>
+                        <a:rPr sz="1100" b="0">
+                          <a:ea typeface="맑은 고딕"/>
+                          <a:cs typeface="맑은 고딕"/>
+                        </a:rPr>
+                        <a:t>530 방전</a:t>
+                      </a:r>
+                    </a:p>
+                  </a:txBody>
+                  <a:tcPr marL="54864" marR="54864" marT="18288" marB="18288" anchor="ctr"/>
+                </a:tc>
+                <a:tc>
+                  <a:txBody>
+                    <a:bodyPr wrap="square"/>
+                    <a:lstStyle/>
+                    <a:p>
+                      <a:r>
+                        <a:rPr sz="1100" b="0">
+                          <a:ea typeface="맑은 고딕"/>
+                          <a:cs typeface="맑은 고딕"/>
+                        </a:rPr>
+                        <a:t>회전을 예측하는 유일한 논문도 입력이 회전 측정 자체(스펙트럼). 우리 V_rot 경로가 어떤 입력을 확보해야 하는지를 가리킴 — B.6 μs Mirnov · NBI 토크 채널</a:t>
                       </a:r>
                     </a:p>
                   </a:txBody>
                   <a:tcPr marL="54864" marR="54864" marT="18288" marB="18288" anchor="ctr"/>
                 </a:tc>
               </a:tr>
-              <a:tr h="369824">
-                <a:tc>
-                  <a:txBody>
-                    <a:bodyPr wrap="square"/>
-                    <a:lstStyle/>
-                    <a:p>
-                      <a:r>
-                        <a:rPr sz="1000" b="0">
-                          <a:ea typeface="맑은 고딕"/>
-                          <a:cs typeface="맑은 고딕"/>
-                        </a:rPr>
-                        <a:t>자기지도 사전학습</a:t>
-                      </a:r>
-                    </a:p>
-                  </a:txBody>
-                  <a:tcPr marL="54864" marR="54864" marT="18288" marB="18288" anchor="ctr"/>
-                </a:tc>
-                <a:tc>
-                  <a:txBody>
-                    <a:bodyPr wrap="square"/>
-                    <a:lstStyle/>
-                    <a:p>
-                      <a:r>
-                        <a:rPr sz="1000" b="0">
-                          <a:ea typeface="맑은 고딕"/>
-                          <a:cs typeface="맑은 고딕"/>
-                        </a:rPr>
-                        <a:t>TimeMAE (2026) · Ti-MAE · TokEye (핵융합, 2026)</a:t>
-                      </a:r>
-                    </a:p>
-                  </a:txBody>
-                  <a:tcPr marL="54864" marR="54864" marT="18288" marB="18288" anchor="ctr"/>
-                </a:tc>
-                <a:tc>
-                  <a:txBody>
-                    <a:bodyPr wrap="square"/>
-                    <a:lstStyle/>
-                    <a:p>
-                      <a:r>
-                        <a:rPr sz="1000" b="0">
-                          <a:ea typeface="맑은 고딕"/>
-                          <a:cs typeface="맑은 고딕"/>
-                        </a:rPr>
-                        <a:t>라벨이 희소할 때 이득</a:t>
-                      </a:r>
-                    </a:p>
-                  </a:txBody>
-                  <a:tcPr marL="54864" marR="54864" marT="18288" marB="18288" anchor="ctr"/>
-                </a:tc>
-                <a:tc>
-                  <a:txBody>
-                    <a:bodyPr wrap="square"/>
-                    <a:lstStyle/>
-                    <a:p>
-                      <a:r>
-                        <a:rPr sz="1000" b="0">
-                          <a:ea typeface="맑은 고딕"/>
-                          <a:cs typeface="맑은 고딕"/>
-                        </a:rPr>
-                        <a:t>Tᵢ 라벨은 92 % 관측이고 TokaMind의 프로파일 이득은 음수이다</a:t>
+              <a:tr h="401320">
+                <a:tc>
+                  <a:txBody>
+                    <a:bodyPr wrap="square"/>
+                    <a:lstStyle/>
+                    <a:p>
+                      <a:r>
+                        <a:rPr sz="1100" b="0">
+                          <a:ea typeface="맑은 고딕"/>
+                          <a:cs typeface="맑은 고딕"/>
+                        </a:rPr>
+                        <a:t>Abbate 등 (NF)</a:t>
+                      </a:r>
+                    </a:p>
+                  </a:txBody>
+                  <a:tcPr marL="54864" marR="54864" marT="18288" marB="18288" anchor="ctr"/>
+                </a:tc>
+                <a:tc>
+                  <a:txBody>
+                    <a:bodyPr wrap="square"/>
+                    <a:lstStyle/>
+                    <a:p>
+                      <a:r>
+                        <a:rPr sz="1100" b="0">
+                          <a:ea typeface="맑은 고딕"/>
+                          <a:cs typeface="맑은 고딕"/>
+                        </a:rPr>
+                        <a:t>DIII-D · AUG</a:t>
+                      </a:r>
+                    </a:p>
+                  </a:txBody>
+                  <a:tcPr marL="54864" marR="54864" marT="18288" marB="18288" anchor="ctr"/>
+                </a:tc>
+                <a:tc>
+                  <a:txBody>
+                    <a:bodyPr wrap="square"/>
+                    <a:lstStyle/>
+                    <a:p>
+                      <a:r>
+                        <a:rPr sz="1100" b="0">
+                          <a:ea typeface="맑은 고딕"/>
+                          <a:cs typeface="맑은 고딕"/>
+                        </a:rPr>
+                        <a:t>2025</a:t>
+                      </a:r>
+                    </a:p>
+                  </a:txBody>
+                  <a:tcPr marL="54864" marR="54864" marT="18288" marB="18288" anchor="ctr"/>
+                </a:tc>
+                <a:tc>
+                  <a:txBody>
+                    <a:bodyPr wrap="square"/>
+                    <a:lstStyle/>
+                    <a:p>
+                      <a:r>
+                        <a:rPr sz="1100" b="0">
+                          <a:ea typeface="맑은 고딕"/>
+                          <a:cs typeface="맑은 고딕"/>
+                        </a:rPr>
+                        <a:t>물리+데이터 메타학습</a:t>
+                      </a:r>
+                    </a:p>
+                  </a:txBody>
+                  <a:tcPr marL="54864" marR="54864" marT="18288" marB="18288" anchor="ctr"/>
+                </a:tc>
+                <a:tc>
+                  <a:txBody>
+                    <a:bodyPr wrap="square"/>
+                    <a:lstStyle/>
+                    <a:p>
+                      <a:r>
+                        <a:rPr sz="1100" b="0">
+                          <a:ea typeface="맑은 고딕"/>
+                          <a:cs typeface="맑은 고딕"/>
+                        </a:rPr>
+                        <a:t>두 모델을 메타학습으로 결합, 저전류 → 고전류 외삽</a:t>
+                      </a:r>
+                    </a:p>
+                  </a:txBody>
+                  <a:tcPr marL="54864" marR="54864" marT="18288" marB="18288" anchor="ctr"/>
+                </a:tc>
+                <a:tc>
+                  <a:txBody>
+                    <a:bodyPr wrap="square"/>
+                    <a:lstStyle/>
+                    <a:p>
+                      <a:r>
+                        <a:rPr sz="1100" b="0">
+                          <a:ea typeface="맑은 고딕"/>
+                          <a:cs typeface="맑은 고딕"/>
+                        </a:rPr>
+                        <a:t>외삽 5 ~ 10 % 개선</a:t>
+                      </a:r>
+                    </a:p>
+                  </a:txBody>
+                  <a:tcPr marL="54864" marR="54864" marT="18288" marB="18288" anchor="ctr"/>
+                </a:tc>
+                <a:tc>
+                  <a:txBody>
+                    <a:bodyPr wrap="square"/>
+                    <a:lstStyle/>
+                    <a:p>
+                      <a:r>
+                        <a:rPr sz="1100" b="0">
+                          <a:ea typeface="맑은 고딕"/>
+                          <a:cs typeface="맑은 고딕"/>
+                        </a:rPr>
+                        <a:t>물리 모델은 외삽 담당</a:t>
                       </a:r>
                     </a:p>
                   </a:txBody>
                   <a:tcPr marL="54864" marR="54864" marT="18288" marB="18288" anchor="ctr"/>
                 </a:tc>
               </a:tr>
-              <a:tr h="369824">
-                <a:tc>
-                  <a:txBody>
-                    <a:bodyPr wrap="square"/>
-                    <a:lstStyle/>
-                    <a:p>
-                      <a:r>
-                        <a:rPr sz="1000" b="0">
-                          <a:ea typeface="맑은 고딕"/>
-                          <a:cs typeface="맑은 고딕"/>
-                        </a:rPr>
-                        <a:t>소프트센서 (공정 산업)</a:t>
-                      </a:r>
-                    </a:p>
-                  </a:txBody>
-                  <a:tcPr marL="54864" marR="54864" marT="18288" marB="18288" anchor="ctr"/>
-                </a:tc>
-                <a:tc>
-                  <a:txBody>
-                    <a:bodyPr wrap="square"/>
-                    <a:lstStyle/>
-                    <a:p>
-                      <a:r>
-                        <a:rPr sz="1000" b="0">
-                          <a:ea typeface="맑은 고딕"/>
-                          <a:cs typeface="맑은 고딕"/>
-                        </a:rPr>
-                        <a:t>반지도 VAE 회귀 · Soft-Sensing Transformer · ConFormer</a:t>
-                      </a:r>
-                    </a:p>
-                  </a:txBody>
-                  <a:tcPr marL="54864" marR="54864" marT="18288" marB="18288" anchor="ctr"/>
-                </a:tc>
-                <a:tc>
-                  <a:txBody>
-                    <a:bodyPr wrap="square"/>
-                    <a:lstStyle/>
-                    <a:p>
-                      <a:r>
-                        <a:rPr sz="1000" b="0">
-                          <a:ea typeface="맑은 고딕"/>
-                          <a:cs typeface="맑은 고딕"/>
-                        </a:rPr>
-                        <a:t>반지도가 핵심. MLP 백본이 Transformer와 동급인 보고도 있다</a:t>
-                      </a:r>
-                    </a:p>
-                  </a:txBody>
-                  <a:tcPr marL="54864" marR="54864" marT="18288" marB="18288" anchor="ctr"/>
-                </a:tc>
-                <a:tc>
-                  <a:txBody>
-                    <a:bodyPr wrap="square"/>
-                    <a:lstStyle/>
-                    <a:p>
-                      <a:r>
-                        <a:rPr sz="1000" b="0">
-                          <a:ea typeface="맑은 고딕"/>
-                          <a:cs typeface="맑은 고딕"/>
-                        </a:rPr>
-                        <a:t>Tᵢ에는 반지도 이득 조건이 없다. V_rot는 라벨이 아니라 입력을 늘리는 문제로 남아 있다</a:t>
-                      </a:r>
-                    </a:p>
-                  </a:txBody>
-                  <a:tcPr marL="54864" marR="54864" marT="18288" marB="18288" anchor="ctr"/>
-                </a:tc>
-              </a:tr>
-              <a:tr h="369824">
-                <a:tc>
-                  <a:txBody>
-                    <a:bodyPr wrap="square"/>
-                    <a:lstStyle/>
-                    <a:p>
-                      <a:r>
-                        <a:rPr sz="1000" b="0">
-                          <a:ea typeface="맑은 고딕"/>
-                          <a:cs typeface="맑은 고딕"/>
-                        </a:rPr>
-                        <a:t>MoE · 레짐 게이팅</a:t>
-                      </a:r>
-                    </a:p>
-                  </a:txBody>
-                  <a:tcPr marL="54864" marR="54864" marT="18288" marB="18288" anchor="ctr"/>
-                </a:tc>
-                <a:tc>
-                  <a:txBody>
-                    <a:bodyPr wrap="square"/>
-                    <a:lstStyle/>
-                    <a:p>
-                      <a:r>
-                        <a:rPr sz="1000" b="0">
-                          <a:ea typeface="맑은 고딕"/>
-                          <a:cs typeface="맑은 고딕"/>
-                        </a:rPr>
-                        <a:t>RG-ResMoE (2026) · Dynamic TMoE</a:t>
-                      </a:r>
-                    </a:p>
-                  </a:txBody>
-                  <a:tcPr marL="54864" marR="54864" marT="18288" marB="18288" anchor="ctr"/>
-                </a:tc>
-                <a:tc>
-                  <a:txBody>
-                    <a:bodyPr wrap="square"/>
-                    <a:lstStyle/>
-                    <a:p>
-                      <a:r>
-                        <a:rPr sz="1000" b="0">
-                          <a:ea typeface="맑은 고딕"/>
-                          <a:cs typeface="맑은 고딕"/>
-                        </a:rPr>
-                        <a:t>동결 기저 + 잔차 전문가 + soft 게이트. hard top-1 라우팅은 유의하게 열세</a:t>
-                      </a:r>
-                    </a:p>
-                  </a:txBody>
-                  <a:tcPr marL="54864" marR="54864" marT="18288" marB="18288" anchor="ctr"/>
-                </a:tc>
-                <a:tc>
-                  <a:txBody>
-                    <a:bodyPr wrap="square"/>
-                    <a:lstStyle/>
-                    <a:p>
-                      <a:r>
-                        <a:rPr sz="1000" b="0">
-                          <a:ea typeface="맑은 고딕"/>
-                          <a:cs typeface="맑은 고딕"/>
-                        </a:rPr>
-                        <a:t>B.11(hard argmin VQ)의 직접 선례. soft 게이트 자매 팔이 필요하다</a:t>
-                      </a:r>
-                    </a:p>
-                  </a:txBody>
-                  <a:tcPr marL="54864" marR="54864" marT="18288" marB="18288" anchor="ctr"/>
-                </a:tc>
-              </a:tr>
-              <a:tr h="369824">
-                <a:tc>
-                  <a:txBody>
-                    <a:bodyPr wrap="square"/>
-                    <a:lstStyle/>
-                    <a:p>
-                      <a:r>
-                        <a:rPr sz="1000" b="0">
-                          <a:ea typeface="맑은 고딕"/>
-                          <a:cs typeface="맑은 고딕"/>
-                        </a:rPr>
-                        <a:t>학습 상태추정</a:t>
-                      </a:r>
-                    </a:p>
-                  </a:txBody>
-                  <a:tcPr marL="54864" marR="54864" marT="18288" marB="18288" anchor="ctr"/>
-                </a:tc>
-                <a:tc>
-                  <a:txBody>
-                    <a:bodyPr wrap="square"/>
-                    <a:lstStyle/>
-                    <a:p>
-                      <a:r>
-                        <a:rPr sz="1000" b="0">
-                          <a:ea typeface="맑은 고딕"/>
-                          <a:cs typeface="맑은 고딕"/>
-                        </a:rPr>
-                        <a:t>KalmanNet · Bayesian KalmanNet (2025) · DLFM (2025)</a:t>
-                      </a:r>
-                    </a:p>
-                  </a:txBody>
-                  <a:tcPr marL="54864" marR="54864" marT="18288" marB="18288" anchor="ctr"/>
-                </a:tc>
-                <a:tc>
-                  <a:txBody>
-                    <a:bodyPr wrap="square"/>
-                    <a:lstStyle/>
-                    <a:p>
-                      <a:r>
-                        <a:rPr sz="1000" b="0">
-                          <a:ea typeface="맑은 고딕"/>
-                          <a:cs typeface="맑은 고딕"/>
-                        </a:rPr>
-                        <a:t>프로세스 모델은 두고 칼만 이득만 학습한다</a:t>
-                      </a:r>
-                    </a:p>
-                  </a:txBody>
-                  <a:tcPr marL="54864" marR="54864" marT="18288" marB="18288" anchor="ctr"/>
-                </a:tc>
-                <a:tc>
-                  <a:txBody>
-                    <a:bodyPr wrap="square"/>
-                    <a:lstStyle/>
-                    <a:p>
-                      <a:r>
-                        <a:rPr sz="1000" b="0">
-                          <a:ea typeface="맑은 고딕"/>
-                          <a:cs typeface="맑은 고딕"/>
-                        </a:rPr>
-                        <a:t>'persistence 신뢰 / 보정' 스위치의 원리적 형태이다</a:t>
-                      </a:r>
-                    </a:p>
-                  </a:txBody>
-                  <a:tcPr marL="54864" marR="54864" marT="18288" marB="18288" anchor="ctr"/>
-                </a:tc>
-              </a:tr>
-              <a:tr h="369824">
-                <a:tc>
-                  <a:txBody>
-                    <a:bodyPr wrap="square"/>
-                    <a:lstStyle/>
-                    <a:p>
-                      <a:r>
-                        <a:rPr sz="1000" b="0">
-                          <a:ea typeface="맑은 고딕"/>
-                          <a:cs typeface="맑은 고딕"/>
-                        </a:rPr>
-                        <a:t>이분산 · 강건 회귀</a:t>
-                      </a:r>
-                    </a:p>
-                  </a:txBody>
-                  <a:tcPr marL="54864" marR="54864" marT="18288" marB="18288" anchor="ctr"/>
-                </a:tc>
-                <a:tc>
-                  <a:txBody>
-                    <a:bodyPr wrap="square"/>
-                    <a:lstStyle/>
-                    <a:p>
-                      <a:r>
-                        <a:rPr sz="1000" b="0">
-                          <a:ea typeface="맑은 고딕"/>
-                          <a:cs typeface="맑은 고딕"/>
-                        </a:rPr>
-                        <a:t>가우시안 NLL 병리 (2023) · β-NLL · Student-t 헤드</a:t>
-                      </a:r>
-                    </a:p>
-                  </a:txBody>
-                  <a:tcPr marL="54864" marR="54864" marT="18288" marB="18288" anchor="ctr"/>
-                </a:tc>
-                <a:tc>
-                  <a:txBody>
-                    <a:bodyPr wrap="square"/>
-                    <a:lstStyle/>
-                    <a:p>
-                      <a:r>
-                        <a:rPr sz="1000" b="0">
-                          <a:ea typeface="맑은 고딕"/>
-                          <a:cs typeface="맑은 고딕"/>
-                        </a:rPr>
-                        <a:t>예측 분산이 평균의 그래디언트를 오염시켜 stop-grad가 필요하다</a:t>
-                      </a:r>
-                    </a:p>
-                  </a:txBody>
-                  <a:tcPr marL="54864" marR="54864" marT="18288" marB="18288" anchor="ctr"/>
-                </a:tc>
-                <a:tc>
-                  <a:txBody>
-                    <a:bodyPr wrap="square"/>
-                    <a:lstStyle/>
-                    <a:p>
-                      <a:r>
-                        <a:rPr sz="1000" b="0">
-                          <a:ea typeface="맑은 고딕"/>
-                          <a:cs typeface="맑은 고딕"/>
-                        </a:rPr>
-                        <a:t>§8aq가 지목한 유일하게 열리지 않은 축이다</a:t>
+              <a:tr h="401320">
+                <a:tc>
+                  <a:txBody>
+                    <a:bodyPr wrap="square"/>
+                    <a:lstStyle/>
+                    <a:p>
+                      <a:r>
+                        <a:rPr sz="1100" b="0">
+                          <a:ea typeface="맑은 고딕"/>
+                          <a:cs typeface="맑은 고딕"/>
+                        </a:rPr>
+                        <a:t>코일 shot-to-shot</a:t>
+                      </a:r>
+                    </a:p>
+                  </a:txBody>
+                  <a:tcPr marL="54864" marR="54864" marT="18288" marB="18288" anchor="ctr"/>
+                </a:tc>
+                <a:tc>
+                  <a:txBody>
+                    <a:bodyPr wrap="square"/>
+                    <a:lstStyle/>
+                    <a:p>
+                      <a:r>
+                        <a:rPr sz="1100" b="0">
+                          <a:ea typeface="맑은 고딕"/>
+                          <a:cs typeface="맑은 고딕"/>
+                        </a:rPr>
+                        <a:t>DIII-D</a:t>
+                      </a:r>
+                    </a:p>
+                  </a:txBody>
+                  <a:tcPr marL="54864" marR="54864" marT="18288" marB="18288" anchor="ctr"/>
+                </a:tc>
+                <a:tc>
+                  <a:txBody>
+                    <a:bodyPr wrap="square"/>
+                    <a:lstStyle/>
+                    <a:p>
+                      <a:r>
+                        <a:rPr sz="1100" b="0">
+                          <a:ea typeface="맑은 고딕"/>
+                          <a:cs typeface="맑은 고딕"/>
+                        </a:rPr>
+                        <a:t>2026</a:t>
+                      </a:r>
+                    </a:p>
+                  </a:txBody>
+                  <a:tcPr marL="54864" marR="54864" marT="18288" marB="18288" anchor="ctr"/>
+                </a:tc>
+                <a:tc>
+                  <a:txBody>
+                    <a:bodyPr wrap="square"/>
+                    <a:lstStyle/>
+                    <a:p>
+                      <a:r>
+                        <a:rPr sz="1100" b="0">
+                          <a:ea typeface="맑은 고딕"/>
+                          <a:cs typeface="맑은 고딕"/>
+                        </a:rPr>
+                        <a:t>방전 간 하드웨어 이동</a:t>
+                      </a:r>
+                    </a:p>
+                  </a:txBody>
+                  <a:tcPr marL="54864" marR="54864" marT="18288" marB="18288" anchor="ctr"/>
+                </a:tc>
+                <a:tc>
+                  <a:txBody>
+                    <a:bodyPr wrap="square"/>
+                    <a:lstStyle/>
+                    <a:p>
+                      <a:r>
+                        <a:rPr sz="1100" b="0">
+                          <a:ea typeface="맑은 고딕"/>
+                          <a:cs typeface="맑은 고딕"/>
+                        </a:rPr>
+                        <a:t>토로이달 자장 코일 디지털 트윈 + 온라인 학습</a:t>
+                      </a:r>
+                    </a:p>
+                  </a:txBody>
+                  <a:tcPr marL="54864" marR="54864" marT="18288" marB="18288" anchor="ctr"/>
+                </a:tc>
+                <a:tc>
+                  <a:txBody>
+                    <a:bodyPr wrap="square"/>
+                    <a:lstStyle/>
+                    <a:p>
+                      <a:r>
+                        <a:rPr sz="1100" b="0">
+                          <a:ea typeface="맑은 고딕"/>
+                          <a:cs typeface="맑은 고딕"/>
+                        </a:rPr>
+                        <a:t>정적 모델 대비 오차 80 % 감소</a:t>
+                      </a:r>
+                    </a:p>
+                  </a:txBody>
+                  <a:tcPr marL="54864" marR="54864" marT="18288" marB="18288" anchor="ctr"/>
+                </a:tc>
+                <a:tc>
+                  <a:txBody>
+                    <a:bodyPr wrap="square"/>
+                    <a:lstStyle/>
+                    <a:p>
+                      <a:r>
+                        <a:rPr sz="1100" b="0">
+                          <a:ea typeface="맑은 고딕"/>
+                          <a:cs typeface="맑은 고딕"/>
+                        </a:rPr>
+                        <a:t>캠페인 드리프트(§8n)의 처방이 우리 shot별 표준화와 같은 방향</a:t>
                       </a:r>
                     </a:p>
                   </a:txBody>
@@ -23562,11 +24844,11 @@
           <a:lstStyle/>
           <a:p>
             <a:r>
-              <a:rPr b="0" sz="2800">
-                <a:ea typeface="맑은 고딕"/>
-                <a:cs typeface="맑은 고딕"/>
-              </a:rPr>
-              <a:t>문헌 조사 (3/4): 구조적으로 동형인 분야에서 반복되는 교훈</a:t>
+              <a:rPr b="0" sz="2450">
+                <a:ea typeface="맑은 고딕"/>
+                <a:cs typeface="맑은 고딕"/>
+              </a:rPr>
+              <a:t>문헌 조사 (2/4, 1쪽): 일반 시계열 · 센서 예측의 주류와 본 데이터에 대한 판정</a:t>
             </a:r>
           </a:p>
         </p:txBody>
@@ -23581,7 +24863,7 @@
         </p:nvGraphicFramePr>
         <p:xfrm>
           <a:off x="585216" y="2029967"/>
-          <a:ext cx="11027662" cy="2428240"/>
+          <a:ext cx="11027662" cy="3493516"/>
         </p:xfrm>
         <a:graphic>
           <a:graphicData uri="http://schemas.openxmlformats.org/drawingml/2006/table">
@@ -23590,10 +24872,11 @@
                 <a:tableStyleId>{5C22544A-7EE6-4342-B048-85BDC9FD1C3A}</a:tableStyleId>
               </a:tblPr>
               <a:tblGrid>
-                <a:gridCol w="2350157"/>
-                <a:gridCol w="2440548"/>
-                <a:gridCol w="3163674"/>
-                <a:gridCol w="3073283"/>
+                <a:gridCol w="1493787"/>
+                <a:gridCol w="834763"/>
+                <a:gridCol w="2284615"/>
+                <a:gridCol w="3470858"/>
+                <a:gridCol w="2943639"/>
               </a:tblGrid>
               <a:tr h="274320">
                 <a:tc>
@@ -23606,7 +24889,7 @@
                           <a:ea typeface="맑은 고딕"/>
                           <a:cs typeface="맑은 고딕"/>
                         </a:rPr>
-                        <a:t>분야</a:t>
+                        <a:t>방법군</a:t>
                       </a:r>
                     </a:p>
                   </a:txBody>
@@ -23622,7 +24905,7 @@
                           <a:ea typeface="맑은 고딕"/>
                           <a:cs typeface="맑은 고딕"/>
                         </a:rPr>
-                        <a:t>동형 관계</a:t>
+                        <a:t>연도</a:t>
                       </a:r>
                     </a:p>
                   </a:txBody>
@@ -23638,7 +24921,7 @@
                           <a:ea typeface="맑은 고딕"/>
                           <a:cs typeface="맑은 고딕"/>
                         </a:rPr>
-                        <a:t>주류 방법</a:t>
+                        <a:t>대표</a:t>
                       </a:r>
                     </a:p>
                   </a:txBody>
@@ -23654,7 +24937,105 @@
                           <a:ea typeface="맑은 고딕"/>
                           <a:cs typeface="맑은 고딕"/>
                         </a:rPr>
-                        <a:t>교훈</a:t>
+                        <a:t>문헌의 주장</a:t>
+                      </a:r>
+                    </a:p>
+                  </a:txBody>
+                  <a:tcPr marL="54864" marR="54864" marT="18288" marB="18288" anchor="ctr"/>
+                </a:tc>
+                <a:tc>
+                  <a:txBody>
+                    <a:bodyPr wrap="square"/>
+                    <a:lstStyle/>
+                    <a:p>
+                      <a:r>
+                        <a:rPr sz="1100" b="1">
+                          <a:ea typeface="맑은 고딕"/>
+                          <a:cs typeface="맑은 고딕"/>
+                        </a:rPr>
+                        <a:t>우리 데이터 판정</a:t>
+                      </a:r>
+                    </a:p>
+                  </a:txBody>
+                  <a:tcPr marL="54864" marR="54864" marT="18288" marB="18288" anchor="ctr"/>
+                </a:tc>
+              </a:tr>
+              <a:tr h="747776">
+                <a:tc>
+                  <a:txBody>
+                    <a:bodyPr wrap="square"/>
+                    <a:lstStyle/>
+                    <a:p>
+                      <a:r>
+                        <a:rPr sz="1100" b="0">
+                          <a:ea typeface="맑은 고딕"/>
+                          <a:cs typeface="맑은 고딕"/>
+                        </a:rPr>
+                        <a:t>결측 대체 (imputation)</a:t>
+                      </a:r>
+                    </a:p>
+                  </a:txBody>
+                  <a:tcPr marL="54864" marR="54864" marT="18288" marB="18288" anchor="ctr"/>
+                </a:tc>
+                <a:tc>
+                  <a:txBody>
+                    <a:bodyPr wrap="square"/>
+                    <a:lstStyle/>
+                    <a:p>
+                      <a:r>
+                        <a:rPr sz="1100" b="0">
+                          <a:ea typeface="맑은 고딕"/>
+                          <a:cs typeface="맑은 고딕"/>
+                        </a:rPr>
+                        <a:t>2024 ~ 25</a:t>
+                      </a:r>
+                    </a:p>
+                  </a:txBody>
+                  <a:tcPr marL="54864" marR="54864" marT="18288" marB="18288" anchor="ctr"/>
+                </a:tc>
+                <a:tc>
+                  <a:txBody>
+                    <a:bodyPr wrap="square"/>
+                    <a:lstStyle/>
+                    <a:p>
+                      <a:r>
+                        <a:rPr sz="1100" b="0">
+                          <a:ea typeface="맑은 고딕"/>
+                          <a:cs typeface="맑은 고딕"/>
+                        </a:rPr>
+                        <a:t>TSI-Bench 28개, STDiff</a:t>
+                      </a:r>
+                    </a:p>
+                  </a:txBody>
+                  <a:tcPr marL="54864" marR="54864" marT="18288" marB="18288" anchor="ctr"/>
+                </a:tc>
+                <a:tc>
+                  <a:txBody>
+                    <a:bodyPr wrap="square"/>
+                    <a:lstStyle/>
+                    <a:p>
+                      <a:r>
+                        <a:rPr sz="1100" b="0">
+                          <a:ea typeface="맑은 고딕"/>
+                          <a:cs typeface="맑은 고딕"/>
+                        </a:rPr>
+                        <a:t>점 결측에선 선형보간이 딥러닝 전부를 이기는 데이터셋 존재(Electricity MAE 0.065 vs 최고 딥 0.102). 블록 결측에서만 딥이 필요. CSDI는 추론 417 s. 윈도 기반은 긴 공백에서 평탄화, 상태전이형이 나음</a:t>
+                      </a:r>
+                    </a:p>
+                  </a:txBody>
+                  <a:tcPr marL="54864" marR="54864" marT="18288" marB="18288" anchor="ctr"/>
+                </a:tc>
+                <a:tc>
+                  <a:txBody>
+                    <a:bodyPr wrap="square"/>
+                    <a:lstStyle/>
+                    <a:p>
+                      <a:r>
+                        <a:rPr sz="1100" b="0">
+                          <a:ea typeface="맑은 고딕"/>
+                          <a:cs typeface="맑은 고딕"/>
+                        </a:rPr>
+                        <a:t>GP 동률(§8p)이 문헌에서 재확인됨. seq_v2는 이미 상태전이형. 확산 대체는 비용 대비 근거 없음</a:t>
                       </a:r>
                     </a:p>
                   </a:txBody>
@@ -23672,7 +25053,7 @@
                           <a:ea typeface="맑은 고딕"/>
                           <a:cs typeface="맑은 고딕"/>
                         </a:rPr>
-                        <a:t>혼합주기 나우캐스팅 MIDAS (경제)</a:t>
+                        <a:t>불규칙 샘플링</a:t>
                       </a:r>
                     </a:p>
                   </a:txBody>
@@ -23688,7 +25069,7 @@
                           <a:ea typeface="맑은 고딕"/>
                           <a:cs typeface="맑은 고딕"/>
                         </a:rPr>
-                        <a:t>고빈도 입력 → 저빈도 타깃</a:t>
+                        <a:t>2025</a:t>
                       </a:r>
                     </a:p>
                   </a:txBody>
@@ -23704,7 +25085,7 @@
                           <a:ea typeface="맑은 고딕"/>
                           <a:cs typeface="맑은 고딕"/>
                         </a:rPr>
-                        <a:t>U-MIDAS + 소형 NN 라그 가중 · GP-MIDAS (2024)</a:t>
+                        <a:t>Neural CDE, mTAN, ContiFormer, iTimER, NCDE 보정기</a:t>
                       </a:r>
                     </a:p>
                   </a:txBody>
@@ -23720,7 +25101,187 @@
                           <a:ea typeface="맑은 고딕"/>
                           <a:cs typeface="맑은 고딕"/>
                         </a:rPr>
-                        <a:t>파라메트릭 라그 구조로 충분하다. reach 사다리 · b3k8과 정합</a:t>
+                        <a:t>연속시간 ODE와 어텐션이 주류, 재구성 오차 분포 정렬이 보완</a:t>
+                      </a:r>
+                    </a:p>
+                  </a:txBody>
+                  <a:tcPr marL="54864" marR="54864" marT="18288" marB="18288" anchor="ctr"/>
+                </a:tc>
+                <a:tc>
+                  <a:txBody>
+                    <a:bodyPr wrap="square"/>
+                    <a:lstStyle/>
+                    <a:p>
+                      <a:r>
+                        <a:rPr sz="1100" b="0">
+                          <a:ea typeface="맑은 고딕"/>
+                          <a:cs typeface="맑은 고딕"/>
+                        </a:rPr>
+                        <a:t>우리 격자는 규칙적 10 ms이고 결측만 있다. staleness 채널로 이미 처리. 불필요 (§8e)</a:t>
+                      </a:r>
+                    </a:p>
+                  </a:txBody>
+                  <a:tcPr marL="54864" marR="54864" marT="18288" marB="18288" anchor="ctr"/>
+                </a:tc>
+              </a:tr>
+              <a:tr h="747776">
+                <a:tc>
+                  <a:txBody>
+                    <a:bodyPr wrap="square"/>
+                    <a:lstStyle/>
+                    <a:p>
+                      <a:r>
+                        <a:rPr sz="1100" b="0">
+                          <a:ea typeface="맑은 고딕"/>
+                          <a:cs typeface="맑은 고딕"/>
+                        </a:rPr>
+                        <a:t>예측 백본 논쟁</a:t>
+                      </a:r>
+                    </a:p>
+                  </a:txBody>
+                  <a:tcPr marL="54864" marR="54864" marT="18288" marB="18288" anchor="ctr"/>
+                </a:tc>
+                <a:tc>
+                  <a:txBody>
+                    <a:bodyPr wrap="square"/>
+                    <a:lstStyle/>
+                    <a:p>
+                      <a:r>
+                        <a:rPr sz="1100" b="0">
+                          <a:ea typeface="맑은 고딕"/>
+                          <a:cs typeface="맑은 고딕"/>
+                        </a:rPr>
+                        <a:t>2024 ~ 26</a:t>
+                      </a:r>
+                    </a:p>
+                  </a:txBody>
+                  <a:tcPr marL="54864" marR="54864" marT="18288" marB="18288" anchor="ctr"/>
+                </a:tc>
+                <a:tc>
+                  <a:txBody>
+                    <a:bodyPr wrap="square"/>
+                    <a:lstStyle/>
+                    <a:p>
+                      <a:r>
+                        <a:rPr sz="1100" b="0">
+                          <a:ea typeface="맑은 고딕"/>
+                          <a:cs typeface="맑은 고딕"/>
+                        </a:rPr>
+                        <a:t>DLinear vs PatchTST/iTransformer, TimeXer(외생변수, NeurIPS 2024), Mamba 하이브리드, xLSTM 부활</a:t>
+                      </a:r>
+                    </a:p>
+                  </a:txBody>
+                  <a:tcPr marL="54864" marR="54864" marT="18288" marB="18288" anchor="ctr"/>
+                </a:tc>
+                <a:tc>
+                  <a:txBody>
+                    <a:bodyPr wrap="square"/>
+                    <a:lstStyle/>
+                    <a:p>
+                      <a:r>
+                        <a:rPr sz="1100" b="0">
+                          <a:ea typeface="맑은 고딕"/>
+                          <a:cs typeface="맑은 고딕"/>
+                        </a:rPr>
+                        <a:t>계열 우열이 데이터마다 뒤집힘</a:t>
+                      </a:r>
+                    </a:p>
+                  </a:txBody>
+                  <a:tcPr marL="54864" marR="54864" marT="18288" marB="18288" anchor="ctr"/>
+                </a:tc>
+                <a:tc>
+                  <a:txBody>
+                    <a:bodyPr wrap="square"/>
+                    <a:lstStyle/>
+                    <a:p>
+                      <a:r>
+                        <a:rPr sz="1100" b="0">
+                          <a:ea typeface="맑은 고딕"/>
+                          <a:cs typeface="맑은 고딕"/>
+                        </a:rPr>
+                        <a:t>B.9 결과와 정합. 위 150 ms · 10k 파라미터에선 계열 무관, 아래에선 conv 우세</a:t>
+                      </a:r>
+                    </a:p>
+                  </a:txBody>
+                  <a:tcPr marL="54864" marR="54864" marT="18288" marB="18288" anchor="ctr"/>
+                </a:tc>
+              </a:tr>
+              <a:tr h="921004">
+                <a:tc>
+                  <a:txBody>
+                    <a:bodyPr wrap="square"/>
+                    <a:lstStyle/>
+                    <a:p>
+                      <a:r>
+                        <a:rPr sz="1100" b="0">
+                          <a:ea typeface="맑은 고딕"/>
+                          <a:cs typeface="맑은 고딕"/>
+                        </a:rPr>
+                        <a:t>파운데이션 모델</a:t>
+                      </a:r>
+                    </a:p>
+                  </a:txBody>
+                  <a:tcPr marL="54864" marR="54864" marT="18288" marB="18288" anchor="ctr"/>
+                </a:tc>
+                <a:tc>
+                  <a:txBody>
+                    <a:bodyPr wrap="square"/>
+                    <a:lstStyle/>
+                    <a:p>
+                      <a:r>
+                        <a:rPr sz="1100" b="0">
+                          <a:ea typeface="맑은 고딕"/>
+                          <a:cs typeface="맑은 고딕"/>
+                        </a:rPr>
+                        <a:t>2025 ~ 26</a:t>
+                      </a:r>
+                    </a:p>
+                  </a:txBody>
+                  <a:tcPr marL="54864" marR="54864" marT="18288" marB="18288" anchor="ctr"/>
+                </a:tc>
+                <a:tc>
+                  <a:txBody>
+                    <a:bodyPr wrap="square"/>
+                    <a:lstStyle/>
+                    <a:p>
+                      <a:r>
+                        <a:rPr sz="1100" b="0">
+                          <a:ea typeface="맑은 고딕"/>
+                          <a:cs typeface="맑은 고딕"/>
+                        </a:rPr>
+                        <a:t>Chronos-2 (120M, 공변량), TiRex-2 (xLSTM, 과거 공변량, 스트리밍 O(1)), Toto (Student-t 혼합 헤드), TabPFN-TS (11M, 합성 사전학습)</a:t>
+                      </a:r>
+                    </a:p>
+                  </a:txBody>
+                  <a:tcPr marL="54864" marR="54864" marT="18288" marB="18288" anchor="ctr"/>
+                </a:tc>
+                <a:tc>
+                  <a:txBody>
+                    <a:bodyPr wrap="square"/>
+                    <a:lstStyle/>
+                    <a:p>
+                      <a:r>
+                        <a:rPr sz="1100" b="0">
+                          <a:ea typeface="맑은 고딕"/>
+                          <a:cs typeface="맑은 고딕"/>
+                        </a:rPr>
+                        <a:t>제로샷으로 강함. 단 벤치마크 오염 경고 — 조사 데이터셋의 7 %만 어떤 사전학습에도 안 쓰였고, 유출 시 MAPE가 7.6 ~ 59 %p 좋아짐</a:t>
+                      </a:r>
+                    </a:p>
+                  </a:txBody>
+                  <a:tcPr marL="54864" marR="54864" marT="18288" marB="18288" anchor="ctr"/>
+                </a:tc>
+                <a:tc>
+                  <a:txBody>
+                    <a:bodyPr wrap="square"/>
+                    <a:lstStyle/>
+                    <a:p>
+                      <a:r>
+                        <a:rPr sz="1100" b="0">
+                          <a:ea typeface="맑은 고딕"/>
+                          <a:cs typeface="맑은 고딕"/>
+                        </a:rPr>
+                        <a:t>KSTAR는 오염 불가능. 학습 없이 반나절에 돌릴 대조군. 지면 천장 재확인, 이기면 큰 발견</a:t>
                       </a:r>
                     </a:p>
                   </a:txBody>
@@ -23738,7 +25299,7 @@
                           <a:ea typeface="맑은 고딕"/>
                           <a:cs typeface="맑은 고딕"/>
                         </a:rPr>
-                        <a:t>저가 센서 보정 (대기질, 2025 ~ 26)</a:t>
+                        <a:t>자기지도 사전학습</a:t>
                       </a:r>
                     </a:p>
                   </a:txBody>
@@ -23754,7 +25315,7 @@
                           <a:ea typeface="맑은 고딕"/>
                           <a:cs typeface="맑은 고딕"/>
                         </a:rPr>
-                        <a:t>밀집 저가 센서 → 희소 기준 측정</a:t>
+                        <a:t>2025 ~ 26</a:t>
                       </a:r>
                     </a:p>
                   </a:txBody>
@@ -23770,7 +25331,7 @@
                           <a:ea typeface="맑은 고딕"/>
                           <a:cs typeface="맑은 고딕"/>
                         </a:rPr>
-                        <a:t>LSTM · GBM. 기준국에서 먼 센서는 도메인 적응</a:t>
+                        <a:t>TimeMAE (WSDM 2026), Ti-MAE, TokEye (핵융합)</a:t>
                       </a:r>
                     </a:p>
                   </a:txBody>
@@ -23786,14 +25347,12 @@
                           <a:ea typeface="맑은 고딕"/>
                           <a:cs typeface="맑은 고딕"/>
                         </a:rPr>
-                        <a:t>캠페인 이동(§8n)과 shot별 표준화(§8s)가 같은 처방이다</a:t>
-                      </a:r>
-                    </a:p>
-                  </a:txBody>
-                  <a:tcPr marL="54864" marR="54864" marT="18288" marB="18288" anchor="ctr"/>
-                </a:tc>
-              </a:tr>
-              <a:tr h="401320">
+                        <a:t>라벨 희소 시 이득</a:t>
+                      </a:r>
+                    </a:p>
+                  </a:txBody>
+                  <a:tcPr marL="54864" marR="54864" marT="18288" marB="18288" anchor="ctr"/>
+                </a:tc>
                 <a:tc>
                   <a:txBody>
                     <a:bodyPr wrap="square"/>
@@ -23804,253 +25363,7 @@
                           <a:ea typeface="맑은 고딕"/>
                           <a:cs typeface="맑은 고딕"/>
                         </a:rPr>
-                        <a:t>커프리스 혈압 PPG (2025 ~ 26)</a:t>
-                      </a:r>
-                    </a:p>
-                  </a:txBody>
-                  <a:tcPr marL="54864" marR="54864" marT="18288" marB="18288" anchor="ctr"/>
-                </a:tc>
-                <a:tc>
-                  <a:txBody>
-                    <a:bodyPr wrap="square"/>
-                    <a:lstStyle/>
-                    <a:p>
-                      <a:r>
-                        <a:rPr sz="1100" b="0">
-                          <a:ea typeface="맑은 고딕"/>
-                          <a:cs typeface="맑은 고딕"/>
-                        </a:rPr>
-                        <a:t>연속 파형 → 간헐 기준값</a:t>
-                      </a:r>
-                    </a:p>
-                  </a:txBody>
-                  <a:tcPr marL="54864" marR="54864" marT="18288" marB="18288" anchor="ctr"/>
-                </a:tc>
-                <a:tc>
-                  <a:txBody>
-                    <a:bodyPr wrap="square"/>
-                    <a:lstStyle/>
-                    <a:p>
-                      <a:r>
-                        <a:rPr sz="1100" b="0">
-                          <a:ea typeface="맑은 고딕"/>
-                          <a:cs typeface="맑은 고딕"/>
-                        </a:rPr>
-                        <a:t>CNN + Transformer 병렬 등. 보정 기반 &gt; 보정 없음</a:t>
-                      </a:r>
-                    </a:p>
-                  </a:txBody>
-                  <a:tcPr marL="54864" marR="54864" marT="18288" marB="18288" anchor="ctr"/>
-                </a:tc>
-                <a:tc>
-                  <a:txBody>
-                    <a:bodyPr wrap="square"/>
-                    <a:lstStyle/>
-                    <a:p>
-                      <a:r>
-                        <a:rPr sz="1100" b="0">
-                          <a:ea typeface="맑은 고딕"/>
-                          <a:cs typeface="맑은 고딕"/>
-                        </a:rPr>
-                        <a:t>개체별 보정이 구조보다 크다 (§8s와 동일)</a:t>
-                      </a:r>
-                    </a:p>
-                  </a:txBody>
-                  <a:tcPr marL="54864" marR="54864" marT="18288" marB="18288" anchor="ctr"/>
-                </a:tc>
-              </a:tr>
-              <a:tr h="274320">
-                <a:tc>
-                  <a:txBody>
-                    <a:bodyPr wrap="square"/>
-                    <a:lstStyle/>
-                    <a:p>
-                      <a:r>
-                        <a:rPr sz="1100" b="0">
-                          <a:ea typeface="맑은 고딕"/>
-                          <a:cs typeface="맑은 고딕"/>
-                        </a:rPr>
-                        <a:t>구조 가상 센싱 SHM (2025 ~ 26)</a:t>
-                      </a:r>
-                    </a:p>
-                  </a:txBody>
-                  <a:tcPr marL="54864" marR="54864" marT="18288" marB="18288" anchor="ctr"/>
-                </a:tc>
-                <a:tc>
-                  <a:txBody>
-                    <a:bodyPr wrap="square"/>
-                    <a:lstStyle/>
-                    <a:p>
-                      <a:r>
-                        <a:rPr sz="1100" b="0">
-                          <a:ea typeface="맑은 고딕"/>
-                          <a:cs typeface="맑은 고딕"/>
-                        </a:rPr>
-                        <a:t>희소 센서 → 전체장</a:t>
-                      </a:r>
-                    </a:p>
-                  </a:txBody>
-                  <a:tcPr marL="54864" marR="54864" marT="18288" marB="18288" anchor="ctr"/>
-                </a:tc>
-                <a:tc>
-                  <a:txBody>
-                    <a:bodyPr wrap="square"/>
-                    <a:lstStyle/>
-                    <a:p>
-                      <a:r>
-                        <a:rPr sz="1100" b="0">
-                          <a:ea typeface="맑은 고딕"/>
-                          <a:cs typeface="맑은 고딕"/>
-                        </a:rPr>
-                        <a:t>칼만 · 물리유도 그래프 칼만 · PDE 제약 최적화</a:t>
-                      </a:r>
-                    </a:p>
-                  </a:txBody>
-                  <a:tcPr marL="54864" marR="54864" marT="18288" marB="18288" anchor="ctr"/>
-                </a:tc>
-                <a:tc>
-                  <a:txBody>
-                    <a:bodyPr wrap="square"/>
-                    <a:lstStyle/>
-                    <a:p>
-                      <a:r>
-                        <a:rPr sz="1100" b="0">
-                          <a:ea typeface="맑은 고딕"/>
-                          <a:cs typeface="맑은 고딕"/>
-                        </a:rPr>
-                        <a:t>상태추정 프레임이 주류이다 (§8t 재확인)</a:t>
-                      </a:r>
-                    </a:p>
-                  </a:txBody>
-                  <a:tcPr marL="54864" marR="54864" marT="18288" marB="18288" anchor="ctr"/>
-                </a:tc>
-              </a:tr>
-              <a:tr h="274320">
-                <a:tc>
-                  <a:txBody>
-                    <a:bodyPr wrap="square"/>
-                    <a:lstStyle/>
-                    <a:p>
-                      <a:r>
-                        <a:rPr sz="1100" b="0">
-                          <a:ea typeface="맑은 고딕"/>
-                          <a:cs typeface="맑은 고딕"/>
-                        </a:rPr>
-                        <a:t>멀티태스크 가상센서 (2026)</a:t>
-                      </a:r>
-                    </a:p>
-                  </a:txBody>
-                  <a:tcPr marL="54864" marR="54864" marT="18288" marB="18288" anchor="ctr"/>
-                </a:tc>
-                <a:tc>
-                  <a:txBody>
-                    <a:bodyPr wrap="square"/>
-                    <a:lstStyle/>
-                    <a:p>
-                      <a:r>
-                        <a:rPr sz="1100" b="0">
-                          <a:ea typeface="맑은 고딕"/>
-                          <a:cs typeface="맑은 고딕"/>
-                        </a:rPr>
-                        <a:t>수백 타깃 통합</a:t>
-                      </a:r>
-                    </a:p>
-                  </a:txBody>
-                  <a:tcPr marL="54864" marR="54864" marT="18288" marB="18288" anchor="ctr"/>
-                </a:tc>
-                <a:tc>
-                  <a:txBody>
-                    <a:bodyPr wrap="square"/>
-                    <a:lstStyle/>
-                    <a:p>
-                      <a:r>
-                        <a:rPr sz="1100" b="0">
-                          <a:ea typeface="맑은 고딕"/>
-                          <a:cs typeface="맑은 고딕"/>
-                        </a:rPr>
-                        <a:t>입력 선택을 학습하는 단일 모델</a:t>
-                      </a:r>
-                    </a:p>
-                  </a:txBody>
-                  <a:tcPr marL="54864" marR="54864" marT="18288" marB="18288" anchor="ctr"/>
-                </a:tc>
-                <a:tc>
-                  <a:txBody>
-                    <a:bodyPr wrap="square"/>
-                    <a:lstStyle/>
-                    <a:p>
-                      <a:r>
-                        <a:rPr sz="1100" b="0">
-                          <a:ea typeface="맑은 고딕"/>
-                          <a:cs typeface="맑은 고딕"/>
-                        </a:rPr>
-                        <a:t>타깃이 둘인 본 연구와 무관하다</a:t>
-                      </a:r>
-                    </a:p>
-                  </a:txBody>
-                  <a:tcPr marL="54864" marR="54864" marT="18288" marB="18288" anchor="ctr"/>
-                </a:tc>
-              </a:tr>
-              <a:tr h="401320">
-                <a:tc>
-                  <a:txBody>
-                    <a:bodyPr wrap="square"/>
-                    <a:lstStyle/>
-                    <a:p>
-                      <a:r>
-                        <a:rPr sz="1100" b="0">
-                          <a:ea typeface="맑은 고딕"/>
-                          <a:cs typeface="맑은 고딕"/>
-                        </a:rPr>
-                        <a:t>합성 진단 증강 (EAST → J-TEXT, 2026)</a:t>
-                      </a:r>
-                    </a:p>
-                  </a:txBody>
-                  <a:tcPr marL="54864" marR="54864" marT="18288" marB="18288" anchor="ctr"/>
-                </a:tc>
-                <a:tc>
-                  <a:txBody>
-                    <a:bodyPr wrap="square"/>
-                    <a:lstStyle/>
-                    <a:p>
-                      <a:r>
-                        <a:rPr sz="1100" b="0">
-                          <a:ea typeface="맑은 고딕"/>
-                          <a:cs typeface="맑은 고딕"/>
-                        </a:rPr>
-                        <a:t>데이터 없는 장치</a:t>
-                      </a:r>
-                    </a:p>
-                  </a:txBody>
-                  <a:tcPr marL="54864" marR="54864" marT="18288" marB="18288" anchor="ctr"/>
-                </a:tc>
-                <a:tc>
-                  <a:txBody>
-                    <a:bodyPr wrap="square"/>
-                    <a:lstStyle/>
-                    <a:p>
-                      <a:r>
-                        <a:rPr sz="1100" b="0">
-                          <a:ea typeface="맑은 고딕"/>
-                          <a:cs typeface="맑은 고딕"/>
-                        </a:rPr>
-                        <a:t>NIMROD 합성 진단 + 도메인 적응, 조기 경보 50 → 57 %</a:t>
-                      </a:r>
-                    </a:p>
-                  </a:txBody>
-                  <a:tcPr marL="54864" marR="54864" marT="18288" marB="18288" anchor="ctr"/>
-                </a:tc>
-                <a:tc>
-                  <a:txBody>
-                    <a:bodyPr wrap="square"/>
-                    <a:lstStyle/>
-                    <a:p>
-                      <a:r>
-                        <a:rPr sz="1100" b="0">
-                          <a:ea typeface="맑은 고딕"/>
-                          <a:cs typeface="맑은 고딕"/>
-                        </a:rPr>
-                        <a:t>NBI가 없으면 합성 토크 채널은 시뮬레이션에서만 온다</a:t>
+                        <a:t>Tᵢ 라벨은 92 % 관측이고 TokaMind에서 프로파일 이득이 음수. 기대 낮음</a:t>
                       </a:r>
                     </a:p>
                   </a:txBody>
@@ -24061,6 +25374,1226 @@
           </a:graphicData>
         </a:graphic>
       </p:graphicFrame>
+    </p:spTree>
+  </p:cSld>
+  <p:clrMapOvr>
+    <a:masterClrMapping/>
+  </p:clrMapOvr>
+</p:sld>
+</file>
+
+<file path=ppt/slides/slide58.xml><?xml version="1.0" encoding="utf-8"?>
+<p:sld xmlns:a="http://schemas.openxmlformats.org/drawingml/2006/main" xmlns:p="http://schemas.openxmlformats.org/presentationml/2006/main" xmlns:r="http://schemas.openxmlformats.org/officeDocument/2006/relationships">
+  <p:cSld>
+    <p:spTree>
+      <p:nvGrpSpPr>
+        <p:cNvPr id="1" name=""/>
+        <p:cNvGrpSpPr/>
+        <p:nvPr/>
+      </p:nvGrpSpPr>
+      <p:grpSpPr/>
+      <p:sp>
+        <p:nvSpPr>
+          <p:cNvPr id="2" name="Title 1"/>
+          <p:cNvSpPr>
+            <a:spLocks noGrp="1"/>
+          </p:cNvSpPr>
+          <p:nvPr>
+            <p:ph type="title"/>
+          </p:nvPr>
+        </p:nvSpPr>
+        <p:spPr>
+          <a:xfrm>
+            <a:off x="585216" y="704088"/>
+            <a:ext cx="11027664" cy="1014984"/>
+          </a:xfrm>
+        </p:spPr>
+        <p:txBody>
+          <a:bodyPr wrap="square"/>
+          <a:lstStyle/>
+          <a:p>
+            <a:r>
+              <a:rPr b="0" sz="2450">
+                <a:ea typeface="맑은 고딕"/>
+                <a:cs typeface="맑은 고딕"/>
+              </a:rPr>
+              <a:t>문헌 조사 (2/4, 2쪽): 일반 시계열 · 센서 예측의 주류와 본 데이터에 대한 판정</a:t>
+            </a:r>
+          </a:p>
+        </p:txBody>
+      </p:sp>
+      <p:graphicFrame>
+        <p:nvGraphicFramePr>
+          <p:cNvPr id="3" name="Table 2"/>
+          <p:cNvGraphicFramePr>
+            <a:graphicFrameLocks noGrp="1"/>
+          </p:cNvGraphicFramePr>
+          <p:nvPr/>
+        </p:nvGraphicFramePr>
+        <p:xfrm>
+          <a:off x="585216" y="2029967"/>
+          <a:ext cx="11027662" cy="3320288"/>
+        </p:xfrm>
+        <a:graphic>
+          <a:graphicData uri="http://schemas.openxmlformats.org/drawingml/2006/table">
+            <a:tbl>
+              <a:tblPr firstRow="1" bandRow="1">
+                <a:tableStyleId>{5C22544A-7EE6-4342-B048-85BDC9FD1C3A}</a:tableStyleId>
+              </a:tblPr>
+              <a:tblGrid>
+                <a:gridCol w="1493787"/>
+                <a:gridCol w="834763"/>
+                <a:gridCol w="2284615"/>
+                <a:gridCol w="3470858"/>
+                <a:gridCol w="2943639"/>
+              </a:tblGrid>
+              <a:tr h="274320">
+                <a:tc>
+                  <a:txBody>
+                    <a:bodyPr wrap="square"/>
+                    <a:lstStyle/>
+                    <a:p>
+                      <a:r>
+                        <a:rPr sz="1100" b="1">
+                          <a:ea typeface="맑은 고딕"/>
+                          <a:cs typeface="맑은 고딕"/>
+                        </a:rPr>
+                        <a:t>방법군</a:t>
+                      </a:r>
+                    </a:p>
+                  </a:txBody>
+                  <a:tcPr marL="54864" marR="54864" marT="18288" marB="18288" anchor="ctr"/>
+                </a:tc>
+                <a:tc>
+                  <a:txBody>
+                    <a:bodyPr wrap="square"/>
+                    <a:lstStyle/>
+                    <a:p>
+                      <a:r>
+                        <a:rPr sz="1100" b="1">
+                          <a:ea typeface="맑은 고딕"/>
+                          <a:cs typeface="맑은 고딕"/>
+                        </a:rPr>
+                        <a:t>연도</a:t>
+                      </a:r>
+                    </a:p>
+                  </a:txBody>
+                  <a:tcPr marL="54864" marR="54864" marT="18288" marB="18288" anchor="ctr"/>
+                </a:tc>
+                <a:tc>
+                  <a:txBody>
+                    <a:bodyPr wrap="square"/>
+                    <a:lstStyle/>
+                    <a:p>
+                      <a:r>
+                        <a:rPr sz="1100" b="1">
+                          <a:ea typeface="맑은 고딕"/>
+                          <a:cs typeface="맑은 고딕"/>
+                        </a:rPr>
+                        <a:t>대표</a:t>
+                      </a:r>
+                    </a:p>
+                  </a:txBody>
+                  <a:tcPr marL="54864" marR="54864" marT="18288" marB="18288" anchor="ctr"/>
+                </a:tc>
+                <a:tc>
+                  <a:txBody>
+                    <a:bodyPr wrap="square"/>
+                    <a:lstStyle/>
+                    <a:p>
+                      <a:r>
+                        <a:rPr sz="1100" b="1">
+                          <a:ea typeface="맑은 고딕"/>
+                          <a:cs typeface="맑은 고딕"/>
+                        </a:rPr>
+                        <a:t>문헌의 주장</a:t>
+                      </a:r>
+                    </a:p>
+                  </a:txBody>
+                  <a:tcPr marL="54864" marR="54864" marT="18288" marB="18288" anchor="ctr"/>
+                </a:tc>
+                <a:tc>
+                  <a:txBody>
+                    <a:bodyPr wrap="square"/>
+                    <a:lstStyle/>
+                    <a:p>
+                      <a:r>
+                        <a:rPr sz="1100" b="1">
+                          <a:ea typeface="맑은 고딕"/>
+                          <a:cs typeface="맑은 고딕"/>
+                        </a:rPr>
+                        <a:t>우리 데이터 판정</a:t>
+                      </a:r>
+                    </a:p>
+                  </a:txBody>
+                  <a:tcPr marL="54864" marR="54864" marT="18288" marB="18288" anchor="ctr"/>
+                </a:tc>
+              </a:tr>
+              <a:tr h="747776">
+                <a:tc>
+                  <a:txBody>
+                    <a:bodyPr wrap="square"/>
+                    <a:lstStyle/>
+                    <a:p>
+                      <a:r>
+                        <a:rPr sz="1100" b="0">
+                          <a:ea typeface="맑은 고딕"/>
+                          <a:cs typeface="맑은 고딕"/>
+                        </a:rPr>
+                        <a:t>소프트센서 (공정)</a:t>
+                      </a:r>
+                    </a:p>
+                  </a:txBody>
+                  <a:tcPr marL="54864" marR="54864" marT="18288" marB="18288" anchor="ctr"/>
+                </a:tc>
+                <a:tc>
+                  <a:txBody>
+                    <a:bodyPr wrap="square"/>
+                    <a:lstStyle/>
+                    <a:p>
+                      <a:r>
+                        <a:rPr sz="1100" b="0">
+                          <a:ea typeface="맑은 고딕"/>
+                          <a:cs typeface="맑은 고딕"/>
+                        </a:rPr>
+                        <a:t>2025 ~ 26</a:t>
+                      </a:r>
+                    </a:p>
+                  </a:txBody>
+                  <a:tcPr marL="54864" marR="54864" marT="18288" marB="18288" anchor="ctr"/>
+                </a:tc>
+                <a:tc>
+                  <a:txBody>
+                    <a:bodyPr wrap="square"/>
+                    <a:lstStyle/>
+                    <a:p>
+                      <a:r>
+                        <a:rPr sz="1100" b="0">
+                          <a:ea typeface="맑은 고딕"/>
+                          <a:cs typeface="맑은 고딕"/>
+                        </a:rPr>
+                        <a:t>반지도 VAE 회귀, Soft-Sensing Transformer, ConFormer(CNN+Transformer), 인과 특징 선택</a:t>
+                      </a:r>
+                    </a:p>
+                  </a:txBody>
+                  <a:tcPr marL="54864" marR="54864" marT="18288" marB="18288" anchor="ctr"/>
+                </a:tc>
+                <a:tc>
+                  <a:txBody>
+                    <a:bodyPr wrap="square"/>
+                    <a:lstStyle/>
+                    <a:p>
+                      <a:r>
+                        <a:rPr sz="1100" b="0">
+                          <a:ea typeface="맑은 고딕"/>
+                          <a:cs typeface="맑은 고딕"/>
+                        </a:rPr>
+                        <a:t>반지도가 핵심. 2025년 한 연구는 MLP 백본 6 % 개선으로 Transformer와 동급</a:t>
+                      </a:r>
+                    </a:p>
+                  </a:txBody>
+                  <a:tcPr marL="54864" marR="54864" marT="18288" marB="18288" anchor="ctr"/>
+                </a:tc>
+                <a:tc>
+                  <a:txBody>
+                    <a:bodyPr wrap="square"/>
+                    <a:lstStyle/>
+                    <a:p>
+                      <a:r>
+                        <a:rPr sz="1100" b="0">
+                          <a:ea typeface="맑은 고딕"/>
+                          <a:cs typeface="맑은 고딕"/>
+                        </a:rPr>
+                        <a:t>Tᵢ에는 반지도 이득 조건이 없다. V_rot는 라벨이 아니라 입력을 늘리는 문제</a:t>
+                      </a:r>
+                    </a:p>
+                  </a:txBody>
+                  <a:tcPr marL="54864" marR="54864" marT="18288" marB="18288" anchor="ctr"/>
+                </a:tc>
+              </a:tr>
+              <a:tr h="747776">
+                <a:tc>
+                  <a:txBody>
+                    <a:bodyPr wrap="square"/>
+                    <a:lstStyle/>
+                    <a:p>
+                      <a:r>
+                        <a:rPr sz="1100" b="0">
+                          <a:ea typeface="맑은 고딕"/>
+                          <a:cs typeface="맑은 고딕"/>
+                        </a:rPr>
+                        <a:t>MoE · 레짐 게이팅</a:t>
+                      </a:r>
+                    </a:p>
+                  </a:txBody>
+                  <a:tcPr marL="54864" marR="54864" marT="18288" marB="18288" anchor="ctr"/>
+                </a:tc>
+                <a:tc>
+                  <a:txBody>
+                    <a:bodyPr wrap="square"/>
+                    <a:lstStyle/>
+                    <a:p>
+                      <a:r>
+                        <a:rPr sz="1100" b="0">
+                          <a:ea typeface="맑은 고딕"/>
+                          <a:cs typeface="맑은 고딕"/>
+                        </a:rPr>
+                        <a:t>2025 ~ 26</a:t>
+                      </a:r>
+                    </a:p>
+                  </a:txBody>
+                  <a:tcPr marL="54864" marR="54864" marT="18288" marB="18288" anchor="ctr"/>
+                </a:tc>
+                <a:tc>
+                  <a:txBody>
+                    <a:bodyPr wrap="square"/>
+                    <a:lstStyle/>
+                    <a:p>
+                      <a:r>
+                        <a:rPr sz="1100" b="0">
+                          <a:ea typeface="맑은 고딕"/>
+                          <a:cs typeface="맑은 고딕"/>
+                        </a:rPr>
+                        <a:t>RG-ResMoE, Dynamic TMoE, AME-TS</a:t>
+                      </a:r>
+                    </a:p>
+                  </a:txBody>
+                  <a:tcPr marL="54864" marR="54864" marT="18288" marB="18288" anchor="ctr"/>
+                </a:tc>
+                <a:tc>
+                  <a:txBody>
+                    <a:bodyPr wrap="square"/>
+                    <a:lstStyle/>
+                    <a:p>
+                      <a:r>
+                        <a:rPr sz="1100" b="0">
+                          <a:ea typeface="맑은 고딕"/>
+                          <a:cs typeface="맑은 고딕"/>
+                        </a:rPr>
+                        <a:t>동결 기저 + 잔차 전문가 + soft 게이트 + 보정 크기 페널티. hard top-1 라우팅이 soft보다 유의하게 나쁨(p &lt; 1e-4). 레짐 변수를 입력에 넣으면 30/30 붕괴, 라우팅에만 쓰면 안정</a:t>
+                      </a:r>
+                    </a:p>
+                  </a:txBody>
+                  <a:tcPr marL="54864" marR="54864" marT="18288" marB="18288" anchor="ctr"/>
+                </a:tc>
+                <a:tc>
+                  <a:txBody>
+                    <a:bodyPr wrap="square"/>
+                    <a:lstStyle/>
+                    <a:p>
+                      <a:r>
+                        <a:rPr sz="1100" b="0">
+                          <a:ea typeface="맑은 고딕"/>
+                          <a:cs typeface="맑은 고딕"/>
+                        </a:rPr>
+                        <a:t>B.11의 직접 선례. B.11은 hard argmin VQ. soft 게이트 + persistence 축소 페널티 팔을 자매로 두면 §5-3 반증 시 다음 후보가 준비됨</a:t>
+                      </a:r>
+                    </a:p>
+                  </a:txBody>
+                  <a:tcPr marL="54864" marR="54864" marT="18288" marB="18288" anchor="ctr"/>
+                </a:tc>
+              </a:tr>
+              <a:tr h="747776">
+                <a:tc>
+                  <a:txBody>
+                    <a:bodyPr wrap="square"/>
+                    <a:lstStyle/>
+                    <a:p>
+                      <a:r>
+                        <a:rPr sz="1100" b="0">
+                          <a:ea typeface="맑은 고딕"/>
+                          <a:cs typeface="맑은 고딕"/>
+                        </a:rPr>
+                        <a:t>학습 상태추정</a:t>
+                      </a:r>
+                    </a:p>
+                  </a:txBody>
+                  <a:tcPr marL="54864" marR="54864" marT="18288" marB="18288" anchor="ctr"/>
+                </a:tc>
+                <a:tc>
+                  <a:txBody>
+                    <a:bodyPr wrap="square"/>
+                    <a:lstStyle/>
+                    <a:p>
+                      <a:r>
+                        <a:rPr sz="1100" b="0">
+                          <a:ea typeface="맑은 고딕"/>
+                          <a:cs typeface="맑은 고딕"/>
+                        </a:rPr>
+                        <a:t>2022 ~ 26</a:t>
+                      </a:r>
+                    </a:p>
+                  </a:txBody>
+                  <a:tcPr marL="54864" marR="54864" marT="18288" marB="18288" anchor="ctr"/>
+                </a:tc>
+                <a:tc>
+                  <a:txBody>
+                    <a:bodyPr wrap="square"/>
+                    <a:lstStyle/>
+                    <a:p>
+                      <a:r>
+                        <a:rPr sz="1100" b="0">
+                          <a:ea typeface="맑은 고딕"/>
+                          <a:cs typeface="맑은 고딕"/>
+                        </a:rPr>
+                        <a:t>KalmanNet, KalmanFormer, Bayesian KalmanNet (TSP 2025), Unscented KalmanNet, DLFM</a:t>
+                      </a:r>
+                    </a:p>
+                  </a:txBody>
+                  <a:tcPr marL="54864" marR="54864" marT="18288" marB="18288" anchor="ctr"/>
+                </a:tc>
+                <a:tc>
+                  <a:txBody>
+                    <a:bodyPr wrap="square"/>
+                    <a:lstStyle/>
+                    <a:p>
+                      <a:r>
+                        <a:rPr sz="1100" b="0">
+                          <a:ea typeface="맑은 고딕"/>
+                          <a:cs typeface="맑은 고딕"/>
+                        </a:rPr>
+                        <a:t>프로세스 모델은 두고 칼만 이득만 학습</a:t>
+                      </a:r>
+                    </a:p>
+                  </a:txBody>
+                  <a:tcPr marL="54864" marR="54864" marT="18288" marB="18288" anchor="ctr"/>
+                </a:tc>
+                <a:tc>
+                  <a:txBody>
+                    <a:bodyPr wrap="square"/>
+                    <a:lstStyle/>
+                    <a:p>
+                      <a:r>
+                        <a:rPr sz="1100" b="0">
+                          <a:ea typeface="맑은 고딕"/>
+                          <a:cs typeface="맑은 고딕"/>
+                        </a:rPr>
+                        <a:t>"지금은 persistence를 믿는다 / 보정한다"의 원리적 형태가 칼만 이득. 인과 GP를 프로세스 모델로, 고속 채널을 관측으로, 이득을 소형 GRU로</a:t>
+                      </a:r>
+                    </a:p>
+                  </a:txBody>
+                  <a:tcPr marL="54864" marR="54864" marT="18288" marB="18288" anchor="ctr"/>
+                </a:tc>
+              </a:tr>
+              <a:tr h="401320">
+                <a:tc>
+                  <a:txBody>
+                    <a:bodyPr wrap="square"/>
+                    <a:lstStyle/>
+                    <a:p>
+                      <a:r>
+                        <a:rPr sz="1100" b="0">
+                          <a:ea typeface="맑은 고딕"/>
+                          <a:cs typeface="맑은 고딕"/>
+                        </a:rPr>
+                        <a:t>이분산 · 강건 회귀</a:t>
+                      </a:r>
+                    </a:p>
+                  </a:txBody>
+                  <a:tcPr marL="54864" marR="54864" marT="18288" marB="18288" anchor="ctr"/>
+                </a:tc>
+                <a:tc>
+                  <a:txBody>
+                    <a:bodyPr wrap="square"/>
+                    <a:lstStyle/>
+                    <a:p>
+                      <a:r>
+                        <a:rPr sz="1100" b="0">
+                          <a:ea typeface="맑은 고딕"/>
+                          <a:cs typeface="맑은 고딕"/>
+                        </a:rPr>
+                        <a:t>2023 ~ 26</a:t>
+                      </a:r>
+                    </a:p>
+                  </a:txBody>
+                  <a:tcPr marL="54864" marR="54864" marT="18288" marB="18288" anchor="ctr"/>
+                </a:tc>
+                <a:tc>
+                  <a:txBody>
+                    <a:bodyPr wrap="square"/>
+                    <a:lstStyle/>
+                    <a:p>
+                      <a:r>
+                        <a:rPr sz="1100" b="0">
+                          <a:ea typeface="맑은 고딕"/>
+                          <a:cs typeface="맑은 고딕"/>
+                        </a:rPr>
+                        <a:t>가우시안 NLL 병리, β-NLL, Toto의 Student-t</a:t>
+                      </a:r>
+                    </a:p>
+                  </a:txBody>
+                  <a:tcPr marL="54864" marR="54864" marT="18288" marB="18288" anchor="ctr"/>
+                </a:tc>
+                <a:tc>
+                  <a:txBody>
+                    <a:bodyPr wrap="square"/>
+                    <a:lstStyle/>
+                    <a:p>
+                      <a:r>
+                        <a:rPr sz="1100" b="0">
+                          <a:ea typeface="맑은 고딕"/>
+                          <a:cs typeface="맑은 고딕"/>
+                        </a:rPr>
+                        <a:t>예측 분산이 평균 그래디언트를 오염시키므로 stop-grad나 별도 헤드 필요</a:t>
+                      </a:r>
+                    </a:p>
+                  </a:txBody>
+                  <a:tcPr marL="54864" marR="54864" marT="18288" marB="18288" anchor="ctr"/>
+                </a:tc>
+                <a:tc>
+                  <a:txBody>
+                    <a:bodyPr wrap="square"/>
+                    <a:lstStyle/>
+                    <a:p>
+                      <a:r>
+                        <a:rPr sz="1100" b="0">
+                          <a:ea typeface="맑은 고딕"/>
+                          <a:cs typeface="맑은 고딕"/>
+                        </a:rPr>
+                        <a:t>§8aq가 지목한 유일한 미개봉 축. conformal은 사후 구간이지 학습 손실이 아님</a:t>
+                      </a:r>
+                    </a:p>
+                  </a:txBody>
+                  <a:tcPr marL="54864" marR="54864" marT="18288" marB="18288" anchor="ctr"/>
+                </a:tc>
+              </a:tr>
+              <a:tr h="401320">
+                <a:tc>
+                  <a:txBody>
+                    <a:bodyPr wrap="square"/>
+                    <a:lstStyle/>
+                    <a:p>
+                      <a:r>
+                        <a:rPr sz="1100" b="0">
+                          <a:ea typeface="맑은 고딕"/>
+                          <a:cs typeface="맑은 고딕"/>
+                        </a:rPr>
+                        <a:t>표형 모델</a:t>
+                      </a:r>
+                    </a:p>
+                  </a:txBody>
+                  <a:tcPr marL="54864" marR="54864" marT="18288" marB="18288" anchor="ctr"/>
+                </a:tc>
+                <a:tc>
+                  <a:txBody>
+                    <a:bodyPr wrap="square"/>
+                    <a:lstStyle/>
+                    <a:p>
+                      <a:r>
+                        <a:rPr sz="1100" b="0">
+                          <a:ea typeface="맑은 고딕"/>
+                          <a:cs typeface="맑은 고딕"/>
+                        </a:rPr>
+                        <a:t>2025</a:t>
+                      </a:r>
+                    </a:p>
+                  </a:txBody>
+                  <a:tcPr marL="54864" marR="54864" marT="18288" marB="18288" anchor="ctr"/>
+                </a:tc>
+                <a:tc>
+                  <a:txBody>
+                    <a:bodyPr wrap="square"/>
+                    <a:lstStyle/>
+                    <a:p>
+                      <a:r>
+                        <a:rPr sz="1100" b="0">
+                          <a:ea typeface="맑은 고딕"/>
+                          <a:cs typeface="맑은 고딕"/>
+                        </a:rPr>
+                        <a:t>벤치마크 111개 데이터셋 × 20개 모델</a:t>
+                      </a:r>
+                    </a:p>
+                  </a:txBody>
+                  <a:tcPr marL="54864" marR="54864" marT="18288" marB="18288" anchor="ctr"/>
+                </a:tc>
+                <a:tc>
+                  <a:txBody>
+                    <a:bodyPr wrap="square"/>
+                    <a:lstStyle/>
+                    <a:p>
+                      <a:r>
+                        <a:rPr sz="1100" b="0">
+                          <a:ea typeface="맑은 고딕"/>
+                          <a:cs typeface="맑은 고딕"/>
+                        </a:rPr>
+                        <a:t>작은 표형 데이터에선 GBM이 딥을 자주 이김</a:t>
+                      </a:r>
+                    </a:p>
+                  </a:txBody>
+                  <a:tcPr marL="54864" marR="54864" marT="18288" marB="18288" anchor="ctr"/>
+                </a:tc>
+                <a:tc>
+                  <a:txBody>
+                    <a:bodyPr wrap="square"/>
+                    <a:lstStyle/>
+                    <a:p>
+                      <a:r>
+                        <a:rPr sz="1100" b="0">
+                          <a:ea typeface="맑은 고딕"/>
+                          <a:cs typeface="맑은 고딕"/>
+                        </a:rPr>
+                        <a:t>b3k8 행 특징 위 LightGBM · TabPFN-v2 회귀는 하루짜리 대조군</a:t>
+                      </a:r>
+                    </a:p>
+                  </a:txBody>
+                  <a:tcPr marL="54864" marR="54864" marT="18288" marB="18288" anchor="ctr"/>
+                </a:tc>
+              </a:tr>
+            </a:tbl>
+          </a:graphicData>
+        </a:graphic>
+      </p:graphicFrame>
+    </p:spTree>
+  </p:cSld>
+  <p:clrMapOvr>
+    <a:masterClrMapping/>
+  </p:clrMapOvr>
+</p:sld>
+</file>
+
+<file path=ppt/slides/slide59.xml><?xml version="1.0" encoding="utf-8"?>
+<p:sld xmlns:a="http://schemas.openxmlformats.org/drawingml/2006/main" xmlns:p="http://schemas.openxmlformats.org/presentationml/2006/main" xmlns:r="http://schemas.openxmlformats.org/officeDocument/2006/relationships">
+  <p:cSld>
+    <p:spTree>
+      <p:nvGrpSpPr>
+        <p:cNvPr id="1" name=""/>
+        <p:cNvGrpSpPr/>
+        <p:nvPr/>
+      </p:nvGrpSpPr>
+      <p:grpSpPr/>
+      <p:sp>
+        <p:nvSpPr>
+          <p:cNvPr id="2" name="Title 1"/>
+          <p:cNvSpPr>
+            <a:spLocks noGrp="1"/>
+          </p:cNvSpPr>
+          <p:nvPr>
+            <p:ph type="title"/>
+          </p:nvPr>
+        </p:nvSpPr>
+        <p:spPr>
+          <a:xfrm>
+            <a:off x="585216" y="704088"/>
+            <a:ext cx="11027664" cy="1014984"/>
+          </a:xfrm>
+        </p:spPr>
+        <p:txBody>
+          <a:bodyPr wrap="square"/>
+          <a:lstStyle/>
+          <a:p>
+            <a:r>
+              <a:rPr b="0" sz="2800">
+                <a:ea typeface="맑은 고딕"/>
+                <a:cs typeface="맑은 고딕"/>
+              </a:rPr>
+              <a:t>문헌 조사 (3/4): 구조적으로 동형인 분야에서 반복되는 교훈</a:t>
+            </a:r>
+          </a:p>
+        </p:txBody>
+      </p:sp>
+      <p:graphicFrame>
+        <p:nvGraphicFramePr>
+          <p:cNvPr id="3" name="Table 2"/>
+          <p:cNvGraphicFramePr>
+            <a:graphicFrameLocks noGrp="1"/>
+          </p:cNvGraphicFramePr>
+          <p:nvPr/>
+        </p:nvGraphicFramePr>
+        <p:xfrm>
+          <a:off x="585216" y="2029967"/>
+          <a:ext cx="11027662" cy="2682240"/>
+        </p:xfrm>
+        <a:graphic>
+          <a:graphicData uri="http://schemas.openxmlformats.org/drawingml/2006/table">
+            <a:tbl>
+              <a:tblPr firstRow="1" bandRow="1">
+                <a:tableStyleId>{5C22544A-7EE6-4342-B048-85BDC9FD1C3A}</a:tableStyleId>
+              </a:tblPr>
+              <a:tblGrid>
+                <a:gridCol w="2169376"/>
+                <a:gridCol w="858711"/>
+                <a:gridCol w="2124181"/>
+                <a:gridCol w="2892502"/>
+                <a:gridCol w="2982892"/>
+              </a:tblGrid>
+              <a:tr h="274320">
+                <a:tc>
+                  <a:txBody>
+                    <a:bodyPr wrap="square"/>
+                    <a:lstStyle/>
+                    <a:p>
+                      <a:r>
+                        <a:rPr sz="1100" b="1">
+                          <a:ea typeface="맑은 고딕"/>
+                          <a:cs typeface="맑은 고딕"/>
+                        </a:rPr>
+                        <a:t>분야</a:t>
+                      </a:r>
+                    </a:p>
+                  </a:txBody>
+                  <a:tcPr marL="54864" marR="54864" marT="18288" marB="18288" anchor="ctr"/>
+                </a:tc>
+                <a:tc>
+                  <a:txBody>
+                    <a:bodyPr wrap="square"/>
+                    <a:lstStyle/>
+                    <a:p>
+                      <a:r>
+                        <a:rPr sz="1100" b="1">
+                          <a:ea typeface="맑은 고딕"/>
+                          <a:cs typeface="맑은 고딕"/>
+                        </a:rPr>
+                        <a:t>연도</a:t>
+                      </a:r>
+                    </a:p>
+                  </a:txBody>
+                  <a:tcPr marL="54864" marR="54864" marT="18288" marB="18288" anchor="ctr"/>
+                </a:tc>
+                <a:tc>
+                  <a:txBody>
+                    <a:bodyPr wrap="square"/>
+                    <a:lstStyle/>
+                    <a:p>
+                      <a:r>
+                        <a:rPr sz="1100" b="1">
+                          <a:ea typeface="맑은 고딕"/>
+                          <a:cs typeface="맑은 고딕"/>
+                        </a:rPr>
+                        <a:t>동형 관계</a:t>
+                      </a:r>
+                    </a:p>
+                  </a:txBody>
+                  <a:tcPr marL="54864" marR="54864" marT="18288" marB="18288" anchor="ctr"/>
+                </a:tc>
+                <a:tc>
+                  <a:txBody>
+                    <a:bodyPr wrap="square"/>
+                    <a:lstStyle/>
+                    <a:p>
+                      <a:r>
+                        <a:rPr sz="1100" b="1">
+                          <a:ea typeface="맑은 고딕"/>
+                          <a:cs typeface="맑은 고딕"/>
+                        </a:rPr>
+                        <a:t>주류</a:t>
+                      </a:r>
+                    </a:p>
+                  </a:txBody>
+                  <a:tcPr marL="54864" marR="54864" marT="18288" marB="18288" anchor="ctr"/>
+                </a:tc>
+                <a:tc>
+                  <a:txBody>
+                    <a:bodyPr wrap="square"/>
+                    <a:lstStyle/>
+                    <a:p>
+                      <a:r>
+                        <a:rPr sz="1100" b="1">
+                          <a:ea typeface="맑은 고딕"/>
+                          <a:cs typeface="맑은 고딕"/>
+                        </a:rPr>
+                        <a:t>교훈</a:t>
+                      </a:r>
+                    </a:p>
+                  </a:txBody>
+                  <a:tcPr marL="54864" marR="54864" marT="18288" marB="18288" anchor="ctr"/>
+                </a:tc>
+              </a:tr>
+              <a:tr h="401320">
+                <a:tc>
+                  <a:txBody>
+                    <a:bodyPr wrap="square"/>
+                    <a:lstStyle/>
+                    <a:p>
+                      <a:r>
+                        <a:rPr sz="1100" b="0">
+                          <a:ea typeface="맑은 고딕"/>
+                          <a:cs typeface="맑은 고딕"/>
+                        </a:rPr>
+                        <a:t>혼합주기 나우캐스팅 MIDAS (경제)</a:t>
+                      </a:r>
+                    </a:p>
+                  </a:txBody>
+                  <a:tcPr marL="54864" marR="54864" marT="18288" marB="18288" anchor="ctr"/>
+                </a:tc>
+                <a:tc>
+                  <a:txBody>
+                    <a:bodyPr wrap="square"/>
+                    <a:lstStyle/>
+                    <a:p>
+                      <a:r>
+                        <a:rPr sz="1100" b="0">
+                          <a:ea typeface="맑은 고딕"/>
+                          <a:cs typeface="맑은 고딕"/>
+                        </a:rPr>
+                        <a:t>2023 ~ 25</a:t>
+                      </a:r>
+                    </a:p>
+                  </a:txBody>
+                  <a:tcPr marL="54864" marR="54864" marT="18288" marB="18288" anchor="ctr"/>
+                </a:tc>
+                <a:tc>
+                  <a:txBody>
+                    <a:bodyPr wrap="square"/>
+                    <a:lstStyle/>
+                    <a:p>
+                      <a:r>
+                        <a:rPr sz="1100" b="0">
+                          <a:ea typeface="맑은 고딕"/>
+                          <a:cs typeface="맑은 고딕"/>
+                        </a:rPr>
+                        <a:t>고빈도 입력으로 저빈도 타깃</a:t>
+                      </a:r>
+                    </a:p>
+                  </a:txBody>
+                  <a:tcPr marL="54864" marR="54864" marT="18288" marB="18288" anchor="ctr"/>
+                </a:tc>
+                <a:tc>
+                  <a:txBody>
+                    <a:bodyPr wrap="square"/>
+                    <a:lstStyle/>
+                    <a:p>
+                      <a:r>
+                        <a:rPr sz="1100" b="0">
+                          <a:ea typeface="맑은 고딕"/>
+                          <a:cs typeface="맑은 고딕"/>
+                        </a:rPr>
+                        <a:t>U-MIDAS + 소형 NN 라그 가중, GP-MIDAS</a:t>
+                      </a:r>
+                    </a:p>
+                  </a:txBody>
+                  <a:tcPr marL="54864" marR="54864" marT="18288" marB="18288" anchor="ctr"/>
+                </a:tc>
+                <a:tc>
+                  <a:txBody>
+                    <a:bodyPr wrap="square"/>
+                    <a:lstStyle/>
+                    <a:p>
+                      <a:r>
+                        <a:rPr sz="1100" b="0">
+                          <a:ea typeface="맑은 고딕"/>
+                          <a:cs typeface="맑은 고딕"/>
+                        </a:rPr>
+                        <a:t>파라메트릭 라그 구조로 충분. 우리 reach 사다리 · b3k8과 같은 결론</a:t>
+                      </a:r>
+                    </a:p>
+                  </a:txBody>
+                  <a:tcPr marL="54864" marR="54864" marT="18288" marB="18288" anchor="ctr"/>
+                </a:tc>
+              </a:tr>
+              <a:tr h="401320">
+                <a:tc>
+                  <a:txBody>
+                    <a:bodyPr wrap="square"/>
+                    <a:lstStyle/>
+                    <a:p>
+                      <a:r>
+                        <a:rPr sz="1100" b="0">
+                          <a:ea typeface="맑은 고딕"/>
+                          <a:cs typeface="맑은 고딕"/>
+                        </a:rPr>
+                        <a:t>저가 센서 보정 (대기질)</a:t>
+                      </a:r>
+                    </a:p>
+                  </a:txBody>
+                  <a:tcPr marL="54864" marR="54864" marT="18288" marB="18288" anchor="ctr"/>
+                </a:tc>
+                <a:tc>
+                  <a:txBody>
+                    <a:bodyPr wrap="square"/>
+                    <a:lstStyle/>
+                    <a:p>
+                      <a:r>
+                        <a:rPr sz="1100" b="0">
+                          <a:ea typeface="맑은 고딕"/>
+                          <a:cs typeface="맑은 고딕"/>
+                        </a:rPr>
+                        <a:t>2025 ~ 26</a:t>
+                      </a:r>
+                    </a:p>
+                  </a:txBody>
+                  <a:tcPr marL="54864" marR="54864" marT="18288" marB="18288" anchor="ctr"/>
+                </a:tc>
+                <a:tc>
+                  <a:txBody>
+                    <a:bodyPr wrap="square"/>
+                    <a:lstStyle/>
+                    <a:p>
+                      <a:r>
+                        <a:rPr sz="1100" b="0">
+                          <a:ea typeface="맑은 고딕"/>
+                          <a:cs typeface="맑은 고딕"/>
+                        </a:rPr>
+                        <a:t>밀집 저가 센서로 희소 기준 측정</a:t>
+                      </a:r>
+                    </a:p>
+                  </a:txBody>
+                  <a:tcPr marL="54864" marR="54864" marT="18288" marB="18288" anchor="ctr"/>
+                </a:tc>
+                <a:tc>
+                  <a:txBody>
+                    <a:bodyPr wrap="square"/>
+                    <a:lstStyle/>
+                    <a:p>
+                      <a:r>
+                        <a:rPr sz="1100" b="0">
+                          <a:ea typeface="맑은 고딕"/>
+                          <a:cs typeface="맑은 고딕"/>
+                        </a:rPr>
+                        <a:t>LSTM · GBM, 기준국에서 먼 센서는 도메인 적응</a:t>
+                      </a:r>
+                    </a:p>
+                  </a:txBody>
+                  <a:tcPr marL="54864" marR="54864" marT="18288" marB="18288" anchor="ctr"/>
+                </a:tc>
+                <a:tc>
+                  <a:txBody>
+                    <a:bodyPr wrap="square"/>
+                    <a:lstStyle/>
+                    <a:p>
+                      <a:r>
+                        <a:rPr sz="1100" b="0">
+                          <a:ea typeface="맑은 고딕"/>
+                          <a:cs typeface="맑은 고딕"/>
+                        </a:rPr>
+                        <a:t>캠페인 이동(§8n)과 shot별 표준화(§8s)가 같은 처방</a:t>
+                      </a:r>
+                    </a:p>
+                  </a:txBody>
+                  <a:tcPr marL="54864" marR="54864" marT="18288" marB="18288" anchor="ctr"/>
+                </a:tc>
+              </a:tr>
+              <a:tr h="401320">
+                <a:tc>
+                  <a:txBody>
+                    <a:bodyPr wrap="square"/>
+                    <a:lstStyle/>
+                    <a:p>
+                      <a:r>
+                        <a:rPr sz="1100" b="0">
+                          <a:ea typeface="맑은 고딕"/>
+                          <a:cs typeface="맑은 고딕"/>
+                        </a:rPr>
+                        <a:t>커프리스 혈압 PPG</a:t>
+                      </a:r>
+                    </a:p>
+                  </a:txBody>
+                  <a:tcPr marL="54864" marR="54864" marT="18288" marB="18288" anchor="ctr"/>
+                </a:tc>
+                <a:tc>
+                  <a:txBody>
+                    <a:bodyPr wrap="square"/>
+                    <a:lstStyle/>
+                    <a:p>
+                      <a:r>
+                        <a:rPr sz="1100" b="0">
+                          <a:ea typeface="맑은 고딕"/>
+                          <a:cs typeface="맑은 고딕"/>
+                        </a:rPr>
+                        <a:t>2025 ~ 26</a:t>
+                      </a:r>
+                    </a:p>
+                  </a:txBody>
+                  <a:tcPr marL="54864" marR="54864" marT="18288" marB="18288" anchor="ctr"/>
+                </a:tc>
+                <a:tc>
+                  <a:txBody>
+                    <a:bodyPr wrap="square"/>
+                    <a:lstStyle/>
+                    <a:p>
+                      <a:r>
+                        <a:rPr sz="1100" b="0">
+                          <a:ea typeface="맑은 고딕"/>
+                          <a:cs typeface="맑은 고딕"/>
+                        </a:rPr>
+                        <a:t>연속 파형으로 간헐 기준값</a:t>
+                      </a:r>
+                    </a:p>
+                  </a:txBody>
+                  <a:tcPr marL="54864" marR="54864" marT="18288" marB="18288" anchor="ctr"/>
+                </a:tc>
+                <a:tc>
+                  <a:txBody>
+                    <a:bodyPr wrap="square"/>
+                    <a:lstStyle/>
+                    <a:p>
+                      <a:r>
+                        <a:rPr sz="1100" b="0">
+                          <a:ea typeface="맑은 고딕"/>
+                          <a:cs typeface="맑은 고딕"/>
+                        </a:rPr>
+                        <a:t>CNN+Transformer 병렬 등 다양. 보정 기반 &gt; 보정 없음, 전 구성이 BHS D등급</a:t>
+                      </a:r>
+                    </a:p>
+                  </a:txBody>
+                  <a:tcPr marL="54864" marR="54864" marT="18288" marB="18288" anchor="ctr"/>
+                </a:tc>
+                <a:tc>
+                  <a:txBody>
+                    <a:bodyPr wrap="square"/>
+                    <a:lstStyle/>
+                    <a:p>
+                      <a:r>
+                        <a:rPr sz="1100" b="0">
+                          <a:ea typeface="맑은 고딕"/>
+                          <a:cs typeface="맑은 고딕"/>
+                        </a:rPr>
+                        <a:t>개체별 보정이 구조보다 큼. 우리의 §8s와 동일</a:t>
+                      </a:r>
+                    </a:p>
+                  </a:txBody>
+                  <a:tcPr marL="54864" marR="54864" marT="18288" marB="18288" anchor="ctr"/>
+                </a:tc>
+              </a:tr>
+              <a:tr h="401320">
+                <a:tc>
+                  <a:txBody>
+                    <a:bodyPr wrap="square"/>
+                    <a:lstStyle/>
+                    <a:p>
+                      <a:r>
+                        <a:rPr sz="1100" b="0">
+                          <a:ea typeface="맑은 고딕"/>
+                          <a:cs typeface="맑은 고딕"/>
+                        </a:rPr>
+                        <a:t>구조 가상 센싱 SHM</a:t>
+                      </a:r>
+                    </a:p>
+                  </a:txBody>
+                  <a:tcPr marL="54864" marR="54864" marT="18288" marB="18288" anchor="ctr"/>
+                </a:tc>
+                <a:tc>
+                  <a:txBody>
+                    <a:bodyPr wrap="square"/>
+                    <a:lstStyle/>
+                    <a:p>
+                      <a:r>
+                        <a:rPr sz="1100" b="0">
+                          <a:ea typeface="맑은 고딕"/>
+                          <a:cs typeface="맑은 고딕"/>
+                        </a:rPr>
+                        <a:t>2025 ~ 26</a:t>
+                      </a:r>
+                    </a:p>
+                  </a:txBody>
+                  <a:tcPr marL="54864" marR="54864" marT="18288" marB="18288" anchor="ctr"/>
+                </a:tc>
+                <a:tc>
+                  <a:txBody>
+                    <a:bodyPr wrap="square"/>
+                    <a:lstStyle/>
+                    <a:p>
+                      <a:r>
+                        <a:rPr sz="1100" b="0">
+                          <a:ea typeface="맑은 고딕"/>
+                          <a:cs typeface="맑은 고딕"/>
+                        </a:rPr>
+                        <a:t>희소 센서로 전체장</a:t>
+                      </a:r>
+                    </a:p>
+                  </a:txBody>
+                  <a:tcPr marL="54864" marR="54864" marT="18288" marB="18288" anchor="ctr"/>
+                </a:tc>
+                <a:tc>
+                  <a:txBody>
+                    <a:bodyPr wrap="square"/>
+                    <a:lstStyle/>
+                    <a:p>
+                      <a:r>
+                        <a:rPr sz="1100" b="0">
+                          <a:ea typeface="맑은 고딕"/>
+                          <a:cs typeface="맑은 고딕"/>
+                        </a:rPr>
+                        <a:t>칼만 · 물리유도 그래프 칼만(PiGGO) · PDE 제약 최적화</a:t>
+                      </a:r>
+                    </a:p>
+                  </a:txBody>
+                  <a:tcPr marL="54864" marR="54864" marT="18288" marB="18288" anchor="ctr"/>
+                </a:tc>
+                <a:tc>
+                  <a:txBody>
+                    <a:bodyPr wrap="square"/>
+                    <a:lstStyle/>
+                    <a:p>
+                      <a:r>
+                        <a:rPr sz="1100" b="0">
+                          <a:ea typeface="맑은 고딕"/>
+                          <a:cs typeface="맑은 고딕"/>
+                        </a:rPr>
+                        <a:t>상태추정 프레임이 주류. §8t의 프레이밍 재확인</a:t>
+                      </a:r>
+                    </a:p>
+                  </a:txBody>
+                  <a:tcPr marL="54864" marR="54864" marT="18288" marB="18288" anchor="ctr"/>
+                </a:tc>
+              </a:tr>
+              <a:tr h="401320">
+                <a:tc>
+                  <a:txBody>
+                    <a:bodyPr wrap="square"/>
+                    <a:lstStyle/>
+                    <a:p>
+                      <a:r>
+                        <a:rPr sz="1100" b="0">
+                          <a:ea typeface="맑은 고딕"/>
+                          <a:cs typeface="맑은 고딕"/>
+                        </a:rPr>
+                        <a:t>멀티태스크 가상센서</a:t>
+                      </a:r>
+                    </a:p>
+                  </a:txBody>
+                  <a:tcPr marL="54864" marR="54864" marT="18288" marB="18288" anchor="ctr"/>
+                </a:tc>
+                <a:tc>
+                  <a:txBody>
+                    <a:bodyPr wrap="square"/>
+                    <a:lstStyle/>
+                    <a:p>
+                      <a:r>
+                        <a:rPr sz="1100" b="0">
+                          <a:ea typeface="맑은 고딕"/>
+                          <a:cs typeface="맑은 고딕"/>
+                        </a:rPr>
+                        <a:t>2026</a:t>
+                      </a:r>
+                    </a:p>
+                  </a:txBody>
+                  <a:tcPr marL="54864" marR="54864" marT="18288" marB="18288" anchor="ctr"/>
+                </a:tc>
+                <a:tc>
+                  <a:txBody>
+                    <a:bodyPr wrap="square"/>
+                    <a:lstStyle/>
+                    <a:p>
+                      <a:r>
+                        <a:rPr sz="1100" b="0">
+                          <a:ea typeface="맑은 고딕"/>
+                          <a:cs typeface="맑은 고딕"/>
+                        </a:rPr>
+                        <a:t>수백 타깃 통합</a:t>
+                      </a:r>
+                    </a:p>
+                  </a:txBody>
+                  <a:tcPr marL="54864" marR="54864" marT="18288" marB="18288" anchor="ctr"/>
+                </a:tc>
+                <a:tc>
+                  <a:txBody>
+                    <a:bodyPr wrap="square"/>
+                    <a:lstStyle/>
+                    <a:p>
+                      <a:r>
+                        <a:rPr sz="1100" b="0">
+                          <a:ea typeface="맑은 고딕"/>
+                          <a:cs typeface="맑은 고딕"/>
+                        </a:rPr>
+                        <a:t>입력 선택을 학습하는 단일 모델. 계산 415배 · 메모리 951배 절감</a:t>
+                      </a:r>
+                    </a:p>
+                  </a:txBody>
+                  <a:tcPr marL="54864" marR="54864" marT="18288" marB="18288" anchor="ctr"/>
+                </a:tc>
+                <a:tc>
+                  <a:txBody>
+                    <a:bodyPr wrap="square"/>
+                    <a:lstStyle/>
+                    <a:p>
+                      <a:r>
+                        <a:rPr sz="1100" b="0">
+                          <a:ea typeface="맑은 고딕"/>
+                          <a:cs typeface="맑은 고딕"/>
+                        </a:rPr>
+                        <a:t>타깃 2개인 우리와 무관</a:t>
+                      </a:r>
+                    </a:p>
+                  </a:txBody>
+                  <a:tcPr marL="54864" marR="54864" marT="18288" marB="18288" anchor="ctr"/>
+                </a:tc>
+              </a:tr>
+              <a:tr h="401320">
+                <a:tc>
+                  <a:txBody>
+                    <a:bodyPr wrap="square"/>
+                    <a:lstStyle/>
+                    <a:p>
+                      <a:r>
+                        <a:rPr sz="1100" b="0">
+                          <a:ea typeface="맑은 고딕"/>
+                          <a:cs typeface="맑은 고딕"/>
+                        </a:rPr>
+                        <a:t>붕괴 예측 합성 진단 (EAST → J-TEXT)</a:t>
+                      </a:r>
+                    </a:p>
+                  </a:txBody>
+                  <a:tcPr marL="54864" marR="54864" marT="18288" marB="18288" anchor="ctr"/>
+                </a:tc>
+                <a:tc>
+                  <a:txBody>
+                    <a:bodyPr wrap="square"/>
+                    <a:lstStyle/>
+                    <a:p>
+                      <a:r>
+                        <a:rPr sz="1100" b="0">
+                          <a:ea typeface="맑은 고딕"/>
+                          <a:cs typeface="맑은 고딕"/>
+                        </a:rPr>
+                        <a:t>2026</a:t>
+                      </a:r>
+                    </a:p>
+                  </a:txBody>
+                  <a:tcPr marL="54864" marR="54864" marT="18288" marB="18288" anchor="ctr"/>
+                </a:tc>
+                <a:tc>
+                  <a:txBody>
+                    <a:bodyPr wrap="square"/>
+                    <a:lstStyle/>
+                    <a:p>
+                      <a:r>
+                        <a:rPr sz="1100" b="0">
+                          <a:ea typeface="맑은 고딕"/>
+                          <a:cs typeface="맑은 고딕"/>
+                        </a:rPr>
+                        <a:t>데이터 없는 장치</a:t>
+                      </a:r>
+                    </a:p>
+                  </a:txBody>
+                  <a:tcPr marL="54864" marR="54864" marT="18288" marB="18288" anchor="ctr"/>
+                </a:tc>
+                <a:tc>
+                  <a:txBody>
+                    <a:bodyPr wrap="square"/>
+                    <a:lstStyle/>
+                    <a:p>
+                      <a:r>
+                        <a:rPr sz="1100" b="0">
+                          <a:ea typeface="맑은 고딕"/>
+                          <a:cs typeface="맑은 고딕"/>
+                        </a:rPr>
+                        <a:t>NIMROD 합성 진단 + 푸리에 도메인 적응, 50 → 57 %</a:t>
+                      </a:r>
+                    </a:p>
+                  </a:txBody>
+                  <a:tcPr marL="54864" marR="54864" marT="18288" marB="18288" anchor="ctr"/>
+                </a:tc>
+                <a:tc>
+                  <a:txBody>
+                    <a:bodyPr wrap="square"/>
+                    <a:lstStyle/>
+                    <a:p>
+                      <a:r>
+                        <a:rPr sz="1100" b="0">
+                          <a:ea typeface="맑은 고딕"/>
+                          <a:cs typeface="맑은 고딕"/>
+                        </a:rPr>
+                        <a:t>V_rot에 NBI가 없다면 합성 토크 채널은 시뮬레이션에서만 올 수 있음</a:t>
+                      </a:r>
+                    </a:p>
+                  </a:txBody>
+                  <a:tcPr marL="54864" marR="54864" marT="18288" marB="18288" anchor="ctr"/>
+                </a:tc>
+              </a:tr>
+            </a:tbl>
+          </a:graphicData>
+        </a:graphic>
+      </p:graphicFrame>
       <p:sp>
         <p:nvSpPr>
           <p:cNvPr id="4" name="TextBox 3"/>
@@ -24069,7 +26602,7 @@
         </p:nvSpPr>
         <p:spPr>
           <a:xfrm>
-            <a:off x="585216" y="4549648"/>
+            <a:off x="585216" y="4803647"/>
             <a:ext cx="11027664" cy="486664"/>
           </a:xfrm>
           <a:prstGeom prst="rect">
@@ -24106,7 +26639,160 @@
 </p:sld>
 </file>
 
-<file path=ppt/slides/slide58.xml><?xml version="1.0" encoding="utf-8"?>
+<file path=ppt/slides/slide6.xml><?xml version="1.0" encoding="utf-8"?>
+<p:sld xmlns:a="http://schemas.openxmlformats.org/drawingml/2006/main" xmlns:p="http://schemas.openxmlformats.org/presentationml/2006/main" xmlns:r="http://schemas.openxmlformats.org/officeDocument/2006/relationships">
+  <p:cSld>
+    <p:spTree>
+      <p:nvGrpSpPr>
+        <p:cNvPr id="1" name=""/>
+        <p:cNvGrpSpPr/>
+        <p:nvPr/>
+      </p:nvGrpSpPr>
+      <p:grpSpPr/>
+      <p:sp>
+        <p:nvSpPr>
+          <p:cNvPr id="2" name="Title 1"/>
+          <p:cNvSpPr>
+            <a:spLocks noGrp="1"/>
+          </p:cNvSpPr>
+          <p:nvPr>
+            <p:ph type="title"/>
+          </p:nvPr>
+        </p:nvSpPr>
+        <p:spPr>
+          <a:xfrm>
+            <a:off x="585216" y="704088"/>
+            <a:ext cx="11027664" cy="1014984"/>
+          </a:xfrm>
+        </p:spPr>
+        <p:txBody>
+          <a:bodyPr wrap="square"/>
+          <a:lstStyle/>
+          <a:p>
+            <a:r>
+              <a:rPr b="0" sz="2800">
+                <a:ea typeface="맑은 고딕"/>
+                <a:cs typeface="맑은 고딕"/>
+              </a:rPr>
+              <a:t>기여는 다섯 가지로 요약된다</a:t>
+            </a:r>
+          </a:p>
+        </p:txBody>
+      </p:sp>
+      <p:sp>
+        <p:nvSpPr>
+          <p:cNvPr id="3" name="Content Placeholder 2"/>
+          <p:cNvSpPr>
+            <a:spLocks noGrp="1"/>
+          </p:cNvSpPr>
+          <p:nvPr>
+            <p:ph idx="1"/>
+          </p:nvPr>
+        </p:nvSpPr>
+        <p:spPr>
+          <a:xfrm>
+            <a:off x="585216" y="2176272"/>
+            <a:ext cx="11027664" cy="3675887"/>
+          </a:xfrm>
+        </p:spPr>
+        <p:txBody>
+          <a:bodyPr wrap="square"/>
+          <a:lstStyle/>
+          <a:p>
+            <a:pPr>
+              <a:spcAft>
+                <a:spcPts val="576"/>
+              </a:spcAft>
+            </a:pPr>
+            <a:r>
+              <a:rPr sz="1730">
+                <a:ea typeface="맑은 고딕"/>
+                <a:cs typeface="맑은 고딕"/>
+              </a:rPr>
+              <a:t>① 희소 타겟 나우캐스팅을 위한 인과적 전체격자 프레이밍. 라벨 없는 행을 버리는 대신 맥락으로 유지하고 희소성을 손실로 옮긴다.</a:t>
+            </a:r>
+          </a:p>
+          <a:p>
+            <a:pPr lvl="1">
+              <a:spcAft>
+                <a:spcPts val="288"/>
+              </a:spcAft>
+            </a:pPr>
+            <a:r>
+              <a:rPr sz="1540">
+                <a:ea typeface="맑은 고딕"/>
+                <a:cs typeface="맑은 고딕"/>
+              </a:rPr>
+              <a:t>짝지은 윈도 대조군 대비 통합 T_i skill +0.081(16회 실행, CI [+0.067, +0.096], 16/16 양수)이며 학습 비용은 오히려 더 싸다.</a:t>
+            </a:r>
+          </a:p>
+          <a:p>
+            <a:pPr>
+              <a:spcAft>
+                <a:spcPts val="576"/>
+              </a:spcAft>
+            </a:pPr>
+            <a:r>
+              <a:rPr sz="1730">
+                <a:ea typeface="맑은 고딕"/>
+                <a:cs typeface="맑은 고딕"/>
+              </a:rPr>
+              <a:t>② 사전등록된 두-모집단 shot 군집 평가 프로토콜. W=2, 유지값 전 구간 제거, 피팅 실패 0.53 %에 대한 두 공동 1차 모집단, 선택이 읽지 않는 test 셋.</a:t>
+            </a:r>
+          </a:p>
+          <a:p>
+            <a:pPr>
+              <a:spcAft>
+                <a:spcPts val="576"/>
+              </a:spcAft>
+            </a:pPr>
+            <a:r>
+              <a:rPr sz="1730">
+                <a:ea typeface="맑은 고딕"/>
+                <a:cs typeface="맑은 고딕"/>
+              </a:rPr>
+              <a:t>③ T_i에 대한 강건한 긍정 결과. 미래를 쓰는 PCHIP 대비 skill +0.17~+0.32로 두 모집단의 4개 분할 전부에서 PASS이고, 8개 셀 전부에서 인과 GP를 이긴다.</a:t>
+            </a:r>
+          </a:p>
+          <a:p>
+            <a:pPr>
+              <a:spcAft>
+                <a:spcPts val="576"/>
+              </a:spcAft>
+            </a:pPr>
+            <a:r>
+              <a:rPr sz="1730">
+                <a:ea typeface="맑은 고딕"/>
+                <a:cs typeface="맑은 고딕"/>
+              </a:rPr>
+              <a:t>④ V_rot에 대한 물리 기반 부정 결과. 동률이며(1/4·2/4 유의) 고속 진단을 0으로 만들어도 출력이 비트 단위로 동일하다.</a:t>
+            </a:r>
+          </a:p>
+          <a:p>
+            <a:pPr>
+              <a:spcAft>
+                <a:spcPts val="576"/>
+              </a:spcAft>
+            </a:pPr>
+            <a:r>
+              <a:rPr sz="1730">
+                <a:ea typeface="맑은 고딕"/>
+                <a:cs typeface="맑은 고딕"/>
+              </a:rPr>
+              <a:t>⑤ 두 개의 스트레스 테스트(MNAR 재가중·캠페인 이동), 복잡도와 크기 축의 종결, 문맥과 구조의 분리, 그리고 측정된 배치 가능성.</a:t>
+            </a:r>
+          </a:p>
+        </p:txBody>
+      </p:sp>
+    </p:spTree>
+  </p:cSld>
+  <p:clrMapOvr>
+    <a:masterClrMapping/>
+  </p:clrMapOvr>
+</p:sld>
+</file>
+
+<file path=ppt/slides/slide60.xml><?xml version="1.0" encoding="utf-8"?>
 <p:sld xmlns:a="http://schemas.openxmlformats.org/drawingml/2006/main" xmlns:p="http://schemas.openxmlformats.org/presentationml/2006/main" xmlns:r="http://schemas.openxmlformats.org/officeDocument/2006/relationships">
   <p:cSld>
     <p:spTree>
@@ -24563,7 +27249,7 @@
                           <a:ea typeface="맑은 고딕"/>
                           <a:cs typeface="맑은 고딕"/>
                         </a:rPr>
-                        <a:t>V_rot 입력 확장: 원시 kHz Mirnov 특징(B.6 A1) · NBI 토크 채널 · 도플러 분광 입력</a:t>
+                        <a:t>V_rot 입력 확장: 원시 kHz Mirnov 특징(B.6 A1) · NBI 토크 채널 · CES 피팅 품질 메타데이터 · 도플러 분광 입력</a:t>
                       </a:r>
                     </a:p>
                   </a:txBody>
@@ -24794,7 +27480,7 @@
 </p:sld>
 </file>
 
-<file path=ppt/slides/slide59.xml><?xml version="1.0" encoding="utf-8"?>
+<file path=ppt/slides/slide61.xml><?xml version="1.0" encoding="utf-8"?>
 <p:sld xmlns:a="http://schemas.openxmlformats.org/drawingml/2006/main" xmlns:p="http://schemas.openxmlformats.org/presentationml/2006/main" xmlns:r="http://schemas.openxmlformats.org/officeDocument/2006/relationships">
   <p:cSld>
     <p:spTree>
@@ -24979,157 +27665,18 @@
               <a:t>NBI 토크 채널, CES 피팅 품질 메타데이터, 그리고 도플러 분광 입력의 확보이다.</a:t>
             </a:r>
           </a:p>
-        </p:txBody>
-      </p:sp>
-    </p:spTree>
-  </p:cSld>
-  <p:clrMapOvr>
-    <a:masterClrMapping/>
-  </p:clrMapOvr>
-</p:sld>
-</file>
-
-<file path=ppt/slides/slide6.xml><?xml version="1.0" encoding="utf-8"?>
-<p:sld xmlns:a="http://schemas.openxmlformats.org/drawingml/2006/main" xmlns:p="http://schemas.openxmlformats.org/presentationml/2006/main" xmlns:r="http://schemas.openxmlformats.org/officeDocument/2006/relationships">
-  <p:cSld>
-    <p:spTree>
-      <p:nvGrpSpPr>
-        <p:cNvPr id="1" name=""/>
-        <p:cNvGrpSpPr/>
-        <p:nvPr/>
-      </p:nvGrpSpPr>
-      <p:grpSpPr/>
-      <p:sp>
-        <p:nvSpPr>
-          <p:cNvPr id="2" name="Title 1"/>
-          <p:cNvSpPr>
-            <a:spLocks noGrp="1"/>
-          </p:cNvSpPr>
-          <p:nvPr>
-            <p:ph type="title"/>
-          </p:nvPr>
-        </p:nvSpPr>
-        <p:spPr>
-          <a:xfrm>
-            <a:off x="585216" y="704088"/>
-            <a:ext cx="11027664" cy="1014984"/>
-          </a:xfrm>
-        </p:spPr>
-        <p:txBody>
-          <a:bodyPr wrap="square"/>
-          <a:lstStyle/>
-          <a:p>
-            <a:r>
-              <a:rPr b="0" sz="2800">
-                <a:ea typeface="맑은 고딕"/>
-                <a:cs typeface="맑은 고딕"/>
-              </a:rPr>
-              <a:t>기여는 다섯 가지로 요약된다</a:t>
-            </a:r>
-          </a:p>
-        </p:txBody>
-      </p:sp>
-      <p:sp>
-        <p:nvSpPr>
-          <p:cNvPr id="3" name="Content Placeholder 2"/>
-          <p:cNvSpPr>
-            <a:spLocks noGrp="1"/>
-          </p:cNvSpPr>
-          <p:nvPr>
-            <p:ph idx="1"/>
-          </p:nvPr>
-        </p:nvSpPr>
-        <p:spPr>
-          <a:xfrm>
-            <a:off x="585216" y="2176272"/>
-            <a:ext cx="11027664" cy="3675887"/>
-          </a:xfrm>
-        </p:spPr>
-        <p:txBody>
-          <a:bodyPr wrap="square"/>
-          <a:lstStyle/>
-          <a:p>
-            <a:pPr>
+          <a:p>
+            <a:pPr lvl="1">
               <a:spcAft>
-                <a:spcPts val="576"/>
+                <a:spcPts val="300"/>
               </a:spcAft>
             </a:pPr>
             <a:r>
-              <a:rPr sz="1730">
-                <a:ea typeface="맑은 고딕"/>
-                <a:cs typeface="맑은 고딕"/>
-              </a:rPr>
-              <a:t>① 희소 타겟 나우캐스팅을 위한 인과적 전체격자 프레이밍. 라벨 없는 행을 버리는 대신 맥락으로 유지하고 희소성을 손실로 옮긴다.</a:t>
-            </a:r>
-          </a:p>
-          <a:p>
-            <a:pPr lvl="1">
-              <a:spcAft>
-                <a:spcPts val="288"/>
-              </a:spcAft>
-            </a:pPr>
-            <a:r>
-              <a:rPr sz="1540">
-                <a:ea typeface="맑은 고딕"/>
-                <a:cs typeface="맑은 고딕"/>
-              </a:rPr>
-              <a:t>짝지은 윈도 대조군 대비 통합 T_i skill +0.081(16회 실행, CI [+0.067, +0.096], 16/16 양수)이며 학습 비용은 오히려 더 싸다.</a:t>
-            </a:r>
-          </a:p>
-          <a:p>
-            <a:pPr>
-              <a:spcAft>
-                <a:spcPts val="576"/>
-              </a:spcAft>
-            </a:pPr>
-            <a:r>
-              <a:rPr sz="1730">
-                <a:ea typeface="맑은 고딕"/>
-                <a:cs typeface="맑은 고딕"/>
-              </a:rPr>
-              <a:t>② 사전등록된 두-모집단 shot 군집 평가 프로토콜. W=2, 유지값 전 구간 제거, 피팅 실패 0.53 %에 대한 두 공동 1차 모집단, 선택이 읽지 않는 test 셋.</a:t>
-            </a:r>
-          </a:p>
-          <a:p>
-            <a:pPr>
-              <a:spcAft>
-                <a:spcPts val="576"/>
-              </a:spcAft>
-            </a:pPr>
-            <a:r>
-              <a:rPr sz="1730">
-                <a:ea typeface="맑은 고딕"/>
-                <a:cs typeface="맑은 고딕"/>
-              </a:rPr>
-              <a:t>③ T_i에 대한 강건한 긍정 결과. 미래를 쓰는 PCHIP 대비 skill +0.17~+0.32로 두 모집단의 4개 분할 전부에서 PASS이고, 8개 셀 전부에서 인과 GP를 이긴다.</a:t>
-            </a:r>
-          </a:p>
-          <a:p>
-            <a:pPr>
-              <a:spcAft>
-                <a:spcPts val="576"/>
-              </a:spcAft>
-            </a:pPr>
-            <a:r>
-              <a:rPr sz="1730">
-                <a:ea typeface="맑은 고딕"/>
-                <a:cs typeface="맑은 고딕"/>
-              </a:rPr>
-              <a:t>④ V_rot에 대한 물리 기반 부정 결과. 동률이며(1/4·2/4 유의) 고속 진단을 0으로 만들어도 출력이 비트 단위로 동일하다.</a:t>
-            </a:r>
-          </a:p>
-          <a:p>
-            <a:pPr>
-              <a:spcAft>
-                <a:spcPts val="576"/>
-              </a:spcAft>
-            </a:pPr>
-            <a:r>
-              <a:rPr sz="1730">
-                <a:ea typeface="맑은 고딕"/>
-                <a:cs typeface="맑은 고딕"/>
-              </a:rPr>
-              <a:t>⑤ 두 개의 스트레스 테스트(MNAR 재가중·캠페인 이동), 복잡도와 크기 축의 종결, 문맥과 구조의 분리, 그리고 측정된 배치 가능성.</a:t>
+              <a:rPr sz="1600">
+                <a:ea typeface="맑은 고딕"/>
+                <a:cs typeface="맑은 고딕"/>
+              </a:rPr>
+              <a:t>지금도 Δt &gt; 15 ms와 peak 층에서는 +0.54 ~ +0.79로 이긴다.</a:t>
             </a:r>
           </a:p>
         </p:txBody>

--- a/docs/presentation/KSTAR_CES_졸논정리_논문흐름.pptx
+++ b/docs/presentation/KSTAR_CES_졸논정리_논문흐름.pptx
@@ -69,6 +69,7 @@
     <p:sldId id="314" r:id="rId65"/>
     <p:sldId id="315" r:id="rId66"/>
     <p:sldId id="316" r:id="rId67"/>
+    <p:sldId id="317" r:id="rId68"/>
   </p:sldIdLst>
   <p:sldSz cx="12192000" cy="6858000"/>
   <p:notesSz cx="6858000" cy="9144000"/>
@@ -4395,6 +4396,87 @@
                 <a:ea typeface="맑은 고딕"/>
                 <a:cs typeface="맑은 고딕"/>
               </a:rPr>
+              <a:t>- NN-CES (KSTAR CES 신경망 분석): https://doi.org/10.1016/j.fusengdes.2025.115518</a:t>
+            </a:r>
+          </a:p>
+          <a:p>
+            <a:r>
+              <a:rPr>
+                <a:ea typeface="맑은 고딕"/>
+                <a:cs typeface="맑은 고딕"/>
+              </a:rPr>
+              <a:t>- SVMR+GPR KSTAR Ti 프로파일: https://doi.org/10.1088/1741-4326/ad7304</a:t>
+            </a:r>
+          </a:p>
+          <a:p>
+            <a:r>
+              <a:rPr>
+                <a:ea typeface="맑은 고딕"/>
+                <a:cs typeface="맑은 고딕"/>
+              </a:rPr>
+              <a:t>- 이상치 강건 Bayesian mtanh 적합: https://arxiv.org/html/2607.14142</a:t>
+            </a:r>
+          </a:p>
+          <a:p>
+            <a:r>
+              <a:rPr>
+                <a:ea typeface="맑은 고딕"/>
+                <a:cs typeface="맑은 고딕"/>
+              </a:rPr>
+              <a:t>- TSER 결측 Te 복원 (EAST): https://doi.org/10.1088/1741-4326/addb5f</a:t>
+            </a:r>
+          </a:p>
+          <a:p>
+            <a:r>
+              <a:rPr>
+                <a:ea typeface="맑은 고딕"/>
+                <a:cs typeface="맑은 고딕"/>
+              </a:rPr>
+              <a:t>- 전 상태 복원 (희소 센서): https://arxiv.org/abs/2607.04390</a:t>
+            </a:r>
+          </a:p>
+          <a:p>
+            <a:r>
+              <a:rPr>
+                <a:ea typeface="맑은 고딕"/>
+                <a:cs typeface="맑은 고딕"/>
+              </a:rPr>
+              <a:t>- 평형 재구성 챌린지: https://arxiv.org/html/2609.01750</a:t>
+            </a:r>
+          </a:p>
+          <a:p>
+            <a:r>
+              <a:rPr>
+                <a:ea typeface="맑은 고딕"/>
+                <a:cs typeface="맑은 고딕"/>
+              </a:rPr>
+              <a:t>- JET CXRS 신경망 (1993, 계보의 시작): https://www.microsoft.com/en-us/research/wp-content/uploads/2016/02/bishop-cxrs-ppcf-93.pdf</a:t>
+            </a:r>
+          </a:p>
+          <a:p>
+            <a:r>
+              <a:rPr>
+                <a:ea typeface="맑은 고딕"/>
+                <a:cs typeface="맑은 고딕"/>
+              </a:rPr>
+              <a:t>- ST40 교차 진단 grey-box: https://arxiv.org/abs/2407.18741</a:t>
+            </a:r>
+          </a:p>
+          <a:p>
+            <a:r>
+              <a:rPr>
+                <a:ea typeface="맑은 고딕"/>
+                <a:cs typeface="맑은 고딕"/>
+              </a:rPr>
+              <a:t>- W7-X Bayesian Ti 추론: https://doi.org/10.1088/1361-6587/ad3c1d</a:t>
+            </a:r>
+          </a:p>
+          <a:p>
+            <a:r>
+              <a:rPr>
+                <a:ea typeface="맑은 고딕"/>
+                <a:cs typeface="맑은 고딕"/>
+              </a:rPr>
               <a:t>- TSI-Bench: https://arxiv.org/abs/2406.12747</a:t>
             </a:r>
           </a:p>
@@ -4802,6 +4884,87 @@
                 <a:ea typeface="맑은 고딕"/>
                 <a:cs typeface="맑은 고딕"/>
               </a:rPr>
+              <a:t>- NN-CES (KSTAR CES 신경망 분석): https://doi.org/10.1016/j.fusengdes.2025.115518</a:t>
+            </a:r>
+          </a:p>
+          <a:p>
+            <a:r>
+              <a:rPr>
+                <a:ea typeface="맑은 고딕"/>
+                <a:cs typeface="맑은 고딕"/>
+              </a:rPr>
+              <a:t>- SVMR+GPR KSTAR Ti 프로파일: https://doi.org/10.1088/1741-4326/ad7304</a:t>
+            </a:r>
+          </a:p>
+          <a:p>
+            <a:r>
+              <a:rPr>
+                <a:ea typeface="맑은 고딕"/>
+                <a:cs typeface="맑은 고딕"/>
+              </a:rPr>
+              <a:t>- 이상치 강건 Bayesian mtanh 적합: https://arxiv.org/html/2607.14142</a:t>
+            </a:r>
+          </a:p>
+          <a:p>
+            <a:r>
+              <a:rPr>
+                <a:ea typeface="맑은 고딕"/>
+                <a:cs typeface="맑은 고딕"/>
+              </a:rPr>
+              <a:t>- TSER 결측 Te 복원 (EAST): https://doi.org/10.1088/1741-4326/addb5f</a:t>
+            </a:r>
+          </a:p>
+          <a:p>
+            <a:r>
+              <a:rPr>
+                <a:ea typeface="맑은 고딕"/>
+                <a:cs typeface="맑은 고딕"/>
+              </a:rPr>
+              <a:t>- 전 상태 복원 (희소 센서): https://arxiv.org/abs/2607.04390</a:t>
+            </a:r>
+          </a:p>
+          <a:p>
+            <a:r>
+              <a:rPr>
+                <a:ea typeface="맑은 고딕"/>
+                <a:cs typeface="맑은 고딕"/>
+              </a:rPr>
+              <a:t>- 평형 재구성 챌린지: https://arxiv.org/html/2609.01750</a:t>
+            </a:r>
+          </a:p>
+          <a:p>
+            <a:r>
+              <a:rPr>
+                <a:ea typeface="맑은 고딕"/>
+                <a:cs typeface="맑은 고딕"/>
+              </a:rPr>
+              <a:t>- JET CXRS 신경망 (1993, 계보의 시작): https://www.microsoft.com/en-us/research/wp-content/uploads/2016/02/bishop-cxrs-ppcf-93.pdf</a:t>
+            </a:r>
+          </a:p>
+          <a:p>
+            <a:r>
+              <a:rPr>
+                <a:ea typeface="맑은 고딕"/>
+                <a:cs typeface="맑은 고딕"/>
+              </a:rPr>
+              <a:t>- ST40 교차 진단 grey-box: https://arxiv.org/abs/2407.18741</a:t>
+            </a:r>
+          </a:p>
+          <a:p>
+            <a:r>
+              <a:rPr>
+                <a:ea typeface="맑은 고딕"/>
+                <a:cs typeface="맑은 고딕"/>
+              </a:rPr>
+              <a:t>- W7-X Bayesian Ti 추론: https://doi.org/10.1088/1361-6587/ad3c1d</a:t>
+            </a:r>
+          </a:p>
+          <a:p>
+            <a:r>
+              <a:rPr>
+                <a:ea typeface="맑은 고딕"/>
+                <a:cs typeface="맑은 고딕"/>
+              </a:rPr>
               <a:t>- TSI-Bench: https://arxiv.org/abs/2406.12747</a:t>
             </a:r>
           </a:p>
@@ -5047,7 +5210,421 @@
                 <a:ea typeface="맑은 고딕"/>
                 <a:cs typeface="맑은 고딕"/>
               </a:rPr>
-              <a:t>마지막 열은 본 저장소의 통제 실험 판정이며, 새 계열을 도입하기 전에 이 열을 먼저 읽는다.</a:t>
+              <a:t>2026-09-05 조사한 핵융합 12편의 요약이다.</a:t>
+            </a:r>
+          </a:p>
+          <a:p>
+            <a:r>
+              <a:rPr>
+                <a:ea typeface="맑은 고딕"/>
+                <a:cs typeface="맑은 고딕"/>
+              </a:rPr>
+              <a:t>조사일 2026-09-05. 출처:</a:t>
+            </a:r>
+          </a:p>
+          <a:p>
+            <a:r>
+              <a:rPr>
+                <a:ea typeface="맑은 고딕"/>
+                <a:cs typeface="맑은 고딕"/>
+              </a:rPr>
+              <a:t>- Diag2Diag: https://arxiv.org/html/2405.05908v4</a:t>
+            </a:r>
+          </a:p>
+          <a:p>
+            <a:r>
+              <a:rPr>
+                <a:ea typeface="맑은 고딕"/>
+                <a:cs typeface="맑은 고딕"/>
+              </a:rPr>
+              <a:t>- Diag2Diag Nat. Comm.: https://www.nature.com/articles/s41467-025-63492-1</a:t>
+            </a:r>
+          </a:p>
+          <a:p>
+            <a:r>
+              <a:rPr>
+                <a:ea typeface="맑은 고딕"/>
+                <a:cs typeface="맑은 고딕"/>
+              </a:rPr>
+              <a:t>- COMPASS 시간 초해상: https://iopscience.iop.org/article/10.1088/1361-6587/ae72c6</a:t>
+            </a:r>
+          </a:p>
+          <a:p>
+            <a:r>
+              <a:rPr>
+                <a:ea typeface="맑은 고딕"/>
+                <a:cs typeface="맑은 고딕"/>
+              </a:rPr>
+              <a:t>- FusionMAE: https://arxiv.org/abs/2509.12945</a:t>
+            </a:r>
+          </a:p>
+          <a:p>
+            <a:r>
+              <a:rPr>
+                <a:ea typeface="맑은 고딕"/>
+                <a:cs typeface="맑은 고딕"/>
+              </a:rPr>
+              <a:t>- TokaMind: https://arxiv.org/html/2602.15084v2</a:t>
+            </a:r>
+          </a:p>
+          <a:p>
+            <a:r>
+              <a:rPr>
+                <a:ea typeface="맑은 고딕"/>
+                <a:cs typeface="맑은 고딕"/>
+              </a:rPr>
+              <a:t>- TokaMark: https://arxiv.org/html/2602.10132v2</a:t>
+            </a:r>
+          </a:p>
+          <a:p>
+            <a:r>
+              <a:rPr>
+                <a:ea typeface="맑은 고딕"/>
+                <a:cs typeface="맑은 고딕"/>
+              </a:rPr>
+              <a:t>- PanoMHD: https://arxiv.org/html/2603.02672</a:t>
+            </a:r>
+          </a:p>
+          <a:p>
+            <a:r>
+              <a:rPr>
+                <a:ea typeface="맑은 고딕"/>
+                <a:cs typeface="맑은 고딕"/>
+              </a:rPr>
+              <a:t>- TCV 멀티모달 VAE: https://arxiv.org/abs/2504.17710</a:t>
+            </a:r>
+          </a:p>
+          <a:p>
+            <a:r>
+              <a:rPr>
+                <a:ea typeface="맑은 고딕"/>
+                <a:cs typeface="맑은 고딕"/>
+              </a:rPr>
+              <a:t>- EAST 지식증류: https://arxiv.org/html/2607.04241</a:t>
+            </a:r>
+          </a:p>
+          <a:p>
+            <a:r>
+              <a:rPr>
+                <a:ea typeface="맑은 고딕"/>
+                <a:cs typeface="맑은 고딕"/>
+              </a:rPr>
+              <a:t>- WEST: https://arxiv.org/html/2602.19110</a:t>
+            </a:r>
+          </a:p>
+          <a:p>
+            <a:r>
+              <a:rPr>
+                <a:ea typeface="맑은 고딕"/>
+                <a:cs typeface="맑은 고딕"/>
+              </a:rPr>
+              <a:t>- EAST XCS ANN: https://iopscience.iop.org/article/10.1088/1741-4326/ad73e8</a:t>
+            </a:r>
+          </a:p>
+          <a:p>
+            <a:r>
+              <a:rPr>
+                <a:ea typeface="맑은 고딕"/>
+                <a:cs typeface="맑은 고딕"/>
+              </a:rPr>
+              <a:t>- Abbate 2025: https://iopscience.iop.org/article/10.1088/1741-4326/adc283</a:t>
+            </a:r>
+          </a:p>
+          <a:p>
+            <a:r>
+              <a:rPr>
+                <a:ea typeface="맑은 고딕"/>
+                <a:cs typeface="맑은 고딕"/>
+              </a:rPr>
+              <a:t>- 합성 진단 증강: https://arxiv.org/abs/2606.08462</a:t>
+            </a:r>
+          </a:p>
+          <a:p>
+            <a:r>
+              <a:rPr>
+                <a:ea typeface="맑은 고딕"/>
+                <a:cs typeface="맑은 고딕"/>
+              </a:rPr>
+              <a:t>- TokEye: https://arxiv.org/pdf/2602.20317</a:t>
+            </a:r>
+          </a:p>
+          <a:p>
+            <a:r>
+              <a:rPr>
+                <a:ea typeface="맑은 고딕"/>
+                <a:cs typeface="맑은 고딕"/>
+              </a:rPr>
+              <a:t>- KSTAR EPED 재구성: https://link.springer.com/article/10.1007/s40042-026-01580-1</a:t>
+            </a:r>
+          </a:p>
+          <a:p>
+            <a:r>
+              <a:rPr>
+                <a:ea typeface="맑은 고딕"/>
+                <a:cs typeface="맑은 고딕"/>
+              </a:rPr>
+              <a:t>- DIII-D 코일 shot-to-shot: https://www.ans.org/news/2026-08-18/article-8302/new-ml-framework-predicts-shifts-between-shots-at-diiid/</a:t>
+            </a:r>
+          </a:p>
+          <a:p>
+            <a:r>
+              <a:rPr>
+                <a:ea typeface="맑은 고딕"/>
+                <a:cs typeface="맑은 고딕"/>
+              </a:rPr>
+              <a:t>- NN-CES (KSTAR CES 신경망 분석): https://doi.org/10.1016/j.fusengdes.2025.115518</a:t>
+            </a:r>
+          </a:p>
+          <a:p>
+            <a:r>
+              <a:rPr>
+                <a:ea typeface="맑은 고딕"/>
+                <a:cs typeface="맑은 고딕"/>
+              </a:rPr>
+              <a:t>- SVMR+GPR KSTAR Ti 프로파일: https://doi.org/10.1088/1741-4326/ad7304</a:t>
+            </a:r>
+          </a:p>
+          <a:p>
+            <a:r>
+              <a:rPr>
+                <a:ea typeface="맑은 고딕"/>
+                <a:cs typeface="맑은 고딕"/>
+              </a:rPr>
+              <a:t>- 이상치 강건 Bayesian mtanh 적합: https://arxiv.org/html/2607.14142</a:t>
+            </a:r>
+          </a:p>
+          <a:p>
+            <a:r>
+              <a:rPr>
+                <a:ea typeface="맑은 고딕"/>
+                <a:cs typeface="맑은 고딕"/>
+              </a:rPr>
+              <a:t>- TSER 결측 Te 복원 (EAST): https://doi.org/10.1088/1741-4326/addb5f</a:t>
+            </a:r>
+          </a:p>
+          <a:p>
+            <a:r>
+              <a:rPr>
+                <a:ea typeface="맑은 고딕"/>
+                <a:cs typeface="맑은 고딕"/>
+              </a:rPr>
+              <a:t>- 전 상태 복원 (희소 센서): https://arxiv.org/abs/2607.04390</a:t>
+            </a:r>
+          </a:p>
+          <a:p>
+            <a:r>
+              <a:rPr>
+                <a:ea typeface="맑은 고딕"/>
+                <a:cs typeface="맑은 고딕"/>
+              </a:rPr>
+              <a:t>- 평형 재구성 챌린지: https://arxiv.org/html/2609.01750</a:t>
+            </a:r>
+          </a:p>
+          <a:p>
+            <a:r>
+              <a:rPr>
+                <a:ea typeface="맑은 고딕"/>
+                <a:cs typeface="맑은 고딕"/>
+              </a:rPr>
+              <a:t>- JET CXRS 신경망 (1993, 계보의 시작): https://www.microsoft.com/en-us/research/wp-content/uploads/2016/02/bishop-cxrs-ppcf-93.pdf</a:t>
+            </a:r>
+          </a:p>
+          <a:p>
+            <a:r>
+              <a:rPr>
+                <a:ea typeface="맑은 고딕"/>
+                <a:cs typeface="맑은 고딕"/>
+              </a:rPr>
+              <a:t>- ST40 교차 진단 grey-box: https://arxiv.org/abs/2407.18741</a:t>
+            </a:r>
+          </a:p>
+          <a:p>
+            <a:r>
+              <a:rPr>
+                <a:ea typeface="맑은 고딕"/>
+                <a:cs typeface="맑은 고딕"/>
+              </a:rPr>
+              <a:t>- W7-X Bayesian Ti 추론: https://doi.org/10.1088/1361-6587/ad3c1d</a:t>
+            </a:r>
+          </a:p>
+          <a:p>
+            <a:r>
+              <a:rPr>
+                <a:ea typeface="맑은 고딕"/>
+                <a:cs typeface="맑은 고딕"/>
+              </a:rPr>
+              <a:t>- TSI-Bench: https://arxiv.org/abs/2406.12747</a:t>
+            </a:r>
+          </a:p>
+          <a:p>
+            <a:r>
+              <a:rPr>
+                <a:ea typeface="맑은 고딕"/>
+                <a:cs typeface="맑은 고딕"/>
+              </a:rPr>
+              <a:t>- STDiff: https://arxiv.org/html/2508.19011v1</a:t>
+            </a:r>
+          </a:p>
+          <a:p>
+            <a:r>
+              <a:rPr>
+                <a:ea typeface="맑은 고딕"/>
+                <a:cs typeface="맑은 고딕"/>
+              </a:rPr>
+              <a:t>- iTimER: https://arxiv.org/html/2511.06854</a:t>
+            </a:r>
+          </a:p>
+          <a:p>
+            <a:r>
+              <a:rPr>
+                <a:ea typeface="맑은 고딕"/>
+                <a:cs typeface="맑은 고딕"/>
+              </a:rPr>
+              <a:t>- Neural CDE 보정기: https://arxiv.org/html/2512.12116v3</a:t>
+            </a:r>
+          </a:p>
+          <a:p>
+            <a:r>
+              <a:rPr>
+                <a:ea typeface="맑은 고딕"/>
+                <a:cs typeface="맑은 고딕"/>
+              </a:rPr>
+              <a:t>- TimeXer: https://github.com/thuml/TimeXer</a:t>
+            </a:r>
+          </a:p>
+          <a:p>
+            <a:r>
+              <a:rPr>
+                <a:ea typeface="맑은 고딕"/>
+                <a:cs typeface="맑은 고딕"/>
+              </a:rPr>
+              <a:t>- TiRex-2: https://arxiv.org/html/2607.01204v1</a:t>
+            </a:r>
+          </a:p>
+          <a:p>
+            <a:r>
+              <a:rPr>
+                <a:ea typeface="맑은 고딕"/>
+                <a:cs typeface="맑은 고딕"/>
+              </a:rPr>
+              <a:t>- TabPFN-TS: https://arxiv.org/abs/2501.02945</a:t>
+            </a:r>
+          </a:p>
+          <a:p>
+            <a:r>
+              <a:rPr>
+                <a:ea typeface="맑은 고딕"/>
+                <a:cs typeface="맑은 고딕"/>
+              </a:rPr>
+              <a:t>- TSFM 벤치마크 경고: https://arxiv.org/html/2510.13654v1</a:t>
+            </a:r>
+          </a:p>
+          <a:p>
+            <a:r>
+              <a:rPr>
+                <a:ea typeface="맑은 고딕"/>
+                <a:cs typeface="맑은 고딕"/>
+              </a:rPr>
+              <a:t>- TimeMAE: https://arxiv.org/html/2303.00320v4</a:t>
+            </a:r>
+          </a:p>
+          <a:p>
+            <a:r>
+              <a:rPr>
+                <a:ea typeface="맑은 고딕"/>
+                <a:cs typeface="맑은 고딕"/>
+              </a:rPr>
+              <a:t>- RG-ResMoE: https://arxiv.org/html/2608.12251v1</a:t>
+            </a:r>
+          </a:p>
+          <a:p>
+            <a:r>
+              <a:rPr>
+                <a:ea typeface="맑은 고딕"/>
+                <a:cs typeface="맑은 고딕"/>
+              </a:rPr>
+              <a:t>- KalmanNet: https://dl.acm.org/doi/abs/10.1109/tsp.2022.3158588</a:t>
+            </a:r>
+          </a:p>
+          <a:p>
+            <a:r>
+              <a:rPr>
+                <a:ea typeface="맑은 고딕"/>
+                <a:cs typeface="맑은 고딕"/>
+              </a:rPr>
+              <a:t>- Unscented KalmanNet: https://arxiv.org/html/2608.04201</a:t>
+            </a:r>
+          </a:p>
+          <a:p>
+            <a:r>
+              <a:rPr>
+                <a:ea typeface="맑은 고딕"/>
+                <a:cs typeface="맑은 고딕"/>
+              </a:rPr>
+              <a:t>- DLFM: https://link.springer.com/article/10.1007/s10994-025-06824-y</a:t>
+            </a:r>
+          </a:p>
+          <a:p>
+            <a:r>
+              <a:rPr>
+                <a:ea typeface="맑은 고딕"/>
+                <a:cs typeface="맑은 고딕"/>
+              </a:rPr>
+              <a:t>- 이분산 회귀 병리: https://arxiv.org/pdf/2306.16717</a:t>
+            </a:r>
+          </a:p>
+          <a:p>
+            <a:r>
+              <a:rPr>
+                <a:ea typeface="맑은 고딕"/>
+                <a:cs typeface="맑은 고딕"/>
+              </a:rPr>
+              <a:t>- 반지도 VAE 회귀: https://arxiv.org/pdf/2211.05979</a:t>
+            </a:r>
+          </a:p>
+          <a:p>
+            <a:r>
+              <a:rPr>
+                <a:ea typeface="맑은 고딕"/>
+                <a:cs typeface="맑은 고딕"/>
+              </a:rPr>
+              <a:t>- GP-MIDAS: https://arxiv.org/html/2402.10574v2</a:t>
+            </a:r>
+          </a:p>
+          <a:p>
+            <a:r>
+              <a:rPr>
+                <a:ea typeface="맑은 고딕"/>
+                <a:cs typeface="맑은 고딕"/>
+              </a:rPr>
+              <a:t>- 저가 센서 보정: https://arxiv.org/html/2604.21527v1</a:t>
+            </a:r>
+          </a:p>
+          <a:p>
+            <a:r>
+              <a:rPr>
+                <a:ea typeface="맑은 고딕"/>
+                <a:cs typeface="맑은 고딕"/>
+              </a:rPr>
+              <a:t>- 커프리스 혈압 벤치마크: https://arxiv.org/html/2602.04725v1</a:t>
+            </a:r>
+          </a:p>
+          <a:p>
+            <a:r>
+              <a:rPr>
+                <a:ea typeface="맑은 고딕"/>
+                <a:cs typeface="맑은 고딕"/>
+              </a:rPr>
+              <a:t>- PiGGO: https://arxiv.org/pdf/2604.26593</a:t>
+            </a:r>
+          </a:p>
+          <a:p>
+            <a:r>
+              <a:rPr>
+                <a:ea typeface="맑은 고딕"/>
+                <a:cs typeface="맑은 고딕"/>
+              </a:rPr>
+              <a:t>- 멀티태스크 가상센서: https://arxiv.org/abs/2601.20634</a:t>
             </a:r>
           </a:p>
         </p:txBody>
@@ -5195,7 +5772,7 @@
                 <a:ea typeface="맑은 고딕"/>
                 <a:cs typeface="맑은 고딕"/>
               </a:rPr>
-              <a:t>혼합주기 나우캐스팅 · 저가 센서 보정 · 커프리스 혈압 · 구조 가상 센싱 · 합성 진단 증강의 다섯 계열에서 같은 결론이 반복된다.</a:t>
+              <a:t>마지막 열은 본 저장소의 통제 실험 판정이며, 새 계열을 도입하기 전에 이 열을 먼저 읽는다.</a:t>
             </a:r>
           </a:p>
         </p:txBody>
@@ -5269,340 +5846,7 @@
                 <a:ea typeface="맑은 고딕"/>
                 <a:cs typeface="맑은 고딕"/>
               </a:rPr>
-              <a:t>우선순위는 비용 대비 정보량 순이다.</a:t>
-            </a:r>
-          </a:p>
-          <a:p>
-            <a:r>
-              <a:rPr>
-                <a:ea typeface="맑은 고딕"/>
-                <a:cs typeface="맑은 고딕"/>
-              </a:rPr>
-              <a:t>조사일 2026-09-05. 출처:</a:t>
-            </a:r>
-          </a:p>
-          <a:p>
-            <a:r>
-              <a:rPr>
-                <a:ea typeface="맑은 고딕"/>
-                <a:cs typeface="맑은 고딕"/>
-              </a:rPr>
-              <a:t>- Diag2Diag: https://arxiv.org/html/2405.05908v4</a:t>
-            </a:r>
-          </a:p>
-          <a:p>
-            <a:r>
-              <a:rPr>
-                <a:ea typeface="맑은 고딕"/>
-                <a:cs typeface="맑은 고딕"/>
-              </a:rPr>
-              <a:t>- Diag2Diag Nat. Comm.: https://www.nature.com/articles/s41467-025-63492-1</a:t>
-            </a:r>
-          </a:p>
-          <a:p>
-            <a:r>
-              <a:rPr>
-                <a:ea typeface="맑은 고딕"/>
-                <a:cs typeface="맑은 고딕"/>
-              </a:rPr>
-              <a:t>- COMPASS 시간 초해상: https://iopscience.iop.org/article/10.1088/1361-6587/ae72c6</a:t>
-            </a:r>
-          </a:p>
-          <a:p>
-            <a:r>
-              <a:rPr>
-                <a:ea typeface="맑은 고딕"/>
-                <a:cs typeface="맑은 고딕"/>
-              </a:rPr>
-              <a:t>- FusionMAE: https://arxiv.org/abs/2509.12945</a:t>
-            </a:r>
-          </a:p>
-          <a:p>
-            <a:r>
-              <a:rPr>
-                <a:ea typeface="맑은 고딕"/>
-                <a:cs typeface="맑은 고딕"/>
-              </a:rPr>
-              <a:t>- TokaMind: https://arxiv.org/html/2602.15084v2</a:t>
-            </a:r>
-          </a:p>
-          <a:p>
-            <a:r>
-              <a:rPr>
-                <a:ea typeface="맑은 고딕"/>
-                <a:cs typeface="맑은 고딕"/>
-              </a:rPr>
-              <a:t>- TokaMark: https://arxiv.org/html/2602.10132v2</a:t>
-            </a:r>
-          </a:p>
-          <a:p>
-            <a:r>
-              <a:rPr>
-                <a:ea typeface="맑은 고딕"/>
-                <a:cs typeface="맑은 고딕"/>
-              </a:rPr>
-              <a:t>- PanoMHD: https://arxiv.org/html/2603.02672</a:t>
-            </a:r>
-          </a:p>
-          <a:p>
-            <a:r>
-              <a:rPr>
-                <a:ea typeface="맑은 고딕"/>
-                <a:cs typeface="맑은 고딕"/>
-              </a:rPr>
-              <a:t>- TCV 멀티모달 VAE: https://arxiv.org/abs/2504.17710</a:t>
-            </a:r>
-          </a:p>
-          <a:p>
-            <a:r>
-              <a:rPr>
-                <a:ea typeface="맑은 고딕"/>
-                <a:cs typeface="맑은 고딕"/>
-              </a:rPr>
-              <a:t>- EAST 지식증류: https://arxiv.org/html/2607.04241</a:t>
-            </a:r>
-          </a:p>
-          <a:p>
-            <a:r>
-              <a:rPr>
-                <a:ea typeface="맑은 고딕"/>
-                <a:cs typeface="맑은 고딕"/>
-              </a:rPr>
-              <a:t>- WEST: https://arxiv.org/html/2602.19110</a:t>
-            </a:r>
-          </a:p>
-          <a:p>
-            <a:r>
-              <a:rPr>
-                <a:ea typeface="맑은 고딕"/>
-                <a:cs typeface="맑은 고딕"/>
-              </a:rPr>
-              <a:t>- EAST XCS ANN: https://iopscience.iop.org/article/10.1088/1741-4326/ad73e8</a:t>
-            </a:r>
-          </a:p>
-          <a:p>
-            <a:r>
-              <a:rPr>
-                <a:ea typeface="맑은 고딕"/>
-                <a:cs typeface="맑은 고딕"/>
-              </a:rPr>
-              <a:t>- Abbate 2025: https://iopscience.iop.org/article/10.1088/1741-4326/adc283</a:t>
-            </a:r>
-          </a:p>
-          <a:p>
-            <a:r>
-              <a:rPr>
-                <a:ea typeface="맑은 고딕"/>
-                <a:cs typeface="맑은 고딕"/>
-              </a:rPr>
-              <a:t>- 합성 진단 증강: https://arxiv.org/abs/2606.08462</a:t>
-            </a:r>
-          </a:p>
-          <a:p>
-            <a:r>
-              <a:rPr>
-                <a:ea typeface="맑은 고딕"/>
-                <a:cs typeface="맑은 고딕"/>
-              </a:rPr>
-              <a:t>- TokEye: https://arxiv.org/pdf/2602.20317</a:t>
-            </a:r>
-          </a:p>
-          <a:p>
-            <a:r>
-              <a:rPr>
-                <a:ea typeface="맑은 고딕"/>
-                <a:cs typeface="맑은 고딕"/>
-              </a:rPr>
-              <a:t>- KSTAR EPED 재구성: https://link.springer.com/article/10.1007/s40042-026-01580-1</a:t>
-            </a:r>
-          </a:p>
-          <a:p>
-            <a:r>
-              <a:rPr>
-                <a:ea typeface="맑은 고딕"/>
-                <a:cs typeface="맑은 고딕"/>
-              </a:rPr>
-              <a:t>- DIII-D 코일 shot-to-shot: https://www.ans.org/news/2026-08-18/article-8302/new-ml-framework-predicts-shifts-between-shots-at-diiid/</a:t>
-            </a:r>
-          </a:p>
-          <a:p>
-            <a:r>
-              <a:rPr>
-                <a:ea typeface="맑은 고딕"/>
-                <a:cs typeface="맑은 고딕"/>
-              </a:rPr>
-              <a:t>- TSI-Bench: https://arxiv.org/abs/2406.12747</a:t>
-            </a:r>
-          </a:p>
-          <a:p>
-            <a:r>
-              <a:rPr>
-                <a:ea typeface="맑은 고딕"/>
-                <a:cs typeface="맑은 고딕"/>
-              </a:rPr>
-              <a:t>- STDiff: https://arxiv.org/html/2508.19011v1</a:t>
-            </a:r>
-          </a:p>
-          <a:p>
-            <a:r>
-              <a:rPr>
-                <a:ea typeface="맑은 고딕"/>
-                <a:cs typeface="맑은 고딕"/>
-              </a:rPr>
-              <a:t>- iTimER: https://arxiv.org/html/2511.06854</a:t>
-            </a:r>
-          </a:p>
-          <a:p>
-            <a:r>
-              <a:rPr>
-                <a:ea typeface="맑은 고딕"/>
-                <a:cs typeface="맑은 고딕"/>
-              </a:rPr>
-              <a:t>- Neural CDE 보정기: https://arxiv.org/html/2512.12116v3</a:t>
-            </a:r>
-          </a:p>
-          <a:p>
-            <a:r>
-              <a:rPr>
-                <a:ea typeface="맑은 고딕"/>
-                <a:cs typeface="맑은 고딕"/>
-              </a:rPr>
-              <a:t>- TimeXer: https://github.com/thuml/TimeXer</a:t>
-            </a:r>
-          </a:p>
-          <a:p>
-            <a:r>
-              <a:rPr>
-                <a:ea typeface="맑은 고딕"/>
-                <a:cs typeface="맑은 고딕"/>
-              </a:rPr>
-              <a:t>- TiRex-2: https://arxiv.org/html/2607.01204v1</a:t>
-            </a:r>
-          </a:p>
-          <a:p>
-            <a:r>
-              <a:rPr>
-                <a:ea typeface="맑은 고딕"/>
-                <a:cs typeface="맑은 고딕"/>
-              </a:rPr>
-              <a:t>- TabPFN-TS: https://arxiv.org/abs/2501.02945</a:t>
-            </a:r>
-          </a:p>
-          <a:p>
-            <a:r>
-              <a:rPr>
-                <a:ea typeface="맑은 고딕"/>
-                <a:cs typeface="맑은 고딕"/>
-              </a:rPr>
-              <a:t>- TSFM 벤치마크 경고: https://arxiv.org/html/2510.13654v1</a:t>
-            </a:r>
-          </a:p>
-          <a:p>
-            <a:r>
-              <a:rPr>
-                <a:ea typeface="맑은 고딕"/>
-                <a:cs typeface="맑은 고딕"/>
-              </a:rPr>
-              <a:t>- TimeMAE: https://arxiv.org/html/2303.00320v4</a:t>
-            </a:r>
-          </a:p>
-          <a:p>
-            <a:r>
-              <a:rPr>
-                <a:ea typeface="맑은 고딕"/>
-                <a:cs typeface="맑은 고딕"/>
-              </a:rPr>
-              <a:t>- RG-ResMoE: https://arxiv.org/html/2608.12251v1</a:t>
-            </a:r>
-          </a:p>
-          <a:p>
-            <a:r>
-              <a:rPr>
-                <a:ea typeface="맑은 고딕"/>
-                <a:cs typeface="맑은 고딕"/>
-              </a:rPr>
-              <a:t>- KalmanNet: https://dl.acm.org/doi/abs/10.1109/tsp.2022.3158588</a:t>
-            </a:r>
-          </a:p>
-          <a:p>
-            <a:r>
-              <a:rPr>
-                <a:ea typeface="맑은 고딕"/>
-                <a:cs typeface="맑은 고딕"/>
-              </a:rPr>
-              <a:t>- Unscented KalmanNet: https://arxiv.org/html/2608.04201</a:t>
-            </a:r>
-          </a:p>
-          <a:p>
-            <a:r>
-              <a:rPr>
-                <a:ea typeface="맑은 고딕"/>
-                <a:cs typeface="맑은 고딕"/>
-              </a:rPr>
-              <a:t>- DLFM: https://link.springer.com/article/10.1007/s10994-025-06824-y</a:t>
-            </a:r>
-          </a:p>
-          <a:p>
-            <a:r>
-              <a:rPr>
-                <a:ea typeface="맑은 고딕"/>
-                <a:cs typeface="맑은 고딕"/>
-              </a:rPr>
-              <a:t>- 이분산 회귀 병리: https://arxiv.org/pdf/2306.16717</a:t>
-            </a:r>
-          </a:p>
-          <a:p>
-            <a:r>
-              <a:rPr>
-                <a:ea typeface="맑은 고딕"/>
-                <a:cs typeface="맑은 고딕"/>
-              </a:rPr>
-              <a:t>- 반지도 VAE 회귀: https://arxiv.org/pdf/2211.05979</a:t>
-            </a:r>
-          </a:p>
-          <a:p>
-            <a:r>
-              <a:rPr>
-                <a:ea typeface="맑은 고딕"/>
-                <a:cs typeface="맑은 고딕"/>
-              </a:rPr>
-              <a:t>- GP-MIDAS: https://arxiv.org/html/2402.10574v2</a:t>
-            </a:r>
-          </a:p>
-          <a:p>
-            <a:r>
-              <a:rPr>
-                <a:ea typeface="맑은 고딕"/>
-                <a:cs typeface="맑은 고딕"/>
-              </a:rPr>
-              <a:t>- 저가 센서 보정: https://arxiv.org/html/2604.21527v1</a:t>
-            </a:r>
-          </a:p>
-          <a:p>
-            <a:r>
-              <a:rPr>
-                <a:ea typeface="맑은 고딕"/>
-                <a:cs typeface="맑은 고딕"/>
-              </a:rPr>
-              <a:t>- 커프리스 혈압 벤치마크: https://arxiv.org/html/2602.04725v1</a:t>
-            </a:r>
-          </a:p>
-          <a:p>
-            <a:r>
-              <a:rPr>
-                <a:ea typeface="맑은 고딕"/>
-                <a:cs typeface="맑은 고딕"/>
-              </a:rPr>
-              <a:t>- PiGGO: https://arxiv.org/pdf/2604.26593</a:t>
-            </a:r>
-          </a:p>
-          <a:p>
-            <a:r>
-              <a:rPr>
-                <a:ea typeface="맑은 고딕"/>
-                <a:cs typeface="맑은 고딕"/>
-              </a:rPr>
-              <a:t>- 멀티태스크 가상센서: https://arxiv.org/abs/2601.20634</a:t>
+              <a:t>혼합주기 나우캐스팅 · 저가 센서 보정 · 커프리스 혈압 · 구조 가상 센싱 · 합성 진단 증강의 다섯 계열에서 같은 결론이 반복된다.</a:t>
             </a:r>
           </a:p>
         </p:txBody>
@@ -5702,6 +5946,494 @@
 </file>
 
 <file path=ppt/notesSlides/notesSlide60.xml><?xml version="1.0" encoding="utf-8"?>
+<p:notes xmlns:a="http://schemas.openxmlformats.org/drawingml/2006/main" xmlns:p="http://schemas.openxmlformats.org/presentationml/2006/main" xmlns:r="http://schemas.openxmlformats.org/officeDocument/2006/relationships">
+  <p:cSld>
+    <p:spTree>
+      <p:nvGrpSpPr>
+        <p:cNvPr id="1" name=""/>
+        <p:cNvGrpSpPr/>
+        <p:nvPr/>
+      </p:nvGrpSpPr>
+      <p:grpSpPr>
+        <a:xfrm>
+          <a:off x="0" y="0"/>
+          <a:ext cx="0" cy="0"/>
+          <a:chOff x="0" y="0"/>
+          <a:chExt cx="0" cy="0"/>
+        </a:xfrm>
+      </p:grpSpPr>
+      <p:sp>
+        <p:nvSpPr>
+          <p:cNvPr id="2" name="Slide Image Placeholder 1"/>
+          <p:cNvSpPr>
+            <a:spLocks noGrp="1"/>
+          </p:cNvSpPr>
+          <p:nvPr>
+            <p:ph type="sldImg" idx="2"/>
+          </p:nvPr>
+        </p:nvSpPr>
+        <p:spPr/>
+      </p:sp>
+      <p:sp>
+        <p:nvSpPr>
+          <p:cNvPr id="3" name="Notes Placeholder 2"/>
+          <p:cNvSpPr>
+            <a:spLocks noGrp="1"/>
+          </p:cNvSpPr>
+          <p:nvPr>
+            <p:ph type="body" idx="3" sz="quarter"/>
+          </p:nvPr>
+        </p:nvSpPr>
+        <p:spPr/>
+        <p:txBody>
+          <a:bodyPr/>
+          <a:lstStyle/>
+          <a:p>
+            <a:r>
+              <a:rPr>
+                <a:ea typeface="맑은 고딕"/>
+                <a:cs typeface="맑은 고딕"/>
+              </a:rPr>
+              <a:t>우선순위는 비용 대비 정보량 순이다.</a:t>
+            </a:r>
+          </a:p>
+          <a:p>
+            <a:r>
+              <a:rPr>
+                <a:ea typeface="맑은 고딕"/>
+                <a:cs typeface="맑은 고딕"/>
+              </a:rPr>
+              <a:t>조사일 2026-09-05. 출처:</a:t>
+            </a:r>
+          </a:p>
+          <a:p>
+            <a:r>
+              <a:rPr>
+                <a:ea typeface="맑은 고딕"/>
+                <a:cs typeface="맑은 고딕"/>
+              </a:rPr>
+              <a:t>- Diag2Diag: https://arxiv.org/html/2405.05908v4</a:t>
+            </a:r>
+          </a:p>
+          <a:p>
+            <a:r>
+              <a:rPr>
+                <a:ea typeface="맑은 고딕"/>
+                <a:cs typeface="맑은 고딕"/>
+              </a:rPr>
+              <a:t>- Diag2Diag Nat. Comm.: https://www.nature.com/articles/s41467-025-63492-1</a:t>
+            </a:r>
+          </a:p>
+          <a:p>
+            <a:r>
+              <a:rPr>
+                <a:ea typeface="맑은 고딕"/>
+                <a:cs typeface="맑은 고딕"/>
+              </a:rPr>
+              <a:t>- COMPASS 시간 초해상: https://iopscience.iop.org/article/10.1088/1361-6587/ae72c6</a:t>
+            </a:r>
+          </a:p>
+          <a:p>
+            <a:r>
+              <a:rPr>
+                <a:ea typeface="맑은 고딕"/>
+                <a:cs typeface="맑은 고딕"/>
+              </a:rPr>
+              <a:t>- FusionMAE: https://arxiv.org/abs/2509.12945</a:t>
+            </a:r>
+          </a:p>
+          <a:p>
+            <a:r>
+              <a:rPr>
+                <a:ea typeface="맑은 고딕"/>
+                <a:cs typeface="맑은 고딕"/>
+              </a:rPr>
+              <a:t>- TokaMind: https://arxiv.org/html/2602.15084v2</a:t>
+            </a:r>
+          </a:p>
+          <a:p>
+            <a:r>
+              <a:rPr>
+                <a:ea typeface="맑은 고딕"/>
+                <a:cs typeface="맑은 고딕"/>
+              </a:rPr>
+              <a:t>- TokaMark: https://arxiv.org/html/2602.10132v2</a:t>
+            </a:r>
+          </a:p>
+          <a:p>
+            <a:r>
+              <a:rPr>
+                <a:ea typeface="맑은 고딕"/>
+                <a:cs typeface="맑은 고딕"/>
+              </a:rPr>
+              <a:t>- PanoMHD: https://arxiv.org/html/2603.02672</a:t>
+            </a:r>
+          </a:p>
+          <a:p>
+            <a:r>
+              <a:rPr>
+                <a:ea typeface="맑은 고딕"/>
+                <a:cs typeface="맑은 고딕"/>
+              </a:rPr>
+              <a:t>- TCV 멀티모달 VAE: https://arxiv.org/abs/2504.17710</a:t>
+            </a:r>
+          </a:p>
+          <a:p>
+            <a:r>
+              <a:rPr>
+                <a:ea typeface="맑은 고딕"/>
+                <a:cs typeface="맑은 고딕"/>
+              </a:rPr>
+              <a:t>- EAST 지식증류: https://arxiv.org/html/2607.04241</a:t>
+            </a:r>
+          </a:p>
+          <a:p>
+            <a:r>
+              <a:rPr>
+                <a:ea typeface="맑은 고딕"/>
+                <a:cs typeface="맑은 고딕"/>
+              </a:rPr>
+              <a:t>- WEST: https://arxiv.org/html/2602.19110</a:t>
+            </a:r>
+          </a:p>
+          <a:p>
+            <a:r>
+              <a:rPr>
+                <a:ea typeface="맑은 고딕"/>
+                <a:cs typeface="맑은 고딕"/>
+              </a:rPr>
+              <a:t>- EAST XCS ANN: https://iopscience.iop.org/article/10.1088/1741-4326/ad73e8</a:t>
+            </a:r>
+          </a:p>
+          <a:p>
+            <a:r>
+              <a:rPr>
+                <a:ea typeface="맑은 고딕"/>
+                <a:cs typeface="맑은 고딕"/>
+              </a:rPr>
+              <a:t>- Abbate 2025: https://iopscience.iop.org/article/10.1088/1741-4326/adc283</a:t>
+            </a:r>
+          </a:p>
+          <a:p>
+            <a:r>
+              <a:rPr>
+                <a:ea typeface="맑은 고딕"/>
+                <a:cs typeface="맑은 고딕"/>
+              </a:rPr>
+              <a:t>- 합성 진단 증강: https://arxiv.org/abs/2606.08462</a:t>
+            </a:r>
+          </a:p>
+          <a:p>
+            <a:r>
+              <a:rPr>
+                <a:ea typeface="맑은 고딕"/>
+                <a:cs typeface="맑은 고딕"/>
+              </a:rPr>
+              <a:t>- TokEye: https://arxiv.org/pdf/2602.20317</a:t>
+            </a:r>
+          </a:p>
+          <a:p>
+            <a:r>
+              <a:rPr>
+                <a:ea typeface="맑은 고딕"/>
+                <a:cs typeface="맑은 고딕"/>
+              </a:rPr>
+              <a:t>- KSTAR EPED 재구성: https://link.springer.com/article/10.1007/s40042-026-01580-1</a:t>
+            </a:r>
+          </a:p>
+          <a:p>
+            <a:r>
+              <a:rPr>
+                <a:ea typeface="맑은 고딕"/>
+                <a:cs typeface="맑은 고딕"/>
+              </a:rPr>
+              <a:t>- DIII-D 코일 shot-to-shot: https://www.ans.org/news/2026-08-18/article-8302/new-ml-framework-predicts-shifts-between-shots-at-diiid/</a:t>
+            </a:r>
+          </a:p>
+          <a:p>
+            <a:r>
+              <a:rPr>
+                <a:ea typeface="맑은 고딕"/>
+                <a:cs typeface="맑은 고딕"/>
+              </a:rPr>
+              <a:t>- NN-CES (KSTAR CES 신경망 분석): https://doi.org/10.1016/j.fusengdes.2025.115518</a:t>
+            </a:r>
+          </a:p>
+          <a:p>
+            <a:r>
+              <a:rPr>
+                <a:ea typeface="맑은 고딕"/>
+                <a:cs typeface="맑은 고딕"/>
+              </a:rPr>
+              <a:t>- SVMR+GPR KSTAR Ti 프로파일: https://doi.org/10.1088/1741-4326/ad7304</a:t>
+            </a:r>
+          </a:p>
+          <a:p>
+            <a:r>
+              <a:rPr>
+                <a:ea typeface="맑은 고딕"/>
+                <a:cs typeface="맑은 고딕"/>
+              </a:rPr>
+              <a:t>- 이상치 강건 Bayesian mtanh 적합: https://arxiv.org/html/2607.14142</a:t>
+            </a:r>
+          </a:p>
+          <a:p>
+            <a:r>
+              <a:rPr>
+                <a:ea typeface="맑은 고딕"/>
+                <a:cs typeface="맑은 고딕"/>
+              </a:rPr>
+              <a:t>- TSER 결측 Te 복원 (EAST): https://doi.org/10.1088/1741-4326/addb5f</a:t>
+            </a:r>
+          </a:p>
+          <a:p>
+            <a:r>
+              <a:rPr>
+                <a:ea typeface="맑은 고딕"/>
+                <a:cs typeface="맑은 고딕"/>
+              </a:rPr>
+              <a:t>- 전 상태 복원 (희소 센서): https://arxiv.org/abs/2607.04390</a:t>
+            </a:r>
+          </a:p>
+          <a:p>
+            <a:r>
+              <a:rPr>
+                <a:ea typeface="맑은 고딕"/>
+                <a:cs typeface="맑은 고딕"/>
+              </a:rPr>
+              <a:t>- 평형 재구성 챌린지: https://arxiv.org/html/2609.01750</a:t>
+            </a:r>
+          </a:p>
+          <a:p>
+            <a:r>
+              <a:rPr>
+                <a:ea typeface="맑은 고딕"/>
+                <a:cs typeface="맑은 고딕"/>
+              </a:rPr>
+              <a:t>- JET CXRS 신경망 (1993, 계보의 시작): https://www.microsoft.com/en-us/research/wp-content/uploads/2016/02/bishop-cxrs-ppcf-93.pdf</a:t>
+            </a:r>
+          </a:p>
+          <a:p>
+            <a:r>
+              <a:rPr>
+                <a:ea typeface="맑은 고딕"/>
+                <a:cs typeface="맑은 고딕"/>
+              </a:rPr>
+              <a:t>- ST40 교차 진단 grey-box: https://arxiv.org/abs/2407.18741</a:t>
+            </a:r>
+          </a:p>
+          <a:p>
+            <a:r>
+              <a:rPr>
+                <a:ea typeface="맑은 고딕"/>
+                <a:cs typeface="맑은 고딕"/>
+              </a:rPr>
+              <a:t>- W7-X Bayesian Ti 추론: https://doi.org/10.1088/1361-6587/ad3c1d</a:t>
+            </a:r>
+          </a:p>
+          <a:p>
+            <a:r>
+              <a:rPr>
+                <a:ea typeface="맑은 고딕"/>
+                <a:cs typeface="맑은 고딕"/>
+              </a:rPr>
+              <a:t>- TSI-Bench: https://arxiv.org/abs/2406.12747</a:t>
+            </a:r>
+          </a:p>
+          <a:p>
+            <a:r>
+              <a:rPr>
+                <a:ea typeface="맑은 고딕"/>
+                <a:cs typeface="맑은 고딕"/>
+              </a:rPr>
+              <a:t>- STDiff: https://arxiv.org/html/2508.19011v1</a:t>
+            </a:r>
+          </a:p>
+          <a:p>
+            <a:r>
+              <a:rPr>
+                <a:ea typeface="맑은 고딕"/>
+                <a:cs typeface="맑은 고딕"/>
+              </a:rPr>
+              <a:t>- iTimER: https://arxiv.org/html/2511.06854</a:t>
+            </a:r>
+          </a:p>
+          <a:p>
+            <a:r>
+              <a:rPr>
+                <a:ea typeface="맑은 고딕"/>
+                <a:cs typeface="맑은 고딕"/>
+              </a:rPr>
+              <a:t>- Neural CDE 보정기: https://arxiv.org/html/2512.12116v3</a:t>
+            </a:r>
+          </a:p>
+          <a:p>
+            <a:r>
+              <a:rPr>
+                <a:ea typeface="맑은 고딕"/>
+                <a:cs typeface="맑은 고딕"/>
+              </a:rPr>
+              <a:t>- TimeXer: https://github.com/thuml/TimeXer</a:t>
+            </a:r>
+          </a:p>
+          <a:p>
+            <a:r>
+              <a:rPr>
+                <a:ea typeface="맑은 고딕"/>
+                <a:cs typeface="맑은 고딕"/>
+              </a:rPr>
+              <a:t>- TiRex-2: https://arxiv.org/html/2607.01204v1</a:t>
+            </a:r>
+          </a:p>
+          <a:p>
+            <a:r>
+              <a:rPr>
+                <a:ea typeface="맑은 고딕"/>
+                <a:cs typeface="맑은 고딕"/>
+              </a:rPr>
+              <a:t>- TabPFN-TS: https://arxiv.org/abs/2501.02945</a:t>
+            </a:r>
+          </a:p>
+          <a:p>
+            <a:r>
+              <a:rPr>
+                <a:ea typeface="맑은 고딕"/>
+                <a:cs typeface="맑은 고딕"/>
+              </a:rPr>
+              <a:t>- TSFM 벤치마크 경고: https://arxiv.org/html/2510.13654v1</a:t>
+            </a:r>
+          </a:p>
+          <a:p>
+            <a:r>
+              <a:rPr>
+                <a:ea typeface="맑은 고딕"/>
+                <a:cs typeface="맑은 고딕"/>
+              </a:rPr>
+              <a:t>- TimeMAE: https://arxiv.org/html/2303.00320v4</a:t>
+            </a:r>
+          </a:p>
+          <a:p>
+            <a:r>
+              <a:rPr>
+                <a:ea typeface="맑은 고딕"/>
+                <a:cs typeface="맑은 고딕"/>
+              </a:rPr>
+              <a:t>- RG-ResMoE: https://arxiv.org/html/2608.12251v1</a:t>
+            </a:r>
+          </a:p>
+          <a:p>
+            <a:r>
+              <a:rPr>
+                <a:ea typeface="맑은 고딕"/>
+                <a:cs typeface="맑은 고딕"/>
+              </a:rPr>
+              <a:t>- KalmanNet: https://dl.acm.org/doi/abs/10.1109/tsp.2022.3158588</a:t>
+            </a:r>
+          </a:p>
+          <a:p>
+            <a:r>
+              <a:rPr>
+                <a:ea typeface="맑은 고딕"/>
+                <a:cs typeface="맑은 고딕"/>
+              </a:rPr>
+              <a:t>- Unscented KalmanNet: https://arxiv.org/html/2608.04201</a:t>
+            </a:r>
+          </a:p>
+          <a:p>
+            <a:r>
+              <a:rPr>
+                <a:ea typeface="맑은 고딕"/>
+                <a:cs typeface="맑은 고딕"/>
+              </a:rPr>
+              <a:t>- DLFM: https://link.springer.com/article/10.1007/s10994-025-06824-y</a:t>
+            </a:r>
+          </a:p>
+          <a:p>
+            <a:r>
+              <a:rPr>
+                <a:ea typeface="맑은 고딕"/>
+                <a:cs typeface="맑은 고딕"/>
+              </a:rPr>
+              <a:t>- 이분산 회귀 병리: https://arxiv.org/pdf/2306.16717</a:t>
+            </a:r>
+          </a:p>
+          <a:p>
+            <a:r>
+              <a:rPr>
+                <a:ea typeface="맑은 고딕"/>
+                <a:cs typeface="맑은 고딕"/>
+              </a:rPr>
+              <a:t>- 반지도 VAE 회귀: https://arxiv.org/pdf/2211.05979</a:t>
+            </a:r>
+          </a:p>
+          <a:p>
+            <a:r>
+              <a:rPr>
+                <a:ea typeface="맑은 고딕"/>
+                <a:cs typeface="맑은 고딕"/>
+              </a:rPr>
+              <a:t>- GP-MIDAS: https://arxiv.org/html/2402.10574v2</a:t>
+            </a:r>
+          </a:p>
+          <a:p>
+            <a:r>
+              <a:rPr>
+                <a:ea typeface="맑은 고딕"/>
+                <a:cs typeface="맑은 고딕"/>
+              </a:rPr>
+              <a:t>- 저가 센서 보정: https://arxiv.org/html/2604.21527v1</a:t>
+            </a:r>
+          </a:p>
+          <a:p>
+            <a:r>
+              <a:rPr>
+                <a:ea typeface="맑은 고딕"/>
+                <a:cs typeface="맑은 고딕"/>
+              </a:rPr>
+              <a:t>- 커프리스 혈압 벤치마크: https://arxiv.org/html/2602.04725v1</a:t>
+            </a:r>
+          </a:p>
+          <a:p>
+            <a:r>
+              <a:rPr>
+                <a:ea typeface="맑은 고딕"/>
+                <a:cs typeface="맑은 고딕"/>
+              </a:rPr>
+              <a:t>- PiGGO: https://arxiv.org/pdf/2604.26593</a:t>
+            </a:r>
+          </a:p>
+          <a:p>
+            <a:r>
+              <a:rPr>
+                <a:ea typeface="맑은 고딕"/>
+                <a:cs typeface="맑은 고딕"/>
+              </a:rPr>
+              <a:t>- 멀티태스크 가상센서: https://arxiv.org/abs/2601.20634</a:t>
+            </a:r>
+          </a:p>
+        </p:txBody>
+      </p:sp>
+      <p:sp>
+        <p:nvSpPr>
+          <p:cNvPr id="4" name="Slide Number Placeholder 3"/>
+          <p:cNvSpPr>
+            <a:spLocks noGrp="1"/>
+          </p:cNvSpPr>
+          <p:nvPr>
+            <p:ph type="sldNum" idx="5" sz="quarter"/>
+          </p:nvPr>
+        </p:nvSpPr>
+        <p:spPr/>
+      </p:sp>
+    </p:spTree>
+  </p:cSld>
+  <p:clrMapOvr>
+    <a:masterClrMapping/>
+  </p:clrMapOvr>
+</p:notes>
+</file>
+
+<file path=ppt/notesSlides/notesSlide61.xml><?xml version="1.0" encoding="utf-8"?>
 <p:notes xmlns:a="http://schemas.openxmlformats.org/drawingml/2006/main" xmlns:p="http://schemas.openxmlformats.org/presentationml/2006/main" xmlns:r="http://schemas.openxmlformats.org/officeDocument/2006/relationships">
   <p:cSld>
     <p:spTree>
@@ -24844,6 +25576,920 @@
           <a:lstStyle/>
           <a:p>
             <a:r>
+              <a:rPr b="0" sz="2250">
+                <a:ea typeface="맑은 고딕"/>
+                <a:cs typeface="맑은 고딕"/>
+              </a:rPr>
+              <a:t>문헌 조사 (1/4, 3쪽): 핵융합의 진단-대-진단 추정은 여전히 단순한 구조가 주류이다</a:t>
+            </a:r>
+          </a:p>
+        </p:txBody>
+      </p:sp>
+      <p:sp>
+        <p:nvSpPr>
+          <p:cNvPr id="3" name="TextBox 2"/>
+          <p:cNvSpPr txBox="1"/>
+          <p:nvPr/>
+        </p:nvSpPr>
+        <p:spPr>
+          <a:xfrm>
+            <a:off x="585216" y="2029967"/>
+            <a:ext cx="11027664" cy="297688"/>
+          </a:xfrm>
+          <a:prstGeom prst="rect">
+            <a:avLst/>
+          </a:prstGeom>
+          <a:noFill/>
+        </p:spPr>
+        <p:txBody>
+          <a:bodyPr wrap="square">
+            <a:spAutoFit/>
+          </a:bodyPr>
+          <a:lstStyle/>
+          <a:p>
+            <a:pPr>
+              <a:spcAft>
+                <a:spcPts val="300"/>
+              </a:spcAft>
+            </a:pPr>
+            <a:r>
+              <a:rPr sz="1300">
+                <a:ea typeface="맑은 고딕"/>
+                <a:cs typeface="맑은 고딕"/>
+              </a:rPr>
+              <a:t>장치와 연도를 따로 두었다.</a:t>
+            </a:r>
+          </a:p>
+        </p:txBody>
+      </p:sp>
+      <p:graphicFrame>
+        <p:nvGraphicFramePr>
+          <p:cNvPr id="4" name="Table 3"/>
+          <p:cNvGraphicFramePr>
+            <a:graphicFrameLocks noGrp="1"/>
+          </p:cNvGraphicFramePr>
+          <p:nvPr/>
+        </p:nvGraphicFramePr>
+        <p:xfrm>
+          <a:off x="585216" y="2400807"/>
+          <a:ext cx="11027661" cy="3146805"/>
+        </p:xfrm>
+        <a:graphic>
+          <a:graphicData uri="http://schemas.openxmlformats.org/drawingml/2006/table">
+            <a:tbl>
+              <a:tblPr firstRow="1" bandRow="1">
+                <a:tableStyleId>{5C22544A-7EE6-4342-B048-85BDC9FD1C3A}</a:tableStyleId>
+              </a:tblPr>
+              <a:tblGrid>
+                <a:gridCol w="1552631"/>
+                <a:gridCol w="836032"/>
+                <a:gridCol w="676788"/>
+                <a:gridCol w="1473009"/>
+                <a:gridCol w="2428474"/>
+                <a:gridCol w="1234142"/>
+                <a:gridCol w="2826585"/>
+              </a:tblGrid>
+              <a:tr h="274320">
+                <a:tc>
+                  <a:txBody>
+                    <a:bodyPr wrap="square"/>
+                    <a:lstStyle/>
+                    <a:p>
+                      <a:r>
+                        <a:rPr sz="850" b="1">
+                          <a:ea typeface="맑은 고딕"/>
+                          <a:cs typeface="맑은 고딕"/>
+                        </a:rPr>
+                        <a:t>논문</a:t>
+                      </a:r>
+                    </a:p>
+                  </a:txBody>
+                  <a:tcPr marL="54864" marR="54864" marT="18288" marB="18288" anchor="ctr"/>
+                </a:tc>
+                <a:tc>
+                  <a:txBody>
+                    <a:bodyPr wrap="square"/>
+                    <a:lstStyle/>
+                    <a:p>
+                      <a:r>
+                        <a:rPr sz="850" b="1">
+                          <a:ea typeface="맑은 고딕"/>
+                          <a:cs typeface="맑은 고딕"/>
+                        </a:rPr>
+                        <a:t>장치</a:t>
+                      </a:r>
+                    </a:p>
+                  </a:txBody>
+                  <a:tcPr marL="54864" marR="54864" marT="18288" marB="18288" anchor="ctr"/>
+                </a:tc>
+                <a:tc>
+                  <a:txBody>
+                    <a:bodyPr wrap="square"/>
+                    <a:lstStyle/>
+                    <a:p>
+                      <a:r>
+                        <a:rPr sz="850" b="1">
+                          <a:ea typeface="맑은 고딕"/>
+                          <a:cs typeface="맑은 고딕"/>
+                        </a:rPr>
+                        <a:t>연도</a:t>
+                      </a:r>
+                    </a:p>
+                  </a:txBody>
+                  <a:tcPr marL="54864" marR="54864" marT="18288" marB="18288" anchor="ctr"/>
+                </a:tc>
+                <a:tc>
+                  <a:txBody>
+                    <a:bodyPr wrap="square"/>
+                    <a:lstStyle/>
+                    <a:p>
+                      <a:r>
+                        <a:rPr sz="850" b="1">
+                          <a:ea typeface="맑은 고딕"/>
+                          <a:cs typeface="맑은 고딕"/>
+                        </a:rPr>
+                        <a:t>문제</a:t>
+                      </a:r>
+                    </a:p>
+                  </a:txBody>
+                  <a:tcPr marL="54864" marR="54864" marT="18288" marB="18288" anchor="ctr"/>
+                </a:tc>
+                <a:tc>
+                  <a:txBody>
+                    <a:bodyPr wrap="square"/>
+                    <a:lstStyle/>
+                    <a:p>
+                      <a:r>
+                        <a:rPr sz="850" b="1">
+                          <a:ea typeface="맑은 고딕"/>
+                          <a:cs typeface="맑은 고딕"/>
+                        </a:rPr>
+                        <a:t>구조</a:t>
+                      </a:r>
+                    </a:p>
+                  </a:txBody>
+                  <a:tcPr marL="54864" marR="54864" marT="18288" marB="18288" anchor="ctr"/>
+                </a:tc>
+                <a:tc>
+                  <a:txBody>
+                    <a:bodyPr wrap="square"/>
+                    <a:lstStyle/>
+                    <a:p>
+                      <a:r>
+                        <a:rPr sz="850" b="1">
+                          <a:ea typeface="맑은 고딕"/>
+                          <a:cs typeface="맑은 고딕"/>
+                        </a:rPr>
+                        <a:t>데이터</a:t>
+                      </a:r>
+                    </a:p>
+                  </a:txBody>
+                  <a:tcPr marL="54864" marR="54864" marT="18288" marB="18288" anchor="ctr"/>
+                </a:tc>
+                <a:tc>
+                  <a:txBody>
+                    <a:bodyPr wrap="square"/>
+                    <a:lstStyle/>
+                    <a:p>
+                      <a:r>
+                        <a:rPr sz="850" b="1">
+                          <a:ea typeface="맑은 고딕"/>
+                          <a:cs typeface="맑은 고딕"/>
+                        </a:rPr>
+                        <a:t>우리에게 의미</a:t>
+                      </a:r>
+                    </a:p>
+                  </a:txBody>
+                  <a:tcPr marL="54864" marR="54864" marT="18288" marB="18288" anchor="ctr"/>
+                </a:tc>
+              </a:tr>
+              <a:tr h="590295">
+                <a:tc>
+                  <a:txBody>
+                    <a:bodyPr wrap="square"/>
+                    <a:lstStyle/>
+                    <a:p>
+                      <a:r>
+                        <a:rPr sz="850" b="0">
+                          <a:ea typeface="맑은 고딕"/>
+                          <a:cs typeface="맑은 고딕"/>
+                        </a:rPr>
+                        <a:t>NN-CES (Fusion Eng. Des. 222:115518)</a:t>
+                      </a:r>
+                    </a:p>
+                  </a:txBody>
+                  <a:tcPr marL="54864" marR="54864" marT="18288" marB="18288" anchor="ctr"/>
+                </a:tc>
+                <a:tc>
+                  <a:txBody>
+                    <a:bodyPr wrap="square"/>
+                    <a:lstStyle/>
+                    <a:p>
+                      <a:r>
+                        <a:rPr sz="850" b="0">
+                          <a:ea typeface="맑은 고딕"/>
+                          <a:cs typeface="맑은 고딕"/>
+                        </a:rPr>
+                        <a:t>KSTAR</a:t>
+                      </a:r>
+                    </a:p>
+                  </a:txBody>
+                  <a:tcPr marL="54864" marR="54864" marT="18288" marB="18288" anchor="ctr"/>
+                </a:tc>
+                <a:tc>
+                  <a:txBody>
+                    <a:bodyPr wrap="square"/>
+                    <a:lstStyle/>
+                    <a:p>
+                      <a:r>
+                        <a:rPr sz="850" b="0">
+                          <a:ea typeface="맑은 고딕"/>
+                          <a:cs typeface="맑은 고딕"/>
+                        </a:rPr>
+                        <a:t>2025/26</a:t>
+                      </a:r>
+                    </a:p>
+                  </a:txBody>
+                  <a:tcPr marL="54864" marR="54864" marT="18288" marB="18288" anchor="ctr"/>
+                </a:tc>
+                <a:tc>
+                  <a:txBody>
+                    <a:bodyPr wrap="square"/>
+                    <a:lstStyle/>
+                    <a:p>
+                      <a:r>
+                        <a:rPr sz="850" b="0">
+                          <a:ea typeface="맑은 고딕"/>
+                          <a:cs typeface="맑은 고딕"/>
+                        </a:rPr>
+                        <a:t>CES 스펙트럼에서 Ti·회전을 직접 추출한다 (빔 변조 없이)</a:t>
+                      </a:r>
+                    </a:p>
+                  </a:txBody>
+                  <a:tcPr marL="54864" marR="54864" marT="18288" marB="18288" anchor="ctr"/>
+                </a:tc>
+                <a:tc>
+                  <a:txBody>
+                    <a:bodyPr wrap="square"/>
+                    <a:lstStyle/>
+                    <a:p>
+                      <a:r>
+                        <a:rPr sz="850" b="0">
+                          <a:ea typeface="맑은 고딕"/>
+                          <a:cs typeface="맑은 고딕"/>
+                        </a:rPr>
+                        <a:t>물리 제약을 넣은 신경망이 빔 변조 배경 차감을 대체한다</a:t>
+                      </a:r>
+                    </a:p>
+                  </a:txBody>
+                  <a:tcPr marL="54864" marR="54864" marT="18288" marB="18288" anchor="ctr"/>
+                </a:tc>
+                <a:tc>
+                  <a:txBody>
+                    <a:bodyPr wrap="square"/>
+                    <a:lstStyle/>
+                    <a:p>
+                      <a:r>
+                        <a:rPr sz="850" b="0">
+                          <a:ea typeface="맑은 고딕"/>
+                          <a:cs typeface="맑은 고딕"/>
+                        </a:rPr>
+                        <a:t>KSTAR 약 150,000 프레임, L·H·locked·RMP 모드</a:t>
+                      </a:r>
+                    </a:p>
+                  </a:txBody>
+                  <a:tcPr marL="54864" marR="54864" marT="18288" marB="18288" anchor="ctr"/>
+                </a:tc>
+                <a:tc>
+                  <a:txBody>
+                    <a:bodyPr wrap="square"/>
+                    <a:lstStyle/>
+                    <a:p>
+                      <a:r>
+                        <a:rPr sz="850" b="0">
+                          <a:ea typeface="맑은 고딕"/>
+                          <a:cs typeface="맑은 고딕"/>
+                        </a:rPr>
+                        <a:t>우리 장치·우리 진단의 가장 가까운 선행 연구. 다만 CES 측정이 있는 시각을 더 잘 읽는 것이고, 측정이 없는 시각을 채우는 우리 문제와 다르다. 빔 변조가 필요 없다는 점은 결측 자체를 줄일 수 있어 CES 재분석 레버의 근거가 된다</a:t>
+                      </a:r>
+                    </a:p>
+                  </a:txBody>
+                  <a:tcPr marL="54864" marR="54864" marT="18288" marB="18288" anchor="ctr"/>
+                </a:tc>
+              </a:tr>
+              <a:tr h="456438">
+                <a:tc>
+                  <a:txBody>
+                    <a:bodyPr wrap="square"/>
+                    <a:lstStyle/>
+                    <a:p>
+                      <a:r>
+                        <a:rPr sz="850" b="0">
+                          <a:ea typeface="맑은 고딕"/>
+                          <a:cs typeface="맑은 고딕"/>
+                        </a:rPr>
+                        <a:t>SVMR + GPR 프로파일 추론 (NF 64:106052)</a:t>
+                      </a:r>
+                    </a:p>
+                  </a:txBody>
+                  <a:tcPr marL="54864" marR="54864" marT="18288" marB="18288" anchor="ctr"/>
+                </a:tc>
+                <a:tc>
+                  <a:txBody>
+                    <a:bodyPr wrap="square"/>
+                    <a:lstStyle/>
+                    <a:p>
+                      <a:r>
+                        <a:rPr sz="850" b="0">
+                          <a:ea typeface="맑은 고딕"/>
+                          <a:cs typeface="맑은 고딕"/>
+                        </a:rPr>
+                        <a:t>KSTAR</a:t>
+                      </a:r>
+                    </a:p>
+                  </a:txBody>
+                  <a:tcPr marL="54864" marR="54864" marT="18288" marB="18288" anchor="ctr"/>
+                </a:tc>
+                <a:tc>
+                  <a:txBody>
+                    <a:bodyPr wrap="square"/>
+                    <a:lstStyle/>
+                    <a:p>
+                      <a:r>
+                        <a:rPr sz="850" b="0">
+                          <a:ea typeface="맑은 고딕"/>
+                          <a:cs typeface="맑은 고딕"/>
+                        </a:rPr>
+                        <a:t>2024</a:t>
+                      </a:r>
+                    </a:p>
+                  </a:txBody>
+                  <a:tcPr marL="54864" marR="54864" marT="18288" marB="18288" anchor="ctr"/>
+                </a:tc>
+                <a:tc>
+                  <a:txBody>
+                    <a:bodyPr wrap="square"/>
+                    <a:lstStyle/>
+                    <a:p>
+                      <a:r>
+                        <a:rPr sz="850" b="0">
+                          <a:ea typeface="맑은 고딕"/>
+                          <a:cs typeface="맑은 고딕"/>
+                        </a:rPr>
+                        <a:t>CES 측정에서 Ti 프로파일을 추론하며 이상치를 걸러낸다</a:t>
+                      </a:r>
+                    </a:p>
+                  </a:txBody>
+                  <a:tcPr marL="54864" marR="54864" marT="18288" marB="18288" anchor="ctr"/>
+                </a:tc>
+                <a:tc>
+                  <a:txBody>
+                    <a:bodyPr wrap="square"/>
+                    <a:lstStyle/>
+                    <a:p>
+                      <a:r>
+                        <a:rPr sz="850" b="0">
+                          <a:ea typeface="맑은 고딕"/>
+                          <a:cs typeface="맑은 고딕"/>
+                        </a:rPr>
+                        <a:t>SVMR 이상치 분류기 + 비모수 GPR, 초매개변수는 MAP와 MCMC 두 방식</a:t>
+                      </a:r>
+                    </a:p>
+                  </a:txBody>
+                  <a:tcPr marL="54864" marR="54864" marT="18288" marB="18288" anchor="ctr"/>
+                </a:tc>
+                <a:tc>
+                  <a:txBody>
+                    <a:bodyPr wrap="square"/>
+                    <a:lstStyle/>
+                    <a:p>
+                      <a:r>
+                        <a:rPr sz="850" b="0">
+                          <a:ea typeface="맑은 고딕"/>
+                          <a:cs typeface="맑은 고딕"/>
+                        </a:rPr>
+                        <a:t>KSTAR CES 측정 자료</a:t>
+                      </a:r>
+                    </a:p>
+                  </a:txBody>
+                  <a:tcPr marL="54864" marR="54864" marT="18288" marB="18288" anchor="ctr"/>
+                </a:tc>
+                <a:tc>
+                  <a:txBody>
+                    <a:bodyPr wrap="square"/>
+                    <a:lstStyle/>
+                    <a:p>
+                      <a:r>
+                        <a:rPr sz="850" b="0">
+                          <a:ea typeface="맑은 고딕"/>
+                          <a:cs typeface="맑은 고딕"/>
+                        </a:rPr>
+                        <a:t>이상치를 자동으로 골라내는 절차가 우리 3 keV 값 컷의 원리적 대체물이다. 값이 아니라 측정 품질로 거르면 두 공동 1차 모집단이 하나로 합쳐진다</a:t>
+                      </a:r>
+                    </a:p>
+                  </a:txBody>
+                  <a:tcPr marL="54864" marR="54864" marT="18288" marB="18288" anchor="ctr"/>
+                </a:tc>
+              </a:tr>
+              <a:tr h="456438">
+                <a:tc>
+                  <a:txBody>
+                    <a:bodyPr wrap="square"/>
+                    <a:lstStyle/>
+                    <a:p>
+                      <a:r>
+                        <a:rPr sz="850" b="0">
+                          <a:ea typeface="맑은 고딕"/>
+                          <a:cs typeface="맑은 고딕"/>
+                        </a:rPr>
+                        <a:t>이상치 강건 Bayesian mtanh 적합 (NF, arXiv 2607.14142)</a:t>
+                      </a:r>
+                    </a:p>
+                  </a:txBody>
+                  <a:tcPr marL="54864" marR="54864" marT="18288" marB="18288" anchor="ctr"/>
+                </a:tc>
+                <a:tc>
+                  <a:txBody>
+                    <a:bodyPr wrap="square"/>
+                    <a:lstStyle/>
+                    <a:p>
+                      <a:r>
+                        <a:rPr sz="850" b="0">
+                          <a:ea typeface="맑은 고딕"/>
+                          <a:cs typeface="맑은 고딕"/>
+                        </a:rPr>
+                        <a:t>KSTAR</a:t>
+                      </a:r>
+                    </a:p>
+                  </a:txBody>
+                  <a:tcPr marL="54864" marR="54864" marT="18288" marB="18288" anchor="ctr"/>
+                </a:tc>
+                <a:tc>
+                  <a:txBody>
+                    <a:bodyPr wrap="square"/>
+                    <a:lstStyle/>
+                    <a:p>
+                      <a:r>
+                        <a:rPr sz="850" b="0">
+                          <a:ea typeface="맑은 고딕"/>
+                          <a:cs typeface="맑은 고딕"/>
+                        </a:rPr>
+                        <a:t>2026</a:t>
+                      </a:r>
+                    </a:p>
+                  </a:txBody>
+                  <a:tcPr marL="54864" marR="54864" marT="18288" marB="18288" anchor="ctr"/>
+                </a:tc>
+                <a:tc>
+                  <a:txBody>
+                    <a:bodyPr wrap="square"/>
+                    <a:lstStyle/>
+                    <a:p>
+                      <a:r>
+                        <a:rPr sz="850" b="0">
+                          <a:ea typeface="맑은 고딕"/>
+                          <a:cs typeface="맑은 고딕"/>
+                        </a:rPr>
+                        <a:t>TS·TCI·CES에서 ne·Te·Ti·v_T 프로파일을 동시에 적합한다</a:t>
+                      </a:r>
+                    </a:p>
+                  </a:txBody>
+                  <a:tcPr marL="54864" marR="54864" marT="18288" marB="18288" anchor="ctr"/>
+                </a:tc>
+                <a:tc>
+                  <a:txBody>
+                    <a:bodyPr wrap="square"/>
+                    <a:lstStyle/>
+                    <a:p>
+                      <a:r>
+                        <a:rPr sz="850" b="0">
+                          <a:ea typeface="맑은 고딕"/>
+                          <a:cs typeface="맑은 고딕"/>
+                        </a:rPr>
+                        <a:t>수정 tanh 7모수 + good-and-bad 가우시안 혼합 우도, MAP 초기화 후 MCMC</a:t>
+                      </a:r>
+                    </a:p>
+                  </a:txBody>
+                  <a:tcPr marL="54864" marR="54864" marT="18288" marB="18288" anchor="ctr"/>
+                </a:tc>
+                <a:tc>
+                  <a:txBody>
+                    <a:bodyPr wrap="square"/>
+                    <a:lstStyle/>
+                    <a:p>
+                      <a:r>
+                        <a:rPr sz="850" b="0">
+                          <a:ea typeface="맑은 고딕"/>
+                          <a:cs typeface="맑은 고딕"/>
+                        </a:rPr>
+                        <a:t>248 시간 조각을 24코어에서 78초</a:t>
+                      </a:r>
+                    </a:p>
+                  </a:txBody>
+                  <a:tcPr marL="54864" marR="54864" marT="18288" marB="18288" anchor="ctr"/>
+                </a:tc>
+                <a:tc>
+                  <a:txBody>
+                    <a:bodyPr wrap="square"/>
+                    <a:lstStyle/>
+                    <a:p>
+                      <a:r>
+                        <a:rPr sz="850" b="0">
+                          <a:ea typeface="맑은 고딕"/>
+                          <a:cs typeface="맑은 고딕"/>
+                        </a:rPr>
+                        <a:t>CES 항을 NN-CES 산출로 바꿔 끼울 수 있게 설계되어 있다. 프로파일 단위 불확실성이 우리 타깃 재현성 바닥(§8aq)의 독립 비교값이 된다</a:t>
+                      </a:r>
+                    </a:p>
+                  </a:txBody>
+                  <a:tcPr marL="54864" marR="54864" marT="18288" marB="18288" anchor="ctr"/>
+                </a:tc>
+              </a:tr>
+              <a:tr h="456438">
+                <a:tc>
+                  <a:txBody>
+                    <a:bodyPr wrap="square"/>
+                    <a:lstStyle/>
+                    <a:p>
+                      <a:r>
+                        <a:rPr sz="850" b="0">
+                          <a:ea typeface="맑은 고딕"/>
+                          <a:cs typeface="맑은 고딕"/>
+                        </a:rPr>
+                        <a:t>TSER 결측 Te 복원 (NF 65:076008)</a:t>
+                      </a:r>
+                    </a:p>
+                  </a:txBody>
+                  <a:tcPr marL="54864" marR="54864" marT="18288" marB="18288" anchor="ctr"/>
+                </a:tc>
+                <a:tc>
+                  <a:txBody>
+                    <a:bodyPr wrap="square"/>
+                    <a:lstStyle/>
+                    <a:p>
+                      <a:r>
+                        <a:rPr sz="850" b="0">
+                          <a:ea typeface="맑은 고딕"/>
+                          <a:cs typeface="맑은 고딕"/>
+                        </a:rPr>
+                        <a:t>EAST</a:t>
+                      </a:r>
+                    </a:p>
+                  </a:txBody>
+                  <a:tcPr marL="54864" marR="54864" marT="18288" marB="18288" anchor="ctr"/>
+                </a:tc>
+                <a:tc>
+                  <a:txBody>
+                    <a:bodyPr wrap="square"/>
+                    <a:lstStyle/>
+                    <a:p>
+                      <a:r>
+                        <a:rPr sz="850" b="0">
+                          <a:ea typeface="맑은 고딕"/>
+                          <a:cs typeface="맑은 고딕"/>
+                        </a:rPr>
+                        <a:t>2025</a:t>
+                      </a:r>
+                    </a:p>
+                  </a:txBody>
+                  <a:tcPr marL="54864" marR="54864" marT="18288" marB="18288" anchor="ctr"/>
+                </a:tc>
+                <a:tc>
+                  <a:txBody>
+                    <a:bodyPr wrap="square"/>
+                    <a:lstStyle/>
+                    <a:p>
+                      <a:r>
+                        <a:rPr sz="850" b="0">
+                          <a:ea typeface="맑은 고딕"/>
+                          <a:cs typeface="맑은 고딕"/>
+                        </a:rPr>
+                        <a:t>센서 고장·진단 부재로 빠진 전자온도를 복원한다</a:t>
+                      </a:r>
+                    </a:p>
+                  </a:txBody>
+                  <a:tcPr marL="54864" marR="54864" marT="18288" marB="18288" anchor="ctr"/>
+                </a:tc>
+                <a:tc>
+                  <a:txBody>
+                    <a:bodyPr wrap="square"/>
+                    <a:lstStyle/>
+                    <a:p>
+                      <a:r>
+                        <a:rPr sz="850" b="0">
+                          <a:ea typeface="맑은 고딕"/>
+                          <a:cs typeface="맑은 고딕"/>
+                        </a:rPr>
+                        <a:t>시계열 외재 회귀(TSER)가 여러 신호의 상호관계를 학습한다</a:t>
+                      </a:r>
+                    </a:p>
+                  </a:txBody>
+                  <a:tcPr marL="54864" marR="54864" marT="18288" marB="18288" anchor="ctr"/>
+                </a:tc>
+                <a:tc>
+                  <a:txBody>
+                    <a:bodyPr wrap="square"/>
+                    <a:lstStyle/>
+                    <a:p>
+                      <a:r>
+                        <a:rPr sz="850" b="0">
+                          <a:ea typeface="맑은 고딕"/>
+                          <a:cs typeface="맑은 고딕"/>
+                        </a:rPr>
+                        <a:t>방전 전 구간에서 2σ 이내 신뢰수준 95.9 % 이상</a:t>
+                      </a:r>
+                    </a:p>
+                  </a:txBody>
+                  <a:tcPr marL="54864" marR="54864" marT="18288" marB="18288" anchor="ctr"/>
+                </a:tc>
+                <a:tc>
+                  <a:txBody>
+                    <a:bodyPr wrap="square"/>
+                    <a:lstStyle/>
+                    <a:p>
+                      <a:r>
+                        <a:rPr sz="850" b="0">
+                          <a:ea typeface="맑은 고딕"/>
+                          <a:cs typeface="맑은 고딕"/>
+                        </a:rPr>
+                        <a:t>결측 타깃 복원이라는 우리 문제 정의와 가장 가까운 프레이밍이다. 다만 타깃이 전자온도이고 인과성 제약도, 보간 기준선과의 비교도 없다</a:t>
+                      </a:r>
+                    </a:p>
+                  </a:txBody>
+                  <a:tcPr marL="54864" marR="54864" marT="18288" marB="18288" anchor="ctr"/>
+                </a:tc>
+              </a:tr>
+              <a:tr h="456438">
+                <a:tc>
+                  <a:txBody>
+                    <a:bodyPr wrap="square"/>
+                    <a:lstStyle/>
+                    <a:p>
+                      <a:r>
+                        <a:rPr sz="850" b="0">
+                          <a:ea typeface="맑은 고딕"/>
+                          <a:cs typeface="맑은 고딕"/>
+                        </a:rPr>
+                        <a:t>전 상태 복원 (arXiv 2607.04390)</a:t>
+                      </a:r>
+                    </a:p>
+                  </a:txBody>
+                  <a:tcPr marL="54864" marR="54864" marT="18288" marB="18288" anchor="ctr"/>
+                </a:tc>
+                <a:tc>
+                  <a:txBody>
+                    <a:bodyPr wrap="square"/>
+                    <a:lstStyle/>
+                    <a:p>
+                      <a:r>
+                        <a:rPr sz="850" b="0">
+                          <a:ea typeface="맑은 고딕"/>
+                          <a:cs typeface="맑은 고딕"/>
+                        </a:rPr>
+                        <a:t>kinetic 시뮬레이션</a:t>
+                      </a:r>
+                    </a:p>
+                  </a:txBody>
+                  <a:tcPr marL="54864" marR="54864" marT="18288" marB="18288" anchor="ctr"/>
+                </a:tc>
+                <a:tc>
+                  <a:txBody>
+                    <a:bodyPr wrap="square"/>
+                    <a:lstStyle/>
+                    <a:p>
+                      <a:r>
+                        <a:rPr sz="850" b="0">
+                          <a:ea typeface="맑은 고딕"/>
+                          <a:cs typeface="맑은 고딕"/>
+                        </a:rPr>
+                        <a:t>2026</a:t>
+                      </a:r>
+                    </a:p>
+                  </a:txBody>
+                  <a:tcPr marL="54864" marR="54864" marT="18288" marB="18288" anchor="ctr"/>
+                </a:tc>
+                <a:tc>
+                  <a:txBody>
+                    <a:bodyPr wrap="square"/>
+                    <a:lstStyle/>
+                    <a:p>
+                      <a:r>
+                        <a:rPr sz="850" b="0">
+                          <a:ea typeface="맑은 고딕"/>
+                          <a:cs typeface="맑은 고딕"/>
+                        </a:rPr>
+                        <a:t>희소한 밀도 프로브 몇 개로 전 영역 플라즈마 장을 복원한다</a:t>
+                      </a:r>
+                    </a:p>
+                  </a:txBody>
+                  <a:tcPr marL="54864" marR="54864" marT="18288" marB="18288" anchor="ctr"/>
+                </a:tc>
+                <a:tc>
+                  <a:txBody>
+                    <a:bodyPr wrap="square"/>
+                    <a:lstStyle/>
+                    <a:p>
+                      <a:r>
+                        <a:rPr sz="850" b="0">
+                          <a:ea typeface="맑은 고딕"/>
+                          <a:cs typeface="맑은 고딕"/>
+                        </a:rPr>
+                        <a:t>희소 센서 이력의 시간 인코딩 + 공간 디코딩</a:t>
+                      </a:r>
+                    </a:p>
+                  </a:txBody>
+                  <a:tcPr marL="54864" marR="54864" marT="18288" marB="18288" anchor="ctr"/>
+                </a:tc>
+                <a:tc>
+                  <a:txBody>
+                    <a:bodyPr wrap="square"/>
+                    <a:lstStyle/>
+                    <a:p>
+                      <a:r>
+                        <a:rPr sz="850" b="0">
+                          <a:ea typeface="맑은 고딕"/>
+                          <a:cs typeface="맑은 고딕"/>
+                        </a:rPr>
+                        <a:t>고정밀 kinetic 시뮬레이션 자료 (실험 데이터 아님)</a:t>
+                      </a:r>
+                    </a:p>
+                  </a:txBody>
+                  <a:tcPr marL="54864" marR="54864" marT="18288" marB="18288" anchor="ctr"/>
+                </a:tc>
+                <a:tc>
+                  <a:txBody>
+                    <a:bodyPr wrap="square"/>
+                    <a:lstStyle/>
+                    <a:p>
+                      <a:r>
+                        <a:rPr sz="850" b="0">
+                          <a:ea typeface="맑은 고딕"/>
+                          <a:cs typeface="맑은 고딕"/>
+                        </a:rPr>
+                        <a:t>센서 몇 개로 전체 상태를 세우는 구조는 우리와 같으나 실험이 아니라 시뮬레이션에서 검증되었다</a:t>
+                      </a:r>
+                    </a:p>
+                  </a:txBody>
+                  <a:tcPr marL="54864" marR="54864" marT="18288" marB="18288" anchor="ctr"/>
+                </a:tc>
+              </a:tr>
+              <a:tr h="456438">
+                <a:tc>
+                  <a:txBody>
+                    <a:bodyPr wrap="square"/>
+                    <a:lstStyle/>
+                    <a:p>
+                      <a:r>
+                        <a:rPr sz="850" b="0">
+                          <a:ea typeface="맑은 고딕"/>
+                          <a:cs typeface="맑은 고딕"/>
+                        </a:rPr>
+                        <a:t>평형 재구성 챌린지 (arXiv 2609.01750)</a:t>
+                      </a:r>
+                    </a:p>
+                  </a:txBody>
+                  <a:tcPr marL="54864" marR="54864" marT="18288" marB="18288" anchor="ctr"/>
+                </a:tc>
+                <a:tc>
+                  <a:txBody>
+                    <a:bodyPr wrap="square"/>
+                    <a:lstStyle/>
+                    <a:p>
+                      <a:r>
+                        <a:rPr sz="850" b="0">
+                          <a:ea typeface="맑은 고딕"/>
+                          <a:cs typeface="맑은 고딕"/>
+                        </a:rPr>
+                        <a:t>DIII-D · MAST</a:t>
+                      </a:r>
+                    </a:p>
+                  </a:txBody>
+                  <a:tcPr marL="54864" marR="54864" marT="18288" marB="18288" anchor="ctr"/>
+                </a:tc>
+                <a:tc>
+                  <a:txBody>
+                    <a:bodyPr wrap="square"/>
+                    <a:lstStyle/>
+                    <a:p>
+                      <a:r>
+                        <a:rPr sz="850" b="0">
+                          <a:ea typeface="맑은 고딕"/>
+                          <a:cs typeface="맑은 고딕"/>
+                        </a:rPr>
+                        <a:t>2026</a:t>
+                      </a:r>
+                    </a:p>
+                  </a:txBody>
+                  <a:tcPr marL="54864" marR="54864" marT="18288" marB="18288" anchor="ctr"/>
+                </a:tc>
+                <a:tc>
+                  <a:txBody>
+                    <a:bodyPr wrap="square"/>
+                    <a:lstStyle/>
+                    <a:p>
+                      <a:r>
+                        <a:rPr sz="850" b="0">
+                          <a:ea typeface="맑은 고딕"/>
+                          <a:cs typeface="맑은 고딕"/>
+                        </a:rPr>
+                        <a:t>자기 진단 없이 자기 기하를 추론하는 공개 벤치마크</a:t>
+                      </a:r>
+                    </a:p>
+                  </a:txBody>
+                  <a:tcPr marL="54864" marR="54864" marT="18288" marB="18288" anchor="ctr"/>
+                </a:tc>
+                <a:tc>
+                  <a:txBody>
+                    <a:bodyPr wrap="square"/>
+                    <a:lstStyle/>
+                    <a:p>
+                      <a:r>
+                        <a:rPr sz="850" b="0">
+                          <a:ea typeface="맑은 고딕"/>
+                          <a:cs typeface="맑은 고딕"/>
+                        </a:rPr>
+                        <a:t>PF 코일 전류 + Thomson으로 ψ(R,Z). 기준선 4종(PCA+Ridge / GBT / MLP / conv 디코더)</a:t>
+                      </a:r>
+                    </a:p>
+                  </a:txBody>
+                  <a:tcPr marL="54864" marR="54864" marT="18288" marB="18288" anchor="ctr"/>
+                </a:tc>
+                <a:tc>
+                  <a:txBody>
+                    <a:bodyPr wrap="square"/>
+                    <a:lstStyle/>
+                    <a:p>
+                      <a:r>
+                        <a:rPr sz="850" b="0">
+                          <a:ea typeface="맑은 고딕"/>
+                          <a:cs typeface="맑은 고딕"/>
+                        </a:rPr>
+                        <a:t>DIII-D 약 9,100 shot · MAST 약 2,400 shot</a:t>
+                      </a:r>
+                    </a:p>
+                  </a:txBody>
+                  <a:tcPr marL="54864" marR="54864" marT="18288" marB="18288" anchor="ctr"/>
+                </a:tc>
+                <a:tc>
+                  <a:txBody>
+                    <a:bodyPr wrap="square"/>
+                    <a:lstStyle/>
+                    <a:p>
+                      <a:r>
+                        <a:rPr sz="850" b="0">
+                          <a:ea typeface="맑은 고딕"/>
+                          <a:cs typeface="맑은 고딕"/>
+                        </a:rPr>
+                        <a:t>진단 하나가 없을 때 다른 진단으로 대신한다는 문제를 공개 벤치마크로 만든 사례. 이온 채널은 다루지 않으며 shot 단위 분할과 교차 장치 일반화를 요구한다</a:t>
+                      </a:r>
+                    </a:p>
+                  </a:txBody>
+                  <a:tcPr marL="54864" marR="54864" marT="18288" marB="18288" anchor="ctr"/>
+                </a:tc>
+              </a:tr>
+            </a:tbl>
+          </a:graphicData>
+        </a:graphic>
+      </p:graphicFrame>
+    </p:spTree>
+  </p:cSld>
+  <p:clrMapOvr>
+    <a:masterClrMapping/>
+  </p:clrMapOvr>
+</p:sld>
+</file>
+
+<file path=ppt/slides/slide58.xml><?xml version="1.0" encoding="utf-8"?>
+<p:sld xmlns:a="http://schemas.openxmlformats.org/drawingml/2006/main" xmlns:p="http://schemas.openxmlformats.org/presentationml/2006/main" xmlns:r="http://schemas.openxmlformats.org/officeDocument/2006/relationships">
+  <p:cSld>
+    <p:spTree>
+      <p:nvGrpSpPr>
+        <p:cNvPr id="1" name=""/>
+        <p:cNvGrpSpPr/>
+        <p:nvPr/>
+      </p:nvGrpSpPr>
+      <p:grpSpPr/>
+      <p:sp>
+        <p:nvSpPr>
+          <p:cNvPr id="2" name="Title 1"/>
+          <p:cNvSpPr>
+            <a:spLocks noGrp="1"/>
+          </p:cNvSpPr>
+          <p:nvPr>
+            <p:ph type="title"/>
+          </p:nvPr>
+        </p:nvSpPr>
+        <p:spPr>
+          <a:xfrm>
+            <a:off x="585216" y="704088"/>
+            <a:ext cx="11027664" cy="1014984"/>
+          </a:xfrm>
+        </p:spPr>
+        <p:txBody>
+          <a:bodyPr wrap="square"/>
+          <a:lstStyle/>
+          <a:p>
+            <a:r>
               <a:rPr b="0" sz="2450">
                 <a:ea typeface="맑은 고딕"/>
                 <a:cs typeface="맑은 고딕"/>
@@ -25382,7 +27028,7 @@
 </p:sld>
 </file>
 
-<file path=ppt/slides/slide58.xml><?xml version="1.0" encoding="utf-8"?>
+<file path=ppt/slides/slide59.xml><?xml version="1.0" encoding="utf-8"?>
 <p:sld xmlns:a="http://schemas.openxmlformats.org/drawingml/2006/main" xmlns:p="http://schemas.openxmlformats.org/presentationml/2006/main" xmlns:r="http://schemas.openxmlformats.org/officeDocument/2006/relationships">
   <p:cSld>
     <p:spTree>
@@ -25951,7 +27597,160 @@
 </p:sld>
 </file>
 
-<file path=ppt/slides/slide59.xml><?xml version="1.0" encoding="utf-8"?>
+<file path=ppt/slides/slide6.xml><?xml version="1.0" encoding="utf-8"?>
+<p:sld xmlns:a="http://schemas.openxmlformats.org/drawingml/2006/main" xmlns:p="http://schemas.openxmlformats.org/presentationml/2006/main" xmlns:r="http://schemas.openxmlformats.org/officeDocument/2006/relationships">
+  <p:cSld>
+    <p:spTree>
+      <p:nvGrpSpPr>
+        <p:cNvPr id="1" name=""/>
+        <p:cNvGrpSpPr/>
+        <p:nvPr/>
+      </p:nvGrpSpPr>
+      <p:grpSpPr/>
+      <p:sp>
+        <p:nvSpPr>
+          <p:cNvPr id="2" name="Title 1"/>
+          <p:cNvSpPr>
+            <a:spLocks noGrp="1"/>
+          </p:cNvSpPr>
+          <p:nvPr>
+            <p:ph type="title"/>
+          </p:nvPr>
+        </p:nvSpPr>
+        <p:spPr>
+          <a:xfrm>
+            <a:off x="585216" y="704088"/>
+            <a:ext cx="11027664" cy="1014984"/>
+          </a:xfrm>
+        </p:spPr>
+        <p:txBody>
+          <a:bodyPr wrap="square"/>
+          <a:lstStyle/>
+          <a:p>
+            <a:r>
+              <a:rPr b="0" sz="2800">
+                <a:ea typeface="맑은 고딕"/>
+                <a:cs typeface="맑은 고딕"/>
+              </a:rPr>
+              <a:t>기여는 다섯 가지로 요약된다</a:t>
+            </a:r>
+          </a:p>
+        </p:txBody>
+      </p:sp>
+      <p:sp>
+        <p:nvSpPr>
+          <p:cNvPr id="3" name="Content Placeholder 2"/>
+          <p:cNvSpPr>
+            <a:spLocks noGrp="1"/>
+          </p:cNvSpPr>
+          <p:nvPr>
+            <p:ph idx="1"/>
+          </p:nvPr>
+        </p:nvSpPr>
+        <p:spPr>
+          <a:xfrm>
+            <a:off x="585216" y="2176272"/>
+            <a:ext cx="11027664" cy="3675887"/>
+          </a:xfrm>
+        </p:spPr>
+        <p:txBody>
+          <a:bodyPr wrap="square"/>
+          <a:lstStyle/>
+          <a:p>
+            <a:pPr>
+              <a:spcAft>
+                <a:spcPts val="576"/>
+              </a:spcAft>
+            </a:pPr>
+            <a:r>
+              <a:rPr sz="1730">
+                <a:ea typeface="맑은 고딕"/>
+                <a:cs typeface="맑은 고딕"/>
+              </a:rPr>
+              <a:t>① 희소 타겟 나우캐스팅을 위한 인과적 전체격자 프레이밍. 라벨 없는 행을 버리는 대신 맥락으로 유지하고 희소성을 손실로 옮긴다.</a:t>
+            </a:r>
+          </a:p>
+          <a:p>
+            <a:pPr lvl="1">
+              <a:spcAft>
+                <a:spcPts val="288"/>
+              </a:spcAft>
+            </a:pPr>
+            <a:r>
+              <a:rPr sz="1540">
+                <a:ea typeface="맑은 고딕"/>
+                <a:cs typeface="맑은 고딕"/>
+              </a:rPr>
+              <a:t>짝지은 윈도 대조군 대비 통합 T_i skill +0.081(16회 실행, CI [+0.067, +0.096], 16/16 양수)이며 학습 비용은 오히려 더 싸다.</a:t>
+            </a:r>
+          </a:p>
+          <a:p>
+            <a:pPr>
+              <a:spcAft>
+                <a:spcPts val="576"/>
+              </a:spcAft>
+            </a:pPr>
+            <a:r>
+              <a:rPr sz="1730">
+                <a:ea typeface="맑은 고딕"/>
+                <a:cs typeface="맑은 고딕"/>
+              </a:rPr>
+              <a:t>② 사전등록된 두-모집단 shot 군집 평가 프로토콜. W=2, 유지값 전 구간 제거, 피팅 실패 0.53 %에 대한 두 공동 1차 모집단, 선택이 읽지 않는 test 셋.</a:t>
+            </a:r>
+          </a:p>
+          <a:p>
+            <a:pPr>
+              <a:spcAft>
+                <a:spcPts val="576"/>
+              </a:spcAft>
+            </a:pPr>
+            <a:r>
+              <a:rPr sz="1730">
+                <a:ea typeface="맑은 고딕"/>
+                <a:cs typeface="맑은 고딕"/>
+              </a:rPr>
+              <a:t>③ T_i에 대한 강건한 긍정 결과. 미래를 쓰는 PCHIP 대비 skill +0.17~+0.32로 두 모집단의 4개 분할 전부에서 PASS이고, 8개 셀 전부에서 인과 GP를 이긴다.</a:t>
+            </a:r>
+          </a:p>
+          <a:p>
+            <a:pPr>
+              <a:spcAft>
+                <a:spcPts val="576"/>
+              </a:spcAft>
+            </a:pPr>
+            <a:r>
+              <a:rPr sz="1730">
+                <a:ea typeface="맑은 고딕"/>
+                <a:cs typeface="맑은 고딕"/>
+              </a:rPr>
+              <a:t>④ V_rot에 대한 물리 기반 부정 결과. 동률이며(1/4·2/4 유의) 고속 진단을 0으로 만들어도 출력이 비트 단위로 동일하다.</a:t>
+            </a:r>
+          </a:p>
+          <a:p>
+            <a:pPr>
+              <a:spcAft>
+                <a:spcPts val="576"/>
+              </a:spcAft>
+            </a:pPr>
+            <a:r>
+              <a:rPr sz="1730">
+                <a:ea typeface="맑은 고딕"/>
+                <a:cs typeface="맑은 고딕"/>
+              </a:rPr>
+              <a:t>⑤ 두 개의 스트레스 테스트(MNAR 재가중·캠페인 이동), 복잡도와 크기 축의 종결, 문맥과 구조의 분리, 그리고 측정된 배치 가능성.</a:t>
+            </a:r>
+          </a:p>
+        </p:txBody>
+      </p:sp>
+    </p:spTree>
+  </p:cSld>
+  <p:clrMapOvr>
+    <a:masterClrMapping/>
+  </p:clrMapOvr>
+</p:sld>
+</file>
+
+<file path=ppt/slides/slide60.xml><?xml version="1.0" encoding="utf-8"?>
 <p:sld xmlns:a="http://schemas.openxmlformats.org/drawingml/2006/main" xmlns:p="http://schemas.openxmlformats.org/presentationml/2006/main" xmlns:r="http://schemas.openxmlformats.org/officeDocument/2006/relationships">
   <p:cSld>
     <p:spTree>
@@ -26639,160 +28438,7 @@
 </p:sld>
 </file>
 
-<file path=ppt/slides/slide6.xml><?xml version="1.0" encoding="utf-8"?>
-<p:sld xmlns:a="http://schemas.openxmlformats.org/drawingml/2006/main" xmlns:p="http://schemas.openxmlformats.org/presentationml/2006/main" xmlns:r="http://schemas.openxmlformats.org/officeDocument/2006/relationships">
-  <p:cSld>
-    <p:spTree>
-      <p:nvGrpSpPr>
-        <p:cNvPr id="1" name=""/>
-        <p:cNvGrpSpPr/>
-        <p:nvPr/>
-      </p:nvGrpSpPr>
-      <p:grpSpPr/>
-      <p:sp>
-        <p:nvSpPr>
-          <p:cNvPr id="2" name="Title 1"/>
-          <p:cNvSpPr>
-            <a:spLocks noGrp="1"/>
-          </p:cNvSpPr>
-          <p:nvPr>
-            <p:ph type="title"/>
-          </p:nvPr>
-        </p:nvSpPr>
-        <p:spPr>
-          <a:xfrm>
-            <a:off x="585216" y="704088"/>
-            <a:ext cx="11027664" cy="1014984"/>
-          </a:xfrm>
-        </p:spPr>
-        <p:txBody>
-          <a:bodyPr wrap="square"/>
-          <a:lstStyle/>
-          <a:p>
-            <a:r>
-              <a:rPr b="0" sz="2800">
-                <a:ea typeface="맑은 고딕"/>
-                <a:cs typeface="맑은 고딕"/>
-              </a:rPr>
-              <a:t>기여는 다섯 가지로 요약된다</a:t>
-            </a:r>
-          </a:p>
-        </p:txBody>
-      </p:sp>
-      <p:sp>
-        <p:nvSpPr>
-          <p:cNvPr id="3" name="Content Placeholder 2"/>
-          <p:cNvSpPr>
-            <a:spLocks noGrp="1"/>
-          </p:cNvSpPr>
-          <p:nvPr>
-            <p:ph idx="1"/>
-          </p:nvPr>
-        </p:nvSpPr>
-        <p:spPr>
-          <a:xfrm>
-            <a:off x="585216" y="2176272"/>
-            <a:ext cx="11027664" cy="3675887"/>
-          </a:xfrm>
-        </p:spPr>
-        <p:txBody>
-          <a:bodyPr wrap="square"/>
-          <a:lstStyle/>
-          <a:p>
-            <a:pPr>
-              <a:spcAft>
-                <a:spcPts val="576"/>
-              </a:spcAft>
-            </a:pPr>
-            <a:r>
-              <a:rPr sz="1730">
-                <a:ea typeface="맑은 고딕"/>
-                <a:cs typeface="맑은 고딕"/>
-              </a:rPr>
-              <a:t>① 희소 타겟 나우캐스팅을 위한 인과적 전체격자 프레이밍. 라벨 없는 행을 버리는 대신 맥락으로 유지하고 희소성을 손실로 옮긴다.</a:t>
-            </a:r>
-          </a:p>
-          <a:p>
-            <a:pPr lvl="1">
-              <a:spcAft>
-                <a:spcPts val="288"/>
-              </a:spcAft>
-            </a:pPr>
-            <a:r>
-              <a:rPr sz="1540">
-                <a:ea typeface="맑은 고딕"/>
-                <a:cs typeface="맑은 고딕"/>
-              </a:rPr>
-              <a:t>짝지은 윈도 대조군 대비 통합 T_i skill +0.081(16회 실행, CI [+0.067, +0.096], 16/16 양수)이며 학습 비용은 오히려 더 싸다.</a:t>
-            </a:r>
-          </a:p>
-          <a:p>
-            <a:pPr>
-              <a:spcAft>
-                <a:spcPts val="576"/>
-              </a:spcAft>
-            </a:pPr>
-            <a:r>
-              <a:rPr sz="1730">
-                <a:ea typeface="맑은 고딕"/>
-                <a:cs typeface="맑은 고딕"/>
-              </a:rPr>
-              <a:t>② 사전등록된 두-모집단 shot 군집 평가 프로토콜. W=2, 유지값 전 구간 제거, 피팅 실패 0.53 %에 대한 두 공동 1차 모집단, 선택이 읽지 않는 test 셋.</a:t>
-            </a:r>
-          </a:p>
-          <a:p>
-            <a:pPr>
-              <a:spcAft>
-                <a:spcPts val="576"/>
-              </a:spcAft>
-            </a:pPr>
-            <a:r>
-              <a:rPr sz="1730">
-                <a:ea typeface="맑은 고딕"/>
-                <a:cs typeface="맑은 고딕"/>
-              </a:rPr>
-              <a:t>③ T_i에 대한 강건한 긍정 결과. 미래를 쓰는 PCHIP 대비 skill +0.17~+0.32로 두 모집단의 4개 분할 전부에서 PASS이고, 8개 셀 전부에서 인과 GP를 이긴다.</a:t>
-            </a:r>
-          </a:p>
-          <a:p>
-            <a:pPr>
-              <a:spcAft>
-                <a:spcPts val="576"/>
-              </a:spcAft>
-            </a:pPr>
-            <a:r>
-              <a:rPr sz="1730">
-                <a:ea typeface="맑은 고딕"/>
-                <a:cs typeface="맑은 고딕"/>
-              </a:rPr>
-              <a:t>④ V_rot에 대한 물리 기반 부정 결과. 동률이며(1/4·2/4 유의) 고속 진단을 0으로 만들어도 출력이 비트 단위로 동일하다.</a:t>
-            </a:r>
-          </a:p>
-          <a:p>
-            <a:pPr>
-              <a:spcAft>
-                <a:spcPts val="576"/>
-              </a:spcAft>
-            </a:pPr>
-            <a:r>
-              <a:rPr sz="1730">
-                <a:ea typeface="맑은 고딕"/>
-                <a:cs typeface="맑은 고딕"/>
-              </a:rPr>
-              <a:t>⑤ 두 개의 스트레스 테스트(MNAR 재가중·캠페인 이동), 복잡도와 크기 축의 종결, 문맥과 구조의 분리, 그리고 측정된 배치 가능성.</a:t>
-            </a:r>
-          </a:p>
-        </p:txBody>
-      </p:sp>
-    </p:spTree>
-  </p:cSld>
-  <p:clrMapOvr>
-    <a:masterClrMapping/>
-  </p:clrMapOvr>
-</p:sld>
-</file>
-
-<file path=ppt/slides/slide60.xml><?xml version="1.0" encoding="utf-8"?>
+<file path=ppt/slides/slide61.xml><?xml version="1.0" encoding="utf-8"?>
 <p:sld xmlns:a="http://schemas.openxmlformats.org/drawingml/2006/main" xmlns:p="http://schemas.openxmlformats.org/presentationml/2006/main" xmlns:r="http://schemas.openxmlformats.org/officeDocument/2006/relationships">
   <p:cSld>
     <p:spTree>
@@ -26879,7 +28525,7 @@
         </p:nvGraphicFramePr>
         <p:xfrm>
           <a:off x="585216" y="2400807"/>
-          <a:ext cx="11027661" cy="2555240"/>
+          <a:ext cx="11027661" cy="2956560"/>
         </p:xfrm>
         <a:graphic>
           <a:graphicData uri="http://schemas.openxmlformats.org/drawingml/2006/table">
@@ -27249,7 +28895,7 @@
                           <a:ea typeface="맑은 고딕"/>
                           <a:cs typeface="맑은 고딕"/>
                         </a:rPr>
-                        <a:t>V_rot 입력 확장: 원시 kHz Mirnov 특징(B.6 A1) · NBI 토크 채널 · CES 피팅 품질 메타데이터 · 도플러 분광 입력</a:t>
+                        <a:t>CES 재분석: NN-CES 산출과 적합 품질 메타데이터를 확보해 값 컷을 품질 컷으로 바꾼다</a:t>
                       </a:r>
                     </a:p>
                   </a:txBody>
@@ -27265,7 +28911,7 @@
                           <a:ea typeface="맑은 고딕"/>
                           <a:cs typeface="맑은 고딕"/>
                         </a:rPr>
-                        <a:t>EAST XCS · PanoMHD · 합성 진단 증강</a:t>
+                        <a:t>NN-CES · SVMR+GPR · mtanh 적합</a:t>
                       </a:r>
                     </a:p>
                   </a:txBody>
@@ -27281,7 +28927,7 @@
                           <a:ea typeface="맑은 고딕"/>
                           <a:cs typeface="맑은 고딕"/>
                         </a:rPr>
-                        <a:t>데이터 획득</a:t>
+                        <a:t>데이터 요청</a:t>
                       </a:r>
                     </a:p>
                   </a:txBody>
@@ -27297,7 +28943,7 @@
                           <a:ea typeface="맑은 고딕"/>
                           <a:cs typeface="맑은 고딕"/>
                         </a:rPr>
-                        <a:t>변동 3분위 V_rot 승률이 먼저 오를 것</a:t>
+                        <a:t>두 공동 1차 모집단이 하나로 합쳐질 것</a:t>
                       </a:r>
                     </a:p>
                   </a:txBody>
@@ -27331,6 +28977,88 @@
                           <a:ea typeface="맑은 고딕"/>
                           <a:cs typeface="맑은 고딕"/>
                         </a:rPr>
+                        <a:t>V_rot 입력 확장: 원시 kHz Mirnov 특징(B.6 A1) · NBI 토크 채널 · 도플러 분광 입력</a:t>
+                      </a:r>
+                    </a:p>
+                  </a:txBody>
+                  <a:tcPr marL="54864" marR="54864" marT="18288" marB="18288" anchor="ctr"/>
+                </a:tc>
+                <a:tc>
+                  <a:txBody>
+                    <a:bodyPr wrap="square"/>
+                    <a:lstStyle/>
+                    <a:p>
+                      <a:r>
+                        <a:rPr sz="1100" b="0">
+                          <a:ea typeface="맑은 고딕"/>
+                          <a:cs typeface="맑은 고딕"/>
+                        </a:rPr>
+                        <a:t>EAST XCS · PanoMHD · 합성 진단 증강</a:t>
+                      </a:r>
+                    </a:p>
+                  </a:txBody>
+                  <a:tcPr marL="54864" marR="54864" marT="18288" marB="18288" anchor="ctr"/>
+                </a:tc>
+                <a:tc>
+                  <a:txBody>
+                    <a:bodyPr wrap="square"/>
+                    <a:lstStyle/>
+                    <a:p>
+                      <a:r>
+                        <a:rPr sz="1100" b="0">
+                          <a:ea typeface="맑은 고딕"/>
+                          <a:cs typeface="맑은 고딕"/>
+                        </a:rPr>
+                        <a:t>데이터 획득</a:t>
+                      </a:r>
+                    </a:p>
+                  </a:txBody>
+                  <a:tcPr marL="54864" marR="54864" marT="18288" marB="18288" anchor="ctr"/>
+                </a:tc>
+                <a:tc>
+                  <a:txBody>
+                    <a:bodyPr wrap="square"/>
+                    <a:lstStyle/>
+                    <a:p>
+                      <a:r>
+                        <a:rPr sz="1100" b="0">
+                          <a:ea typeface="맑은 고딕"/>
+                          <a:cs typeface="맑은 고딕"/>
+                        </a:rPr>
+                        <a:t>변동 3분위 V_rot 승률이 먼저 오를 것</a:t>
+                      </a:r>
+                    </a:p>
+                  </a:txBody>
+                  <a:tcPr marL="54864" marR="54864" marT="18288" marB="18288" anchor="ctr"/>
+                </a:tc>
+              </a:tr>
+              <a:tr h="401320">
+                <a:tc>
+                  <a:txBody>
+                    <a:bodyPr wrap="square"/>
+                    <a:lstStyle/>
+                    <a:p>
+                      <a:r>
+                        <a:rPr sz="1100" b="0">
+                          <a:ea typeface="맑은 고딕"/>
+                          <a:cs typeface="맑은 고딕"/>
+                        </a:rPr>
+                        <a:t>6</a:t>
+                      </a:r>
+                    </a:p>
+                  </a:txBody>
+                  <a:tcPr marL="54864" marR="54864" marT="18288" marB="18288" anchor="ctr"/>
+                </a:tc>
+                <a:tc>
+                  <a:txBody>
+                    <a:bodyPr wrap="square"/>
+                    <a:lstStyle/>
+                    <a:p>
+                      <a:r>
+                        <a:rPr sz="1100" b="0">
+                          <a:ea typeface="맑은 고딕"/>
+                          <a:cs typeface="맑은 고딕"/>
+                        </a:rPr>
                         <a:t>제로샷 대조군: TabPFN-v2 회귀(행 특징) · TiRex-2 / Chronos-2(과거 공변량)</a:t>
                       </a:r>
                     </a:p>
@@ -27397,7 +29125,7 @@
                           <a:ea typeface="맑은 고딕"/>
                           <a:cs typeface="맑은 고딕"/>
                         </a:rPr>
-                        <a:t>6</a:t>
+                        <a:t>7</a:t>
                       </a:r>
                     </a:p>
                   </a:txBody>
@@ -27480,7 +29208,7 @@
 </p:sld>
 </file>
 
-<file path=ppt/slides/slide61.xml><?xml version="1.0" encoding="utf-8"?>
+<file path=ppt/slides/slide62.xml><?xml version="1.0" encoding="utf-8"?>
 <p:sld xmlns:a="http://schemas.openxmlformats.org/drawingml/2006/main" xmlns:p="http://schemas.openxmlformats.org/presentationml/2006/main" xmlns:r="http://schemas.openxmlformats.org/officeDocument/2006/relationships">
   <p:cSld>
     <p:spTree>

--- a/docs/presentation/KSTAR_CES_졸논정리_논문흐름.pptx
+++ b/docs/presentation/KSTAR_CES_졸논정리_논문흐름.pptx
@@ -70,6 +70,8 @@
     <p:sldId id="315" r:id="rId66"/>
     <p:sldId id="316" r:id="rId67"/>
     <p:sldId id="317" r:id="rId68"/>
+    <p:sldId id="318" r:id="rId69"/>
+    <p:sldId id="319" r:id="rId70"/>
   </p:sldIdLst>
   <p:sldSz cx="12192000" cy="6858000"/>
   <p:notesSz cx="6858000" cy="9144000"/>
@@ -4160,7 +4162,7 @@
                 <a:ea typeface="맑은 고딕"/>
                 <a:cs typeface="맑은 고딕"/>
               </a:rPr>
-              <a:t>8ag / 8ai / 8ak / 8af / 8al / 8am 부록 / 8p / 8m / 8ap, 그리고 진행 중인 B.11.</a:t>
+              <a:t>8ag / 8ai / 8ak / 8af / 8al / 8am 부록 / 8p / 8m / 8ap · 8at, 그리고 B.11.</a:t>
             </a:r>
           </a:p>
         </p:txBody>
@@ -4234,421 +4236,7 @@
                 <a:ea typeface="맑은 고딕"/>
                 <a:cs typeface="맑은 고딕"/>
               </a:rPr>
-              <a:t>2026-09-05 조사한 핵융합 12편의 요약이다.</a:t>
-            </a:r>
-          </a:p>
-          <a:p>
-            <a:r>
-              <a:rPr>
-                <a:ea typeface="맑은 고딕"/>
-                <a:cs typeface="맑은 고딕"/>
-              </a:rPr>
-              <a:t>조사일 2026-09-05. 출처:</a:t>
-            </a:r>
-          </a:p>
-          <a:p>
-            <a:r>
-              <a:rPr>
-                <a:ea typeface="맑은 고딕"/>
-                <a:cs typeface="맑은 고딕"/>
-              </a:rPr>
-              <a:t>- Diag2Diag: https://arxiv.org/html/2405.05908v4</a:t>
-            </a:r>
-          </a:p>
-          <a:p>
-            <a:r>
-              <a:rPr>
-                <a:ea typeface="맑은 고딕"/>
-                <a:cs typeface="맑은 고딕"/>
-              </a:rPr>
-              <a:t>- Diag2Diag Nat. Comm.: https://www.nature.com/articles/s41467-025-63492-1</a:t>
-            </a:r>
-          </a:p>
-          <a:p>
-            <a:r>
-              <a:rPr>
-                <a:ea typeface="맑은 고딕"/>
-                <a:cs typeface="맑은 고딕"/>
-              </a:rPr>
-              <a:t>- COMPASS 시간 초해상: https://iopscience.iop.org/article/10.1088/1361-6587/ae72c6</a:t>
-            </a:r>
-          </a:p>
-          <a:p>
-            <a:r>
-              <a:rPr>
-                <a:ea typeface="맑은 고딕"/>
-                <a:cs typeface="맑은 고딕"/>
-              </a:rPr>
-              <a:t>- FusionMAE: https://arxiv.org/abs/2509.12945</a:t>
-            </a:r>
-          </a:p>
-          <a:p>
-            <a:r>
-              <a:rPr>
-                <a:ea typeface="맑은 고딕"/>
-                <a:cs typeface="맑은 고딕"/>
-              </a:rPr>
-              <a:t>- TokaMind: https://arxiv.org/html/2602.15084v2</a:t>
-            </a:r>
-          </a:p>
-          <a:p>
-            <a:r>
-              <a:rPr>
-                <a:ea typeface="맑은 고딕"/>
-                <a:cs typeface="맑은 고딕"/>
-              </a:rPr>
-              <a:t>- TokaMark: https://arxiv.org/html/2602.10132v2</a:t>
-            </a:r>
-          </a:p>
-          <a:p>
-            <a:r>
-              <a:rPr>
-                <a:ea typeface="맑은 고딕"/>
-                <a:cs typeface="맑은 고딕"/>
-              </a:rPr>
-              <a:t>- PanoMHD: https://arxiv.org/html/2603.02672</a:t>
-            </a:r>
-          </a:p>
-          <a:p>
-            <a:r>
-              <a:rPr>
-                <a:ea typeface="맑은 고딕"/>
-                <a:cs typeface="맑은 고딕"/>
-              </a:rPr>
-              <a:t>- TCV 멀티모달 VAE: https://arxiv.org/abs/2504.17710</a:t>
-            </a:r>
-          </a:p>
-          <a:p>
-            <a:r>
-              <a:rPr>
-                <a:ea typeface="맑은 고딕"/>
-                <a:cs typeface="맑은 고딕"/>
-              </a:rPr>
-              <a:t>- EAST 지식증류: https://arxiv.org/html/2607.04241</a:t>
-            </a:r>
-          </a:p>
-          <a:p>
-            <a:r>
-              <a:rPr>
-                <a:ea typeface="맑은 고딕"/>
-                <a:cs typeface="맑은 고딕"/>
-              </a:rPr>
-              <a:t>- WEST: https://arxiv.org/html/2602.19110</a:t>
-            </a:r>
-          </a:p>
-          <a:p>
-            <a:r>
-              <a:rPr>
-                <a:ea typeface="맑은 고딕"/>
-                <a:cs typeface="맑은 고딕"/>
-              </a:rPr>
-              <a:t>- EAST XCS ANN: https://iopscience.iop.org/article/10.1088/1741-4326/ad73e8</a:t>
-            </a:r>
-          </a:p>
-          <a:p>
-            <a:r>
-              <a:rPr>
-                <a:ea typeface="맑은 고딕"/>
-                <a:cs typeface="맑은 고딕"/>
-              </a:rPr>
-              <a:t>- Abbate 2025: https://iopscience.iop.org/article/10.1088/1741-4326/adc283</a:t>
-            </a:r>
-          </a:p>
-          <a:p>
-            <a:r>
-              <a:rPr>
-                <a:ea typeface="맑은 고딕"/>
-                <a:cs typeface="맑은 고딕"/>
-              </a:rPr>
-              <a:t>- 합성 진단 증강: https://arxiv.org/abs/2606.08462</a:t>
-            </a:r>
-          </a:p>
-          <a:p>
-            <a:r>
-              <a:rPr>
-                <a:ea typeface="맑은 고딕"/>
-                <a:cs typeface="맑은 고딕"/>
-              </a:rPr>
-              <a:t>- TokEye: https://arxiv.org/pdf/2602.20317</a:t>
-            </a:r>
-          </a:p>
-          <a:p>
-            <a:r>
-              <a:rPr>
-                <a:ea typeface="맑은 고딕"/>
-                <a:cs typeface="맑은 고딕"/>
-              </a:rPr>
-              <a:t>- KSTAR EPED 재구성: https://link.springer.com/article/10.1007/s40042-026-01580-1</a:t>
-            </a:r>
-          </a:p>
-          <a:p>
-            <a:r>
-              <a:rPr>
-                <a:ea typeface="맑은 고딕"/>
-                <a:cs typeface="맑은 고딕"/>
-              </a:rPr>
-              <a:t>- DIII-D 코일 shot-to-shot: https://www.ans.org/news/2026-08-18/article-8302/new-ml-framework-predicts-shifts-between-shots-at-diiid/</a:t>
-            </a:r>
-          </a:p>
-          <a:p>
-            <a:r>
-              <a:rPr>
-                <a:ea typeface="맑은 고딕"/>
-                <a:cs typeface="맑은 고딕"/>
-              </a:rPr>
-              <a:t>- NN-CES (KSTAR CES 신경망 분석): https://doi.org/10.1016/j.fusengdes.2025.115518</a:t>
-            </a:r>
-          </a:p>
-          <a:p>
-            <a:r>
-              <a:rPr>
-                <a:ea typeface="맑은 고딕"/>
-                <a:cs typeface="맑은 고딕"/>
-              </a:rPr>
-              <a:t>- SVMR+GPR KSTAR Ti 프로파일: https://doi.org/10.1088/1741-4326/ad7304</a:t>
-            </a:r>
-          </a:p>
-          <a:p>
-            <a:r>
-              <a:rPr>
-                <a:ea typeface="맑은 고딕"/>
-                <a:cs typeface="맑은 고딕"/>
-              </a:rPr>
-              <a:t>- 이상치 강건 Bayesian mtanh 적합: https://arxiv.org/html/2607.14142</a:t>
-            </a:r>
-          </a:p>
-          <a:p>
-            <a:r>
-              <a:rPr>
-                <a:ea typeface="맑은 고딕"/>
-                <a:cs typeface="맑은 고딕"/>
-              </a:rPr>
-              <a:t>- TSER 결측 Te 복원 (EAST): https://doi.org/10.1088/1741-4326/addb5f</a:t>
-            </a:r>
-          </a:p>
-          <a:p>
-            <a:r>
-              <a:rPr>
-                <a:ea typeface="맑은 고딕"/>
-                <a:cs typeface="맑은 고딕"/>
-              </a:rPr>
-              <a:t>- 전 상태 복원 (희소 센서): https://arxiv.org/abs/2607.04390</a:t>
-            </a:r>
-          </a:p>
-          <a:p>
-            <a:r>
-              <a:rPr>
-                <a:ea typeface="맑은 고딕"/>
-                <a:cs typeface="맑은 고딕"/>
-              </a:rPr>
-              <a:t>- 평형 재구성 챌린지: https://arxiv.org/html/2609.01750</a:t>
-            </a:r>
-          </a:p>
-          <a:p>
-            <a:r>
-              <a:rPr>
-                <a:ea typeface="맑은 고딕"/>
-                <a:cs typeface="맑은 고딕"/>
-              </a:rPr>
-              <a:t>- JET CXRS 신경망 (1993, 계보의 시작): https://www.microsoft.com/en-us/research/wp-content/uploads/2016/02/bishop-cxrs-ppcf-93.pdf</a:t>
-            </a:r>
-          </a:p>
-          <a:p>
-            <a:r>
-              <a:rPr>
-                <a:ea typeface="맑은 고딕"/>
-                <a:cs typeface="맑은 고딕"/>
-              </a:rPr>
-              <a:t>- ST40 교차 진단 grey-box: https://arxiv.org/abs/2407.18741</a:t>
-            </a:r>
-          </a:p>
-          <a:p>
-            <a:r>
-              <a:rPr>
-                <a:ea typeface="맑은 고딕"/>
-                <a:cs typeface="맑은 고딕"/>
-              </a:rPr>
-              <a:t>- W7-X Bayesian Ti 추론: https://doi.org/10.1088/1361-6587/ad3c1d</a:t>
-            </a:r>
-          </a:p>
-          <a:p>
-            <a:r>
-              <a:rPr>
-                <a:ea typeface="맑은 고딕"/>
-                <a:cs typeface="맑은 고딕"/>
-              </a:rPr>
-              <a:t>- TSI-Bench: https://arxiv.org/abs/2406.12747</a:t>
-            </a:r>
-          </a:p>
-          <a:p>
-            <a:r>
-              <a:rPr>
-                <a:ea typeface="맑은 고딕"/>
-                <a:cs typeface="맑은 고딕"/>
-              </a:rPr>
-              <a:t>- STDiff: https://arxiv.org/html/2508.19011v1</a:t>
-            </a:r>
-          </a:p>
-          <a:p>
-            <a:r>
-              <a:rPr>
-                <a:ea typeface="맑은 고딕"/>
-                <a:cs typeface="맑은 고딕"/>
-              </a:rPr>
-              <a:t>- iTimER: https://arxiv.org/html/2511.06854</a:t>
-            </a:r>
-          </a:p>
-          <a:p>
-            <a:r>
-              <a:rPr>
-                <a:ea typeface="맑은 고딕"/>
-                <a:cs typeface="맑은 고딕"/>
-              </a:rPr>
-              <a:t>- Neural CDE 보정기: https://arxiv.org/html/2512.12116v3</a:t>
-            </a:r>
-          </a:p>
-          <a:p>
-            <a:r>
-              <a:rPr>
-                <a:ea typeface="맑은 고딕"/>
-                <a:cs typeface="맑은 고딕"/>
-              </a:rPr>
-              <a:t>- TimeXer: https://github.com/thuml/TimeXer</a:t>
-            </a:r>
-          </a:p>
-          <a:p>
-            <a:r>
-              <a:rPr>
-                <a:ea typeface="맑은 고딕"/>
-                <a:cs typeface="맑은 고딕"/>
-              </a:rPr>
-              <a:t>- TiRex-2: https://arxiv.org/html/2607.01204v1</a:t>
-            </a:r>
-          </a:p>
-          <a:p>
-            <a:r>
-              <a:rPr>
-                <a:ea typeface="맑은 고딕"/>
-                <a:cs typeface="맑은 고딕"/>
-              </a:rPr>
-              <a:t>- TabPFN-TS: https://arxiv.org/abs/2501.02945</a:t>
-            </a:r>
-          </a:p>
-          <a:p>
-            <a:r>
-              <a:rPr>
-                <a:ea typeface="맑은 고딕"/>
-                <a:cs typeface="맑은 고딕"/>
-              </a:rPr>
-              <a:t>- TSFM 벤치마크 경고: https://arxiv.org/html/2510.13654v1</a:t>
-            </a:r>
-          </a:p>
-          <a:p>
-            <a:r>
-              <a:rPr>
-                <a:ea typeface="맑은 고딕"/>
-                <a:cs typeface="맑은 고딕"/>
-              </a:rPr>
-              <a:t>- TimeMAE: https://arxiv.org/html/2303.00320v4</a:t>
-            </a:r>
-          </a:p>
-          <a:p>
-            <a:r>
-              <a:rPr>
-                <a:ea typeface="맑은 고딕"/>
-                <a:cs typeface="맑은 고딕"/>
-              </a:rPr>
-              <a:t>- RG-ResMoE: https://arxiv.org/html/2608.12251v1</a:t>
-            </a:r>
-          </a:p>
-          <a:p>
-            <a:r>
-              <a:rPr>
-                <a:ea typeface="맑은 고딕"/>
-                <a:cs typeface="맑은 고딕"/>
-              </a:rPr>
-              <a:t>- KalmanNet: https://dl.acm.org/doi/abs/10.1109/tsp.2022.3158588</a:t>
-            </a:r>
-          </a:p>
-          <a:p>
-            <a:r>
-              <a:rPr>
-                <a:ea typeface="맑은 고딕"/>
-                <a:cs typeface="맑은 고딕"/>
-              </a:rPr>
-              <a:t>- Unscented KalmanNet: https://arxiv.org/html/2608.04201</a:t>
-            </a:r>
-          </a:p>
-          <a:p>
-            <a:r>
-              <a:rPr>
-                <a:ea typeface="맑은 고딕"/>
-                <a:cs typeface="맑은 고딕"/>
-              </a:rPr>
-              <a:t>- DLFM: https://link.springer.com/article/10.1007/s10994-025-06824-y</a:t>
-            </a:r>
-          </a:p>
-          <a:p>
-            <a:r>
-              <a:rPr>
-                <a:ea typeface="맑은 고딕"/>
-                <a:cs typeface="맑은 고딕"/>
-              </a:rPr>
-              <a:t>- 이분산 회귀 병리: https://arxiv.org/pdf/2306.16717</a:t>
-            </a:r>
-          </a:p>
-          <a:p>
-            <a:r>
-              <a:rPr>
-                <a:ea typeface="맑은 고딕"/>
-                <a:cs typeface="맑은 고딕"/>
-              </a:rPr>
-              <a:t>- 반지도 VAE 회귀: https://arxiv.org/pdf/2211.05979</a:t>
-            </a:r>
-          </a:p>
-          <a:p>
-            <a:r>
-              <a:rPr>
-                <a:ea typeface="맑은 고딕"/>
-                <a:cs typeface="맑은 고딕"/>
-              </a:rPr>
-              <a:t>- GP-MIDAS: https://arxiv.org/html/2402.10574v2</a:t>
-            </a:r>
-          </a:p>
-          <a:p>
-            <a:r>
-              <a:rPr>
-                <a:ea typeface="맑은 고딕"/>
-                <a:cs typeface="맑은 고딕"/>
-              </a:rPr>
-              <a:t>- 저가 센서 보정: https://arxiv.org/html/2604.21527v1</a:t>
-            </a:r>
-          </a:p>
-          <a:p>
-            <a:r>
-              <a:rPr>
-                <a:ea typeface="맑은 고딕"/>
-                <a:cs typeface="맑은 고딕"/>
-              </a:rPr>
-              <a:t>- 커프리스 혈압 벤치마크: https://arxiv.org/html/2602.04725v1</a:t>
-            </a:r>
-          </a:p>
-          <a:p>
-            <a:r>
-              <a:rPr>
-                <a:ea typeface="맑은 고딕"/>
-                <a:cs typeface="맑은 고딕"/>
-              </a:rPr>
-              <a:t>- PiGGO: https://arxiv.org/pdf/2604.26593</a:t>
-            </a:r>
-          </a:p>
-          <a:p>
-            <a:r>
-              <a:rPr>
-                <a:ea typeface="맑은 고딕"/>
-                <a:cs typeface="맑은 고딕"/>
-              </a:rPr>
-              <a:t>- 멀티태스크 가상센서: https://arxiv.org/abs/2601.20634</a:t>
+              <a:t>8ag / 8ai / 8ak / 8af / 8al / 8am 부록 / 8p / 8m / 8ap · 8at, 그리고 B.11.</a:t>
             </a:r>
           </a:p>
         </p:txBody>
@@ -5698,7 +5286,421 @@
                 <a:ea typeface="맑은 고딕"/>
                 <a:cs typeface="맑은 고딕"/>
               </a:rPr>
-              <a:t>마지막 열은 본 저장소의 통제 실험 판정이며, 새 계열을 도입하기 전에 이 열을 먼저 읽는다.</a:t>
+              <a:t>2026-09-05 조사한 핵융합 12편의 요약이다.</a:t>
+            </a:r>
+          </a:p>
+          <a:p>
+            <a:r>
+              <a:rPr>
+                <a:ea typeface="맑은 고딕"/>
+                <a:cs typeface="맑은 고딕"/>
+              </a:rPr>
+              <a:t>조사일 2026-09-05. 출처:</a:t>
+            </a:r>
+          </a:p>
+          <a:p>
+            <a:r>
+              <a:rPr>
+                <a:ea typeface="맑은 고딕"/>
+                <a:cs typeface="맑은 고딕"/>
+              </a:rPr>
+              <a:t>- Diag2Diag: https://arxiv.org/html/2405.05908v4</a:t>
+            </a:r>
+          </a:p>
+          <a:p>
+            <a:r>
+              <a:rPr>
+                <a:ea typeface="맑은 고딕"/>
+                <a:cs typeface="맑은 고딕"/>
+              </a:rPr>
+              <a:t>- Diag2Diag Nat. Comm.: https://www.nature.com/articles/s41467-025-63492-1</a:t>
+            </a:r>
+          </a:p>
+          <a:p>
+            <a:r>
+              <a:rPr>
+                <a:ea typeface="맑은 고딕"/>
+                <a:cs typeface="맑은 고딕"/>
+              </a:rPr>
+              <a:t>- COMPASS 시간 초해상: https://iopscience.iop.org/article/10.1088/1361-6587/ae72c6</a:t>
+            </a:r>
+          </a:p>
+          <a:p>
+            <a:r>
+              <a:rPr>
+                <a:ea typeface="맑은 고딕"/>
+                <a:cs typeface="맑은 고딕"/>
+              </a:rPr>
+              <a:t>- FusionMAE: https://arxiv.org/abs/2509.12945</a:t>
+            </a:r>
+          </a:p>
+          <a:p>
+            <a:r>
+              <a:rPr>
+                <a:ea typeface="맑은 고딕"/>
+                <a:cs typeface="맑은 고딕"/>
+              </a:rPr>
+              <a:t>- TokaMind: https://arxiv.org/html/2602.15084v2</a:t>
+            </a:r>
+          </a:p>
+          <a:p>
+            <a:r>
+              <a:rPr>
+                <a:ea typeface="맑은 고딕"/>
+                <a:cs typeface="맑은 고딕"/>
+              </a:rPr>
+              <a:t>- TokaMark: https://arxiv.org/html/2602.10132v2</a:t>
+            </a:r>
+          </a:p>
+          <a:p>
+            <a:r>
+              <a:rPr>
+                <a:ea typeface="맑은 고딕"/>
+                <a:cs typeface="맑은 고딕"/>
+              </a:rPr>
+              <a:t>- PanoMHD: https://arxiv.org/html/2603.02672</a:t>
+            </a:r>
+          </a:p>
+          <a:p>
+            <a:r>
+              <a:rPr>
+                <a:ea typeface="맑은 고딕"/>
+                <a:cs typeface="맑은 고딕"/>
+              </a:rPr>
+              <a:t>- TCV 멀티모달 VAE: https://arxiv.org/abs/2504.17710</a:t>
+            </a:r>
+          </a:p>
+          <a:p>
+            <a:r>
+              <a:rPr>
+                <a:ea typeface="맑은 고딕"/>
+                <a:cs typeface="맑은 고딕"/>
+              </a:rPr>
+              <a:t>- EAST 지식증류: https://arxiv.org/html/2607.04241</a:t>
+            </a:r>
+          </a:p>
+          <a:p>
+            <a:r>
+              <a:rPr>
+                <a:ea typeface="맑은 고딕"/>
+                <a:cs typeface="맑은 고딕"/>
+              </a:rPr>
+              <a:t>- WEST: https://arxiv.org/html/2602.19110</a:t>
+            </a:r>
+          </a:p>
+          <a:p>
+            <a:r>
+              <a:rPr>
+                <a:ea typeface="맑은 고딕"/>
+                <a:cs typeface="맑은 고딕"/>
+              </a:rPr>
+              <a:t>- EAST XCS ANN: https://iopscience.iop.org/article/10.1088/1741-4326/ad73e8</a:t>
+            </a:r>
+          </a:p>
+          <a:p>
+            <a:r>
+              <a:rPr>
+                <a:ea typeface="맑은 고딕"/>
+                <a:cs typeface="맑은 고딕"/>
+              </a:rPr>
+              <a:t>- Abbate 2025: https://iopscience.iop.org/article/10.1088/1741-4326/adc283</a:t>
+            </a:r>
+          </a:p>
+          <a:p>
+            <a:r>
+              <a:rPr>
+                <a:ea typeface="맑은 고딕"/>
+                <a:cs typeface="맑은 고딕"/>
+              </a:rPr>
+              <a:t>- 합성 진단 증강: https://arxiv.org/abs/2606.08462</a:t>
+            </a:r>
+          </a:p>
+          <a:p>
+            <a:r>
+              <a:rPr>
+                <a:ea typeface="맑은 고딕"/>
+                <a:cs typeface="맑은 고딕"/>
+              </a:rPr>
+              <a:t>- TokEye: https://arxiv.org/pdf/2602.20317</a:t>
+            </a:r>
+          </a:p>
+          <a:p>
+            <a:r>
+              <a:rPr>
+                <a:ea typeface="맑은 고딕"/>
+                <a:cs typeface="맑은 고딕"/>
+              </a:rPr>
+              <a:t>- KSTAR EPED 재구성: https://link.springer.com/article/10.1007/s40042-026-01580-1</a:t>
+            </a:r>
+          </a:p>
+          <a:p>
+            <a:r>
+              <a:rPr>
+                <a:ea typeface="맑은 고딕"/>
+                <a:cs typeface="맑은 고딕"/>
+              </a:rPr>
+              <a:t>- DIII-D 코일 shot-to-shot: https://www.ans.org/news/2026-08-18/article-8302/new-ml-framework-predicts-shifts-between-shots-at-diiid/</a:t>
+            </a:r>
+          </a:p>
+          <a:p>
+            <a:r>
+              <a:rPr>
+                <a:ea typeface="맑은 고딕"/>
+                <a:cs typeface="맑은 고딕"/>
+              </a:rPr>
+              <a:t>- NN-CES (KSTAR CES 신경망 분석): https://doi.org/10.1016/j.fusengdes.2025.115518</a:t>
+            </a:r>
+          </a:p>
+          <a:p>
+            <a:r>
+              <a:rPr>
+                <a:ea typeface="맑은 고딕"/>
+                <a:cs typeface="맑은 고딕"/>
+              </a:rPr>
+              <a:t>- SVMR+GPR KSTAR Ti 프로파일: https://doi.org/10.1088/1741-4326/ad7304</a:t>
+            </a:r>
+          </a:p>
+          <a:p>
+            <a:r>
+              <a:rPr>
+                <a:ea typeface="맑은 고딕"/>
+                <a:cs typeface="맑은 고딕"/>
+              </a:rPr>
+              <a:t>- 이상치 강건 Bayesian mtanh 적합: https://arxiv.org/html/2607.14142</a:t>
+            </a:r>
+          </a:p>
+          <a:p>
+            <a:r>
+              <a:rPr>
+                <a:ea typeface="맑은 고딕"/>
+                <a:cs typeface="맑은 고딕"/>
+              </a:rPr>
+              <a:t>- TSER 결측 Te 복원 (EAST): https://doi.org/10.1088/1741-4326/addb5f</a:t>
+            </a:r>
+          </a:p>
+          <a:p>
+            <a:r>
+              <a:rPr>
+                <a:ea typeface="맑은 고딕"/>
+                <a:cs typeface="맑은 고딕"/>
+              </a:rPr>
+              <a:t>- 전 상태 복원 (희소 센서): https://arxiv.org/abs/2607.04390</a:t>
+            </a:r>
+          </a:p>
+          <a:p>
+            <a:r>
+              <a:rPr>
+                <a:ea typeface="맑은 고딕"/>
+                <a:cs typeface="맑은 고딕"/>
+              </a:rPr>
+              <a:t>- 평형 재구성 챌린지: https://arxiv.org/html/2609.01750</a:t>
+            </a:r>
+          </a:p>
+          <a:p>
+            <a:r>
+              <a:rPr>
+                <a:ea typeface="맑은 고딕"/>
+                <a:cs typeface="맑은 고딕"/>
+              </a:rPr>
+              <a:t>- JET CXRS 신경망 (1993, 계보의 시작): https://www.microsoft.com/en-us/research/wp-content/uploads/2016/02/bishop-cxrs-ppcf-93.pdf</a:t>
+            </a:r>
+          </a:p>
+          <a:p>
+            <a:r>
+              <a:rPr>
+                <a:ea typeface="맑은 고딕"/>
+                <a:cs typeface="맑은 고딕"/>
+              </a:rPr>
+              <a:t>- ST40 교차 진단 grey-box: https://arxiv.org/abs/2407.18741</a:t>
+            </a:r>
+          </a:p>
+          <a:p>
+            <a:r>
+              <a:rPr>
+                <a:ea typeface="맑은 고딕"/>
+                <a:cs typeface="맑은 고딕"/>
+              </a:rPr>
+              <a:t>- W7-X Bayesian Ti 추론: https://doi.org/10.1088/1361-6587/ad3c1d</a:t>
+            </a:r>
+          </a:p>
+          <a:p>
+            <a:r>
+              <a:rPr>
+                <a:ea typeface="맑은 고딕"/>
+                <a:cs typeface="맑은 고딕"/>
+              </a:rPr>
+              <a:t>- TSI-Bench: https://arxiv.org/abs/2406.12747</a:t>
+            </a:r>
+          </a:p>
+          <a:p>
+            <a:r>
+              <a:rPr>
+                <a:ea typeface="맑은 고딕"/>
+                <a:cs typeface="맑은 고딕"/>
+              </a:rPr>
+              <a:t>- STDiff: https://arxiv.org/html/2508.19011v1</a:t>
+            </a:r>
+          </a:p>
+          <a:p>
+            <a:r>
+              <a:rPr>
+                <a:ea typeface="맑은 고딕"/>
+                <a:cs typeface="맑은 고딕"/>
+              </a:rPr>
+              <a:t>- iTimER: https://arxiv.org/html/2511.06854</a:t>
+            </a:r>
+          </a:p>
+          <a:p>
+            <a:r>
+              <a:rPr>
+                <a:ea typeface="맑은 고딕"/>
+                <a:cs typeface="맑은 고딕"/>
+              </a:rPr>
+              <a:t>- Neural CDE 보정기: https://arxiv.org/html/2512.12116v3</a:t>
+            </a:r>
+          </a:p>
+          <a:p>
+            <a:r>
+              <a:rPr>
+                <a:ea typeface="맑은 고딕"/>
+                <a:cs typeface="맑은 고딕"/>
+              </a:rPr>
+              <a:t>- TimeXer: https://github.com/thuml/TimeXer</a:t>
+            </a:r>
+          </a:p>
+          <a:p>
+            <a:r>
+              <a:rPr>
+                <a:ea typeface="맑은 고딕"/>
+                <a:cs typeface="맑은 고딕"/>
+              </a:rPr>
+              <a:t>- TiRex-2: https://arxiv.org/html/2607.01204v1</a:t>
+            </a:r>
+          </a:p>
+          <a:p>
+            <a:r>
+              <a:rPr>
+                <a:ea typeface="맑은 고딕"/>
+                <a:cs typeface="맑은 고딕"/>
+              </a:rPr>
+              <a:t>- TabPFN-TS: https://arxiv.org/abs/2501.02945</a:t>
+            </a:r>
+          </a:p>
+          <a:p>
+            <a:r>
+              <a:rPr>
+                <a:ea typeface="맑은 고딕"/>
+                <a:cs typeface="맑은 고딕"/>
+              </a:rPr>
+              <a:t>- TSFM 벤치마크 경고: https://arxiv.org/html/2510.13654v1</a:t>
+            </a:r>
+          </a:p>
+          <a:p>
+            <a:r>
+              <a:rPr>
+                <a:ea typeface="맑은 고딕"/>
+                <a:cs typeface="맑은 고딕"/>
+              </a:rPr>
+              <a:t>- TimeMAE: https://arxiv.org/html/2303.00320v4</a:t>
+            </a:r>
+          </a:p>
+          <a:p>
+            <a:r>
+              <a:rPr>
+                <a:ea typeface="맑은 고딕"/>
+                <a:cs typeface="맑은 고딕"/>
+              </a:rPr>
+              <a:t>- RG-ResMoE: https://arxiv.org/html/2608.12251v1</a:t>
+            </a:r>
+          </a:p>
+          <a:p>
+            <a:r>
+              <a:rPr>
+                <a:ea typeface="맑은 고딕"/>
+                <a:cs typeface="맑은 고딕"/>
+              </a:rPr>
+              <a:t>- KalmanNet: https://dl.acm.org/doi/abs/10.1109/tsp.2022.3158588</a:t>
+            </a:r>
+          </a:p>
+          <a:p>
+            <a:r>
+              <a:rPr>
+                <a:ea typeface="맑은 고딕"/>
+                <a:cs typeface="맑은 고딕"/>
+              </a:rPr>
+              <a:t>- Unscented KalmanNet: https://arxiv.org/html/2608.04201</a:t>
+            </a:r>
+          </a:p>
+          <a:p>
+            <a:r>
+              <a:rPr>
+                <a:ea typeface="맑은 고딕"/>
+                <a:cs typeface="맑은 고딕"/>
+              </a:rPr>
+              <a:t>- DLFM: https://link.springer.com/article/10.1007/s10994-025-06824-y</a:t>
+            </a:r>
+          </a:p>
+          <a:p>
+            <a:r>
+              <a:rPr>
+                <a:ea typeface="맑은 고딕"/>
+                <a:cs typeface="맑은 고딕"/>
+              </a:rPr>
+              <a:t>- 이분산 회귀 병리: https://arxiv.org/pdf/2306.16717</a:t>
+            </a:r>
+          </a:p>
+          <a:p>
+            <a:r>
+              <a:rPr>
+                <a:ea typeface="맑은 고딕"/>
+                <a:cs typeface="맑은 고딕"/>
+              </a:rPr>
+              <a:t>- 반지도 VAE 회귀: https://arxiv.org/pdf/2211.05979</a:t>
+            </a:r>
+          </a:p>
+          <a:p>
+            <a:r>
+              <a:rPr>
+                <a:ea typeface="맑은 고딕"/>
+                <a:cs typeface="맑은 고딕"/>
+              </a:rPr>
+              <a:t>- GP-MIDAS: https://arxiv.org/html/2402.10574v2</a:t>
+            </a:r>
+          </a:p>
+          <a:p>
+            <a:r>
+              <a:rPr>
+                <a:ea typeface="맑은 고딕"/>
+                <a:cs typeface="맑은 고딕"/>
+              </a:rPr>
+              <a:t>- 저가 센서 보정: https://arxiv.org/html/2604.21527v1</a:t>
+            </a:r>
+          </a:p>
+          <a:p>
+            <a:r>
+              <a:rPr>
+                <a:ea typeface="맑은 고딕"/>
+                <a:cs typeface="맑은 고딕"/>
+              </a:rPr>
+              <a:t>- 커프리스 혈압 벤치마크: https://arxiv.org/html/2602.04725v1</a:t>
+            </a:r>
+          </a:p>
+          <a:p>
+            <a:r>
+              <a:rPr>
+                <a:ea typeface="맑은 고딕"/>
+                <a:cs typeface="맑은 고딕"/>
+              </a:rPr>
+              <a:t>- PiGGO: https://arxiv.org/pdf/2604.26593</a:t>
+            </a:r>
+          </a:p>
+          <a:p>
+            <a:r>
+              <a:rPr>
+                <a:ea typeface="맑은 고딕"/>
+                <a:cs typeface="맑은 고딕"/>
+              </a:rPr>
+              <a:t>- 멀티태스크 가상센서: https://arxiv.org/abs/2601.20634</a:t>
             </a:r>
           </a:p>
         </p:txBody>
@@ -5772,7 +5774,421 @@
                 <a:ea typeface="맑은 고딕"/>
                 <a:cs typeface="맑은 고딕"/>
               </a:rPr>
-              <a:t>마지막 열은 본 저장소의 통제 실험 판정이며, 새 계열을 도입하기 전에 이 열을 먼저 읽는다.</a:t>
+              <a:t>2026-09-05 조사한 핵융합 12편의 요약이다.</a:t>
+            </a:r>
+          </a:p>
+          <a:p>
+            <a:r>
+              <a:rPr>
+                <a:ea typeface="맑은 고딕"/>
+                <a:cs typeface="맑은 고딕"/>
+              </a:rPr>
+              <a:t>조사일 2026-09-05. 출처:</a:t>
+            </a:r>
+          </a:p>
+          <a:p>
+            <a:r>
+              <a:rPr>
+                <a:ea typeface="맑은 고딕"/>
+                <a:cs typeface="맑은 고딕"/>
+              </a:rPr>
+              <a:t>- Diag2Diag: https://arxiv.org/html/2405.05908v4</a:t>
+            </a:r>
+          </a:p>
+          <a:p>
+            <a:r>
+              <a:rPr>
+                <a:ea typeface="맑은 고딕"/>
+                <a:cs typeface="맑은 고딕"/>
+              </a:rPr>
+              <a:t>- Diag2Diag Nat. Comm.: https://www.nature.com/articles/s41467-025-63492-1</a:t>
+            </a:r>
+          </a:p>
+          <a:p>
+            <a:r>
+              <a:rPr>
+                <a:ea typeface="맑은 고딕"/>
+                <a:cs typeface="맑은 고딕"/>
+              </a:rPr>
+              <a:t>- COMPASS 시간 초해상: https://iopscience.iop.org/article/10.1088/1361-6587/ae72c6</a:t>
+            </a:r>
+          </a:p>
+          <a:p>
+            <a:r>
+              <a:rPr>
+                <a:ea typeface="맑은 고딕"/>
+                <a:cs typeface="맑은 고딕"/>
+              </a:rPr>
+              <a:t>- FusionMAE: https://arxiv.org/abs/2509.12945</a:t>
+            </a:r>
+          </a:p>
+          <a:p>
+            <a:r>
+              <a:rPr>
+                <a:ea typeface="맑은 고딕"/>
+                <a:cs typeface="맑은 고딕"/>
+              </a:rPr>
+              <a:t>- TokaMind: https://arxiv.org/html/2602.15084v2</a:t>
+            </a:r>
+          </a:p>
+          <a:p>
+            <a:r>
+              <a:rPr>
+                <a:ea typeface="맑은 고딕"/>
+                <a:cs typeface="맑은 고딕"/>
+              </a:rPr>
+              <a:t>- TokaMark: https://arxiv.org/html/2602.10132v2</a:t>
+            </a:r>
+          </a:p>
+          <a:p>
+            <a:r>
+              <a:rPr>
+                <a:ea typeface="맑은 고딕"/>
+                <a:cs typeface="맑은 고딕"/>
+              </a:rPr>
+              <a:t>- PanoMHD: https://arxiv.org/html/2603.02672</a:t>
+            </a:r>
+          </a:p>
+          <a:p>
+            <a:r>
+              <a:rPr>
+                <a:ea typeface="맑은 고딕"/>
+                <a:cs typeface="맑은 고딕"/>
+              </a:rPr>
+              <a:t>- TCV 멀티모달 VAE: https://arxiv.org/abs/2504.17710</a:t>
+            </a:r>
+          </a:p>
+          <a:p>
+            <a:r>
+              <a:rPr>
+                <a:ea typeface="맑은 고딕"/>
+                <a:cs typeface="맑은 고딕"/>
+              </a:rPr>
+              <a:t>- EAST 지식증류: https://arxiv.org/html/2607.04241</a:t>
+            </a:r>
+          </a:p>
+          <a:p>
+            <a:r>
+              <a:rPr>
+                <a:ea typeface="맑은 고딕"/>
+                <a:cs typeface="맑은 고딕"/>
+              </a:rPr>
+              <a:t>- WEST: https://arxiv.org/html/2602.19110</a:t>
+            </a:r>
+          </a:p>
+          <a:p>
+            <a:r>
+              <a:rPr>
+                <a:ea typeface="맑은 고딕"/>
+                <a:cs typeface="맑은 고딕"/>
+              </a:rPr>
+              <a:t>- EAST XCS ANN: https://iopscience.iop.org/article/10.1088/1741-4326/ad73e8</a:t>
+            </a:r>
+          </a:p>
+          <a:p>
+            <a:r>
+              <a:rPr>
+                <a:ea typeface="맑은 고딕"/>
+                <a:cs typeface="맑은 고딕"/>
+              </a:rPr>
+              <a:t>- Abbate 2025: https://iopscience.iop.org/article/10.1088/1741-4326/adc283</a:t>
+            </a:r>
+          </a:p>
+          <a:p>
+            <a:r>
+              <a:rPr>
+                <a:ea typeface="맑은 고딕"/>
+                <a:cs typeface="맑은 고딕"/>
+              </a:rPr>
+              <a:t>- 합성 진단 증강: https://arxiv.org/abs/2606.08462</a:t>
+            </a:r>
+          </a:p>
+          <a:p>
+            <a:r>
+              <a:rPr>
+                <a:ea typeface="맑은 고딕"/>
+                <a:cs typeface="맑은 고딕"/>
+              </a:rPr>
+              <a:t>- TokEye: https://arxiv.org/pdf/2602.20317</a:t>
+            </a:r>
+          </a:p>
+          <a:p>
+            <a:r>
+              <a:rPr>
+                <a:ea typeface="맑은 고딕"/>
+                <a:cs typeface="맑은 고딕"/>
+              </a:rPr>
+              <a:t>- KSTAR EPED 재구성: https://link.springer.com/article/10.1007/s40042-026-01580-1</a:t>
+            </a:r>
+          </a:p>
+          <a:p>
+            <a:r>
+              <a:rPr>
+                <a:ea typeface="맑은 고딕"/>
+                <a:cs typeface="맑은 고딕"/>
+              </a:rPr>
+              <a:t>- DIII-D 코일 shot-to-shot: https://www.ans.org/news/2026-08-18/article-8302/new-ml-framework-predicts-shifts-between-shots-at-diiid/</a:t>
+            </a:r>
+          </a:p>
+          <a:p>
+            <a:r>
+              <a:rPr>
+                <a:ea typeface="맑은 고딕"/>
+                <a:cs typeface="맑은 고딕"/>
+              </a:rPr>
+              <a:t>- NN-CES (KSTAR CES 신경망 분석): https://doi.org/10.1016/j.fusengdes.2025.115518</a:t>
+            </a:r>
+          </a:p>
+          <a:p>
+            <a:r>
+              <a:rPr>
+                <a:ea typeface="맑은 고딕"/>
+                <a:cs typeface="맑은 고딕"/>
+              </a:rPr>
+              <a:t>- SVMR+GPR KSTAR Ti 프로파일: https://doi.org/10.1088/1741-4326/ad7304</a:t>
+            </a:r>
+          </a:p>
+          <a:p>
+            <a:r>
+              <a:rPr>
+                <a:ea typeface="맑은 고딕"/>
+                <a:cs typeface="맑은 고딕"/>
+              </a:rPr>
+              <a:t>- 이상치 강건 Bayesian mtanh 적합: https://arxiv.org/html/2607.14142</a:t>
+            </a:r>
+          </a:p>
+          <a:p>
+            <a:r>
+              <a:rPr>
+                <a:ea typeface="맑은 고딕"/>
+                <a:cs typeface="맑은 고딕"/>
+              </a:rPr>
+              <a:t>- TSER 결측 Te 복원 (EAST): https://doi.org/10.1088/1741-4326/addb5f</a:t>
+            </a:r>
+          </a:p>
+          <a:p>
+            <a:r>
+              <a:rPr>
+                <a:ea typeface="맑은 고딕"/>
+                <a:cs typeface="맑은 고딕"/>
+              </a:rPr>
+              <a:t>- 전 상태 복원 (희소 센서): https://arxiv.org/abs/2607.04390</a:t>
+            </a:r>
+          </a:p>
+          <a:p>
+            <a:r>
+              <a:rPr>
+                <a:ea typeface="맑은 고딕"/>
+                <a:cs typeface="맑은 고딕"/>
+              </a:rPr>
+              <a:t>- 평형 재구성 챌린지: https://arxiv.org/html/2609.01750</a:t>
+            </a:r>
+          </a:p>
+          <a:p>
+            <a:r>
+              <a:rPr>
+                <a:ea typeface="맑은 고딕"/>
+                <a:cs typeface="맑은 고딕"/>
+              </a:rPr>
+              <a:t>- JET CXRS 신경망 (1993, 계보의 시작): https://www.microsoft.com/en-us/research/wp-content/uploads/2016/02/bishop-cxrs-ppcf-93.pdf</a:t>
+            </a:r>
+          </a:p>
+          <a:p>
+            <a:r>
+              <a:rPr>
+                <a:ea typeface="맑은 고딕"/>
+                <a:cs typeface="맑은 고딕"/>
+              </a:rPr>
+              <a:t>- ST40 교차 진단 grey-box: https://arxiv.org/abs/2407.18741</a:t>
+            </a:r>
+          </a:p>
+          <a:p>
+            <a:r>
+              <a:rPr>
+                <a:ea typeface="맑은 고딕"/>
+                <a:cs typeface="맑은 고딕"/>
+              </a:rPr>
+              <a:t>- W7-X Bayesian Ti 추론: https://doi.org/10.1088/1361-6587/ad3c1d</a:t>
+            </a:r>
+          </a:p>
+          <a:p>
+            <a:r>
+              <a:rPr>
+                <a:ea typeface="맑은 고딕"/>
+                <a:cs typeface="맑은 고딕"/>
+              </a:rPr>
+              <a:t>- TSI-Bench: https://arxiv.org/abs/2406.12747</a:t>
+            </a:r>
+          </a:p>
+          <a:p>
+            <a:r>
+              <a:rPr>
+                <a:ea typeface="맑은 고딕"/>
+                <a:cs typeface="맑은 고딕"/>
+              </a:rPr>
+              <a:t>- STDiff: https://arxiv.org/html/2508.19011v1</a:t>
+            </a:r>
+          </a:p>
+          <a:p>
+            <a:r>
+              <a:rPr>
+                <a:ea typeface="맑은 고딕"/>
+                <a:cs typeface="맑은 고딕"/>
+              </a:rPr>
+              <a:t>- iTimER: https://arxiv.org/html/2511.06854</a:t>
+            </a:r>
+          </a:p>
+          <a:p>
+            <a:r>
+              <a:rPr>
+                <a:ea typeface="맑은 고딕"/>
+                <a:cs typeface="맑은 고딕"/>
+              </a:rPr>
+              <a:t>- Neural CDE 보정기: https://arxiv.org/html/2512.12116v3</a:t>
+            </a:r>
+          </a:p>
+          <a:p>
+            <a:r>
+              <a:rPr>
+                <a:ea typeface="맑은 고딕"/>
+                <a:cs typeface="맑은 고딕"/>
+              </a:rPr>
+              <a:t>- TimeXer: https://github.com/thuml/TimeXer</a:t>
+            </a:r>
+          </a:p>
+          <a:p>
+            <a:r>
+              <a:rPr>
+                <a:ea typeface="맑은 고딕"/>
+                <a:cs typeface="맑은 고딕"/>
+              </a:rPr>
+              <a:t>- TiRex-2: https://arxiv.org/html/2607.01204v1</a:t>
+            </a:r>
+          </a:p>
+          <a:p>
+            <a:r>
+              <a:rPr>
+                <a:ea typeface="맑은 고딕"/>
+                <a:cs typeface="맑은 고딕"/>
+              </a:rPr>
+              <a:t>- TabPFN-TS: https://arxiv.org/abs/2501.02945</a:t>
+            </a:r>
+          </a:p>
+          <a:p>
+            <a:r>
+              <a:rPr>
+                <a:ea typeface="맑은 고딕"/>
+                <a:cs typeface="맑은 고딕"/>
+              </a:rPr>
+              <a:t>- TSFM 벤치마크 경고: https://arxiv.org/html/2510.13654v1</a:t>
+            </a:r>
+          </a:p>
+          <a:p>
+            <a:r>
+              <a:rPr>
+                <a:ea typeface="맑은 고딕"/>
+                <a:cs typeface="맑은 고딕"/>
+              </a:rPr>
+              <a:t>- TimeMAE: https://arxiv.org/html/2303.00320v4</a:t>
+            </a:r>
+          </a:p>
+          <a:p>
+            <a:r>
+              <a:rPr>
+                <a:ea typeface="맑은 고딕"/>
+                <a:cs typeface="맑은 고딕"/>
+              </a:rPr>
+              <a:t>- RG-ResMoE: https://arxiv.org/html/2608.12251v1</a:t>
+            </a:r>
+          </a:p>
+          <a:p>
+            <a:r>
+              <a:rPr>
+                <a:ea typeface="맑은 고딕"/>
+                <a:cs typeface="맑은 고딕"/>
+              </a:rPr>
+              <a:t>- KalmanNet: https://dl.acm.org/doi/abs/10.1109/tsp.2022.3158588</a:t>
+            </a:r>
+          </a:p>
+          <a:p>
+            <a:r>
+              <a:rPr>
+                <a:ea typeface="맑은 고딕"/>
+                <a:cs typeface="맑은 고딕"/>
+              </a:rPr>
+              <a:t>- Unscented KalmanNet: https://arxiv.org/html/2608.04201</a:t>
+            </a:r>
+          </a:p>
+          <a:p>
+            <a:r>
+              <a:rPr>
+                <a:ea typeface="맑은 고딕"/>
+                <a:cs typeface="맑은 고딕"/>
+              </a:rPr>
+              <a:t>- DLFM: https://link.springer.com/article/10.1007/s10994-025-06824-y</a:t>
+            </a:r>
+          </a:p>
+          <a:p>
+            <a:r>
+              <a:rPr>
+                <a:ea typeface="맑은 고딕"/>
+                <a:cs typeface="맑은 고딕"/>
+              </a:rPr>
+              <a:t>- 이분산 회귀 병리: https://arxiv.org/pdf/2306.16717</a:t>
+            </a:r>
+          </a:p>
+          <a:p>
+            <a:r>
+              <a:rPr>
+                <a:ea typeface="맑은 고딕"/>
+                <a:cs typeface="맑은 고딕"/>
+              </a:rPr>
+              <a:t>- 반지도 VAE 회귀: https://arxiv.org/pdf/2211.05979</a:t>
+            </a:r>
+          </a:p>
+          <a:p>
+            <a:r>
+              <a:rPr>
+                <a:ea typeface="맑은 고딕"/>
+                <a:cs typeface="맑은 고딕"/>
+              </a:rPr>
+              <a:t>- GP-MIDAS: https://arxiv.org/html/2402.10574v2</a:t>
+            </a:r>
+          </a:p>
+          <a:p>
+            <a:r>
+              <a:rPr>
+                <a:ea typeface="맑은 고딕"/>
+                <a:cs typeface="맑은 고딕"/>
+              </a:rPr>
+              <a:t>- 저가 센서 보정: https://arxiv.org/html/2604.21527v1</a:t>
+            </a:r>
+          </a:p>
+          <a:p>
+            <a:r>
+              <a:rPr>
+                <a:ea typeface="맑은 고딕"/>
+                <a:cs typeface="맑은 고딕"/>
+              </a:rPr>
+              <a:t>- 커프리스 혈압 벤치마크: https://arxiv.org/html/2602.04725v1</a:t>
+            </a:r>
+          </a:p>
+          <a:p>
+            <a:r>
+              <a:rPr>
+                <a:ea typeface="맑은 고딕"/>
+                <a:cs typeface="맑은 고딕"/>
+              </a:rPr>
+              <a:t>- PiGGO: https://arxiv.org/pdf/2604.26593</a:t>
+            </a:r>
+          </a:p>
+          <a:p>
+            <a:r>
+              <a:rPr>
+                <a:ea typeface="맑은 고딕"/>
+                <a:cs typeface="맑은 고딕"/>
+              </a:rPr>
+              <a:t>- 멀티태스크 가상센서: https://arxiv.org/abs/2601.20634</a:t>
             </a:r>
           </a:p>
         </p:txBody>
@@ -5846,7 +6262,7 @@
                 <a:ea typeface="맑은 고딕"/>
                 <a:cs typeface="맑은 고딕"/>
               </a:rPr>
-              <a:t>혼합주기 나우캐스팅 · 저가 센서 보정 · 커프리스 혈압 · 구조 가상 센싱 · 합성 진단 증강의 다섯 계열에서 같은 결론이 반복된다.</a:t>
+              <a:t>마지막 열은 본 저장소의 통제 실험 판정이며, 새 계열을 도입하기 전에 이 열을 먼저 읽는다.</a:t>
             </a:r>
           </a:p>
         </p:txBody>
@@ -5994,421 +6410,7 @@
                 <a:ea typeface="맑은 고딕"/>
                 <a:cs typeface="맑은 고딕"/>
               </a:rPr>
-              <a:t>우선순위는 비용 대비 정보량 순이다.</a:t>
-            </a:r>
-          </a:p>
-          <a:p>
-            <a:r>
-              <a:rPr>
-                <a:ea typeface="맑은 고딕"/>
-                <a:cs typeface="맑은 고딕"/>
-              </a:rPr>
-              <a:t>조사일 2026-09-05. 출처:</a:t>
-            </a:r>
-          </a:p>
-          <a:p>
-            <a:r>
-              <a:rPr>
-                <a:ea typeface="맑은 고딕"/>
-                <a:cs typeface="맑은 고딕"/>
-              </a:rPr>
-              <a:t>- Diag2Diag: https://arxiv.org/html/2405.05908v4</a:t>
-            </a:r>
-          </a:p>
-          <a:p>
-            <a:r>
-              <a:rPr>
-                <a:ea typeface="맑은 고딕"/>
-                <a:cs typeface="맑은 고딕"/>
-              </a:rPr>
-              <a:t>- Diag2Diag Nat. Comm.: https://www.nature.com/articles/s41467-025-63492-1</a:t>
-            </a:r>
-          </a:p>
-          <a:p>
-            <a:r>
-              <a:rPr>
-                <a:ea typeface="맑은 고딕"/>
-                <a:cs typeface="맑은 고딕"/>
-              </a:rPr>
-              <a:t>- COMPASS 시간 초해상: https://iopscience.iop.org/article/10.1088/1361-6587/ae72c6</a:t>
-            </a:r>
-          </a:p>
-          <a:p>
-            <a:r>
-              <a:rPr>
-                <a:ea typeface="맑은 고딕"/>
-                <a:cs typeface="맑은 고딕"/>
-              </a:rPr>
-              <a:t>- FusionMAE: https://arxiv.org/abs/2509.12945</a:t>
-            </a:r>
-          </a:p>
-          <a:p>
-            <a:r>
-              <a:rPr>
-                <a:ea typeface="맑은 고딕"/>
-                <a:cs typeface="맑은 고딕"/>
-              </a:rPr>
-              <a:t>- TokaMind: https://arxiv.org/html/2602.15084v2</a:t>
-            </a:r>
-          </a:p>
-          <a:p>
-            <a:r>
-              <a:rPr>
-                <a:ea typeface="맑은 고딕"/>
-                <a:cs typeface="맑은 고딕"/>
-              </a:rPr>
-              <a:t>- TokaMark: https://arxiv.org/html/2602.10132v2</a:t>
-            </a:r>
-          </a:p>
-          <a:p>
-            <a:r>
-              <a:rPr>
-                <a:ea typeface="맑은 고딕"/>
-                <a:cs typeface="맑은 고딕"/>
-              </a:rPr>
-              <a:t>- PanoMHD: https://arxiv.org/html/2603.02672</a:t>
-            </a:r>
-          </a:p>
-          <a:p>
-            <a:r>
-              <a:rPr>
-                <a:ea typeface="맑은 고딕"/>
-                <a:cs typeface="맑은 고딕"/>
-              </a:rPr>
-              <a:t>- TCV 멀티모달 VAE: https://arxiv.org/abs/2504.17710</a:t>
-            </a:r>
-          </a:p>
-          <a:p>
-            <a:r>
-              <a:rPr>
-                <a:ea typeface="맑은 고딕"/>
-                <a:cs typeface="맑은 고딕"/>
-              </a:rPr>
-              <a:t>- EAST 지식증류: https://arxiv.org/html/2607.04241</a:t>
-            </a:r>
-          </a:p>
-          <a:p>
-            <a:r>
-              <a:rPr>
-                <a:ea typeface="맑은 고딕"/>
-                <a:cs typeface="맑은 고딕"/>
-              </a:rPr>
-              <a:t>- WEST: https://arxiv.org/html/2602.19110</a:t>
-            </a:r>
-          </a:p>
-          <a:p>
-            <a:r>
-              <a:rPr>
-                <a:ea typeface="맑은 고딕"/>
-                <a:cs typeface="맑은 고딕"/>
-              </a:rPr>
-              <a:t>- EAST XCS ANN: https://iopscience.iop.org/article/10.1088/1741-4326/ad73e8</a:t>
-            </a:r>
-          </a:p>
-          <a:p>
-            <a:r>
-              <a:rPr>
-                <a:ea typeface="맑은 고딕"/>
-                <a:cs typeface="맑은 고딕"/>
-              </a:rPr>
-              <a:t>- Abbate 2025: https://iopscience.iop.org/article/10.1088/1741-4326/adc283</a:t>
-            </a:r>
-          </a:p>
-          <a:p>
-            <a:r>
-              <a:rPr>
-                <a:ea typeface="맑은 고딕"/>
-                <a:cs typeface="맑은 고딕"/>
-              </a:rPr>
-              <a:t>- 합성 진단 증강: https://arxiv.org/abs/2606.08462</a:t>
-            </a:r>
-          </a:p>
-          <a:p>
-            <a:r>
-              <a:rPr>
-                <a:ea typeface="맑은 고딕"/>
-                <a:cs typeface="맑은 고딕"/>
-              </a:rPr>
-              <a:t>- TokEye: https://arxiv.org/pdf/2602.20317</a:t>
-            </a:r>
-          </a:p>
-          <a:p>
-            <a:r>
-              <a:rPr>
-                <a:ea typeface="맑은 고딕"/>
-                <a:cs typeface="맑은 고딕"/>
-              </a:rPr>
-              <a:t>- KSTAR EPED 재구성: https://link.springer.com/article/10.1007/s40042-026-01580-1</a:t>
-            </a:r>
-          </a:p>
-          <a:p>
-            <a:r>
-              <a:rPr>
-                <a:ea typeface="맑은 고딕"/>
-                <a:cs typeface="맑은 고딕"/>
-              </a:rPr>
-              <a:t>- DIII-D 코일 shot-to-shot: https://www.ans.org/news/2026-08-18/article-8302/new-ml-framework-predicts-shifts-between-shots-at-diiid/</a:t>
-            </a:r>
-          </a:p>
-          <a:p>
-            <a:r>
-              <a:rPr>
-                <a:ea typeface="맑은 고딕"/>
-                <a:cs typeface="맑은 고딕"/>
-              </a:rPr>
-              <a:t>- NN-CES (KSTAR CES 신경망 분석): https://doi.org/10.1016/j.fusengdes.2025.115518</a:t>
-            </a:r>
-          </a:p>
-          <a:p>
-            <a:r>
-              <a:rPr>
-                <a:ea typeface="맑은 고딕"/>
-                <a:cs typeface="맑은 고딕"/>
-              </a:rPr>
-              <a:t>- SVMR+GPR KSTAR Ti 프로파일: https://doi.org/10.1088/1741-4326/ad7304</a:t>
-            </a:r>
-          </a:p>
-          <a:p>
-            <a:r>
-              <a:rPr>
-                <a:ea typeface="맑은 고딕"/>
-                <a:cs typeface="맑은 고딕"/>
-              </a:rPr>
-              <a:t>- 이상치 강건 Bayesian mtanh 적합: https://arxiv.org/html/2607.14142</a:t>
-            </a:r>
-          </a:p>
-          <a:p>
-            <a:r>
-              <a:rPr>
-                <a:ea typeface="맑은 고딕"/>
-                <a:cs typeface="맑은 고딕"/>
-              </a:rPr>
-              <a:t>- TSER 결측 Te 복원 (EAST): https://doi.org/10.1088/1741-4326/addb5f</a:t>
-            </a:r>
-          </a:p>
-          <a:p>
-            <a:r>
-              <a:rPr>
-                <a:ea typeface="맑은 고딕"/>
-                <a:cs typeface="맑은 고딕"/>
-              </a:rPr>
-              <a:t>- 전 상태 복원 (희소 센서): https://arxiv.org/abs/2607.04390</a:t>
-            </a:r>
-          </a:p>
-          <a:p>
-            <a:r>
-              <a:rPr>
-                <a:ea typeface="맑은 고딕"/>
-                <a:cs typeface="맑은 고딕"/>
-              </a:rPr>
-              <a:t>- 평형 재구성 챌린지: https://arxiv.org/html/2609.01750</a:t>
-            </a:r>
-          </a:p>
-          <a:p>
-            <a:r>
-              <a:rPr>
-                <a:ea typeface="맑은 고딕"/>
-                <a:cs typeface="맑은 고딕"/>
-              </a:rPr>
-              <a:t>- JET CXRS 신경망 (1993, 계보의 시작): https://www.microsoft.com/en-us/research/wp-content/uploads/2016/02/bishop-cxrs-ppcf-93.pdf</a:t>
-            </a:r>
-          </a:p>
-          <a:p>
-            <a:r>
-              <a:rPr>
-                <a:ea typeface="맑은 고딕"/>
-                <a:cs typeface="맑은 고딕"/>
-              </a:rPr>
-              <a:t>- ST40 교차 진단 grey-box: https://arxiv.org/abs/2407.18741</a:t>
-            </a:r>
-          </a:p>
-          <a:p>
-            <a:r>
-              <a:rPr>
-                <a:ea typeface="맑은 고딕"/>
-                <a:cs typeface="맑은 고딕"/>
-              </a:rPr>
-              <a:t>- W7-X Bayesian Ti 추론: https://doi.org/10.1088/1361-6587/ad3c1d</a:t>
-            </a:r>
-          </a:p>
-          <a:p>
-            <a:r>
-              <a:rPr>
-                <a:ea typeface="맑은 고딕"/>
-                <a:cs typeface="맑은 고딕"/>
-              </a:rPr>
-              <a:t>- TSI-Bench: https://arxiv.org/abs/2406.12747</a:t>
-            </a:r>
-          </a:p>
-          <a:p>
-            <a:r>
-              <a:rPr>
-                <a:ea typeface="맑은 고딕"/>
-                <a:cs typeface="맑은 고딕"/>
-              </a:rPr>
-              <a:t>- STDiff: https://arxiv.org/html/2508.19011v1</a:t>
-            </a:r>
-          </a:p>
-          <a:p>
-            <a:r>
-              <a:rPr>
-                <a:ea typeface="맑은 고딕"/>
-                <a:cs typeface="맑은 고딕"/>
-              </a:rPr>
-              <a:t>- iTimER: https://arxiv.org/html/2511.06854</a:t>
-            </a:r>
-          </a:p>
-          <a:p>
-            <a:r>
-              <a:rPr>
-                <a:ea typeface="맑은 고딕"/>
-                <a:cs typeface="맑은 고딕"/>
-              </a:rPr>
-              <a:t>- Neural CDE 보정기: https://arxiv.org/html/2512.12116v3</a:t>
-            </a:r>
-          </a:p>
-          <a:p>
-            <a:r>
-              <a:rPr>
-                <a:ea typeface="맑은 고딕"/>
-                <a:cs typeface="맑은 고딕"/>
-              </a:rPr>
-              <a:t>- TimeXer: https://github.com/thuml/TimeXer</a:t>
-            </a:r>
-          </a:p>
-          <a:p>
-            <a:r>
-              <a:rPr>
-                <a:ea typeface="맑은 고딕"/>
-                <a:cs typeface="맑은 고딕"/>
-              </a:rPr>
-              <a:t>- TiRex-2: https://arxiv.org/html/2607.01204v1</a:t>
-            </a:r>
-          </a:p>
-          <a:p>
-            <a:r>
-              <a:rPr>
-                <a:ea typeface="맑은 고딕"/>
-                <a:cs typeface="맑은 고딕"/>
-              </a:rPr>
-              <a:t>- TabPFN-TS: https://arxiv.org/abs/2501.02945</a:t>
-            </a:r>
-          </a:p>
-          <a:p>
-            <a:r>
-              <a:rPr>
-                <a:ea typeface="맑은 고딕"/>
-                <a:cs typeface="맑은 고딕"/>
-              </a:rPr>
-              <a:t>- TSFM 벤치마크 경고: https://arxiv.org/html/2510.13654v1</a:t>
-            </a:r>
-          </a:p>
-          <a:p>
-            <a:r>
-              <a:rPr>
-                <a:ea typeface="맑은 고딕"/>
-                <a:cs typeface="맑은 고딕"/>
-              </a:rPr>
-              <a:t>- TimeMAE: https://arxiv.org/html/2303.00320v4</a:t>
-            </a:r>
-          </a:p>
-          <a:p>
-            <a:r>
-              <a:rPr>
-                <a:ea typeface="맑은 고딕"/>
-                <a:cs typeface="맑은 고딕"/>
-              </a:rPr>
-              <a:t>- RG-ResMoE: https://arxiv.org/html/2608.12251v1</a:t>
-            </a:r>
-          </a:p>
-          <a:p>
-            <a:r>
-              <a:rPr>
-                <a:ea typeface="맑은 고딕"/>
-                <a:cs typeface="맑은 고딕"/>
-              </a:rPr>
-              <a:t>- KalmanNet: https://dl.acm.org/doi/abs/10.1109/tsp.2022.3158588</a:t>
-            </a:r>
-          </a:p>
-          <a:p>
-            <a:r>
-              <a:rPr>
-                <a:ea typeface="맑은 고딕"/>
-                <a:cs typeface="맑은 고딕"/>
-              </a:rPr>
-              <a:t>- Unscented KalmanNet: https://arxiv.org/html/2608.04201</a:t>
-            </a:r>
-          </a:p>
-          <a:p>
-            <a:r>
-              <a:rPr>
-                <a:ea typeface="맑은 고딕"/>
-                <a:cs typeface="맑은 고딕"/>
-              </a:rPr>
-              <a:t>- DLFM: https://link.springer.com/article/10.1007/s10994-025-06824-y</a:t>
-            </a:r>
-          </a:p>
-          <a:p>
-            <a:r>
-              <a:rPr>
-                <a:ea typeface="맑은 고딕"/>
-                <a:cs typeface="맑은 고딕"/>
-              </a:rPr>
-              <a:t>- 이분산 회귀 병리: https://arxiv.org/pdf/2306.16717</a:t>
-            </a:r>
-          </a:p>
-          <a:p>
-            <a:r>
-              <a:rPr>
-                <a:ea typeface="맑은 고딕"/>
-                <a:cs typeface="맑은 고딕"/>
-              </a:rPr>
-              <a:t>- 반지도 VAE 회귀: https://arxiv.org/pdf/2211.05979</a:t>
-            </a:r>
-          </a:p>
-          <a:p>
-            <a:r>
-              <a:rPr>
-                <a:ea typeface="맑은 고딕"/>
-                <a:cs typeface="맑은 고딕"/>
-              </a:rPr>
-              <a:t>- GP-MIDAS: https://arxiv.org/html/2402.10574v2</a:t>
-            </a:r>
-          </a:p>
-          <a:p>
-            <a:r>
-              <a:rPr>
-                <a:ea typeface="맑은 고딕"/>
-                <a:cs typeface="맑은 고딕"/>
-              </a:rPr>
-              <a:t>- 저가 센서 보정: https://arxiv.org/html/2604.21527v1</a:t>
-            </a:r>
-          </a:p>
-          <a:p>
-            <a:r>
-              <a:rPr>
-                <a:ea typeface="맑은 고딕"/>
-                <a:cs typeface="맑은 고딕"/>
-              </a:rPr>
-              <a:t>- 커프리스 혈압 벤치마크: https://arxiv.org/html/2602.04725v1</a:t>
-            </a:r>
-          </a:p>
-          <a:p>
-            <a:r>
-              <a:rPr>
-                <a:ea typeface="맑은 고딕"/>
-                <a:cs typeface="맑은 고딕"/>
-              </a:rPr>
-              <a:t>- PiGGO: https://arxiv.org/pdf/2604.26593</a:t>
-            </a:r>
-          </a:p>
-          <a:p>
-            <a:r>
-              <a:rPr>
-                <a:ea typeface="맑은 고딕"/>
-                <a:cs typeface="맑은 고딕"/>
-              </a:rPr>
-              <a:t>- 멀티태스크 가상센서: https://arxiv.org/abs/2601.20634</a:t>
+              <a:t>마지막 열은 본 저장소의 통제 실험 판정이며, 새 계열을 도입하기 전에 이 열을 먼저 읽는다.</a:t>
             </a:r>
           </a:p>
         </p:txBody>
@@ -6434,6 +6436,568 @@
 </file>
 
 <file path=ppt/notesSlides/notesSlide61.xml><?xml version="1.0" encoding="utf-8"?>
+<p:notes xmlns:a="http://schemas.openxmlformats.org/drawingml/2006/main" xmlns:p="http://schemas.openxmlformats.org/presentationml/2006/main" xmlns:r="http://schemas.openxmlformats.org/officeDocument/2006/relationships">
+  <p:cSld>
+    <p:spTree>
+      <p:nvGrpSpPr>
+        <p:cNvPr id="1" name=""/>
+        <p:cNvGrpSpPr/>
+        <p:nvPr/>
+      </p:nvGrpSpPr>
+      <p:grpSpPr>
+        <a:xfrm>
+          <a:off x="0" y="0"/>
+          <a:ext cx="0" cy="0"/>
+          <a:chOff x="0" y="0"/>
+          <a:chExt cx="0" cy="0"/>
+        </a:xfrm>
+      </p:grpSpPr>
+      <p:sp>
+        <p:nvSpPr>
+          <p:cNvPr id="2" name="Slide Image Placeholder 1"/>
+          <p:cNvSpPr>
+            <a:spLocks noGrp="1"/>
+          </p:cNvSpPr>
+          <p:nvPr>
+            <p:ph type="sldImg" idx="2"/>
+          </p:nvPr>
+        </p:nvSpPr>
+        <p:spPr/>
+      </p:sp>
+      <p:sp>
+        <p:nvSpPr>
+          <p:cNvPr id="3" name="Notes Placeholder 2"/>
+          <p:cNvSpPr>
+            <a:spLocks noGrp="1"/>
+          </p:cNvSpPr>
+          <p:nvPr>
+            <p:ph type="body" idx="3" sz="quarter"/>
+          </p:nvPr>
+        </p:nvSpPr>
+        <p:spPr/>
+        <p:txBody>
+          <a:bodyPr/>
+          <a:lstStyle/>
+          <a:p>
+            <a:r>
+              <a:rPr>
+                <a:ea typeface="맑은 고딕"/>
+                <a:cs typeface="맑은 고딕"/>
+              </a:rPr>
+              <a:t>혼합주기 나우캐스팅 · 저가 센서 보정 · 커프리스 혈압 · 구조 가상 센싱 · 합성 진단 증강의 다섯 계열에서 같은 결론이 반복된다.</a:t>
+            </a:r>
+          </a:p>
+        </p:txBody>
+      </p:sp>
+      <p:sp>
+        <p:nvSpPr>
+          <p:cNvPr id="4" name="Slide Number Placeholder 3"/>
+          <p:cNvSpPr>
+            <a:spLocks noGrp="1"/>
+          </p:cNvSpPr>
+          <p:nvPr>
+            <p:ph type="sldNum" idx="5" sz="quarter"/>
+          </p:nvPr>
+        </p:nvSpPr>
+        <p:spPr/>
+      </p:sp>
+    </p:spTree>
+  </p:cSld>
+  <p:clrMapOvr>
+    <a:masterClrMapping/>
+  </p:clrMapOvr>
+</p:notes>
+</file>
+
+<file path=ppt/notesSlides/notesSlide62.xml><?xml version="1.0" encoding="utf-8"?>
+<p:notes xmlns:a="http://schemas.openxmlformats.org/drawingml/2006/main" xmlns:p="http://schemas.openxmlformats.org/presentationml/2006/main" xmlns:r="http://schemas.openxmlformats.org/officeDocument/2006/relationships">
+  <p:cSld>
+    <p:spTree>
+      <p:nvGrpSpPr>
+        <p:cNvPr id="1" name=""/>
+        <p:cNvGrpSpPr/>
+        <p:nvPr/>
+      </p:nvGrpSpPr>
+      <p:grpSpPr>
+        <a:xfrm>
+          <a:off x="0" y="0"/>
+          <a:ext cx="0" cy="0"/>
+          <a:chOff x="0" y="0"/>
+          <a:chExt cx="0" cy="0"/>
+        </a:xfrm>
+      </p:grpSpPr>
+      <p:sp>
+        <p:nvSpPr>
+          <p:cNvPr id="2" name="Slide Image Placeholder 1"/>
+          <p:cNvSpPr>
+            <a:spLocks noGrp="1"/>
+          </p:cNvSpPr>
+          <p:nvPr>
+            <p:ph type="sldImg" idx="2"/>
+          </p:nvPr>
+        </p:nvSpPr>
+        <p:spPr/>
+      </p:sp>
+      <p:sp>
+        <p:nvSpPr>
+          <p:cNvPr id="3" name="Notes Placeholder 2"/>
+          <p:cNvSpPr>
+            <a:spLocks noGrp="1"/>
+          </p:cNvSpPr>
+          <p:nvPr>
+            <p:ph type="body" idx="3" sz="quarter"/>
+          </p:nvPr>
+        </p:nvSpPr>
+        <p:spPr/>
+        <p:txBody>
+          <a:bodyPr/>
+          <a:lstStyle/>
+          <a:p>
+            <a:r>
+              <a:rPr>
+                <a:ea typeface="맑은 고딕"/>
+                <a:cs typeface="맑은 고딕"/>
+              </a:rPr>
+              <a:t>우선순위는 비용 대비 정보량 순이다.</a:t>
+            </a:r>
+          </a:p>
+          <a:p>
+            <a:r>
+              <a:rPr>
+                <a:ea typeface="맑은 고딕"/>
+                <a:cs typeface="맑은 고딕"/>
+              </a:rPr>
+              <a:t>조사일 2026-09-05. 출처:</a:t>
+            </a:r>
+          </a:p>
+          <a:p>
+            <a:r>
+              <a:rPr>
+                <a:ea typeface="맑은 고딕"/>
+                <a:cs typeface="맑은 고딕"/>
+              </a:rPr>
+              <a:t>- Diag2Diag: https://arxiv.org/html/2405.05908v4</a:t>
+            </a:r>
+          </a:p>
+          <a:p>
+            <a:r>
+              <a:rPr>
+                <a:ea typeface="맑은 고딕"/>
+                <a:cs typeface="맑은 고딕"/>
+              </a:rPr>
+              <a:t>- Diag2Diag Nat. Comm.: https://www.nature.com/articles/s41467-025-63492-1</a:t>
+            </a:r>
+          </a:p>
+          <a:p>
+            <a:r>
+              <a:rPr>
+                <a:ea typeface="맑은 고딕"/>
+                <a:cs typeface="맑은 고딕"/>
+              </a:rPr>
+              <a:t>- COMPASS 시간 초해상: https://iopscience.iop.org/article/10.1088/1361-6587/ae72c6</a:t>
+            </a:r>
+          </a:p>
+          <a:p>
+            <a:r>
+              <a:rPr>
+                <a:ea typeface="맑은 고딕"/>
+                <a:cs typeface="맑은 고딕"/>
+              </a:rPr>
+              <a:t>- FusionMAE: https://arxiv.org/abs/2509.12945</a:t>
+            </a:r>
+          </a:p>
+          <a:p>
+            <a:r>
+              <a:rPr>
+                <a:ea typeface="맑은 고딕"/>
+                <a:cs typeface="맑은 고딕"/>
+              </a:rPr>
+              <a:t>- TokaMind: https://arxiv.org/html/2602.15084v2</a:t>
+            </a:r>
+          </a:p>
+          <a:p>
+            <a:r>
+              <a:rPr>
+                <a:ea typeface="맑은 고딕"/>
+                <a:cs typeface="맑은 고딕"/>
+              </a:rPr>
+              <a:t>- TokaMark: https://arxiv.org/html/2602.10132v2</a:t>
+            </a:r>
+          </a:p>
+          <a:p>
+            <a:r>
+              <a:rPr>
+                <a:ea typeface="맑은 고딕"/>
+                <a:cs typeface="맑은 고딕"/>
+              </a:rPr>
+              <a:t>- PanoMHD: https://arxiv.org/html/2603.02672</a:t>
+            </a:r>
+          </a:p>
+          <a:p>
+            <a:r>
+              <a:rPr>
+                <a:ea typeface="맑은 고딕"/>
+                <a:cs typeface="맑은 고딕"/>
+              </a:rPr>
+              <a:t>- TCV 멀티모달 VAE: https://arxiv.org/abs/2504.17710</a:t>
+            </a:r>
+          </a:p>
+          <a:p>
+            <a:r>
+              <a:rPr>
+                <a:ea typeface="맑은 고딕"/>
+                <a:cs typeface="맑은 고딕"/>
+              </a:rPr>
+              <a:t>- EAST 지식증류: https://arxiv.org/html/2607.04241</a:t>
+            </a:r>
+          </a:p>
+          <a:p>
+            <a:r>
+              <a:rPr>
+                <a:ea typeface="맑은 고딕"/>
+                <a:cs typeface="맑은 고딕"/>
+              </a:rPr>
+              <a:t>- WEST: https://arxiv.org/html/2602.19110</a:t>
+            </a:r>
+          </a:p>
+          <a:p>
+            <a:r>
+              <a:rPr>
+                <a:ea typeface="맑은 고딕"/>
+                <a:cs typeface="맑은 고딕"/>
+              </a:rPr>
+              <a:t>- EAST XCS ANN: https://iopscience.iop.org/article/10.1088/1741-4326/ad73e8</a:t>
+            </a:r>
+          </a:p>
+          <a:p>
+            <a:r>
+              <a:rPr>
+                <a:ea typeface="맑은 고딕"/>
+                <a:cs typeface="맑은 고딕"/>
+              </a:rPr>
+              <a:t>- Abbate 2025: https://iopscience.iop.org/article/10.1088/1741-4326/adc283</a:t>
+            </a:r>
+          </a:p>
+          <a:p>
+            <a:r>
+              <a:rPr>
+                <a:ea typeface="맑은 고딕"/>
+                <a:cs typeface="맑은 고딕"/>
+              </a:rPr>
+              <a:t>- 합성 진단 증강: https://arxiv.org/abs/2606.08462</a:t>
+            </a:r>
+          </a:p>
+          <a:p>
+            <a:r>
+              <a:rPr>
+                <a:ea typeface="맑은 고딕"/>
+                <a:cs typeface="맑은 고딕"/>
+              </a:rPr>
+              <a:t>- TokEye: https://arxiv.org/pdf/2602.20317</a:t>
+            </a:r>
+          </a:p>
+          <a:p>
+            <a:r>
+              <a:rPr>
+                <a:ea typeface="맑은 고딕"/>
+                <a:cs typeface="맑은 고딕"/>
+              </a:rPr>
+              <a:t>- KSTAR EPED 재구성: https://link.springer.com/article/10.1007/s40042-026-01580-1</a:t>
+            </a:r>
+          </a:p>
+          <a:p>
+            <a:r>
+              <a:rPr>
+                <a:ea typeface="맑은 고딕"/>
+                <a:cs typeface="맑은 고딕"/>
+              </a:rPr>
+              <a:t>- DIII-D 코일 shot-to-shot: https://www.ans.org/news/2026-08-18/article-8302/new-ml-framework-predicts-shifts-between-shots-at-diiid/</a:t>
+            </a:r>
+          </a:p>
+          <a:p>
+            <a:r>
+              <a:rPr>
+                <a:ea typeface="맑은 고딕"/>
+                <a:cs typeface="맑은 고딕"/>
+              </a:rPr>
+              <a:t>- NN-CES (KSTAR CES 신경망 분석): https://doi.org/10.1016/j.fusengdes.2025.115518</a:t>
+            </a:r>
+          </a:p>
+          <a:p>
+            <a:r>
+              <a:rPr>
+                <a:ea typeface="맑은 고딕"/>
+                <a:cs typeface="맑은 고딕"/>
+              </a:rPr>
+              <a:t>- SVMR+GPR KSTAR Ti 프로파일: https://doi.org/10.1088/1741-4326/ad7304</a:t>
+            </a:r>
+          </a:p>
+          <a:p>
+            <a:r>
+              <a:rPr>
+                <a:ea typeface="맑은 고딕"/>
+                <a:cs typeface="맑은 고딕"/>
+              </a:rPr>
+              <a:t>- 이상치 강건 Bayesian mtanh 적합: https://arxiv.org/html/2607.14142</a:t>
+            </a:r>
+          </a:p>
+          <a:p>
+            <a:r>
+              <a:rPr>
+                <a:ea typeface="맑은 고딕"/>
+                <a:cs typeface="맑은 고딕"/>
+              </a:rPr>
+              <a:t>- TSER 결측 Te 복원 (EAST): https://doi.org/10.1088/1741-4326/addb5f</a:t>
+            </a:r>
+          </a:p>
+          <a:p>
+            <a:r>
+              <a:rPr>
+                <a:ea typeface="맑은 고딕"/>
+                <a:cs typeface="맑은 고딕"/>
+              </a:rPr>
+              <a:t>- 전 상태 복원 (희소 센서): https://arxiv.org/abs/2607.04390</a:t>
+            </a:r>
+          </a:p>
+          <a:p>
+            <a:r>
+              <a:rPr>
+                <a:ea typeface="맑은 고딕"/>
+                <a:cs typeface="맑은 고딕"/>
+              </a:rPr>
+              <a:t>- 평형 재구성 챌린지: https://arxiv.org/html/2609.01750</a:t>
+            </a:r>
+          </a:p>
+          <a:p>
+            <a:r>
+              <a:rPr>
+                <a:ea typeface="맑은 고딕"/>
+                <a:cs typeface="맑은 고딕"/>
+              </a:rPr>
+              <a:t>- JET CXRS 신경망 (1993, 계보의 시작): https://www.microsoft.com/en-us/research/wp-content/uploads/2016/02/bishop-cxrs-ppcf-93.pdf</a:t>
+            </a:r>
+          </a:p>
+          <a:p>
+            <a:r>
+              <a:rPr>
+                <a:ea typeface="맑은 고딕"/>
+                <a:cs typeface="맑은 고딕"/>
+              </a:rPr>
+              <a:t>- ST40 교차 진단 grey-box: https://arxiv.org/abs/2407.18741</a:t>
+            </a:r>
+          </a:p>
+          <a:p>
+            <a:r>
+              <a:rPr>
+                <a:ea typeface="맑은 고딕"/>
+                <a:cs typeface="맑은 고딕"/>
+              </a:rPr>
+              <a:t>- W7-X Bayesian Ti 추론: https://doi.org/10.1088/1361-6587/ad3c1d</a:t>
+            </a:r>
+          </a:p>
+          <a:p>
+            <a:r>
+              <a:rPr>
+                <a:ea typeface="맑은 고딕"/>
+                <a:cs typeface="맑은 고딕"/>
+              </a:rPr>
+              <a:t>- TSI-Bench: https://arxiv.org/abs/2406.12747</a:t>
+            </a:r>
+          </a:p>
+          <a:p>
+            <a:r>
+              <a:rPr>
+                <a:ea typeface="맑은 고딕"/>
+                <a:cs typeface="맑은 고딕"/>
+              </a:rPr>
+              <a:t>- STDiff: https://arxiv.org/html/2508.19011v1</a:t>
+            </a:r>
+          </a:p>
+          <a:p>
+            <a:r>
+              <a:rPr>
+                <a:ea typeface="맑은 고딕"/>
+                <a:cs typeface="맑은 고딕"/>
+              </a:rPr>
+              <a:t>- iTimER: https://arxiv.org/html/2511.06854</a:t>
+            </a:r>
+          </a:p>
+          <a:p>
+            <a:r>
+              <a:rPr>
+                <a:ea typeface="맑은 고딕"/>
+                <a:cs typeface="맑은 고딕"/>
+              </a:rPr>
+              <a:t>- Neural CDE 보정기: https://arxiv.org/html/2512.12116v3</a:t>
+            </a:r>
+          </a:p>
+          <a:p>
+            <a:r>
+              <a:rPr>
+                <a:ea typeface="맑은 고딕"/>
+                <a:cs typeface="맑은 고딕"/>
+              </a:rPr>
+              <a:t>- TimeXer: https://github.com/thuml/TimeXer</a:t>
+            </a:r>
+          </a:p>
+          <a:p>
+            <a:r>
+              <a:rPr>
+                <a:ea typeface="맑은 고딕"/>
+                <a:cs typeface="맑은 고딕"/>
+              </a:rPr>
+              <a:t>- TiRex-2: https://arxiv.org/html/2607.01204v1</a:t>
+            </a:r>
+          </a:p>
+          <a:p>
+            <a:r>
+              <a:rPr>
+                <a:ea typeface="맑은 고딕"/>
+                <a:cs typeface="맑은 고딕"/>
+              </a:rPr>
+              <a:t>- TabPFN-TS: https://arxiv.org/abs/2501.02945</a:t>
+            </a:r>
+          </a:p>
+          <a:p>
+            <a:r>
+              <a:rPr>
+                <a:ea typeface="맑은 고딕"/>
+                <a:cs typeface="맑은 고딕"/>
+              </a:rPr>
+              <a:t>- TSFM 벤치마크 경고: https://arxiv.org/html/2510.13654v1</a:t>
+            </a:r>
+          </a:p>
+          <a:p>
+            <a:r>
+              <a:rPr>
+                <a:ea typeface="맑은 고딕"/>
+                <a:cs typeface="맑은 고딕"/>
+              </a:rPr>
+              <a:t>- TimeMAE: https://arxiv.org/html/2303.00320v4</a:t>
+            </a:r>
+          </a:p>
+          <a:p>
+            <a:r>
+              <a:rPr>
+                <a:ea typeface="맑은 고딕"/>
+                <a:cs typeface="맑은 고딕"/>
+              </a:rPr>
+              <a:t>- RG-ResMoE: https://arxiv.org/html/2608.12251v1</a:t>
+            </a:r>
+          </a:p>
+          <a:p>
+            <a:r>
+              <a:rPr>
+                <a:ea typeface="맑은 고딕"/>
+                <a:cs typeface="맑은 고딕"/>
+              </a:rPr>
+              <a:t>- KalmanNet: https://dl.acm.org/doi/abs/10.1109/tsp.2022.3158588</a:t>
+            </a:r>
+          </a:p>
+          <a:p>
+            <a:r>
+              <a:rPr>
+                <a:ea typeface="맑은 고딕"/>
+                <a:cs typeface="맑은 고딕"/>
+              </a:rPr>
+              <a:t>- Unscented KalmanNet: https://arxiv.org/html/2608.04201</a:t>
+            </a:r>
+          </a:p>
+          <a:p>
+            <a:r>
+              <a:rPr>
+                <a:ea typeface="맑은 고딕"/>
+                <a:cs typeface="맑은 고딕"/>
+              </a:rPr>
+              <a:t>- DLFM: https://link.springer.com/article/10.1007/s10994-025-06824-y</a:t>
+            </a:r>
+          </a:p>
+          <a:p>
+            <a:r>
+              <a:rPr>
+                <a:ea typeface="맑은 고딕"/>
+                <a:cs typeface="맑은 고딕"/>
+              </a:rPr>
+              <a:t>- 이분산 회귀 병리: https://arxiv.org/pdf/2306.16717</a:t>
+            </a:r>
+          </a:p>
+          <a:p>
+            <a:r>
+              <a:rPr>
+                <a:ea typeface="맑은 고딕"/>
+                <a:cs typeface="맑은 고딕"/>
+              </a:rPr>
+              <a:t>- 반지도 VAE 회귀: https://arxiv.org/pdf/2211.05979</a:t>
+            </a:r>
+          </a:p>
+          <a:p>
+            <a:r>
+              <a:rPr>
+                <a:ea typeface="맑은 고딕"/>
+                <a:cs typeface="맑은 고딕"/>
+              </a:rPr>
+              <a:t>- GP-MIDAS: https://arxiv.org/html/2402.10574v2</a:t>
+            </a:r>
+          </a:p>
+          <a:p>
+            <a:r>
+              <a:rPr>
+                <a:ea typeface="맑은 고딕"/>
+                <a:cs typeface="맑은 고딕"/>
+              </a:rPr>
+              <a:t>- 저가 센서 보정: https://arxiv.org/html/2604.21527v1</a:t>
+            </a:r>
+          </a:p>
+          <a:p>
+            <a:r>
+              <a:rPr>
+                <a:ea typeface="맑은 고딕"/>
+                <a:cs typeface="맑은 고딕"/>
+              </a:rPr>
+              <a:t>- 커프리스 혈압 벤치마크: https://arxiv.org/html/2602.04725v1</a:t>
+            </a:r>
+          </a:p>
+          <a:p>
+            <a:r>
+              <a:rPr>
+                <a:ea typeface="맑은 고딕"/>
+                <a:cs typeface="맑은 고딕"/>
+              </a:rPr>
+              <a:t>- PiGGO: https://arxiv.org/pdf/2604.26593</a:t>
+            </a:r>
+          </a:p>
+          <a:p>
+            <a:r>
+              <a:rPr>
+                <a:ea typeface="맑은 고딕"/>
+                <a:cs typeface="맑은 고딕"/>
+              </a:rPr>
+              <a:t>- 멀티태스크 가상센서: https://arxiv.org/abs/2601.20634</a:t>
+            </a:r>
+          </a:p>
+        </p:txBody>
+      </p:sp>
+      <p:sp>
+        <p:nvSpPr>
+          <p:cNvPr id="4" name="Slide Number Placeholder 3"/>
+          <p:cNvSpPr>
+            <a:spLocks noGrp="1"/>
+          </p:cNvSpPr>
+          <p:nvPr>
+            <p:ph type="sldNum" idx="5" sz="quarter"/>
+          </p:nvPr>
+        </p:nvSpPr>
+        <p:spPr/>
+      </p:sp>
+    </p:spTree>
+  </p:cSld>
+  <p:clrMapOvr>
+    <a:masterClrMapping/>
+  </p:clrMapOvr>
+</p:notes>
+</file>
+
+<file path=ppt/notesSlides/notesSlide63.xml><?xml version="1.0" encoding="utf-8"?>
 <p:notes xmlns:a="http://schemas.openxmlformats.org/drawingml/2006/main" xmlns:p="http://schemas.openxmlformats.org/presentationml/2006/main" xmlns:r="http://schemas.openxmlformats.org/officeDocument/2006/relationships">
   <p:cSld>
     <p:spTree>
@@ -22896,11 +23460,11 @@
           <a:lstStyle/>
           <a:p>
             <a:r>
-              <a:rPr b="0" sz="2650">
-                <a:ea typeface="맑은 고딕"/>
-                <a:cs typeface="맑은 고딕"/>
-              </a:rPr>
-              <a:t>시도한 모델의 계보와 닫은 이유 (3/3): 계열 · 문맥 · 기준선 · 확장 가지</a:t>
+              <a:rPr b="0" sz="2550">
+                <a:ea typeface="맑은 고딕"/>
+                <a:cs typeface="맑은 고딕"/>
+              </a:rPr>
+              <a:t>시도한 모델의 계보와 닫은 이유 (3/3, 1쪽): 계열 · 문맥 · 기준선 · 확장 가지</a:t>
             </a:r>
           </a:p>
         </p:txBody>
@@ -22915,7 +23479,7 @@
         </p:nvGraphicFramePr>
         <p:xfrm>
           <a:off x="585216" y="2029967"/>
-          <a:ext cx="11027662" cy="3232912"/>
+          <a:ext cx="11027662" cy="2627376"/>
         </p:xfrm>
         <a:graphic>
           <a:graphicData uri="http://schemas.openxmlformats.org/drawingml/2006/table">
@@ -22937,7 +23501,7 @@
                     <a:lstStyle/>
                     <a:p>
                       <a:r>
-                        <a:rPr sz="1000" b="1">
+                        <a:rPr sz="1100" b="1">
                           <a:ea typeface="맑은 고딕"/>
                           <a:cs typeface="맑은 고딕"/>
                         </a:rPr>
@@ -22953,7 +23517,7 @@
                     <a:lstStyle/>
                     <a:p>
                       <a:r>
-                        <a:rPr sz="1000" b="1">
+                        <a:rPr sz="1100" b="1">
                           <a:ea typeface="맑은 고딕"/>
                           <a:cs typeface="맑은 고딕"/>
                         </a:rPr>
@@ -22969,7 +23533,7 @@
                     <a:lstStyle/>
                     <a:p>
                       <a:r>
-                        <a:rPr sz="1000" b="1">
+                        <a:rPr sz="1100" b="1">
                           <a:ea typeface="맑은 고딕"/>
                           <a:cs typeface="맑은 고딕"/>
                         </a:rPr>
@@ -22985,7 +23549,7 @@
                     <a:lstStyle/>
                     <a:p>
                       <a:r>
-                        <a:rPr sz="1000" b="1">
+                        <a:rPr sz="1100" b="1">
                           <a:ea typeface="맑은 고딕"/>
                           <a:cs typeface="맑은 고딕"/>
                         </a:rPr>
@@ -23001,7 +23565,7 @@
                     <a:lstStyle/>
                     <a:p>
                       <a:r>
-                        <a:rPr sz="1000" b="1">
+                        <a:rPr sz="1100" b="1">
                           <a:ea typeface="맑은 고딕"/>
                           <a:cs typeface="맑은 고딕"/>
                         </a:rPr>
@@ -23012,14 +23576,14 @@
                   <a:tcPr marL="54864" marR="54864" marT="18288" marB="18288" anchor="ctr"/>
                 </a:tc>
               </a:tr>
-              <a:tr h="369824">
-                <a:tc>
-                  <a:txBody>
-                    <a:bodyPr wrap="square"/>
-                    <a:lstStyle/>
-                    <a:p>
-                      <a:r>
-                        <a:rPr sz="1000" b="0">
+              <a:tr h="401320">
+                <a:tc>
+                  <a:txBody>
+                    <a:bodyPr wrap="square"/>
+                    <a:lstStyle/>
+                    <a:p>
+                      <a:r>
+                        <a:rPr sz="1100" b="0">
                           <a:ea typeface="맑은 고딕"/>
                           <a:cs typeface="맑은 고딕"/>
                         </a:rPr>
@@ -23035,7 +23599,7 @@
                     <a:lstStyle/>
                     <a:p>
                       <a:r>
-                        <a:rPr sz="1000" b="0">
+                        <a:rPr sz="1100" b="0">
                           <a:ea typeface="맑은 고딕"/>
                           <a:cs typeface="맑은 고딕"/>
                         </a:rPr>
@@ -23051,7 +23615,7 @@
                     <a:lstStyle/>
                     <a:p>
                       <a:r>
-                        <a:rPr sz="1000" b="0">
+                        <a:rPr sz="1100" b="0">
                           <a:ea typeface="맑은 고딕"/>
                           <a:cs typeface="맑은 고딕"/>
                         </a:rPr>
@@ -23067,7 +23631,7 @@
                     <a:lstStyle/>
                     <a:p>
                       <a:r>
-                        <a:rPr sz="1000" b="0">
+                        <a:rPr sz="1100" b="0">
                           <a:ea typeface="맑은 고딕"/>
                           <a:cs typeface="맑은 고딕"/>
                         </a:rPr>
@@ -23083,7 +23647,7 @@
                     <a:lstStyle/>
                     <a:p>
                       <a:r>
-                        <a:rPr sz="1000" b="0">
+                        <a:rPr sz="1100" b="0">
                           <a:ea typeface="맑은 고딕"/>
                           <a:cs typeface="맑은 고딕"/>
                         </a:rPr>
@@ -23094,14 +23658,14 @@
                   <a:tcPr marL="54864" marR="54864" marT="18288" marB="18288" anchor="ctr"/>
                 </a:tc>
               </a:tr>
-              <a:tr h="369824">
-                <a:tc>
-                  <a:txBody>
-                    <a:bodyPr wrap="square"/>
-                    <a:lstStyle/>
-                    <a:p>
-                      <a:r>
-                        <a:rPr sz="1000" b="0">
+              <a:tr h="574548">
+                <a:tc>
+                  <a:txBody>
+                    <a:bodyPr wrap="square"/>
+                    <a:lstStyle/>
+                    <a:p>
+                      <a:r>
+                        <a:rPr sz="1100" b="0">
                           <a:ea typeface="맑은 고딕"/>
                           <a:cs typeface="맑은 고딕"/>
                         </a:rPr>
@@ -23117,7 +23681,7 @@
                     <a:lstStyle/>
                     <a:p>
                       <a:r>
-                        <a:rPr sz="1000" b="0">
+                        <a:rPr sz="1100" b="0">
                           <a:ea typeface="맑은 고딕"/>
                           <a:cs typeface="맑은 고딕"/>
                         </a:rPr>
@@ -23133,7 +23697,7 @@
                     <a:lstStyle/>
                     <a:p>
                       <a:r>
-                        <a:rPr sz="1000" b="0">
+                        <a:rPr sz="1100" b="0">
                           <a:ea typeface="맑은 고딕"/>
                           <a:cs typeface="맑은 고딕"/>
                         </a:rPr>
@@ -23149,7 +23713,7 @@
                     <a:lstStyle/>
                     <a:p>
                       <a:r>
-                        <a:rPr sz="1000" b="0">
+                        <a:rPr sz="1100" b="0">
                           <a:ea typeface="맑은 고딕"/>
                           <a:cs typeface="맑은 고딕"/>
                         </a:rPr>
@@ -23165,7 +23729,7 @@
                     <a:lstStyle/>
                     <a:p>
                       <a:r>
-                        <a:rPr sz="1000" b="0">
+                        <a:rPr sz="1100" b="0">
                           <a:ea typeface="맑은 고딕"/>
                           <a:cs typeface="맑은 고딕"/>
                         </a:rPr>
@@ -23176,14 +23740,14 @@
                   <a:tcPr marL="54864" marR="54864" marT="18288" marB="18288" anchor="ctr"/>
                 </a:tc>
               </a:tr>
-              <a:tr h="369824">
-                <a:tc>
-                  <a:txBody>
-                    <a:bodyPr wrap="square"/>
-                    <a:lstStyle/>
-                    <a:p>
-                      <a:r>
-                        <a:rPr sz="1000" b="0">
+              <a:tr h="574548">
+                <a:tc>
+                  <a:txBody>
+                    <a:bodyPr wrap="square"/>
+                    <a:lstStyle/>
+                    <a:p>
+                      <a:r>
+                        <a:rPr sz="1100" b="0">
                           <a:ea typeface="맑은 고딕"/>
                           <a:cs typeface="맑은 고딕"/>
                         </a:rPr>
@@ -23199,7 +23763,7 @@
                     <a:lstStyle/>
                     <a:p>
                       <a:r>
-                        <a:rPr sz="1000" b="0">
+                        <a:rPr sz="1100" b="0">
                           <a:ea typeface="맑은 고딕"/>
                           <a:cs typeface="맑은 고딕"/>
                         </a:rPr>
@@ -23215,7 +23779,7 @@
                     <a:lstStyle/>
                     <a:p>
                       <a:r>
-                        <a:rPr sz="1000" b="0">
+                        <a:rPr sz="1100" b="0">
                           <a:ea typeface="맑은 고딕"/>
                           <a:cs typeface="맑은 고딕"/>
                         </a:rPr>
@@ -23231,7 +23795,7 @@
                     <a:lstStyle/>
                     <a:p>
                       <a:r>
-                        <a:rPr sz="1000" b="0">
+                        <a:rPr sz="1100" b="0">
                           <a:ea typeface="맑은 고딕"/>
                           <a:cs typeface="맑은 고딕"/>
                         </a:rPr>
@@ -23247,7 +23811,7 @@
                     <a:lstStyle/>
                     <a:p>
                       <a:r>
-                        <a:rPr sz="1000" b="0">
+                        <a:rPr sz="1100" b="0">
                           <a:ea typeface="맑은 고딕"/>
                           <a:cs typeface="맑은 고딕"/>
                         </a:rPr>
@@ -23258,14 +23822,14 @@
                   <a:tcPr marL="54864" marR="54864" marT="18288" marB="18288" anchor="ctr"/>
                 </a:tc>
               </a:tr>
-              <a:tr h="369824">
-                <a:tc>
-                  <a:txBody>
-                    <a:bodyPr wrap="square"/>
-                    <a:lstStyle/>
-                    <a:p>
-                      <a:r>
-                        <a:rPr sz="1000" b="0">
+              <a:tr h="401320">
+                <a:tc>
+                  <a:txBody>
+                    <a:bodyPr wrap="square"/>
+                    <a:lstStyle/>
+                    <a:p>
+                      <a:r>
+                        <a:rPr sz="1100" b="0">
                           <a:ea typeface="맑은 고딕"/>
                           <a:cs typeface="맑은 고딕"/>
                         </a:rPr>
@@ -23281,7 +23845,7 @@
                     <a:lstStyle/>
                     <a:p>
                       <a:r>
-                        <a:rPr sz="1000" b="0">
+                        <a:rPr sz="1100" b="0">
                           <a:ea typeface="맑은 고딕"/>
                           <a:cs typeface="맑은 고딕"/>
                         </a:rPr>
@@ -23297,7 +23861,7 @@
                     <a:lstStyle/>
                     <a:p>
                       <a:r>
-                        <a:rPr sz="1000" b="0">
+                        <a:rPr sz="1100" b="0">
                           <a:ea typeface="맑은 고딕"/>
                           <a:cs typeface="맑은 고딕"/>
                         </a:rPr>
@@ -23313,7 +23877,7 @@
                     <a:lstStyle/>
                     <a:p>
                       <a:r>
-                        <a:rPr sz="1000" b="0">
+                        <a:rPr sz="1100" b="0">
                           <a:ea typeface="맑은 고딕"/>
                           <a:cs typeface="맑은 고딕"/>
                         </a:rPr>
@@ -23329,7 +23893,7 @@
                     <a:lstStyle/>
                     <a:p>
                       <a:r>
-                        <a:rPr sz="1000" b="0">
+                        <a:rPr sz="1100" b="0">
                           <a:ea typeface="맑은 고딕"/>
                           <a:cs typeface="맑은 고딕"/>
                         </a:rPr>
@@ -23340,14 +23904,14 @@
                   <a:tcPr marL="54864" marR="54864" marT="18288" marB="18288" anchor="ctr"/>
                 </a:tc>
               </a:tr>
-              <a:tr h="369824">
-                <a:tc>
-                  <a:txBody>
-                    <a:bodyPr wrap="square"/>
-                    <a:lstStyle/>
-                    <a:p>
-                      <a:r>
-                        <a:rPr sz="1000" b="0">
+              <a:tr h="401320">
+                <a:tc>
+                  <a:txBody>
+                    <a:bodyPr wrap="square"/>
+                    <a:lstStyle/>
+                    <a:p>
+                      <a:r>
+                        <a:rPr sz="1100" b="0">
                           <a:ea typeface="맑은 고딕"/>
                           <a:cs typeface="맑은 고딕"/>
                         </a:rPr>
@@ -23363,7 +23927,7 @@
                     <a:lstStyle/>
                     <a:p>
                       <a:r>
-                        <a:rPr sz="1000" b="0">
+                        <a:rPr sz="1100" b="0">
                           <a:ea typeface="맑은 고딕"/>
                           <a:cs typeface="맑은 고딕"/>
                         </a:rPr>
@@ -23379,7 +23943,7 @@
                     <a:lstStyle/>
                     <a:p>
                       <a:r>
-                        <a:rPr sz="1000" b="0">
+                        <a:rPr sz="1100" b="0">
                           <a:ea typeface="맑은 고딕"/>
                           <a:cs typeface="맑은 고딕"/>
                         </a:rPr>
@@ -23395,7 +23959,7 @@
                     <a:lstStyle/>
                     <a:p>
                       <a:r>
-                        <a:rPr sz="1000" b="0">
+                        <a:rPr sz="1100" b="0">
                           <a:ea typeface="맑은 고딕"/>
                           <a:cs typeface="맑은 고딕"/>
                         </a:rPr>
@@ -23411,257 +23975,11 @@
                     <a:lstStyle/>
                     <a:p>
                       <a:r>
-                        <a:rPr sz="1000" b="0">
+                        <a:rPr sz="1100" b="0">
                           <a:ea typeface="맑은 고딕"/>
                           <a:cs typeface="맑은 고딕"/>
                         </a:rPr>
                         <a:t>오프라인 주장의 상한 = GP 동률 (§8p · §8y)</a:t>
-                      </a:r>
-                    </a:p>
-                  </a:txBody>
-                  <a:tcPr marL="54864" marR="54864" marT="18288" marB="18288" anchor="ctr"/>
-                </a:tc>
-              </a:tr>
-              <a:tr h="369824">
-                <a:tc>
-                  <a:txBody>
-                    <a:bodyPr wrap="square"/>
-                    <a:lstStyle/>
-                    <a:p>
-                      <a:r>
-                        <a:rPr sz="1000" b="0">
-                          <a:ea typeface="맑은 고딕"/>
-                          <a:cs typeface="맑은 고딕"/>
-                        </a:rPr>
-                        <a:t>학습 분산 헤드 vs split conformal (Mondrian)</a:t>
-                      </a:r>
-                    </a:p>
-                  </a:txBody>
-                  <a:tcPr marL="54864" marR="54864" marT="18288" marB="18288" anchor="ctr"/>
-                </a:tc>
-                <a:tc>
-                  <a:txBody>
-                    <a:bodyPr wrap="square"/>
-                    <a:lstStyle/>
-                    <a:p>
-                      <a:r>
-                        <a:rPr sz="1000" b="0">
-                          <a:ea typeface="맑은 고딕"/>
-                          <a:cs typeface="맑은 고딕"/>
-                        </a:rPr>
-                        <a:t>2026-08-05</a:t>
-                      </a:r>
-                    </a:p>
-                  </a:txBody>
-                  <a:tcPr marL="54864" marR="54864" marT="18288" marB="18288" anchor="ctr"/>
-                </a:tc>
-                <a:tc>
-                  <a:txBody>
-                    <a:bodyPr wrap="square"/>
-                    <a:lstStyle/>
-                    <a:p>
-                      <a:r>
-                        <a:rPr sz="1000" b="0">
-                          <a:ea typeface="맑은 고딕"/>
-                          <a:cs typeface="맑은 고딕"/>
-                        </a:rPr>
-                        <a:t>불확실성 방식</a:t>
-                      </a:r>
-                    </a:p>
-                  </a:txBody>
-                  <a:tcPr marL="54864" marR="54864" marT="18288" marB="18288" anchor="ctr"/>
-                </a:tc>
-                <a:tc>
-                  <a:txBody>
-                    <a:bodyPr wrap="square"/>
-                    <a:lstStyle/>
-                    <a:p>
-                      <a:r>
-                        <a:rPr sz="1000" b="0">
-                          <a:ea typeface="맑은 고딕"/>
-                          <a:cs typeface="맑은 고딕"/>
-                        </a:rPr>
-                        <a:t>conformal이 Winkler 32/32 최선</a:t>
-                      </a:r>
-                    </a:p>
-                  </a:txBody>
-                  <a:tcPr marL="54864" marR="54864" marT="18288" marB="18288" anchor="ctr"/>
-                </a:tc>
-                <a:tc>
-                  <a:txBody>
-                    <a:bodyPr wrap="square"/>
-                    <a:lstStyle/>
-                    <a:p>
-                      <a:r>
-                        <a:rPr sz="1000" b="0">
-                          <a:ea typeface="맑은 고딕"/>
-                          <a:cs typeface="맑은 고딕"/>
-                        </a:rPr>
-                        <a:t>재학습이 헤드라인을 교란하므로 사후 보정 채택 (§8m)</a:t>
-                      </a:r>
-                    </a:p>
-                  </a:txBody>
-                  <a:tcPr marL="54864" marR="54864" marT="18288" marB="18288" anchor="ctr"/>
-                </a:tc>
-              </a:tr>
-              <a:tr h="369824">
-                <a:tc>
-                  <a:txBody>
-                    <a:bodyPr wrap="square"/>
-                    <a:lstStyle/>
-                    <a:p>
-                      <a:r>
-                        <a:rPr sz="1000" b="0">
-                          <a:ea typeface="맑은 고딕"/>
-                          <a:cs typeface="맑은 고딕"/>
-                        </a:rPr>
-                        <a:t>양자 VQC · 고정 특징맵 · 저장소 · 커널 (IonQ Forte)</a:t>
-                      </a:r>
-                    </a:p>
-                  </a:txBody>
-                  <a:tcPr marL="54864" marR="54864" marT="18288" marB="18288" anchor="ctr"/>
-                </a:tc>
-                <a:tc>
-                  <a:txBody>
-                    <a:bodyPr wrap="square"/>
-                    <a:lstStyle/>
-                    <a:p>
-                      <a:r>
-                        <a:rPr sz="1000" b="0">
-                          <a:ea typeface="맑은 고딕"/>
-                          <a:cs typeface="맑은 고딕"/>
-                        </a:rPr>
-                        <a:t>2026-07-26 → 08-24</a:t>
-                      </a:r>
-                    </a:p>
-                  </a:txBody>
-                  <a:tcPr marL="54864" marR="54864" marT="18288" marB="18288" anchor="ctr"/>
-                </a:tc>
-                <a:tc>
-                  <a:txBody>
-                    <a:bodyPr wrap="square"/>
-                    <a:lstStyle/>
-                    <a:p>
-                      <a:r>
-                        <a:rPr sz="1000" b="0">
-                          <a:ea typeface="맑은 고딕"/>
-                          <a:cs typeface="맑은 고딕"/>
-                        </a:rPr>
-                        <a:t>추정기 계열</a:t>
-                      </a:r>
-                    </a:p>
-                  </a:txBody>
-                  <a:tcPr marL="54864" marR="54864" marT="18288" marB="18288" anchor="ctr"/>
-                </a:tc>
-                <a:tc>
-                  <a:txBody>
-                    <a:bodyPr wrap="square"/>
-                    <a:lstStyle/>
-                    <a:p>
-                      <a:r>
-                        <a:rPr sz="1000" b="0">
-                          <a:ea typeface="맑은 고딕"/>
-                          <a:cs typeface="맑은 고딕"/>
-                        </a:rPr>
-                        <a:t>무잡음에서도 persistence에 짐(471.5 vs 449.6 eV). 22.9 s/예측, λ = 0.661</a:t>
-                      </a:r>
-                    </a:p>
-                  </a:txBody>
-                  <a:tcPr marL="54864" marR="54864" marT="18288" marB="18288" anchor="ctr"/>
-                </a:tc>
-                <a:tc>
-                  <a:txBody>
-                    <a:bodyPr wrap="square"/>
-                    <a:lstStyle/>
-                    <a:p>
-                      <a:r>
-                        <a:rPr sz="1000" b="0">
-                          <a:ea typeface="맑은 고딕"/>
-                          <a:cs typeface="맑은 고딕"/>
-                        </a:rPr>
-                        <a:t>하드웨어 검증 후 음성 종결 (§8ap)</a:t>
-                      </a:r>
-                    </a:p>
-                  </a:txBody>
-                  <a:tcPr marL="54864" marR="54864" marT="18288" marB="18288" anchor="ctr"/>
-                </a:tc>
-              </a:tr>
-              <a:tr h="369824">
-                <a:tc>
-                  <a:txBody>
-                    <a:bodyPr wrap="square"/>
-                    <a:lstStyle/>
-                    <a:p>
-                      <a:r>
-                        <a:rPr sz="1000" b="0">
-                          <a:ea typeface="맑은 고딕"/>
-                          <a:cs typeface="맑은 고딕"/>
-                        </a:rPr>
-                        <a:t>B.11 VQ 코드북 게이팅 (b3vqC, C = 4 · 8 · 16)</a:t>
-                      </a:r>
-                    </a:p>
-                  </a:txBody>
-                  <a:tcPr marL="54864" marR="54864" marT="18288" marB="18288" anchor="ctr"/>
-                </a:tc>
-                <a:tc>
-                  <a:txBody>
-                    <a:bodyPr wrap="square"/>
-                    <a:lstStyle/>
-                    <a:p>
-                      <a:r>
-                        <a:rPr sz="1000" b="0">
-                          <a:ea typeface="맑은 고딕"/>
-                          <a:cs typeface="맑은 고딕"/>
-                        </a:rPr>
-                        <a:t>2026-09-03</a:t>
-                      </a:r>
-                    </a:p>
-                  </a:txBody>
-                  <a:tcPr marL="54864" marR="54864" marT="18288" marB="18288" anchor="ctr"/>
-                </a:tc>
-                <a:tc>
-                  <a:txBody>
-                    <a:bodyPr wrap="square"/>
-                    <a:lstStyle/>
-                    <a:p>
-                      <a:r>
-                        <a:rPr sz="1000" b="0">
-                          <a:ea typeface="맑은 고딕"/>
-                          <a:cs typeface="맑은 고딕"/>
-                        </a:rPr>
-                        <a:t>읽기 가중치를 이산 코드로 선택</a:t>
-                      </a:r>
-                    </a:p>
-                  </a:txBody>
-                  <a:tcPr marL="54864" marR="54864" marT="18288" marB="18288" anchor="ctr"/>
-                </a:tc>
-                <a:tc>
-                  <a:txBody>
-                    <a:bodyPr wrap="square"/>
-                    <a:lstStyle/>
-                    <a:p>
-                      <a:r>
-                        <a:rPr sz="1000" b="0">
-                          <a:ea typeface="맑은 고딕"/>
-                          <a:cs typeface="맑은 고딕"/>
-                        </a:rPr>
-                        <a:t>사전등록 완료, val 선별 진행 중. 조용 3분위 Tᵢ 승률 42 %가 출발점</a:t>
-                      </a:r>
-                    </a:p>
-                  </a:txBody>
-                  <a:tcPr marL="54864" marR="54864" marT="18288" marB="18288" anchor="ctr"/>
-                </a:tc>
-                <a:tc>
-                  <a:txBody>
-                    <a:bodyPr wrap="square"/>
-                    <a:lstStyle/>
-                    <a:p>
-                      <a:r>
-                        <a:rPr sz="1000" b="0">
-                          <a:ea typeface="맑은 고딕"/>
-                          <a:cs typeface="맑은 고딕"/>
-                        </a:rPr>
-                        <a:t>미판정 (PREREGISTRATION_B11.md)</a:t>
                       </a:r>
                     </a:p>
                   </a:txBody>
@@ -23672,43 +23990,6 @@
           </a:graphicData>
         </a:graphic>
       </p:graphicFrame>
-      <p:sp>
-        <p:nvSpPr>
-          <p:cNvPr id="4" name="TextBox 3"/>
-          <p:cNvSpPr txBox="1"/>
-          <p:nvPr/>
-        </p:nvSpPr>
-        <p:spPr>
-          <a:xfrm>
-            <a:off x="585216" y="5354319"/>
-            <a:ext cx="11027664" cy="486664"/>
-          </a:xfrm>
-          <a:prstGeom prst="rect">
-            <a:avLst/>
-          </a:prstGeom>
-          <a:noFill/>
-        </p:spPr>
-        <p:txBody>
-          <a:bodyPr wrap="square">
-            <a:spAutoFit/>
-          </a:bodyPr>
-          <a:lstStyle/>
-          <a:p>
-            <a:pPr>
-              <a:spcAft>
-                <a:spcPts val="300"/>
-              </a:spcAft>
-            </a:pPr>
-            <a:r>
-              <a:rPr sz="1250">
-                <a:ea typeface="맑은 고딕"/>
-                <a:cs typeface="맑은 고딕"/>
-              </a:rPr>
-              <a:t>데이터 처리(held 제거)와 프레이밍(전체 격자 마스킹 손실)이 skill을 움직였고, 아키텍처 미세 변형 · 크기 · 문맥 · 계열은 움직이지 않았다. 이 문장은 총합 MSE에 한정된다(§8aq).</a:t>
-            </a:r>
-          </a:p>
-        </p:txBody>
-      </p:sp>
     </p:spTree>
   </p:cSld>
   <p:clrMapOvr>
@@ -23748,25 +24029,464 @@
           <a:lstStyle/>
           <a:p>
             <a:r>
-              <a:rPr b="0" sz="2250">
-                <a:ea typeface="맑은 고딕"/>
-                <a:cs typeface="맑은 고딕"/>
-              </a:rPr>
-              <a:t>문헌 조사 (1/4, 1쪽): 핵융합의 진단-대-진단 추정은 여전히 단순한 구조가 주류이다</a:t>
+              <a:rPr b="0" sz="2550">
+                <a:ea typeface="맑은 고딕"/>
+                <a:cs typeface="맑은 고딕"/>
+              </a:rPr>
+              <a:t>시도한 모델의 계보와 닫은 이유 (3/3, 2쪽): 계열 · 문맥 · 기준선 · 확장 가지</a:t>
             </a:r>
           </a:p>
         </p:txBody>
       </p:sp>
-      <p:sp>
-        <p:nvSpPr>
-          <p:cNvPr id="3" name="TextBox 2"/>
+      <p:graphicFrame>
+        <p:nvGraphicFramePr>
+          <p:cNvPr id="3" name="Table 2"/>
+          <p:cNvGraphicFramePr>
+            <a:graphicFrameLocks noGrp="1"/>
+          </p:cNvGraphicFramePr>
+          <p:nvPr/>
+        </p:nvGraphicFramePr>
+        <p:xfrm>
+          <a:off x="585216" y="2029967"/>
+          <a:ext cx="11027662" cy="2226056"/>
+        </p:xfrm>
+        <a:graphic>
+          <a:graphicData uri="http://schemas.openxmlformats.org/drawingml/2006/table">
+            <a:tbl>
+              <a:tblPr firstRow="1" bandRow="1">
+                <a:tableStyleId>{5C22544A-7EE6-4342-B048-85BDC9FD1C3A}</a:tableStyleId>
+              </a:tblPr>
+              <a:tblGrid>
+                <a:gridCol w="2460718"/>
+                <a:gridCol w="1002514"/>
+                <a:gridCol w="2825269"/>
+                <a:gridCol w="2551856"/>
+                <a:gridCol w="2187305"/>
+              </a:tblGrid>
+              <a:tr h="274320">
+                <a:tc>
+                  <a:txBody>
+                    <a:bodyPr wrap="square"/>
+                    <a:lstStyle/>
+                    <a:p>
+                      <a:r>
+                        <a:rPr sz="1100" b="1">
+                          <a:ea typeface="맑은 고딕"/>
+                          <a:cs typeface="맑은 고딕"/>
+                        </a:rPr>
+                        <a:t>모델 · 시도</a:t>
+                      </a:r>
+                    </a:p>
+                  </a:txBody>
+                  <a:tcPr marL="54864" marR="54864" marT="18288" marB="18288" anchor="ctr"/>
+                </a:tc>
+                <a:tc>
+                  <a:txBody>
+                    <a:bodyPr wrap="square"/>
+                    <a:lstStyle/>
+                    <a:p>
+                      <a:r>
+                        <a:rPr sz="1100" b="1">
+                          <a:ea typeface="맑은 고딕"/>
+                          <a:cs typeface="맑은 고딕"/>
+                        </a:rPr>
+                        <a:t>시기</a:t>
+                      </a:r>
+                    </a:p>
+                  </a:txBody>
+                  <a:tcPr marL="54864" marR="54864" marT="18288" marB="18288" anchor="ctr"/>
+                </a:tc>
+                <a:tc>
+                  <a:txBody>
+                    <a:bodyPr wrap="square"/>
+                    <a:lstStyle/>
+                    <a:p>
+                      <a:r>
+                        <a:rPr sz="1100" b="1">
+                          <a:ea typeface="맑은 고딕"/>
+                          <a:cs typeface="맑은 고딕"/>
+                        </a:rPr>
+                        <a:t>무엇을 바꿨나 (통제 변수)</a:t>
+                      </a:r>
+                    </a:p>
+                  </a:txBody>
+                  <a:tcPr marL="54864" marR="54864" marT="18288" marB="18288" anchor="ctr"/>
+                </a:tc>
+                <a:tc>
+                  <a:txBody>
+                    <a:bodyPr wrap="square"/>
+                    <a:lstStyle/>
+                    <a:p>
+                      <a:r>
+                        <a:rPr sz="1100" b="1">
+                          <a:ea typeface="맑은 고딕"/>
+                          <a:cs typeface="맑은 고딕"/>
+                        </a:rPr>
+                        <a:t>결과</a:t>
+                      </a:r>
+                    </a:p>
+                  </a:txBody>
+                  <a:tcPr marL="54864" marR="54864" marT="18288" marB="18288" anchor="ctr"/>
+                </a:tc>
+                <a:tc>
+                  <a:txBody>
+                    <a:bodyPr wrap="square"/>
+                    <a:lstStyle/>
+                    <a:p>
+                      <a:r>
+                        <a:rPr sz="1100" b="1">
+                          <a:ea typeface="맑은 고딕"/>
+                          <a:cs typeface="맑은 고딕"/>
+                        </a:rPr>
+                        <a:t>닫은 이유 · 근거</a:t>
+                      </a:r>
+                    </a:p>
+                  </a:txBody>
+                  <a:tcPr marL="54864" marR="54864" marT="18288" marB="18288" anchor="ctr"/>
+                </a:tc>
+              </a:tr>
+              <a:tr h="401320">
+                <a:tc>
+                  <a:txBody>
+                    <a:bodyPr wrap="square"/>
+                    <a:lstStyle/>
+                    <a:p>
+                      <a:r>
+                        <a:rPr sz="1100" b="0">
+                          <a:ea typeface="맑은 고딕"/>
+                          <a:cs typeface="맑은 고딕"/>
+                        </a:rPr>
+                        <a:t>학습 분산 헤드 vs split conformal (Mondrian)</a:t>
+                      </a:r>
+                    </a:p>
+                  </a:txBody>
+                  <a:tcPr marL="54864" marR="54864" marT="18288" marB="18288" anchor="ctr"/>
+                </a:tc>
+                <a:tc>
+                  <a:txBody>
+                    <a:bodyPr wrap="square"/>
+                    <a:lstStyle/>
+                    <a:p>
+                      <a:r>
+                        <a:rPr sz="1100" b="0">
+                          <a:ea typeface="맑은 고딕"/>
+                          <a:cs typeface="맑은 고딕"/>
+                        </a:rPr>
+                        <a:t>2026-08-05</a:t>
+                      </a:r>
+                    </a:p>
+                  </a:txBody>
+                  <a:tcPr marL="54864" marR="54864" marT="18288" marB="18288" anchor="ctr"/>
+                </a:tc>
+                <a:tc>
+                  <a:txBody>
+                    <a:bodyPr wrap="square"/>
+                    <a:lstStyle/>
+                    <a:p>
+                      <a:r>
+                        <a:rPr sz="1100" b="0">
+                          <a:ea typeface="맑은 고딕"/>
+                          <a:cs typeface="맑은 고딕"/>
+                        </a:rPr>
+                        <a:t>불확실성 방식</a:t>
+                      </a:r>
+                    </a:p>
+                  </a:txBody>
+                  <a:tcPr marL="54864" marR="54864" marT="18288" marB="18288" anchor="ctr"/>
+                </a:tc>
+                <a:tc>
+                  <a:txBody>
+                    <a:bodyPr wrap="square"/>
+                    <a:lstStyle/>
+                    <a:p>
+                      <a:r>
+                        <a:rPr sz="1100" b="0">
+                          <a:ea typeface="맑은 고딕"/>
+                          <a:cs typeface="맑은 고딕"/>
+                        </a:rPr>
+                        <a:t>conformal이 Winkler 32/32 최선</a:t>
+                      </a:r>
+                    </a:p>
+                  </a:txBody>
+                  <a:tcPr marL="54864" marR="54864" marT="18288" marB="18288" anchor="ctr"/>
+                </a:tc>
+                <a:tc>
+                  <a:txBody>
+                    <a:bodyPr wrap="square"/>
+                    <a:lstStyle/>
+                    <a:p>
+                      <a:r>
+                        <a:rPr sz="1100" b="0">
+                          <a:ea typeface="맑은 고딕"/>
+                          <a:cs typeface="맑은 고딕"/>
+                        </a:rPr>
+                        <a:t>재학습이 헤드라인을 교란하므로 사후 보정 채택 (§8m)</a:t>
+                      </a:r>
+                    </a:p>
+                  </a:txBody>
+                  <a:tcPr marL="54864" marR="54864" marT="18288" marB="18288" anchor="ctr"/>
+                </a:tc>
+              </a:tr>
+              <a:tr h="401320">
+                <a:tc>
+                  <a:txBody>
+                    <a:bodyPr wrap="square"/>
+                    <a:lstStyle/>
+                    <a:p>
+                      <a:r>
+                        <a:rPr sz="1100" b="0">
+                          <a:ea typeface="맑은 고딕"/>
+                          <a:cs typeface="맑은 고딕"/>
+                        </a:rPr>
+                        <a:t>양자 VQC · 고정 특징맵 · 저장소 · 커널 (IonQ Forte)</a:t>
+                      </a:r>
+                    </a:p>
+                  </a:txBody>
+                  <a:tcPr marL="54864" marR="54864" marT="18288" marB="18288" anchor="ctr"/>
+                </a:tc>
+                <a:tc>
+                  <a:txBody>
+                    <a:bodyPr wrap="square"/>
+                    <a:lstStyle/>
+                    <a:p>
+                      <a:r>
+                        <a:rPr sz="1100" b="0">
+                          <a:ea typeface="맑은 고딕"/>
+                          <a:cs typeface="맑은 고딕"/>
+                        </a:rPr>
+                        <a:t>2026-07-26 → 08-24</a:t>
+                      </a:r>
+                    </a:p>
+                  </a:txBody>
+                  <a:tcPr marL="54864" marR="54864" marT="18288" marB="18288" anchor="ctr"/>
+                </a:tc>
+                <a:tc>
+                  <a:txBody>
+                    <a:bodyPr wrap="square"/>
+                    <a:lstStyle/>
+                    <a:p>
+                      <a:r>
+                        <a:rPr sz="1100" b="0">
+                          <a:ea typeface="맑은 고딕"/>
+                          <a:cs typeface="맑은 고딕"/>
+                        </a:rPr>
+                        <a:t>추정기 계열</a:t>
+                      </a:r>
+                    </a:p>
+                  </a:txBody>
+                  <a:tcPr marL="54864" marR="54864" marT="18288" marB="18288" anchor="ctr"/>
+                </a:tc>
+                <a:tc>
+                  <a:txBody>
+                    <a:bodyPr wrap="square"/>
+                    <a:lstStyle/>
+                    <a:p>
+                      <a:r>
+                        <a:rPr sz="1100" b="0">
+                          <a:ea typeface="맑은 고딕"/>
+                          <a:cs typeface="맑은 고딕"/>
+                        </a:rPr>
+                        <a:t>무잡음에서도 persistence에 짐(471.5 vs 449.6 eV). 22.9 s/예측, λ = 0.661</a:t>
+                      </a:r>
+                    </a:p>
+                  </a:txBody>
+                  <a:tcPr marL="54864" marR="54864" marT="18288" marB="18288" anchor="ctr"/>
+                </a:tc>
+                <a:tc>
+                  <a:txBody>
+                    <a:bodyPr wrap="square"/>
+                    <a:lstStyle/>
+                    <a:p>
+                      <a:r>
+                        <a:rPr sz="1100" b="0">
+                          <a:ea typeface="맑은 고딕"/>
+                          <a:cs typeface="맑은 고딕"/>
+                        </a:rPr>
+                        <a:t>하드웨어 검증 후 음성 종결 (§8ap)</a:t>
+                      </a:r>
+                    </a:p>
+                  </a:txBody>
+                  <a:tcPr marL="54864" marR="54864" marT="18288" marB="18288" anchor="ctr"/>
+                </a:tc>
+              </a:tr>
+              <a:tr h="747776">
+                <a:tc>
+                  <a:txBody>
+                    <a:bodyPr wrap="square"/>
+                    <a:lstStyle/>
+                    <a:p>
+                      <a:r>
+                        <a:rPr sz="1100" b="0">
+                          <a:ea typeface="맑은 고딕"/>
+                          <a:cs typeface="맑은 고딕"/>
+                        </a:rPr>
+                        <a:t>CES 결측이 빔 변조 주기인가 (§8at)</a:t>
+                      </a:r>
+                    </a:p>
+                  </a:txBody>
+                  <a:tcPr marL="54864" marR="54864" marT="18288" marB="18288" anchor="ctr"/>
+                </a:tc>
+                <a:tc>
+                  <a:txBody>
+                    <a:bodyPr wrap="square"/>
+                    <a:lstStyle/>
+                    <a:p>
+                      <a:r>
+                        <a:rPr sz="1100" b="0">
+                          <a:ea typeface="맑은 고딕"/>
+                          <a:cs typeface="맑은 고딕"/>
+                        </a:rPr>
+                        <a:t>2026-09-05</a:t>
+                      </a:r>
+                    </a:p>
+                  </a:txBody>
+                  <a:tcPr marL="54864" marR="54864" marT="18288" marB="18288" anchor="ctr"/>
+                </a:tc>
+                <a:tc>
+                  <a:txBody>
+                    <a:bodyPr wrap="square"/>
+                    <a:lstStyle/>
+                    <a:p>
+                      <a:r>
+                        <a:rPr sz="1100" b="0">
+                          <a:ea typeface="맑은 고딕"/>
+                          <a:cs typeface="맑은 고딕"/>
+                        </a:rPr>
+                        <a:t>모델 없음. 641파일 전수 기술 통계</a:t>
+                      </a:r>
+                    </a:p>
+                  </a:txBody>
+                  <a:tcPr marL="54864" marR="54864" marT="18288" marB="18288" anchor="ctr"/>
+                </a:tc>
+                <a:tc>
+                  <a:txBody>
+                    <a:bodyPr wrap="square"/>
+                    <a:lstStyle/>
+                    <a:p>
+                      <a:r>
+                        <a:rPr sz="1100" b="0">
+                          <a:ea typeface="맑은 고딕"/>
+                          <a:cs typeface="맑은 고딕"/>
+                        </a:rPr>
+                        <a:t>두 타깃 마스크 일치 raw 72.8 % (3 keV 컷은 0.3 %p만 움직임), 마스크 자기상관은 잔물결 없이 감쇠, 우세 주기는 1.5 s · 3.0 s로 블록 포락선 규모</a:t>
+                      </a:r>
+                    </a:p>
+                  </a:txBody>
+                  <a:tcPr marL="54864" marR="54864" marT="18288" marB="18288" anchor="ctr"/>
+                </a:tc>
+                <a:tc>
+                  <a:txBody>
+                    <a:bodyPr wrap="square"/>
+                    <a:lstStyle/>
+                    <a:p>
+                      <a:r>
+                        <a:rPr sz="1100" b="0">
+                          <a:ea typeface="맑은 고딕"/>
+                          <a:cs typeface="맑은 고딕"/>
+                        </a:rPr>
+                        <a:t>듀티 사이클 아님. 같은 날 적은 기대를 철회하고 적합 품질 요청으로 격하 (§8at)</a:t>
+                      </a:r>
+                    </a:p>
+                  </a:txBody>
+                  <a:tcPr marL="54864" marR="54864" marT="18288" marB="18288" anchor="ctr"/>
+                </a:tc>
+              </a:tr>
+              <a:tr h="401320">
+                <a:tc>
+                  <a:txBody>
+                    <a:bodyPr wrap="square"/>
+                    <a:lstStyle/>
+                    <a:p>
+                      <a:r>
+                        <a:rPr sz="1100" b="0">
+                          <a:ea typeface="맑은 고딕"/>
+                          <a:cs typeface="맑은 고딕"/>
+                        </a:rPr>
+                        <a:t>B.11 VQ 코드북 게이팅 (b3vqC, C = 4 · 8 · 16)</a:t>
+                      </a:r>
+                    </a:p>
+                  </a:txBody>
+                  <a:tcPr marL="54864" marR="54864" marT="18288" marB="18288" anchor="ctr"/>
+                </a:tc>
+                <a:tc>
+                  <a:txBody>
+                    <a:bodyPr wrap="square"/>
+                    <a:lstStyle/>
+                    <a:p>
+                      <a:r>
+                        <a:rPr sz="1100" b="0">
+                          <a:ea typeface="맑은 고딕"/>
+                          <a:cs typeface="맑은 고딕"/>
+                        </a:rPr>
+                        <a:t>2026-09-03</a:t>
+                      </a:r>
+                    </a:p>
+                  </a:txBody>
+                  <a:tcPr marL="54864" marR="54864" marT="18288" marB="18288" anchor="ctr"/>
+                </a:tc>
+                <a:tc>
+                  <a:txBody>
+                    <a:bodyPr wrap="square"/>
+                    <a:lstStyle/>
+                    <a:p>
+                      <a:r>
+                        <a:rPr sz="1100" b="0">
+                          <a:ea typeface="맑은 고딕"/>
+                          <a:cs typeface="맑은 고딕"/>
+                        </a:rPr>
+                        <a:t>읽기 가중치를 이산 코드로 선택</a:t>
+                      </a:r>
+                    </a:p>
+                  </a:txBody>
+                  <a:tcPr marL="54864" marR="54864" marT="18288" marB="18288" anchor="ctr"/>
+                </a:tc>
+                <a:tc>
+                  <a:txBody>
+                    <a:bodyPr wrap="square"/>
+                    <a:lstStyle/>
+                    <a:p>
+                      <a:r>
+                        <a:rPr sz="1100" b="0">
+                          <a:ea typeface="맑은 고딕"/>
+                          <a:cs typeface="맑은 고딕"/>
+                        </a:rPr>
+                        <a:t>사전등록 완료, val 선별 진행 중. 조용 3분위 Tᵢ 승률 42 %가 출발점</a:t>
+                      </a:r>
+                    </a:p>
+                  </a:txBody>
+                  <a:tcPr marL="54864" marR="54864" marT="18288" marB="18288" anchor="ctr"/>
+                </a:tc>
+                <a:tc>
+                  <a:txBody>
+                    <a:bodyPr wrap="square"/>
+                    <a:lstStyle/>
+                    <a:p>
+                      <a:r>
+                        <a:rPr sz="1100" b="0">
+                          <a:ea typeface="맑은 고딕"/>
+                          <a:cs typeface="맑은 고딕"/>
+                        </a:rPr>
+                        <a:t>미판정 (PREREGISTRATION_B11.md)</a:t>
+                      </a:r>
+                    </a:p>
+                  </a:txBody>
+                  <a:tcPr marL="54864" marR="54864" marT="18288" marB="18288" anchor="ctr"/>
+                </a:tc>
+              </a:tr>
+            </a:tbl>
+          </a:graphicData>
+        </a:graphic>
+      </p:graphicFrame>
+      <p:sp>
+        <p:nvSpPr>
+          <p:cNvPr id="4" name="TextBox 3"/>
           <p:cNvSpPr txBox="1"/>
           <p:nvPr/>
         </p:nvSpPr>
         <p:spPr>
           <a:xfrm>
-            <a:off x="585216" y="2029967"/>
-            <a:ext cx="11027664" cy="297688"/>
+            <a:off x="585216" y="4347463"/>
+            <a:ext cx="11027664" cy="486664"/>
           </a:xfrm>
           <a:prstGeom prst="rect">
             <a:avLst/>
@@ -23785,844 +24505,15 @@
               </a:spcAft>
             </a:pPr>
             <a:r>
-              <a:rPr sz="1300">
-                <a:ea typeface="맑은 고딕"/>
-                <a:cs typeface="맑은 고딕"/>
-              </a:rPr>
-              <a:t>장치와 연도를 따로 두었다.</a:t>
+              <a:rPr sz="1250">
+                <a:ea typeface="맑은 고딕"/>
+                <a:cs typeface="맑은 고딕"/>
+              </a:rPr>
+              <a:t>데이터 처리(held 제거)와 프레이밍(전체 격자 마스킹 손실)이 skill을 움직였고, 아키텍처 미세 변형 · 크기 · 문맥 · 계열은 움직이지 않았다. 이 문장은 총합 MSE에 한정된다(§8aq).</a:t>
             </a:r>
           </a:p>
         </p:txBody>
       </p:sp>
-      <p:graphicFrame>
-        <p:nvGraphicFramePr>
-          <p:cNvPr id="4" name="Table 3"/>
-          <p:cNvGraphicFramePr>
-            <a:graphicFrameLocks noGrp="1"/>
-          </p:cNvGraphicFramePr>
-          <p:nvPr/>
-        </p:nvGraphicFramePr>
-        <p:xfrm>
-          <a:off x="585216" y="2400807"/>
-          <a:ext cx="11027661" cy="3083809"/>
-        </p:xfrm>
-        <a:graphic>
-          <a:graphicData uri="http://schemas.openxmlformats.org/drawingml/2006/table">
-            <a:tbl>
-              <a:tblPr firstRow="1" bandRow="1">
-                <a:tableStyleId>{5C22544A-7EE6-4342-B048-85BDC9FD1C3A}</a:tableStyleId>
-              </a:tblPr>
-              <a:tblGrid>
-                <a:gridCol w="1552631"/>
-                <a:gridCol w="836032"/>
-                <a:gridCol w="676788"/>
-                <a:gridCol w="1473009"/>
-                <a:gridCol w="2428474"/>
-                <a:gridCol w="1234142"/>
-                <a:gridCol w="2826585"/>
-              </a:tblGrid>
-              <a:tr h="274320">
-                <a:tc>
-                  <a:txBody>
-                    <a:bodyPr wrap="square"/>
-                    <a:lstStyle/>
-                    <a:p>
-                      <a:r>
-                        <a:rPr sz="1050" b="1">
-                          <a:ea typeface="맑은 고딕"/>
-                          <a:cs typeface="맑은 고딕"/>
-                        </a:rPr>
-                        <a:t>논문</a:t>
-                      </a:r>
-                    </a:p>
-                  </a:txBody>
-                  <a:tcPr marL="54864" marR="54864" marT="18288" marB="18288" anchor="ctr"/>
-                </a:tc>
-                <a:tc>
-                  <a:txBody>
-                    <a:bodyPr wrap="square"/>
-                    <a:lstStyle/>
-                    <a:p>
-                      <a:r>
-                        <a:rPr sz="1050" b="1">
-                          <a:ea typeface="맑은 고딕"/>
-                          <a:cs typeface="맑은 고딕"/>
-                        </a:rPr>
-                        <a:t>장치</a:t>
-                      </a:r>
-                    </a:p>
-                  </a:txBody>
-                  <a:tcPr marL="54864" marR="54864" marT="18288" marB="18288" anchor="ctr"/>
-                </a:tc>
-                <a:tc>
-                  <a:txBody>
-                    <a:bodyPr wrap="square"/>
-                    <a:lstStyle/>
-                    <a:p>
-                      <a:r>
-                        <a:rPr sz="1050" b="1">
-                          <a:ea typeface="맑은 고딕"/>
-                          <a:cs typeface="맑은 고딕"/>
-                        </a:rPr>
-                        <a:t>연도</a:t>
-                      </a:r>
-                    </a:p>
-                  </a:txBody>
-                  <a:tcPr marL="54864" marR="54864" marT="18288" marB="18288" anchor="ctr"/>
-                </a:tc>
-                <a:tc>
-                  <a:txBody>
-                    <a:bodyPr wrap="square"/>
-                    <a:lstStyle/>
-                    <a:p>
-                      <a:r>
-                        <a:rPr sz="1050" b="1">
-                          <a:ea typeface="맑은 고딕"/>
-                          <a:cs typeface="맑은 고딕"/>
-                        </a:rPr>
-                        <a:t>문제</a:t>
-                      </a:r>
-                    </a:p>
-                  </a:txBody>
-                  <a:tcPr marL="54864" marR="54864" marT="18288" marB="18288" anchor="ctr"/>
-                </a:tc>
-                <a:tc>
-                  <a:txBody>
-                    <a:bodyPr wrap="square"/>
-                    <a:lstStyle/>
-                    <a:p>
-                      <a:r>
-                        <a:rPr sz="1050" b="1">
-                          <a:ea typeface="맑은 고딕"/>
-                          <a:cs typeface="맑은 고딕"/>
-                        </a:rPr>
-                        <a:t>구조</a:t>
-                      </a:r>
-                    </a:p>
-                  </a:txBody>
-                  <a:tcPr marL="54864" marR="54864" marT="18288" marB="18288" anchor="ctr"/>
-                </a:tc>
-                <a:tc>
-                  <a:txBody>
-                    <a:bodyPr wrap="square"/>
-                    <a:lstStyle/>
-                    <a:p>
-                      <a:r>
-                        <a:rPr sz="1050" b="1">
-                          <a:ea typeface="맑은 고딕"/>
-                          <a:cs typeface="맑은 고딕"/>
-                        </a:rPr>
-                        <a:t>데이터</a:t>
-                      </a:r>
-                    </a:p>
-                  </a:txBody>
-                  <a:tcPr marL="54864" marR="54864" marT="18288" marB="18288" anchor="ctr"/>
-                </a:tc>
-                <a:tc>
-                  <a:txBody>
-                    <a:bodyPr wrap="square"/>
-                    <a:lstStyle/>
-                    <a:p>
-                      <a:r>
-                        <a:rPr sz="1050" b="1">
-                          <a:ea typeface="맑은 고딕"/>
-                          <a:cs typeface="맑은 고딕"/>
-                        </a:rPr>
-                        <a:t>우리에게 의미</a:t>
-                      </a:r>
-                    </a:p>
-                  </a:txBody>
-                  <a:tcPr marL="54864" marR="54864" marT="18288" marB="18288" anchor="ctr"/>
-                </a:tc>
-              </a:tr>
-              <a:tr h="716279">
-                <a:tc>
-                  <a:txBody>
-                    <a:bodyPr wrap="square"/>
-                    <a:lstStyle/>
-                    <a:p>
-                      <a:r>
-                        <a:rPr sz="1050" b="0">
-                          <a:ea typeface="맑은 고딕"/>
-                          <a:cs typeface="맑은 고딕"/>
-                        </a:rPr>
-                        <a:t>Diag2Diag (Nat. Comm.)</a:t>
-                      </a:r>
-                    </a:p>
-                  </a:txBody>
-                  <a:tcPr marL="54864" marR="54864" marT="18288" marB="18288" anchor="ctr"/>
-                </a:tc>
-                <a:tc>
-                  <a:txBody>
-                    <a:bodyPr wrap="square"/>
-                    <a:lstStyle/>
-                    <a:p>
-                      <a:r>
-                        <a:rPr sz="1050" b="0">
-                          <a:ea typeface="맑은 고딕"/>
-                          <a:cs typeface="맑은 고딕"/>
-                        </a:rPr>
-                        <a:t>DIII-D</a:t>
-                      </a:r>
-                    </a:p>
-                  </a:txBody>
-                  <a:tcPr marL="54864" marR="54864" marT="18288" marB="18288" anchor="ctr"/>
-                </a:tc>
-                <a:tc>
-                  <a:txBody>
-                    <a:bodyPr wrap="square"/>
-                    <a:lstStyle/>
-                    <a:p>
-                      <a:r>
-                        <a:rPr sz="1050" b="0">
-                          <a:ea typeface="맑은 고딕"/>
-                          <a:cs typeface="맑은 고딕"/>
-                        </a:rPr>
-                        <a:t>2025</a:t>
-                      </a:r>
-                    </a:p>
-                  </a:txBody>
-                  <a:tcPr marL="54864" marR="54864" marT="18288" marB="18288" anchor="ctr"/>
-                </a:tc>
-                <a:tc>
-                  <a:txBody>
-                    <a:bodyPr wrap="square"/>
-                    <a:lstStyle/>
-                    <a:p>
-                      <a:r>
-                        <a:rPr sz="1050" b="0">
-                          <a:ea typeface="맑은 고딕"/>
-                          <a:cs typeface="맑은 고딕"/>
-                        </a:rPr>
-                        <a:t>Thomson 200 Hz를 500 kHz로 시간 초해상도</a:t>
-                      </a:r>
-                    </a:p>
-                  </a:txBody>
-                  <a:tcPr marL="54864" marR="54864" marT="18288" marB="18288" anchor="ctr"/>
-                </a:tc>
-                <a:tc>
-                  <a:txBody>
-                    <a:bodyPr wrap="square"/>
-                    <a:lstStyle/>
-                    <a:p>
-                      <a:r>
-                        <a:rPr sz="1050" b="0">
-                          <a:ea typeface="맑은 고딕"/>
-                          <a:cs typeface="맑은 고딕"/>
-                        </a:rPr>
-                        <a:t>무기억 MLP 236→952→80, 1·2차 미분 특징으로 시간 문맥 대체, L1 손실, BNN 불확실성</a:t>
-                      </a:r>
-                    </a:p>
-                  </a:txBody>
-                  <a:tcPr marL="54864" marR="54864" marT="18288" marB="18288" anchor="ctr"/>
-                </a:tc>
-                <a:tc>
-                  <a:txBody>
-                    <a:bodyPr wrap="square"/>
-                    <a:lstStyle/>
-                    <a:p>
-                      <a:r>
-                        <a:rPr sz="1050" b="0">
-                          <a:ea typeface="맑은 고딕"/>
-                          <a:cs typeface="맑은 고딕"/>
-                        </a:rPr>
-                        <a:t>4,000 방전, 13.5만 샘플</a:t>
-                      </a:r>
-                    </a:p>
-                  </a:txBody>
-                  <a:tcPr marL="54864" marR="54864" marT="18288" marB="18288" anchor="ctr"/>
-                </a:tc>
-                <a:tc>
-                  <a:txBody>
-                    <a:bodyPr wrap="square"/>
-                    <a:lstStyle/>
-                    <a:p>
-                      <a:r>
-                        <a:rPr sz="1050" b="0">
-                          <a:ea typeface="맑은 고딕"/>
-                          <a:cs typeface="맑은 고딕"/>
-                        </a:rPr>
-                        <a:t>우리와 가장 가까운 문제가 가장 단순한 구조로 풀림. 저자 스스로 "TS 샘플링이 불규칙해서 RNN 대신 무기억"이라 밝힘. 우리 seq_v2는 이미 그 위 단계</a:t>
-                      </a:r>
-                    </a:p>
-                  </a:txBody>
-                  <a:tcPr marL="54864" marR="54864" marT="18288" marB="18288" anchor="ctr"/>
-                </a:tc>
-              </a:tr>
-              <a:tr h="385571">
-                <a:tc>
-                  <a:txBody>
-                    <a:bodyPr wrap="square"/>
-                    <a:lstStyle/>
-                    <a:p>
-                      <a:r>
-                        <a:rPr sz="1050" b="0">
-                          <a:ea typeface="맑은 고딕"/>
-                          <a:cs typeface="맑은 고딕"/>
-                        </a:rPr>
-                        <a:t>COMPASS 시간 초해상도 (PPCF)</a:t>
-                      </a:r>
-                    </a:p>
-                  </a:txBody>
-                  <a:tcPr marL="54864" marR="54864" marT="18288" marB="18288" anchor="ctr"/>
-                </a:tc>
-                <a:tc>
-                  <a:txBody>
-                    <a:bodyPr wrap="square"/>
-                    <a:lstStyle/>
-                    <a:p>
-                      <a:r>
-                        <a:rPr sz="1050" b="0">
-                          <a:ea typeface="맑은 고딕"/>
-                          <a:cs typeface="맑은 고딕"/>
-                        </a:rPr>
-                        <a:t>COMPASS</a:t>
-                      </a:r>
-                    </a:p>
-                  </a:txBody>
-                  <a:tcPr marL="54864" marR="54864" marT="18288" marB="18288" anchor="ctr"/>
-                </a:tc>
-                <a:tc>
-                  <a:txBody>
-                    <a:bodyPr wrap="square"/>
-                    <a:lstStyle/>
-                    <a:p>
-                      <a:r>
-                        <a:rPr sz="1050" b="0">
-                          <a:ea typeface="맑은 고딕"/>
-                          <a:cs typeface="맑은 고딕"/>
-                        </a:rPr>
-                        <a:t>2025/26</a:t>
-                      </a:r>
-                    </a:p>
-                  </a:txBody>
-                  <a:tcPr marL="54864" marR="54864" marT="18288" marB="18288" anchor="ctr"/>
-                </a:tc>
-                <a:tc>
-                  <a:txBody>
-                    <a:bodyPr wrap="square"/>
-                    <a:lstStyle/>
-                    <a:p>
-                      <a:r>
-                        <a:rPr sz="1050" b="0">
-                          <a:ea typeface="맑은 고딕"/>
-                          <a:cs typeface="맑은 고딕"/>
-                        </a:rPr>
-                        <a:t>SXR·AXUV로 Te/ne 프로파일</a:t>
-                      </a:r>
-                    </a:p>
-                  </a:txBody>
-                  <a:tcPr marL="54864" marR="54864" marT="18288" marB="18288" anchor="ctr"/>
-                </a:tc>
-                <a:tc>
-                  <a:txBody>
-                    <a:bodyPr wrap="square"/>
-                    <a:lstStyle/>
-                    <a:p>
-                      <a:r>
-                        <a:rPr sz="1050" b="0">
-                          <a:ea typeface="맑은 고딕"/>
-                          <a:cs typeface="맑은 고딕"/>
-                        </a:rPr>
-                        <a:t>4×256 MLP, 측정 불확실성 1/σ 가중 Huber</a:t>
-                      </a:r>
-                    </a:p>
-                  </a:txBody>
-                  <a:tcPr marL="54864" marR="54864" marT="18288" marB="18288" anchor="ctr"/>
-                </a:tc>
-                <a:tc>
-                  <a:txBody>
-                    <a:bodyPr wrap="square"/>
-                    <a:lstStyle/>
-                    <a:p>
-                      <a:r>
-                        <a:rPr sz="1050" b="0">
-                          <a:ea typeface="맑은 고딕"/>
-                          <a:cs typeface="맑은 고딕"/>
-                        </a:rPr>
-                        <a:t>2,764 방전, 방전 단위 5-fold</a:t>
-                      </a:r>
-                    </a:p>
-                  </a:txBody>
-                  <a:tcPr marL="54864" marR="54864" marT="18288" marB="18288" anchor="ctr"/>
-                </a:tc>
-                <a:tc>
-                  <a:txBody>
-                    <a:bodyPr wrap="square"/>
-                    <a:lstStyle/>
-                    <a:p>
-                      <a:r>
-                        <a:rPr sz="1050" b="0">
-                          <a:ea typeface="맑은 고딕"/>
-                          <a:cs typeface="맑은 고딕"/>
-                        </a:rPr>
-                        <a:t>가중 Huber는 §8aq의 "상위 1 % 변화가 제곱질량 46.6 %" 발견과 직결. 우리는 MSE만 씀</a:t>
-                      </a:r>
-                    </a:p>
-                  </a:txBody>
-                  <a:tcPr marL="54864" marR="54864" marT="18288" marB="18288" anchor="ctr"/>
-                </a:tc>
-              </a:tr>
-              <a:tr h="385571">
-                <a:tc>
-                  <a:txBody>
-                    <a:bodyPr wrap="square"/>
-                    <a:lstStyle/>
-                    <a:p>
-                      <a:r>
-                        <a:rPr sz="1050" b="0">
-                          <a:ea typeface="맑은 고딕"/>
-                          <a:cs typeface="맑은 고딕"/>
-                        </a:rPr>
-                        <a:t>FusionMAE (Comm. Phys.)</a:t>
-                      </a:r>
-                    </a:p>
-                  </a:txBody>
-                  <a:tcPr marL="54864" marR="54864" marT="18288" marB="18288" anchor="ctr"/>
-                </a:tc>
-                <a:tc>
-                  <a:txBody>
-                    <a:bodyPr wrap="square"/>
-                    <a:lstStyle/>
-                    <a:p>
-                      <a:r>
-                        <a:rPr sz="1050" b="0">
-                          <a:ea typeface="맑은 고딕"/>
-                          <a:cs typeface="맑은 고딕"/>
-                        </a:rPr>
-                        <a:t>HL-3</a:t>
-                      </a:r>
-                    </a:p>
-                  </a:txBody>
-                  <a:tcPr marL="54864" marR="54864" marT="18288" marB="18288" anchor="ctr"/>
-                </a:tc>
-                <a:tc>
-                  <a:txBody>
-                    <a:bodyPr wrap="square"/>
-                    <a:lstStyle/>
-                    <a:p>
-                      <a:r>
-                        <a:rPr sz="1050" b="0">
-                          <a:ea typeface="맑은 고딕"/>
-                          <a:cs typeface="맑은 고딕"/>
-                        </a:rPr>
-                        <a:t>2026</a:t>
-                      </a:r>
-                    </a:p>
-                  </a:txBody>
-                  <a:tcPr marL="54864" marR="54864" marT="18288" marB="18288" anchor="ctr"/>
-                </a:tc>
-                <a:tc>
-                  <a:txBody>
-                    <a:bodyPr wrap="square"/>
-                    <a:lstStyle/>
-                    <a:p>
-                      <a:r>
-                        <a:rPr sz="1050" b="0">
-                          <a:ea typeface="맑은 고딕"/>
-                          <a:cs typeface="맑은 고딕"/>
-                        </a:rPr>
-                        <a:t>88채널×10 ms 토큰의 마스크 오토인코더</a:t>
-                      </a:r>
-                    </a:p>
-                  </a:txBody>
-                  <a:tcPr marL="54864" marR="54864" marT="18288" marB="18288" anchor="ctr"/>
-                </a:tc>
-                <a:tc>
-                  <a:txBody>
-                    <a:bodyPr wrap="square"/>
-                    <a:lstStyle/>
-                    <a:p>
-                      <a:r>
-                        <a:rPr sz="1050" b="0">
-                          <a:ea typeface="맑은 고딕"/>
-                          <a:cs typeface="맑은 고딕"/>
-                        </a:rPr>
-                        <a:t>Transformer MAE, 결측 채널 재구성 = "가상 백업 진단", 96.7 ~ 97.2 %</a:t>
-                      </a:r>
-                    </a:p>
-                  </a:txBody>
-                  <a:tcPr marL="54864" marR="54864" marT="18288" marB="18288" anchor="ctr"/>
-                </a:tc>
-                <a:tc>
-                  <a:txBody>
-                    <a:bodyPr wrap="square"/>
-                    <a:lstStyle/>
-                    <a:p>
-                      <a:r>
-                        <a:rPr sz="1050" b="0">
-                          <a:ea typeface="맑은 고딕"/>
-                          <a:cs typeface="맑은 고딕"/>
-                        </a:rPr>
-                        <a:t>대규모 HL-3</a:t>
-                      </a:r>
-                    </a:p>
-                  </a:txBody>
-                  <a:tcPr marL="54864" marR="54864" marT="18288" marB="18288" anchor="ctr"/>
-                </a:tc>
-                <a:tc>
-                  <a:txBody>
-                    <a:bodyPr wrap="square"/>
-                    <a:lstStyle/>
-                    <a:p>
-                      <a:r>
-                        <a:rPr sz="1050" b="0">
-                          <a:ea typeface="맑은 고딕"/>
-                          <a:cs typeface="맑은 고딕"/>
-                        </a:rPr>
-                        <a:t>우리 과제를 MAE의 결측 채널 복원으로 보는 프레임. 사전학습 축은 우리 repo에 없음</a:t>
-                      </a:r>
-                    </a:p>
-                  </a:txBody>
-                  <a:tcPr marL="54864" marR="54864" marT="18288" marB="18288" anchor="ctr"/>
-                </a:tc>
-              </a:tr>
-              <a:tr h="550926">
-                <a:tc>
-                  <a:txBody>
-                    <a:bodyPr wrap="square"/>
-                    <a:lstStyle/>
-                    <a:p>
-                      <a:r>
-                        <a:rPr sz="1050" b="0">
-                          <a:ea typeface="맑은 고딕"/>
-                          <a:cs typeface="맑은 고딕"/>
-                        </a:rPr>
-                        <a:t>TokaMind</a:t>
-                      </a:r>
-                    </a:p>
-                  </a:txBody>
-                  <a:tcPr marL="54864" marR="54864" marT="18288" marB="18288" anchor="ctr"/>
-                </a:tc>
-                <a:tc>
-                  <a:txBody>
-                    <a:bodyPr wrap="square"/>
-                    <a:lstStyle/>
-                    <a:p>
-                      <a:r>
-                        <a:rPr sz="1050" b="0">
-                          <a:ea typeface="맑은 고딕"/>
-                          <a:cs typeface="맑은 고딕"/>
-                        </a:rPr>
-                        <a:t>MAST</a:t>
-                      </a:r>
-                    </a:p>
-                  </a:txBody>
-                  <a:tcPr marL="54864" marR="54864" marT="18288" marB="18288" anchor="ctr"/>
-                </a:tc>
-                <a:tc>
-                  <a:txBody>
-                    <a:bodyPr wrap="square"/>
-                    <a:lstStyle/>
-                    <a:p>
-                      <a:r>
-                        <a:rPr sz="1050" b="0">
-                          <a:ea typeface="맑은 고딕"/>
-                          <a:cs typeface="맑은 고딕"/>
-                        </a:rPr>
-                        <a:t>2026</a:t>
-                      </a:r>
-                    </a:p>
-                  </a:txBody>
-                  <a:tcPr marL="54864" marR="54864" marT="18288" marB="18288" anchor="ctr"/>
-                </a:tc>
-                <a:tc>
-                  <a:txBody>
-                    <a:bodyPr wrap="square"/>
-                    <a:lstStyle/>
-                    <a:p>
-                      <a:r>
-                        <a:rPr sz="1050" b="0">
-                          <a:ea typeface="맑은 고딕"/>
-                          <a:cs typeface="맑은 고딕"/>
-                        </a:rPr>
-                        <a:t>멀티모달 파운데이션 모델</a:t>
-                      </a:r>
-                    </a:p>
-                  </a:txBody>
-                  <a:tcPr marL="54864" marR="54864" marT="18288" marB="18288" anchor="ctr"/>
-                </a:tc>
-                <a:tc>
-                  <a:txBody>
-                    <a:bodyPr wrap="square"/>
-                    <a:lstStyle/>
-                    <a:p>
-                      <a:r>
-                        <a:rPr sz="1050" b="0">
-                          <a:ea typeface="맑은 고딕"/>
-                          <a:cs typeface="맑은 고딕"/>
-                        </a:rPr>
-                        <a:t>7M 미만 트랜스포머, DCT 임베딩, 5 ms 청크로 0.2 ~ 500 kHz 다중 샘플링률 처리, 결측 마스크</a:t>
-                      </a:r>
-                    </a:p>
-                  </a:txBody>
-                  <a:tcPr marL="54864" marR="54864" marT="18288" marB="18288" anchor="ctr"/>
-                </a:tc>
-                <a:tc>
-                  <a:txBody>
-                    <a:bodyPr wrap="square"/>
-                    <a:lstStyle/>
-                    <a:p>
-                      <a:r>
-                        <a:rPr sz="1050" b="0">
-                          <a:ea typeface="맑은 고딕"/>
-                          <a:cs typeface="맑은 고딕"/>
-                        </a:rPr>
-                        <a:t>11,573 방전</a:t>
-                      </a:r>
-                    </a:p>
-                  </a:txBody>
-                  <a:tcPr marL="54864" marR="54864" marT="18288" marB="18288" anchor="ctr"/>
-                </a:tc>
-                <a:tc>
-                  <a:txBody>
-                    <a:bodyPr wrap="square"/>
-                    <a:lstStyle/>
-                    <a:p>
-                      <a:r>
-                        <a:rPr sz="1050" b="0">
-                          <a:ea typeface="맑은 고딕"/>
-                          <a:cs typeface="맑은 고딕"/>
-                        </a:rPr>
-                        <a:t>사전학습 후 미세조정 이득: 전체 +0.017 NRMSE, 프로파일 그룹은 -0.005, MHD만 +0.05. 프로파일류에는 사전학습이 거의 안 듦</a:t>
-                      </a:r>
-                    </a:p>
-                  </a:txBody>
-                  <a:tcPr marL="54864" marR="54864" marT="18288" marB="18288" anchor="ctr"/>
-                </a:tc>
-              </a:tr>
-              <a:tr h="385571">
-                <a:tc>
-                  <a:txBody>
-                    <a:bodyPr wrap="square"/>
-                    <a:lstStyle/>
-                    <a:p>
-                      <a:r>
-                        <a:rPr sz="1050" b="0">
-                          <a:ea typeface="맑은 고딕"/>
-                          <a:cs typeface="맑은 고딕"/>
-                        </a:rPr>
-                        <a:t>TokaMark</a:t>
-                      </a:r>
-                    </a:p>
-                  </a:txBody>
-                  <a:tcPr marL="54864" marR="54864" marT="18288" marB="18288" anchor="ctr"/>
-                </a:tc>
-                <a:tc>
-                  <a:txBody>
-                    <a:bodyPr wrap="square"/>
-                    <a:lstStyle/>
-                    <a:p>
-                      <a:r>
-                        <a:rPr sz="1050" b="0">
-                          <a:ea typeface="맑은 고딕"/>
-                          <a:cs typeface="맑은 고딕"/>
-                        </a:rPr>
-                        <a:t>MAST</a:t>
-                      </a:r>
-                    </a:p>
-                  </a:txBody>
-                  <a:tcPr marL="54864" marR="54864" marT="18288" marB="18288" anchor="ctr"/>
-                </a:tc>
-                <a:tc>
-                  <a:txBody>
-                    <a:bodyPr wrap="square"/>
-                    <a:lstStyle/>
-                    <a:p>
-                      <a:r>
-                        <a:rPr sz="1050" b="0">
-                          <a:ea typeface="맑은 고딕"/>
-                          <a:cs typeface="맑은 고딕"/>
-                        </a:rPr>
-                        <a:t>2026</a:t>
-                      </a:r>
-                    </a:p>
-                  </a:txBody>
-                  <a:tcPr marL="54864" marR="54864" marT="18288" marB="18288" anchor="ctr"/>
-                </a:tc>
-                <a:tc>
-                  <a:txBody>
-                    <a:bodyPr wrap="square"/>
-                    <a:lstStyle/>
-                    <a:p>
-                      <a:r>
-                        <a:rPr sz="1050" b="0">
-                          <a:ea typeface="맑은 고딕"/>
-                          <a:cs typeface="맑은 고딕"/>
-                        </a:rPr>
-                        <a:t>14개 과제 벤치마크</a:t>
-                      </a:r>
-                    </a:p>
-                  </a:txBody>
-                  <a:tcPr marL="54864" marR="54864" marT="18288" marB="18288" anchor="ctr"/>
-                </a:tc>
-                <a:tc>
-                  <a:txBody>
-                    <a:bodyPr wrap="square"/>
-                    <a:lstStyle/>
-                    <a:p>
-                      <a:r>
-                        <a:rPr sz="1050" b="0">
-                          <a:ea typeface="맑은 고딕"/>
-                          <a:cs typeface="맑은 고딕"/>
-                        </a:rPr>
-                        <a:t>다중 분기 conv 인코더-디코더 베이스라인, shot 단위 분할</a:t>
-                      </a:r>
-                    </a:p>
-                  </a:txBody>
-                  <a:tcPr marL="54864" marR="54864" marT="18288" marB="18288" anchor="ctr"/>
-                </a:tc>
-                <a:tc>
-                  <a:txBody>
-                    <a:bodyPr wrap="square"/>
-                    <a:lstStyle/>
-                    <a:p>
-                      <a:r>
-                        <a:rPr sz="1050" b="0">
-                          <a:ea typeface="맑은 고딕"/>
-                          <a:cs typeface="맑은 고딕"/>
-                        </a:rPr>
-                        <a:t>위와 동일</a:t>
-                      </a:r>
-                    </a:p>
-                  </a:txBody>
-                  <a:tcPr marL="54864" marR="54864" marT="18288" marB="18288" anchor="ctr"/>
-                </a:tc>
-                <a:tc>
-                  <a:txBody>
-                    <a:bodyPr wrap="square"/>
-                    <a:lstStyle/>
-                    <a:p>
-                      <a:r>
-                        <a:rPr sz="1050" b="0">
-                          <a:ea typeface="맑은 고딕"/>
-                          <a:cs typeface="맑은 고딕"/>
-                        </a:rPr>
-                        <a:t>프로파일 동역학 NRMSE 0.34, MHD 0.48. 커뮤니티 기준선도 conv</a:t>
-                      </a:r>
-                    </a:p>
-                  </a:txBody>
-                  <a:tcPr marL="54864" marR="54864" marT="18288" marB="18288" anchor="ctr"/>
-                </a:tc>
-              </a:tr>
-              <a:tr h="385571">
-                <a:tc>
-                  <a:txBody>
-                    <a:bodyPr wrap="square"/>
-                    <a:lstStyle/>
-                    <a:p>
-                      <a:r>
-                        <a:rPr sz="1050" b="0">
-                          <a:ea typeface="맑은 고딕"/>
-                          <a:cs typeface="맑은 고딕"/>
-                        </a:rPr>
-                        <a:t>PanoMHD</a:t>
-                      </a:r>
-                    </a:p>
-                  </a:txBody>
-                  <a:tcPr marL="54864" marR="54864" marT="18288" marB="18288" anchor="ctr"/>
-                </a:tc>
-                <a:tc>
-                  <a:txBody>
-                    <a:bodyPr wrap="square"/>
-                    <a:lstStyle/>
-                    <a:p>
-                      <a:r>
-                        <a:rPr sz="1050" b="0">
-                          <a:ea typeface="맑은 고딕"/>
-                          <a:cs typeface="맑은 고딕"/>
-                        </a:rPr>
-                        <a:t>KSTAR</a:t>
-                      </a:r>
-                    </a:p>
-                  </a:txBody>
-                  <a:tcPr marL="54864" marR="54864" marT="18288" marB="18288" anchor="ctr"/>
-                </a:tc>
-                <a:tc>
-                  <a:txBody>
-                    <a:bodyPr wrap="square"/>
-                    <a:lstStyle/>
-                    <a:p>
-                      <a:r>
-                        <a:rPr sz="1050" b="0">
-                          <a:ea typeface="맑은 고딕"/>
-                          <a:cs typeface="맑은 고딕"/>
-                        </a:rPr>
-                        <a:t>2026</a:t>
-                      </a:r>
-                    </a:p>
-                  </a:txBody>
-                  <a:tcPr marL="54864" marR="54864" marT="18288" marB="18288" anchor="ctr"/>
-                </a:tc>
-                <a:tc>
-                  <a:txBody>
-                    <a:bodyPr wrap="square"/>
-                    <a:lstStyle/>
-                    <a:p>
-                      <a:r>
-                        <a:rPr sz="1050" b="0">
-                          <a:ea typeface="맑은 고딕"/>
-                          <a:cs typeface="맑은 고딕"/>
-                        </a:rPr>
-                        <a:t>Mirnov만으로 βN·H89·L/H</a:t>
-                      </a:r>
-                    </a:p>
-                  </a:txBody>
-                  <a:tcPr marL="54864" marR="54864" marT="18288" marB="18288" anchor="ctr"/>
-                </a:tc>
-                <a:tc>
-                  <a:txBody>
-                    <a:bodyPr wrap="square"/>
-                    <a:lstStyle/>
-                    <a:p>
-                      <a:r>
-                        <a:rPr sz="1050" b="0">
-                          <a:ea typeface="맑은 고딕"/>
-                          <a:cs typeface="맑은 고딕"/>
-                        </a:rPr>
-                        <a:t>VQ-VAE 토큰 + 457M GPT-2</a:t>
-                      </a:r>
-                    </a:p>
-                  </a:txBody>
-                  <a:tcPr marL="54864" marR="54864" marT="18288" marB="18288" anchor="ctr"/>
-                </a:tc>
-                <a:tc>
-                  <a:txBody>
-                    <a:bodyPr wrap="square"/>
-                    <a:lstStyle/>
-                    <a:p>
-                      <a:r>
-                        <a:rPr sz="1050" b="0">
-                          <a:ea typeface="맑은 고딕"/>
-                          <a:cs typeface="맑은 고딕"/>
-                        </a:rPr>
-                        <a:t>978 방전, 2 MHz 원시 MC</a:t>
-                      </a:r>
-                    </a:p>
-                  </a:txBody>
-                  <a:tcPr marL="54864" marR="54864" marT="18288" marB="18288" anchor="ctr"/>
-                </a:tc>
-                <a:tc>
-                  <a:txBody>
-                    <a:bodyPr wrap="square"/>
-                    <a:lstStyle/>
-                    <a:p>
-                      <a:r>
-                        <a:rPr sz="1050" b="0">
-                          <a:ea typeface="맑은 고딕"/>
-                          <a:cs typeface="맑은 고딕"/>
-                        </a:rPr>
-                        <a:t>KSTAR에서 이산 코드북이 작동한 선례. 단 원시 μs MC 기준이라 B.6가 전제</a:t>
-                      </a:r>
-                    </a:p>
-                  </a:txBody>
-                  <a:tcPr marL="54864" marR="54864" marT="18288" marB="18288" anchor="ctr"/>
-                </a:tc>
-              </a:tr>
-            </a:tbl>
-          </a:graphicData>
-        </a:graphic>
-      </p:graphicFrame>
     </p:spTree>
   </p:cSld>
   <p:clrMapOvr>
@@ -24666,7 +24557,7 @@
                 <a:ea typeface="맑은 고딕"/>
                 <a:cs typeface="맑은 고딕"/>
               </a:rPr>
-              <a:t>문헌 조사 (1/4, 2쪽): 핵융합의 진단-대-진단 추정은 여전히 단순한 구조가 주류이다</a:t>
+              <a:t>문헌 조사 (1/4, 1쪽): 핵융합의 진단-대-진단 추정은 여전히 단순한 구조가 주류이다</a:t>
             </a:r>
           </a:p>
         </p:txBody>
@@ -24718,7 +24609,7 @@
         </p:nvGraphicFramePr>
         <p:xfrm>
           <a:off x="585216" y="2400807"/>
-          <a:ext cx="11027661" cy="3201924"/>
+          <a:ext cx="11027661" cy="3320288"/>
         </p:xfrm>
         <a:graphic>
           <a:graphicData uri="http://schemas.openxmlformats.org/drawingml/2006/table">
@@ -24849,34 +24740,34 @@
                   <a:tcPr marL="54864" marR="54864" marT="18288" marB="18288" anchor="ctr"/>
                 </a:tc>
               </a:tr>
-              <a:tr h="401320">
-                <a:tc>
-                  <a:txBody>
-                    <a:bodyPr wrap="square"/>
-                    <a:lstStyle/>
-                    <a:p>
-                      <a:r>
-                        <a:rPr sz="1100" b="0">
-                          <a:ea typeface="맑은 고딕"/>
-                          <a:cs typeface="맑은 고딕"/>
-                        </a:rPr>
-                        <a:t>멀티모달 VAE</a:t>
-                      </a:r>
-                    </a:p>
-                  </a:txBody>
-                  <a:tcPr marL="54864" marR="54864" marT="18288" marB="18288" anchor="ctr"/>
-                </a:tc>
-                <a:tc>
-                  <a:txBody>
-                    <a:bodyPr wrap="square"/>
-                    <a:lstStyle/>
-                    <a:p>
-                      <a:r>
-                        <a:rPr sz="1100" b="0">
-                          <a:ea typeface="맑은 고딕"/>
-                          <a:cs typeface="맑은 고딕"/>
-                        </a:rPr>
-                        <a:t>TCV</a:t>
+              <a:tr h="747776">
+                <a:tc>
+                  <a:txBody>
+                    <a:bodyPr wrap="square"/>
+                    <a:lstStyle/>
+                    <a:p>
+                      <a:r>
+                        <a:rPr sz="1100" b="0">
+                          <a:ea typeface="맑은 고딕"/>
+                          <a:cs typeface="맑은 고딕"/>
+                        </a:rPr>
+                        <a:t>Diag2Diag (Nat. Comm.)</a:t>
+                      </a:r>
+                    </a:p>
+                  </a:txBody>
+                  <a:tcPr marL="54864" marR="54864" marT="18288" marB="18288" anchor="ctr"/>
+                </a:tc>
+                <a:tc>
+                  <a:txBody>
+                    <a:bodyPr wrap="square"/>
+                    <a:lstStyle/>
+                    <a:p>
+                      <a:r>
+                        <a:rPr sz="1100" b="0">
+                          <a:ea typeface="맑은 고딕"/>
+                          <a:cs typeface="맑은 고딕"/>
+                        </a:rPr>
+                        <a:t>DIII-D</a:t>
                       </a:r>
                     </a:p>
                   </a:txBody>
@@ -24908,55 +24799,55 @@
                           <a:ea typeface="맑은 고딕"/>
                           <a:cs typeface="맑은 고딕"/>
                         </a:rPr>
-                        <a:t>상태 감시·붕괴 유형</a:t>
-                      </a:r>
-                    </a:p>
-                  </a:txBody>
-                  <a:tcPr marL="54864" marR="54864" marT="18288" marB="18288" anchor="ctr"/>
-                </a:tc>
-                <a:tc>
-                  <a:txBody>
-                    <a:bodyPr wrap="square"/>
-                    <a:lstStyle/>
-                    <a:p>
-                      <a:r>
-                        <a:rPr sz="1100" b="0">
-                          <a:ea typeface="맑은 고딕"/>
-                          <a:cs typeface="맑은 고딕"/>
-                        </a:rPr>
-                        <a:t>모달리티별 인코더의 순차 VAE</a:t>
-                      </a:r>
-                    </a:p>
-                  </a:txBody>
-                  <a:tcPr marL="54864" marR="54864" marT="18288" marB="18288" anchor="ctr"/>
-                </a:tc>
-                <a:tc>
-                  <a:txBody>
-                    <a:bodyPr wrap="square"/>
-                    <a:lstStyle/>
-                    <a:p>
-                      <a:r>
-                        <a:rPr sz="1100" b="0">
-                          <a:ea typeface="맑은 고딕"/>
-                          <a:cs typeface="맑은 고딕"/>
-                        </a:rPr>
-                        <a:t>1,600 방전</a:t>
-                      </a:r>
-                    </a:p>
-                  </a:txBody>
-                  <a:tcPr marL="54864" marR="54864" marT="18288" marB="18288" anchor="ctr"/>
-                </a:tc>
-                <a:tc>
-                  <a:txBody>
-                    <a:bodyPr wrap="square"/>
-                    <a:lstStyle/>
-                    <a:p>
-                      <a:r>
-                        <a:rPr sz="1100" b="0">
-                          <a:ea typeface="맑은 고딕"/>
-                          <a:cs typeface="맑은 고딕"/>
-                        </a:rPr>
-                        <a:t>VAE 용도는 회귀 정확도가 아니라 해석·이상탐지</a:t>
+                        <a:t>Thomson 200 Hz를 500 kHz로 시간 초해상도</a:t>
+                      </a:r>
+                    </a:p>
+                  </a:txBody>
+                  <a:tcPr marL="54864" marR="54864" marT="18288" marB="18288" anchor="ctr"/>
+                </a:tc>
+                <a:tc>
+                  <a:txBody>
+                    <a:bodyPr wrap="square"/>
+                    <a:lstStyle/>
+                    <a:p>
+                      <a:r>
+                        <a:rPr sz="1100" b="0">
+                          <a:ea typeface="맑은 고딕"/>
+                          <a:cs typeface="맑은 고딕"/>
+                        </a:rPr>
+                        <a:t>무기억 MLP 236→952→80, 1·2차 미분 특징으로 시간 문맥 대체, L1 손실, BNN 불확실성</a:t>
+                      </a:r>
+                    </a:p>
+                  </a:txBody>
+                  <a:tcPr marL="54864" marR="54864" marT="18288" marB="18288" anchor="ctr"/>
+                </a:tc>
+                <a:tc>
+                  <a:txBody>
+                    <a:bodyPr wrap="square"/>
+                    <a:lstStyle/>
+                    <a:p>
+                      <a:r>
+                        <a:rPr sz="1100" b="0">
+                          <a:ea typeface="맑은 고딕"/>
+                          <a:cs typeface="맑은 고딕"/>
+                        </a:rPr>
+                        <a:t>4,000 방전, 13.5만 샘플</a:t>
+                      </a:r>
+                    </a:p>
+                  </a:txBody>
+                  <a:tcPr marL="54864" marR="54864" marT="18288" marB="18288" anchor="ctr"/>
+                </a:tc>
+                <a:tc>
+                  <a:txBody>
+                    <a:bodyPr wrap="square"/>
+                    <a:lstStyle/>
+                    <a:p>
+                      <a:r>
+                        <a:rPr sz="1100" b="0">
+                          <a:ea typeface="맑은 고딕"/>
+                          <a:cs typeface="맑은 고딕"/>
+                        </a:rPr>
+                        <a:t>우리와 가장 가까운 문제가 가장 단순한 구조로 풀림. 저자 스스로 "TS 샘플링이 불규칙해서 RNN 대신 무기억"이라 밝힘. 우리 seq_v2는 이미 그 위 단계</a:t>
                       </a:r>
                     </a:p>
                   </a:txBody>
@@ -24974,103 +24865,331 @@
                           <a:ea typeface="맑은 고딕"/>
                           <a:cs typeface="맑은 고딕"/>
                         </a:rPr>
-                        <a:t>TokaFormer, EAST 지식증류</a:t>
-                      </a:r>
-                    </a:p>
-                  </a:txBody>
-                  <a:tcPr marL="54864" marR="54864" marT="18288" marB="18288" anchor="ctr"/>
-                </a:tc>
-                <a:tc>
-                  <a:txBody>
-                    <a:bodyPr wrap="square"/>
-                    <a:lstStyle/>
-                    <a:p>
-                      <a:r>
-                        <a:rPr sz="1100" b="0">
-                          <a:ea typeface="맑은 고딕"/>
-                          <a:cs typeface="맑은 고딕"/>
-                        </a:rPr>
-                        <a:t>EAST 외</a:t>
-                      </a:r>
-                    </a:p>
-                  </a:txBody>
-                  <a:tcPr marL="54864" marR="54864" marT="18288" marB="18288" anchor="ctr"/>
-                </a:tc>
-                <a:tc>
-                  <a:txBody>
-                    <a:bodyPr wrap="square"/>
-                    <a:lstStyle/>
-                    <a:p>
-                      <a:r>
-                        <a:rPr sz="1100" b="0">
-                          <a:ea typeface="맑은 고딕"/>
-                          <a:cs typeface="맑은 고딕"/>
-                        </a:rPr>
-                        <a:t>2025 ~ 26</a:t>
-                      </a:r>
-                    </a:p>
-                  </a:txBody>
-                  <a:tcPr marL="54864" marR="54864" marT="18288" marB="18288" anchor="ctr"/>
-                </a:tc>
-                <a:tc>
-                  <a:txBody>
-                    <a:bodyPr wrap="square"/>
-                    <a:lstStyle/>
-                    <a:p>
-                      <a:r>
-                        <a:rPr sz="1100" b="0">
-                          <a:ea typeface="맑은 고딕"/>
-                          <a:cs typeface="맑은 고딕"/>
-                        </a:rPr>
-                        <a:t>붕괴 예측</a:t>
-                      </a:r>
-                    </a:p>
-                  </a:txBody>
-                  <a:tcPr marL="54864" marR="54864" marT="18288" marB="18288" anchor="ctr"/>
-                </a:tc>
-                <a:tc>
-                  <a:txBody>
-                    <a:bodyPr wrap="square"/>
-                    <a:lstStyle/>
-                    <a:p>
-                      <a:r>
-                        <a:rPr sz="1100" b="0">
-                          <a:ea typeface="맑은 고딕"/>
-                          <a:cs typeface="맑은 고딕"/>
-                        </a:rPr>
-                        <a:t>1D conv 임베딩 후 모달리티별 Transformer(dual tower), 후기 융합</a:t>
-                      </a:r>
-                    </a:p>
-                  </a:txBody>
-                  <a:tcPr marL="54864" marR="54864" marT="18288" marB="18288" anchor="ctr"/>
-                </a:tc>
-                <a:tc>
-                  <a:txBody>
-                    <a:bodyPr wrap="square"/>
-                    <a:lstStyle/>
-                    <a:p>
-                      <a:r>
-                        <a:rPr sz="1100" b="0">
-                          <a:ea typeface="맑은 고딕"/>
-                          <a:cs typeface="맑은 고딕"/>
-                        </a:rPr>
-                        <a:t>20 μs Mirnov + 1 ms 스칼라</a:t>
-                      </a:r>
-                    </a:p>
-                  </a:txBody>
-                  <a:tcPr marL="54864" marR="54864" marT="18288" marB="18288" anchor="ctr"/>
-                </a:tc>
-                <a:tc>
-                  <a:txBody>
-                    <a:bodyPr wrap="square"/>
-                    <a:lstStyle/>
-                    <a:p>
-                      <a:r>
-                        <a:rPr sz="1100" b="0">
-                          <a:ea typeface="맑은 고딕"/>
-                          <a:cs typeface="맑은 고딕"/>
-                        </a:rPr>
-                        <a:t>CNN+Transformer가 주류인 곳은 붕괴 예측. 20 μs Mirnov와 1 ms 스칼라의 융합 문제이지 회귀 천장 문제가 아님</a:t>
+                        <a:t>COMPASS 시간 초해상도 (PPCF)</a:t>
+                      </a:r>
+                    </a:p>
+                  </a:txBody>
+                  <a:tcPr marL="54864" marR="54864" marT="18288" marB="18288" anchor="ctr"/>
+                </a:tc>
+                <a:tc>
+                  <a:txBody>
+                    <a:bodyPr wrap="square"/>
+                    <a:lstStyle/>
+                    <a:p>
+                      <a:r>
+                        <a:rPr sz="1100" b="0">
+                          <a:ea typeface="맑은 고딕"/>
+                          <a:cs typeface="맑은 고딕"/>
+                        </a:rPr>
+                        <a:t>COMPASS</a:t>
+                      </a:r>
+                    </a:p>
+                  </a:txBody>
+                  <a:tcPr marL="54864" marR="54864" marT="18288" marB="18288" anchor="ctr"/>
+                </a:tc>
+                <a:tc>
+                  <a:txBody>
+                    <a:bodyPr wrap="square"/>
+                    <a:lstStyle/>
+                    <a:p>
+                      <a:r>
+                        <a:rPr sz="1100" b="0">
+                          <a:ea typeface="맑은 고딕"/>
+                          <a:cs typeface="맑은 고딕"/>
+                        </a:rPr>
+                        <a:t>2025/26</a:t>
+                      </a:r>
+                    </a:p>
+                  </a:txBody>
+                  <a:tcPr marL="54864" marR="54864" marT="18288" marB="18288" anchor="ctr"/>
+                </a:tc>
+                <a:tc>
+                  <a:txBody>
+                    <a:bodyPr wrap="square"/>
+                    <a:lstStyle/>
+                    <a:p>
+                      <a:r>
+                        <a:rPr sz="1100" b="0">
+                          <a:ea typeface="맑은 고딕"/>
+                          <a:cs typeface="맑은 고딕"/>
+                        </a:rPr>
+                        <a:t>SXR·AXUV로 Te/ne 프로파일</a:t>
+                      </a:r>
+                    </a:p>
+                  </a:txBody>
+                  <a:tcPr marL="54864" marR="54864" marT="18288" marB="18288" anchor="ctr"/>
+                </a:tc>
+                <a:tc>
+                  <a:txBody>
+                    <a:bodyPr wrap="square"/>
+                    <a:lstStyle/>
+                    <a:p>
+                      <a:r>
+                        <a:rPr sz="1100" b="0">
+                          <a:ea typeface="맑은 고딕"/>
+                          <a:cs typeface="맑은 고딕"/>
+                        </a:rPr>
+                        <a:t>4×256 MLP, 측정 불확실성 1/σ 가중 Huber</a:t>
+                      </a:r>
+                    </a:p>
+                  </a:txBody>
+                  <a:tcPr marL="54864" marR="54864" marT="18288" marB="18288" anchor="ctr"/>
+                </a:tc>
+                <a:tc>
+                  <a:txBody>
+                    <a:bodyPr wrap="square"/>
+                    <a:lstStyle/>
+                    <a:p>
+                      <a:r>
+                        <a:rPr sz="1100" b="0">
+                          <a:ea typeface="맑은 고딕"/>
+                          <a:cs typeface="맑은 고딕"/>
+                        </a:rPr>
+                        <a:t>2,764 방전, 방전 단위 5-fold</a:t>
+                      </a:r>
+                    </a:p>
+                  </a:txBody>
+                  <a:tcPr marL="54864" marR="54864" marT="18288" marB="18288" anchor="ctr"/>
+                </a:tc>
+                <a:tc>
+                  <a:txBody>
+                    <a:bodyPr wrap="square"/>
+                    <a:lstStyle/>
+                    <a:p>
+                      <a:r>
+                        <a:rPr sz="1100" b="0">
+                          <a:ea typeface="맑은 고딕"/>
+                          <a:cs typeface="맑은 고딕"/>
+                        </a:rPr>
+                        <a:t>가중 Huber는 §8aq의 "상위 1 % 변화가 제곱질량 46.6 %" 발견과 직결. 우리는 MSE만 씀</a:t>
+                      </a:r>
+                    </a:p>
+                  </a:txBody>
+                  <a:tcPr marL="54864" marR="54864" marT="18288" marB="18288" anchor="ctr"/>
+                </a:tc>
+              </a:tr>
+              <a:tr h="574548">
+                <a:tc>
+                  <a:txBody>
+                    <a:bodyPr wrap="square"/>
+                    <a:lstStyle/>
+                    <a:p>
+                      <a:r>
+                        <a:rPr sz="1100" b="0">
+                          <a:ea typeface="맑은 고딕"/>
+                          <a:cs typeface="맑은 고딕"/>
+                        </a:rPr>
+                        <a:t>FusionMAE (Comm. Phys.)</a:t>
+                      </a:r>
+                    </a:p>
+                  </a:txBody>
+                  <a:tcPr marL="54864" marR="54864" marT="18288" marB="18288" anchor="ctr"/>
+                </a:tc>
+                <a:tc>
+                  <a:txBody>
+                    <a:bodyPr wrap="square"/>
+                    <a:lstStyle/>
+                    <a:p>
+                      <a:r>
+                        <a:rPr sz="1100" b="0">
+                          <a:ea typeface="맑은 고딕"/>
+                          <a:cs typeface="맑은 고딕"/>
+                        </a:rPr>
+                        <a:t>HL-3</a:t>
+                      </a:r>
+                    </a:p>
+                  </a:txBody>
+                  <a:tcPr marL="54864" marR="54864" marT="18288" marB="18288" anchor="ctr"/>
+                </a:tc>
+                <a:tc>
+                  <a:txBody>
+                    <a:bodyPr wrap="square"/>
+                    <a:lstStyle/>
+                    <a:p>
+                      <a:r>
+                        <a:rPr sz="1100" b="0">
+                          <a:ea typeface="맑은 고딕"/>
+                          <a:cs typeface="맑은 고딕"/>
+                        </a:rPr>
+                        <a:t>2026</a:t>
+                      </a:r>
+                    </a:p>
+                  </a:txBody>
+                  <a:tcPr marL="54864" marR="54864" marT="18288" marB="18288" anchor="ctr"/>
+                </a:tc>
+                <a:tc>
+                  <a:txBody>
+                    <a:bodyPr wrap="square"/>
+                    <a:lstStyle/>
+                    <a:p>
+                      <a:r>
+                        <a:rPr sz="1100" b="0">
+                          <a:ea typeface="맑은 고딕"/>
+                          <a:cs typeface="맑은 고딕"/>
+                        </a:rPr>
+                        <a:t>88채널×10 ms 토큰의 마스크 오토인코더</a:t>
+                      </a:r>
+                    </a:p>
+                  </a:txBody>
+                  <a:tcPr marL="54864" marR="54864" marT="18288" marB="18288" anchor="ctr"/>
+                </a:tc>
+                <a:tc>
+                  <a:txBody>
+                    <a:bodyPr wrap="square"/>
+                    <a:lstStyle/>
+                    <a:p>
+                      <a:r>
+                        <a:rPr sz="1100" b="0">
+                          <a:ea typeface="맑은 고딕"/>
+                          <a:cs typeface="맑은 고딕"/>
+                        </a:rPr>
+                        <a:t>Transformer MAE, 결측 채널 재구성 = "가상 백업 진단", 96.7 ~ 97.2 %</a:t>
+                      </a:r>
+                    </a:p>
+                  </a:txBody>
+                  <a:tcPr marL="54864" marR="54864" marT="18288" marB="18288" anchor="ctr"/>
+                </a:tc>
+                <a:tc>
+                  <a:txBody>
+                    <a:bodyPr wrap="square"/>
+                    <a:lstStyle/>
+                    <a:p>
+                      <a:r>
+                        <a:rPr sz="1100" b="0">
+                          <a:ea typeface="맑은 고딕"/>
+                          <a:cs typeface="맑은 고딕"/>
+                        </a:rPr>
+                        <a:t>대규모 HL-3</a:t>
+                      </a:r>
+                    </a:p>
+                  </a:txBody>
+                  <a:tcPr marL="54864" marR="54864" marT="18288" marB="18288" anchor="ctr"/>
+                </a:tc>
+                <a:tc>
+                  <a:txBody>
+                    <a:bodyPr wrap="square"/>
+                    <a:lstStyle/>
+                    <a:p>
+                      <a:r>
+                        <a:rPr sz="1100" b="0">
+                          <a:ea typeface="맑은 고딕"/>
+                          <a:cs typeface="맑은 고딕"/>
+                        </a:rPr>
+                        <a:t>우리 과제를 MAE의 결측 채널 복원으로 보는 프레임. 사전학습 축은 우리 repo에 없음</a:t>
+                      </a:r>
+                    </a:p>
+                  </a:txBody>
+                  <a:tcPr marL="54864" marR="54864" marT="18288" marB="18288" anchor="ctr"/>
+                </a:tc>
+              </a:tr>
+              <a:tr h="747776">
+                <a:tc>
+                  <a:txBody>
+                    <a:bodyPr wrap="square"/>
+                    <a:lstStyle/>
+                    <a:p>
+                      <a:r>
+                        <a:rPr sz="1100" b="0">
+                          <a:ea typeface="맑은 고딕"/>
+                          <a:cs typeface="맑은 고딕"/>
+                        </a:rPr>
+                        <a:t>TokaMind</a:t>
+                      </a:r>
+                    </a:p>
+                  </a:txBody>
+                  <a:tcPr marL="54864" marR="54864" marT="18288" marB="18288" anchor="ctr"/>
+                </a:tc>
+                <a:tc>
+                  <a:txBody>
+                    <a:bodyPr wrap="square"/>
+                    <a:lstStyle/>
+                    <a:p>
+                      <a:r>
+                        <a:rPr sz="1100" b="0">
+                          <a:ea typeface="맑은 고딕"/>
+                          <a:cs typeface="맑은 고딕"/>
+                        </a:rPr>
+                        <a:t>MAST</a:t>
+                      </a:r>
+                    </a:p>
+                  </a:txBody>
+                  <a:tcPr marL="54864" marR="54864" marT="18288" marB="18288" anchor="ctr"/>
+                </a:tc>
+                <a:tc>
+                  <a:txBody>
+                    <a:bodyPr wrap="square"/>
+                    <a:lstStyle/>
+                    <a:p>
+                      <a:r>
+                        <a:rPr sz="1100" b="0">
+                          <a:ea typeface="맑은 고딕"/>
+                          <a:cs typeface="맑은 고딕"/>
+                        </a:rPr>
+                        <a:t>2026</a:t>
+                      </a:r>
+                    </a:p>
+                  </a:txBody>
+                  <a:tcPr marL="54864" marR="54864" marT="18288" marB="18288" anchor="ctr"/>
+                </a:tc>
+                <a:tc>
+                  <a:txBody>
+                    <a:bodyPr wrap="square"/>
+                    <a:lstStyle/>
+                    <a:p>
+                      <a:r>
+                        <a:rPr sz="1100" b="0">
+                          <a:ea typeface="맑은 고딕"/>
+                          <a:cs typeface="맑은 고딕"/>
+                        </a:rPr>
+                        <a:t>멀티모달 파운데이션 모델</a:t>
+                      </a:r>
+                    </a:p>
+                  </a:txBody>
+                  <a:tcPr marL="54864" marR="54864" marT="18288" marB="18288" anchor="ctr"/>
+                </a:tc>
+                <a:tc>
+                  <a:txBody>
+                    <a:bodyPr wrap="square"/>
+                    <a:lstStyle/>
+                    <a:p>
+                      <a:r>
+                        <a:rPr sz="1100" b="0">
+                          <a:ea typeface="맑은 고딕"/>
+                          <a:cs typeface="맑은 고딕"/>
+                        </a:rPr>
+                        <a:t>7M 미만 트랜스포머, DCT 임베딩, 5 ms 청크로 0.2 ~ 500 kHz 다중 샘플링률 처리, 결측 마스크</a:t>
+                      </a:r>
+                    </a:p>
+                  </a:txBody>
+                  <a:tcPr marL="54864" marR="54864" marT="18288" marB="18288" anchor="ctr"/>
+                </a:tc>
+                <a:tc>
+                  <a:txBody>
+                    <a:bodyPr wrap="square"/>
+                    <a:lstStyle/>
+                    <a:p>
+                      <a:r>
+                        <a:rPr sz="1100" b="0">
+                          <a:ea typeface="맑은 고딕"/>
+                          <a:cs typeface="맑은 고딕"/>
+                        </a:rPr>
+                        <a:t>11,573 방전</a:t>
+                      </a:r>
+                    </a:p>
+                  </a:txBody>
+                  <a:tcPr marL="54864" marR="54864" marT="18288" marB="18288" anchor="ctr"/>
+                </a:tc>
+                <a:tc>
+                  <a:txBody>
+                    <a:bodyPr wrap="square"/>
+                    <a:lstStyle/>
+                    <a:p>
+                      <a:r>
+                        <a:rPr sz="1100" b="0">
+                          <a:ea typeface="맑은 고딕"/>
+                          <a:cs typeface="맑은 고딕"/>
+                        </a:rPr>
+                        <a:t>사전학습 후 미세조정 이득: 전체 +0.017 NRMSE, 프로파일 그룹은 -0.005, MHD만 +0.05. 프로파일류에는 사전학습이 거의 안 듦</a:t>
                       </a:r>
                     </a:p>
                   </a:txBody>
@@ -25088,23 +25207,23 @@
                           <a:ea typeface="맑은 고딕"/>
                           <a:cs typeface="맑은 고딕"/>
                         </a:rPr>
-                        <a:t>WEST</a:t>
-                      </a:r>
-                    </a:p>
-                  </a:txBody>
-                  <a:tcPr marL="54864" marR="54864" marT="18288" marB="18288" anchor="ctr"/>
-                </a:tc>
-                <a:tc>
-                  <a:txBody>
-                    <a:bodyPr wrap="square"/>
-                    <a:lstStyle/>
-                    <a:p>
-                      <a:r>
-                        <a:rPr sz="1100" b="0">
-                          <a:ea typeface="맑은 고딕"/>
-                          <a:cs typeface="맑은 고딕"/>
-                        </a:rPr>
-                        <a:t>WEST</a:t>
+                        <a:t>TokaMark</a:t>
+                      </a:r>
+                    </a:p>
+                  </a:txBody>
+                  <a:tcPr marL="54864" marR="54864" marT="18288" marB="18288" anchor="ctr"/>
+                </a:tc>
+                <a:tc>
+                  <a:txBody>
+                    <a:bodyPr wrap="square"/>
+                    <a:lstStyle/>
+                    <a:p>
+                      <a:r>
+                        <a:rPr sz="1100" b="0">
+                          <a:ea typeface="맑은 고딕"/>
+                          <a:cs typeface="맑은 고딕"/>
+                        </a:rPr>
+                        <a:t>MAST</a:t>
                       </a:r>
                     </a:p>
                   </a:txBody>
@@ -25136,397 +25255,55 @@
                           <a:ea typeface="맑은 고딕"/>
                           <a:cs typeface="맑은 고딕"/>
                         </a:rPr>
-                        <a:t>사전 방전 설정으로 전역 파라미터</a:t>
-                      </a:r>
-                    </a:p>
-                  </a:txBody>
-                  <a:tcPr marL="54864" marR="54864" marT="18288" marB="18288" anchor="ctr"/>
-                </a:tc>
-                <a:tc>
-                  <a:txBody>
-                    <a:bodyPr wrap="square"/>
-                    <a:lstStyle/>
-                    <a:p>
-                      <a:r>
-                        <a:rPr sz="1100" b="0">
-                          <a:ea typeface="맑은 고딕"/>
-                          <a:cs typeface="맑은 고딕"/>
-                        </a:rPr>
-                        <a:t>Transformer 0.0096 &lt; LSTM 0.015 &lt; MLP 0.022 MSE</a:t>
-                      </a:r>
-                    </a:p>
-                  </a:txBody>
-                  <a:tcPr marL="54864" marR="54864" marT="18288" marB="18288" anchor="ctr"/>
-                </a:tc>
-                <a:tc>
-                  <a:txBody>
-                    <a:bodyPr wrap="square"/>
-                    <a:lstStyle/>
-                    <a:p>
-                      <a:r>
-                        <a:rPr sz="1100" b="0">
-                          <a:ea typeface="맑은 고딕"/>
-                          <a:cs typeface="맑은 고딕"/>
-                        </a:rPr>
-                        <a:t>550 방전, 1.2만 윈도</a:t>
-                      </a:r>
-                    </a:p>
-                  </a:txBody>
-                  <a:tcPr marL="54864" marR="54864" marT="18288" marB="18288" anchor="ctr"/>
-                </a:tc>
-                <a:tc>
-                  <a:txBody>
-                    <a:bodyPr wrap="square"/>
-                    <a:lstStyle/>
-                    <a:p>
-                      <a:r>
-                        <a:rPr sz="1100" b="0">
-                          <a:ea typeface="맑은 고딕"/>
-                          <a:cs typeface="맑은 고딕"/>
-                        </a:rPr>
-                        <a:t>작은 데이터에서 Transformer가 이긴 사례. 단 10 ~ 70 s 장기 의존 과제</a:t>
-                      </a:r>
-                    </a:p>
-                  </a:txBody>
-                  <a:tcPr marL="54864" marR="54864" marT="18288" marB="18288" anchor="ctr"/>
-                </a:tc>
-              </a:tr>
-              <a:tr h="747776">
-                <a:tc>
-                  <a:txBody>
-                    <a:bodyPr wrap="square"/>
-                    <a:lstStyle/>
-                    <a:p>
-                      <a:r>
-                        <a:rPr sz="1100" b="0">
-                          <a:ea typeface="맑은 고딕"/>
-                          <a:cs typeface="맑은 고딕"/>
-                        </a:rPr>
-                        <a:t>EAST XCS ANN (NF)</a:t>
-                      </a:r>
-                    </a:p>
-                  </a:txBody>
-                  <a:tcPr marL="54864" marR="54864" marT="18288" marB="18288" anchor="ctr"/>
-                </a:tc>
-                <a:tc>
-                  <a:txBody>
-                    <a:bodyPr wrap="square"/>
-                    <a:lstStyle/>
-                    <a:p>
-                      <a:r>
-                        <a:rPr sz="1100" b="0">
-                          <a:ea typeface="맑은 고딕"/>
-                          <a:cs typeface="맑은 고딕"/>
-                        </a:rPr>
-                        <a:t>EAST</a:t>
-                      </a:r>
-                    </a:p>
-                  </a:txBody>
-                  <a:tcPr marL="54864" marR="54864" marT="18288" marB="18288" anchor="ctr"/>
-                </a:tc>
-                <a:tc>
-                  <a:txBody>
-                    <a:bodyPr wrap="square"/>
-                    <a:lstStyle/>
-                    <a:p>
-                      <a:r>
-                        <a:rPr sz="1100" b="0">
-                          <a:ea typeface="맑은 고딕"/>
-                          <a:cs typeface="맑은 고딕"/>
-                        </a:rPr>
-                        <a:t>2024</a:t>
-                      </a:r>
-                    </a:p>
-                  </a:txBody>
-                  <a:tcPr marL="54864" marR="54864" marT="18288" marB="18288" anchor="ctr"/>
-                </a:tc>
-                <a:tc>
-                  <a:txBody>
-                    <a:bodyPr wrap="square"/>
-                    <a:lstStyle/>
-                    <a:p>
-                      <a:r>
-                        <a:rPr sz="1100" b="0">
-                          <a:ea typeface="맑은 고딕"/>
-                          <a:cs typeface="맑은 고딕"/>
-                        </a:rPr>
-                        <a:t>스펙트럼으로 Ti·회전</a:t>
-                      </a:r>
-                    </a:p>
-                  </a:txBody>
-                  <a:tcPr marL="54864" marR="54864" marT="18288" marB="18288" anchor="ctr"/>
-                </a:tc>
-                <a:tc>
-                  <a:txBody>
-                    <a:bodyPr wrap="square"/>
-                    <a:lstStyle/>
-                    <a:p>
-                      <a:r>
-                        <a:rPr sz="1100" b="0">
-                          <a:ea typeface="맑은 고딕"/>
-                          <a:cs typeface="맑은 고딕"/>
-                        </a:rPr>
-                        <a:t>2×9 DNN, 31k CNN, R² 0.96</a:t>
-                      </a:r>
-                    </a:p>
-                  </a:txBody>
-                  <a:tcPr marL="54864" marR="54864" marT="18288" marB="18288" anchor="ctr"/>
-                </a:tc>
-                <a:tc>
-                  <a:txBody>
-                    <a:bodyPr wrap="square"/>
-                    <a:lstStyle/>
-                    <a:p>
-                      <a:r>
-                        <a:rPr sz="1100" b="0">
-                          <a:ea typeface="맑은 고딕"/>
-                          <a:cs typeface="맑은 고딕"/>
-                        </a:rPr>
-                        <a:t>530 방전</a:t>
-                      </a:r>
-                    </a:p>
-                  </a:txBody>
-                  <a:tcPr marL="54864" marR="54864" marT="18288" marB="18288" anchor="ctr"/>
-                </a:tc>
-                <a:tc>
-                  <a:txBody>
-                    <a:bodyPr wrap="square"/>
-                    <a:lstStyle/>
-                    <a:p>
-                      <a:r>
-                        <a:rPr sz="1100" b="0">
-                          <a:ea typeface="맑은 고딕"/>
-                          <a:cs typeface="맑은 고딕"/>
-                        </a:rPr>
-                        <a:t>회전을 예측하는 유일한 논문도 입력이 회전 측정 자체(스펙트럼). 우리 V_rot 경로가 어떤 입력을 확보해야 하는지를 가리킴 — B.6 μs Mirnov · NBI 토크 채널</a:t>
-                      </a:r>
-                    </a:p>
-                  </a:txBody>
-                  <a:tcPr marL="54864" marR="54864" marT="18288" marB="18288" anchor="ctr"/>
-                </a:tc>
-              </a:tr>
-              <a:tr h="401320">
-                <a:tc>
-                  <a:txBody>
-                    <a:bodyPr wrap="square"/>
-                    <a:lstStyle/>
-                    <a:p>
-                      <a:r>
-                        <a:rPr sz="1100" b="0">
-                          <a:ea typeface="맑은 고딕"/>
-                          <a:cs typeface="맑은 고딕"/>
-                        </a:rPr>
-                        <a:t>Abbate 등 (NF)</a:t>
-                      </a:r>
-                    </a:p>
-                  </a:txBody>
-                  <a:tcPr marL="54864" marR="54864" marT="18288" marB="18288" anchor="ctr"/>
-                </a:tc>
-                <a:tc>
-                  <a:txBody>
-                    <a:bodyPr wrap="square"/>
-                    <a:lstStyle/>
-                    <a:p>
-                      <a:r>
-                        <a:rPr sz="1100" b="0">
-                          <a:ea typeface="맑은 고딕"/>
-                          <a:cs typeface="맑은 고딕"/>
-                        </a:rPr>
-                        <a:t>DIII-D · AUG</a:t>
-                      </a:r>
-                    </a:p>
-                  </a:txBody>
-                  <a:tcPr marL="54864" marR="54864" marT="18288" marB="18288" anchor="ctr"/>
-                </a:tc>
-                <a:tc>
-                  <a:txBody>
-                    <a:bodyPr wrap="square"/>
-                    <a:lstStyle/>
-                    <a:p>
-                      <a:r>
-                        <a:rPr sz="1100" b="0">
-                          <a:ea typeface="맑은 고딕"/>
-                          <a:cs typeface="맑은 고딕"/>
-                        </a:rPr>
-                        <a:t>2025</a:t>
-                      </a:r>
-                    </a:p>
-                  </a:txBody>
-                  <a:tcPr marL="54864" marR="54864" marT="18288" marB="18288" anchor="ctr"/>
-                </a:tc>
-                <a:tc>
-                  <a:txBody>
-                    <a:bodyPr wrap="square"/>
-                    <a:lstStyle/>
-                    <a:p>
-                      <a:r>
-                        <a:rPr sz="1100" b="0">
-                          <a:ea typeface="맑은 고딕"/>
-                          <a:cs typeface="맑은 고딕"/>
-                        </a:rPr>
-                        <a:t>물리+데이터 메타학습</a:t>
-                      </a:r>
-                    </a:p>
-                  </a:txBody>
-                  <a:tcPr marL="54864" marR="54864" marT="18288" marB="18288" anchor="ctr"/>
-                </a:tc>
-                <a:tc>
-                  <a:txBody>
-                    <a:bodyPr wrap="square"/>
-                    <a:lstStyle/>
-                    <a:p>
-                      <a:r>
-                        <a:rPr sz="1100" b="0">
-                          <a:ea typeface="맑은 고딕"/>
-                          <a:cs typeface="맑은 고딕"/>
-                        </a:rPr>
-                        <a:t>두 모델을 메타학습으로 결합, 저전류 → 고전류 외삽</a:t>
-                      </a:r>
-                    </a:p>
-                  </a:txBody>
-                  <a:tcPr marL="54864" marR="54864" marT="18288" marB="18288" anchor="ctr"/>
-                </a:tc>
-                <a:tc>
-                  <a:txBody>
-                    <a:bodyPr wrap="square"/>
-                    <a:lstStyle/>
-                    <a:p>
-                      <a:r>
-                        <a:rPr sz="1100" b="0">
-                          <a:ea typeface="맑은 고딕"/>
-                          <a:cs typeface="맑은 고딕"/>
-                        </a:rPr>
-                        <a:t>외삽 5 ~ 10 % 개선</a:t>
-                      </a:r>
-                    </a:p>
-                  </a:txBody>
-                  <a:tcPr marL="54864" marR="54864" marT="18288" marB="18288" anchor="ctr"/>
-                </a:tc>
-                <a:tc>
-                  <a:txBody>
-                    <a:bodyPr wrap="square"/>
-                    <a:lstStyle/>
-                    <a:p>
-                      <a:r>
-                        <a:rPr sz="1100" b="0">
-                          <a:ea typeface="맑은 고딕"/>
-                          <a:cs typeface="맑은 고딕"/>
-                        </a:rPr>
-                        <a:t>물리 모델은 외삽 담당</a:t>
-                      </a:r>
-                    </a:p>
-                  </a:txBody>
-                  <a:tcPr marL="54864" marR="54864" marT="18288" marB="18288" anchor="ctr"/>
-                </a:tc>
-              </a:tr>
-              <a:tr h="401320">
-                <a:tc>
-                  <a:txBody>
-                    <a:bodyPr wrap="square"/>
-                    <a:lstStyle/>
-                    <a:p>
-                      <a:r>
-                        <a:rPr sz="1100" b="0">
-                          <a:ea typeface="맑은 고딕"/>
-                          <a:cs typeface="맑은 고딕"/>
-                        </a:rPr>
-                        <a:t>코일 shot-to-shot</a:t>
-                      </a:r>
-                    </a:p>
-                  </a:txBody>
-                  <a:tcPr marL="54864" marR="54864" marT="18288" marB="18288" anchor="ctr"/>
-                </a:tc>
-                <a:tc>
-                  <a:txBody>
-                    <a:bodyPr wrap="square"/>
-                    <a:lstStyle/>
-                    <a:p>
-                      <a:r>
-                        <a:rPr sz="1100" b="0">
-                          <a:ea typeface="맑은 고딕"/>
-                          <a:cs typeface="맑은 고딕"/>
-                        </a:rPr>
-                        <a:t>DIII-D</a:t>
-                      </a:r>
-                    </a:p>
-                  </a:txBody>
-                  <a:tcPr marL="54864" marR="54864" marT="18288" marB="18288" anchor="ctr"/>
-                </a:tc>
-                <a:tc>
-                  <a:txBody>
-                    <a:bodyPr wrap="square"/>
-                    <a:lstStyle/>
-                    <a:p>
-                      <a:r>
-                        <a:rPr sz="1100" b="0">
-                          <a:ea typeface="맑은 고딕"/>
-                          <a:cs typeface="맑은 고딕"/>
-                        </a:rPr>
-                        <a:t>2026</a:t>
-                      </a:r>
-                    </a:p>
-                  </a:txBody>
-                  <a:tcPr marL="54864" marR="54864" marT="18288" marB="18288" anchor="ctr"/>
-                </a:tc>
-                <a:tc>
-                  <a:txBody>
-                    <a:bodyPr wrap="square"/>
-                    <a:lstStyle/>
-                    <a:p>
-                      <a:r>
-                        <a:rPr sz="1100" b="0">
-                          <a:ea typeface="맑은 고딕"/>
-                          <a:cs typeface="맑은 고딕"/>
-                        </a:rPr>
-                        <a:t>방전 간 하드웨어 이동</a:t>
-                      </a:r>
-                    </a:p>
-                  </a:txBody>
-                  <a:tcPr marL="54864" marR="54864" marT="18288" marB="18288" anchor="ctr"/>
-                </a:tc>
-                <a:tc>
-                  <a:txBody>
-                    <a:bodyPr wrap="square"/>
-                    <a:lstStyle/>
-                    <a:p>
-                      <a:r>
-                        <a:rPr sz="1100" b="0">
-                          <a:ea typeface="맑은 고딕"/>
-                          <a:cs typeface="맑은 고딕"/>
-                        </a:rPr>
-                        <a:t>토로이달 자장 코일 디지털 트윈 + 온라인 학습</a:t>
-                      </a:r>
-                    </a:p>
-                  </a:txBody>
-                  <a:tcPr marL="54864" marR="54864" marT="18288" marB="18288" anchor="ctr"/>
-                </a:tc>
-                <a:tc>
-                  <a:txBody>
-                    <a:bodyPr wrap="square"/>
-                    <a:lstStyle/>
-                    <a:p>
-                      <a:r>
-                        <a:rPr sz="1100" b="0">
-                          <a:ea typeface="맑은 고딕"/>
-                          <a:cs typeface="맑은 고딕"/>
-                        </a:rPr>
-                        <a:t>정적 모델 대비 오차 80 % 감소</a:t>
-                      </a:r>
-                    </a:p>
-                  </a:txBody>
-                  <a:tcPr marL="54864" marR="54864" marT="18288" marB="18288" anchor="ctr"/>
-                </a:tc>
-                <a:tc>
-                  <a:txBody>
-                    <a:bodyPr wrap="square"/>
-                    <a:lstStyle/>
-                    <a:p>
-                      <a:r>
-                        <a:rPr sz="1100" b="0">
-                          <a:ea typeface="맑은 고딕"/>
-                          <a:cs typeface="맑은 고딕"/>
-                        </a:rPr>
-                        <a:t>캠페인 드리프트(§8n)의 처방이 우리 shot별 표준화와 같은 방향</a:t>
+                        <a:t>14개 과제 벤치마크</a:t>
+                      </a:r>
+                    </a:p>
+                  </a:txBody>
+                  <a:tcPr marL="54864" marR="54864" marT="18288" marB="18288" anchor="ctr"/>
+                </a:tc>
+                <a:tc>
+                  <a:txBody>
+                    <a:bodyPr wrap="square"/>
+                    <a:lstStyle/>
+                    <a:p>
+                      <a:r>
+                        <a:rPr sz="1100" b="0">
+                          <a:ea typeface="맑은 고딕"/>
+                          <a:cs typeface="맑은 고딕"/>
+                        </a:rPr>
+                        <a:t>다중 분기 conv 인코더-디코더 베이스라인, shot 단위 분할</a:t>
+                      </a:r>
+                    </a:p>
+                  </a:txBody>
+                  <a:tcPr marL="54864" marR="54864" marT="18288" marB="18288" anchor="ctr"/>
+                </a:tc>
+                <a:tc>
+                  <a:txBody>
+                    <a:bodyPr wrap="square"/>
+                    <a:lstStyle/>
+                    <a:p>
+                      <a:r>
+                        <a:rPr sz="1100" b="0">
+                          <a:ea typeface="맑은 고딕"/>
+                          <a:cs typeface="맑은 고딕"/>
+                        </a:rPr>
+                        <a:t>위와 동일</a:t>
+                      </a:r>
+                    </a:p>
+                  </a:txBody>
+                  <a:tcPr marL="54864" marR="54864" marT="18288" marB="18288" anchor="ctr"/>
+                </a:tc>
+                <a:tc>
+                  <a:txBody>
+                    <a:bodyPr wrap="square"/>
+                    <a:lstStyle/>
+                    <a:p>
+                      <a:r>
+                        <a:rPr sz="1100" b="0">
+                          <a:ea typeface="맑은 고딕"/>
+                          <a:cs typeface="맑은 고딕"/>
+                        </a:rPr>
+                        <a:t>프로파일 동역학 NRMSE 0.34, MHD 0.48. 커뮤니티 기준선도 conv</a:t>
                       </a:r>
                     </a:p>
                   </a:txBody>
@@ -25580,7 +25357,7 @@
                 <a:ea typeface="맑은 고딕"/>
                 <a:cs typeface="맑은 고딕"/>
               </a:rPr>
-              <a:t>문헌 조사 (1/4, 3쪽): 핵융합의 진단-대-진단 추정은 여전히 단순한 구조가 주류이다</a:t>
+              <a:t>문헌 조사 (1/4, 2쪽): 핵융합의 진단-대-진단 추정은 여전히 단순한 구조가 주류이다</a:t>
             </a:r>
           </a:p>
         </p:txBody>
@@ -25632,7 +25409,7 @@
         </p:nvGraphicFramePr>
         <p:xfrm>
           <a:off x="585216" y="2400807"/>
-          <a:ext cx="11027661" cy="3146805"/>
+          <a:ext cx="11027661" cy="2800604"/>
         </p:xfrm>
         <a:graphic>
           <a:graphicData uri="http://schemas.openxmlformats.org/drawingml/2006/table">
@@ -25656,7 +25433,7 @@
                     <a:lstStyle/>
                     <a:p>
                       <a:r>
-                        <a:rPr sz="850" b="1">
+                        <a:rPr sz="1100" b="1">
                           <a:ea typeface="맑은 고딕"/>
                           <a:cs typeface="맑은 고딕"/>
                         </a:rPr>
@@ -25672,7 +25449,7 @@
                     <a:lstStyle/>
                     <a:p>
                       <a:r>
-                        <a:rPr sz="850" b="1">
+                        <a:rPr sz="1100" b="1">
                           <a:ea typeface="맑은 고딕"/>
                           <a:cs typeface="맑은 고딕"/>
                         </a:rPr>
@@ -25688,7 +25465,7 @@
                     <a:lstStyle/>
                     <a:p>
                       <a:r>
-                        <a:rPr sz="850" b="1">
+                        <a:rPr sz="1100" b="1">
                           <a:ea typeface="맑은 고딕"/>
                           <a:cs typeface="맑은 고딕"/>
                         </a:rPr>
@@ -25704,7 +25481,7 @@
                     <a:lstStyle/>
                     <a:p>
                       <a:r>
-                        <a:rPr sz="850" b="1">
+                        <a:rPr sz="1100" b="1">
                           <a:ea typeface="맑은 고딕"/>
                           <a:cs typeface="맑은 고딕"/>
                         </a:rPr>
@@ -25720,7 +25497,7 @@
                     <a:lstStyle/>
                     <a:p>
                       <a:r>
-                        <a:rPr sz="850" b="1">
+                        <a:rPr sz="1100" b="1">
                           <a:ea typeface="맑은 고딕"/>
                           <a:cs typeface="맑은 고딕"/>
                         </a:rPr>
@@ -25736,7 +25513,7 @@
                     <a:lstStyle/>
                     <a:p>
                       <a:r>
-                        <a:rPr sz="850" b="1">
+                        <a:rPr sz="1100" b="1">
                           <a:ea typeface="맑은 고딕"/>
                           <a:cs typeface="맑은 고딕"/>
                         </a:rPr>
@@ -25752,7 +25529,7 @@
                     <a:lstStyle/>
                     <a:p>
                       <a:r>
-                        <a:rPr sz="850" b="1">
+                        <a:rPr sz="1100" b="1">
                           <a:ea typeface="맑은 고딕"/>
                           <a:cs typeface="맑은 고딕"/>
                         </a:rPr>
@@ -25763,30 +25540,30 @@
                   <a:tcPr marL="54864" marR="54864" marT="18288" marB="18288" anchor="ctr"/>
                 </a:tc>
               </a:tr>
-              <a:tr h="590295">
-                <a:tc>
-                  <a:txBody>
-                    <a:bodyPr wrap="square"/>
-                    <a:lstStyle/>
-                    <a:p>
-                      <a:r>
-                        <a:rPr sz="850" b="0">
-                          <a:ea typeface="맑은 고딕"/>
-                          <a:cs typeface="맑은 고딕"/>
-                        </a:rPr>
-                        <a:t>NN-CES (Fusion Eng. Des. 222:115518)</a:t>
-                      </a:r>
-                    </a:p>
-                  </a:txBody>
-                  <a:tcPr marL="54864" marR="54864" marT="18288" marB="18288" anchor="ctr"/>
-                </a:tc>
-                <a:tc>
-                  <a:txBody>
-                    <a:bodyPr wrap="square"/>
-                    <a:lstStyle/>
-                    <a:p>
-                      <a:r>
-                        <a:rPr sz="850" b="0">
+              <a:tr h="401320">
+                <a:tc>
+                  <a:txBody>
+                    <a:bodyPr wrap="square"/>
+                    <a:lstStyle/>
+                    <a:p>
+                      <a:r>
+                        <a:rPr sz="1100" b="0">
+                          <a:ea typeface="맑은 고딕"/>
+                          <a:cs typeface="맑은 고딕"/>
+                        </a:rPr>
+                        <a:t>PanoMHD</a:t>
+                      </a:r>
+                    </a:p>
+                  </a:txBody>
+                  <a:tcPr marL="54864" marR="54864" marT="18288" marB="18288" anchor="ctr"/>
+                </a:tc>
+                <a:tc>
+                  <a:txBody>
+                    <a:bodyPr wrap="square"/>
+                    <a:lstStyle/>
+                    <a:p>
+                      <a:r>
+                        <a:rPr sz="1100" b="0">
                           <a:ea typeface="맑은 고딕"/>
                           <a:cs typeface="맑은 고딕"/>
                         </a:rPr>
@@ -25802,121 +25579,463 @@
                     <a:lstStyle/>
                     <a:p>
                       <a:r>
-                        <a:rPr sz="850" b="0">
-                          <a:ea typeface="맑은 고딕"/>
-                          <a:cs typeface="맑은 고딕"/>
-                        </a:rPr>
-                        <a:t>2025/26</a:t>
-                      </a:r>
-                    </a:p>
-                  </a:txBody>
-                  <a:tcPr marL="54864" marR="54864" marT="18288" marB="18288" anchor="ctr"/>
-                </a:tc>
-                <a:tc>
-                  <a:txBody>
-                    <a:bodyPr wrap="square"/>
-                    <a:lstStyle/>
-                    <a:p>
-                      <a:r>
-                        <a:rPr sz="850" b="0">
-                          <a:ea typeface="맑은 고딕"/>
-                          <a:cs typeface="맑은 고딕"/>
-                        </a:rPr>
-                        <a:t>CES 스펙트럼에서 Ti·회전을 직접 추출한다 (빔 변조 없이)</a:t>
-                      </a:r>
-                    </a:p>
-                  </a:txBody>
-                  <a:tcPr marL="54864" marR="54864" marT="18288" marB="18288" anchor="ctr"/>
-                </a:tc>
-                <a:tc>
-                  <a:txBody>
-                    <a:bodyPr wrap="square"/>
-                    <a:lstStyle/>
-                    <a:p>
-                      <a:r>
-                        <a:rPr sz="850" b="0">
-                          <a:ea typeface="맑은 고딕"/>
-                          <a:cs typeface="맑은 고딕"/>
-                        </a:rPr>
-                        <a:t>물리 제약을 넣은 신경망이 빔 변조 배경 차감을 대체한다</a:t>
-                      </a:r>
-                    </a:p>
-                  </a:txBody>
-                  <a:tcPr marL="54864" marR="54864" marT="18288" marB="18288" anchor="ctr"/>
-                </a:tc>
-                <a:tc>
-                  <a:txBody>
-                    <a:bodyPr wrap="square"/>
-                    <a:lstStyle/>
-                    <a:p>
-                      <a:r>
-                        <a:rPr sz="850" b="0">
-                          <a:ea typeface="맑은 고딕"/>
-                          <a:cs typeface="맑은 고딕"/>
-                        </a:rPr>
-                        <a:t>KSTAR 약 150,000 프레임, L·H·locked·RMP 모드</a:t>
-                      </a:r>
-                    </a:p>
-                  </a:txBody>
-                  <a:tcPr marL="54864" marR="54864" marT="18288" marB="18288" anchor="ctr"/>
-                </a:tc>
-                <a:tc>
-                  <a:txBody>
-                    <a:bodyPr wrap="square"/>
-                    <a:lstStyle/>
-                    <a:p>
-                      <a:r>
-                        <a:rPr sz="850" b="0">
-                          <a:ea typeface="맑은 고딕"/>
-                          <a:cs typeface="맑은 고딕"/>
-                        </a:rPr>
-                        <a:t>우리 장치·우리 진단의 가장 가까운 선행 연구. 다만 CES 측정이 있는 시각을 더 잘 읽는 것이고, 측정이 없는 시각을 채우는 우리 문제와 다르다. 빔 변조가 필요 없다는 점은 결측 자체를 줄일 수 있어 CES 재분석 레버의 근거가 된다</a:t>
+                        <a:rPr sz="1100" b="0">
+                          <a:ea typeface="맑은 고딕"/>
+                          <a:cs typeface="맑은 고딕"/>
+                        </a:rPr>
+                        <a:t>2026</a:t>
+                      </a:r>
+                    </a:p>
+                  </a:txBody>
+                  <a:tcPr marL="54864" marR="54864" marT="18288" marB="18288" anchor="ctr"/>
+                </a:tc>
+                <a:tc>
+                  <a:txBody>
+                    <a:bodyPr wrap="square"/>
+                    <a:lstStyle/>
+                    <a:p>
+                      <a:r>
+                        <a:rPr sz="1100" b="0">
+                          <a:ea typeface="맑은 고딕"/>
+                          <a:cs typeface="맑은 고딕"/>
+                        </a:rPr>
+                        <a:t>Mirnov만으로 βN·H89·L/H</a:t>
+                      </a:r>
+                    </a:p>
+                  </a:txBody>
+                  <a:tcPr marL="54864" marR="54864" marT="18288" marB="18288" anchor="ctr"/>
+                </a:tc>
+                <a:tc>
+                  <a:txBody>
+                    <a:bodyPr wrap="square"/>
+                    <a:lstStyle/>
+                    <a:p>
+                      <a:r>
+                        <a:rPr sz="1100" b="0">
+                          <a:ea typeface="맑은 고딕"/>
+                          <a:cs typeface="맑은 고딕"/>
+                        </a:rPr>
+                        <a:t>VQ-VAE 토큰 + 457M GPT-2</a:t>
+                      </a:r>
+                    </a:p>
+                  </a:txBody>
+                  <a:tcPr marL="54864" marR="54864" marT="18288" marB="18288" anchor="ctr"/>
+                </a:tc>
+                <a:tc>
+                  <a:txBody>
+                    <a:bodyPr wrap="square"/>
+                    <a:lstStyle/>
+                    <a:p>
+                      <a:r>
+                        <a:rPr sz="1100" b="0">
+                          <a:ea typeface="맑은 고딕"/>
+                          <a:cs typeface="맑은 고딕"/>
+                        </a:rPr>
+                        <a:t>978 방전, 2 MHz 원시 MC</a:t>
+                      </a:r>
+                    </a:p>
+                  </a:txBody>
+                  <a:tcPr marL="54864" marR="54864" marT="18288" marB="18288" anchor="ctr"/>
+                </a:tc>
+                <a:tc>
+                  <a:txBody>
+                    <a:bodyPr wrap="square"/>
+                    <a:lstStyle/>
+                    <a:p>
+                      <a:r>
+                        <a:rPr sz="1100" b="0">
+                          <a:ea typeface="맑은 고딕"/>
+                          <a:cs typeface="맑은 고딕"/>
+                        </a:rPr>
+                        <a:t>KSTAR에서 이산 코드북이 작동한 선례. 단 원시 μs MC 기준이라 B.6가 전제</a:t>
                       </a:r>
                     </a:p>
                   </a:txBody>
                   <a:tcPr marL="54864" marR="54864" marT="18288" marB="18288" anchor="ctr"/>
                 </a:tc>
               </a:tr>
-              <a:tr h="456438">
-                <a:tc>
-                  <a:txBody>
-                    <a:bodyPr wrap="square"/>
-                    <a:lstStyle/>
-                    <a:p>
-                      <a:r>
-                        <a:rPr sz="850" b="0">
-                          <a:ea typeface="맑은 고딕"/>
-                          <a:cs typeface="맑은 고딕"/>
-                        </a:rPr>
-                        <a:t>SVMR + GPR 프로파일 추론 (NF 64:106052)</a:t>
-                      </a:r>
-                    </a:p>
-                  </a:txBody>
-                  <a:tcPr marL="54864" marR="54864" marT="18288" marB="18288" anchor="ctr"/>
-                </a:tc>
-                <a:tc>
-                  <a:txBody>
-                    <a:bodyPr wrap="square"/>
-                    <a:lstStyle/>
-                    <a:p>
-                      <a:r>
-                        <a:rPr sz="850" b="0">
-                          <a:ea typeface="맑은 고딕"/>
-                          <a:cs typeface="맑은 고딕"/>
-                        </a:rPr>
-                        <a:t>KSTAR</a:t>
-                      </a:r>
-                    </a:p>
-                  </a:txBody>
-                  <a:tcPr marL="54864" marR="54864" marT="18288" marB="18288" anchor="ctr"/>
-                </a:tc>
-                <a:tc>
-                  <a:txBody>
-                    <a:bodyPr wrap="square"/>
-                    <a:lstStyle/>
-                    <a:p>
-                      <a:r>
-                        <a:rPr sz="850" b="0">
+              <a:tr h="401320">
+                <a:tc>
+                  <a:txBody>
+                    <a:bodyPr wrap="square"/>
+                    <a:lstStyle/>
+                    <a:p>
+                      <a:r>
+                        <a:rPr sz="1100" b="0">
+                          <a:ea typeface="맑은 고딕"/>
+                          <a:cs typeface="맑은 고딕"/>
+                        </a:rPr>
+                        <a:t>멀티모달 VAE</a:t>
+                      </a:r>
+                    </a:p>
+                  </a:txBody>
+                  <a:tcPr marL="54864" marR="54864" marT="18288" marB="18288" anchor="ctr"/>
+                </a:tc>
+                <a:tc>
+                  <a:txBody>
+                    <a:bodyPr wrap="square"/>
+                    <a:lstStyle/>
+                    <a:p>
+                      <a:r>
+                        <a:rPr sz="1100" b="0">
+                          <a:ea typeface="맑은 고딕"/>
+                          <a:cs typeface="맑은 고딕"/>
+                        </a:rPr>
+                        <a:t>TCV</a:t>
+                      </a:r>
+                    </a:p>
+                  </a:txBody>
+                  <a:tcPr marL="54864" marR="54864" marT="18288" marB="18288" anchor="ctr"/>
+                </a:tc>
+                <a:tc>
+                  <a:txBody>
+                    <a:bodyPr wrap="square"/>
+                    <a:lstStyle/>
+                    <a:p>
+                      <a:r>
+                        <a:rPr sz="1100" b="0">
+                          <a:ea typeface="맑은 고딕"/>
+                          <a:cs typeface="맑은 고딕"/>
+                        </a:rPr>
+                        <a:t>2025</a:t>
+                      </a:r>
+                    </a:p>
+                  </a:txBody>
+                  <a:tcPr marL="54864" marR="54864" marT="18288" marB="18288" anchor="ctr"/>
+                </a:tc>
+                <a:tc>
+                  <a:txBody>
+                    <a:bodyPr wrap="square"/>
+                    <a:lstStyle/>
+                    <a:p>
+                      <a:r>
+                        <a:rPr sz="1100" b="0">
+                          <a:ea typeface="맑은 고딕"/>
+                          <a:cs typeface="맑은 고딕"/>
+                        </a:rPr>
+                        <a:t>상태 감시·붕괴 유형</a:t>
+                      </a:r>
+                    </a:p>
+                  </a:txBody>
+                  <a:tcPr marL="54864" marR="54864" marT="18288" marB="18288" anchor="ctr"/>
+                </a:tc>
+                <a:tc>
+                  <a:txBody>
+                    <a:bodyPr wrap="square"/>
+                    <a:lstStyle/>
+                    <a:p>
+                      <a:r>
+                        <a:rPr sz="1100" b="0">
+                          <a:ea typeface="맑은 고딕"/>
+                          <a:cs typeface="맑은 고딕"/>
+                        </a:rPr>
+                        <a:t>모달리티별 인코더의 순차 VAE</a:t>
+                      </a:r>
+                    </a:p>
+                  </a:txBody>
+                  <a:tcPr marL="54864" marR="54864" marT="18288" marB="18288" anchor="ctr"/>
+                </a:tc>
+                <a:tc>
+                  <a:txBody>
+                    <a:bodyPr wrap="square"/>
+                    <a:lstStyle/>
+                    <a:p>
+                      <a:r>
+                        <a:rPr sz="1100" b="0">
+                          <a:ea typeface="맑은 고딕"/>
+                          <a:cs typeface="맑은 고딕"/>
+                        </a:rPr>
+                        <a:t>1,600 방전</a:t>
+                      </a:r>
+                    </a:p>
+                  </a:txBody>
+                  <a:tcPr marL="54864" marR="54864" marT="18288" marB="18288" anchor="ctr"/>
+                </a:tc>
+                <a:tc>
+                  <a:txBody>
+                    <a:bodyPr wrap="square"/>
+                    <a:lstStyle/>
+                    <a:p>
+                      <a:r>
+                        <a:rPr sz="1100" b="0">
+                          <a:ea typeface="맑은 고딕"/>
+                          <a:cs typeface="맑은 고딕"/>
+                        </a:rPr>
+                        <a:t>VAE 용도는 회귀 정확도가 아니라 해석·이상탐지</a:t>
+                      </a:r>
+                    </a:p>
+                  </a:txBody>
+                  <a:tcPr marL="54864" marR="54864" marT="18288" marB="18288" anchor="ctr"/>
+                </a:tc>
+              </a:tr>
+              <a:tr h="574548">
+                <a:tc>
+                  <a:txBody>
+                    <a:bodyPr wrap="square"/>
+                    <a:lstStyle/>
+                    <a:p>
+                      <a:r>
+                        <a:rPr sz="1100" b="0">
+                          <a:ea typeface="맑은 고딕"/>
+                          <a:cs typeface="맑은 고딕"/>
+                        </a:rPr>
+                        <a:t>TokaFormer, EAST 지식증류</a:t>
+                      </a:r>
+                    </a:p>
+                  </a:txBody>
+                  <a:tcPr marL="54864" marR="54864" marT="18288" marB="18288" anchor="ctr"/>
+                </a:tc>
+                <a:tc>
+                  <a:txBody>
+                    <a:bodyPr wrap="square"/>
+                    <a:lstStyle/>
+                    <a:p>
+                      <a:r>
+                        <a:rPr sz="1100" b="0">
+                          <a:ea typeface="맑은 고딕"/>
+                          <a:cs typeface="맑은 고딕"/>
+                        </a:rPr>
+                        <a:t>EAST 외</a:t>
+                      </a:r>
+                    </a:p>
+                  </a:txBody>
+                  <a:tcPr marL="54864" marR="54864" marT="18288" marB="18288" anchor="ctr"/>
+                </a:tc>
+                <a:tc>
+                  <a:txBody>
+                    <a:bodyPr wrap="square"/>
+                    <a:lstStyle/>
+                    <a:p>
+                      <a:r>
+                        <a:rPr sz="1100" b="0">
+                          <a:ea typeface="맑은 고딕"/>
+                          <a:cs typeface="맑은 고딕"/>
+                        </a:rPr>
+                        <a:t>2025 ~ 26</a:t>
+                      </a:r>
+                    </a:p>
+                  </a:txBody>
+                  <a:tcPr marL="54864" marR="54864" marT="18288" marB="18288" anchor="ctr"/>
+                </a:tc>
+                <a:tc>
+                  <a:txBody>
+                    <a:bodyPr wrap="square"/>
+                    <a:lstStyle/>
+                    <a:p>
+                      <a:r>
+                        <a:rPr sz="1100" b="0">
+                          <a:ea typeface="맑은 고딕"/>
+                          <a:cs typeface="맑은 고딕"/>
+                        </a:rPr>
+                        <a:t>붕괴 예측</a:t>
+                      </a:r>
+                    </a:p>
+                  </a:txBody>
+                  <a:tcPr marL="54864" marR="54864" marT="18288" marB="18288" anchor="ctr"/>
+                </a:tc>
+                <a:tc>
+                  <a:txBody>
+                    <a:bodyPr wrap="square"/>
+                    <a:lstStyle/>
+                    <a:p>
+                      <a:r>
+                        <a:rPr sz="1100" b="0">
+                          <a:ea typeface="맑은 고딕"/>
+                          <a:cs typeface="맑은 고딕"/>
+                        </a:rPr>
+                        <a:t>1D conv 임베딩 후 모달리티별 Transformer(dual tower), 후기 융합</a:t>
+                      </a:r>
+                    </a:p>
+                  </a:txBody>
+                  <a:tcPr marL="54864" marR="54864" marT="18288" marB="18288" anchor="ctr"/>
+                </a:tc>
+                <a:tc>
+                  <a:txBody>
+                    <a:bodyPr wrap="square"/>
+                    <a:lstStyle/>
+                    <a:p>
+                      <a:r>
+                        <a:rPr sz="1100" b="0">
+                          <a:ea typeface="맑은 고딕"/>
+                          <a:cs typeface="맑은 고딕"/>
+                        </a:rPr>
+                        <a:t>20 μs Mirnov + 1 ms 스칼라</a:t>
+                      </a:r>
+                    </a:p>
+                  </a:txBody>
+                  <a:tcPr marL="54864" marR="54864" marT="18288" marB="18288" anchor="ctr"/>
+                </a:tc>
+                <a:tc>
+                  <a:txBody>
+                    <a:bodyPr wrap="square"/>
+                    <a:lstStyle/>
+                    <a:p>
+                      <a:r>
+                        <a:rPr sz="1100" b="0">
+                          <a:ea typeface="맑은 고딕"/>
+                          <a:cs typeface="맑은 고딕"/>
+                        </a:rPr>
+                        <a:t>CNN+Transformer가 주류인 곳은 붕괴 예측. 20 μs Mirnov와 1 ms 스칼라의 융합 문제이지 회귀 천장 문제가 아님</a:t>
+                      </a:r>
+                    </a:p>
+                  </a:txBody>
+                  <a:tcPr marL="54864" marR="54864" marT="18288" marB="18288" anchor="ctr"/>
+                </a:tc>
+              </a:tr>
+              <a:tr h="401320">
+                <a:tc>
+                  <a:txBody>
+                    <a:bodyPr wrap="square"/>
+                    <a:lstStyle/>
+                    <a:p>
+                      <a:r>
+                        <a:rPr sz="1100" b="0">
+                          <a:ea typeface="맑은 고딕"/>
+                          <a:cs typeface="맑은 고딕"/>
+                        </a:rPr>
+                        <a:t>WEST</a:t>
+                      </a:r>
+                    </a:p>
+                  </a:txBody>
+                  <a:tcPr marL="54864" marR="54864" marT="18288" marB="18288" anchor="ctr"/>
+                </a:tc>
+                <a:tc>
+                  <a:txBody>
+                    <a:bodyPr wrap="square"/>
+                    <a:lstStyle/>
+                    <a:p>
+                      <a:r>
+                        <a:rPr sz="1100" b="0">
+                          <a:ea typeface="맑은 고딕"/>
+                          <a:cs typeface="맑은 고딕"/>
+                        </a:rPr>
+                        <a:t>WEST</a:t>
+                      </a:r>
+                    </a:p>
+                  </a:txBody>
+                  <a:tcPr marL="54864" marR="54864" marT="18288" marB="18288" anchor="ctr"/>
+                </a:tc>
+                <a:tc>
+                  <a:txBody>
+                    <a:bodyPr wrap="square"/>
+                    <a:lstStyle/>
+                    <a:p>
+                      <a:r>
+                        <a:rPr sz="1100" b="0">
+                          <a:ea typeface="맑은 고딕"/>
+                          <a:cs typeface="맑은 고딕"/>
+                        </a:rPr>
+                        <a:t>2026</a:t>
+                      </a:r>
+                    </a:p>
+                  </a:txBody>
+                  <a:tcPr marL="54864" marR="54864" marT="18288" marB="18288" anchor="ctr"/>
+                </a:tc>
+                <a:tc>
+                  <a:txBody>
+                    <a:bodyPr wrap="square"/>
+                    <a:lstStyle/>
+                    <a:p>
+                      <a:r>
+                        <a:rPr sz="1100" b="0">
+                          <a:ea typeface="맑은 고딕"/>
+                          <a:cs typeface="맑은 고딕"/>
+                        </a:rPr>
+                        <a:t>사전 방전 설정으로 전역 파라미터</a:t>
+                      </a:r>
+                    </a:p>
+                  </a:txBody>
+                  <a:tcPr marL="54864" marR="54864" marT="18288" marB="18288" anchor="ctr"/>
+                </a:tc>
+                <a:tc>
+                  <a:txBody>
+                    <a:bodyPr wrap="square"/>
+                    <a:lstStyle/>
+                    <a:p>
+                      <a:r>
+                        <a:rPr sz="1100" b="0">
+                          <a:ea typeface="맑은 고딕"/>
+                          <a:cs typeface="맑은 고딕"/>
+                        </a:rPr>
+                        <a:t>Transformer 0.0096 &lt; LSTM 0.015 &lt; MLP 0.022 MSE</a:t>
+                      </a:r>
+                    </a:p>
+                  </a:txBody>
+                  <a:tcPr marL="54864" marR="54864" marT="18288" marB="18288" anchor="ctr"/>
+                </a:tc>
+                <a:tc>
+                  <a:txBody>
+                    <a:bodyPr wrap="square"/>
+                    <a:lstStyle/>
+                    <a:p>
+                      <a:r>
+                        <a:rPr sz="1100" b="0">
+                          <a:ea typeface="맑은 고딕"/>
+                          <a:cs typeface="맑은 고딕"/>
+                        </a:rPr>
+                        <a:t>550 방전, 1.2만 윈도</a:t>
+                      </a:r>
+                    </a:p>
+                  </a:txBody>
+                  <a:tcPr marL="54864" marR="54864" marT="18288" marB="18288" anchor="ctr"/>
+                </a:tc>
+                <a:tc>
+                  <a:txBody>
+                    <a:bodyPr wrap="square"/>
+                    <a:lstStyle/>
+                    <a:p>
+                      <a:r>
+                        <a:rPr sz="1100" b="0">
+                          <a:ea typeface="맑은 고딕"/>
+                          <a:cs typeface="맑은 고딕"/>
+                        </a:rPr>
+                        <a:t>작은 데이터에서 Transformer가 이긴 사례. 단 10 ~ 70 s 장기 의존 과제</a:t>
+                      </a:r>
+                    </a:p>
+                  </a:txBody>
+                  <a:tcPr marL="54864" marR="54864" marT="18288" marB="18288" anchor="ctr"/>
+                </a:tc>
+              </a:tr>
+              <a:tr h="747776">
+                <a:tc>
+                  <a:txBody>
+                    <a:bodyPr wrap="square"/>
+                    <a:lstStyle/>
+                    <a:p>
+                      <a:r>
+                        <a:rPr sz="1100" b="0">
+                          <a:ea typeface="맑은 고딕"/>
+                          <a:cs typeface="맑은 고딕"/>
+                        </a:rPr>
+                        <a:t>EAST XCS ANN (NF)</a:t>
+                      </a:r>
+                    </a:p>
+                  </a:txBody>
+                  <a:tcPr marL="54864" marR="54864" marT="18288" marB="18288" anchor="ctr"/>
+                </a:tc>
+                <a:tc>
+                  <a:txBody>
+                    <a:bodyPr wrap="square"/>
+                    <a:lstStyle/>
+                    <a:p>
+                      <a:r>
+                        <a:rPr sz="1100" b="0">
+                          <a:ea typeface="맑은 고딕"/>
+                          <a:cs typeface="맑은 고딕"/>
+                        </a:rPr>
+                        <a:t>EAST</a:t>
+                      </a:r>
+                    </a:p>
+                  </a:txBody>
+                  <a:tcPr marL="54864" marR="54864" marT="18288" marB="18288" anchor="ctr"/>
+                </a:tc>
+                <a:tc>
+                  <a:txBody>
+                    <a:bodyPr wrap="square"/>
+                    <a:lstStyle/>
+                    <a:p>
+                      <a:r>
+                        <a:rPr sz="1100" b="0">
                           <a:ea typeface="맑은 고딕"/>
                           <a:cs typeface="맑은 고딕"/>
                         </a:rPr>
@@ -25932,515 +26051,59 @@
                     <a:lstStyle/>
                     <a:p>
                       <a:r>
-                        <a:rPr sz="850" b="0">
-                          <a:ea typeface="맑은 고딕"/>
-                          <a:cs typeface="맑은 고딕"/>
-                        </a:rPr>
-                        <a:t>CES 측정에서 Ti 프로파일을 추론하며 이상치를 걸러낸다</a:t>
-                      </a:r>
-                    </a:p>
-                  </a:txBody>
-                  <a:tcPr marL="54864" marR="54864" marT="18288" marB="18288" anchor="ctr"/>
-                </a:tc>
-                <a:tc>
-                  <a:txBody>
-                    <a:bodyPr wrap="square"/>
-                    <a:lstStyle/>
-                    <a:p>
-                      <a:r>
-                        <a:rPr sz="850" b="0">
-                          <a:ea typeface="맑은 고딕"/>
-                          <a:cs typeface="맑은 고딕"/>
-                        </a:rPr>
-                        <a:t>SVMR 이상치 분류기 + 비모수 GPR, 초매개변수는 MAP와 MCMC 두 방식</a:t>
-                      </a:r>
-                    </a:p>
-                  </a:txBody>
-                  <a:tcPr marL="54864" marR="54864" marT="18288" marB="18288" anchor="ctr"/>
-                </a:tc>
-                <a:tc>
-                  <a:txBody>
-                    <a:bodyPr wrap="square"/>
-                    <a:lstStyle/>
-                    <a:p>
-                      <a:r>
-                        <a:rPr sz="850" b="0">
-                          <a:ea typeface="맑은 고딕"/>
-                          <a:cs typeface="맑은 고딕"/>
-                        </a:rPr>
-                        <a:t>KSTAR CES 측정 자료</a:t>
-                      </a:r>
-                    </a:p>
-                  </a:txBody>
-                  <a:tcPr marL="54864" marR="54864" marT="18288" marB="18288" anchor="ctr"/>
-                </a:tc>
-                <a:tc>
-                  <a:txBody>
-                    <a:bodyPr wrap="square"/>
-                    <a:lstStyle/>
-                    <a:p>
-                      <a:r>
-                        <a:rPr sz="850" b="0">
-                          <a:ea typeface="맑은 고딕"/>
-                          <a:cs typeface="맑은 고딕"/>
-                        </a:rPr>
-                        <a:t>이상치를 자동으로 골라내는 절차가 우리 3 keV 값 컷의 원리적 대체물이다. 값이 아니라 측정 품질로 거르면 두 공동 1차 모집단이 하나로 합쳐진다</a:t>
-                      </a:r>
-                    </a:p>
-                  </a:txBody>
-                  <a:tcPr marL="54864" marR="54864" marT="18288" marB="18288" anchor="ctr"/>
-                </a:tc>
-              </a:tr>
-              <a:tr h="456438">
-                <a:tc>
-                  <a:txBody>
-                    <a:bodyPr wrap="square"/>
-                    <a:lstStyle/>
-                    <a:p>
-                      <a:r>
-                        <a:rPr sz="850" b="0">
-                          <a:ea typeface="맑은 고딕"/>
-                          <a:cs typeface="맑은 고딕"/>
-                        </a:rPr>
-                        <a:t>이상치 강건 Bayesian mtanh 적합 (NF, arXiv 2607.14142)</a:t>
-                      </a:r>
-                    </a:p>
-                  </a:txBody>
-                  <a:tcPr marL="54864" marR="54864" marT="18288" marB="18288" anchor="ctr"/>
-                </a:tc>
-                <a:tc>
-                  <a:txBody>
-                    <a:bodyPr wrap="square"/>
-                    <a:lstStyle/>
-                    <a:p>
-                      <a:r>
-                        <a:rPr sz="850" b="0">
-                          <a:ea typeface="맑은 고딕"/>
-                          <a:cs typeface="맑은 고딕"/>
-                        </a:rPr>
-                        <a:t>KSTAR</a:t>
-                      </a:r>
-                    </a:p>
-                  </a:txBody>
-                  <a:tcPr marL="54864" marR="54864" marT="18288" marB="18288" anchor="ctr"/>
-                </a:tc>
-                <a:tc>
-                  <a:txBody>
-                    <a:bodyPr wrap="square"/>
-                    <a:lstStyle/>
-                    <a:p>
-                      <a:r>
-                        <a:rPr sz="850" b="0">
-                          <a:ea typeface="맑은 고딕"/>
-                          <a:cs typeface="맑은 고딕"/>
-                        </a:rPr>
-                        <a:t>2026</a:t>
-                      </a:r>
-                    </a:p>
-                  </a:txBody>
-                  <a:tcPr marL="54864" marR="54864" marT="18288" marB="18288" anchor="ctr"/>
-                </a:tc>
-                <a:tc>
-                  <a:txBody>
-                    <a:bodyPr wrap="square"/>
-                    <a:lstStyle/>
-                    <a:p>
-                      <a:r>
-                        <a:rPr sz="850" b="0">
-                          <a:ea typeface="맑은 고딕"/>
-                          <a:cs typeface="맑은 고딕"/>
-                        </a:rPr>
-                        <a:t>TS·TCI·CES에서 ne·Te·Ti·v_T 프로파일을 동시에 적합한다</a:t>
-                      </a:r>
-                    </a:p>
-                  </a:txBody>
-                  <a:tcPr marL="54864" marR="54864" marT="18288" marB="18288" anchor="ctr"/>
-                </a:tc>
-                <a:tc>
-                  <a:txBody>
-                    <a:bodyPr wrap="square"/>
-                    <a:lstStyle/>
-                    <a:p>
-                      <a:r>
-                        <a:rPr sz="850" b="0">
-                          <a:ea typeface="맑은 고딕"/>
-                          <a:cs typeface="맑은 고딕"/>
-                        </a:rPr>
-                        <a:t>수정 tanh 7모수 + good-and-bad 가우시안 혼합 우도, MAP 초기화 후 MCMC</a:t>
-                      </a:r>
-                    </a:p>
-                  </a:txBody>
-                  <a:tcPr marL="54864" marR="54864" marT="18288" marB="18288" anchor="ctr"/>
-                </a:tc>
-                <a:tc>
-                  <a:txBody>
-                    <a:bodyPr wrap="square"/>
-                    <a:lstStyle/>
-                    <a:p>
-                      <a:r>
-                        <a:rPr sz="850" b="0">
-                          <a:ea typeface="맑은 고딕"/>
-                          <a:cs typeface="맑은 고딕"/>
-                        </a:rPr>
-                        <a:t>248 시간 조각을 24코어에서 78초</a:t>
-                      </a:r>
-                    </a:p>
-                  </a:txBody>
-                  <a:tcPr marL="54864" marR="54864" marT="18288" marB="18288" anchor="ctr"/>
-                </a:tc>
-                <a:tc>
-                  <a:txBody>
-                    <a:bodyPr wrap="square"/>
-                    <a:lstStyle/>
-                    <a:p>
-                      <a:r>
-                        <a:rPr sz="850" b="0">
-                          <a:ea typeface="맑은 고딕"/>
-                          <a:cs typeface="맑은 고딕"/>
-                        </a:rPr>
-                        <a:t>CES 항을 NN-CES 산출로 바꿔 끼울 수 있게 설계되어 있다. 프로파일 단위 불확실성이 우리 타깃 재현성 바닥(§8aq)의 독립 비교값이 된다</a:t>
-                      </a:r>
-                    </a:p>
-                  </a:txBody>
-                  <a:tcPr marL="54864" marR="54864" marT="18288" marB="18288" anchor="ctr"/>
-                </a:tc>
-              </a:tr>
-              <a:tr h="456438">
-                <a:tc>
-                  <a:txBody>
-                    <a:bodyPr wrap="square"/>
-                    <a:lstStyle/>
-                    <a:p>
-                      <a:r>
-                        <a:rPr sz="850" b="0">
-                          <a:ea typeface="맑은 고딕"/>
-                          <a:cs typeface="맑은 고딕"/>
-                        </a:rPr>
-                        <a:t>TSER 결측 Te 복원 (NF 65:076008)</a:t>
-                      </a:r>
-                    </a:p>
-                  </a:txBody>
-                  <a:tcPr marL="54864" marR="54864" marT="18288" marB="18288" anchor="ctr"/>
-                </a:tc>
-                <a:tc>
-                  <a:txBody>
-                    <a:bodyPr wrap="square"/>
-                    <a:lstStyle/>
-                    <a:p>
-                      <a:r>
-                        <a:rPr sz="850" b="0">
-                          <a:ea typeface="맑은 고딕"/>
-                          <a:cs typeface="맑은 고딕"/>
-                        </a:rPr>
-                        <a:t>EAST</a:t>
-                      </a:r>
-                    </a:p>
-                  </a:txBody>
-                  <a:tcPr marL="54864" marR="54864" marT="18288" marB="18288" anchor="ctr"/>
-                </a:tc>
-                <a:tc>
-                  <a:txBody>
-                    <a:bodyPr wrap="square"/>
-                    <a:lstStyle/>
-                    <a:p>
-                      <a:r>
-                        <a:rPr sz="850" b="0">
-                          <a:ea typeface="맑은 고딕"/>
-                          <a:cs typeface="맑은 고딕"/>
-                        </a:rPr>
-                        <a:t>2025</a:t>
-                      </a:r>
-                    </a:p>
-                  </a:txBody>
-                  <a:tcPr marL="54864" marR="54864" marT="18288" marB="18288" anchor="ctr"/>
-                </a:tc>
-                <a:tc>
-                  <a:txBody>
-                    <a:bodyPr wrap="square"/>
-                    <a:lstStyle/>
-                    <a:p>
-                      <a:r>
-                        <a:rPr sz="850" b="0">
-                          <a:ea typeface="맑은 고딕"/>
-                          <a:cs typeface="맑은 고딕"/>
-                        </a:rPr>
-                        <a:t>센서 고장·진단 부재로 빠진 전자온도를 복원한다</a:t>
-                      </a:r>
-                    </a:p>
-                  </a:txBody>
-                  <a:tcPr marL="54864" marR="54864" marT="18288" marB="18288" anchor="ctr"/>
-                </a:tc>
-                <a:tc>
-                  <a:txBody>
-                    <a:bodyPr wrap="square"/>
-                    <a:lstStyle/>
-                    <a:p>
-                      <a:r>
-                        <a:rPr sz="850" b="0">
-                          <a:ea typeface="맑은 고딕"/>
-                          <a:cs typeface="맑은 고딕"/>
-                        </a:rPr>
-                        <a:t>시계열 외재 회귀(TSER)가 여러 신호의 상호관계를 학습한다</a:t>
-                      </a:r>
-                    </a:p>
-                  </a:txBody>
-                  <a:tcPr marL="54864" marR="54864" marT="18288" marB="18288" anchor="ctr"/>
-                </a:tc>
-                <a:tc>
-                  <a:txBody>
-                    <a:bodyPr wrap="square"/>
-                    <a:lstStyle/>
-                    <a:p>
-                      <a:r>
-                        <a:rPr sz="850" b="0">
-                          <a:ea typeface="맑은 고딕"/>
-                          <a:cs typeface="맑은 고딕"/>
-                        </a:rPr>
-                        <a:t>방전 전 구간에서 2σ 이내 신뢰수준 95.9 % 이상</a:t>
-                      </a:r>
-                    </a:p>
-                  </a:txBody>
-                  <a:tcPr marL="54864" marR="54864" marT="18288" marB="18288" anchor="ctr"/>
-                </a:tc>
-                <a:tc>
-                  <a:txBody>
-                    <a:bodyPr wrap="square"/>
-                    <a:lstStyle/>
-                    <a:p>
-                      <a:r>
-                        <a:rPr sz="850" b="0">
-                          <a:ea typeface="맑은 고딕"/>
-                          <a:cs typeface="맑은 고딕"/>
-                        </a:rPr>
-                        <a:t>결측 타깃 복원이라는 우리 문제 정의와 가장 가까운 프레이밍이다. 다만 타깃이 전자온도이고 인과성 제약도, 보간 기준선과의 비교도 없다</a:t>
-                      </a:r>
-                    </a:p>
-                  </a:txBody>
-                  <a:tcPr marL="54864" marR="54864" marT="18288" marB="18288" anchor="ctr"/>
-                </a:tc>
-              </a:tr>
-              <a:tr h="456438">
-                <a:tc>
-                  <a:txBody>
-                    <a:bodyPr wrap="square"/>
-                    <a:lstStyle/>
-                    <a:p>
-                      <a:r>
-                        <a:rPr sz="850" b="0">
-                          <a:ea typeface="맑은 고딕"/>
-                          <a:cs typeface="맑은 고딕"/>
-                        </a:rPr>
-                        <a:t>전 상태 복원 (arXiv 2607.04390)</a:t>
-                      </a:r>
-                    </a:p>
-                  </a:txBody>
-                  <a:tcPr marL="54864" marR="54864" marT="18288" marB="18288" anchor="ctr"/>
-                </a:tc>
-                <a:tc>
-                  <a:txBody>
-                    <a:bodyPr wrap="square"/>
-                    <a:lstStyle/>
-                    <a:p>
-                      <a:r>
-                        <a:rPr sz="850" b="0">
-                          <a:ea typeface="맑은 고딕"/>
-                          <a:cs typeface="맑은 고딕"/>
-                        </a:rPr>
-                        <a:t>kinetic 시뮬레이션</a:t>
-                      </a:r>
-                    </a:p>
-                  </a:txBody>
-                  <a:tcPr marL="54864" marR="54864" marT="18288" marB="18288" anchor="ctr"/>
-                </a:tc>
-                <a:tc>
-                  <a:txBody>
-                    <a:bodyPr wrap="square"/>
-                    <a:lstStyle/>
-                    <a:p>
-                      <a:r>
-                        <a:rPr sz="850" b="0">
-                          <a:ea typeface="맑은 고딕"/>
-                          <a:cs typeface="맑은 고딕"/>
-                        </a:rPr>
-                        <a:t>2026</a:t>
-                      </a:r>
-                    </a:p>
-                  </a:txBody>
-                  <a:tcPr marL="54864" marR="54864" marT="18288" marB="18288" anchor="ctr"/>
-                </a:tc>
-                <a:tc>
-                  <a:txBody>
-                    <a:bodyPr wrap="square"/>
-                    <a:lstStyle/>
-                    <a:p>
-                      <a:r>
-                        <a:rPr sz="850" b="0">
-                          <a:ea typeface="맑은 고딕"/>
-                          <a:cs typeface="맑은 고딕"/>
-                        </a:rPr>
-                        <a:t>희소한 밀도 프로브 몇 개로 전 영역 플라즈마 장을 복원한다</a:t>
-                      </a:r>
-                    </a:p>
-                  </a:txBody>
-                  <a:tcPr marL="54864" marR="54864" marT="18288" marB="18288" anchor="ctr"/>
-                </a:tc>
-                <a:tc>
-                  <a:txBody>
-                    <a:bodyPr wrap="square"/>
-                    <a:lstStyle/>
-                    <a:p>
-                      <a:r>
-                        <a:rPr sz="850" b="0">
-                          <a:ea typeface="맑은 고딕"/>
-                          <a:cs typeface="맑은 고딕"/>
-                        </a:rPr>
-                        <a:t>희소 센서 이력의 시간 인코딩 + 공간 디코딩</a:t>
-                      </a:r>
-                    </a:p>
-                  </a:txBody>
-                  <a:tcPr marL="54864" marR="54864" marT="18288" marB="18288" anchor="ctr"/>
-                </a:tc>
-                <a:tc>
-                  <a:txBody>
-                    <a:bodyPr wrap="square"/>
-                    <a:lstStyle/>
-                    <a:p>
-                      <a:r>
-                        <a:rPr sz="850" b="0">
-                          <a:ea typeface="맑은 고딕"/>
-                          <a:cs typeface="맑은 고딕"/>
-                        </a:rPr>
-                        <a:t>고정밀 kinetic 시뮬레이션 자료 (실험 데이터 아님)</a:t>
-                      </a:r>
-                    </a:p>
-                  </a:txBody>
-                  <a:tcPr marL="54864" marR="54864" marT="18288" marB="18288" anchor="ctr"/>
-                </a:tc>
-                <a:tc>
-                  <a:txBody>
-                    <a:bodyPr wrap="square"/>
-                    <a:lstStyle/>
-                    <a:p>
-                      <a:r>
-                        <a:rPr sz="850" b="0">
-                          <a:ea typeface="맑은 고딕"/>
-                          <a:cs typeface="맑은 고딕"/>
-                        </a:rPr>
-                        <a:t>센서 몇 개로 전체 상태를 세우는 구조는 우리와 같으나 실험이 아니라 시뮬레이션에서 검증되었다</a:t>
-                      </a:r>
-                    </a:p>
-                  </a:txBody>
-                  <a:tcPr marL="54864" marR="54864" marT="18288" marB="18288" anchor="ctr"/>
-                </a:tc>
-              </a:tr>
-              <a:tr h="456438">
-                <a:tc>
-                  <a:txBody>
-                    <a:bodyPr wrap="square"/>
-                    <a:lstStyle/>
-                    <a:p>
-                      <a:r>
-                        <a:rPr sz="850" b="0">
-                          <a:ea typeface="맑은 고딕"/>
-                          <a:cs typeface="맑은 고딕"/>
-                        </a:rPr>
-                        <a:t>평형 재구성 챌린지 (arXiv 2609.01750)</a:t>
-                      </a:r>
-                    </a:p>
-                  </a:txBody>
-                  <a:tcPr marL="54864" marR="54864" marT="18288" marB="18288" anchor="ctr"/>
-                </a:tc>
-                <a:tc>
-                  <a:txBody>
-                    <a:bodyPr wrap="square"/>
-                    <a:lstStyle/>
-                    <a:p>
-                      <a:r>
-                        <a:rPr sz="850" b="0">
-                          <a:ea typeface="맑은 고딕"/>
-                          <a:cs typeface="맑은 고딕"/>
-                        </a:rPr>
-                        <a:t>DIII-D · MAST</a:t>
-                      </a:r>
-                    </a:p>
-                  </a:txBody>
-                  <a:tcPr marL="54864" marR="54864" marT="18288" marB="18288" anchor="ctr"/>
-                </a:tc>
-                <a:tc>
-                  <a:txBody>
-                    <a:bodyPr wrap="square"/>
-                    <a:lstStyle/>
-                    <a:p>
-                      <a:r>
-                        <a:rPr sz="850" b="0">
-                          <a:ea typeface="맑은 고딕"/>
-                          <a:cs typeface="맑은 고딕"/>
-                        </a:rPr>
-                        <a:t>2026</a:t>
-                      </a:r>
-                    </a:p>
-                  </a:txBody>
-                  <a:tcPr marL="54864" marR="54864" marT="18288" marB="18288" anchor="ctr"/>
-                </a:tc>
-                <a:tc>
-                  <a:txBody>
-                    <a:bodyPr wrap="square"/>
-                    <a:lstStyle/>
-                    <a:p>
-                      <a:r>
-                        <a:rPr sz="850" b="0">
-                          <a:ea typeface="맑은 고딕"/>
-                          <a:cs typeface="맑은 고딕"/>
-                        </a:rPr>
-                        <a:t>자기 진단 없이 자기 기하를 추론하는 공개 벤치마크</a:t>
-                      </a:r>
-                    </a:p>
-                  </a:txBody>
-                  <a:tcPr marL="54864" marR="54864" marT="18288" marB="18288" anchor="ctr"/>
-                </a:tc>
-                <a:tc>
-                  <a:txBody>
-                    <a:bodyPr wrap="square"/>
-                    <a:lstStyle/>
-                    <a:p>
-                      <a:r>
-                        <a:rPr sz="850" b="0">
-                          <a:ea typeface="맑은 고딕"/>
-                          <a:cs typeface="맑은 고딕"/>
-                        </a:rPr>
-                        <a:t>PF 코일 전류 + Thomson으로 ψ(R,Z). 기준선 4종(PCA+Ridge / GBT / MLP / conv 디코더)</a:t>
-                      </a:r>
-                    </a:p>
-                  </a:txBody>
-                  <a:tcPr marL="54864" marR="54864" marT="18288" marB="18288" anchor="ctr"/>
-                </a:tc>
-                <a:tc>
-                  <a:txBody>
-                    <a:bodyPr wrap="square"/>
-                    <a:lstStyle/>
-                    <a:p>
-                      <a:r>
-                        <a:rPr sz="850" b="0">
-                          <a:ea typeface="맑은 고딕"/>
-                          <a:cs typeface="맑은 고딕"/>
-                        </a:rPr>
-                        <a:t>DIII-D 약 9,100 shot · MAST 약 2,400 shot</a:t>
-                      </a:r>
-                    </a:p>
-                  </a:txBody>
-                  <a:tcPr marL="54864" marR="54864" marT="18288" marB="18288" anchor="ctr"/>
-                </a:tc>
-                <a:tc>
-                  <a:txBody>
-                    <a:bodyPr wrap="square"/>
-                    <a:lstStyle/>
-                    <a:p>
-                      <a:r>
-                        <a:rPr sz="850" b="0">
-                          <a:ea typeface="맑은 고딕"/>
-                          <a:cs typeface="맑은 고딕"/>
-                        </a:rPr>
-                        <a:t>진단 하나가 없을 때 다른 진단으로 대신한다는 문제를 공개 벤치마크로 만든 사례. 이온 채널은 다루지 않으며 shot 단위 분할과 교차 장치 일반화를 요구한다</a:t>
+                        <a:rPr sz="1100" b="0">
+                          <a:ea typeface="맑은 고딕"/>
+                          <a:cs typeface="맑은 고딕"/>
+                        </a:rPr>
+                        <a:t>스펙트럼으로 Ti·회전</a:t>
+                      </a:r>
+                    </a:p>
+                  </a:txBody>
+                  <a:tcPr marL="54864" marR="54864" marT="18288" marB="18288" anchor="ctr"/>
+                </a:tc>
+                <a:tc>
+                  <a:txBody>
+                    <a:bodyPr wrap="square"/>
+                    <a:lstStyle/>
+                    <a:p>
+                      <a:r>
+                        <a:rPr sz="1100" b="0">
+                          <a:ea typeface="맑은 고딕"/>
+                          <a:cs typeface="맑은 고딕"/>
+                        </a:rPr>
+                        <a:t>2×9 DNN, 31k CNN, R² 0.96</a:t>
+                      </a:r>
+                    </a:p>
+                  </a:txBody>
+                  <a:tcPr marL="54864" marR="54864" marT="18288" marB="18288" anchor="ctr"/>
+                </a:tc>
+                <a:tc>
+                  <a:txBody>
+                    <a:bodyPr wrap="square"/>
+                    <a:lstStyle/>
+                    <a:p>
+                      <a:r>
+                        <a:rPr sz="1100" b="0">
+                          <a:ea typeface="맑은 고딕"/>
+                          <a:cs typeface="맑은 고딕"/>
+                        </a:rPr>
+                        <a:t>530 방전</a:t>
+                      </a:r>
+                    </a:p>
+                  </a:txBody>
+                  <a:tcPr marL="54864" marR="54864" marT="18288" marB="18288" anchor="ctr"/>
+                </a:tc>
+                <a:tc>
+                  <a:txBody>
+                    <a:bodyPr wrap="square"/>
+                    <a:lstStyle/>
+                    <a:p>
+                      <a:r>
+                        <a:rPr sz="1100" b="0">
+                          <a:ea typeface="맑은 고딕"/>
+                          <a:cs typeface="맑은 고딕"/>
+                        </a:rPr>
+                        <a:t>회전을 예측하는 유일한 논문도 입력이 회전 측정 자체(스펙트럼). 우리 V_rot 경로가 어떤 입력을 확보해야 하는지를 가리킴 — B.6 μs Mirnov · NBI 토크 채널</a:t>
                       </a:r>
                     </a:p>
                   </a:txBody>
@@ -26460,6 +26123,1531 @@
 </file>
 
 <file path=ppt/slides/slide58.xml><?xml version="1.0" encoding="utf-8"?>
+<p:sld xmlns:a="http://schemas.openxmlformats.org/drawingml/2006/main" xmlns:p="http://schemas.openxmlformats.org/presentationml/2006/main" xmlns:r="http://schemas.openxmlformats.org/officeDocument/2006/relationships">
+  <p:cSld>
+    <p:spTree>
+      <p:nvGrpSpPr>
+        <p:cNvPr id="1" name=""/>
+        <p:cNvGrpSpPr/>
+        <p:nvPr/>
+      </p:nvGrpSpPr>
+      <p:grpSpPr/>
+      <p:sp>
+        <p:nvSpPr>
+          <p:cNvPr id="2" name="Title 1"/>
+          <p:cNvSpPr>
+            <a:spLocks noGrp="1"/>
+          </p:cNvSpPr>
+          <p:nvPr>
+            <p:ph type="title"/>
+          </p:nvPr>
+        </p:nvSpPr>
+        <p:spPr>
+          <a:xfrm>
+            <a:off x="585216" y="704088"/>
+            <a:ext cx="11027664" cy="1014984"/>
+          </a:xfrm>
+        </p:spPr>
+        <p:txBody>
+          <a:bodyPr wrap="square"/>
+          <a:lstStyle/>
+          <a:p>
+            <a:r>
+              <a:rPr b="0" sz="2250">
+                <a:ea typeface="맑은 고딕"/>
+                <a:cs typeface="맑은 고딕"/>
+              </a:rPr>
+              <a:t>문헌 조사 (1/4, 3쪽): 핵융합의 진단-대-진단 추정은 여전히 단순한 구조가 주류이다</a:t>
+            </a:r>
+          </a:p>
+        </p:txBody>
+      </p:sp>
+      <p:sp>
+        <p:nvSpPr>
+          <p:cNvPr id="3" name="TextBox 2"/>
+          <p:cNvSpPr txBox="1"/>
+          <p:nvPr/>
+        </p:nvSpPr>
+        <p:spPr>
+          <a:xfrm>
+            <a:off x="585216" y="2029967"/>
+            <a:ext cx="11027664" cy="297688"/>
+          </a:xfrm>
+          <a:prstGeom prst="rect">
+            <a:avLst/>
+          </a:prstGeom>
+          <a:noFill/>
+        </p:spPr>
+        <p:txBody>
+          <a:bodyPr wrap="square">
+            <a:spAutoFit/>
+          </a:bodyPr>
+          <a:lstStyle/>
+          <a:p>
+            <a:pPr>
+              <a:spcAft>
+                <a:spcPts val="300"/>
+              </a:spcAft>
+            </a:pPr>
+            <a:r>
+              <a:rPr sz="1300">
+                <a:ea typeface="맑은 고딕"/>
+                <a:cs typeface="맑은 고딕"/>
+              </a:rPr>
+              <a:t>장치와 연도를 따로 두었다.</a:t>
+            </a:r>
+          </a:p>
+        </p:txBody>
+      </p:sp>
+      <p:graphicFrame>
+        <p:nvGraphicFramePr>
+          <p:cNvPr id="4" name="Table 3"/>
+          <p:cNvGraphicFramePr>
+            <a:graphicFrameLocks noGrp="1"/>
+          </p:cNvGraphicFramePr>
+          <p:nvPr/>
+        </p:nvGraphicFramePr>
+        <p:xfrm>
+          <a:off x="585216" y="2400807"/>
+          <a:ext cx="11027661" cy="3304791"/>
+        </p:xfrm>
+        <a:graphic>
+          <a:graphicData uri="http://schemas.openxmlformats.org/drawingml/2006/table">
+            <a:tbl>
+              <a:tblPr firstRow="1" bandRow="1">
+                <a:tableStyleId>{5C22544A-7EE6-4342-B048-85BDC9FD1C3A}</a:tableStyleId>
+              </a:tblPr>
+              <a:tblGrid>
+                <a:gridCol w="1552631"/>
+                <a:gridCol w="836032"/>
+                <a:gridCol w="676788"/>
+                <a:gridCol w="1473009"/>
+                <a:gridCol w="2428474"/>
+                <a:gridCol w="1234142"/>
+                <a:gridCol w="2826585"/>
+              </a:tblGrid>
+              <a:tr h="274320">
+                <a:tc>
+                  <a:txBody>
+                    <a:bodyPr wrap="square"/>
+                    <a:lstStyle/>
+                    <a:p>
+                      <a:r>
+                        <a:rPr sz="1050" b="1">
+                          <a:ea typeface="맑은 고딕"/>
+                          <a:cs typeface="맑은 고딕"/>
+                        </a:rPr>
+                        <a:t>논문</a:t>
+                      </a:r>
+                    </a:p>
+                  </a:txBody>
+                  <a:tcPr marL="54864" marR="54864" marT="18288" marB="18288" anchor="ctr"/>
+                </a:tc>
+                <a:tc>
+                  <a:txBody>
+                    <a:bodyPr wrap="square"/>
+                    <a:lstStyle/>
+                    <a:p>
+                      <a:r>
+                        <a:rPr sz="1050" b="1">
+                          <a:ea typeface="맑은 고딕"/>
+                          <a:cs typeface="맑은 고딕"/>
+                        </a:rPr>
+                        <a:t>장치</a:t>
+                      </a:r>
+                    </a:p>
+                  </a:txBody>
+                  <a:tcPr marL="54864" marR="54864" marT="18288" marB="18288" anchor="ctr"/>
+                </a:tc>
+                <a:tc>
+                  <a:txBody>
+                    <a:bodyPr wrap="square"/>
+                    <a:lstStyle/>
+                    <a:p>
+                      <a:r>
+                        <a:rPr sz="1050" b="1">
+                          <a:ea typeface="맑은 고딕"/>
+                          <a:cs typeface="맑은 고딕"/>
+                        </a:rPr>
+                        <a:t>연도</a:t>
+                      </a:r>
+                    </a:p>
+                  </a:txBody>
+                  <a:tcPr marL="54864" marR="54864" marT="18288" marB="18288" anchor="ctr"/>
+                </a:tc>
+                <a:tc>
+                  <a:txBody>
+                    <a:bodyPr wrap="square"/>
+                    <a:lstStyle/>
+                    <a:p>
+                      <a:r>
+                        <a:rPr sz="1050" b="1">
+                          <a:ea typeface="맑은 고딕"/>
+                          <a:cs typeface="맑은 고딕"/>
+                        </a:rPr>
+                        <a:t>문제</a:t>
+                      </a:r>
+                    </a:p>
+                  </a:txBody>
+                  <a:tcPr marL="54864" marR="54864" marT="18288" marB="18288" anchor="ctr"/>
+                </a:tc>
+                <a:tc>
+                  <a:txBody>
+                    <a:bodyPr wrap="square"/>
+                    <a:lstStyle/>
+                    <a:p>
+                      <a:r>
+                        <a:rPr sz="1050" b="1">
+                          <a:ea typeface="맑은 고딕"/>
+                          <a:cs typeface="맑은 고딕"/>
+                        </a:rPr>
+                        <a:t>구조</a:t>
+                      </a:r>
+                    </a:p>
+                  </a:txBody>
+                  <a:tcPr marL="54864" marR="54864" marT="18288" marB="18288" anchor="ctr"/>
+                </a:tc>
+                <a:tc>
+                  <a:txBody>
+                    <a:bodyPr wrap="square"/>
+                    <a:lstStyle/>
+                    <a:p>
+                      <a:r>
+                        <a:rPr sz="1050" b="1">
+                          <a:ea typeface="맑은 고딕"/>
+                          <a:cs typeface="맑은 고딕"/>
+                        </a:rPr>
+                        <a:t>데이터</a:t>
+                      </a:r>
+                    </a:p>
+                  </a:txBody>
+                  <a:tcPr marL="54864" marR="54864" marT="18288" marB="18288" anchor="ctr"/>
+                </a:tc>
+                <a:tc>
+                  <a:txBody>
+                    <a:bodyPr wrap="square"/>
+                    <a:lstStyle/>
+                    <a:p>
+                      <a:r>
+                        <a:rPr sz="1050" b="1">
+                          <a:ea typeface="맑은 고딕"/>
+                          <a:cs typeface="맑은 고딕"/>
+                        </a:rPr>
+                        <a:t>우리에게 의미</a:t>
+                      </a:r>
+                    </a:p>
+                  </a:txBody>
+                  <a:tcPr marL="54864" marR="54864" marT="18288" marB="18288" anchor="ctr"/>
+                </a:tc>
+              </a:tr>
+              <a:tr h="385571">
+                <a:tc>
+                  <a:txBody>
+                    <a:bodyPr wrap="square"/>
+                    <a:lstStyle/>
+                    <a:p>
+                      <a:r>
+                        <a:rPr sz="1050" b="0">
+                          <a:ea typeface="맑은 고딕"/>
+                          <a:cs typeface="맑은 고딕"/>
+                        </a:rPr>
+                        <a:t>Abbate 등 (NF)</a:t>
+                      </a:r>
+                    </a:p>
+                  </a:txBody>
+                  <a:tcPr marL="54864" marR="54864" marT="18288" marB="18288" anchor="ctr"/>
+                </a:tc>
+                <a:tc>
+                  <a:txBody>
+                    <a:bodyPr wrap="square"/>
+                    <a:lstStyle/>
+                    <a:p>
+                      <a:r>
+                        <a:rPr sz="1050" b="0">
+                          <a:ea typeface="맑은 고딕"/>
+                          <a:cs typeface="맑은 고딕"/>
+                        </a:rPr>
+                        <a:t>DIII-D · AUG</a:t>
+                      </a:r>
+                    </a:p>
+                  </a:txBody>
+                  <a:tcPr marL="54864" marR="54864" marT="18288" marB="18288" anchor="ctr"/>
+                </a:tc>
+                <a:tc>
+                  <a:txBody>
+                    <a:bodyPr wrap="square"/>
+                    <a:lstStyle/>
+                    <a:p>
+                      <a:r>
+                        <a:rPr sz="1050" b="0">
+                          <a:ea typeface="맑은 고딕"/>
+                          <a:cs typeface="맑은 고딕"/>
+                        </a:rPr>
+                        <a:t>2025</a:t>
+                      </a:r>
+                    </a:p>
+                  </a:txBody>
+                  <a:tcPr marL="54864" marR="54864" marT="18288" marB="18288" anchor="ctr"/>
+                </a:tc>
+                <a:tc>
+                  <a:txBody>
+                    <a:bodyPr wrap="square"/>
+                    <a:lstStyle/>
+                    <a:p>
+                      <a:r>
+                        <a:rPr sz="1050" b="0">
+                          <a:ea typeface="맑은 고딕"/>
+                          <a:cs typeface="맑은 고딕"/>
+                        </a:rPr>
+                        <a:t>물리+데이터 메타학습</a:t>
+                      </a:r>
+                    </a:p>
+                  </a:txBody>
+                  <a:tcPr marL="54864" marR="54864" marT="18288" marB="18288" anchor="ctr"/>
+                </a:tc>
+                <a:tc>
+                  <a:txBody>
+                    <a:bodyPr wrap="square"/>
+                    <a:lstStyle/>
+                    <a:p>
+                      <a:r>
+                        <a:rPr sz="1050" b="0">
+                          <a:ea typeface="맑은 고딕"/>
+                          <a:cs typeface="맑은 고딕"/>
+                        </a:rPr>
+                        <a:t>두 모델을 메타학습으로 결합, 저전류 → 고전류 외삽</a:t>
+                      </a:r>
+                    </a:p>
+                  </a:txBody>
+                  <a:tcPr marL="54864" marR="54864" marT="18288" marB="18288" anchor="ctr"/>
+                </a:tc>
+                <a:tc>
+                  <a:txBody>
+                    <a:bodyPr wrap="square"/>
+                    <a:lstStyle/>
+                    <a:p>
+                      <a:r>
+                        <a:rPr sz="1050" b="0">
+                          <a:ea typeface="맑은 고딕"/>
+                          <a:cs typeface="맑은 고딕"/>
+                        </a:rPr>
+                        <a:t>외삽 5 ~ 10 % 개선</a:t>
+                      </a:r>
+                    </a:p>
+                  </a:txBody>
+                  <a:tcPr marL="54864" marR="54864" marT="18288" marB="18288" anchor="ctr"/>
+                </a:tc>
+                <a:tc>
+                  <a:txBody>
+                    <a:bodyPr wrap="square"/>
+                    <a:lstStyle/>
+                    <a:p>
+                      <a:r>
+                        <a:rPr sz="1050" b="0">
+                          <a:ea typeface="맑은 고딕"/>
+                          <a:cs typeface="맑은 고딕"/>
+                        </a:rPr>
+                        <a:t>물리 모델은 외삽 담당</a:t>
+                      </a:r>
+                    </a:p>
+                  </a:txBody>
+                  <a:tcPr marL="54864" marR="54864" marT="18288" marB="18288" anchor="ctr"/>
+                </a:tc>
+              </a:tr>
+              <a:tr h="385571">
+                <a:tc>
+                  <a:txBody>
+                    <a:bodyPr wrap="square"/>
+                    <a:lstStyle/>
+                    <a:p>
+                      <a:r>
+                        <a:rPr sz="1050" b="0">
+                          <a:ea typeface="맑은 고딕"/>
+                          <a:cs typeface="맑은 고딕"/>
+                        </a:rPr>
+                        <a:t>코일 shot-to-shot</a:t>
+                      </a:r>
+                    </a:p>
+                  </a:txBody>
+                  <a:tcPr marL="54864" marR="54864" marT="18288" marB="18288" anchor="ctr"/>
+                </a:tc>
+                <a:tc>
+                  <a:txBody>
+                    <a:bodyPr wrap="square"/>
+                    <a:lstStyle/>
+                    <a:p>
+                      <a:r>
+                        <a:rPr sz="1050" b="0">
+                          <a:ea typeface="맑은 고딕"/>
+                          <a:cs typeface="맑은 고딕"/>
+                        </a:rPr>
+                        <a:t>DIII-D</a:t>
+                      </a:r>
+                    </a:p>
+                  </a:txBody>
+                  <a:tcPr marL="54864" marR="54864" marT="18288" marB="18288" anchor="ctr"/>
+                </a:tc>
+                <a:tc>
+                  <a:txBody>
+                    <a:bodyPr wrap="square"/>
+                    <a:lstStyle/>
+                    <a:p>
+                      <a:r>
+                        <a:rPr sz="1050" b="0">
+                          <a:ea typeface="맑은 고딕"/>
+                          <a:cs typeface="맑은 고딕"/>
+                        </a:rPr>
+                        <a:t>2026</a:t>
+                      </a:r>
+                    </a:p>
+                  </a:txBody>
+                  <a:tcPr marL="54864" marR="54864" marT="18288" marB="18288" anchor="ctr"/>
+                </a:tc>
+                <a:tc>
+                  <a:txBody>
+                    <a:bodyPr wrap="square"/>
+                    <a:lstStyle/>
+                    <a:p>
+                      <a:r>
+                        <a:rPr sz="1050" b="0">
+                          <a:ea typeface="맑은 고딕"/>
+                          <a:cs typeface="맑은 고딕"/>
+                        </a:rPr>
+                        <a:t>방전 간 하드웨어 이동</a:t>
+                      </a:r>
+                    </a:p>
+                  </a:txBody>
+                  <a:tcPr marL="54864" marR="54864" marT="18288" marB="18288" anchor="ctr"/>
+                </a:tc>
+                <a:tc>
+                  <a:txBody>
+                    <a:bodyPr wrap="square"/>
+                    <a:lstStyle/>
+                    <a:p>
+                      <a:r>
+                        <a:rPr sz="1050" b="0">
+                          <a:ea typeface="맑은 고딕"/>
+                          <a:cs typeface="맑은 고딕"/>
+                        </a:rPr>
+                        <a:t>토로이달 자장 코일 디지털 트윈 + 온라인 학습</a:t>
+                      </a:r>
+                    </a:p>
+                  </a:txBody>
+                  <a:tcPr marL="54864" marR="54864" marT="18288" marB="18288" anchor="ctr"/>
+                </a:tc>
+                <a:tc>
+                  <a:txBody>
+                    <a:bodyPr wrap="square"/>
+                    <a:lstStyle/>
+                    <a:p>
+                      <a:r>
+                        <a:rPr sz="1050" b="0">
+                          <a:ea typeface="맑은 고딕"/>
+                          <a:cs typeface="맑은 고딕"/>
+                        </a:rPr>
+                        <a:t>정적 모델 대비 오차 80 % 감소</a:t>
+                      </a:r>
+                    </a:p>
+                  </a:txBody>
+                  <a:tcPr marL="54864" marR="54864" marT="18288" marB="18288" anchor="ctr"/>
+                </a:tc>
+                <a:tc>
+                  <a:txBody>
+                    <a:bodyPr wrap="square"/>
+                    <a:lstStyle/>
+                    <a:p>
+                      <a:r>
+                        <a:rPr sz="1050" b="0">
+                          <a:ea typeface="맑은 고딕"/>
+                          <a:cs typeface="맑은 고딕"/>
+                        </a:rPr>
+                        <a:t>캠페인 드리프트(§8n)의 처방이 우리 shot별 표준화와 같은 방향</a:t>
+                      </a:r>
+                    </a:p>
+                  </a:txBody>
+                  <a:tcPr marL="54864" marR="54864" marT="18288" marB="18288" anchor="ctr"/>
+                </a:tc>
+              </a:tr>
+              <a:tr h="1543050">
+                <a:tc>
+                  <a:txBody>
+                    <a:bodyPr wrap="square"/>
+                    <a:lstStyle/>
+                    <a:p>
+                      <a:r>
+                        <a:rPr sz="1050" b="0">
+                          <a:ea typeface="맑은 고딕"/>
+                          <a:cs typeface="맑은 고딕"/>
+                        </a:rPr>
+                        <a:t>NN-CES (Fusion Eng. Des. 222:115518)</a:t>
+                      </a:r>
+                    </a:p>
+                  </a:txBody>
+                  <a:tcPr marL="54864" marR="54864" marT="18288" marB="18288" anchor="ctr"/>
+                </a:tc>
+                <a:tc>
+                  <a:txBody>
+                    <a:bodyPr wrap="square"/>
+                    <a:lstStyle/>
+                    <a:p>
+                      <a:r>
+                        <a:rPr sz="1050" b="0">
+                          <a:ea typeface="맑은 고딕"/>
+                          <a:cs typeface="맑은 고딕"/>
+                        </a:rPr>
+                        <a:t>KSTAR</a:t>
+                      </a:r>
+                    </a:p>
+                  </a:txBody>
+                  <a:tcPr marL="54864" marR="54864" marT="18288" marB="18288" anchor="ctr"/>
+                </a:tc>
+                <a:tc>
+                  <a:txBody>
+                    <a:bodyPr wrap="square"/>
+                    <a:lstStyle/>
+                    <a:p>
+                      <a:r>
+                        <a:rPr sz="1050" b="0">
+                          <a:ea typeface="맑은 고딕"/>
+                          <a:cs typeface="맑은 고딕"/>
+                        </a:rPr>
+                        <a:t>2025/26</a:t>
+                      </a:r>
+                    </a:p>
+                  </a:txBody>
+                  <a:tcPr marL="54864" marR="54864" marT="18288" marB="18288" anchor="ctr"/>
+                </a:tc>
+                <a:tc>
+                  <a:txBody>
+                    <a:bodyPr wrap="square"/>
+                    <a:lstStyle/>
+                    <a:p>
+                      <a:r>
+                        <a:rPr sz="1050" b="0">
+                          <a:ea typeface="맑은 고딕"/>
+                          <a:cs typeface="맑은 고딕"/>
+                        </a:rPr>
+                        <a:t>CES 스펙트럼에서 Ti·회전을 직접 추출한다 (빔 변조 없이)</a:t>
+                      </a:r>
+                    </a:p>
+                  </a:txBody>
+                  <a:tcPr marL="54864" marR="54864" marT="18288" marB="18288" anchor="ctr"/>
+                </a:tc>
+                <a:tc>
+                  <a:txBody>
+                    <a:bodyPr wrap="square"/>
+                    <a:lstStyle/>
+                    <a:p>
+                      <a:r>
+                        <a:rPr sz="1050" b="0">
+                          <a:ea typeface="맑은 고딕"/>
+                          <a:cs typeface="맑은 고딕"/>
+                        </a:rPr>
+                        <a:t>물리 제약을 넣은 신경망이 빔 변조 배경 차감을 대체한다</a:t>
+                      </a:r>
+                    </a:p>
+                  </a:txBody>
+                  <a:tcPr marL="54864" marR="54864" marT="18288" marB="18288" anchor="ctr"/>
+                </a:tc>
+                <a:tc>
+                  <a:txBody>
+                    <a:bodyPr wrap="square"/>
+                    <a:lstStyle/>
+                    <a:p>
+                      <a:r>
+                        <a:rPr sz="1050" b="0">
+                          <a:ea typeface="맑은 고딕"/>
+                          <a:cs typeface="맑은 고딕"/>
+                        </a:rPr>
+                        <a:t>KSTAR 약 150,000 프레임, L·H·locked·RMP 모드</a:t>
+                      </a:r>
+                    </a:p>
+                  </a:txBody>
+                  <a:tcPr marL="54864" marR="54864" marT="18288" marB="18288" anchor="ctr"/>
+                </a:tc>
+                <a:tc>
+                  <a:txBody>
+                    <a:bodyPr wrap="square"/>
+                    <a:lstStyle/>
+                    <a:p>
+                      <a:r>
+                        <a:rPr sz="1050" b="0">
+                          <a:ea typeface="맑은 고딕"/>
+                          <a:cs typeface="맑은 고딕"/>
+                        </a:rPr>
+                        <a:t>우리 장치·우리 진단의 가장 가까운 선행 연구. 구분은 명확하다 — NN-CES는 측정이 있는 시각을 읽고 우리는 없는 시각을 채운다. 입력이 CES 스펙트럼 자신이므로 프레임이 없는 곳에는 쓸 수 없다. 우리 결측이 그 변조 주기일 것이라 적었다가 §8at에서 측정하여 철회하였다(두 타깃 마스크 일치 72.8 %, 주기 없음). 남는 이득은 프레임별 적합 품질이며 그것이 값 컷을 대체한다</a:t>
+                      </a:r>
+                    </a:p>
+                  </a:txBody>
+                  <a:tcPr marL="54864" marR="54864" marT="18288" marB="18288" anchor="ctr"/>
+                </a:tc>
+              </a:tr>
+              <a:tr h="716279">
+                <a:tc>
+                  <a:txBody>
+                    <a:bodyPr wrap="square"/>
+                    <a:lstStyle/>
+                    <a:p>
+                      <a:r>
+                        <a:rPr sz="1050" b="0">
+                          <a:ea typeface="맑은 고딕"/>
+                          <a:cs typeface="맑은 고딕"/>
+                        </a:rPr>
+                        <a:t>SVMR + GPR 프로파일 추론 (NF 64:106052)</a:t>
+                      </a:r>
+                    </a:p>
+                  </a:txBody>
+                  <a:tcPr marL="54864" marR="54864" marT="18288" marB="18288" anchor="ctr"/>
+                </a:tc>
+                <a:tc>
+                  <a:txBody>
+                    <a:bodyPr wrap="square"/>
+                    <a:lstStyle/>
+                    <a:p>
+                      <a:r>
+                        <a:rPr sz="1050" b="0">
+                          <a:ea typeface="맑은 고딕"/>
+                          <a:cs typeface="맑은 고딕"/>
+                        </a:rPr>
+                        <a:t>KSTAR</a:t>
+                      </a:r>
+                    </a:p>
+                  </a:txBody>
+                  <a:tcPr marL="54864" marR="54864" marT="18288" marB="18288" anchor="ctr"/>
+                </a:tc>
+                <a:tc>
+                  <a:txBody>
+                    <a:bodyPr wrap="square"/>
+                    <a:lstStyle/>
+                    <a:p>
+                      <a:r>
+                        <a:rPr sz="1050" b="0">
+                          <a:ea typeface="맑은 고딕"/>
+                          <a:cs typeface="맑은 고딕"/>
+                        </a:rPr>
+                        <a:t>2024</a:t>
+                      </a:r>
+                    </a:p>
+                  </a:txBody>
+                  <a:tcPr marL="54864" marR="54864" marT="18288" marB="18288" anchor="ctr"/>
+                </a:tc>
+                <a:tc>
+                  <a:txBody>
+                    <a:bodyPr wrap="square"/>
+                    <a:lstStyle/>
+                    <a:p>
+                      <a:r>
+                        <a:rPr sz="1050" b="0">
+                          <a:ea typeface="맑은 고딕"/>
+                          <a:cs typeface="맑은 고딕"/>
+                        </a:rPr>
+                        <a:t>CES 측정에서 Ti 프로파일을 추론하며 이상치를 걸러낸다</a:t>
+                      </a:r>
+                    </a:p>
+                  </a:txBody>
+                  <a:tcPr marL="54864" marR="54864" marT="18288" marB="18288" anchor="ctr"/>
+                </a:tc>
+                <a:tc>
+                  <a:txBody>
+                    <a:bodyPr wrap="square"/>
+                    <a:lstStyle/>
+                    <a:p>
+                      <a:r>
+                        <a:rPr sz="1050" b="0">
+                          <a:ea typeface="맑은 고딕"/>
+                          <a:cs typeface="맑은 고딕"/>
+                        </a:rPr>
+                        <a:t>SVMR 이상치 분류기 + 비모수 GPR, 초매개변수는 MAP와 MCMC 두 방식</a:t>
+                      </a:r>
+                    </a:p>
+                  </a:txBody>
+                  <a:tcPr marL="54864" marR="54864" marT="18288" marB="18288" anchor="ctr"/>
+                </a:tc>
+                <a:tc>
+                  <a:txBody>
+                    <a:bodyPr wrap="square"/>
+                    <a:lstStyle/>
+                    <a:p>
+                      <a:r>
+                        <a:rPr sz="1050" b="0">
+                          <a:ea typeface="맑은 고딕"/>
+                          <a:cs typeface="맑은 고딕"/>
+                        </a:rPr>
+                        <a:t>KSTAR CES 측정 자료</a:t>
+                      </a:r>
+                    </a:p>
+                  </a:txBody>
+                  <a:tcPr marL="54864" marR="54864" marT="18288" marB="18288" anchor="ctr"/>
+                </a:tc>
+                <a:tc>
+                  <a:txBody>
+                    <a:bodyPr wrap="square"/>
+                    <a:lstStyle/>
+                    <a:p>
+                      <a:r>
+                        <a:rPr sz="1050" b="0">
+                          <a:ea typeface="맑은 고딕"/>
+                          <a:cs typeface="맑은 고딕"/>
+                        </a:rPr>
+                        <a:t>이상치를 자동으로 골라내는 절차가 우리 3 keV 값 컷의 원리적 대체물이다. 값이 아니라 측정 품질로 거르면 두 공동 1차 모집단이 하나로 합쳐진다</a:t>
+                      </a:r>
+                    </a:p>
+                  </a:txBody>
+                  <a:tcPr marL="54864" marR="54864" marT="18288" marB="18288" anchor="ctr"/>
+                </a:tc>
+              </a:tr>
+            </a:tbl>
+          </a:graphicData>
+        </a:graphic>
+      </p:graphicFrame>
+    </p:spTree>
+  </p:cSld>
+  <p:clrMapOvr>
+    <a:masterClrMapping/>
+  </p:clrMapOvr>
+</p:sld>
+</file>
+
+<file path=ppt/slides/slide59.xml><?xml version="1.0" encoding="utf-8"?>
+<p:sld xmlns:a="http://schemas.openxmlformats.org/drawingml/2006/main" xmlns:p="http://schemas.openxmlformats.org/presentationml/2006/main" xmlns:r="http://schemas.openxmlformats.org/officeDocument/2006/relationships">
+  <p:cSld>
+    <p:spTree>
+      <p:nvGrpSpPr>
+        <p:cNvPr id="1" name=""/>
+        <p:cNvGrpSpPr/>
+        <p:nvPr/>
+      </p:nvGrpSpPr>
+      <p:grpSpPr/>
+      <p:sp>
+        <p:nvSpPr>
+          <p:cNvPr id="2" name="Title 1"/>
+          <p:cNvSpPr>
+            <a:spLocks noGrp="1"/>
+          </p:cNvSpPr>
+          <p:nvPr>
+            <p:ph type="title"/>
+          </p:nvPr>
+        </p:nvSpPr>
+        <p:spPr>
+          <a:xfrm>
+            <a:off x="585216" y="704088"/>
+            <a:ext cx="11027664" cy="1014984"/>
+          </a:xfrm>
+        </p:spPr>
+        <p:txBody>
+          <a:bodyPr wrap="square"/>
+          <a:lstStyle/>
+          <a:p>
+            <a:r>
+              <a:rPr b="0" sz="2250">
+                <a:ea typeface="맑은 고딕"/>
+                <a:cs typeface="맑은 고딕"/>
+              </a:rPr>
+              <a:t>문헌 조사 (1/4, 4쪽): 핵융합의 진단-대-진단 추정은 여전히 단순한 구조가 주류이다</a:t>
+            </a:r>
+          </a:p>
+        </p:txBody>
+      </p:sp>
+      <p:sp>
+        <p:nvSpPr>
+          <p:cNvPr id="3" name="TextBox 2"/>
+          <p:cNvSpPr txBox="1"/>
+          <p:nvPr/>
+        </p:nvSpPr>
+        <p:spPr>
+          <a:xfrm>
+            <a:off x="585216" y="2029967"/>
+            <a:ext cx="11027664" cy="297688"/>
+          </a:xfrm>
+          <a:prstGeom prst="rect">
+            <a:avLst/>
+          </a:prstGeom>
+          <a:noFill/>
+        </p:spPr>
+        <p:txBody>
+          <a:bodyPr wrap="square">
+            <a:spAutoFit/>
+          </a:bodyPr>
+          <a:lstStyle/>
+          <a:p>
+            <a:pPr>
+              <a:spcAft>
+                <a:spcPts val="300"/>
+              </a:spcAft>
+            </a:pPr>
+            <a:r>
+              <a:rPr sz="1300">
+                <a:ea typeface="맑은 고딕"/>
+                <a:cs typeface="맑은 고딕"/>
+              </a:rPr>
+              <a:t>장치와 연도를 따로 두었다.</a:t>
+            </a:r>
+          </a:p>
+        </p:txBody>
+      </p:sp>
+      <p:graphicFrame>
+        <p:nvGraphicFramePr>
+          <p:cNvPr id="4" name="Table 3"/>
+          <p:cNvGraphicFramePr>
+            <a:graphicFrameLocks noGrp="1"/>
+          </p:cNvGraphicFramePr>
+          <p:nvPr/>
+        </p:nvGraphicFramePr>
+        <p:xfrm>
+          <a:off x="585216" y="2400807"/>
+          <a:ext cx="11027661" cy="3265424"/>
+        </p:xfrm>
+        <a:graphic>
+          <a:graphicData uri="http://schemas.openxmlformats.org/drawingml/2006/table">
+            <a:tbl>
+              <a:tblPr firstRow="1" bandRow="1">
+                <a:tableStyleId>{5C22544A-7EE6-4342-B048-85BDC9FD1C3A}</a:tableStyleId>
+              </a:tblPr>
+              <a:tblGrid>
+                <a:gridCol w="1552631"/>
+                <a:gridCol w="836032"/>
+                <a:gridCol w="676788"/>
+                <a:gridCol w="1473009"/>
+                <a:gridCol w="2428474"/>
+                <a:gridCol w="1234142"/>
+                <a:gridCol w="2826585"/>
+              </a:tblGrid>
+              <a:tr h="274320">
+                <a:tc>
+                  <a:txBody>
+                    <a:bodyPr wrap="square"/>
+                    <a:lstStyle/>
+                    <a:p>
+                      <a:r>
+                        <a:rPr sz="1100" b="1">
+                          <a:ea typeface="맑은 고딕"/>
+                          <a:cs typeface="맑은 고딕"/>
+                        </a:rPr>
+                        <a:t>논문</a:t>
+                      </a:r>
+                    </a:p>
+                  </a:txBody>
+                  <a:tcPr marL="54864" marR="54864" marT="18288" marB="18288" anchor="ctr"/>
+                </a:tc>
+                <a:tc>
+                  <a:txBody>
+                    <a:bodyPr wrap="square"/>
+                    <a:lstStyle/>
+                    <a:p>
+                      <a:r>
+                        <a:rPr sz="1100" b="1">
+                          <a:ea typeface="맑은 고딕"/>
+                          <a:cs typeface="맑은 고딕"/>
+                        </a:rPr>
+                        <a:t>장치</a:t>
+                      </a:r>
+                    </a:p>
+                  </a:txBody>
+                  <a:tcPr marL="54864" marR="54864" marT="18288" marB="18288" anchor="ctr"/>
+                </a:tc>
+                <a:tc>
+                  <a:txBody>
+                    <a:bodyPr wrap="square"/>
+                    <a:lstStyle/>
+                    <a:p>
+                      <a:r>
+                        <a:rPr sz="1100" b="1">
+                          <a:ea typeface="맑은 고딕"/>
+                          <a:cs typeface="맑은 고딕"/>
+                        </a:rPr>
+                        <a:t>연도</a:t>
+                      </a:r>
+                    </a:p>
+                  </a:txBody>
+                  <a:tcPr marL="54864" marR="54864" marT="18288" marB="18288" anchor="ctr"/>
+                </a:tc>
+                <a:tc>
+                  <a:txBody>
+                    <a:bodyPr wrap="square"/>
+                    <a:lstStyle/>
+                    <a:p>
+                      <a:r>
+                        <a:rPr sz="1100" b="1">
+                          <a:ea typeface="맑은 고딕"/>
+                          <a:cs typeface="맑은 고딕"/>
+                        </a:rPr>
+                        <a:t>문제</a:t>
+                      </a:r>
+                    </a:p>
+                  </a:txBody>
+                  <a:tcPr marL="54864" marR="54864" marT="18288" marB="18288" anchor="ctr"/>
+                </a:tc>
+                <a:tc>
+                  <a:txBody>
+                    <a:bodyPr wrap="square"/>
+                    <a:lstStyle/>
+                    <a:p>
+                      <a:r>
+                        <a:rPr sz="1100" b="1">
+                          <a:ea typeface="맑은 고딕"/>
+                          <a:cs typeface="맑은 고딕"/>
+                        </a:rPr>
+                        <a:t>구조</a:t>
+                      </a:r>
+                    </a:p>
+                  </a:txBody>
+                  <a:tcPr marL="54864" marR="54864" marT="18288" marB="18288" anchor="ctr"/>
+                </a:tc>
+                <a:tc>
+                  <a:txBody>
+                    <a:bodyPr wrap="square"/>
+                    <a:lstStyle/>
+                    <a:p>
+                      <a:r>
+                        <a:rPr sz="1100" b="1">
+                          <a:ea typeface="맑은 고딕"/>
+                          <a:cs typeface="맑은 고딕"/>
+                        </a:rPr>
+                        <a:t>데이터</a:t>
+                      </a:r>
+                    </a:p>
+                  </a:txBody>
+                  <a:tcPr marL="54864" marR="54864" marT="18288" marB="18288" anchor="ctr"/>
+                </a:tc>
+                <a:tc>
+                  <a:txBody>
+                    <a:bodyPr wrap="square"/>
+                    <a:lstStyle/>
+                    <a:p>
+                      <a:r>
+                        <a:rPr sz="1100" b="1">
+                          <a:ea typeface="맑은 고딕"/>
+                          <a:cs typeface="맑은 고딕"/>
+                        </a:rPr>
+                        <a:t>우리에게 의미</a:t>
+                      </a:r>
+                    </a:p>
+                  </a:txBody>
+                  <a:tcPr marL="54864" marR="54864" marT="18288" marB="18288" anchor="ctr"/>
+                </a:tc>
+              </a:tr>
+              <a:tr h="747776">
+                <a:tc>
+                  <a:txBody>
+                    <a:bodyPr wrap="square"/>
+                    <a:lstStyle/>
+                    <a:p>
+                      <a:r>
+                        <a:rPr sz="1100" b="0">
+                          <a:ea typeface="맑은 고딕"/>
+                          <a:cs typeface="맑은 고딕"/>
+                        </a:rPr>
+                        <a:t>이상치 강건 Bayesian mtanh 적합 (NF, arXiv 2607.14142)</a:t>
+                      </a:r>
+                    </a:p>
+                  </a:txBody>
+                  <a:tcPr marL="54864" marR="54864" marT="18288" marB="18288" anchor="ctr"/>
+                </a:tc>
+                <a:tc>
+                  <a:txBody>
+                    <a:bodyPr wrap="square"/>
+                    <a:lstStyle/>
+                    <a:p>
+                      <a:r>
+                        <a:rPr sz="1100" b="0">
+                          <a:ea typeface="맑은 고딕"/>
+                          <a:cs typeface="맑은 고딕"/>
+                        </a:rPr>
+                        <a:t>KSTAR</a:t>
+                      </a:r>
+                    </a:p>
+                  </a:txBody>
+                  <a:tcPr marL="54864" marR="54864" marT="18288" marB="18288" anchor="ctr"/>
+                </a:tc>
+                <a:tc>
+                  <a:txBody>
+                    <a:bodyPr wrap="square"/>
+                    <a:lstStyle/>
+                    <a:p>
+                      <a:r>
+                        <a:rPr sz="1100" b="0">
+                          <a:ea typeface="맑은 고딕"/>
+                          <a:cs typeface="맑은 고딕"/>
+                        </a:rPr>
+                        <a:t>2026</a:t>
+                      </a:r>
+                    </a:p>
+                  </a:txBody>
+                  <a:tcPr marL="54864" marR="54864" marT="18288" marB="18288" anchor="ctr"/>
+                </a:tc>
+                <a:tc>
+                  <a:txBody>
+                    <a:bodyPr wrap="square"/>
+                    <a:lstStyle/>
+                    <a:p>
+                      <a:r>
+                        <a:rPr sz="1100" b="0">
+                          <a:ea typeface="맑은 고딕"/>
+                          <a:cs typeface="맑은 고딕"/>
+                        </a:rPr>
+                        <a:t>TS·TCI·CES에서 ne·Te·Ti·v_T 프로파일을 동시에 적합한다</a:t>
+                      </a:r>
+                    </a:p>
+                  </a:txBody>
+                  <a:tcPr marL="54864" marR="54864" marT="18288" marB="18288" anchor="ctr"/>
+                </a:tc>
+                <a:tc>
+                  <a:txBody>
+                    <a:bodyPr wrap="square"/>
+                    <a:lstStyle/>
+                    <a:p>
+                      <a:r>
+                        <a:rPr sz="1100" b="0">
+                          <a:ea typeface="맑은 고딕"/>
+                          <a:cs typeface="맑은 고딕"/>
+                        </a:rPr>
+                        <a:t>수정 tanh 7모수 + good-and-bad 가우시안 혼합 우도, MAP 초기화 후 MCMC</a:t>
+                      </a:r>
+                    </a:p>
+                  </a:txBody>
+                  <a:tcPr marL="54864" marR="54864" marT="18288" marB="18288" anchor="ctr"/>
+                </a:tc>
+                <a:tc>
+                  <a:txBody>
+                    <a:bodyPr wrap="square"/>
+                    <a:lstStyle/>
+                    <a:p>
+                      <a:r>
+                        <a:rPr sz="1100" b="0">
+                          <a:ea typeface="맑은 고딕"/>
+                          <a:cs typeface="맑은 고딕"/>
+                        </a:rPr>
+                        <a:t>248 시간 조각을 24코어에서 78초</a:t>
+                      </a:r>
+                    </a:p>
+                  </a:txBody>
+                  <a:tcPr marL="54864" marR="54864" marT="18288" marB="18288" anchor="ctr"/>
+                </a:tc>
+                <a:tc>
+                  <a:txBody>
+                    <a:bodyPr wrap="square"/>
+                    <a:lstStyle/>
+                    <a:p>
+                      <a:r>
+                        <a:rPr sz="1100" b="0">
+                          <a:ea typeface="맑은 고딕"/>
+                          <a:cs typeface="맑은 고딕"/>
+                        </a:rPr>
+                        <a:t>CES 항을 NN-CES 산출로 바꿔 끼울 수 있게 설계되어 있다. 프로파일 단위 불확실성이 우리 타깃 재현성 바닥(§8aq)의 독립 비교값이 된다</a:t>
+                      </a:r>
+                    </a:p>
+                  </a:txBody>
+                  <a:tcPr marL="54864" marR="54864" marT="18288" marB="18288" anchor="ctr"/>
+                </a:tc>
+              </a:tr>
+              <a:tr h="747776">
+                <a:tc>
+                  <a:txBody>
+                    <a:bodyPr wrap="square"/>
+                    <a:lstStyle/>
+                    <a:p>
+                      <a:r>
+                        <a:rPr sz="1100" b="0">
+                          <a:ea typeface="맑은 고딕"/>
+                          <a:cs typeface="맑은 고딕"/>
+                        </a:rPr>
+                        <a:t>TSER 결측 Te 복원 (NF 65:076008)</a:t>
+                      </a:r>
+                    </a:p>
+                  </a:txBody>
+                  <a:tcPr marL="54864" marR="54864" marT="18288" marB="18288" anchor="ctr"/>
+                </a:tc>
+                <a:tc>
+                  <a:txBody>
+                    <a:bodyPr wrap="square"/>
+                    <a:lstStyle/>
+                    <a:p>
+                      <a:r>
+                        <a:rPr sz="1100" b="0">
+                          <a:ea typeface="맑은 고딕"/>
+                          <a:cs typeface="맑은 고딕"/>
+                        </a:rPr>
+                        <a:t>EAST</a:t>
+                      </a:r>
+                    </a:p>
+                  </a:txBody>
+                  <a:tcPr marL="54864" marR="54864" marT="18288" marB="18288" anchor="ctr"/>
+                </a:tc>
+                <a:tc>
+                  <a:txBody>
+                    <a:bodyPr wrap="square"/>
+                    <a:lstStyle/>
+                    <a:p>
+                      <a:r>
+                        <a:rPr sz="1100" b="0">
+                          <a:ea typeface="맑은 고딕"/>
+                          <a:cs typeface="맑은 고딕"/>
+                        </a:rPr>
+                        <a:t>2025</a:t>
+                      </a:r>
+                    </a:p>
+                  </a:txBody>
+                  <a:tcPr marL="54864" marR="54864" marT="18288" marB="18288" anchor="ctr"/>
+                </a:tc>
+                <a:tc>
+                  <a:txBody>
+                    <a:bodyPr wrap="square"/>
+                    <a:lstStyle/>
+                    <a:p>
+                      <a:r>
+                        <a:rPr sz="1100" b="0">
+                          <a:ea typeface="맑은 고딕"/>
+                          <a:cs typeface="맑은 고딕"/>
+                        </a:rPr>
+                        <a:t>센서 고장·진단 부재로 빠진 전자온도를 복원한다</a:t>
+                      </a:r>
+                    </a:p>
+                  </a:txBody>
+                  <a:tcPr marL="54864" marR="54864" marT="18288" marB="18288" anchor="ctr"/>
+                </a:tc>
+                <a:tc>
+                  <a:txBody>
+                    <a:bodyPr wrap="square"/>
+                    <a:lstStyle/>
+                    <a:p>
+                      <a:r>
+                        <a:rPr sz="1100" b="0">
+                          <a:ea typeface="맑은 고딕"/>
+                          <a:cs typeface="맑은 고딕"/>
+                        </a:rPr>
+                        <a:t>시계열 외재 회귀(TSER)가 여러 신호의 상호관계를 학습한다</a:t>
+                      </a:r>
+                    </a:p>
+                  </a:txBody>
+                  <a:tcPr marL="54864" marR="54864" marT="18288" marB="18288" anchor="ctr"/>
+                </a:tc>
+                <a:tc>
+                  <a:txBody>
+                    <a:bodyPr wrap="square"/>
+                    <a:lstStyle/>
+                    <a:p>
+                      <a:r>
+                        <a:rPr sz="1100" b="0">
+                          <a:ea typeface="맑은 고딕"/>
+                          <a:cs typeface="맑은 고딕"/>
+                        </a:rPr>
+                        <a:t>방전 전 구간에서 2σ 이내 신뢰수준 95.9 % 이상</a:t>
+                      </a:r>
+                    </a:p>
+                  </a:txBody>
+                  <a:tcPr marL="54864" marR="54864" marT="18288" marB="18288" anchor="ctr"/>
+                </a:tc>
+                <a:tc>
+                  <a:txBody>
+                    <a:bodyPr wrap="square"/>
+                    <a:lstStyle/>
+                    <a:p>
+                      <a:r>
+                        <a:rPr sz="1100" b="0">
+                          <a:ea typeface="맑은 고딕"/>
+                          <a:cs typeface="맑은 고딕"/>
+                        </a:rPr>
+                        <a:t>결측 타깃 복원이라는 우리 문제 정의와 가장 가까운 프레이밍이다. 다만 타깃이 전자온도이고 인과성 제약도, 보간 기준선과의 비교도 없다</a:t>
+                      </a:r>
+                    </a:p>
+                  </a:txBody>
+                  <a:tcPr marL="54864" marR="54864" marT="18288" marB="18288" anchor="ctr"/>
+                </a:tc>
+              </a:tr>
+              <a:tr h="747776">
+                <a:tc>
+                  <a:txBody>
+                    <a:bodyPr wrap="square"/>
+                    <a:lstStyle/>
+                    <a:p>
+                      <a:r>
+                        <a:rPr sz="1100" b="0">
+                          <a:ea typeface="맑은 고딕"/>
+                          <a:cs typeface="맑은 고딕"/>
+                        </a:rPr>
+                        <a:t>전 상태 복원 (arXiv 2607.04390)</a:t>
+                      </a:r>
+                    </a:p>
+                  </a:txBody>
+                  <a:tcPr marL="54864" marR="54864" marT="18288" marB="18288" anchor="ctr"/>
+                </a:tc>
+                <a:tc>
+                  <a:txBody>
+                    <a:bodyPr wrap="square"/>
+                    <a:lstStyle/>
+                    <a:p>
+                      <a:r>
+                        <a:rPr sz="1100" b="0">
+                          <a:ea typeface="맑은 고딕"/>
+                          <a:cs typeface="맑은 고딕"/>
+                        </a:rPr>
+                        <a:t>kinetic 시뮬레이션</a:t>
+                      </a:r>
+                    </a:p>
+                  </a:txBody>
+                  <a:tcPr marL="54864" marR="54864" marT="18288" marB="18288" anchor="ctr"/>
+                </a:tc>
+                <a:tc>
+                  <a:txBody>
+                    <a:bodyPr wrap="square"/>
+                    <a:lstStyle/>
+                    <a:p>
+                      <a:r>
+                        <a:rPr sz="1100" b="0">
+                          <a:ea typeface="맑은 고딕"/>
+                          <a:cs typeface="맑은 고딕"/>
+                        </a:rPr>
+                        <a:t>2026</a:t>
+                      </a:r>
+                    </a:p>
+                  </a:txBody>
+                  <a:tcPr marL="54864" marR="54864" marT="18288" marB="18288" anchor="ctr"/>
+                </a:tc>
+                <a:tc>
+                  <a:txBody>
+                    <a:bodyPr wrap="square"/>
+                    <a:lstStyle/>
+                    <a:p>
+                      <a:r>
+                        <a:rPr sz="1100" b="0">
+                          <a:ea typeface="맑은 고딕"/>
+                          <a:cs typeface="맑은 고딕"/>
+                        </a:rPr>
+                        <a:t>희소한 밀도 프로브 몇 개로 전 영역 플라즈마 장을 복원한다</a:t>
+                      </a:r>
+                    </a:p>
+                  </a:txBody>
+                  <a:tcPr marL="54864" marR="54864" marT="18288" marB="18288" anchor="ctr"/>
+                </a:tc>
+                <a:tc>
+                  <a:txBody>
+                    <a:bodyPr wrap="square"/>
+                    <a:lstStyle/>
+                    <a:p>
+                      <a:r>
+                        <a:rPr sz="1100" b="0">
+                          <a:ea typeface="맑은 고딕"/>
+                          <a:cs typeface="맑은 고딕"/>
+                        </a:rPr>
+                        <a:t>희소 센서 이력의 시간 인코딩 + 공간 디코딩</a:t>
+                      </a:r>
+                    </a:p>
+                  </a:txBody>
+                  <a:tcPr marL="54864" marR="54864" marT="18288" marB="18288" anchor="ctr"/>
+                </a:tc>
+                <a:tc>
+                  <a:txBody>
+                    <a:bodyPr wrap="square"/>
+                    <a:lstStyle/>
+                    <a:p>
+                      <a:r>
+                        <a:rPr sz="1100" b="0">
+                          <a:ea typeface="맑은 고딕"/>
+                          <a:cs typeface="맑은 고딕"/>
+                        </a:rPr>
+                        <a:t>고정밀 kinetic 시뮬레이션 자료 (실험 데이터 아님)</a:t>
+                      </a:r>
+                    </a:p>
+                  </a:txBody>
+                  <a:tcPr marL="54864" marR="54864" marT="18288" marB="18288" anchor="ctr"/>
+                </a:tc>
+                <a:tc>
+                  <a:txBody>
+                    <a:bodyPr wrap="square"/>
+                    <a:lstStyle/>
+                    <a:p>
+                      <a:r>
+                        <a:rPr sz="1100" b="0">
+                          <a:ea typeface="맑은 고딕"/>
+                          <a:cs typeface="맑은 고딕"/>
+                        </a:rPr>
+                        <a:t>센서 몇 개로 전체 상태를 세우는 구조는 우리와 같으나 실험이 아니라 시뮬레이션에서 검증되었다</a:t>
+                      </a:r>
+                    </a:p>
+                  </a:txBody>
+                  <a:tcPr marL="54864" marR="54864" marT="18288" marB="18288" anchor="ctr"/>
+                </a:tc>
+              </a:tr>
+              <a:tr h="747776">
+                <a:tc>
+                  <a:txBody>
+                    <a:bodyPr wrap="square"/>
+                    <a:lstStyle/>
+                    <a:p>
+                      <a:r>
+                        <a:rPr sz="1100" b="0">
+                          <a:ea typeface="맑은 고딕"/>
+                          <a:cs typeface="맑은 고딕"/>
+                        </a:rPr>
+                        <a:t>평형 재구성 챌린지 (arXiv 2609.01750)</a:t>
+                      </a:r>
+                    </a:p>
+                  </a:txBody>
+                  <a:tcPr marL="54864" marR="54864" marT="18288" marB="18288" anchor="ctr"/>
+                </a:tc>
+                <a:tc>
+                  <a:txBody>
+                    <a:bodyPr wrap="square"/>
+                    <a:lstStyle/>
+                    <a:p>
+                      <a:r>
+                        <a:rPr sz="1100" b="0">
+                          <a:ea typeface="맑은 고딕"/>
+                          <a:cs typeface="맑은 고딕"/>
+                        </a:rPr>
+                        <a:t>DIII-D · MAST</a:t>
+                      </a:r>
+                    </a:p>
+                  </a:txBody>
+                  <a:tcPr marL="54864" marR="54864" marT="18288" marB="18288" anchor="ctr"/>
+                </a:tc>
+                <a:tc>
+                  <a:txBody>
+                    <a:bodyPr wrap="square"/>
+                    <a:lstStyle/>
+                    <a:p>
+                      <a:r>
+                        <a:rPr sz="1100" b="0">
+                          <a:ea typeface="맑은 고딕"/>
+                          <a:cs typeface="맑은 고딕"/>
+                        </a:rPr>
+                        <a:t>2026</a:t>
+                      </a:r>
+                    </a:p>
+                  </a:txBody>
+                  <a:tcPr marL="54864" marR="54864" marT="18288" marB="18288" anchor="ctr"/>
+                </a:tc>
+                <a:tc>
+                  <a:txBody>
+                    <a:bodyPr wrap="square"/>
+                    <a:lstStyle/>
+                    <a:p>
+                      <a:r>
+                        <a:rPr sz="1100" b="0">
+                          <a:ea typeface="맑은 고딕"/>
+                          <a:cs typeface="맑은 고딕"/>
+                        </a:rPr>
+                        <a:t>자기 진단 없이 자기 기하를 추론하는 공개 벤치마크</a:t>
+                      </a:r>
+                    </a:p>
+                  </a:txBody>
+                  <a:tcPr marL="54864" marR="54864" marT="18288" marB="18288" anchor="ctr"/>
+                </a:tc>
+                <a:tc>
+                  <a:txBody>
+                    <a:bodyPr wrap="square"/>
+                    <a:lstStyle/>
+                    <a:p>
+                      <a:r>
+                        <a:rPr sz="1100" b="0">
+                          <a:ea typeface="맑은 고딕"/>
+                          <a:cs typeface="맑은 고딕"/>
+                        </a:rPr>
+                        <a:t>PF 코일 전류 + Thomson으로 ψ(R,Z). 기준선 4종(PCA+Ridge / GBT / MLP / conv 디코더)</a:t>
+                      </a:r>
+                    </a:p>
+                  </a:txBody>
+                  <a:tcPr marL="54864" marR="54864" marT="18288" marB="18288" anchor="ctr"/>
+                </a:tc>
+                <a:tc>
+                  <a:txBody>
+                    <a:bodyPr wrap="square"/>
+                    <a:lstStyle/>
+                    <a:p>
+                      <a:r>
+                        <a:rPr sz="1100" b="0">
+                          <a:ea typeface="맑은 고딕"/>
+                          <a:cs typeface="맑은 고딕"/>
+                        </a:rPr>
+                        <a:t>DIII-D 약 9,100 shot · MAST 약 2,400 shot</a:t>
+                      </a:r>
+                    </a:p>
+                  </a:txBody>
+                  <a:tcPr marL="54864" marR="54864" marT="18288" marB="18288" anchor="ctr"/>
+                </a:tc>
+                <a:tc>
+                  <a:txBody>
+                    <a:bodyPr wrap="square"/>
+                    <a:lstStyle/>
+                    <a:p>
+                      <a:r>
+                        <a:rPr sz="1100" b="0">
+                          <a:ea typeface="맑은 고딕"/>
+                          <a:cs typeface="맑은 고딕"/>
+                        </a:rPr>
+                        <a:t>진단 하나가 없을 때 다른 진단으로 대신한다는 문제를 공개 벤치마크로 만든 사례. 이온 채널은 다루지 않으며 shot 단위 분할과 교차 장치 일반화를 요구한다</a:t>
+                      </a:r>
+                    </a:p>
+                  </a:txBody>
+                  <a:tcPr marL="54864" marR="54864" marT="18288" marB="18288" anchor="ctr"/>
+                </a:tc>
+              </a:tr>
+            </a:tbl>
+          </a:graphicData>
+        </a:graphic>
+      </p:graphicFrame>
+    </p:spTree>
+  </p:cSld>
+  <p:clrMapOvr>
+    <a:masterClrMapping/>
+  </p:clrMapOvr>
+</p:sld>
+</file>
+
+<file path=ppt/slides/slide6.xml><?xml version="1.0" encoding="utf-8"?>
+<p:sld xmlns:a="http://schemas.openxmlformats.org/drawingml/2006/main" xmlns:p="http://schemas.openxmlformats.org/presentationml/2006/main" xmlns:r="http://schemas.openxmlformats.org/officeDocument/2006/relationships">
+  <p:cSld>
+    <p:spTree>
+      <p:nvGrpSpPr>
+        <p:cNvPr id="1" name=""/>
+        <p:cNvGrpSpPr/>
+        <p:nvPr/>
+      </p:nvGrpSpPr>
+      <p:grpSpPr/>
+      <p:sp>
+        <p:nvSpPr>
+          <p:cNvPr id="2" name="Title 1"/>
+          <p:cNvSpPr>
+            <a:spLocks noGrp="1"/>
+          </p:cNvSpPr>
+          <p:nvPr>
+            <p:ph type="title"/>
+          </p:nvPr>
+        </p:nvSpPr>
+        <p:spPr>
+          <a:xfrm>
+            <a:off x="585216" y="704088"/>
+            <a:ext cx="11027664" cy="1014984"/>
+          </a:xfrm>
+        </p:spPr>
+        <p:txBody>
+          <a:bodyPr wrap="square"/>
+          <a:lstStyle/>
+          <a:p>
+            <a:r>
+              <a:rPr b="0" sz="2800">
+                <a:ea typeface="맑은 고딕"/>
+                <a:cs typeface="맑은 고딕"/>
+              </a:rPr>
+              <a:t>기여는 다섯 가지로 요약된다</a:t>
+            </a:r>
+          </a:p>
+        </p:txBody>
+      </p:sp>
+      <p:sp>
+        <p:nvSpPr>
+          <p:cNvPr id="3" name="Content Placeholder 2"/>
+          <p:cNvSpPr>
+            <a:spLocks noGrp="1"/>
+          </p:cNvSpPr>
+          <p:nvPr>
+            <p:ph idx="1"/>
+          </p:nvPr>
+        </p:nvSpPr>
+        <p:spPr>
+          <a:xfrm>
+            <a:off x="585216" y="2176272"/>
+            <a:ext cx="11027664" cy="3675887"/>
+          </a:xfrm>
+        </p:spPr>
+        <p:txBody>
+          <a:bodyPr wrap="square"/>
+          <a:lstStyle/>
+          <a:p>
+            <a:pPr>
+              <a:spcAft>
+                <a:spcPts val="576"/>
+              </a:spcAft>
+            </a:pPr>
+            <a:r>
+              <a:rPr sz="1730">
+                <a:ea typeface="맑은 고딕"/>
+                <a:cs typeface="맑은 고딕"/>
+              </a:rPr>
+              <a:t>① 희소 타겟 나우캐스팅을 위한 인과적 전체격자 프레이밍. 라벨 없는 행을 버리는 대신 맥락으로 유지하고 희소성을 손실로 옮긴다.</a:t>
+            </a:r>
+          </a:p>
+          <a:p>
+            <a:pPr lvl="1">
+              <a:spcAft>
+                <a:spcPts val="288"/>
+              </a:spcAft>
+            </a:pPr>
+            <a:r>
+              <a:rPr sz="1540">
+                <a:ea typeface="맑은 고딕"/>
+                <a:cs typeface="맑은 고딕"/>
+              </a:rPr>
+              <a:t>짝지은 윈도 대조군 대비 통합 T_i skill +0.081(16회 실행, CI [+0.067, +0.096], 16/16 양수)이며 학습 비용은 오히려 더 싸다.</a:t>
+            </a:r>
+          </a:p>
+          <a:p>
+            <a:pPr>
+              <a:spcAft>
+                <a:spcPts val="576"/>
+              </a:spcAft>
+            </a:pPr>
+            <a:r>
+              <a:rPr sz="1730">
+                <a:ea typeface="맑은 고딕"/>
+                <a:cs typeface="맑은 고딕"/>
+              </a:rPr>
+              <a:t>② 사전등록된 두-모집단 shot 군집 평가 프로토콜. W=2, 유지값 전 구간 제거, 피팅 실패 0.53 %에 대한 두 공동 1차 모집단, 선택이 읽지 않는 test 셋.</a:t>
+            </a:r>
+          </a:p>
+          <a:p>
+            <a:pPr>
+              <a:spcAft>
+                <a:spcPts val="576"/>
+              </a:spcAft>
+            </a:pPr>
+            <a:r>
+              <a:rPr sz="1730">
+                <a:ea typeface="맑은 고딕"/>
+                <a:cs typeface="맑은 고딕"/>
+              </a:rPr>
+              <a:t>③ T_i에 대한 강건한 긍정 결과. 미래를 쓰는 PCHIP 대비 skill +0.17~+0.32로 두 모집단의 4개 분할 전부에서 PASS이고, 8개 셀 전부에서 인과 GP를 이긴다.</a:t>
+            </a:r>
+          </a:p>
+          <a:p>
+            <a:pPr>
+              <a:spcAft>
+                <a:spcPts val="576"/>
+              </a:spcAft>
+            </a:pPr>
+            <a:r>
+              <a:rPr sz="1730">
+                <a:ea typeface="맑은 고딕"/>
+                <a:cs typeface="맑은 고딕"/>
+              </a:rPr>
+              <a:t>④ V_rot에 대한 물리 기반 부정 결과. 동률이며(1/4·2/4 유의) 고속 진단을 0으로 만들어도 출력이 비트 단위로 동일하다.</a:t>
+            </a:r>
+          </a:p>
+          <a:p>
+            <a:pPr>
+              <a:spcAft>
+                <a:spcPts val="576"/>
+              </a:spcAft>
+            </a:pPr>
+            <a:r>
+              <a:rPr sz="1730">
+                <a:ea typeface="맑은 고딕"/>
+                <a:cs typeface="맑은 고딕"/>
+              </a:rPr>
+              <a:t>⑤ 두 개의 스트레스 테스트(MNAR 재가중·캠페인 이동), 복잡도와 크기 축의 종결, 문맥과 구조의 분리, 그리고 측정된 배치 가능성.</a:t>
+            </a:r>
+          </a:p>
+        </p:txBody>
+      </p:sp>
+    </p:spTree>
+  </p:cSld>
+  <p:clrMapOvr>
+    <a:masterClrMapping/>
+  </p:clrMapOvr>
+</p:sld>
+</file>
+
+<file path=ppt/slides/slide60.xml><?xml version="1.0" encoding="utf-8"?>
 <p:sld xmlns:a="http://schemas.openxmlformats.org/drawingml/2006/main" xmlns:p="http://schemas.openxmlformats.org/presentationml/2006/main" xmlns:r="http://schemas.openxmlformats.org/officeDocument/2006/relationships">
   <p:cSld>
     <p:spTree>
@@ -27028,7 +28216,7 @@
 </p:sld>
 </file>
 
-<file path=ppt/slides/slide59.xml><?xml version="1.0" encoding="utf-8"?>
+<file path=ppt/slides/slide61.xml><?xml version="1.0" encoding="utf-8"?>
 <p:sld xmlns:a="http://schemas.openxmlformats.org/drawingml/2006/main" xmlns:p="http://schemas.openxmlformats.org/presentationml/2006/main" xmlns:r="http://schemas.openxmlformats.org/officeDocument/2006/relationships">
   <p:cSld>
     <p:spTree>
@@ -27597,160 +28785,7 @@
 </p:sld>
 </file>
 
-<file path=ppt/slides/slide6.xml><?xml version="1.0" encoding="utf-8"?>
-<p:sld xmlns:a="http://schemas.openxmlformats.org/drawingml/2006/main" xmlns:p="http://schemas.openxmlformats.org/presentationml/2006/main" xmlns:r="http://schemas.openxmlformats.org/officeDocument/2006/relationships">
-  <p:cSld>
-    <p:spTree>
-      <p:nvGrpSpPr>
-        <p:cNvPr id="1" name=""/>
-        <p:cNvGrpSpPr/>
-        <p:nvPr/>
-      </p:nvGrpSpPr>
-      <p:grpSpPr/>
-      <p:sp>
-        <p:nvSpPr>
-          <p:cNvPr id="2" name="Title 1"/>
-          <p:cNvSpPr>
-            <a:spLocks noGrp="1"/>
-          </p:cNvSpPr>
-          <p:nvPr>
-            <p:ph type="title"/>
-          </p:nvPr>
-        </p:nvSpPr>
-        <p:spPr>
-          <a:xfrm>
-            <a:off x="585216" y="704088"/>
-            <a:ext cx="11027664" cy="1014984"/>
-          </a:xfrm>
-        </p:spPr>
-        <p:txBody>
-          <a:bodyPr wrap="square"/>
-          <a:lstStyle/>
-          <a:p>
-            <a:r>
-              <a:rPr b="0" sz="2800">
-                <a:ea typeface="맑은 고딕"/>
-                <a:cs typeface="맑은 고딕"/>
-              </a:rPr>
-              <a:t>기여는 다섯 가지로 요약된다</a:t>
-            </a:r>
-          </a:p>
-        </p:txBody>
-      </p:sp>
-      <p:sp>
-        <p:nvSpPr>
-          <p:cNvPr id="3" name="Content Placeholder 2"/>
-          <p:cNvSpPr>
-            <a:spLocks noGrp="1"/>
-          </p:cNvSpPr>
-          <p:nvPr>
-            <p:ph idx="1"/>
-          </p:nvPr>
-        </p:nvSpPr>
-        <p:spPr>
-          <a:xfrm>
-            <a:off x="585216" y="2176272"/>
-            <a:ext cx="11027664" cy="3675887"/>
-          </a:xfrm>
-        </p:spPr>
-        <p:txBody>
-          <a:bodyPr wrap="square"/>
-          <a:lstStyle/>
-          <a:p>
-            <a:pPr>
-              <a:spcAft>
-                <a:spcPts val="576"/>
-              </a:spcAft>
-            </a:pPr>
-            <a:r>
-              <a:rPr sz="1730">
-                <a:ea typeface="맑은 고딕"/>
-                <a:cs typeface="맑은 고딕"/>
-              </a:rPr>
-              <a:t>① 희소 타겟 나우캐스팅을 위한 인과적 전체격자 프레이밍. 라벨 없는 행을 버리는 대신 맥락으로 유지하고 희소성을 손실로 옮긴다.</a:t>
-            </a:r>
-          </a:p>
-          <a:p>
-            <a:pPr lvl="1">
-              <a:spcAft>
-                <a:spcPts val="288"/>
-              </a:spcAft>
-            </a:pPr>
-            <a:r>
-              <a:rPr sz="1540">
-                <a:ea typeface="맑은 고딕"/>
-                <a:cs typeface="맑은 고딕"/>
-              </a:rPr>
-              <a:t>짝지은 윈도 대조군 대비 통합 T_i skill +0.081(16회 실행, CI [+0.067, +0.096], 16/16 양수)이며 학습 비용은 오히려 더 싸다.</a:t>
-            </a:r>
-          </a:p>
-          <a:p>
-            <a:pPr>
-              <a:spcAft>
-                <a:spcPts val="576"/>
-              </a:spcAft>
-            </a:pPr>
-            <a:r>
-              <a:rPr sz="1730">
-                <a:ea typeface="맑은 고딕"/>
-                <a:cs typeface="맑은 고딕"/>
-              </a:rPr>
-              <a:t>② 사전등록된 두-모집단 shot 군집 평가 프로토콜. W=2, 유지값 전 구간 제거, 피팅 실패 0.53 %에 대한 두 공동 1차 모집단, 선택이 읽지 않는 test 셋.</a:t>
-            </a:r>
-          </a:p>
-          <a:p>
-            <a:pPr>
-              <a:spcAft>
-                <a:spcPts val="576"/>
-              </a:spcAft>
-            </a:pPr>
-            <a:r>
-              <a:rPr sz="1730">
-                <a:ea typeface="맑은 고딕"/>
-                <a:cs typeface="맑은 고딕"/>
-              </a:rPr>
-              <a:t>③ T_i에 대한 강건한 긍정 결과. 미래를 쓰는 PCHIP 대비 skill +0.17~+0.32로 두 모집단의 4개 분할 전부에서 PASS이고, 8개 셀 전부에서 인과 GP를 이긴다.</a:t>
-            </a:r>
-          </a:p>
-          <a:p>
-            <a:pPr>
-              <a:spcAft>
-                <a:spcPts val="576"/>
-              </a:spcAft>
-            </a:pPr>
-            <a:r>
-              <a:rPr sz="1730">
-                <a:ea typeface="맑은 고딕"/>
-                <a:cs typeface="맑은 고딕"/>
-              </a:rPr>
-              <a:t>④ V_rot에 대한 물리 기반 부정 결과. 동률이며(1/4·2/4 유의) 고속 진단을 0으로 만들어도 출력이 비트 단위로 동일하다.</a:t>
-            </a:r>
-          </a:p>
-          <a:p>
-            <a:pPr>
-              <a:spcAft>
-                <a:spcPts val="576"/>
-              </a:spcAft>
-            </a:pPr>
-            <a:r>
-              <a:rPr sz="1730">
-                <a:ea typeface="맑은 고딕"/>
-                <a:cs typeface="맑은 고딕"/>
-              </a:rPr>
-              <a:t>⑤ 두 개의 스트레스 테스트(MNAR 재가중·캠페인 이동), 복잡도와 크기 축의 종결, 문맥과 구조의 분리, 그리고 측정된 배치 가능성.</a:t>
-            </a:r>
-          </a:p>
-        </p:txBody>
-      </p:sp>
-    </p:spTree>
-  </p:cSld>
-  <p:clrMapOvr>
-    <a:masterClrMapping/>
-  </p:clrMapOvr>
-</p:sld>
-</file>
-
-<file path=ppt/slides/slide60.xml><?xml version="1.0" encoding="utf-8"?>
+<file path=ppt/slides/slide62.xml><?xml version="1.0" encoding="utf-8"?>
 <p:sld xmlns:a="http://schemas.openxmlformats.org/drawingml/2006/main" xmlns:p="http://schemas.openxmlformats.org/presentationml/2006/main" xmlns:r="http://schemas.openxmlformats.org/officeDocument/2006/relationships">
   <p:cSld>
     <p:spTree>
@@ -28438,7 +29473,7 @@
 </p:sld>
 </file>
 
-<file path=ppt/slides/slide61.xml><?xml version="1.0" encoding="utf-8"?>
+<file path=ppt/slides/slide63.xml><?xml version="1.0" encoding="utf-8"?>
 <p:sld xmlns:a="http://schemas.openxmlformats.org/drawingml/2006/main" xmlns:p="http://schemas.openxmlformats.org/presentationml/2006/main" xmlns:r="http://schemas.openxmlformats.org/officeDocument/2006/relationships">
   <p:cSld>
     <p:spTree>
@@ -28525,7 +29560,7 @@
         </p:nvGraphicFramePr>
         <p:xfrm>
           <a:off x="585216" y="2400807"/>
-          <a:ext cx="11027661" cy="2956560"/>
+          <a:ext cx="11027661" cy="3129788"/>
         </p:xfrm>
         <a:graphic>
           <a:graphicData uri="http://schemas.openxmlformats.org/drawingml/2006/table">
@@ -28868,7 +29903,7 @@
                   <a:tcPr marL="54864" marR="54864" marT="18288" marB="18288" anchor="ctr"/>
                 </a:tc>
               </a:tr>
-              <a:tr h="401320">
+              <a:tr h="574548">
                 <a:tc>
                   <a:txBody>
                     <a:bodyPr wrap="square"/>
@@ -28895,7 +29930,7 @@
                           <a:ea typeface="맑은 고딕"/>
                           <a:cs typeface="맑은 고딕"/>
                         </a:rPr>
-                        <a:t>CES 재분석: NN-CES 산출과 적합 품질 메타데이터를 확보해 값 컷을 품질 컷으로 바꾼다</a:t>
+                        <a:t>CES 재분석: NN-CES 산출과 적합 품질 메타데이터를 확보해 값 컷을 품질 컷으로 바꾼다 (결측 자체가 줄어든다는 기대는 §8at에서 철회)</a:t>
                       </a:r>
                     </a:p>
                   </a:txBody>
@@ -28927,7 +29962,7 @@
                           <a:ea typeface="맑은 고딕"/>
                           <a:cs typeface="맑은 고딕"/>
                         </a:rPr>
-                        <a:t>데이터 요청</a:t>
+                        <a:t>KFE 데이터 요청</a:t>
                       </a:r>
                     </a:p>
                   </a:txBody>
@@ -29208,7 +30243,7 @@
 </p:sld>
 </file>
 
-<file path=ppt/slides/slide62.xml><?xml version="1.0" encoding="utf-8"?>
+<file path=ppt/slides/slide64.xml><?xml version="1.0" encoding="utf-8"?>
 <p:sld xmlns:a="http://schemas.openxmlformats.org/drawingml/2006/main" xmlns:p="http://schemas.openxmlformats.org/presentationml/2006/main" xmlns:r="http://schemas.openxmlformats.org/officeDocument/2006/relationships">
   <p:cSld>
     <p:spTree>

--- a/docs/presentation/KSTAR_CES_졸논정리_논문흐름.pptx
+++ b/docs/presentation/KSTAR_CES_졸논정리_논문흐름.pptx
@@ -72,6 +72,7 @@
     <p:sldId id="317" r:id="rId68"/>
     <p:sldId id="318" r:id="rId69"/>
     <p:sldId id="319" r:id="rId70"/>
+    <p:sldId id="320" r:id="rId71"/>
   </p:sldIdLst>
   <p:sldSz cx="12192000" cy="6858000"/>
   <p:notesSz cx="6858000" cy="9144000"/>
@@ -4526,6 +4527,42 @@
                 <a:ea typeface="맑은 고딕"/>
                 <a:cs typeface="맑은 고딕"/>
               </a:rPr>
+              <a:t>- 이분산 신경망 대리모델 (Thomson): https://arxiv.org/abs/2608.19377</a:t>
+            </a:r>
+          </a:p>
+          <a:p>
+            <a:r>
+              <a:rPr>
+                <a:ea typeface="맑은 고딕"/>
+                <a:cs typeface="맑은 고딕"/>
+              </a:rPr>
+              <a:t>- KSTAR XICS 실시간 Ti 측정: https://doi.org/10.1016/j.fusengdes.2023.113570</a:t>
+            </a:r>
+          </a:p>
+          <a:p>
+            <a:r>
+              <a:rPr>
+                <a:ea typeface="맑은 고딕"/>
+                <a:cs typeface="맑은 고딕"/>
+              </a:rPr>
+              <a:t>- TorbeamNN (KSTAR PCS 실장): https://arxiv.org/abs/2504.11648</a:t>
+            </a:r>
+          </a:p>
+          <a:p>
+            <a:r>
+              <a:rPr>
+                <a:ea typeface="맑은 고딕"/>
+                <a:cs typeface="맑은 고딕"/>
+              </a:rPr>
+              <a:t>- KSTAR UFO 사건 예측 (NF 2026): https://doi.org/10.1088/1741-4326/ae91fc</a:t>
+            </a:r>
+          </a:p>
+          <a:p>
+            <a:r>
+              <a:rPr>
+                <a:ea typeface="맑은 고딕"/>
+                <a:cs typeface="맑은 고딕"/>
+              </a:rPr>
               <a:t>- JET CXRS 신경망 (1993, 계보의 시작): https://www.microsoft.com/en-us/research/wp-content/uploads/2016/02/bishop-cxrs-ppcf-93.pdf</a:t>
             </a:r>
           </a:p>
@@ -5014,6 +5051,42 @@
                 <a:ea typeface="맑은 고딕"/>
                 <a:cs typeface="맑은 고딕"/>
               </a:rPr>
+              <a:t>- 이분산 신경망 대리모델 (Thomson): https://arxiv.org/abs/2608.19377</a:t>
+            </a:r>
+          </a:p>
+          <a:p>
+            <a:r>
+              <a:rPr>
+                <a:ea typeface="맑은 고딕"/>
+                <a:cs typeface="맑은 고딕"/>
+              </a:rPr>
+              <a:t>- KSTAR XICS 실시간 Ti 측정: https://doi.org/10.1016/j.fusengdes.2023.113570</a:t>
+            </a:r>
+          </a:p>
+          <a:p>
+            <a:r>
+              <a:rPr>
+                <a:ea typeface="맑은 고딕"/>
+                <a:cs typeface="맑은 고딕"/>
+              </a:rPr>
+              <a:t>- TorbeamNN (KSTAR PCS 실장): https://arxiv.org/abs/2504.11648</a:t>
+            </a:r>
+          </a:p>
+          <a:p>
+            <a:r>
+              <a:rPr>
+                <a:ea typeface="맑은 고딕"/>
+                <a:cs typeface="맑은 고딕"/>
+              </a:rPr>
+              <a:t>- KSTAR UFO 사건 예측 (NF 2026): https://doi.org/10.1088/1741-4326/ae91fc</a:t>
+            </a:r>
+          </a:p>
+          <a:p>
+            <a:r>
+              <a:rPr>
+                <a:ea typeface="맑은 고딕"/>
+                <a:cs typeface="맑은 고딕"/>
+              </a:rPr>
               <a:t>- JET CXRS 신경망 (1993, 계보의 시작): https://www.microsoft.com/en-us/research/wp-content/uploads/2016/02/bishop-cxrs-ppcf-93.pdf</a:t>
             </a:r>
           </a:p>
@@ -5502,6 +5575,42 @@
                 <a:ea typeface="맑은 고딕"/>
                 <a:cs typeface="맑은 고딕"/>
               </a:rPr>
+              <a:t>- 이분산 신경망 대리모델 (Thomson): https://arxiv.org/abs/2608.19377</a:t>
+            </a:r>
+          </a:p>
+          <a:p>
+            <a:r>
+              <a:rPr>
+                <a:ea typeface="맑은 고딕"/>
+                <a:cs typeface="맑은 고딕"/>
+              </a:rPr>
+              <a:t>- KSTAR XICS 실시간 Ti 측정: https://doi.org/10.1016/j.fusengdes.2023.113570</a:t>
+            </a:r>
+          </a:p>
+          <a:p>
+            <a:r>
+              <a:rPr>
+                <a:ea typeface="맑은 고딕"/>
+                <a:cs typeface="맑은 고딕"/>
+              </a:rPr>
+              <a:t>- TorbeamNN (KSTAR PCS 실장): https://arxiv.org/abs/2504.11648</a:t>
+            </a:r>
+          </a:p>
+          <a:p>
+            <a:r>
+              <a:rPr>
+                <a:ea typeface="맑은 고딕"/>
+                <a:cs typeface="맑은 고딕"/>
+              </a:rPr>
+              <a:t>- KSTAR UFO 사건 예측 (NF 2026): https://doi.org/10.1088/1741-4326/ae91fc</a:t>
+            </a:r>
+          </a:p>
+          <a:p>
+            <a:r>
+              <a:rPr>
+                <a:ea typeface="맑은 고딕"/>
+                <a:cs typeface="맑은 고딕"/>
+              </a:rPr>
               <a:t>- JET CXRS 신경망 (1993, 계보의 시작): https://www.microsoft.com/en-us/research/wp-content/uploads/2016/02/bishop-cxrs-ppcf-93.pdf</a:t>
             </a:r>
           </a:p>
@@ -5990,6 +6099,42 @@
                 <a:ea typeface="맑은 고딕"/>
                 <a:cs typeface="맑은 고딕"/>
               </a:rPr>
+              <a:t>- 이분산 신경망 대리모델 (Thomson): https://arxiv.org/abs/2608.19377</a:t>
+            </a:r>
+          </a:p>
+          <a:p>
+            <a:r>
+              <a:rPr>
+                <a:ea typeface="맑은 고딕"/>
+                <a:cs typeface="맑은 고딕"/>
+              </a:rPr>
+              <a:t>- KSTAR XICS 실시간 Ti 측정: https://doi.org/10.1016/j.fusengdes.2023.113570</a:t>
+            </a:r>
+          </a:p>
+          <a:p>
+            <a:r>
+              <a:rPr>
+                <a:ea typeface="맑은 고딕"/>
+                <a:cs typeface="맑은 고딕"/>
+              </a:rPr>
+              <a:t>- TorbeamNN (KSTAR PCS 실장): https://arxiv.org/abs/2504.11648</a:t>
+            </a:r>
+          </a:p>
+          <a:p>
+            <a:r>
+              <a:rPr>
+                <a:ea typeface="맑은 고딕"/>
+                <a:cs typeface="맑은 고딕"/>
+              </a:rPr>
+              <a:t>- KSTAR UFO 사건 예측 (NF 2026): https://doi.org/10.1088/1741-4326/ae91fc</a:t>
+            </a:r>
+          </a:p>
+          <a:p>
+            <a:r>
+              <a:rPr>
+                <a:ea typeface="맑은 고딕"/>
+                <a:cs typeface="맑은 고딕"/>
+              </a:rPr>
               <a:t>- JET CXRS 신경망 (1993, 계보의 시작): https://www.microsoft.com/en-us/research/wp-content/uploads/2016/02/bishop-cxrs-ppcf-93.pdf</a:t>
             </a:r>
           </a:p>
@@ -6262,7 +6407,457 @@
                 <a:ea typeface="맑은 고딕"/>
                 <a:cs typeface="맑은 고딕"/>
               </a:rPr>
-              <a:t>마지막 열은 본 저장소의 통제 실험 판정이며, 새 계열을 도입하기 전에 이 열을 먼저 읽는다.</a:t>
+              <a:t>2026-09-05 조사한 핵융합 12편의 요약이다.</a:t>
+            </a:r>
+          </a:p>
+          <a:p>
+            <a:r>
+              <a:rPr>
+                <a:ea typeface="맑은 고딕"/>
+                <a:cs typeface="맑은 고딕"/>
+              </a:rPr>
+              <a:t>조사일 2026-09-05. 출처:</a:t>
+            </a:r>
+          </a:p>
+          <a:p>
+            <a:r>
+              <a:rPr>
+                <a:ea typeface="맑은 고딕"/>
+                <a:cs typeface="맑은 고딕"/>
+              </a:rPr>
+              <a:t>- Diag2Diag: https://arxiv.org/html/2405.05908v4</a:t>
+            </a:r>
+          </a:p>
+          <a:p>
+            <a:r>
+              <a:rPr>
+                <a:ea typeface="맑은 고딕"/>
+                <a:cs typeface="맑은 고딕"/>
+              </a:rPr>
+              <a:t>- Diag2Diag Nat. Comm.: https://www.nature.com/articles/s41467-025-63492-1</a:t>
+            </a:r>
+          </a:p>
+          <a:p>
+            <a:r>
+              <a:rPr>
+                <a:ea typeface="맑은 고딕"/>
+                <a:cs typeface="맑은 고딕"/>
+              </a:rPr>
+              <a:t>- COMPASS 시간 초해상: https://iopscience.iop.org/article/10.1088/1361-6587/ae72c6</a:t>
+            </a:r>
+          </a:p>
+          <a:p>
+            <a:r>
+              <a:rPr>
+                <a:ea typeface="맑은 고딕"/>
+                <a:cs typeface="맑은 고딕"/>
+              </a:rPr>
+              <a:t>- FusionMAE: https://arxiv.org/abs/2509.12945</a:t>
+            </a:r>
+          </a:p>
+          <a:p>
+            <a:r>
+              <a:rPr>
+                <a:ea typeface="맑은 고딕"/>
+                <a:cs typeface="맑은 고딕"/>
+              </a:rPr>
+              <a:t>- TokaMind: https://arxiv.org/html/2602.15084v2</a:t>
+            </a:r>
+          </a:p>
+          <a:p>
+            <a:r>
+              <a:rPr>
+                <a:ea typeface="맑은 고딕"/>
+                <a:cs typeface="맑은 고딕"/>
+              </a:rPr>
+              <a:t>- TokaMark: https://arxiv.org/html/2602.10132v2</a:t>
+            </a:r>
+          </a:p>
+          <a:p>
+            <a:r>
+              <a:rPr>
+                <a:ea typeface="맑은 고딕"/>
+                <a:cs typeface="맑은 고딕"/>
+              </a:rPr>
+              <a:t>- PanoMHD: https://arxiv.org/html/2603.02672</a:t>
+            </a:r>
+          </a:p>
+          <a:p>
+            <a:r>
+              <a:rPr>
+                <a:ea typeface="맑은 고딕"/>
+                <a:cs typeface="맑은 고딕"/>
+              </a:rPr>
+              <a:t>- TCV 멀티모달 VAE: https://arxiv.org/abs/2504.17710</a:t>
+            </a:r>
+          </a:p>
+          <a:p>
+            <a:r>
+              <a:rPr>
+                <a:ea typeface="맑은 고딕"/>
+                <a:cs typeface="맑은 고딕"/>
+              </a:rPr>
+              <a:t>- EAST 지식증류: https://arxiv.org/html/2607.04241</a:t>
+            </a:r>
+          </a:p>
+          <a:p>
+            <a:r>
+              <a:rPr>
+                <a:ea typeface="맑은 고딕"/>
+                <a:cs typeface="맑은 고딕"/>
+              </a:rPr>
+              <a:t>- WEST: https://arxiv.org/html/2602.19110</a:t>
+            </a:r>
+          </a:p>
+          <a:p>
+            <a:r>
+              <a:rPr>
+                <a:ea typeface="맑은 고딕"/>
+                <a:cs typeface="맑은 고딕"/>
+              </a:rPr>
+              <a:t>- EAST XCS ANN: https://iopscience.iop.org/article/10.1088/1741-4326/ad73e8</a:t>
+            </a:r>
+          </a:p>
+          <a:p>
+            <a:r>
+              <a:rPr>
+                <a:ea typeface="맑은 고딕"/>
+                <a:cs typeface="맑은 고딕"/>
+              </a:rPr>
+              <a:t>- Abbate 2025: https://iopscience.iop.org/article/10.1088/1741-4326/adc283</a:t>
+            </a:r>
+          </a:p>
+          <a:p>
+            <a:r>
+              <a:rPr>
+                <a:ea typeface="맑은 고딕"/>
+                <a:cs typeface="맑은 고딕"/>
+              </a:rPr>
+              <a:t>- 합성 진단 증강: https://arxiv.org/abs/2606.08462</a:t>
+            </a:r>
+          </a:p>
+          <a:p>
+            <a:r>
+              <a:rPr>
+                <a:ea typeface="맑은 고딕"/>
+                <a:cs typeface="맑은 고딕"/>
+              </a:rPr>
+              <a:t>- TokEye: https://arxiv.org/pdf/2602.20317</a:t>
+            </a:r>
+          </a:p>
+          <a:p>
+            <a:r>
+              <a:rPr>
+                <a:ea typeface="맑은 고딕"/>
+                <a:cs typeface="맑은 고딕"/>
+              </a:rPr>
+              <a:t>- KSTAR EPED 재구성: https://link.springer.com/article/10.1007/s40042-026-01580-1</a:t>
+            </a:r>
+          </a:p>
+          <a:p>
+            <a:r>
+              <a:rPr>
+                <a:ea typeface="맑은 고딕"/>
+                <a:cs typeface="맑은 고딕"/>
+              </a:rPr>
+              <a:t>- DIII-D 코일 shot-to-shot: https://www.ans.org/news/2026-08-18/article-8302/new-ml-framework-predicts-shifts-between-shots-at-diiid/</a:t>
+            </a:r>
+          </a:p>
+          <a:p>
+            <a:r>
+              <a:rPr>
+                <a:ea typeface="맑은 고딕"/>
+                <a:cs typeface="맑은 고딕"/>
+              </a:rPr>
+              <a:t>- NN-CES (KSTAR CES 신경망 분석): https://doi.org/10.1016/j.fusengdes.2025.115518</a:t>
+            </a:r>
+          </a:p>
+          <a:p>
+            <a:r>
+              <a:rPr>
+                <a:ea typeface="맑은 고딕"/>
+                <a:cs typeface="맑은 고딕"/>
+              </a:rPr>
+              <a:t>- SVMR+GPR KSTAR Ti 프로파일: https://doi.org/10.1088/1741-4326/ad7304</a:t>
+            </a:r>
+          </a:p>
+          <a:p>
+            <a:r>
+              <a:rPr>
+                <a:ea typeface="맑은 고딕"/>
+                <a:cs typeface="맑은 고딕"/>
+              </a:rPr>
+              <a:t>- 이상치 강건 Bayesian mtanh 적합: https://arxiv.org/html/2607.14142</a:t>
+            </a:r>
+          </a:p>
+          <a:p>
+            <a:r>
+              <a:rPr>
+                <a:ea typeface="맑은 고딕"/>
+                <a:cs typeface="맑은 고딕"/>
+              </a:rPr>
+              <a:t>- TSER 결측 Te 복원 (EAST): https://doi.org/10.1088/1741-4326/addb5f</a:t>
+            </a:r>
+          </a:p>
+          <a:p>
+            <a:r>
+              <a:rPr>
+                <a:ea typeface="맑은 고딕"/>
+                <a:cs typeface="맑은 고딕"/>
+              </a:rPr>
+              <a:t>- 전 상태 복원 (희소 센서): https://arxiv.org/abs/2607.04390</a:t>
+            </a:r>
+          </a:p>
+          <a:p>
+            <a:r>
+              <a:rPr>
+                <a:ea typeface="맑은 고딕"/>
+                <a:cs typeface="맑은 고딕"/>
+              </a:rPr>
+              <a:t>- 평형 재구성 챌린지: https://arxiv.org/html/2609.01750</a:t>
+            </a:r>
+          </a:p>
+          <a:p>
+            <a:r>
+              <a:rPr>
+                <a:ea typeface="맑은 고딕"/>
+                <a:cs typeface="맑은 고딕"/>
+              </a:rPr>
+              <a:t>- 이분산 신경망 대리모델 (Thomson): https://arxiv.org/abs/2608.19377</a:t>
+            </a:r>
+          </a:p>
+          <a:p>
+            <a:r>
+              <a:rPr>
+                <a:ea typeface="맑은 고딕"/>
+                <a:cs typeface="맑은 고딕"/>
+              </a:rPr>
+              <a:t>- KSTAR XICS 실시간 Ti 측정: https://doi.org/10.1016/j.fusengdes.2023.113570</a:t>
+            </a:r>
+          </a:p>
+          <a:p>
+            <a:r>
+              <a:rPr>
+                <a:ea typeface="맑은 고딕"/>
+                <a:cs typeface="맑은 고딕"/>
+              </a:rPr>
+              <a:t>- TorbeamNN (KSTAR PCS 실장): https://arxiv.org/abs/2504.11648</a:t>
+            </a:r>
+          </a:p>
+          <a:p>
+            <a:r>
+              <a:rPr>
+                <a:ea typeface="맑은 고딕"/>
+                <a:cs typeface="맑은 고딕"/>
+              </a:rPr>
+              <a:t>- KSTAR UFO 사건 예측 (NF 2026): https://doi.org/10.1088/1741-4326/ae91fc</a:t>
+            </a:r>
+          </a:p>
+          <a:p>
+            <a:r>
+              <a:rPr>
+                <a:ea typeface="맑은 고딕"/>
+                <a:cs typeface="맑은 고딕"/>
+              </a:rPr>
+              <a:t>- JET CXRS 신경망 (1993, 계보의 시작): https://www.microsoft.com/en-us/research/wp-content/uploads/2016/02/bishop-cxrs-ppcf-93.pdf</a:t>
+            </a:r>
+          </a:p>
+          <a:p>
+            <a:r>
+              <a:rPr>
+                <a:ea typeface="맑은 고딕"/>
+                <a:cs typeface="맑은 고딕"/>
+              </a:rPr>
+              <a:t>- ST40 교차 진단 grey-box: https://arxiv.org/abs/2407.18741</a:t>
+            </a:r>
+          </a:p>
+          <a:p>
+            <a:r>
+              <a:rPr>
+                <a:ea typeface="맑은 고딕"/>
+                <a:cs typeface="맑은 고딕"/>
+              </a:rPr>
+              <a:t>- W7-X Bayesian Ti 추론: https://doi.org/10.1088/1361-6587/ad3c1d</a:t>
+            </a:r>
+          </a:p>
+          <a:p>
+            <a:r>
+              <a:rPr>
+                <a:ea typeface="맑은 고딕"/>
+                <a:cs typeface="맑은 고딕"/>
+              </a:rPr>
+              <a:t>- TSI-Bench: https://arxiv.org/abs/2406.12747</a:t>
+            </a:r>
+          </a:p>
+          <a:p>
+            <a:r>
+              <a:rPr>
+                <a:ea typeface="맑은 고딕"/>
+                <a:cs typeface="맑은 고딕"/>
+              </a:rPr>
+              <a:t>- STDiff: https://arxiv.org/html/2508.19011v1</a:t>
+            </a:r>
+          </a:p>
+          <a:p>
+            <a:r>
+              <a:rPr>
+                <a:ea typeface="맑은 고딕"/>
+                <a:cs typeface="맑은 고딕"/>
+              </a:rPr>
+              <a:t>- iTimER: https://arxiv.org/html/2511.06854</a:t>
+            </a:r>
+          </a:p>
+          <a:p>
+            <a:r>
+              <a:rPr>
+                <a:ea typeface="맑은 고딕"/>
+                <a:cs typeface="맑은 고딕"/>
+              </a:rPr>
+              <a:t>- Neural CDE 보정기: https://arxiv.org/html/2512.12116v3</a:t>
+            </a:r>
+          </a:p>
+          <a:p>
+            <a:r>
+              <a:rPr>
+                <a:ea typeface="맑은 고딕"/>
+                <a:cs typeface="맑은 고딕"/>
+              </a:rPr>
+              <a:t>- TimeXer: https://github.com/thuml/TimeXer</a:t>
+            </a:r>
+          </a:p>
+          <a:p>
+            <a:r>
+              <a:rPr>
+                <a:ea typeface="맑은 고딕"/>
+                <a:cs typeface="맑은 고딕"/>
+              </a:rPr>
+              <a:t>- TiRex-2: https://arxiv.org/html/2607.01204v1</a:t>
+            </a:r>
+          </a:p>
+          <a:p>
+            <a:r>
+              <a:rPr>
+                <a:ea typeface="맑은 고딕"/>
+                <a:cs typeface="맑은 고딕"/>
+              </a:rPr>
+              <a:t>- TabPFN-TS: https://arxiv.org/abs/2501.02945</a:t>
+            </a:r>
+          </a:p>
+          <a:p>
+            <a:r>
+              <a:rPr>
+                <a:ea typeface="맑은 고딕"/>
+                <a:cs typeface="맑은 고딕"/>
+              </a:rPr>
+              <a:t>- TSFM 벤치마크 경고: https://arxiv.org/html/2510.13654v1</a:t>
+            </a:r>
+          </a:p>
+          <a:p>
+            <a:r>
+              <a:rPr>
+                <a:ea typeface="맑은 고딕"/>
+                <a:cs typeface="맑은 고딕"/>
+              </a:rPr>
+              <a:t>- TimeMAE: https://arxiv.org/html/2303.00320v4</a:t>
+            </a:r>
+          </a:p>
+          <a:p>
+            <a:r>
+              <a:rPr>
+                <a:ea typeface="맑은 고딕"/>
+                <a:cs typeface="맑은 고딕"/>
+              </a:rPr>
+              <a:t>- RG-ResMoE: https://arxiv.org/html/2608.12251v1</a:t>
+            </a:r>
+          </a:p>
+          <a:p>
+            <a:r>
+              <a:rPr>
+                <a:ea typeface="맑은 고딕"/>
+                <a:cs typeface="맑은 고딕"/>
+              </a:rPr>
+              <a:t>- KalmanNet: https://dl.acm.org/doi/abs/10.1109/tsp.2022.3158588</a:t>
+            </a:r>
+          </a:p>
+          <a:p>
+            <a:r>
+              <a:rPr>
+                <a:ea typeface="맑은 고딕"/>
+                <a:cs typeface="맑은 고딕"/>
+              </a:rPr>
+              <a:t>- Unscented KalmanNet: https://arxiv.org/html/2608.04201</a:t>
+            </a:r>
+          </a:p>
+          <a:p>
+            <a:r>
+              <a:rPr>
+                <a:ea typeface="맑은 고딕"/>
+                <a:cs typeface="맑은 고딕"/>
+              </a:rPr>
+              <a:t>- DLFM: https://link.springer.com/article/10.1007/s10994-025-06824-y</a:t>
+            </a:r>
+          </a:p>
+          <a:p>
+            <a:r>
+              <a:rPr>
+                <a:ea typeface="맑은 고딕"/>
+                <a:cs typeface="맑은 고딕"/>
+              </a:rPr>
+              <a:t>- 이분산 회귀 병리: https://arxiv.org/pdf/2306.16717</a:t>
+            </a:r>
+          </a:p>
+          <a:p>
+            <a:r>
+              <a:rPr>
+                <a:ea typeface="맑은 고딕"/>
+                <a:cs typeface="맑은 고딕"/>
+              </a:rPr>
+              <a:t>- 반지도 VAE 회귀: https://arxiv.org/pdf/2211.05979</a:t>
+            </a:r>
+          </a:p>
+          <a:p>
+            <a:r>
+              <a:rPr>
+                <a:ea typeface="맑은 고딕"/>
+                <a:cs typeface="맑은 고딕"/>
+              </a:rPr>
+              <a:t>- GP-MIDAS: https://arxiv.org/html/2402.10574v2</a:t>
+            </a:r>
+          </a:p>
+          <a:p>
+            <a:r>
+              <a:rPr>
+                <a:ea typeface="맑은 고딕"/>
+                <a:cs typeface="맑은 고딕"/>
+              </a:rPr>
+              <a:t>- 저가 센서 보정: https://arxiv.org/html/2604.21527v1</a:t>
+            </a:r>
+          </a:p>
+          <a:p>
+            <a:r>
+              <a:rPr>
+                <a:ea typeface="맑은 고딕"/>
+                <a:cs typeface="맑은 고딕"/>
+              </a:rPr>
+              <a:t>- 커프리스 혈압 벤치마크: https://arxiv.org/html/2602.04725v1</a:t>
+            </a:r>
+          </a:p>
+          <a:p>
+            <a:r>
+              <a:rPr>
+                <a:ea typeface="맑은 고딕"/>
+                <a:cs typeface="맑은 고딕"/>
+              </a:rPr>
+              <a:t>- PiGGO: https://arxiv.org/pdf/2604.26593</a:t>
+            </a:r>
+          </a:p>
+          <a:p>
+            <a:r>
+              <a:rPr>
+                <a:ea typeface="맑은 고딕"/>
+                <a:cs typeface="맑은 고딕"/>
+              </a:rPr>
+              <a:t>- 멀티태스크 가상센서: https://arxiv.org/abs/2601.20634</a:t>
             </a:r>
           </a:p>
         </p:txBody>
@@ -6484,7 +7079,7 @@
                 <a:ea typeface="맑은 고딕"/>
                 <a:cs typeface="맑은 고딕"/>
               </a:rPr>
-              <a:t>혼합주기 나우캐스팅 · 저가 센서 보정 · 커프리스 혈압 · 구조 가상 센싱 · 합성 진단 증강의 다섯 계열에서 같은 결론이 반복된다.</a:t>
+              <a:t>마지막 열은 본 저장소의 통제 실험 판정이며, 새 계열을 도입하기 전에 이 열을 먼저 읽는다.</a:t>
             </a:r>
           </a:p>
         </p:txBody>
@@ -6558,421 +7153,7 @@
                 <a:ea typeface="맑은 고딕"/>
                 <a:cs typeface="맑은 고딕"/>
               </a:rPr>
-              <a:t>우선순위는 비용 대비 정보량 순이다.</a:t>
-            </a:r>
-          </a:p>
-          <a:p>
-            <a:r>
-              <a:rPr>
-                <a:ea typeface="맑은 고딕"/>
-                <a:cs typeface="맑은 고딕"/>
-              </a:rPr>
-              <a:t>조사일 2026-09-05. 출처:</a:t>
-            </a:r>
-          </a:p>
-          <a:p>
-            <a:r>
-              <a:rPr>
-                <a:ea typeface="맑은 고딕"/>
-                <a:cs typeface="맑은 고딕"/>
-              </a:rPr>
-              <a:t>- Diag2Diag: https://arxiv.org/html/2405.05908v4</a:t>
-            </a:r>
-          </a:p>
-          <a:p>
-            <a:r>
-              <a:rPr>
-                <a:ea typeface="맑은 고딕"/>
-                <a:cs typeface="맑은 고딕"/>
-              </a:rPr>
-              <a:t>- Diag2Diag Nat. Comm.: https://www.nature.com/articles/s41467-025-63492-1</a:t>
-            </a:r>
-          </a:p>
-          <a:p>
-            <a:r>
-              <a:rPr>
-                <a:ea typeface="맑은 고딕"/>
-                <a:cs typeface="맑은 고딕"/>
-              </a:rPr>
-              <a:t>- COMPASS 시간 초해상: https://iopscience.iop.org/article/10.1088/1361-6587/ae72c6</a:t>
-            </a:r>
-          </a:p>
-          <a:p>
-            <a:r>
-              <a:rPr>
-                <a:ea typeface="맑은 고딕"/>
-                <a:cs typeface="맑은 고딕"/>
-              </a:rPr>
-              <a:t>- FusionMAE: https://arxiv.org/abs/2509.12945</a:t>
-            </a:r>
-          </a:p>
-          <a:p>
-            <a:r>
-              <a:rPr>
-                <a:ea typeface="맑은 고딕"/>
-                <a:cs typeface="맑은 고딕"/>
-              </a:rPr>
-              <a:t>- TokaMind: https://arxiv.org/html/2602.15084v2</a:t>
-            </a:r>
-          </a:p>
-          <a:p>
-            <a:r>
-              <a:rPr>
-                <a:ea typeface="맑은 고딕"/>
-                <a:cs typeface="맑은 고딕"/>
-              </a:rPr>
-              <a:t>- TokaMark: https://arxiv.org/html/2602.10132v2</a:t>
-            </a:r>
-          </a:p>
-          <a:p>
-            <a:r>
-              <a:rPr>
-                <a:ea typeface="맑은 고딕"/>
-                <a:cs typeface="맑은 고딕"/>
-              </a:rPr>
-              <a:t>- PanoMHD: https://arxiv.org/html/2603.02672</a:t>
-            </a:r>
-          </a:p>
-          <a:p>
-            <a:r>
-              <a:rPr>
-                <a:ea typeface="맑은 고딕"/>
-                <a:cs typeface="맑은 고딕"/>
-              </a:rPr>
-              <a:t>- TCV 멀티모달 VAE: https://arxiv.org/abs/2504.17710</a:t>
-            </a:r>
-          </a:p>
-          <a:p>
-            <a:r>
-              <a:rPr>
-                <a:ea typeface="맑은 고딕"/>
-                <a:cs typeface="맑은 고딕"/>
-              </a:rPr>
-              <a:t>- EAST 지식증류: https://arxiv.org/html/2607.04241</a:t>
-            </a:r>
-          </a:p>
-          <a:p>
-            <a:r>
-              <a:rPr>
-                <a:ea typeface="맑은 고딕"/>
-                <a:cs typeface="맑은 고딕"/>
-              </a:rPr>
-              <a:t>- WEST: https://arxiv.org/html/2602.19110</a:t>
-            </a:r>
-          </a:p>
-          <a:p>
-            <a:r>
-              <a:rPr>
-                <a:ea typeface="맑은 고딕"/>
-                <a:cs typeface="맑은 고딕"/>
-              </a:rPr>
-              <a:t>- EAST XCS ANN: https://iopscience.iop.org/article/10.1088/1741-4326/ad73e8</a:t>
-            </a:r>
-          </a:p>
-          <a:p>
-            <a:r>
-              <a:rPr>
-                <a:ea typeface="맑은 고딕"/>
-                <a:cs typeface="맑은 고딕"/>
-              </a:rPr>
-              <a:t>- Abbate 2025: https://iopscience.iop.org/article/10.1088/1741-4326/adc283</a:t>
-            </a:r>
-          </a:p>
-          <a:p>
-            <a:r>
-              <a:rPr>
-                <a:ea typeface="맑은 고딕"/>
-                <a:cs typeface="맑은 고딕"/>
-              </a:rPr>
-              <a:t>- 합성 진단 증강: https://arxiv.org/abs/2606.08462</a:t>
-            </a:r>
-          </a:p>
-          <a:p>
-            <a:r>
-              <a:rPr>
-                <a:ea typeface="맑은 고딕"/>
-                <a:cs typeface="맑은 고딕"/>
-              </a:rPr>
-              <a:t>- TokEye: https://arxiv.org/pdf/2602.20317</a:t>
-            </a:r>
-          </a:p>
-          <a:p>
-            <a:r>
-              <a:rPr>
-                <a:ea typeface="맑은 고딕"/>
-                <a:cs typeface="맑은 고딕"/>
-              </a:rPr>
-              <a:t>- KSTAR EPED 재구성: https://link.springer.com/article/10.1007/s40042-026-01580-1</a:t>
-            </a:r>
-          </a:p>
-          <a:p>
-            <a:r>
-              <a:rPr>
-                <a:ea typeface="맑은 고딕"/>
-                <a:cs typeface="맑은 고딕"/>
-              </a:rPr>
-              <a:t>- DIII-D 코일 shot-to-shot: https://www.ans.org/news/2026-08-18/article-8302/new-ml-framework-predicts-shifts-between-shots-at-diiid/</a:t>
-            </a:r>
-          </a:p>
-          <a:p>
-            <a:r>
-              <a:rPr>
-                <a:ea typeface="맑은 고딕"/>
-                <a:cs typeface="맑은 고딕"/>
-              </a:rPr>
-              <a:t>- NN-CES (KSTAR CES 신경망 분석): https://doi.org/10.1016/j.fusengdes.2025.115518</a:t>
-            </a:r>
-          </a:p>
-          <a:p>
-            <a:r>
-              <a:rPr>
-                <a:ea typeface="맑은 고딕"/>
-                <a:cs typeface="맑은 고딕"/>
-              </a:rPr>
-              <a:t>- SVMR+GPR KSTAR Ti 프로파일: https://doi.org/10.1088/1741-4326/ad7304</a:t>
-            </a:r>
-          </a:p>
-          <a:p>
-            <a:r>
-              <a:rPr>
-                <a:ea typeface="맑은 고딕"/>
-                <a:cs typeface="맑은 고딕"/>
-              </a:rPr>
-              <a:t>- 이상치 강건 Bayesian mtanh 적합: https://arxiv.org/html/2607.14142</a:t>
-            </a:r>
-          </a:p>
-          <a:p>
-            <a:r>
-              <a:rPr>
-                <a:ea typeface="맑은 고딕"/>
-                <a:cs typeface="맑은 고딕"/>
-              </a:rPr>
-              <a:t>- TSER 결측 Te 복원 (EAST): https://doi.org/10.1088/1741-4326/addb5f</a:t>
-            </a:r>
-          </a:p>
-          <a:p>
-            <a:r>
-              <a:rPr>
-                <a:ea typeface="맑은 고딕"/>
-                <a:cs typeface="맑은 고딕"/>
-              </a:rPr>
-              <a:t>- 전 상태 복원 (희소 센서): https://arxiv.org/abs/2607.04390</a:t>
-            </a:r>
-          </a:p>
-          <a:p>
-            <a:r>
-              <a:rPr>
-                <a:ea typeface="맑은 고딕"/>
-                <a:cs typeface="맑은 고딕"/>
-              </a:rPr>
-              <a:t>- 평형 재구성 챌린지: https://arxiv.org/html/2609.01750</a:t>
-            </a:r>
-          </a:p>
-          <a:p>
-            <a:r>
-              <a:rPr>
-                <a:ea typeface="맑은 고딕"/>
-                <a:cs typeface="맑은 고딕"/>
-              </a:rPr>
-              <a:t>- JET CXRS 신경망 (1993, 계보의 시작): https://www.microsoft.com/en-us/research/wp-content/uploads/2016/02/bishop-cxrs-ppcf-93.pdf</a:t>
-            </a:r>
-          </a:p>
-          <a:p>
-            <a:r>
-              <a:rPr>
-                <a:ea typeface="맑은 고딕"/>
-                <a:cs typeface="맑은 고딕"/>
-              </a:rPr>
-              <a:t>- ST40 교차 진단 grey-box: https://arxiv.org/abs/2407.18741</a:t>
-            </a:r>
-          </a:p>
-          <a:p>
-            <a:r>
-              <a:rPr>
-                <a:ea typeface="맑은 고딕"/>
-                <a:cs typeface="맑은 고딕"/>
-              </a:rPr>
-              <a:t>- W7-X Bayesian Ti 추론: https://doi.org/10.1088/1361-6587/ad3c1d</a:t>
-            </a:r>
-          </a:p>
-          <a:p>
-            <a:r>
-              <a:rPr>
-                <a:ea typeface="맑은 고딕"/>
-                <a:cs typeface="맑은 고딕"/>
-              </a:rPr>
-              <a:t>- TSI-Bench: https://arxiv.org/abs/2406.12747</a:t>
-            </a:r>
-          </a:p>
-          <a:p>
-            <a:r>
-              <a:rPr>
-                <a:ea typeface="맑은 고딕"/>
-                <a:cs typeface="맑은 고딕"/>
-              </a:rPr>
-              <a:t>- STDiff: https://arxiv.org/html/2508.19011v1</a:t>
-            </a:r>
-          </a:p>
-          <a:p>
-            <a:r>
-              <a:rPr>
-                <a:ea typeface="맑은 고딕"/>
-                <a:cs typeface="맑은 고딕"/>
-              </a:rPr>
-              <a:t>- iTimER: https://arxiv.org/html/2511.06854</a:t>
-            </a:r>
-          </a:p>
-          <a:p>
-            <a:r>
-              <a:rPr>
-                <a:ea typeface="맑은 고딕"/>
-                <a:cs typeface="맑은 고딕"/>
-              </a:rPr>
-              <a:t>- Neural CDE 보정기: https://arxiv.org/html/2512.12116v3</a:t>
-            </a:r>
-          </a:p>
-          <a:p>
-            <a:r>
-              <a:rPr>
-                <a:ea typeface="맑은 고딕"/>
-                <a:cs typeface="맑은 고딕"/>
-              </a:rPr>
-              <a:t>- TimeXer: https://github.com/thuml/TimeXer</a:t>
-            </a:r>
-          </a:p>
-          <a:p>
-            <a:r>
-              <a:rPr>
-                <a:ea typeface="맑은 고딕"/>
-                <a:cs typeface="맑은 고딕"/>
-              </a:rPr>
-              <a:t>- TiRex-2: https://arxiv.org/html/2607.01204v1</a:t>
-            </a:r>
-          </a:p>
-          <a:p>
-            <a:r>
-              <a:rPr>
-                <a:ea typeface="맑은 고딕"/>
-                <a:cs typeface="맑은 고딕"/>
-              </a:rPr>
-              <a:t>- TabPFN-TS: https://arxiv.org/abs/2501.02945</a:t>
-            </a:r>
-          </a:p>
-          <a:p>
-            <a:r>
-              <a:rPr>
-                <a:ea typeface="맑은 고딕"/>
-                <a:cs typeface="맑은 고딕"/>
-              </a:rPr>
-              <a:t>- TSFM 벤치마크 경고: https://arxiv.org/html/2510.13654v1</a:t>
-            </a:r>
-          </a:p>
-          <a:p>
-            <a:r>
-              <a:rPr>
-                <a:ea typeface="맑은 고딕"/>
-                <a:cs typeface="맑은 고딕"/>
-              </a:rPr>
-              <a:t>- TimeMAE: https://arxiv.org/html/2303.00320v4</a:t>
-            </a:r>
-          </a:p>
-          <a:p>
-            <a:r>
-              <a:rPr>
-                <a:ea typeface="맑은 고딕"/>
-                <a:cs typeface="맑은 고딕"/>
-              </a:rPr>
-              <a:t>- RG-ResMoE: https://arxiv.org/html/2608.12251v1</a:t>
-            </a:r>
-          </a:p>
-          <a:p>
-            <a:r>
-              <a:rPr>
-                <a:ea typeface="맑은 고딕"/>
-                <a:cs typeface="맑은 고딕"/>
-              </a:rPr>
-              <a:t>- KalmanNet: https://dl.acm.org/doi/abs/10.1109/tsp.2022.3158588</a:t>
-            </a:r>
-          </a:p>
-          <a:p>
-            <a:r>
-              <a:rPr>
-                <a:ea typeface="맑은 고딕"/>
-                <a:cs typeface="맑은 고딕"/>
-              </a:rPr>
-              <a:t>- Unscented KalmanNet: https://arxiv.org/html/2608.04201</a:t>
-            </a:r>
-          </a:p>
-          <a:p>
-            <a:r>
-              <a:rPr>
-                <a:ea typeface="맑은 고딕"/>
-                <a:cs typeface="맑은 고딕"/>
-              </a:rPr>
-              <a:t>- DLFM: https://link.springer.com/article/10.1007/s10994-025-06824-y</a:t>
-            </a:r>
-          </a:p>
-          <a:p>
-            <a:r>
-              <a:rPr>
-                <a:ea typeface="맑은 고딕"/>
-                <a:cs typeface="맑은 고딕"/>
-              </a:rPr>
-              <a:t>- 이분산 회귀 병리: https://arxiv.org/pdf/2306.16717</a:t>
-            </a:r>
-          </a:p>
-          <a:p>
-            <a:r>
-              <a:rPr>
-                <a:ea typeface="맑은 고딕"/>
-                <a:cs typeface="맑은 고딕"/>
-              </a:rPr>
-              <a:t>- 반지도 VAE 회귀: https://arxiv.org/pdf/2211.05979</a:t>
-            </a:r>
-          </a:p>
-          <a:p>
-            <a:r>
-              <a:rPr>
-                <a:ea typeface="맑은 고딕"/>
-                <a:cs typeface="맑은 고딕"/>
-              </a:rPr>
-              <a:t>- GP-MIDAS: https://arxiv.org/html/2402.10574v2</a:t>
-            </a:r>
-          </a:p>
-          <a:p>
-            <a:r>
-              <a:rPr>
-                <a:ea typeface="맑은 고딕"/>
-                <a:cs typeface="맑은 고딕"/>
-              </a:rPr>
-              <a:t>- 저가 센서 보정: https://arxiv.org/html/2604.21527v1</a:t>
-            </a:r>
-          </a:p>
-          <a:p>
-            <a:r>
-              <a:rPr>
-                <a:ea typeface="맑은 고딕"/>
-                <a:cs typeface="맑은 고딕"/>
-              </a:rPr>
-              <a:t>- 커프리스 혈압 벤치마크: https://arxiv.org/html/2602.04725v1</a:t>
-            </a:r>
-          </a:p>
-          <a:p>
-            <a:r>
-              <a:rPr>
-                <a:ea typeface="맑은 고딕"/>
-                <a:cs typeface="맑은 고딕"/>
-              </a:rPr>
-              <a:t>- PiGGO: https://arxiv.org/pdf/2604.26593</a:t>
-            </a:r>
-          </a:p>
-          <a:p>
-            <a:r>
-              <a:rPr>
-                <a:ea typeface="맑은 고딕"/>
-                <a:cs typeface="맑은 고딕"/>
-              </a:rPr>
-              <a:t>- 멀티태스크 가상센서: https://arxiv.org/abs/2601.20634</a:t>
+              <a:t>혼합주기 나우캐스팅 · 저가 센서 보정 · 커프리스 혈압 · 구조 가상 센싱 · 합성 진단 증강의 다섯 계열에서 같은 결론이 반복된다.</a:t>
             </a:r>
           </a:p>
         </p:txBody>
@@ -6998,6 +7179,530 @@
 </file>
 
 <file path=ppt/notesSlides/notesSlide63.xml><?xml version="1.0" encoding="utf-8"?>
+<p:notes xmlns:a="http://schemas.openxmlformats.org/drawingml/2006/main" xmlns:p="http://schemas.openxmlformats.org/presentationml/2006/main" xmlns:r="http://schemas.openxmlformats.org/officeDocument/2006/relationships">
+  <p:cSld>
+    <p:spTree>
+      <p:nvGrpSpPr>
+        <p:cNvPr id="1" name=""/>
+        <p:cNvGrpSpPr/>
+        <p:nvPr/>
+      </p:nvGrpSpPr>
+      <p:grpSpPr>
+        <a:xfrm>
+          <a:off x="0" y="0"/>
+          <a:ext cx="0" cy="0"/>
+          <a:chOff x="0" y="0"/>
+          <a:chExt cx="0" cy="0"/>
+        </a:xfrm>
+      </p:grpSpPr>
+      <p:sp>
+        <p:nvSpPr>
+          <p:cNvPr id="2" name="Slide Image Placeholder 1"/>
+          <p:cNvSpPr>
+            <a:spLocks noGrp="1"/>
+          </p:cNvSpPr>
+          <p:nvPr>
+            <p:ph type="sldImg" idx="2"/>
+          </p:nvPr>
+        </p:nvSpPr>
+        <p:spPr/>
+      </p:sp>
+      <p:sp>
+        <p:nvSpPr>
+          <p:cNvPr id="3" name="Notes Placeholder 2"/>
+          <p:cNvSpPr>
+            <a:spLocks noGrp="1"/>
+          </p:cNvSpPr>
+          <p:nvPr>
+            <p:ph type="body" idx="3" sz="quarter"/>
+          </p:nvPr>
+        </p:nvSpPr>
+        <p:spPr/>
+        <p:txBody>
+          <a:bodyPr/>
+          <a:lstStyle/>
+          <a:p>
+            <a:r>
+              <a:rPr>
+                <a:ea typeface="맑은 고딕"/>
+                <a:cs typeface="맑은 고딕"/>
+              </a:rPr>
+              <a:t>우선순위는 비용 대비 정보량 순이다.</a:t>
+            </a:r>
+          </a:p>
+          <a:p>
+            <a:r>
+              <a:rPr>
+                <a:ea typeface="맑은 고딕"/>
+                <a:cs typeface="맑은 고딕"/>
+              </a:rPr>
+              <a:t>조사일 2026-09-05. 출처:</a:t>
+            </a:r>
+          </a:p>
+          <a:p>
+            <a:r>
+              <a:rPr>
+                <a:ea typeface="맑은 고딕"/>
+                <a:cs typeface="맑은 고딕"/>
+              </a:rPr>
+              <a:t>- Diag2Diag: https://arxiv.org/html/2405.05908v4</a:t>
+            </a:r>
+          </a:p>
+          <a:p>
+            <a:r>
+              <a:rPr>
+                <a:ea typeface="맑은 고딕"/>
+                <a:cs typeface="맑은 고딕"/>
+              </a:rPr>
+              <a:t>- Diag2Diag Nat. Comm.: https://www.nature.com/articles/s41467-025-63492-1</a:t>
+            </a:r>
+          </a:p>
+          <a:p>
+            <a:r>
+              <a:rPr>
+                <a:ea typeface="맑은 고딕"/>
+                <a:cs typeface="맑은 고딕"/>
+              </a:rPr>
+              <a:t>- COMPASS 시간 초해상: https://iopscience.iop.org/article/10.1088/1361-6587/ae72c6</a:t>
+            </a:r>
+          </a:p>
+          <a:p>
+            <a:r>
+              <a:rPr>
+                <a:ea typeface="맑은 고딕"/>
+                <a:cs typeface="맑은 고딕"/>
+              </a:rPr>
+              <a:t>- FusionMAE: https://arxiv.org/abs/2509.12945</a:t>
+            </a:r>
+          </a:p>
+          <a:p>
+            <a:r>
+              <a:rPr>
+                <a:ea typeface="맑은 고딕"/>
+                <a:cs typeface="맑은 고딕"/>
+              </a:rPr>
+              <a:t>- TokaMind: https://arxiv.org/html/2602.15084v2</a:t>
+            </a:r>
+          </a:p>
+          <a:p>
+            <a:r>
+              <a:rPr>
+                <a:ea typeface="맑은 고딕"/>
+                <a:cs typeface="맑은 고딕"/>
+              </a:rPr>
+              <a:t>- TokaMark: https://arxiv.org/html/2602.10132v2</a:t>
+            </a:r>
+          </a:p>
+          <a:p>
+            <a:r>
+              <a:rPr>
+                <a:ea typeface="맑은 고딕"/>
+                <a:cs typeface="맑은 고딕"/>
+              </a:rPr>
+              <a:t>- PanoMHD: https://arxiv.org/html/2603.02672</a:t>
+            </a:r>
+          </a:p>
+          <a:p>
+            <a:r>
+              <a:rPr>
+                <a:ea typeface="맑은 고딕"/>
+                <a:cs typeface="맑은 고딕"/>
+              </a:rPr>
+              <a:t>- TCV 멀티모달 VAE: https://arxiv.org/abs/2504.17710</a:t>
+            </a:r>
+          </a:p>
+          <a:p>
+            <a:r>
+              <a:rPr>
+                <a:ea typeface="맑은 고딕"/>
+                <a:cs typeface="맑은 고딕"/>
+              </a:rPr>
+              <a:t>- EAST 지식증류: https://arxiv.org/html/2607.04241</a:t>
+            </a:r>
+          </a:p>
+          <a:p>
+            <a:r>
+              <a:rPr>
+                <a:ea typeface="맑은 고딕"/>
+                <a:cs typeface="맑은 고딕"/>
+              </a:rPr>
+              <a:t>- WEST: https://arxiv.org/html/2602.19110</a:t>
+            </a:r>
+          </a:p>
+          <a:p>
+            <a:r>
+              <a:rPr>
+                <a:ea typeface="맑은 고딕"/>
+                <a:cs typeface="맑은 고딕"/>
+              </a:rPr>
+              <a:t>- EAST XCS ANN: https://iopscience.iop.org/article/10.1088/1741-4326/ad73e8</a:t>
+            </a:r>
+          </a:p>
+          <a:p>
+            <a:r>
+              <a:rPr>
+                <a:ea typeface="맑은 고딕"/>
+                <a:cs typeface="맑은 고딕"/>
+              </a:rPr>
+              <a:t>- Abbate 2025: https://iopscience.iop.org/article/10.1088/1741-4326/adc283</a:t>
+            </a:r>
+          </a:p>
+          <a:p>
+            <a:r>
+              <a:rPr>
+                <a:ea typeface="맑은 고딕"/>
+                <a:cs typeface="맑은 고딕"/>
+              </a:rPr>
+              <a:t>- 합성 진단 증강: https://arxiv.org/abs/2606.08462</a:t>
+            </a:r>
+          </a:p>
+          <a:p>
+            <a:r>
+              <a:rPr>
+                <a:ea typeface="맑은 고딕"/>
+                <a:cs typeface="맑은 고딕"/>
+              </a:rPr>
+              <a:t>- TokEye: https://arxiv.org/pdf/2602.20317</a:t>
+            </a:r>
+          </a:p>
+          <a:p>
+            <a:r>
+              <a:rPr>
+                <a:ea typeface="맑은 고딕"/>
+                <a:cs typeface="맑은 고딕"/>
+              </a:rPr>
+              <a:t>- KSTAR EPED 재구성: https://link.springer.com/article/10.1007/s40042-026-01580-1</a:t>
+            </a:r>
+          </a:p>
+          <a:p>
+            <a:r>
+              <a:rPr>
+                <a:ea typeface="맑은 고딕"/>
+                <a:cs typeface="맑은 고딕"/>
+              </a:rPr>
+              <a:t>- DIII-D 코일 shot-to-shot: https://www.ans.org/news/2026-08-18/article-8302/new-ml-framework-predicts-shifts-between-shots-at-diiid/</a:t>
+            </a:r>
+          </a:p>
+          <a:p>
+            <a:r>
+              <a:rPr>
+                <a:ea typeface="맑은 고딕"/>
+                <a:cs typeface="맑은 고딕"/>
+              </a:rPr>
+              <a:t>- NN-CES (KSTAR CES 신경망 분석): https://doi.org/10.1016/j.fusengdes.2025.115518</a:t>
+            </a:r>
+          </a:p>
+          <a:p>
+            <a:r>
+              <a:rPr>
+                <a:ea typeface="맑은 고딕"/>
+                <a:cs typeface="맑은 고딕"/>
+              </a:rPr>
+              <a:t>- SVMR+GPR KSTAR Ti 프로파일: https://doi.org/10.1088/1741-4326/ad7304</a:t>
+            </a:r>
+          </a:p>
+          <a:p>
+            <a:r>
+              <a:rPr>
+                <a:ea typeface="맑은 고딕"/>
+                <a:cs typeface="맑은 고딕"/>
+              </a:rPr>
+              <a:t>- 이상치 강건 Bayesian mtanh 적합: https://arxiv.org/html/2607.14142</a:t>
+            </a:r>
+          </a:p>
+          <a:p>
+            <a:r>
+              <a:rPr>
+                <a:ea typeface="맑은 고딕"/>
+                <a:cs typeface="맑은 고딕"/>
+              </a:rPr>
+              <a:t>- TSER 결측 Te 복원 (EAST): https://doi.org/10.1088/1741-4326/addb5f</a:t>
+            </a:r>
+          </a:p>
+          <a:p>
+            <a:r>
+              <a:rPr>
+                <a:ea typeface="맑은 고딕"/>
+                <a:cs typeface="맑은 고딕"/>
+              </a:rPr>
+              <a:t>- 전 상태 복원 (희소 센서): https://arxiv.org/abs/2607.04390</a:t>
+            </a:r>
+          </a:p>
+          <a:p>
+            <a:r>
+              <a:rPr>
+                <a:ea typeface="맑은 고딕"/>
+                <a:cs typeface="맑은 고딕"/>
+              </a:rPr>
+              <a:t>- 평형 재구성 챌린지: https://arxiv.org/html/2609.01750</a:t>
+            </a:r>
+          </a:p>
+          <a:p>
+            <a:r>
+              <a:rPr>
+                <a:ea typeface="맑은 고딕"/>
+                <a:cs typeface="맑은 고딕"/>
+              </a:rPr>
+              <a:t>- 이분산 신경망 대리모델 (Thomson): https://arxiv.org/abs/2608.19377</a:t>
+            </a:r>
+          </a:p>
+          <a:p>
+            <a:r>
+              <a:rPr>
+                <a:ea typeface="맑은 고딕"/>
+                <a:cs typeface="맑은 고딕"/>
+              </a:rPr>
+              <a:t>- KSTAR XICS 실시간 Ti 측정: https://doi.org/10.1016/j.fusengdes.2023.113570</a:t>
+            </a:r>
+          </a:p>
+          <a:p>
+            <a:r>
+              <a:rPr>
+                <a:ea typeface="맑은 고딕"/>
+                <a:cs typeface="맑은 고딕"/>
+              </a:rPr>
+              <a:t>- TorbeamNN (KSTAR PCS 실장): https://arxiv.org/abs/2504.11648</a:t>
+            </a:r>
+          </a:p>
+          <a:p>
+            <a:r>
+              <a:rPr>
+                <a:ea typeface="맑은 고딕"/>
+                <a:cs typeface="맑은 고딕"/>
+              </a:rPr>
+              <a:t>- KSTAR UFO 사건 예측 (NF 2026): https://doi.org/10.1088/1741-4326/ae91fc</a:t>
+            </a:r>
+          </a:p>
+          <a:p>
+            <a:r>
+              <a:rPr>
+                <a:ea typeface="맑은 고딕"/>
+                <a:cs typeface="맑은 고딕"/>
+              </a:rPr>
+              <a:t>- JET CXRS 신경망 (1993, 계보의 시작): https://www.microsoft.com/en-us/research/wp-content/uploads/2016/02/bishop-cxrs-ppcf-93.pdf</a:t>
+            </a:r>
+          </a:p>
+          <a:p>
+            <a:r>
+              <a:rPr>
+                <a:ea typeface="맑은 고딕"/>
+                <a:cs typeface="맑은 고딕"/>
+              </a:rPr>
+              <a:t>- ST40 교차 진단 grey-box: https://arxiv.org/abs/2407.18741</a:t>
+            </a:r>
+          </a:p>
+          <a:p>
+            <a:r>
+              <a:rPr>
+                <a:ea typeface="맑은 고딕"/>
+                <a:cs typeface="맑은 고딕"/>
+              </a:rPr>
+              <a:t>- W7-X Bayesian Ti 추론: https://doi.org/10.1088/1361-6587/ad3c1d</a:t>
+            </a:r>
+          </a:p>
+          <a:p>
+            <a:r>
+              <a:rPr>
+                <a:ea typeface="맑은 고딕"/>
+                <a:cs typeface="맑은 고딕"/>
+              </a:rPr>
+              <a:t>- TSI-Bench: https://arxiv.org/abs/2406.12747</a:t>
+            </a:r>
+          </a:p>
+          <a:p>
+            <a:r>
+              <a:rPr>
+                <a:ea typeface="맑은 고딕"/>
+                <a:cs typeface="맑은 고딕"/>
+              </a:rPr>
+              <a:t>- STDiff: https://arxiv.org/html/2508.19011v1</a:t>
+            </a:r>
+          </a:p>
+          <a:p>
+            <a:r>
+              <a:rPr>
+                <a:ea typeface="맑은 고딕"/>
+                <a:cs typeface="맑은 고딕"/>
+              </a:rPr>
+              <a:t>- iTimER: https://arxiv.org/html/2511.06854</a:t>
+            </a:r>
+          </a:p>
+          <a:p>
+            <a:r>
+              <a:rPr>
+                <a:ea typeface="맑은 고딕"/>
+                <a:cs typeface="맑은 고딕"/>
+              </a:rPr>
+              <a:t>- Neural CDE 보정기: https://arxiv.org/html/2512.12116v3</a:t>
+            </a:r>
+          </a:p>
+          <a:p>
+            <a:r>
+              <a:rPr>
+                <a:ea typeface="맑은 고딕"/>
+                <a:cs typeface="맑은 고딕"/>
+              </a:rPr>
+              <a:t>- TimeXer: https://github.com/thuml/TimeXer</a:t>
+            </a:r>
+          </a:p>
+          <a:p>
+            <a:r>
+              <a:rPr>
+                <a:ea typeface="맑은 고딕"/>
+                <a:cs typeface="맑은 고딕"/>
+              </a:rPr>
+              <a:t>- TiRex-2: https://arxiv.org/html/2607.01204v1</a:t>
+            </a:r>
+          </a:p>
+          <a:p>
+            <a:r>
+              <a:rPr>
+                <a:ea typeface="맑은 고딕"/>
+                <a:cs typeface="맑은 고딕"/>
+              </a:rPr>
+              <a:t>- TabPFN-TS: https://arxiv.org/abs/2501.02945</a:t>
+            </a:r>
+          </a:p>
+          <a:p>
+            <a:r>
+              <a:rPr>
+                <a:ea typeface="맑은 고딕"/>
+                <a:cs typeface="맑은 고딕"/>
+              </a:rPr>
+              <a:t>- TSFM 벤치마크 경고: https://arxiv.org/html/2510.13654v1</a:t>
+            </a:r>
+          </a:p>
+          <a:p>
+            <a:r>
+              <a:rPr>
+                <a:ea typeface="맑은 고딕"/>
+                <a:cs typeface="맑은 고딕"/>
+              </a:rPr>
+              <a:t>- TimeMAE: https://arxiv.org/html/2303.00320v4</a:t>
+            </a:r>
+          </a:p>
+          <a:p>
+            <a:r>
+              <a:rPr>
+                <a:ea typeface="맑은 고딕"/>
+                <a:cs typeface="맑은 고딕"/>
+              </a:rPr>
+              <a:t>- RG-ResMoE: https://arxiv.org/html/2608.12251v1</a:t>
+            </a:r>
+          </a:p>
+          <a:p>
+            <a:r>
+              <a:rPr>
+                <a:ea typeface="맑은 고딕"/>
+                <a:cs typeface="맑은 고딕"/>
+              </a:rPr>
+              <a:t>- KalmanNet: https://dl.acm.org/doi/abs/10.1109/tsp.2022.3158588</a:t>
+            </a:r>
+          </a:p>
+          <a:p>
+            <a:r>
+              <a:rPr>
+                <a:ea typeface="맑은 고딕"/>
+                <a:cs typeface="맑은 고딕"/>
+              </a:rPr>
+              <a:t>- Unscented KalmanNet: https://arxiv.org/html/2608.04201</a:t>
+            </a:r>
+          </a:p>
+          <a:p>
+            <a:r>
+              <a:rPr>
+                <a:ea typeface="맑은 고딕"/>
+                <a:cs typeface="맑은 고딕"/>
+              </a:rPr>
+              <a:t>- DLFM: https://link.springer.com/article/10.1007/s10994-025-06824-y</a:t>
+            </a:r>
+          </a:p>
+          <a:p>
+            <a:r>
+              <a:rPr>
+                <a:ea typeface="맑은 고딕"/>
+                <a:cs typeface="맑은 고딕"/>
+              </a:rPr>
+              <a:t>- 이분산 회귀 병리: https://arxiv.org/pdf/2306.16717</a:t>
+            </a:r>
+          </a:p>
+          <a:p>
+            <a:r>
+              <a:rPr>
+                <a:ea typeface="맑은 고딕"/>
+                <a:cs typeface="맑은 고딕"/>
+              </a:rPr>
+              <a:t>- 반지도 VAE 회귀: https://arxiv.org/pdf/2211.05979</a:t>
+            </a:r>
+          </a:p>
+          <a:p>
+            <a:r>
+              <a:rPr>
+                <a:ea typeface="맑은 고딕"/>
+                <a:cs typeface="맑은 고딕"/>
+              </a:rPr>
+              <a:t>- GP-MIDAS: https://arxiv.org/html/2402.10574v2</a:t>
+            </a:r>
+          </a:p>
+          <a:p>
+            <a:r>
+              <a:rPr>
+                <a:ea typeface="맑은 고딕"/>
+                <a:cs typeface="맑은 고딕"/>
+              </a:rPr>
+              <a:t>- 저가 센서 보정: https://arxiv.org/html/2604.21527v1</a:t>
+            </a:r>
+          </a:p>
+          <a:p>
+            <a:r>
+              <a:rPr>
+                <a:ea typeface="맑은 고딕"/>
+                <a:cs typeface="맑은 고딕"/>
+              </a:rPr>
+              <a:t>- 커프리스 혈압 벤치마크: https://arxiv.org/html/2602.04725v1</a:t>
+            </a:r>
+          </a:p>
+          <a:p>
+            <a:r>
+              <a:rPr>
+                <a:ea typeface="맑은 고딕"/>
+                <a:cs typeface="맑은 고딕"/>
+              </a:rPr>
+              <a:t>- PiGGO: https://arxiv.org/pdf/2604.26593</a:t>
+            </a:r>
+          </a:p>
+          <a:p>
+            <a:r>
+              <a:rPr>
+                <a:ea typeface="맑은 고딕"/>
+                <a:cs typeface="맑은 고딕"/>
+              </a:rPr>
+              <a:t>- 멀티태스크 가상센서: https://arxiv.org/abs/2601.20634</a:t>
+            </a:r>
+          </a:p>
+        </p:txBody>
+      </p:sp>
+      <p:sp>
+        <p:nvSpPr>
+          <p:cNvPr id="4" name="Slide Number Placeholder 3"/>
+          <p:cNvSpPr>
+            <a:spLocks noGrp="1"/>
+          </p:cNvSpPr>
+          <p:nvPr>
+            <p:ph type="sldNum" idx="5" sz="quarter"/>
+          </p:nvPr>
+        </p:nvSpPr>
+        <p:spPr/>
+      </p:sp>
+    </p:spTree>
+  </p:cSld>
+  <p:clrMapOvr>
+    <a:masterClrMapping/>
+  </p:clrMapOvr>
+</p:notes>
+</file>
+
+<file path=ppt/notesSlides/notesSlide64.xml><?xml version="1.0" encoding="utf-8"?>
 <p:notes xmlns:a="http://schemas.openxmlformats.org/drawingml/2006/main" xmlns:p="http://schemas.openxmlformats.org/presentationml/2006/main" xmlns:r="http://schemas.openxmlformats.org/officeDocument/2006/relationships">
   <p:cSld>
     <p:spTree>
@@ -24557,7 +25262,7 @@
                 <a:ea typeface="맑은 고딕"/>
                 <a:cs typeface="맑은 고딕"/>
               </a:rPr>
-              <a:t>문헌 조사 (1/4, 1쪽): 핵융합의 진단-대-진단 추정은 여전히 단순한 구조가 주류이다</a:t>
+              <a:t>문헌 조사 (1/4, 1/5쪽): 핵융합의 진단-대-진단 추정은 여전히 단순한 구조가 주류이다</a:t>
             </a:r>
           </a:p>
         </p:txBody>
@@ -25357,7 +26062,7 @@
                 <a:ea typeface="맑은 고딕"/>
                 <a:cs typeface="맑은 고딕"/>
               </a:rPr>
-              <a:t>문헌 조사 (1/4, 2쪽): 핵융합의 진단-대-진단 추정은 여전히 단순한 구조가 주류이다</a:t>
+              <a:t>문헌 조사 (1/4, 2/5쪽): 핵융합의 진단-대-진단 추정은 여전히 단순한 구조가 주류이다</a:t>
             </a:r>
           </a:p>
         </p:txBody>
@@ -26157,7 +26862,7 @@
                 <a:ea typeface="맑은 고딕"/>
                 <a:cs typeface="맑은 고딕"/>
               </a:rPr>
-              <a:t>문헌 조사 (1/4, 3쪽): 핵융합의 진단-대-진단 추정은 여전히 단순한 구조가 주류이다</a:t>
+              <a:t>문헌 조사 (1/4, 3/5쪽): 핵융합의 진단-대-진단 추정은 여전히 단순한 구조가 주류이다</a:t>
             </a:r>
           </a:p>
         </p:txBody>
@@ -26209,7 +26914,7 @@
         </p:nvGraphicFramePr>
         <p:xfrm>
           <a:off x="585216" y="2400807"/>
-          <a:ext cx="11027661" cy="3304791"/>
+          <a:ext cx="11027661" cy="3241544"/>
         </p:xfrm>
         <a:graphic>
           <a:graphicData uri="http://schemas.openxmlformats.org/drawingml/2006/table">
@@ -26233,7 +26938,7 @@
                     <a:lstStyle/>
                     <a:p>
                       <a:r>
-                        <a:rPr sz="1050" b="1">
+                        <a:rPr sz="950" b="1">
                           <a:ea typeface="맑은 고딕"/>
                           <a:cs typeface="맑은 고딕"/>
                         </a:rPr>
@@ -26249,7 +26954,7 @@
                     <a:lstStyle/>
                     <a:p>
                       <a:r>
-                        <a:rPr sz="1050" b="1">
+                        <a:rPr sz="950" b="1">
                           <a:ea typeface="맑은 고딕"/>
                           <a:cs typeface="맑은 고딕"/>
                         </a:rPr>
@@ -26265,7 +26970,7 @@
                     <a:lstStyle/>
                     <a:p>
                       <a:r>
-                        <a:rPr sz="1050" b="1">
+                        <a:rPr sz="950" b="1">
                           <a:ea typeface="맑은 고딕"/>
                           <a:cs typeface="맑은 고딕"/>
                         </a:rPr>
@@ -26281,7 +26986,7 @@
                     <a:lstStyle/>
                     <a:p>
                       <a:r>
-                        <a:rPr sz="1050" b="1">
+                        <a:rPr sz="950" b="1">
                           <a:ea typeface="맑은 고딕"/>
                           <a:cs typeface="맑은 고딕"/>
                         </a:rPr>
@@ -26297,7 +27002,7 @@
                     <a:lstStyle/>
                     <a:p>
                       <a:r>
-                        <a:rPr sz="1050" b="1">
+                        <a:rPr sz="950" b="1">
                           <a:ea typeface="맑은 고딕"/>
                           <a:cs typeface="맑은 고딕"/>
                         </a:rPr>
@@ -26313,7 +27018,7 @@
                     <a:lstStyle/>
                     <a:p>
                       <a:r>
-                        <a:rPr sz="1050" b="1">
+                        <a:rPr sz="950" b="1">
                           <a:ea typeface="맑은 고딕"/>
                           <a:cs typeface="맑은 고딕"/>
                         </a:rPr>
@@ -26329,7 +27034,7 @@
                     <a:lstStyle/>
                     <a:p>
                       <a:r>
-                        <a:rPr sz="1050" b="1">
+                        <a:rPr sz="950" b="1">
                           <a:ea typeface="맑은 고딕"/>
                           <a:cs typeface="맑은 고딕"/>
                         </a:rPr>
@@ -26340,14 +27045,14 @@
                   <a:tcPr marL="54864" marR="54864" marT="18288" marB="18288" anchor="ctr"/>
                 </a:tc>
               </a:tr>
-              <a:tr h="385571">
-                <a:tc>
-                  <a:txBody>
-                    <a:bodyPr wrap="square"/>
-                    <a:lstStyle/>
-                    <a:p>
-                      <a:r>
-                        <a:rPr sz="1050" b="0">
+              <a:tr h="354075">
+                <a:tc>
+                  <a:txBody>
+                    <a:bodyPr wrap="square"/>
+                    <a:lstStyle/>
+                    <a:p>
+                      <a:r>
+                        <a:rPr sz="950" b="0">
                           <a:ea typeface="맑은 고딕"/>
                           <a:cs typeface="맑은 고딕"/>
                         </a:rPr>
@@ -26363,7 +27068,7 @@
                     <a:lstStyle/>
                     <a:p>
                       <a:r>
-                        <a:rPr sz="1050" b="0">
+                        <a:rPr sz="950" b="0">
                           <a:ea typeface="맑은 고딕"/>
                           <a:cs typeface="맑은 고딕"/>
                         </a:rPr>
@@ -26379,7 +27084,7 @@
                     <a:lstStyle/>
                     <a:p>
                       <a:r>
-                        <a:rPr sz="1050" b="0">
+                        <a:rPr sz="950" b="0">
                           <a:ea typeface="맑은 고딕"/>
                           <a:cs typeface="맑은 고딕"/>
                         </a:rPr>
@@ -26395,7 +27100,7 @@
                     <a:lstStyle/>
                     <a:p>
                       <a:r>
-                        <a:rPr sz="1050" b="0">
+                        <a:rPr sz="950" b="0">
                           <a:ea typeface="맑은 고딕"/>
                           <a:cs typeface="맑은 고딕"/>
                         </a:rPr>
@@ -26411,7 +27116,7 @@
                     <a:lstStyle/>
                     <a:p>
                       <a:r>
-                        <a:rPr sz="1050" b="0">
+                        <a:rPr sz="950" b="0">
                           <a:ea typeface="맑은 고딕"/>
                           <a:cs typeface="맑은 고딕"/>
                         </a:rPr>
@@ -26427,7 +27132,7 @@
                     <a:lstStyle/>
                     <a:p>
                       <a:r>
-                        <a:rPr sz="1050" b="0">
+                        <a:rPr sz="950" b="0">
                           <a:ea typeface="맑은 고딕"/>
                           <a:cs typeface="맑은 고딕"/>
                         </a:rPr>
@@ -26443,7 +27148,7 @@
                     <a:lstStyle/>
                     <a:p>
                       <a:r>
-                        <a:rPr sz="1050" b="0">
+                        <a:rPr sz="950" b="0">
                           <a:ea typeface="맑은 고딕"/>
                           <a:cs typeface="맑은 고딕"/>
                         </a:rPr>
@@ -26454,14 +27159,14 @@
                   <a:tcPr marL="54864" marR="54864" marT="18288" marB="18288" anchor="ctr"/>
                 </a:tc>
               </a:tr>
-              <a:tr h="385571">
-                <a:tc>
-                  <a:txBody>
-                    <a:bodyPr wrap="square"/>
-                    <a:lstStyle/>
-                    <a:p>
-                      <a:r>
-                        <a:rPr sz="1050" b="0">
+              <a:tr h="354075">
+                <a:tc>
+                  <a:txBody>
+                    <a:bodyPr wrap="square"/>
+                    <a:lstStyle/>
+                    <a:p>
+                      <a:r>
+                        <a:rPr sz="950" b="0">
                           <a:ea typeface="맑은 고딕"/>
                           <a:cs typeface="맑은 고딕"/>
                         </a:rPr>
@@ -26477,7 +27182,7 @@
                     <a:lstStyle/>
                     <a:p>
                       <a:r>
-                        <a:rPr sz="1050" b="0">
+                        <a:rPr sz="950" b="0">
                           <a:ea typeface="맑은 고딕"/>
                           <a:cs typeface="맑은 고딕"/>
                         </a:rPr>
@@ -26493,7 +27198,7 @@
                     <a:lstStyle/>
                     <a:p>
                       <a:r>
-                        <a:rPr sz="1050" b="0">
+                        <a:rPr sz="950" b="0">
                           <a:ea typeface="맑은 고딕"/>
                           <a:cs typeface="맑은 고딕"/>
                         </a:rPr>
@@ -26509,7 +27214,7 @@
                     <a:lstStyle/>
                     <a:p>
                       <a:r>
-                        <a:rPr sz="1050" b="0">
+                        <a:rPr sz="950" b="0">
                           <a:ea typeface="맑은 고딕"/>
                           <a:cs typeface="맑은 고딕"/>
                         </a:rPr>
@@ -26525,7 +27230,7 @@
                     <a:lstStyle/>
                     <a:p>
                       <a:r>
-                        <a:rPr sz="1050" b="0">
+                        <a:rPr sz="950" b="0">
                           <a:ea typeface="맑은 고딕"/>
                           <a:cs typeface="맑은 고딕"/>
                         </a:rPr>
@@ -26541,7 +27246,7 @@
                     <a:lstStyle/>
                     <a:p>
                       <a:r>
-                        <a:rPr sz="1050" b="0">
+                        <a:rPr sz="950" b="0">
                           <a:ea typeface="맑은 고딕"/>
                           <a:cs typeface="맑은 고딕"/>
                         </a:rPr>
@@ -26557,7 +27262,7 @@
                     <a:lstStyle/>
                     <a:p>
                       <a:r>
-                        <a:rPr sz="1050" b="0">
+                        <a:rPr sz="950" b="0">
                           <a:ea typeface="맑은 고딕"/>
                           <a:cs typeface="맑은 고딕"/>
                         </a:rPr>
@@ -26568,14 +27273,14 @@
                   <a:tcPr marL="54864" marR="54864" marT="18288" marB="18288" anchor="ctr"/>
                 </a:tc>
               </a:tr>
-              <a:tr h="1543050">
-                <a:tc>
-                  <a:txBody>
-                    <a:bodyPr wrap="square"/>
-                    <a:lstStyle/>
-                    <a:p>
-                      <a:r>
-                        <a:rPr sz="1050" b="0">
+              <a:tr h="1251712">
+                <a:tc>
+                  <a:txBody>
+                    <a:bodyPr wrap="square"/>
+                    <a:lstStyle/>
+                    <a:p>
+                      <a:r>
+                        <a:rPr sz="950" b="0">
                           <a:ea typeface="맑은 고딕"/>
                           <a:cs typeface="맑은 고딕"/>
                         </a:rPr>
@@ -26591,7 +27296,7 @@
                     <a:lstStyle/>
                     <a:p>
                       <a:r>
-                        <a:rPr sz="1050" b="0">
+                        <a:rPr sz="950" b="0">
                           <a:ea typeface="맑은 고딕"/>
                           <a:cs typeface="맑은 고딕"/>
                         </a:rPr>
@@ -26607,7 +27312,7 @@
                     <a:lstStyle/>
                     <a:p>
                       <a:r>
-                        <a:rPr sz="1050" b="0">
+                        <a:rPr sz="950" b="0">
                           <a:ea typeface="맑은 고딕"/>
                           <a:cs typeface="맑은 고딕"/>
                         </a:rPr>
@@ -26623,7 +27328,7 @@
                     <a:lstStyle/>
                     <a:p>
                       <a:r>
-                        <a:rPr sz="1050" b="0">
+                        <a:rPr sz="950" b="0">
                           <a:ea typeface="맑은 고딕"/>
                           <a:cs typeface="맑은 고딕"/>
                         </a:rPr>
@@ -26639,7 +27344,7 @@
                     <a:lstStyle/>
                     <a:p>
                       <a:r>
-                        <a:rPr sz="1050" b="0">
+                        <a:rPr sz="950" b="0">
                           <a:ea typeface="맑은 고딕"/>
                           <a:cs typeface="맑은 고딕"/>
                         </a:rPr>
@@ -26655,7 +27360,7 @@
                     <a:lstStyle/>
                     <a:p>
                       <a:r>
-                        <a:rPr sz="1050" b="0">
+                        <a:rPr sz="950" b="0">
                           <a:ea typeface="맑은 고딕"/>
                           <a:cs typeface="맑은 고딕"/>
                         </a:rPr>
@@ -26671,7 +27376,7 @@
                     <a:lstStyle/>
                     <a:p>
                       <a:r>
-                        <a:rPr sz="1050" b="0">
+                        <a:rPr sz="950" b="0">
                           <a:ea typeface="맑은 고딕"/>
                           <a:cs typeface="맑은 고딕"/>
                         </a:rPr>
@@ -26682,14 +27387,14 @@
                   <a:tcPr marL="54864" marR="54864" marT="18288" marB="18288" anchor="ctr"/>
                 </a:tc>
               </a:tr>
-              <a:tr h="716279">
-                <a:tc>
-                  <a:txBody>
-                    <a:bodyPr wrap="square"/>
-                    <a:lstStyle/>
-                    <a:p>
-                      <a:r>
-                        <a:rPr sz="1050" b="0">
+              <a:tr h="503681">
+                <a:tc>
+                  <a:txBody>
+                    <a:bodyPr wrap="square"/>
+                    <a:lstStyle/>
+                    <a:p>
+                      <a:r>
+                        <a:rPr sz="950" b="0">
                           <a:ea typeface="맑은 고딕"/>
                           <a:cs typeface="맑은 고딕"/>
                         </a:rPr>
@@ -26705,7 +27410,7 @@
                     <a:lstStyle/>
                     <a:p>
                       <a:r>
-                        <a:rPr sz="1050" b="0">
+                        <a:rPr sz="950" b="0">
                           <a:ea typeface="맑은 고딕"/>
                           <a:cs typeface="맑은 고딕"/>
                         </a:rPr>
@@ -26721,7 +27426,7 @@
                     <a:lstStyle/>
                     <a:p>
                       <a:r>
-                        <a:rPr sz="1050" b="0">
+                        <a:rPr sz="950" b="0">
                           <a:ea typeface="맑은 고딕"/>
                           <a:cs typeface="맑은 고딕"/>
                         </a:rPr>
@@ -26737,7 +27442,7 @@
                     <a:lstStyle/>
                     <a:p>
                       <a:r>
-                        <a:rPr sz="1050" b="0">
+                        <a:rPr sz="950" b="0">
                           <a:ea typeface="맑은 고딕"/>
                           <a:cs typeface="맑은 고딕"/>
                         </a:rPr>
@@ -26753,7 +27458,7 @@
                     <a:lstStyle/>
                     <a:p>
                       <a:r>
-                        <a:rPr sz="1050" b="0">
+                        <a:rPr sz="950" b="0">
                           <a:ea typeface="맑은 고딕"/>
                           <a:cs typeface="맑은 고딕"/>
                         </a:rPr>
@@ -26769,7 +27474,7 @@
                     <a:lstStyle/>
                     <a:p>
                       <a:r>
-                        <a:rPr sz="1050" b="0">
+                        <a:rPr sz="950" b="0">
                           <a:ea typeface="맑은 고딕"/>
                           <a:cs typeface="맑은 고딕"/>
                         </a:rPr>
@@ -26785,11 +27490,125 @@
                     <a:lstStyle/>
                     <a:p>
                       <a:r>
-                        <a:rPr sz="1050" b="0">
+                        <a:rPr sz="950" b="0">
                           <a:ea typeface="맑은 고딕"/>
                           <a:cs typeface="맑은 고딕"/>
                         </a:rPr>
                         <a:t>이상치를 자동으로 골라내는 절차가 우리 3 keV 값 컷의 원리적 대체물이다. 값이 아니라 측정 품질로 거르면 두 공동 1차 모집단이 하나로 합쳐진다</a:t>
+                      </a:r>
+                    </a:p>
+                  </a:txBody>
+                  <a:tcPr marL="54864" marR="54864" marT="18288" marB="18288" anchor="ctr"/>
+                </a:tc>
+              </a:tr>
+              <a:tr h="503681">
+                <a:tc>
+                  <a:txBody>
+                    <a:bodyPr wrap="square"/>
+                    <a:lstStyle/>
+                    <a:p>
+                      <a:r>
+                        <a:rPr sz="950" b="0">
+                          <a:ea typeface="맑은 고딕"/>
+                          <a:cs typeface="맑은 고딕"/>
+                        </a:rPr>
+                        <a:t>이상치 강건 Bayesian mtanh 적합 (NF, arXiv 2607.14142)</a:t>
+                      </a:r>
+                    </a:p>
+                  </a:txBody>
+                  <a:tcPr marL="54864" marR="54864" marT="18288" marB="18288" anchor="ctr"/>
+                </a:tc>
+                <a:tc>
+                  <a:txBody>
+                    <a:bodyPr wrap="square"/>
+                    <a:lstStyle/>
+                    <a:p>
+                      <a:r>
+                        <a:rPr sz="950" b="0">
+                          <a:ea typeface="맑은 고딕"/>
+                          <a:cs typeface="맑은 고딕"/>
+                        </a:rPr>
+                        <a:t>KSTAR</a:t>
+                      </a:r>
+                    </a:p>
+                  </a:txBody>
+                  <a:tcPr marL="54864" marR="54864" marT="18288" marB="18288" anchor="ctr"/>
+                </a:tc>
+                <a:tc>
+                  <a:txBody>
+                    <a:bodyPr wrap="square"/>
+                    <a:lstStyle/>
+                    <a:p>
+                      <a:r>
+                        <a:rPr sz="950" b="0">
+                          <a:ea typeface="맑은 고딕"/>
+                          <a:cs typeface="맑은 고딕"/>
+                        </a:rPr>
+                        <a:t>2026</a:t>
+                      </a:r>
+                    </a:p>
+                  </a:txBody>
+                  <a:tcPr marL="54864" marR="54864" marT="18288" marB="18288" anchor="ctr"/>
+                </a:tc>
+                <a:tc>
+                  <a:txBody>
+                    <a:bodyPr wrap="square"/>
+                    <a:lstStyle/>
+                    <a:p>
+                      <a:r>
+                        <a:rPr sz="950" b="0">
+                          <a:ea typeface="맑은 고딕"/>
+                          <a:cs typeface="맑은 고딕"/>
+                        </a:rPr>
+                        <a:t>TS·TCI·CES에서 ne·Te·Ti·v_T 프로파일을 동시에 적합한다</a:t>
+                      </a:r>
+                    </a:p>
+                  </a:txBody>
+                  <a:tcPr marL="54864" marR="54864" marT="18288" marB="18288" anchor="ctr"/>
+                </a:tc>
+                <a:tc>
+                  <a:txBody>
+                    <a:bodyPr wrap="square"/>
+                    <a:lstStyle/>
+                    <a:p>
+                      <a:r>
+                        <a:rPr sz="950" b="0">
+                          <a:ea typeface="맑은 고딕"/>
+                          <a:cs typeface="맑은 고딕"/>
+                        </a:rPr>
+                        <a:t>수정 tanh 7모수 + good-and-bad 가우시안 혼합 우도, MAP 초기화 후 MCMC</a:t>
+                      </a:r>
+                    </a:p>
+                  </a:txBody>
+                  <a:tcPr marL="54864" marR="54864" marT="18288" marB="18288" anchor="ctr"/>
+                </a:tc>
+                <a:tc>
+                  <a:txBody>
+                    <a:bodyPr wrap="square"/>
+                    <a:lstStyle/>
+                    <a:p>
+                      <a:r>
+                        <a:rPr sz="950" b="0">
+                          <a:ea typeface="맑은 고딕"/>
+                          <a:cs typeface="맑은 고딕"/>
+                        </a:rPr>
+                        <a:t>248 시간 조각을 24코어에서 78초</a:t>
+                      </a:r>
+                    </a:p>
+                  </a:txBody>
+                  <a:tcPr marL="54864" marR="54864" marT="18288" marB="18288" anchor="ctr"/>
+                </a:tc>
+                <a:tc>
+                  <a:txBody>
+                    <a:bodyPr wrap="square"/>
+                    <a:lstStyle/>
+                    <a:p>
+                      <a:r>
+                        <a:rPr sz="950" b="0">
+                          <a:ea typeface="맑은 고딕"/>
+                          <a:cs typeface="맑은 고딕"/>
+                        </a:rPr>
+                        <a:t>CES 항을 NN-CES 산출로 바꿔 끼울 수 있게 설계되어 있다. 프로파일 단위 불확실성이 우리 타깃 재현성 바닥(§8aq)의 독립 비교값이 된다</a:t>
                       </a:r>
                     </a:p>
                   </a:txBody>
@@ -26843,7 +27662,7 @@
                 <a:ea typeface="맑은 고딕"/>
                 <a:cs typeface="맑은 고딕"/>
               </a:rPr>
-              <a:t>문헌 조사 (1/4, 4쪽): 핵융합의 진단-대-진단 추정은 여전히 단순한 구조가 주류이다</a:t>
+              <a:t>문헌 조사 (1/4, 4/5쪽): 핵융합의 진단-대-진단 추정은 여전히 단순한 구조가 주류이다</a:t>
             </a:r>
           </a:p>
         </p:txBody>
@@ -26895,7 +27714,7 @@
         </p:nvGraphicFramePr>
         <p:xfrm>
           <a:off x="585216" y="2400807"/>
-          <a:ext cx="11027661" cy="3265424"/>
+          <a:ext cx="11027661" cy="3241546"/>
         </p:xfrm>
         <a:graphic>
           <a:graphicData uri="http://schemas.openxmlformats.org/drawingml/2006/table">
@@ -26919,7 +27738,7 @@
                     <a:lstStyle/>
                     <a:p>
                       <a:r>
-                        <a:rPr sz="1100" b="1">
+                        <a:rPr sz="950" b="1">
                           <a:ea typeface="맑은 고딕"/>
                           <a:cs typeface="맑은 고딕"/>
                         </a:rPr>
@@ -26935,7 +27754,7 @@
                     <a:lstStyle/>
                     <a:p>
                       <a:r>
-                        <a:rPr sz="1100" b="1">
+                        <a:rPr sz="950" b="1">
                           <a:ea typeface="맑은 고딕"/>
                           <a:cs typeface="맑은 고딕"/>
                         </a:rPr>
@@ -26951,7 +27770,7 @@
                     <a:lstStyle/>
                     <a:p>
                       <a:r>
-                        <a:rPr sz="1100" b="1">
+                        <a:rPr sz="950" b="1">
                           <a:ea typeface="맑은 고딕"/>
                           <a:cs typeface="맑은 고딕"/>
                         </a:rPr>
@@ -26967,7 +27786,7 @@
                     <a:lstStyle/>
                     <a:p>
                       <a:r>
-                        <a:rPr sz="1100" b="1">
+                        <a:rPr sz="950" b="1">
                           <a:ea typeface="맑은 고딕"/>
                           <a:cs typeface="맑은 고딕"/>
                         </a:rPr>
@@ -26983,7 +27802,7 @@
                     <a:lstStyle/>
                     <a:p>
                       <a:r>
-                        <a:rPr sz="1100" b="1">
+                        <a:rPr sz="950" b="1">
                           <a:ea typeface="맑은 고딕"/>
                           <a:cs typeface="맑은 고딕"/>
                         </a:rPr>
@@ -26999,7 +27818,7 @@
                     <a:lstStyle/>
                     <a:p>
                       <a:r>
-                        <a:rPr sz="1100" b="1">
+                        <a:rPr sz="950" b="1">
                           <a:ea typeface="맑은 고딕"/>
                           <a:cs typeface="맑은 고딕"/>
                         </a:rPr>
@@ -27015,7 +27834,7 @@
                     <a:lstStyle/>
                     <a:p>
                       <a:r>
-                        <a:rPr sz="1100" b="1">
+                        <a:rPr sz="950" b="1">
                           <a:ea typeface="맑은 고딕"/>
                           <a:cs typeface="맑은 고딕"/>
                         </a:rPr>
@@ -27026,30 +27845,486 @@
                   <a:tcPr marL="54864" marR="54864" marT="18288" marB="18288" anchor="ctr"/>
                 </a:tc>
               </a:tr>
-              <a:tr h="747776">
-                <a:tc>
-                  <a:txBody>
-                    <a:bodyPr wrap="square"/>
-                    <a:lstStyle/>
-                    <a:p>
-                      <a:r>
-                        <a:rPr sz="1100" b="0">
-                          <a:ea typeface="맑은 고딕"/>
-                          <a:cs typeface="맑은 고딕"/>
-                        </a:rPr>
-                        <a:t>이상치 강건 Bayesian mtanh 적합 (NF, arXiv 2607.14142)</a:t>
-                      </a:r>
-                    </a:p>
-                  </a:txBody>
-                  <a:tcPr marL="54864" marR="54864" marT="18288" marB="18288" anchor="ctr"/>
-                </a:tc>
-                <a:tc>
-                  <a:txBody>
-                    <a:bodyPr wrap="square"/>
-                    <a:lstStyle/>
-                    <a:p>
-                      <a:r>
-                        <a:rPr sz="1100" b="0">
+              <a:tr h="503681">
+                <a:tc>
+                  <a:txBody>
+                    <a:bodyPr wrap="square"/>
+                    <a:lstStyle/>
+                    <a:p>
+                      <a:r>
+                        <a:rPr sz="950" b="0">
+                          <a:ea typeface="맑은 고딕"/>
+                          <a:cs typeface="맑은 고딕"/>
+                        </a:rPr>
+                        <a:t>TSER 결측 Te 복원 (NF 65:076008)</a:t>
+                      </a:r>
+                    </a:p>
+                  </a:txBody>
+                  <a:tcPr marL="54864" marR="54864" marT="18288" marB="18288" anchor="ctr"/>
+                </a:tc>
+                <a:tc>
+                  <a:txBody>
+                    <a:bodyPr wrap="square"/>
+                    <a:lstStyle/>
+                    <a:p>
+                      <a:r>
+                        <a:rPr sz="950" b="0">
+                          <a:ea typeface="맑은 고딕"/>
+                          <a:cs typeface="맑은 고딕"/>
+                        </a:rPr>
+                        <a:t>EAST</a:t>
+                      </a:r>
+                    </a:p>
+                  </a:txBody>
+                  <a:tcPr marL="54864" marR="54864" marT="18288" marB="18288" anchor="ctr"/>
+                </a:tc>
+                <a:tc>
+                  <a:txBody>
+                    <a:bodyPr wrap="square"/>
+                    <a:lstStyle/>
+                    <a:p>
+                      <a:r>
+                        <a:rPr sz="950" b="0">
+                          <a:ea typeface="맑은 고딕"/>
+                          <a:cs typeface="맑은 고딕"/>
+                        </a:rPr>
+                        <a:t>2025</a:t>
+                      </a:r>
+                    </a:p>
+                  </a:txBody>
+                  <a:tcPr marL="54864" marR="54864" marT="18288" marB="18288" anchor="ctr"/>
+                </a:tc>
+                <a:tc>
+                  <a:txBody>
+                    <a:bodyPr wrap="square"/>
+                    <a:lstStyle/>
+                    <a:p>
+                      <a:r>
+                        <a:rPr sz="950" b="0">
+                          <a:ea typeface="맑은 고딕"/>
+                          <a:cs typeface="맑은 고딕"/>
+                        </a:rPr>
+                        <a:t>센서 고장·진단 부재로 빠진 전자온도를 복원한다</a:t>
+                      </a:r>
+                    </a:p>
+                  </a:txBody>
+                  <a:tcPr marL="54864" marR="54864" marT="18288" marB="18288" anchor="ctr"/>
+                </a:tc>
+                <a:tc>
+                  <a:txBody>
+                    <a:bodyPr wrap="square"/>
+                    <a:lstStyle/>
+                    <a:p>
+                      <a:r>
+                        <a:rPr sz="950" b="0">
+                          <a:ea typeface="맑은 고딕"/>
+                          <a:cs typeface="맑은 고딕"/>
+                        </a:rPr>
+                        <a:t>시계열 외재 회귀(TSER)가 여러 신호의 상호관계를 학습한다</a:t>
+                      </a:r>
+                    </a:p>
+                  </a:txBody>
+                  <a:tcPr marL="54864" marR="54864" marT="18288" marB="18288" anchor="ctr"/>
+                </a:tc>
+                <a:tc>
+                  <a:txBody>
+                    <a:bodyPr wrap="square"/>
+                    <a:lstStyle/>
+                    <a:p>
+                      <a:r>
+                        <a:rPr sz="950" b="0">
+                          <a:ea typeface="맑은 고딕"/>
+                          <a:cs typeface="맑은 고딕"/>
+                        </a:rPr>
+                        <a:t>방전 전 구간에서 2σ 이내 신뢰수준 95.9 % 이상</a:t>
+                      </a:r>
+                    </a:p>
+                  </a:txBody>
+                  <a:tcPr marL="54864" marR="54864" marT="18288" marB="18288" anchor="ctr"/>
+                </a:tc>
+                <a:tc>
+                  <a:txBody>
+                    <a:bodyPr wrap="square"/>
+                    <a:lstStyle/>
+                    <a:p>
+                      <a:r>
+                        <a:rPr sz="950" b="0">
+                          <a:ea typeface="맑은 고딕"/>
+                          <a:cs typeface="맑은 고딕"/>
+                        </a:rPr>
+                        <a:t>결측 타깃 복원이라는 우리 문제 정의와 가장 가까운 프레이밍이다. 다만 타깃이 전자온도이고 인과성 제약도, 보간 기준선과의 비교도 없다</a:t>
+                      </a:r>
+                    </a:p>
+                  </a:txBody>
+                  <a:tcPr marL="54864" marR="54864" marT="18288" marB="18288" anchor="ctr"/>
+                </a:tc>
+              </a:tr>
+              <a:tr h="503681">
+                <a:tc>
+                  <a:txBody>
+                    <a:bodyPr wrap="square"/>
+                    <a:lstStyle/>
+                    <a:p>
+                      <a:r>
+                        <a:rPr sz="950" b="0">
+                          <a:ea typeface="맑은 고딕"/>
+                          <a:cs typeface="맑은 고딕"/>
+                        </a:rPr>
+                        <a:t>전 상태 복원 (arXiv 2607.04390)</a:t>
+                      </a:r>
+                    </a:p>
+                  </a:txBody>
+                  <a:tcPr marL="54864" marR="54864" marT="18288" marB="18288" anchor="ctr"/>
+                </a:tc>
+                <a:tc>
+                  <a:txBody>
+                    <a:bodyPr wrap="square"/>
+                    <a:lstStyle/>
+                    <a:p>
+                      <a:r>
+                        <a:rPr sz="950" b="0">
+                          <a:ea typeface="맑은 고딕"/>
+                          <a:cs typeface="맑은 고딕"/>
+                        </a:rPr>
+                        <a:t>kinetic 시뮬레이션</a:t>
+                      </a:r>
+                    </a:p>
+                  </a:txBody>
+                  <a:tcPr marL="54864" marR="54864" marT="18288" marB="18288" anchor="ctr"/>
+                </a:tc>
+                <a:tc>
+                  <a:txBody>
+                    <a:bodyPr wrap="square"/>
+                    <a:lstStyle/>
+                    <a:p>
+                      <a:r>
+                        <a:rPr sz="950" b="0">
+                          <a:ea typeface="맑은 고딕"/>
+                          <a:cs typeface="맑은 고딕"/>
+                        </a:rPr>
+                        <a:t>2026</a:t>
+                      </a:r>
+                    </a:p>
+                  </a:txBody>
+                  <a:tcPr marL="54864" marR="54864" marT="18288" marB="18288" anchor="ctr"/>
+                </a:tc>
+                <a:tc>
+                  <a:txBody>
+                    <a:bodyPr wrap="square"/>
+                    <a:lstStyle/>
+                    <a:p>
+                      <a:r>
+                        <a:rPr sz="950" b="0">
+                          <a:ea typeface="맑은 고딕"/>
+                          <a:cs typeface="맑은 고딕"/>
+                        </a:rPr>
+                        <a:t>희소한 밀도 프로브 몇 개로 전 영역 플라즈마 장을 복원한다</a:t>
+                      </a:r>
+                    </a:p>
+                  </a:txBody>
+                  <a:tcPr marL="54864" marR="54864" marT="18288" marB="18288" anchor="ctr"/>
+                </a:tc>
+                <a:tc>
+                  <a:txBody>
+                    <a:bodyPr wrap="square"/>
+                    <a:lstStyle/>
+                    <a:p>
+                      <a:r>
+                        <a:rPr sz="950" b="0">
+                          <a:ea typeface="맑은 고딕"/>
+                          <a:cs typeface="맑은 고딕"/>
+                        </a:rPr>
+                        <a:t>희소 센서 이력의 시간 인코딩 + 공간 디코딩</a:t>
+                      </a:r>
+                    </a:p>
+                  </a:txBody>
+                  <a:tcPr marL="54864" marR="54864" marT="18288" marB="18288" anchor="ctr"/>
+                </a:tc>
+                <a:tc>
+                  <a:txBody>
+                    <a:bodyPr wrap="square"/>
+                    <a:lstStyle/>
+                    <a:p>
+                      <a:r>
+                        <a:rPr sz="950" b="0">
+                          <a:ea typeface="맑은 고딕"/>
+                          <a:cs typeface="맑은 고딕"/>
+                        </a:rPr>
+                        <a:t>고정밀 kinetic 시뮬레이션 자료 (실험 데이터 아님)</a:t>
+                      </a:r>
+                    </a:p>
+                  </a:txBody>
+                  <a:tcPr marL="54864" marR="54864" marT="18288" marB="18288" anchor="ctr"/>
+                </a:tc>
+                <a:tc>
+                  <a:txBody>
+                    <a:bodyPr wrap="square"/>
+                    <a:lstStyle/>
+                    <a:p>
+                      <a:r>
+                        <a:rPr sz="950" b="0">
+                          <a:ea typeface="맑은 고딕"/>
+                          <a:cs typeface="맑은 고딕"/>
+                        </a:rPr>
+                        <a:t>센서 몇 개로 전체 상태를 세우는 구조는 우리와 같으나 실험이 아니라 시뮬레이션에서 검증되었다</a:t>
+                      </a:r>
+                    </a:p>
+                  </a:txBody>
+                  <a:tcPr marL="54864" marR="54864" marT="18288" marB="18288" anchor="ctr"/>
+                </a:tc>
+              </a:tr>
+              <a:tr h="653288">
+                <a:tc>
+                  <a:txBody>
+                    <a:bodyPr wrap="square"/>
+                    <a:lstStyle/>
+                    <a:p>
+                      <a:r>
+                        <a:rPr sz="950" b="0">
+                          <a:ea typeface="맑은 고딕"/>
+                          <a:cs typeface="맑은 고딕"/>
+                        </a:rPr>
+                        <a:t>평형 재구성 챌린지 (arXiv 2609.01750)</a:t>
+                      </a:r>
+                    </a:p>
+                  </a:txBody>
+                  <a:tcPr marL="54864" marR="54864" marT="18288" marB="18288" anchor="ctr"/>
+                </a:tc>
+                <a:tc>
+                  <a:txBody>
+                    <a:bodyPr wrap="square"/>
+                    <a:lstStyle/>
+                    <a:p>
+                      <a:r>
+                        <a:rPr sz="950" b="0">
+                          <a:ea typeface="맑은 고딕"/>
+                          <a:cs typeface="맑은 고딕"/>
+                        </a:rPr>
+                        <a:t>DIII-D · MAST</a:t>
+                      </a:r>
+                    </a:p>
+                  </a:txBody>
+                  <a:tcPr marL="54864" marR="54864" marT="18288" marB="18288" anchor="ctr"/>
+                </a:tc>
+                <a:tc>
+                  <a:txBody>
+                    <a:bodyPr wrap="square"/>
+                    <a:lstStyle/>
+                    <a:p>
+                      <a:r>
+                        <a:rPr sz="950" b="0">
+                          <a:ea typeface="맑은 고딕"/>
+                          <a:cs typeface="맑은 고딕"/>
+                        </a:rPr>
+                        <a:t>2026</a:t>
+                      </a:r>
+                    </a:p>
+                  </a:txBody>
+                  <a:tcPr marL="54864" marR="54864" marT="18288" marB="18288" anchor="ctr"/>
+                </a:tc>
+                <a:tc>
+                  <a:txBody>
+                    <a:bodyPr wrap="square"/>
+                    <a:lstStyle/>
+                    <a:p>
+                      <a:r>
+                        <a:rPr sz="950" b="0">
+                          <a:ea typeface="맑은 고딕"/>
+                          <a:cs typeface="맑은 고딕"/>
+                        </a:rPr>
+                        <a:t>자기 진단 없이 자기 기하를 추론하는 공개 벤치마크</a:t>
+                      </a:r>
+                    </a:p>
+                  </a:txBody>
+                  <a:tcPr marL="54864" marR="54864" marT="18288" marB="18288" anchor="ctr"/>
+                </a:tc>
+                <a:tc>
+                  <a:txBody>
+                    <a:bodyPr wrap="square"/>
+                    <a:lstStyle/>
+                    <a:p>
+                      <a:r>
+                        <a:rPr sz="950" b="0">
+                          <a:ea typeface="맑은 고딕"/>
+                          <a:cs typeface="맑은 고딕"/>
+                        </a:rPr>
+                        <a:t>PF 코일 전류 + Thomson으로 ψ(R,Z). 기준선 4종(PCA+Ridge / GBT / MLP / conv 디코더)</a:t>
+                      </a:r>
+                    </a:p>
+                  </a:txBody>
+                  <a:tcPr marL="54864" marR="54864" marT="18288" marB="18288" anchor="ctr"/>
+                </a:tc>
+                <a:tc>
+                  <a:txBody>
+                    <a:bodyPr wrap="square"/>
+                    <a:lstStyle/>
+                    <a:p>
+                      <a:r>
+                        <a:rPr sz="950" b="0">
+                          <a:ea typeface="맑은 고딕"/>
+                          <a:cs typeface="맑은 고딕"/>
+                        </a:rPr>
+                        <a:t>DIII-D 약 9,100 shot · MAST 약 2,400 shot</a:t>
+                      </a:r>
+                    </a:p>
+                  </a:txBody>
+                  <a:tcPr marL="54864" marR="54864" marT="18288" marB="18288" anchor="ctr"/>
+                </a:tc>
+                <a:tc>
+                  <a:txBody>
+                    <a:bodyPr wrap="square"/>
+                    <a:lstStyle/>
+                    <a:p>
+                      <a:r>
+                        <a:rPr sz="950" b="0">
+                          <a:ea typeface="맑은 고딕"/>
+                          <a:cs typeface="맑은 고딕"/>
+                        </a:rPr>
+                        <a:t>진단 하나가 없을 때 다른 진단으로 대신한다는 문제를 공개 벤치마크로 만든 사례. 이온 채널은 다루지 않으며 shot 단위 분할과 교차 장치 일반화를 요구한다</a:t>
+                      </a:r>
+                    </a:p>
+                  </a:txBody>
+                  <a:tcPr marL="54864" marR="54864" marT="18288" marB="18288" anchor="ctr"/>
+                </a:tc>
+              </a:tr>
+              <a:tr h="653288">
+                <a:tc>
+                  <a:txBody>
+                    <a:bodyPr wrap="square"/>
+                    <a:lstStyle/>
+                    <a:p>
+                      <a:r>
+                        <a:rPr sz="950" b="0">
+                          <a:ea typeface="맑은 고딕"/>
+                          <a:cs typeface="맑은 고딕"/>
+                        </a:rPr>
+                        <a:t>이분산 신경망 대리모델 (arXiv 2608.19377)</a:t>
+                      </a:r>
+                    </a:p>
+                  </a:txBody>
+                  <a:tcPr marL="54864" marR="54864" marT="18288" marB="18288" anchor="ctr"/>
+                </a:tc>
+                <a:tc>
+                  <a:txBody>
+                    <a:bodyPr wrap="square"/>
+                    <a:lstStyle/>
+                    <a:p>
+                      <a:r>
+                        <a:rPr sz="950" b="0">
+                          <a:ea typeface="맑은 고딕"/>
+                          <a:cs typeface="맑은 고딕"/>
+                        </a:rPr>
+                        <a:t>Thomson 산란</a:t>
+                      </a:r>
+                    </a:p>
+                  </a:txBody>
+                  <a:tcPr marL="54864" marR="54864" marT="18288" marB="18288" anchor="ctr"/>
+                </a:tc>
+                <a:tc>
+                  <a:txBody>
+                    <a:bodyPr wrap="square"/>
+                    <a:lstStyle/>
+                    <a:p>
+                      <a:r>
+                        <a:rPr sz="950" b="0">
+                          <a:ea typeface="맑은 고딕"/>
+                          <a:cs typeface="맑은 고딕"/>
+                        </a:rPr>
+                        <a:t>2026</a:t>
+                      </a:r>
+                    </a:p>
+                  </a:txBody>
+                  <a:tcPr marL="54864" marR="54864" marT="18288" marB="18288" anchor="ctr"/>
+                </a:tc>
+                <a:tc>
+                  <a:txBody>
+                    <a:bodyPr wrap="square"/>
+                    <a:lstStyle/>
+                    <a:p>
+                      <a:r>
+                        <a:rPr sz="950" b="0">
+                          <a:ea typeface="맑은 고딕"/>
+                          <a:cs typeface="맑은 고딕"/>
+                        </a:rPr>
+                        <a:t>잡음이 지배하는 분광 측정에서 MCMC 파라미터 추정을 가속한다</a:t>
+                      </a:r>
+                    </a:p>
+                  </a:txBody>
+                  <a:tcPr marL="54864" marR="54864" marT="18288" marB="18288" anchor="ctr"/>
+                </a:tc>
+                <a:tc>
+                  <a:txBody>
+                    <a:bodyPr wrap="square"/>
+                    <a:lstStyle/>
+                    <a:p>
+                      <a:r>
+                        <a:rPr sz="950" b="0">
+                          <a:ea typeface="맑은 고딕"/>
+                          <a:cs typeface="맑은 고딕"/>
+                        </a:rPr>
+                        <a:t>이중 헤드 신경망이 기대 스펙트럼과 채널별 잡음 분산을 함께 내고 가우시안 NLL로 학습한다</a:t>
+                      </a:r>
+                    </a:p>
+                  </a:txBody>
+                  <a:tcPr marL="54864" marR="54864" marT="18288" marB="18288" anchor="ctr"/>
+                </a:tc>
+                <a:tc>
+                  <a:txBody>
+                    <a:bodyPr wrap="square"/>
+                    <a:lstStyle/>
+                    <a:p>
+                      <a:r>
+                        <a:rPr sz="950" b="0">
+                          <a:ea typeface="맑은 고딕"/>
+                          <a:cs typeface="맑은 고딕"/>
+                        </a:rPr>
+                        <a:t>정확 물리 모델 대비 1,500배 이상 가속</a:t>
+                      </a:r>
+                    </a:p>
+                  </a:txBody>
+                  <a:tcPr marL="54864" marR="54864" marT="18288" marB="18288" anchor="ctr"/>
+                </a:tc>
+                <a:tc>
+                  <a:txBody>
+                    <a:bodyPr wrap="square"/>
+                    <a:lstStyle/>
+                    <a:p>
+                      <a:r>
+                        <a:rPr sz="950" b="0">
+                          <a:ea typeface="맑은 고딕"/>
+                          <a:cs typeface="맑은 고딕"/>
+                        </a:rPr>
+                        <a:t>우리 열린 축 1번(이분산 손실)의 핵융합 도메인 선례. 등분산 기준선 대비 RMSE를 20 % 이상 줄였다 — 손실 형태를 바꾸는 것이 이 분야에서 실제로 값을 한다는 증거</a:t>
+                      </a:r>
+                    </a:p>
+                  </a:txBody>
+                  <a:tcPr marL="54864" marR="54864" marT="18288" marB="18288" anchor="ctr"/>
+                </a:tc>
+              </a:tr>
+              <a:tr h="653288">
+                <a:tc>
+                  <a:txBody>
+                    <a:bodyPr wrap="square"/>
+                    <a:lstStyle/>
+                    <a:p>
+                      <a:r>
+                        <a:rPr sz="950" b="0">
+                          <a:ea typeface="맑은 고딕"/>
+                          <a:cs typeface="맑은 고딕"/>
+                        </a:rPr>
+                        <a:t>XICS ↔ CES 교차 검증</a:t>
+                      </a:r>
+                    </a:p>
+                  </a:txBody>
+                  <a:tcPr marL="54864" marR="54864" marT="18288" marB="18288" anchor="ctr"/>
+                </a:tc>
+                <a:tc>
+                  <a:txBody>
+                    <a:bodyPr wrap="square"/>
+                    <a:lstStyle/>
+                    <a:p>
+                      <a:r>
+                        <a:rPr sz="950" b="0">
                           <a:ea typeface="맑은 고딕"/>
                           <a:cs typeface="맑은 고딕"/>
                         </a:rPr>
@@ -27065,417 +28340,75 @@
                     <a:lstStyle/>
                     <a:p>
                       <a:r>
-                        <a:rPr sz="1100" b="0">
-                          <a:ea typeface="맑은 고딕"/>
-                          <a:cs typeface="맑은 고딕"/>
-                        </a:rPr>
-                        <a:t>2026</a:t>
-                      </a:r>
-                    </a:p>
-                  </a:txBody>
-                  <a:tcPr marL="54864" marR="54864" marT="18288" marB="18288" anchor="ctr"/>
-                </a:tc>
-                <a:tc>
-                  <a:txBody>
-                    <a:bodyPr wrap="square"/>
-                    <a:lstStyle/>
-                    <a:p>
-                      <a:r>
-                        <a:rPr sz="1100" b="0">
-                          <a:ea typeface="맑은 고딕"/>
-                          <a:cs typeface="맑은 고딕"/>
-                        </a:rPr>
-                        <a:t>TS·TCI·CES에서 ne·Te·Ti·v_T 프로파일을 동시에 적합한다</a:t>
-                      </a:r>
-                    </a:p>
-                  </a:txBody>
-                  <a:tcPr marL="54864" marR="54864" marT="18288" marB="18288" anchor="ctr"/>
-                </a:tc>
-                <a:tc>
-                  <a:txBody>
-                    <a:bodyPr wrap="square"/>
-                    <a:lstStyle/>
-                    <a:p>
-                      <a:r>
-                        <a:rPr sz="1100" b="0">
-                          <a:ea typeface="맑은 고딕"/>
-                          <a:cs typeface="맑은 고딕"/>
-                        </a:rPr>
-                        <a:t>수정 tanh 7모수 + good-and-bad 가우시안 혼합 우도, MAP 초기화 후 MCMC</a:t>
-                      </a:r>
-                    </a:p>
-                  </a:txBody>
-                  <a:tcPr marL="54864" marR="54864" marT="18288" marB="18288" anchor="ctr"/>
-                </a:tc>
-                <a:tc>
-                  <a:txBody>
-                    <a:bodyPr wrap="square"/>
-                    <a:lstStyle/>
-                    <a:p>
-                      <a:r>
-                        <a:rPr sz="1100" b="0">
-                          <a:ea typeface="맑은 고딕"/>
-                          <a:cs typeface="맑은 고딕"/>
-                        </a:rPr>
-                        <a:t>248 시간 조각을 24코어에서 78초</a:t>
-                      </a:r>
-                    </a:p>
-                  </a:txBody>
-                  <a:tcPr marL="54864" marR="54864" marT="18288" marB="18288" anchor="ctr"/>
-                </a:tc>
-                <a:tc>
-                  <a:txBody>
-                    <a:bodyPr wrap="square"/>
-                    <a:lstStyle/>
-                    <a:p>
-                      <a:r>
-                        <a:rPr sz="1100" b="0">
-                          <a:ea typeface="맑은 고딕"/>
-                          <a:cs typeface="맑은 고딕"/>
-                        </a:rPr>
-                        <a:t>CES 항을 NN-CES 산출로 바꿔 끼울 수 있게 설계되어 있다. 프로파일 단위 불확실성이 우리 타깃 재현성 바닥(§8aq)의 독립 비교값이 된다</a:t>
-                      </a:r>
-                    </a:p>
-                  </a:txBody>
-                  <a:tcPr marL="54864" marR="54864" marT="18288" marB="18288" anchor="ctr"/>
-                </a:tc>
-              </a:tr>
-              <a:tr h="747776">
-                <a:tc>
-                  <a:txBody>
-                    <a:bodyPr wrap="square"/>
-                    <a:lstStyle/>
-                    <a:p>
-                      <a:r>
-                        <a:rPr sz="1100" b="0">
-                          <a:ea typeface="맑은 고딕"/>
-                          <a:cs typeface="맑은 고딕"/>
-                        </a:rPr>
-                        <a:t>TSER 결측 Te 복원 (NF 65:076008)</a:t>
-                      </a:r>
-                    </a:p>
-                  </a:txBody>
-                  <a:tcPr marL="54864" marR="54864" marT="18288" marB="18288" anchor="ctr"/>
-                </a:tc>
-                <a:tc>
-                  <a:txBody>
-                    <a:bodyPr wrap="square"/>
-                    <a:lstStyle/>
-                    <a:p>
-                      <a:r>
-                        <a:rPr sz="1100" b="0">
-                          <a:ea typeface="맑은 고딕"/>
-                          <a:cs typeface="맑은 고딕"/>
-                        </a:rPr>
-                        <a:t>EAST</a:t>
-                      </a:r>
-                    </a:p>
-                  </a:txBody>
-                  <a:tcPr marL="54864" marR="54864" marT="18288" marB="18288" anchor="ctr"/>
-                </a:tc>
-                <a:tc>
-                  <a:txBody>
-                    <a:bodyPr wrap="square"/>
-                    <a:lstStyle/>
-                    <a:p>
-                      <a:r>
-                        <a:rPr sz="1100" b="0">
-                          <a:ea typeface="맑은 고딕"/>
-                          <a:cs typeface="맑은 고딕"/>
-                        </a:rPr>
-                        <a:t>2025</a:t>
-                      </a:r>
-                    </a:p>
-                  </a:txBody>
-                  <a:tcPr marL="54864" marR="54864" marT="18288" marB="18288" anchor="ctr"/>
-                </a:tc>
-                <a:tc>
-                  <a:txBody>
-                    <a:bodyPr wrap="square"/>
-                    <a:lstStyle/>
-                    <a:p>
-                      <a:r>
-                        <a:rPr sz="1100" b="0">
-                          <a:ea typeface="맑은 고딕"/>
-                          <a:cs typeface="맑은 고딕"/>
-                        </a:rPr>
-                        <a:t>센서 고장·진단 부재로 빠진 전자온도를 복원한다</a:t>
-                      </a:r>
-                    </a:p>
-                  </a:txBody>
-                  <a:tcPr marL="54864" marR="54864" marT="18288" marB="18288" anchor="ctr"/>
-                </a:tc>
-                <a:tc>
-                  <a:txBody>
-                    <a:bodyPr wrap="square"/>
-                    <a:lstStyle/>
-                    <a:p>
-                      <a:r>
-                        <a:rPr sz="1100" b="0">
-                          <a:ea typeface="맑은 고딕"/>
-                          <a:cs typeface="맑은 고딕"/>
-                        </a:rPr>
-                        <a:t>시계열 외재 회귀(TSER)가 여러 신호의 상호관계를 학습한다</a:t>
-                      </a:r>
-                    </a:p>
-                  </a:txBody>
-                  <a:tcPr marL="54864" marR="54864" marT="18288" marB="18288" anchor="ctr"/>
-                </a:tc>
-                <a:tc>
-                  <a:txBody>
-                    <a:bodyPr wrap="square"/>
-                    <a:lstStyle/>
-                    <a:p>
-                      <a:r>
-                        <a:rPr sz="1100" b="0">
-                          <a:ea typeface="맑은 고딕"/>
-                          <a:cs typeface="맑은 고딕"/>
-                        </a:rPr>
-                        <a:t>방전 전 구간에서 2σ 이내 신뢰수준 95.9 % 이상</a:t>
-                      </a:r>
-                    </a:p>
-                  </a:txBody>
-                  <a:tcPr marL="54864" marR="54864" marT="18288" marB="18288" anchor="ctr"/>
-                </a:tc>
-                <a:tc>
-                  <a:txBody>
-                    <a:bodyPr wrap="square"/>
-                    <a:lstStyle/>
-                    <a:p>
-                      <a:r>
-                        <a:rPr sz="1100" b="0">
-                          <a:ea typeface="맑은 고딕"/>
-                          <a:cs typeface="맑은 고딕"/>
-                        </a:rPr>
-                        <a:t>결측 타깃 복원이라는 우리 문제 정의와 가장 가까운 프레이밍이다. 다만 타깃이 전자온도이고 인과성 제약도, 보간 기준선과의 비교도 없다</a:t>
-                      </a:r>
-                    </a:p>
-                  </a:txBody>
-                  <a:tcPr marL="54864" marR="54864" marT="18288" marB="18288" anchor="ctr"/>
-                </a:tc>
-              </a:tr>
-              <a:tr h="747776">
-                <a:tc>
-                  <a:txBody>
-                    <a:bodyPr wrap="square"/>
-                    <a:lstStyle/>
-                    <a:p>
-                      <a:r>
-                        <a:rPr sz="1100" b="0">
-                          <a:ea typeface="맑은 고딕"/>
-                          <a:cs typeface="맑은 고딕"/>
-                        </a:rPr>
-                        <a:t>전 상태 복원 (arXiv 2607.04390)</a:t>
-                      </a:r>
-                    </a:p>
-                  </a:txBody>
-                  <a:tcPr marL="54864" marR="54864" marT="18288" marB="18288" anchor="ctr"/>
-                </a:tc>
-                <a:tc>
-                  <a:txBody>
-                    <a:bodyPr wrap="square"/>
-                    <a:lstStyle/>
-                    <a:p>
-                      <a:r>
-                        <a:rPr sz="1100" b="0">
-                          <a:ea typeface="맑은 고딕"/>
-                          <a:cs typeface="맑은 고딕"/>
-                        </a:rPr>
-                        <a:t>kinetic 시뮬레이션</a:t>
-                      </a:r>
-                    </a:p>
-                  </a:txBody>
-                  <a:tcPr marL="54864" marR="54864" marT="18288" marB="18288" anchor="ctr"/>
-                </a:tc>
-                <a:tc>
-                  <a:txBody>
-                    <a:bodyPr wrap="square"/>
-                    <a:lstStyle/>
-                    <a:p>
-                      <a:r>
-                        <a:rPr sz="1100" b="0">
-                          <a:ea typeface="맑은 고딕"/>
-                          <a:cs typeface="맑은 고딕"/>
-                        </a:rPr>
-                        <a:t>2026</a:t>
-                      </a:r>
-                    </a:p>
-                  </a:txBody>
-                  <a:tcPr marL="54864" marR="54864" marT="18288" marB="18288" anchor="ctr"/>
-                </a:tc>
-                <a:tc>
-                  <a:txBody>
-                    <a:bodyPr wrap="square"/>
-                    <a:lstStyle/>
-                    <a:p>
-                      <a:r>
-                        <a:rPr sz="1100" b="0">
-                          <a:ea typeface="맑은 고딕"/>
-                          <a:cs typeface="맑은 고딕"/>
-                        </a:rPr>
-                        <a:t>희소한 밀도 프로브 몇 개로 전 영역 플라즈마 장을 복원한다</a:t>
-                      </a:r>
-                    </a:p>
-                  </a:txBody>
-                  <a:tcPr marL="54864" marR="54864" marT="18288" marB="18288" anchor="ctr"/>
-                </a:tc>
-                <a:tc>
-                  <a:txBody>
-                    <a:bodyPr wrap="square"/>
-                    <a:lstStyle/>
-                    <a:p>
-                      <a:r>
-                        <a:rPr sz="1100" b="0">
-                          <a:ea typeface="맑은 고딕"/>
-                          <a:cs typeface="맑은 고딕"/>
-                        </a:rPr>
-                        <a:t>희소 센서 이력의 시간 인코딩 + 공간 디코딩</a:t>
-                      </a:r>
-                    </a:p>
-                  </a:txBody>
-                  <a:tcPr marL="54864" marR="54864" marT="18288" marB="18288" anchor="ctr"/>
-                </a:tc>
-                <a:tc>
-                  <a:txBody>
-                    <a:bodyPr wrap="square"/>
-                    <a:lstStyle/>
-                    <a:p>
-                      <a:r>
-                        <a:rPr sz="1100" b="0">
-                          <a:ea typeface="맑은 고딕"/>
-                          <a:cs typeface="맑은 고딕"/>
-                        </a:rPr>
-                        <a:t>고정밀 kinetic 시뮬레이션 자료 (실험 데이터 아님)</a:t>
-                      </a:r>
-                    </a:p>
-                  </a:txBody>
-                  <a:tcPr marL="54864" marR="54864" marT="18288" marB="18288" anchor="ctr"/>
-                </a:tc>
-                <a:tc>
-                  <a:txBody>
-                    <a:bodyPr wrap="square"/>
-                    <a:lstStyle/>
-                    <a:p>
-                      <a:r>
-                        <a:rPr sz="1100" b="0">
-                          <a:ea typeface="맑은 고딕"/>
-                          <a:cs typeface="맑은 고딕"/>
-                        </a:rPr>
-                        <a:t>센서 몇 개로 전체 상태를 세우는 구조는 우리와 같으나 실험이 아니라 시뮬레이션에서 검증되었다</a:t>
-                      </a:r>
-                    </a:p>
-                  </a:txBody>
-                  <a:tcPr marL="54864" marR="54864" marT="18288" marB="18288" anchor="ctr"/>
-                </a:tc>
-              </a:tr>
-              <a:tr h="747776">
-                <a:tc>
-                  <a:txBody>
-                    <a:bodyPr wrap="square"/>
-                    <a:lstStyle/>
-                    <a:p>
-                      <a:r>
-                        <a:rPr sz="1100" b="0">
-                          <a:ea typeface="맑은 고딕"/>
-                          <a:cs typeface="맑은 고딕"/>
-                        </a:rPr>
-                        <a:t>평형 재구성 챌린지 (arXiv 2609.01750)</a:t>
-                      </a:r>
-                    </a:p>
-                  </a:txBody>
-                  <a:tcPr marL="54864" marR="54864" marT="18288" marB="18288" anchor="ctr"/>
-                </a:tc>
-                <a:tc>
-                  <a:txBody>
-                    <a:bodyPr wrap="square"/>
-                    <a:lstStyle/>
-                    <a:p>
-                      <a:r>
-                        <a:rPr sz="1100" b="0">
-                          <a:ea typeface="맑은 고딕"/>
-                          <a:cs typeface="맑은 고딕"/>
-                        </a:rPr>
-                        <a:t>DIII-D · MAST</a:t>
-                      </a:r>
-                    </a:p>
-                  </a:txBody>
-                  <a:tcPr marL="54864" marR="54864" marT="18288" marB="18288" anchor="ctr"/>
-                </a:tc>
-                <a:tc>
-                  <a:txBody>
-                    <a:bodyPr wrap="square"/>
-                    <a:lstStyle/>
-                    <a:p>
-                      <a:r>
-                        <a:rPr sz="1100" b="0">
-                          <a:ea typeface="맑은 고딕"/>
-                          <a:cs typeface="맑은 고딕"/>
-                        </a:rPr>
-                        <a:t>2026</a:t>
-                      </a:r>
-                    </a:p>
-                  </a:txBody>
-                  <a:tcPr marL="54864" marR="54864" marT="18288" marB="18288" anchor="ctr"/>
-                </a:tc>
-                <a:tc>
-                  <a:txBody>
-                    <a:bodyPr wrap="square"/>
-                    <a:lstStyle/>
-                    <a:p>
-                      <a:r>
-                        <a:rPr sz="1100" b="0">
-                          <a:ea typeface="맑은 고딕"/>
-                          <a:cs typeface="맑은 고딕"/>
-                        </a:rPr>
-                        <a:t>자기 진단 없이 자기 기하를 추론하는 공개 벤치마크</a:t>
-                      </a:r>
-                    </a:p>
-                  </a:txBody>
-                  <a:tcPr marL="54864" marR="54864" marT="18288" marB="18288" anchor="ctr"/>
-                </a:tc>
-                <a:tc>
-                  <a:txBody>
-                    <a:bodyPr wrap="square"/>
-                    <a:lstStyle/>
-                    <a:p>
-                      <a:r>
-                        <a:rPr sz="1100" b="0">
-                          <a:ea typeface="맑은 고딕"/>
-                          <a:cs typeface="맑은 고딕"/>
-                        </a:rPr>
-                        <a:t>PF 코일 전류 + Thomson으로 ψ(R,Z). 기준선 4종(PCA+Ridge / GBT / MLP / conv 디코더)</a:t>
-                      </a:r>
-                    </a:p>
-                  </a:txBody>
-                  <a:tcPr marL="54864" marR="54864" marT="18288" marB="18288" anchor="ctr"/>
-                </a:tc>
-                <a:tc>
-                  <a:txBody>
-                    <a:bodyPr wrap="square"/>
-                    <a:lstStyle/>
-                    <a:p>
-                      <a:r>
-                        <a:rPr sz="1100" b="0">
-                          <a:ea typeface="맑은 고딕"/>
-                          <a:cs typeface="맑은 고딕"/>
-                        </a:rPr>
-                        <a:t>DIII-D 약 9,100 shot · MAST 약 2,400 shot</a:t>
-                      </a:r>
-                    </a:p>
-                  </a:txBody>
-                  <a:tcPr marL="54864" marR="54864" marT="18288" marB="18288" anchor="ctr"/>
-                </a:tc>
-                <a:tc>
-                  <a:txBody>
-                    <a:bodyPr wrap="square"/>
-                    <a:lstStyle/>
-                    <a:p>
-                      <a:r>
-                        <a:rPr sz="1100" b="0">
-                          <a:ea typeface="맑은 고딕"/>
-                          <a:cs typeface="맑은 고딕"/>
-                        </a:rPr>
-                        <a:t>진단 하나가 없을 때 다른 진단으로 대신한다는 문제를 공개 벤치마크로 만든 사례. 이온 채널은 다루지 않으며 shot 단위 분할과 교차 장치 일반화를 요구한다</a:t>
+                        <a:rPr sz="950" b="0">
+                          <a:ea typeface="맑은 고딕"/>
+                          <a:cs typeface="맑은 고딕"/>
+                        </a:rPr>
+                        <a:t>2009 ~</a:t>
+                      </a:r>
+                    </a:p>
+                  </a:txBody>
+                  <a:tcPr marL="54864" marR="54864" marT="18288" marB="18288" anchor="ctr"/>
+                </a:tc>
+                <a:tc>
+                  <a:txBody>
+                    <a:bodyPr wrap="square"/>
+                    <a:lstStyle/>
+                    <a:p>
+                      <a:r>
+                        <a:rPr sz="950" b="0">
+                          <a:ea typeface="맑은 고딕"/>
+                          <a:cs typeface="맑은 고딕"/>
+                        </a:rPr>
+                        <a:t>He 유사 아르곤 도플러로 Ti·토로이달 회전을 독립 측정한다</a:t>
+                      </a:r>
+                    </a:p>
+                  </a:txBody>
+                  <a:tcPr marL="54864" marR="54864" marT="18288" marB="18288" anchor="ctr"/>
+                </a:tc>
+                <a:tc>
+                  <a:txBody>
+                    <a:bodyPr wrap="square"/>
+                    <a:lstStyle/>
+                    <a:p>
+                      <a:r>
+                        <a:rPr sz="950" b="0">
+                          <a:ea typeface="맑은 고딕"/>
+                          <a:cs typeface="맑은 고딕"/>
+                        </a:rPr>
+                        <a:t>X선 결정 분광기(XICS). 최근 LabVIEW 실시간 처리로 준실시간화</a:t>
+                      </a:r>
+                    </a:p>
+                  </a:txBody>
+                  <a:tcPr marL="54864" marR="54864" marT="18288" marB="18288" anchor="ctr"/>
+                </a:tc>
+                <a:tc>
+                  <a:txBody>
+                    <a:bodyPr wrap="square"/>
+                    <a:lstStyle/>
+                    <a:p>
+                      <a:r>
+                        <a:rPr sz="950" b="0">
+                          <a:ea typeface="맑은 고딕"/>
+                          <a:cs typeface="맑은 고딕"/>
+                        </a:rPr>
+                        <a:t>코어 Ti·회전이 여러 방전에서 CES와 잘 일치</a:t>
+                      </a:r>
+                    </a:p>
+                  </a:txBody>
+                  <a:tcPr marL="54864" marR="54864" marT="18288" marB="18288" anchor="ctr"/>
+                </a:tc>
+                <a:tc>
+                  <a:txBody>
+                    <a:bodyPr wrap="square"/>
+                    <a:lstStyle/>
+                    <a:p>
+                      <a:r>
+                        <a:rPr sz="950" b="0">
+                          <a:ea typeface="맑은 고딕"/>
+                          <a:cs typeface="맑은 고딕"/>
+                        </a:rPr>
+                        <a:t>KSTAR에는 회전을 재는 두 번째 진단이 이미 있다. 우리 641 shot에 XICS가 있다면 V_rot 분기의 추가 입력이자 독립 라벨원이 된다 — B.6와 나란히 놓을 새 레버</a:t>
                       </a:r>
                     </a:p>
                   </a:txBody>
@@ -27648,6 +28581,350 @@
 </file>
 
 <file path=ppt/slides/slide60.xml><?xml version="1.0" encoding="utf-8"?>
+<p:sld xmlns:a="http://schemas.openxmlformats.org/drawingml/2006/main" xmlns:p="http://schemas.openxmlformats.org/presentationml/2006/main" xmlns:r="http://schemas.openxmlformats.org/officeDocument/2006/relationships">
+  <p:cSld>
+    <p:spTree>
+      <p:nvGrpSpPr>
+        <p:cNvPr id="1" name=""/>
+        <p:cNvGrpSpPr/>
+        <p:nvPr/>
+      </p:nvGrpSpPr>
+      <p:grpSpPr/>
+      <p:sp>
+        <p:nvSpPr>
+          <p:cNvPr id="2" name="Title 1"/>
+          <p:cNvSpPr>
+            <a:spLocks noGrp="1"/>
+          </p:cNvSpPr>
+          <p:nvPr>
+            <p:ph type="title"/>
+          </p:nvPr>
+        </p:nvSpPr>
+        <p:spPr>
+          <a:xfrm>
+            <a:off x="585216" y="704088"/>
+            <a:ext cx="11027664" cy="1014984"/>
+          </a:xfrm>
+        </p:spPr>
+        <p:txBody>
+          <a:bodyPr wrap="square"/>
+          <a:lstStyle/>
+          <a:p>
+            <a:r>
+              <a:rPr b="0" sz="2250">
+                <a:ea typeface="맑은 고딕"/>
+                <a:cs typeface="맑은 고딕"/>
+              </a:rPr>
+              <a:t>문헌 조사 (1/4, 5/5쪽): 핵융합의 진단-대-진단 추정은 여전히 단순한 구조가 주류이다</a:t>
+            </a:r>
+          </a:p>
+        </p:txBody>
+      </p:sp>
+      <p:sp>
+        <p:nvSpPr>
+          <p:cNvPr id="3" name="TextBox 2"/>
+          <p:cNvSpPr txBox="1"/>
+          <p:nvPr/>
+        </p:nvSpPr>
+        <p:spPr>
+          <a:xfrm>
+            <a:off x="585216" y="2029967"/>
+            <a:ext cx="11027664" cy="297688"/>
+          </a:xfrm>
+          <a:prstGeom prst="rect">
+            <a:avLst/>
+          </a:prstGeom>
+          <a:noFill/>
+        </p:spPr>
+        <p:txBody>
+          <a:bodyPr wrap="square">
+            <a:spAutoFit/>
+          </a:bodyPr>
+          <a:lstStyle/>
+          <a:p>
+            <a:pPr>
+              <a:spcAft>
+                <a:spcPts val="300"/>
+              </a:spcAft>
+            </a:pPr>
+            <a:r>
+              <a:rPr sz="1300">
+                <a:ea typeface="맑은 고딕"/>
+                <a:cs typeface="맑은 고딕"/>
+              </a:rPr>
+              <a:t>장치와 연도를 따로 두었다.</a:t>
+            </a:r>
+          </a:p>
+        </p:txBody>
+      </p:sp>
+      <p:graphicFrame>
+        <p:nvGraphicFramePr>
+          <p:cNvPr id="4" name="Table 3"/>
+          <p:cNvGraphicFramePr>
+            <a:graphicFrameLocks noGrp="1"/>
+          </p:cNvGraphicFramePr>
+          <p:nvPr/>
+        </p:nvGraphicFramePr>
+        <p:xfrm>
+          <a:off x="585216" y="2400807"/>
+          <a:ext cx="11027661" cy="1195324"/>
+        </p:xfrm>
+        <a:graphic>
+          <a:graphicData uri="http://schemas.openxmlformats.org/drawingml/2006/table">
+            <a:tbl>
+              <a:tblPr firstRow="1" bandRow="1">
+                <a:tableStyleId>{5C22544A-7EE6-4342-B048-85BDC9FD1C3A}</a:tableStyleId>
+              </a:tblPr>
+              <a:tblGrid>
+                <a:gridCol w="1552631"/>
+                <a:gridCol w="836032"/>
+                <a:gridCol w="676788"/>
+                <a:gridCol w="1473009"/>
+                <a:gridCol w="2428474"/>
+                <a:gridCol w="1234142"/>
+                <a:gridCol w="2826585"/>
+              </a:tblGrid>
+              <a:tr h="274320">
+                <a:tc>
+                  <a:txBody>
+                    <a:bodyPr wrap="square"/>
+                    <a:lstStyle/>
+                    <a:p>
+                      <a:r>
+                        <a:rPr sz="1100" b="1">
+                          <a:ea typeface="맑은 고딕"/>
+                          <a:cs typeface="맑은 고딕"/>
+                        </a:rPr>
+                        <a:t>논문</a:t>
+                      </a:r>
+                    </a:p>
+                  </a:txBody>
+                  <a:tcPr marL="54864" marR="54864" marT="18288" marB="18288" anchor="ctr"/>
+                </a:tc>
+                <a:tc>
+                  <a:txBody>
+                    <a:bodyPr wrap="square"/>
+                    <a:lstStyle/>
+                    <a:p>
+                      <a:r>
+                        <a:rPr sz="1100" b="1">
+                          <a:ea typeface="맑은 고딕"/>
+                          <a:cs typeface="맑은 고딕"/>
+                        </a:rPr>
+                        <a:t>장치</a:t>
+                      </a:r>
+                    </a:p>
+                  </a:txBody>
+                  <a:tcPr marL="54864" marR="54864" marT="18288" marB="18288" anchor="ctr"/>
+                </a:tc>
+                <a:tc>
+                  <a:txBody>
+                    <a:bodyPr wrap="square"/>
+                    <a:lstStyle/>
+                    <a:p>
+                      <a:r>
+                        <a:rPr sz="1100" b="1">
+                          <a:ea typeface="맑은 고딕"/>
+                          <a:cs typeface="맑은 고딕"/>
+                        </a:rPr>
+                        <a:t>연도</a:t>
+                      </a:r>
+                    </a:p>
+                  </a:txBody>
+                  <a:tcPr marL="54864" marR="54864" marT="18288" marB="18288" anchor="ctr"/>
+                </a:tc>
+                <a:tc>
+                  <a:txBody>
+                    <a:bodyPr wrap="square"/>
+                    <a:lstStyle/>
+                    <a:p>
+                      <a:r>
+                        <a:rPr sz="1100" b="1">
+                          <a:ea typeface="맑은 고딕"/>
+                          <a:cs typeface="맑은 고딕"/>
+                        </a:rPr>
+                        <a:t>문제</a:t>
+                      </a:r>
+                    </a:p>
+                  </a:txBody>
+                  <a:tcPr marL="54864" marR="54864" marT="18288" marB="18288" anchor="ctr"/>
+                </a:tc>
+                <a:tc>
+                  <a:txBody>
+                    <a:bodyPr wrap="square"/>
+                    <a:lstStyle/>
+                    <a:p>
+                      <a:r>
+                        <a:rPr sz="1100" b="1">
+                          <a:ea typeface="맑은 고딕"/>
+                          <a:cs typeface="맑은 고딕"/>
+                        </a:rPr>
+                        <a:t>구조</a:t>
+                      </a:r>
+                    </a:p>
+                  </a:txBody>
+                  <a:tcPr marL="54864" marR="54864" marT="18288" marB="18288" anchor="ctr"/>
+                </a:tc>
+                <a:tc>
+                  <a:txBody>
+                    <a:bodyPr wrap="square"/>
+                    <a:lstStyle/>
+                    <a:p>
+                      <a:r>
+                        <a:rPr sz="1100" b="1">
+                          <a:ea typeface="맑은 고딕"/>
+                          <a:cs typeface="맑은 고딕"/>
+                        </a:rPr>
+                        <a:t>데이터</a:t>
+                      </a:r>
+                    </a:p>
+                  </a:txBody>
+                  <a:tcPr marL="54864" marR="54864" marT="18288" marB="18288" anchor="ctr"/>
+                </a:tc>
+                <a:tc>
+                  <a:txBody>
+                    <a:bodyPr wrap="square"/>
+                    <a:lstStyle/>
+                    <a:p>
+                      <a:r>
+                        <a:rPr sz="1100" b="1">
+                          <a:ea typeface="맑은 고딕"/>
+                          <a:cs typeface="맑은 고딕"/>
+                        </a:rPr>
+                        <a:t>우리에게 의미</a:t>
+                      </a:r>
+                    </a:p>
+                  </a:txBody>
+                  <a:tcPr marL="54864" marR="54864" marT="18288" marB="18288" anchor="ctr"/>
+                </a:tc>
+              </a:tr>
+              <a:tr h="921004">
+                <a:tc>
+                  <a:txBody>
+                    <a:bodyPr wrap="square"/>
+                    <a:lstStyle/>
+                    <a:p>
+                      <a:r>
+                        <a:rPr sz="1100" b="0">
+                          <a:ea typeface="맑은 고딕"/>
+                          <a:cs typeface="맑은 고딕"/>
+                        </a:rPr>
+                        <a:t>TorbeamNN (arXiv 2504.11648)</a:t>
+                      </a:r>
+                    </a:p>
+                  </a:txBody>
+                  <a:tcPr marL="54864" marR="54864" marT="18288" marB="18288" anchor="ctr"/>
+                </a:tc>
+                <a:tc>
+                  <a:txBody>
+                    <a:bodyPr wrap="square"/>
+                    <a:lstStyle/>
+                    <a:p>
+                      <a:r>
+                        <a:rPr sz="1100" b="0">
+                          <a:ea typeface="맑은 고딕"/>
+                          <a:cs typeface="맑은 고딕"/>
+                        </a:rPr>
+                        <a:t>KSTAR</a:t>
+                      </a:r>
+                    </a:p>
+                  </a:txBody>
+                  <a:tcPr marL="54864" marR="54864" marT="18288" marB="18288" anchor="ctr"/>
+                </a:tc>
+                <a:tc>
+                  <a:txBody>
+                    <a:bodyPr wrap="square"/>
+                    <a:lstStyle/>
+                    <a:p>
+                      <a:r>
+                        <a:rPr sz="1100" b="0">
+                          <a:ea typeface="맑은 고딕"/>
+                          <a:cs typeface="맑은 고딕"/>
+                        </a:rPr>
+                        <a:t>2025</a:t>
+                      </a:r>
+                    </a:p>
+                  </a:txBody>
+                  <a:tcPr marL="54864" marR="54864" marT="18288" marB="18288" anchor="ctr"/>
+                </a:tc>
+                <a:tc>
+                  <a:txBody>
+                    <a:bodyPr wrap="square"/>
+                    <a:lstStyle/>
+                    <a:p>
+                      <a:r>
+                        <a:rPr sz="1100" b="0">
+                          <a:ea typeface="맑은 고딕"/>
+                          <a:cs typeface="맑은 고딕"/>
+                        </a:rPr>
+                        <a:t>ECH 거울 조준을 위한 TORBEAM 광선추적 대리모델</a:t>
+                      </a:r>
+                    </a:p>
+                  </a:txBody>
+                  <a:tcPr marL="54864" marR="54864" marT="18288" marB="18288" anchor="ctr"/>
+                </a:tc>
+                <a:tc>
+                  <a:txBody>
+                    <a:bodyPr wrap="square"/>
+                    <a:lstStyle/>
+                    <a:p>
+                      <a:r>
+                        <a:rPr sz="1100" b="0">
+                          <a:ea typeface="맑은 고딕"/>
+                          <a:cs typeface="맑은 고딕"/>
+                        </a:rPr>
+                        <a:t>신경망 대리모델이 실시간 제어계(PCS)에서 동작</a:t>
+                      </a:r>
+                    </a:p>
+                  </a:txBody>
+                  <a:tcPr marL="54864" marR="54864" marT="18288" marB="18288" anchor="ctr"/>
+                </a:tc>
+                <a:tc>
+                  <a:txBody>
+                    <a:bodyPr wrap="square"/>
+                    <a:lstStyle/>
+                    <a:p>
+                      <a:r>
+                        <a:rPr sz="1100" b="0">
+                          <a:ea typeface="맑은 고딕"/>
+                          <a:cs typeface="맑은 고딕"/>
+                        </a:rPr>
+                        <a:t>실시간 구현 대비 100배 이상 가속, 흡수 위치 평균 오차 0.5 cm, 실험 중 검증</a:t>
+                      </a:r>
+                    </a:p>
+                  </a:txBody>
+                  <a:tcPr marL="54864" marR="54864" marT="18288" marB="18288" anchor="ctr"/>
+                </a:tc>
+                <a:tc>
+                  <a:txBody>
+                    <a:bodyPr wrap="square"/>
+                    <a:lstStyle/>
+                    <a:p>
+                      <a:r>
+                        <a:rPr sz="1100" b="0">
+                          <a:ea typeface="맑은 고딕"/>
+                          <a:cs typeface="맑은 고딕"/>
+                        </a:rPr>
+                        <a:t>KSTAR PCS에 신경망이 이미 실장되어 돌고 있다. 우리 배치 주장(§8ah·§8aj)이 가정이 아니라 이 장치의 기존 관행임을 보여준다</a:t>
+                      </a:r>
+                    </a:p>
+                  </a:txBody>
+                  <a:tcPr marL="54864" marR="54864" marT="18288" marB="18288" anchor="ctr"/>
+                </a:tc>
+              </a:tr>
+            </a:tbl>
+          </a:graphicData>
+        </a:graphic>
+      </p:graphicFrame>
+    </p:spTree>
+  </p:cSld>
+  <p:clrMapOvr>
+    <a:masterClrMapping/>
+  </p:clrMapOvr>
+</p:sld>
+</file>
+
+<file path=ppt/slides/slide61.xml><?xml version="1.0" encoding="utf-8"?>
 <p:sld xmlns:a="http://schemas.openxmlformats.org/drawingml/2006/main" xmlns:p="http://schemas.openxmlformats.org/presentationml/2006/main" xmlns:r="http://schemas.openxmlformats.org/officeDocument/2006/relationships">
   <p:cSld>
     <p:spTree>
@@ -28216,7 +29493,7 @@
 </p:sld>
 </file>
 
-<file path=ppt/slides/slide61.xml><?xml version="1.0" encoding="utf-8"?>
+<file path=ppt/slides/slide62.xml><?xml version="1.0" encoding="utf-8"?>
 <p:sld xmlns:a="http://schemas.openxmlformats.org/drawingml/2006/main" xmlns:p="http://schemas.openxmlformats.org/presentationml/2006/main" xmlns:r="http://schemas.openxmlformats.org/officeDocument/2006/relationships">
   <p:cSld>
     <p:spTree>
@@ -28266,7 +29543,7 @@
         </p:nvGraphicFramePr>
         <p:xfrm>
           <a:off x="585216" y="2029967"/>
-          <a:ext cx="11027662" cy="3320288"/>
+          <a:ext cx="11027662" cy="3493516"/>
         </p:xfrm>
         <a:graphic>
           <a:graphicData uri="http://schemas.openxmlformats.org/drawingml/2006/table">
@@ -28609,7 +29886,7 @@
                   <a:tcPr marL="54864" marR="54864" marT="18288" marB="18288" anchor="ctr"/>
                 </a:tc>
               </a:tr>
-              <a:tr h="401320">
+              <a:tr h="574548">
                 <a:tc>
                   <a:txBody>
                     <a:bodyPr wrap="square"/>
@@ -28652,39 +29929,39 @@
                           <a:ea typeface="맑은 고딕"/>
                           <a:cs typeface="맑은 고딕"/>
                         </a:rPr>
-                        <a:t>가우시안 NLL 병리, β-NLL, Toto의 Student-t</a:t>
-                      </a:r>
-                    </a:p>
-                  </a:txBody>
-                  <a:tcPr marL="54864" marR="54864" marT="18288" marB="18288" anchor="ctr"/>
-                </a:tc>
-                <a:tc>
-                  <a:txBody>
-                    <a:bodyPr wrap="square"/>
-                    <a:lstStyle/>
-                    <a:p>
-                      <a:r>
-                        <a:rPr sz="1100" b="0">
-                          <a:ea typeface="맑은 고딕"/>
-                          <a:cs typeface="맑은 고딕"/>
-                        </a:rPr>
-                        <a:t>예측 분산이 평균 그래디언트를 오염시키므로 stop-grad나 별도 헤드 필요</a:t>
-                      </a:r>
-                    </a:p>
-                  </a:txBody>
-                  <a:tcPr marL="54864" marR="54864" marT="18288" marB="18288" anchor="ctr"/>
-                </a:tc>
-                <a:tc>
-                  <a:txBody>
-                    <a:bodyPr wrap="square"/>
-                    <a:lstStyle/>
-                    <a:p>
-                      <a:r>
-                        <a:rPr sz="1100" b="0">
-                          <a:ea typeface="맑은 고딕"/>
-                          <a:cs typeface="맑은 고딕"/>
-                        </a:rPr>
-                        <a:t>§8aq가 지목한 유일한 미개봉 축. conformal은 사후 구간이지 학습 손실이 아님</a:t>
+                        <a:t>가우시안 NLL 병리, β-NLL, Toto의 Student-t, 이분산 신경망 대리모델(Thomson, 2026)</a:t>
+                      </a:r>
+                    </a:p>
+                  </a:txBody>
+                  <a:tcPr marL="54864" marR="54864" marT="18288" marB="18288" anchor="ctr"/>
+                </a:tc>
+                <a:tc>
+                  <a:txBody>
+                    <a:bodyPr wrap="square"/>
+                    <a:lstStyle/>
+                    <a:p>
+                      <a:r>
+                        <a:rPr sz="1100" b="0">
+                          <a:ea typeface="맑은 고딕"/>
+                          <a:cs typeface="맑은 고딕"/>
+                        </a:rPr>
+                        <a:t>예측 분산이 평균 그래디언트를 오염시키므로 stop-grad나 별도 헤드 필요. 핵융합 분광에서는 이중 헤드 이분산이 등분산 대비 RMSE 20 % 이상 개선</a:t>
+                      </a:r>
+                    </a:p>
+                  </a:txBody>
+                  <a:tcPr marL="54864" marR="54864" marT="18288" marB="18288" anchor="ctr"/>
+                </a:tc>
+                <a:tc>
+                  <a:txBody>
+                    <a:bodyPr wrap="square"/>
+                    <a:lstStyle/>
+                    <a:p>
+                      <a:r>
+                        <a:rPr sz="1100" b="0">
+                          <a:ea typeface="맑은 고딕"/>
+                          <a:cs typeface="맑은 고딕"/>
+                        </a:rPr>
+                        <a:t>§8aq가 지목한 유일한 미개봉 축이고 이제 핵융합 도메인 선례도 있다. conformal은 사후 구간이지 학습 손실이 아님</a:t>
                       </a:r>
                     </a:p>
                   </a:txBody>
@@ -28785,7 +30062,7 @@
 </p:sld>
 </file>
 
-<file path=ppt/slides/slide62.xml><?xml version="1.0" encoding="utf-8"?>
+<file path=ppt/slides/slide63.xml><?xml version="1.0" encoding="utf-8"?>
 <p:sld xmlns:a="http://schemas.openxmlformats.org/drawingml/2006/main" xmlns:p="http://schemas.openxmlformats.org/presentationml/2006/main" xmlns:r="http://schemas.openxmlformats.org/officeDocument/2006/relationships">
   <p:cSld>
     <p:spTree>
@@ -29473,7 +30750,7 @@
 </p:sld>
 </file>
 
-<file path=ppt/slides/slide63.xml><?xml version="1.0" encoding="utf-8"?>
+<file path=ppt/slides/slide64.xml><?xml version="1.0" encoding="utf-8"?>
 <p:sld xmlns:a="http://schemas.openxmlformats.org/drawingml/2006/main" xmlns:p="http://schemas.openxmlformats.org/presentationml/2006/main" xmlns:r="http://schemas.openxmlformats.org/officeDocument/2006/relationships">
   <p:cSld>
     <p:spTree>
@@ -30012,23 +31289,23 @@
                           <a:ea typeface="맑은 고딕"/>
                           <a:cs typeface="맑은 고딕"/>
                         </a:rPr>
-                        <a:t>V_rot 입력 확장: 원시 kHz Mirnov 특징(B.6 A1) · NBI 토크 채널 · 도플러 분광 입력</a:t>
-                      </a:r>
-                    </a:p>
-                  </a:txBody>
-                  <a:tcPr marL="54864" marR="54864" marT="18288" marB="18288" anchor="ctr"/>
-                </a:tc>
-                <a:tc>
-                  <a:txBody>
-                    <a:bodyPr wrap="square"/>
-                    <a:lstStyle/>
-                    <a:p>
-                      <a:r>
-                        <a:rPr sz="1100" b="0">
-                          <a:ea typeface="맑은 고딕"/>
-                          <a:cs typeface="맑은 고딕"/>
-                        </a:rPr>
-                        <a:t>EAST XCS · PanoMHD · 합성 진단 증강</a:t>
+                        <a:t>V_rot 입력 확장: 원시 kHz Mirnov 특징(B.6 A1) · NBI 토크 채널 · KSTAR XICS 회전 채널</a:t>
+                      </a:r>
+                    </a:p>
+                  </a:txBody>
+                  <a:tcPr marL="54864" marR="54864" marT="18288" marB="18288" anchor="ctr"/>
+                </a:tc>
+                <a:tc>
+                  <a:txBody>
+                    <a:bodyPr wrap="square"/>
+                    <a:lstStyle/>
+                    <a:p>
+                      <a:r>
+                        <a:rPr sz="1100" b="0">
+                          <a:ea typeface="맑은 고딕"/>
+                          <a:cs typeface="맑은 고딕"/>
+                        </a:rPr>
+                        <a:t>EAST XCS · XICS↔CES 교차 검증 · PanoMHD</a:t>
                       </a:r>
                     </a:p>
                   </a:txBody>
@@ -30243,7 +31520,7 @@
 </p:sld>
 </file>
 
-<file path=ppt/slides/slide64.xml><?xml version="1.0" encoding="utf-8"?>
+<file path=ppt/slides/slide65.xml><?xml version="1.0" encoding="utf-8"?>
 <p:sld xmlns:a="http://schemas.openxmlformats.org/drawingml/2006/main" xmlns:p="http://schemas.openxmlformats.org/presentationml/2006/main" xmlns:r="http://schemas.openxmlformats.org/officeDocument/2006/relationships">
   <p:cSld>
     <p:spTree>
